--- a/exec-deck/output/H&L Weekly Update - WC 14 Sep 2026.pptx
+++ b/exec-deck/output/H&L Weekly Update - WC 14 Sep 2026.pptx
@@ -4686,7 +4686,7 @@
                 <a:ea typeface="Poppins" pitchFamily="34" charset="-122"/>
                 <a:cs typeface="Poppins" pitchFamily="34" charset="-120"/>
               </a:rPr>
-              <a:t>Generated: 19 Sep 2026</a:t>
+              <a:t>Generated: 21 Sep 2026</a:t>
             </a:r>
             <a:endParaRPr lang="en-US" sz="1100" dirty="0"/>
           </a:p>
@@ -22506,7 +22506,7 @@
                 <a:ea typeface="Poppins" pitchFamily="34" charset="-122"/>
                 <a:cs typeface="Poppins" pitchFamily="34" charset="-120"/>
               </a:rPr>
-              <a:t>IT · capture 11 Sep — this week's capture pending</a:t>
+              <a:t>IT · weekly capture</a:t>
             </a:r>
             <a:endParaRPr lang="en-US" sz="1050" dirty="0"/>
           </a:p>
@@ -25692,7 +25692,7 @@
                 <a:ea typeface="Poppins" pitchFamily="34" charset="-122"/>
                 <a:cs typeface="Poppins" pitchFamily="34" charset="-120"/>
               </a:rPr>
-              <a:t>Capture lag: numbers are the 11 Sep Friday capture — the 18 Sep capture wasn't taken during cutover week; deltas resume next drop.</a:t>
+              <a:t>30-day Cowork sessions: engineering shows zeros (Hawraa, Chris, Eric, Tony, Brad, Nidhi, Rahul) — engineers live in Claude Code; Cowork is the ops/leadership surface.</a:t>
             </a:r>
             <a:endParaRPr lang="en-US" sz="900" dirty="0"/>
           </a:p>
@@ -25706,8 +25706,8 @@
         </p:nvSpPr>
         <p:spPr>
           <a:xfrm>
-            <a:off x="9202522" y="6510528"/>
-            <a:ext cx="2574950" cy="256032"/>
+            <a:off x="9326880" y="6510528"/>
+            <a:ext cx="2450592" cy="256032"/>
           </a:xfrm>
           <a:prstGeom prst="roundRect">
             <a:avLst>
@@ -25728,8 +25728,8 @@
         </p:nvSpPr>
         <p:spPr>
           <a:xfrm>
-            <a:off x="9202522" y="6510528"/>
-            <a:ext cx="2574950" cy="256032"/>
+            <a:off x="9326880" y="6510528"/>
+            <a:ext cx="2450592" cy="256032"/>
           </a:xfrm>
           <a:prstGeom prst="rect">
             <a:avLst/>
@@ -25753,7 +25753,7 @@
                 <a:ea typeface="Poppins" pitchFamily="34" charset="-122"/>
                 <a:cs typeface="Poppins" pitchFamily="34" charset="-120"/>
               </a:rPr>
-              <a:t>Source: Claude Admin (capture 11 Sep)</a:t>
+              <a:t>Source: Claude Admin weekly capture</a:t>
             </a:r>
             <a:endParaRPr lang="en-US" sz="700" dirty="0"/>
           </a:p>
@@ -30970,7 +30970,7 @@
             </a:avLst>
           </a:prstGeom>
           <a:solidFill>
-            <a:srgbClr val="C88A2E"/>
+            <a:srgbClr val="8CA0AC"/>
           </a:solidFill>
           <a:ln/>
           <a:effectLst>
@@ -31015,7 +31015,7 @@
                 <a:ea typeface="Poppins" pitchFamily="34" charset="-122"/>
                 <a:cs typeface="Poppins" pitchFamily="34" charset="-120"/>
               </a:rPr>
-              <a:t>LAGGED</a:t>
+              <a:t>AS BEFORE</a:t>
             </a:r>
             <a:endParaRPr lang="en-US" sz="850" dirty="0"/>
           </a:p>
@@ -31054,7 +31054,7 @@
                 <a:ea typeface="Poppins" pitchFamily="34" charset="-122"/>
                 <a:cs typeface="Poppins" pitchFamily="34" charset="-120"/>
               </a:rPr>
-              <a:t>Latest extract covers 7–13 Sep. Movement register (new-MRR line of record) refresh pending post-cutover.</a:t>
+              <a:t>Weekly extracts current to 20 Sep (received 21 Sep). Movement register (new-MRR line of record) refresh still pending.</a:t>
             </a:r>
             <a:endParaRPr lang="en-US" sz="730" dirty="0"/>
           </a:p>
@@ -31273,7 +31273,7 @@
                 <a:ea typeface="Poppins" pitchFamily="34" charset="-122"/>
                 <a:cs typeface="Poppins" pitchFamily="34" charset="-120"/>
               </a:rPr>
-              <a:t>GTM tracker current; Claude admin capture 11 Sep; ValPay export as at 6 Sep — weekly drop pending.</a:t>
+              <a:t>GTM tracker current; Claude admin weekly capture received; ValPay export as at 6 Sep — weekly drop pending.</a:t>
             </a:r>
             <a:endParaRPr lang="en-US" sz="730" dirty="0"/>
           </a:p>
@@ -31729,7 +31729,7 @@
                 <a:ea typeface="Poppins" pitchFamily="34" charset="-122"/>
                 <a:cs typeface="Poppins" pitchFamily="34" charset="-120"/>
               </a:rPr>
-              <a:t>hardware $373k = 52% of $715k vs 89% pace; extract week +$38k; new-MRR register refresh pending</a:t>
+              <a:t>hardware $410k = 57% of $715k vs 89% pace; this week +$38k gross (HW discounts -$10k); new-MRR register refresh pending</a:t>
             </a:r>
             <a:endParaRPr lang="en-US" sz="900" dirty="0"/>
           </a:p>
@@ -33501,7 +33501,7 @@
                 <a:ea typeface="Poppins" pitchFamily="34" charset="-122"/>
                 <a:cs typeface="Poppins" pitchFamily="34" charset="-120"/>
               </a:rPr>
-              <a:t>$373k</a:t>
+              <a:t>$410k</a:t>
             </a:r>
             <a:pPr indent="0" marL="0">
               <a:buNone/>
@@ -33554,7 +33554,7 @@
                 <a:ea typeface="Poppins" pitchFamily="34" charset="-122"/>
                 <a:cs typeface="Poppins" pitchFamily="34" charset="-120"/>
               </a:rPr>
-              <a:t>▲ +$38k extract wk</a:t>
+              <a:t>▲ +$38k this wk</a:t>
             </a:r>
             <a:endParaRPr lang="en-US" sz="950" dirty="0"/>
           </a:p>
@@ -33591,7 +33591,7 @@
         <p:spPr>
           <a:xfrm>
             <a:off x="6428232" y="1901952"/>
-            <a:ext cx="2187245" cy="100584"/>
+            <a:ext cx="2397557" cy="100584"/>
           </a:xfrm>
           <a:prstGeom prst="roundRect">
             <a:avLst>
@@ -33657,7 +33657,7 @@
                 <a:ea typeface="Poppins" pitchFamily="34" charset="-122"/>
                 <a:cs typeface="Poppins" pitchFamily="34" charset="-120"/>
               </a:rPr>
-              <a:t>52%</a:t>
+              <a:t>57%</a:t>
             </a:r>
             <a:pPr algn="r" indent="0" marL="0">
               <a:buNone/>
@@ -33807,7 +33807,7 @@
         <p:spPr>
           <a:xfrm>
             <a:off x="4617720" y="2724912"/>
-            <a:ext cx="3291840" cy="201168"/>
+            <a:ext cx="3383280" cy="201168"/>
           </a:xfrm>
           <a:prstGeom prst="rect">
             <a:avLst/>
@@ -33831,7 +33831,7 @@
                 <a:ea typeface="Poppins" pitchFamily="34" charset="-122"/>
                 <a:cs typeface="Poppins" pitchFamily="34" charset="-120"/>
               </a:rPr>
-              <a:t>HARDWARE ($/qtr) · incl. extract wk 7–13 Sep</a:t>
+              <a:t>HARDWARE ($/qtr) · extracts to 20 Sep · Δ wk = 14–20 Sep</a:t>
             </a:r>
             <a:endParaRPr lang="en-US" sz="800" dirty="0"/>
           </a:p>
@@ -34461,7 +34461,7 @@
                 <a:ea typeface="Poppins" pitchFamily="34" charset="-122"/>
                 <a:cs typeface="Poppins" pitchFamily="34" charset="-120"/>
               </a:rPr>
-              <a:t>$47k</a:t>
+              <a:t>$52k</a:t>
             </a:r>
             <a:endParaRPr lang="en-US" sz="850" dirty="0"/>
           </a:p>
@@ -34498,7 +34498,7 @@
         <p:spPr>
           <a:xfrm>
             <a:off x="6044184" y="3294126"/>
-            <a:ext cx="248717" cy="100584"/>
+            <a:ext cx="270662" cy="100584"/>
           </a:xfrm>
           <a:prstGeom prst="roundRect">
             <a:avLst>
@@ -34564,7 +34564,7 @@
                 <a:ea typeface="Poppins" pitchFamily="34" charset="-122"/>
                 <a:cs typeface="Poppins" pitchFamily="34" charset="-120"/>
               </a:rPr>
-              <a:t>34%</a:t>
+              <a:t>37%</a:t>
             </a:r>
             <a:endParaRPr lang="en-US" sz="800" dirty="0"/>
           </a:p>
@@ -34603,7 +34603,7 @@
                 <a:ea typeface="Poppins" pitchFamily="34" charset="-122"/>
                 <a:cs typeface="Poppins" pitchFamily="34" charset="-120"/>
               </a:rPr>
-              <a:t>+2k</a:t>
+              <a:t>+4k</a:t>
             </a:r>
             <a:endParaRPr lang="en-US" sz="850" dirty="0"/>
           </a:p>
@@ -34921,7 +34921,7 @@
                 <a:ea typeface="Poppins" pitchFamily="34" charset="-122"/>
                 <a:cs typeface="Poppins" pitchFamily="34" charset="-120"/>
               </a:rPr>
-              <a:t>$76k</a:t>
+              <a:t>$78k</a:t>
             </a:r>
             <a:endParaRPr lang="en-US" sz="850" dirty="0"/>
           </a:p>
@@ -34958,7 +34958,7 @@
         <p:spPr>
           <a:xfrm>
             <a:off x="6044184" y="3609594"/>
-            <a:ext cx="387706" cy="100584"/>
+            <a:ext cx="395021" cy="100584"/>
           </a:xfrm>
           <a:prstGeom prst="roundRect">
             <a:avLst>
@@ -35024,7 +35024,7 @@
                 <a:ea typeface="Poppins" pitchFamily="34" charset="-122"/>
                 <a:cs typeface="Poppins" pitchFamily="34" charset="-120"/>
               </a:rPr>
-              <a:t>53%</a:t>
+              <a:t>54%</a:t>
             </a:r>
             <a:endParaRPr lang="en-US" sz="800" dirty="0"/>
           </a:p>
@@ -35063,7 +35063,7 @@
                 <a:ea typeface="Poppins" pitchFamily="34" charset="-122"/>
                 <a:cs typeface="Poppins" pitchFamily="34" charset="-120"/>
               </a:rPr>
-              <a:t>+21k</a:t>
+              <a:t>+2k</a:t>
             </a:r>
             <a:endParaRPr lang="en-US" sz="850" dirty="0"/>
           </a:p>
@@ -35381,7 +35381,7 @@
                 <a:ea typeface="Poppins" pitchFamily="34" charset="-122"/>
                 <a:cs typeface="Poppins" pitchFamily="34" charset="-120"/>
               </a:rPr>
-              <a:t>$46k</a:t>
+              <a:t>$51k</a:t>
             </a:r>
             <a:endParaRPr lang="en-US" sz="850" dirty="0"/>
           </a:p>
@@ -35418,7 +35418,7 @@
         <p:spPr>
           <a:xfrm>
             <a:off x="6044184" y="3925062"/>
-            <a:ext cx="204826" cy="100584"/>
+            <a:ext cx="226771" cy="100584"/>
           </a:xfrm>
           <a:prstGeom prst="roundRect">
             <a:avLst>
@@ -35484,7 +35484,7 @@
                 <a:ea typeface="Poppins" pitchFamily="34" charset="-122"/>
                 <a:cs typeface="Poppins" pitchFamily="34" charset="-120"/>
               </a:rPr>
-              <a:t>28%</a:t>
+              <a:t>31%</a:t>
             </a:r>
             <a:endParaRPr lang="en-US" sz="800" dirty="0"/>
           </a:p>
@@ -35523,7 +35523,7 @@
                 <a:ea typeface="Poppins" pitchFamily="34" charset="-122"/>
                 <a:cs typeface="Poppins" pitchFamily="34" charset="-120"/>
               </a:rPr>
-              <a:t>+2k</a:t>
+              <a:t>+5k</a:t>
             </a:r>
             <a:endParaRPr lang="en-US" sz="850" dirty="0"/>
           </a:p>
@@ -35841,7 +35841,7 @@
                 <a:ea typeface="Poppins" pitchFamily="34" charset="-122"/>
                 <a:cs typeface="Poppins" pitchFamily="34" charset="-120"/>
               </a:rPr>
-              <a:t>$116k</a:t>
+              <a:t>$143k</a:t>
             </a:r>
             <a:endParaRPr lang="en-US" sz="850" dirty="0"/>
           </a:p>
@@ -35878,7 +35878,7 @@
         <p:spPr>
           <a:xfrm>
             <a:off x="6044184" y="4240530"/>
-            <a:ext cx="395021" cy="100584"/>
+            <a:ext cx="490118" cy="100584"/>
           </a:xfrm>
           <a:prstGeom prst="roundRect">
             <a:avLst>
@@ -35944,7 +35944,7 @@
                 <a:ea typeface="Poppins" pitchFamily="34" charset="-122"/>
                 <a:cs typeface="Poppins" pitchFamily="34" charset="-120"/>
               </a:rPr>
-              <a:t>54%</a:t>
+              <a:t>67%</a:t>
             </a:r>
             <a:endParaRPr lang="en-US" sz="800" dirty="0"/>
           </a:p>
@@ -35983,7 +35983,7 @@
                 <a:ea typeface="Poppins" pitchFamily="34" charset="-122"/>
                 <a:cs typeface="Poppins" pitchFamily="34" charset="-120"/>
               </a:rPr>
-              <a:t>+12k</a:t>
+              <a:t>+27k</a:t>
             </a:r>
             <a:endParaRPr lang="en-US" sz="850" dirty="0"/>
           </a:p>
@@ -36437,13 +36437,13 @@
             <a:r>
               <a:rPr lang="en-US" sz="850" b="1" dirty="0">
                 <a:solidFill>
-                  <a:srgbClr val="3D8F5F"/>
-                </a:solidFill>
-                <a:latin typeface="Poppins" pitchFamily="34" charset="0"/>
-                <a:ea typeface="Poppins" pitchFamily="34" charset="-122"/>
-                <a:cs typeface="Poppins" pitchFamily="34" charset="-120"/>
-              </a:rPr>
-              <a:t>+1k</a:t>
+                  <a:srgbClr val="8FA1AC"/>
+                </a:solidFill>
+                <a:latin typeface="Poppins" pitchFamily="34" charset="0"/>
+                <a:ea typeface="Poppins" pitchFamily="34" charset="-122"/>
+                <a:cs typeface="Poppins" pitchFamily="34" charset="-120"/>
+              </a:rPr>
+              <a:t>+0k</a:t>
             </a:r>
             <a:endParaRPr lang="en-US" sz="850" dirty="0"/>
           </a:p>
@@ -37450,7 +37450,7 @@
                 <a:ea typeface="Poppins" pitchFamily="34" charset="-122"/>
                 <a:cs typeface="Poppins" pitchFamily="34" charset="-120"/>
               </a:rPr>
-              <a:t>$373k</a:t>
+              <a:t>$410k</a:t>
             </a:r>
             <a:endParaRPr lang="en-US" sz="850" dirty="0"/>
           </a:p>
@@ -37489,7 +37489,7 @@
                 <a:ea typeface="Poppins" pitchFamily="34" charset="-122"/>
                 <a:cs typeface="Poppins" pitchFamily="34" charset="-120"/>
               </a:rPr>
-              <a:t>49%</a:t>
+              <a:t>54%</a:t>
             </a:r>
             <a:endParaRPr lang="en-US" sz="850" dirty="0"/>
           </a:p>
@@ -37688,7 +37688,7 @@
                 <a:ea typeface="Poppins" pitchFamily="34" charset="-122"/>
                 <a:cs typeface="Poppins" pitchFamily="34" charset="-120"/>
               </a:rPr>
-              <a:t>Hardware is $373k (52%) </a:t>
+              <a:t>Hardware is $410k (57%) </a:t>
             </a:r>
             <a:pPr indent="0" marL="0">
               <a:spcAft>
@@ -37705,7 +37705,7 @@
                 <a:ea typeface="Poppins" pitchFamily="34" charset="-122"/>
                 <a:cs typeface="Poppins" pitchFamily="34" charset="-120"/>
               </a:rPr>
-              <a:t>against an 89% pace mark. The 7–13 Sep extract added $38k — Brett +$21k, Jasmine +$12k.</a:t>
+              <a:t>against an 89% pace mark. This week's extract (14–20 Sep) added $38k gross — Jasmine +$27k, Bradford +$5k, Bjorn +$4k; the prior (7–13 Sep) week's $38k closed the skipped WC 7 Sep deck.</a:t>
             </a:r>
             <a:endParaRPr lang="en-US" sz="900" dirty="0"/>
           </a:p>
@@ -37736,7 +37736,7 @@
                 <a:ea typeface="Poppins" pitchFamily="34" charset="-122"/>
                 <a:cs typeface="Poppins" pitchFamily="34" charset="-120"/>
               </a:rPr>
-              <a:t>New MRR is the gap in this week's picture: </a:t>
+              <a:t>Watch the discounts: </a:t>
             </a:r>
             <a:pPr indent="0" marL="0">
               <a:spcAft>
@@ -37753,7 +37753,7 @@
                 <a:ea typeface="Poppins" pitchFamily="34" charset="-122"/>
                 <a:cs typeface="Poppins" pitchFamily="34" charset="-120"/>
               </a:rPr>
-              <a:t>the movement register (the line of record) hasn't run since 6 Sep. Extract shows $871 of new S/W subscription billing in 7–13 Sep — a different measure, shown for direction only.</a:t>
+              <a:t>hardware discounts ran -$10.2k this week (-$10.0k on Jasmine's deals) vs -$2.2k last week — gross $37.6k nets to $27.4k.</a:t>
             </a:r>
             <a:endParaRPr lang="en-US" sz="900" dirty="0"/>
           </a:p>
@@ -37784,7 +37784,7 @@
                 <a:ea typeface="Poppins" pitchFamily="34" charset="-122"/>
                 <a:cs typeface="Poppins" pitchFamily="34" charset="-120"/>
               </a:rPr>
-              <a:t>No extract yet for 14–20 Sep </a:t>
+              <a:t>New MRR is the remaining gap: </a:t>
             </a:r>
             <a:pPr indent="0" marL="0">
               <a:spcAft>
@@ -37801,7 +37801,7 @@
                 <a:ea typeface="Poppins" pitchFamily="34" charset="-122"/>
                 <a:cs typeface="Poppins" pitchFamily="34" charset="-120"/>
               </a:rPr>
-              <a:t>— Sysnet drop lands next week; this slide bridges the skipped WC 7 Sep deck.</a:t>
+              <a:t>the movement register (the line of record) hasn't rerun since 6 Sep; this week's extract shows a net -$148 S/W subscription movement (credits), a different measure shown for direction only.</a:t>
             </a:r>
             <a:endParaRPr lang="en-US" sz="900" dirty="0"/>
           </a:p>
@@ -37835,7 +37835,7 @@
                 <a:ea typeface="Poppins" pitchFamily="34" charset="-122"/>
                 <a:cs typeface="Poppins" pitchFamily="34" charset="-120"/>
               </a:rPr>
-              <a:t>HW = commissionable only · attainment = invoiced, never closed-won · pace = day 82 of 92 in Q3.</a:t>
+              <a:t>HW = commissionable only, gross of discounts · attainment = invoiced, never closed-won · pace = day 82 of 92 in Q3.</a:t>
             </a:r>
             <a:endParaRPr lang="en-US" sz="900" dirty="0"/>
           </a:p>
@@ -37849,8 +37849,8 @@
         </p:nvSpPr>
         <p:spPr>
           <a:xfrm>
-            <a:off x="6901891" y="6510528"/>
-            <a:ext cx="4875581" cy="256032"/>
+            <a:off x="7026250" y="6510528"/>
+            <a:ext cx="4751222" cy="256032"/>
           </a:xfrm>
           <a:prstGeom prst="roundRect">
             <a:avLst>
@@ -37871,8 +37871,8 @@
         </p:nvSpPr>
         <p:spPr>
           <a:xfrm>
-            <a:off x="6901891" y="6510528"/>
-            <a:ext cx="4875581" cy="256032"/>
+            <a:off x="7026250" y="6510528"/>
+            <a:ext cx="4751222" cy="256032"/>
           </a:xfrm>
           <a:prstGeom prst="rect">
             <a:avLst/>
@@ -37896,7 +37896,7 @@
                 <a:ea typeface="Poppins" pitchFamily="34" charset="-122"/>
                 <a:cs typeface="Poppins" pitchFamily="34" charset="-120"/>
               </a:rPr>
-              <a:t>Source: Sysnet extract 7–13 Sep + sales targets · register refresh pending</a:t>
+              <a:t>Source: Sysnet extracts to 20 Sep + sales targets · MRR register pending</a:t>
             </a:r>
             <a:endParaRPr lang="en-US" sz="700" dirty="0"/>
           </a:p>

--- a/exec-deck/output/H&L Weekly Update - WC 14 Sep 2026.pptx
+++ b/exec-deck/output/H&L Weekly Update - WC 14 Sep 2026.pptx
@@ -32686,7 +32686,7 @@
                 <a:ea typeface="Poppins" pitchFamily="34" charset="-122"/>
                 <a:cs typeface="Poppins" pitchFamily="34" charset="-120"/>
               </a:rPr>
-              <a:t>New Products — target vs traction</a:t>
+              <a:t>AI-Infused Products — pipeline &amp; conversion</a:t>
             </a:r>
             <a:endParaRPr lang="en-US" sz="950" dirty="0"/>
           </a:p>
@@ -42768,7 +42768,7 @@
                 <a:ea typeface="Poppins" pitchFamily="34" charset="-122"/>
                 <a:cs typeface="Poppins" pitchFamily="34" charset="-120"/>
               </a:rPr>
-              <a:t>New Products — Target vs Traction</a:t>
+              <a:t>AI-Infused Products — Pipeline</a:t>
             </a:r>
             <a:endParaRPr lang="en-US" sz="2300" dirty="0"/>
           </a:p>
@@ -43030,12 +43030,12 @@
         </p:nvSpPr>
         <p:spPr>
           <a:xfrm>
-            <a:off x="411480" y="1005840"/>
-            <a:ext cx="5532120" cy="1170432"/>
+            <a:off x="411480" y="987552"/>
+            <a:ext cx="2697480" cy="1097280"/>
           </a:xfrm>
           <a:prstGeom prst="roundRect">
             <a:avLst>
-              <a:gd name="adj" fmla="val 5469"/>
+              <a:gd name="adj" fmla="val 5833"/>
             </a:avLst>
           </a:prstGeom>
           <a:solidFill>
@@ -43059,8 +43059,8 @@
         </p:nvSpPr>
         <p:spPr>
           <a:xfrm>
-            <a:off x="594360" y="1097280"/>
-            <a:ext cx="5120640" cy="237744"/>
+            <a:off x="576072" y="1078992"/>
+            <a:ext cx="2368296" cy="274320"/>
           </a:xfrm>
           <a:prstGeom prst="rect">
             <a:avLst/>
@@ -43084,7 +43084,7 @@
                 <a:ea typeface="Poppins" pitchFamily="34" charset="-122"/>
                 <a:cs typeface="Poppins" pitchFamily="34" charset="-120"/>
               </a:rPr>
-              <a:t>NEW-PRODUCT MRR — SEPTEMBER · committed $30k/mo</a:t>
+              <a:t>OPEN PIPELINE</a:t>
             </a:r>
             <a:endParaRPr lang="en-US" sz="950" dirty="0"/>
           </a:p>
@@ -43098,8 +43098,8 @@
         </p:nvSpPr>
         <p:spPr>
           <a:xfrm>
-            <a:off x="594360" y="1335024"/>
-            <a:ext cx="4023360" cy="384048"/>
+            <a:off x="557784" y="1261872"/>
+            <a:ext cx="2404872" cy="310896"/>
           </a:xfrm>
           <a:prstGeom prst="rect">
             <a:avLst/>
@@ -43117,19 +43117,44 @@
             <a:r>
               <a:rPr lang="en-US" sz="2400" b="1" dirty="0">
                 <a:solidFill>
-                  <a:srgbClr val="B4552D"/>
-                </a:solidFill>
-                <a:latin typeface="Poppins" pitchFamily="34" charset="0"/>
-                <a:ea typeface="Poppins" pitchFamily="34" charset="-122"/>
-                <a:cs typeface="Poppins" pitchFamily="34" charset="-120"/>
-              </a:rPr>
-              <a:t>$0</a:t>
-            </a:r>
+                  <a:srgbClr val="12293A"/>
+                </a:solidFill>
+                <a:latin typeface="Poppins" pitchFamily="34" charset="0"/>
+                <a:ea typeface="Poppins" pitchFamily="34" charset="-122"/>
+                <a:cs typeface="Poppins" pitchFamily="34" charset="-120"/>
+              </a:rPr>
+              <a:t>US$2,103</a:t>
+            </a:r>
+            <a:endParaRPr lang="en-US" sz="2400" dirty="0"/>
+          </a:p>
+        </p:txBody>
+      </p:sp>
+      <p:sp>
+        <p:nvSpPr>
+          <p:cNvPr id="18" name="Text 16"/>
+          <p:cNvSpPr txBox="1"/>
+          <p:nvPr/>
+        </p:nvSpPr>
+        <p:spPr>
+          <a:xfrm>
+            <a:off x="576072" y="1609344"/>
+            <a:ext cx="2368296" cy="420624"/>
+          </a:xfrm>
+          <a:prstGeom prst="rect">
+            <a:avLst/>
+          </a:prstGeom>
+          <a:noFill/>
+          <a:ln/>
+        </p:spPr>
+        <p:txBody>
+          <a:bodyPr wrap="square" lIns="0" tIns="0" rIns="0" bIns="0" rtlCol="0" anchor="t"/>
+          <a:lstStyle/>
+          <a:p>
             <a:pPr indent="0" marL="0">
               <a:buNone/>
             </a:pPr>
             <a:r>
-              <a:rPr lang="en-US" sz="950" dirty="0">
+              <a:rPr lang="en-US" sz="780" dirty="0">
                 <a:solidFill>
                   <a:srgbClr val="5E7280"/>
                 </a:solidFill>
@@ -43137,48 +43162,9 @@
                 <a:ea typeface="Poppins" pitchFamily="34" charset="-122"/>
                 <a:cs typeface="Poppins" pitchFamily="34" charset="-120"/>
               </a:rPr>
-              <a:t>  recorded of $30k committed</a:t>
-            </a:r>
-            <a:endParaRPr lang="en-US" sz="2400" dirty="0"/>
-          </a:p>
-        </p:txBody>
-      </p:sp>
-      <p:sp>
-        <p:nvSpPr>
-          <p:cNvPr id="18" name="Text 16"/>
-          <p:cNvSpPr txBox="1"/>
-          <p:nvPr/>
-        </p:nvSpPr>
-        <p:spPr>
-          <a:xfrm>
-            <a:off x="3931920" y="1371600"/>
-            <a:ext cx="1920240" cy="310896"/>
-          </a:xfrm>
-          <a:prstGeom prst="rect">
-            <a:avLst/>
-          </a:prstGeom>
-          <a:noFill/>
-          <a:ln/>
-        </p:spPr>
-        <p:txBody>
-          <a:bodyPr wrap="square" lIns="0" tIns="0" rIns="0" bIns="0" rtlCol="0" anchor="ctr"/>
-          <a:lstStyle/>
-          <a:p>
-            <a:pPr algn="r" indent="0" marL="0">
-              <a:buNone/>
-            </a:pPr>
-            <a:r>
-              <a:rPr lang="en-US" sz="850" b="1" dirty="0">
-                <a:solidFill>
-                  <a:srgbClr val="3D8F5F"/>
-                </a:solidFill>
-                <a:latin typeface="Poppins" pitchFamily="34" charset="0"/>
-                <a:ea typeface="Poppins" pitchFamily="34" charset="-122"/>
-                <a:cs typeface="Poppins" pitchFamily="34" charset="-120"/>
-              </a:rPr>
-              <a:t>▲ +10 Roam deals this wk</a:t>
-            </a:r>
-            <a:endParaRPr lang="en-US" sz="850" dirty="0"/>
+              <a:t>A$2,953 · 28 deals not yet ordered</a:t>
+            </a:r>
+            <a:endParaRPr lang="en-US" sz="780" dirty="0"/>
           </a:p>
         </p:txBody>
       </p:sp>
@@ -43190,129 +43176,12 @@
         </p:nvSpPr>
         <p:spPr>
           <a:xfrm>
-            <a:off x="594360" y="1901952"/>
-            <a:ext cx="4206240" cy="100584"/>
+            <a:off x="3291840" y="987552"/>
+            <a:ext cx="2697480" cy="1097280"/>
           </a:xfrm>
           <a:prstGeom prst="roundRect">
             <a:avLst>
-              <a:gd name="adj" fmla="val 45455"/>
-            </a:avLst>
-          </a:prstGeom>
-          <a:solidFill>
-            <a:srgbClr val="E2EAEE"/>
-          </a:solidFill>
-          <a:ln/>
-        </p:spPr>
-      </p:sp>
-      <p:sp>
-        <p:nvSpPr>
-          <p:cNvPr id="20" name="Shape 18"/>
-          <p:cNvSpPr/>
-          <p:nvPr/>
-        </p:nvSpPr>
-        <p:spPr>
-          <a:xfrm>
-            <a:off x="594360" y="1901952"/>
-            <a:ext cx="54864" cy="100584"/>
-          </a:xfrm>
-          <a:prstGeom prst="roundRect">
-            <a:avLst>
-              <a:gd name="adj" fmla="val 83333"/>
-            </a:avLst>
-          </a:prstGeom>
-          <a:solidFill>
-            <a:srgbClr val="B4552D"/>
-          </a:solidFill>
-          <a:ln/>
-        </p:spPr>
-      </p:sp>
-      <p:sp>
-        <p:nvSpPr>
-          <p:cNvPr id="21" name="Shape 19"/>
-          <p:cNvSpPr/>
-          <p:nvPr/>
-        </p:nvSpPr>
-        <p:spPr>
-          <a:xfrm>
-            <a:off x="3402482" y="1856232"/>
-            <a:ext cx="20117" cy="192024"/>
-          </a:xfrm>
-          <a:prstGeom prst="rect">
-            <a:avLst/>
-          </a:prstGeom>
-          <a:solidFill>
-            <a:srgbClr val="12293A"/>
-          </a:solidFill>
-          <a:ln/>
-        </p:spPr>
-      </p:sp>
-      <p:sp>
-        <p:nvSpPr>
-          <p:cNvPr id="22" name="Text 20"/>
-          <p:cNvSpPr txBox="1"/>
-          <p:nvPr/>
-        </p:nvSpPr>
-        <p:spPr>
-          <a:xfrm>
-            <a:off x="4892040" y="1801368"/>
-            <a:ext cx="1005840" cy="274320"/>
-          </a:xfrm>
-          <a:prstGeom prst="rect">
-            <a:avLst/>
-          </a:prstGeom>
-          <a:noFill/>
-          <a:ln/>
-        </p:spPr>
-        <p:txBody>
-          <a:bodyPr wrap="square" lIns="0" tIns="0" rIns="0" bIns="0" rtlCol="0" anchor="ctr"/>
-          <a:lstStyle/>
-          <a:p>
-            <a:pPr algn="r" indent="0" marL="0">
-              <a:buNone/>
-            </a:pPr>
-            <a:r>
-              <a:rPr lang="en-US" sz="1000" b="1" dirty="0">
-                <a:solidFill>
-                  <a:srgbClr val="B4552D"/>
-                </a:solidFill>
-                <a:latin typeface="Poppins" pitchFamily="34" charset="0"/>
-                <a:ea typeface="Poppins" pitchFamily="34" charset="-122"/>
-                <a:cs typeface="Poppins" pitchFamily="34" charset="-120"/>
-              </a:rPr>
-              <a:t>0%</a:t>
-            </a:r>
-            <a:pPr algn="r" indent="0" marL="0">
-              <a:buNone/>
-            </a:pPr>
-            <a:r>
-              <a:rPr lang="en-US" sz="800" dirty="0">
-                <a:solidFill>
-                  <a:srgbClr val="8FA1AC"/>
-                </a:solidFill>
-                <a:latin typeface="Poppins" pitchFamily="34" charset="0"/>
-                <a:ea typeface="Poppins" pitchFamily="34" charset="-122"/>
-                <a:cs typeface="Poppins" pitchFamily="34" charset="-120"/>
-              </a:rPr>
-              <a:t> · pace 67%</a:t>
-            </a:r>
-            <a:endParaRPr lang="en-US" sz="1000" dirty="0"/>
-          </a:p>
-        </p:txBody>
-      </p:sp>
-      <p:sp>
-        <p:nvSpPr>
-          <p:cNvPr id="23" name="Shape 21"/>
-          <p:cNvSpPr/>
-          <p:nvPr/>
-        </p:nvSpPr>
-        <p:spPr>
-          <a:xfrm>
-            <a:off x="6245352" y="1005840"/>
-            <a:ext cx="5532120" cy="1170432"/>
-          </a:xfrm>
-          <a:prstGeom prst="roundRect">
-            <a:avLst>
-              <a:gd name="adj" fmla="val 5469"/>
+              <a:gd name="adj" fmla="val 5833"/>
             </a:avLst>
           </a:prstGeom>
           <a:solidFill>
@@ -43330,14 +43199,14 @@
       </p:sp>
       <p:sp>
         <p:nvSpPr>
-          <p:cNvPr id="24" name="Text 22"/>
-          <p:cNvSpPr txBox="1"/>
-          <p:nvPr/>
-        </p:nvSpPr>
-        <p:spPr>
-          <a:xfrm>
-            <a:off x="6428232" y="1097280"/>
-            <a:ext cx="5120640" cy="237744"/>
+          <p:cNvPr id="20" name="Text 18"/>
+          <p:cNvSpPr txBox="1"/>
+          <p:nvPr/>
+        </p:nvSpPr>
+        <p:spPr>
+          <a:xfrm>
+            <a:off x="3456432" y="1078992"/>
+            <a:ext cx="2368296" cy="274320"/>
           </a:xfrm>
           <a:prstGeom prst="rect">
             <a:avLst/>
@@ -43361,7 +43230,7 @@
                 <a:ea typeface="Poppins" pitchFamily="34" charset="-122"/>
                 <a:cs typeface="Poppins" pitchFamily="34" charset="-120"/>
               </a:rPr>
-              <a:t>PATH TO DECEMBER · exit $136.8k MRR · 77% AI-built</a:t>
+              <a:t>ORDER PLACED</a:t>
             </a:r>
             <a:endParaRPr lang="en-US" sz="950" dirty="0"/>
           </a:p>
@@ -43369,14 +43238,14 @@
       </p:sp>
       <p:sp>
         <p:nvSpPr>
-          <p:cNvPr id="25" name="Text 23"/>
-          <p:cNvSpPr txBox="1"/>
-          <p:nvPr/>
-        </p:nvSpPr>
-        <p:spPr>
-          <a:xfrm>
-            <a:off x="6428232" y="1335024"/>
-            <a:ext cx="3566160" cy="384048"/>
+          <p:cNvPr id="21" name="Text 19"/>
+          <p:cNvSpPr txBox="1"/>
+          <p:nvPr/>
+        </p:nvSpPr>
+        <p:spPr>
+          <a:xfrm>
+            <a:off x="3438144" y="1261872"/>
+            <a:ext cx="2404872" cy="310896"/>
           </a:xfrm>
           <a:prstGeom prst="rect">
             <a:avLst/>
@@ -43394,19 +43263,44 @@
             <a:r>
               <a:rPr lang="en-US" sz="2400" b="1" dirty="0">
                 <a:solidFill>
-                  <a:srgbClr val="B4552D"/>
-                </a:solidFill>
-                <a:latin typeface="Poppins" pitchFamily="34" charset="0"/>
-                <a:ea typeface="Poppins" pitchFamily="34" charset="-122"/>
-                <a:cs typeface="Poppins" pitchFamily="34" charset="-120"/>
-              </a:rPr>
-              <a:t>$0</a:t>
-            </a:r>
+                  <a:srgbClr val="3D8F5F"/>
+                </a:solidFill>
+                <a:latin typeface="Poppins" pitchFamily="34" charset="0"/>
+                <a:ea typeface="Poppins" pitchFamily="34" charset="-122"/>
+                <a:cs typeface="Poppins" pitchFamily="34" charset="-120"/>
+              </a:rPr>
+              <a:t>US$155</a:t>
+            </a:r>
+            <a:endParaRPr lang="en-US" sz="2400" dirty="0"/>
+          </a:p>
+        </p:txBody>
+      </p:sp>
+      <p:sp>
+        <p:nvSpPr>
+          <p:cNvPr id="22" name="Text 20"/>
+          <p:cNvSpPr txBox="1"/>
+          <p:nvPr/>
+        </p:nvSpPr>
+        <p:spPr>
+          <a:xfrm>
+            <a:off x="3456432" y="1609344"/>
+            <a:ext cx="2368296" cy="420624"/>
+          </a:xfrm>
+          <a:prstGeom prst="rect">
+            <a:avLst/>
+          </a:prstGeom>
+          <a:noFill/>
+          <a:ln/>
+        </p:spPr>
+        <p:txBody>
+          <a:bodyPr wrap="square" lIns="0" tIns="0" rIns="0" bIns="0" rtlCol="0" anchor="t"/>
+          <a:lstStyle/>
+          <a:p>
             <a:pPr indent="0" marL="0">
               <a:buNone/>
             </a:pPr>
             <a:r>
-              <a:rPr lang="en-US" sz="950" dirty="0">
+              <a:rPr lang="en-US" sz="780" dirty="0">
                 <a:solidFill>
                   <a:srgbClr val="5E7280"/>
                 </a:solidFill>
@@ -43414,182 +43308,26 @@
                 <a:ea typeface="Poppins" pitchFamily="34" charset="-122"/>
                 <a:cs typeface="Poppins" pitchFamily="34" charset="-120"/>
               </a:rPr>
-              <a:t>  of $137k committed</a:t>
-            </a:r>
-            <a:endParaRPr lang="en-US" sz="2400" dirty="0"/>
-          </a:p>
-        </p:txBody>
-      </p:sp>
-      <p:sp>
-        <p:nvSpPr>
-          <p:cNvPr id="26" name="Text 24"/>
-          <p:cNvSpPr txBox="1"/>
-          <p:nvPr/>
-        </p:nvSpPr>
-        <p:spPr>
-          <a:xfrm>
-            <a:off x="9509760" y="1371600"/>
-            <a:ext cx="2057400" cy="310896"/>
-          </a:xfrm>
-          <a:prstGeom prst="rect">
-            <a:avLst/>
-          </a:prstGeom>
-          <a:noFill/>
-          <a:ln/>
-        </p:spPr>
-        <p:txBody>
-          <a:bodyPr wrap="square" lIns="0" tIns="0" rIns="0" bIns="0" rtlCol="0" anchor="ctr"/>
-          <a:lstStyle/>
-          <a:p>
-            <a:pPr algn="r" indent="0" marL="0">
-              <a:buNone/>
-            </a:pPr>
-            <a:r>
-              <a:rPr lang="en-US" sz="950" b="1" dirty="0">
-                <a:solidFill>
-                  <a:srgbClr val="12293A"/>
-                </a:solidFill>
-                <a:latin typeface="Poppins" pitchFamily="34" charset="0"/>
-                <a:ea typeface="Poppins" pitchFamily="34" charset="-122"/>
-                <a:cs typeface="Poppins" pitchFamily="34" charset="-120"/>
-              </a:rPr>
-              <a:t>plan-to-date $30k/mo</a:t>
-            </a:r>
-            <a:endParaRPr lang="en-US" sz="950" dirty="0"/>
-          </a:p>
-        </p:txBody>
-      </p:sp>
-      <p:sp>
-        <p:nvSpPr>
-          <p:cNvPr id="27" name="Shape 25"/>
-          <p:cNvSpPr/>
-          <p:nvPr/>
-        </p:nvSpPr>
-        <p:spPr>
-          <a:xfrm>
-            <a:off x="6428232" y="1901952"/>
-            <a:ext cx="4206240" cy="100584"/>
+              <a:t>A$217 · 5 deals since 1 Jul</a:t>
+            </a:r>
+            <a:endParaRPr lang="en-US" sz="780" dirty="0"/>
+          </a:p>
+        </p:txBody>
+      </p:sp>
+      <p:sp>
+        <p:nvSpPr>
+          <p:cNvPr id="23" name="Shape 21"/>
+          <p:cNvSpPr/>
+          <p:nvPr/>
+        </p:nvSpPr>
+        <p:spPr>
+          <a:xfrm>
+            <a:off x="6172200" y="987552"/>
+            <a:ext cx="2697480" cy="1097280"/>
           </a:xfrm>
           <a:prstGeom prst="roundRect">
             <a:avLst>
-              <a:gd name="adj" fmla="val 45455"/>
-            </a:avLst>
-          </a:prstGeom>
-          <a:solidFill>
-            <a:srgbClr val="E2EAEE"/>
-          </a:solidFill>
-          <a:ln/>
-        </p:spPr>
-      </p:sp>
-      <p:sp>
-        <p:nvSpPr>
-          <p:cNvPr id="28" name="Shape 26"/>
-          <p:cNvSpPr/>
-          <p:nvPr/>
-        </p:nvSpPr>
-        <p:spPr>
-          <a:xfrm>
-            <a:off x="6428232" y="1901952"/>
-            <a:ext cx="54864" cy="100584"/>
-          </a:xfrm>
-          <a:prstGeom prst="roundRect">
-            <a:avLst>
-              <a:gd name="adj" fmla="val 83333"/>
-            </a:avLst>
-          </a:prstGeom>
-          <a:solidFill>
-            <a:srgbClr val="B4552D"/>
-          </a:solidFill>
-          <a:ln/>
-        </p:spPr>
-      </p:sp>
-      <p:sp>
-        <p:nvSpPr>
-          <p:cNvPr id="29" name="Shape 27"/>
-          <p:cNvSpPr/>
-          <p:nvPr/>
-        </p:nvSpPr>
-        <p:spPr>
-          <a:xfrm>
-            <a:off x="7343546" y="1856232"/>
-            <a:ext cx="20117" cy="192024"/>
-          </a:xfrm>
-          <a:prstGeom prst="rect">
-            <a:avLst/>
-          </a:prstGeom>
-          <a:solidFill>
-            <a:srgbClr val="12293A"/>
-          </a:solidFill>
-          <a:ln/>
-        </p:spPr>
-      </p:sp>
-      <p:sp>
-        <p:nvSpPr>
-          <p:cNvPr id="30" name="Text 28"/>
-          <p:cNvSpPr txBox="1"/>
-          <p:nvPr/>
-        </p:nvSpPr>
-        <p:spPr>
-          <a:xfrm>
-            <a:off x="10725912" y="1801368"/>
-            <a:ext cx="1005840" cy="274320"/>
-          </a:xfrm>
-          <a:prstGeom prst="rect">
-            <a:avLst/>
-          </a:prstGeom>
-          <a:noFill/>
-          <a:ln/>
-        </p:spPr>
-        <p:txBody>
-          <a:bodyPr wrap="square" lIns="0" tIns="0" rIns="0" bIns="0" rtlCol="0" anchor="ctr"/>
-          <a:lstStyle/>
-          <a:p>
-            <a:pPr algn="r" indent="0" marL="0">
-              <a:buNone/>
-            </a:pPr>
-            <a:r>
-              <a:rPr lang="en-US" sz="1000" b="1" dirty="0">
-                <a:solidFill>
-                  <a:srgbClr val="B4552D"/>
-                </a:solidFill>
-                <a:latin typeface="Poppins" pitchFamily="34" charset="0"/>
-                <a:ea typeface="Poppins" pitchFamily="34" charset="-122"/>
-                <a:cs typeface="Poppins" pitchFamily="34" charset="-120"/>
-              </a:rPr>
-              <a:t>0%</a:t>
-            </a:r>
-            <a:pPr algn="r" indent="0" marL="0">
-              <a:buNone/>
-            </a:pPr>
-            <a:r>
-              <a:rPr lang="en-US" sz="800" dirty="0">
-                <a:solidFill>
-                  <a:srgbClr val="8FA1AC"/>
-                </a:solidFill>
-                <a:latin typeface="Poppins" pitchFamily="34" charset="0"/>
-                <a:ea typeface="Poppins" pitchFamily="34" charset="-122"/>
-                <a:cs typeface="Poppins" pitchFamily="34" charset="-120"/>
-              </a:rPr>
-              <a:t> · pace 22%</a:t>
-            </a:r>
-            <a:endParaRPr lang="en-US" sz="1000" dirty="0"/>
-          </a:p>
-        </p:txBody>
-      </p:sp>
-      <p:sp>
-        <p:nvSpPr>
-          <p:cNvPr id="31" name="Shape 29"/>
-          <p:cNvSpPr/>
-          <p:nvPr/>
-        </p:nvSpPr>
-        <p:spPr>
-          <a:xfrm>
-            <a:off x="411480" y="2340864"/>
-            <a:ext cx="7635240" cy="4041648"/>
-          </a:xfrm>
-          <a:prstGeom prst="roundRect">
-            <a:avLst>
-              <a:gd name="adj" fmla="val 1584"/>
+              <a:gd name="adj" fmla="val 5833"/>
             </a:avLst>
           </a:prstGeom>
           <a:solidFill>
@@ -43607,14 +43345,14 @@
       </p:sp>
       <p:sp>
         <p:nvSpPr>
-          <p:cNvPr id="32" name="Text 30"/>
-          <p:cNvSpPr txBox="1"/>
-          <p:nvPr/>
-        </p:nvSpPr>
-        <p:spPr>
-          <a:xfrm>
-            <a:off x="612648" y="2450592"/>
-            <a:ext cx="7232904" cy="274320"/>
+          <p:cNvPr id="24" name="Text 22"/>
+          <p:cNvSpPr txBox="1"/>
+          <p:nvPr/>
+        </p:nvSpPr>
+        <p:spPr>
+          <a:xfrm>
+            <a:off x="6336792" y="1078992"/>
+            <a:ext cx="2368296" cy="274320"/>
           </a:xfrm>
           <a:prstGeom prst="rect">
             <a:avLst/>
@@ -43630,7 +43368,7 @@
               <a:buNone/>
             </a:pPr>
             <a:r>
-              <a:rPr lang="en-US" sz="1200" b="1" dirty="0">
+              <a:rPr lang="en-US" sz="950" b="1" dirty="0">
                 <a:solidFill>
                   <a:srgbClr val="2C8394"/>
                 </a:solidFill>
@@ -43638,384 +43376,77 @@
                 <a:ea typeface="Poppins" pitchFamily="34" charset="-122"/>
                 <a:cs typeface="Poppins" pitchFamily="34" charset="-120"/>
               </a:rPr>
-              <a:t>BY PRODUCT   </a:t>
-            </a:r>
+              <a:t>CLOSED LOST</a:t>
+            </a:r>
+            <a:endParaRPr lang="en-US" sz="950" dirty="0"/>
+          </a:p>
+        </p:txBody>
+      </p:sp>
+      <p:sp>
+        <p:nvSpPr>
+          <p:cNvPr id="25" name="Text 23"/>
+          <p:cNvSpPr txBox="1"/>
+          <p:nvPr/>
+        </p:nvSpPr>
+        <p:spPr>
+          <a:xfrm>
+            <a:off x="6318504" y="1261872"/>
+            <a:ext cx="2404872" cy="310896"/>
+          </a:xfrm>
+          <a:prstGeom prst="rect">
+            <a:avLst/>
+          </a:prstGeom>
+          <a:noFill/>
+          <a:ln/>
+        </p:spPr>
+        <p:txBody>
+          <a:bodyPr wrap="square" lIns="0" tIns="0" rIns="0" bIns="0" rtlCol="0" anchor="ctr"/>
+          <a:lstStyle/>
+          <a:p>
             <a:pPr indent="0" marL="0">
               <a:buNone/>
             </a:pPr>
             <a:r>
-              <a:rPr lang="en-US" sz="750" dirty="0">
-                <a:solidFill>
-                  <a:srgbClr val="8FA1AC"/>
-                </a:solidFill>
-                <a:latin typeface="Poppins" pitchFamily="34" charset="0"/>
-                <a:ea typeface="Poppins" pitchFamily="34" charset="-122"/>
-                <a:cs typeface="Poppins" pitchFamily="34" charset="-120"/>
-              </a:rPr>
-              <a:t>▮ open pipe &amp; Δ now HubSpot keyword-matched (deal name) · MRR from the deal mrr field</a:t>
-            </a:r>
-            <a:endParaRPr lang="en-US" sz="1200" dirty="0"/>
-          </a:p>
-        </p:txBody>
-      </p:sp>
-      <p:sp>
-        <p:nvSpPr>
-          <p:cNvPr id="33" name="Text 31"/>
-          <p:cNvSpPr txBox="1"/>
-          <p:nvPr/>
-        </p:nvSpPr>
-        <p:spPr>
-          <a:xfrm>
-            <a:off x="612648" y="2798064"/>
-            <a:ext cx="1874520" cy="201168"/>
-          </a:xfrm>
-          <a:prstGeom prst="rect">
-            <a:avLst/>
-          </a:prstGeom>
-          <a:noFill/>
-          <a:ln/>
-        </p:spPr>
-        <p:txBody>
-          <a:bodyPr wrap="square" lIns="0" tIns="0" rIns="0" bIns="0" rtlCol="0" anchor="ctr"/>
-          <a:lstStyle/>
-          <a:p>
-            <a:pPr algn="l" indent="0" marL="0">
-              <a:buNone/>
-            </a:pPr>
-            <a:r>
-              <a:rPr lang="en-US" sz="750" b="1" dirty="0">
-                <a:solidFill>
-                  <a:srgbClr val="8FA1AC"/>
-                </a:solidFill>
-                <a:latin typeface="Poppins" pitchFamily="34" charset="0"/>
-                <a:ea typeface="Poppins" pitchFamily="34" charset="-122"/>
-                <a:cs typeface="Poppins" pitchFamily="34" charset="-120"/>
-              </a:rPr>
-              <a:t>PRODUCT</a:t>
-            </a:r>
-            <a:endParaRPr lang="en-US" sz="750" dirty="0"/>
-          </a:p>
-        </p:txBody>
-      </p:sp>
-      <p:sp>
-        <p:nvSpPr>
-          <p:cNvPr id="34" name="Text 32"/>
-          <p:cNvSpPr txBox="1"/>
-          <p:nvPr/>
-        </p:nvSpPr>
-        <p:spPr>
-          <a:xfrm>
-            <a:off x="2560320" y="2798064"/>
-            <a:ext cx="777240" cy="201168"/>
-          </a:xfrm>
-          <a:prstGeom prst="rect">
-            <a:avLst/>
-          </a:prstGeom>
-          <a:noFill/>
-          <a:ln/>
-        </p:spPr>
-        <p:txBody>
-          <a:bodyPr wrap="square" lIns="0" tIns="0" rIns="0" bIns="0" rtlCol="0" anchor="ctr"/>
-          <a:lstStyle/>
-          <a:p>
-            <a:pPr algn="r" indent="0" marL="0">
-              <a:buNone/>
-            </a:pPr>
-            <a:r>
-              <a:rPr lang="en-US" sz="750" b="1" dirty="0">
-                <a:solidFill>
-                  <a:srgbClr val="8FA1AC"/>
-                </a:solidFill>
-                <a:latin typeface="Poppins" pitchFamily="34" charset="0"/>
-                <a:ea typeface="Poppins" pitchFamily="34" charset="-122"/>
-                <a:cs typeface="Poppins" pitchFamily="34" charset="-120"/>
-              </a:rPr>
-              <a:t>MO TGT</a:t>
-            </a:r>
-            <a:endParaRPr lang="en-US" sz="750" dirty="0"/>
-          </a:p>
-        </p:txBody>
-      </p:sp>
-      <p:sp>
-        <p:nvSpPr>
-          <p:cNvPr id="35" name="Text 33"/>
-          <p:cNvSpPr txBox="1"/>
-          <p:nvPr/>
-        </p:nvSpPr>
-        <p:spPr>
-          <a:xfrm>
-            <a:off x="3383280" y="2798064"/>
-            <a:ext cx="822960" cy="201168"/>
-          </a:xfrm>
-          <a:prstGeom prst="rect">
-            <a:avLst/>
-          </a:prstGeom>
-          <a:noFill/>
-          <a:ln/>
-        </p:spPr>
-        <p:txBody>
-          <a:bodyPr wrap="square" lIns="0" tIns="0" rIns="0" bIns="0" rtlCol="0" anchor="ctr"/>
-          <a:lstStyle/>
-          <a:p>
-            <a:pPr algn="r" indent="0" marL="0">
-              <a:buNone/>
-            </a:pPr>
-            <a:r>
-              <a:rPr lang="en-US" sz="750" b="1" dirty="0">
-                <a:solidFill>
-                  <a:srgbClr val="8FA1AC"/>
-                </a:solidFill>
-                <a:latin typeface="Poppins" pitchFamily="34" charset="0"/>
-                <a:ea typeface="Poppins" pitchFamily="34" charset="-122"/>
-                <a:cs typeface="Poppins" pitchFamily="34" charset="-120"/>
-              </a:rPr>
-              <a:t>QTD MRR</a:t>
-            </a:r>
-            <a:endParaRPr lang="en-US" sz="750" dirty="0"/>
-          </a:p>
-        </p:txBody>
-      </p:sp>
-      <p:sp>
-        <p:nvSpPr>
-          <p:cNvPr id="36" name="Text 34"/>
-          <p:cNvSpPr txBox="1"/>
-          <p:nvPr/>
-        </p:nvSpPr>
-        <p:spPr>
-          <a:xfrm>
-            <a:off x="4251960" y="2798064"/>
-            <a:ext cx="1188720" cy="201168"/>
-          </a:xfrm>
-          <a:prstGeom prst="rect">
-            <a:avLst/>
-          </a:prstGeom>
-          <a:noFill/>
-          <a:ln/>
-        </p:spPr>
-        <p:txBody>
-          <a:bodyPr wrap="square" lIns="0" tIns="0" rIns="0" bIns="0" rtlCol="0" anchor="ctr"/>
-          <a:lstStyle/>
-          <a:p>
-            <a:pPr algn="r" indent="0" marL="0">
-              <a:buNone/>
-            </a:pPr>
-            <a:r>
-              <a:rPr lang="en-US" sz="750" b="1" dirty="0">
-                <a:solidFill>
-                  <a:srgbClr val="8FA1AC"/>
-                </a:solidFill>
-                <a:latin typeface="Poppins" pitchFamily="34" charset="0"/>
-                <a:ea typeface="Poppins" pitchFamily="34" charset="-122"/>
-                <a:cs typeface="Poppins" pitchFamily="34" charset="-120"/>
-              </a:rPr>
-              <a:t>STATE</a:t>
-            </a:r>
-            <a:endParaRPr lang="en-US" sz="750" dirty="0"/>
-          </a:p>
-        </p:txBody>
-      </p:sp>
-      <p:sp>
-        <p:nvSpPr>
-          <p:cNvPr id="37" name="Text 35"/>
-          <p:cNvSpPr txBox="1"/>
-          <p:nvPr/>
-        </p:nvSpPr>
-        <p:spPr>
-          <a:xfrm>
-            <a:off x="5486400" y="2798064"/>
-            <a:ext cx="868680" cy="201168"/>
-          </a:xfrm>
-          <a:prstGeom prst="rect">
-            <a:avLst/>
-          </a:prstGeom>
-          <a:noFill/>
-          <a:ln/>
-        </p:spPr>
-        <p:txBody>
-          <a:bodyPr wrap="square" lIns="0" tIns="0" rIns="0" bIns="0" rtlCol="0" anchor="ctr"/>
-          <a:lstStyle/>
-          <a:p>
-            <a:pPr algn="r" indent="0" marL="0">
-              <a:buNone/>
-            </a:pPr>
-            <a:r>
-              <a:rPr lang="en-US" sz="750" b="1" dirty="0">
-                <a:solidFill>
-                  <a:srgbClr val="8FA1AC"/>
-                </a:solidFill>
-                <a:latin typeface="Poppins" pitchFamily="34" charset="0"/>
-                <a:ea typeface="Poppins" pitchFamily="34" charset="-122"/>
-                <a:cs typeface="Poppins" pitchFamily="34" charset="-120"/>
-              </a:rPr>
-              <a:t>Δ WK PIPE</a:t>
-            </a:r>
-            <a:endParaRPr lang="en-US" sz="750" dirty="0"/>
-          </a:p>
-        </p:txBody>
-      </p:sp>
-      <p:sp>
-        <p:nvSpPr>
-          <p:cNvPr id="38" name="Text 36"/>
-          <p:cNvSpPr txBox="1"/>
-          <p:nvPr/>
-        </p:nvSpPr>
-        <p:spPr>
-          <a:xfrm>
-            <a:off x="6400800" y="2798064"/>
-            <a:ext cx="548640" cy="201168"/>
-          </a:xfrm>
-          <a:prstGeom prst="rect">
-            <a:avLst/>
-          </a:prstGeom>
-          <a:noFill/>
-          <a:ln/>
-        </p:spPr>
-        <p:txBody>
-          <a:bodyPr wrap="square" lIns="0" tIns="0" rIns="0" bIns="0" rtlCol="0" anchor="ctr"/>
-          <a:lstStyle/>
-          <a:p>
-            <a:pPr algn="r" indent="0" marL="0">
-              <a:buNone/>
-            </a:pPr>
-            <a:r>
-              <a:rPr lang="en-US" sz="750" b="1" dirty="0">
-                <a:solidFill>
-                  <a:srgbClr val="8FA1AC"/>
-                </a:solidFill>
-                <a:latin typeface="Poppins" pitchFamily="34" charset="0"/>
-                <a:ea typeface="Poppins" pitchFamily="34" charset="-122"/>
-                <a:cs typeface="Poppins" pitchFamily="34" charset="-120"/>
-              </a:rPr>
-              <a:t>DEC TGT</a:t>
-            </a:r>
-            <a:endParaRPr lang="en-US" sz="750" dirty="0"/>
-          </a:p>
-        </p:txBody>
-      </p:sp>
-      <p:sp>
-        <p:nvSpPr>
-          <p:cNvPr id="39" name="Text 37"/>
-          <p:cNvSpPr txBox="1"/>
-          <p:nvPr/>
-        </p:nvSpPr>
-        <p:spPr>
-          <a:xfrm>
-            <a:off x="6995160" y="2798064"/>
-            <a:ext cx="914400" cy="201168"/>
-          </a:xfrm>
-          <a:prstGeom prst="rect">
-            <a:avLst/>
-          </a:prstGeom>
-          <a:noFill/>
-          <a:ln/>
-        </p:spPr>
-        <p:txBody>
-          <a:bodyPr wrap="square" lIns="0" tIns="0" rIns="0" bIns="0" rtlCol="0" anchor="ctr"/>
-          <a:lstStyle/>
-          <a:p>
-            <a:pPr algn="r" indent="0" marL="0">
-              <a:buNone/>
-            </a:pPr>
-            <a:r>
-              <a:rPr lang="en-US" sz="750" b="1" dirty="0">
-                <a:solidFill>
-                  <a:srgbClr val="8FA1AC"/>
-                </a:solidFill>
-                <a:latin typeface="Poppins" pitchFamily="34" charset="0"/>
-                <a:ea typeface="Poppins" pitchFamily="34" charset="-122"/>
-                <a:cs typeface="Poppins" pitchFamily="34" charset="-120"/>
-              </a:rPr>
-              <a:t>OPEN PIPE</a:t>
-            </a:r>
-            <a:endParaRPr lang="en-US" sz="750" dirty="0"/>
-          </a:p>
-        </p:txBody>
-      </p:sp>
-      <p:sp>
-        <p:nvSpPr>
-          <p:cNvPr id="40" name="Shape 38"/>
-          <p:cNvSpPr/>
-          <p:nvPr/>
-        </p:nvSpPr>
-        <p:spPr>
-          <a:xfrm>
-            <a:off x="612648" y="3584448"/>
-            <a:ext cx="7232904" cy="6401"/>
-          </a:xfrm>
-          <a:prstGeom prst="rect">
-            <a:avLst/>
-          </a:prstGeom>
-          <a:solidFill>
-            <a:srgbClr val="E2EAEE"/>
-          </a:solidFill>
-          <a:ln/>
-        </p:spPr>
-      </p:sp>
-      <p:sp>
-        <p:nvSpPr>
-          <p:cNvPr id="41" name="Text 39"/>
-          <p:cNvSpPr txBox="1"/>
-          <p:nvPr/>
-        </p:nvSpPr>
-        <p:spPr>
-          <a:xfrm>
-            <a:off x="612648" y="3072384"/>
-            <a:ext cx="1874520" cy="512064"/>
-          </a:xfrm>
-          <a:prstGeom prst="rect">
-            <a:avLst/>
-          </a:prstGeom>
-          <a:noFill/>
-          <a:ln/>
-        </p:spPr>
-        <p:txBody>
-          <a:bodyPr wrap="square" lIns="0" tIns="0" rIns="0" bIns="0" rtlCol="0" anchor="ctr"/>
-          <a:lstStyle/>
-          <a:p>
-            <a:pPr algn="l" indent="0" marL="0">
-              <a:buNone/>
-            </a:pPr>
-            <a:r>
-              <a:rPr lang="en-US" sz="950" b="1" dirty="0">
-                <a:solidFill>
-                  <a:srgbClr val="12293A"/>
-                </a:solidFill>
-                <a:latin typeface="Poppins" pitchFamily="34" charset="0"/>
-                <a:ea typeface="Poppins" pitchFamily="34" charset="-122"/>
-                <a:cs typeface="Poppins" pitchFamily="34" charset="-120"/>
-              </a:rPr>
-              <a:t>QR Ordering (OrderNow)</a:t>
-            </a:r>
-            <a:endParaRPr lang="en-US" sz="950" dirty="0"/>
-          </a:p>
-        </p:txBody>
-      </p:sp>
-      <p:sp>
-        <p:nvSpPr>
-          <p:cNvPr id="42" name="Text 40"/>
-          <p:cNvSpPr txBox="1"/>
-          <p:nvPr/>
-        </p:nvSpPr>
-        <p:spPr>
-          <a:xfrm>
-            <a:off x="2560320" y="3072384"/>
-            <a:ext cx="777240" cy="512064"/>
-          </a:xfrm>
-          <a:prstGeom prst="rect">
-            <a:avLst/>
-          </a:prstGeom>
-          <a:noFill/>
-          <a:ln/>
-        </p:spPr>
-        <p:txBody>
-          <a:bodyPr wrap="square" lIns="0" tIns="0" rIns="0" bIns="0" rtlCol="0" anchor="ctr"/>
-          <a:lstStyle/>
-          <a:p>
-            <a:pPr algn="r" indent="0" marL="0">
-              <a:buNone/>
-            </a:pPr>
-            <a:r>
-              <a:rPr lang="en-US" sz="850" dirty="0">
+              <a:rPr lang="en-US" sz="2400" b="1" dirty="0">
+                <a:solidFill>
+                  <a:srgbClr val="B4552D"/>
+                </a:solidFill>
+                <a:latin typeface="Poppins" pitchFamily="34" charset="0"/>
+                <a:ea typeface="Poppins" pitchFamily="34" charset="-122"/>
+                <a:cs typeface="Poppins" pitchFamily="34" charset="-120"/>
+              </a:rPr>
+              <a:t>US$257</a:t>
+            </a:r>
+            <a:endParaRPr lang="en-US" sz="2400" dirty="0"/>
+          </a:p>
+        </p:txBody>
+      </p:sp>
+      <p:sp>
+        <p:nvSpPr>
+          <p:cNvPr id="26" name="Text 24"/>
+          <p:cNvSpPr txBox="1"/>
+          <p:nvPr/>
+        </p:nvSpPr>
+        <p:spPr>
+          <a:xfrm>
+            <a:off x="6336792" y="1609344"/>
+            <a:ext cx="2368296" cy="420624"/>
+          </a:xfrm>
+          <a:prstGeom prst="rect">
+            <a:avLst/>
+          </a:prstGeom>
+          <a:noFill/>
+          <a:ln/>
+        </p:spPr>
+        <p:txBody>
+          <a:bodyPr wrap="square" lIns="0" tIns="0" rIns="0" bIns="0" rtlCol="0" anchor="t"/>
+          <a:lstStyle/>
+          <a:p>
+            <a:pPr indent="0" marL="0">
+              <a:buNone/>
+            </a:pPr>
+            <a:r>
+              <a:rPr lang="en-US" sz="780" dirty="0">
                 <a:solidFill>
                   <a:srgbClr val="5E7280"/>
                 </a:solidFill>
@@ -44023,1226 +43454,26 @@
                 <a:ea typeface="Poppins" pitchFamily="34" charset="-122"/>
                 <a:cs typeface="Poppins" pitchFamily="34" charset="-120"/>
               </a:rPr>
-              <a:t>$25k</a:t>
-            </a:r>
-            <a:endParaRPr lang="en-US" sz="850" dirty="0"/>
-          </a:p>
-        </p:txBody>
-      </p:sp>
-      <p:sp>
-        <p:nvSpPr>
-          <p:cNvPr id="43" name="Text 41"/>
-          <p:cNvSpPr txBox="1"/>
-          <p:nvPr/>
-        </p:nvSpPr>
-        <p:spPr>
-          <a:xfrm>
-            <a:off x="3383280" y="3072384"/>
-            <a:ext cx="822960" cy="512064"/>
-          </a:xfrm>
-          <a:prstGeom prst="rect">
-            <a:avLst/>
-          </a:prstGeom>
-          <a:noFill/>
-          <a:ln/>
-        </p:spPr>
-        <p:txBody>
-          <a:bodyPr wrap="square" lIns="0" tIns="0" rIns="0" bIns="0" rtlCol="0" anchor="ctr"/>
-          <a:lstStyle/>
-          <a:p>
-            <a:pPr algn="r" indent="0" marL="0">
-              <a:buNone/>
-            </a:pPr>
-            <a:r>
-              <a:rPr lang="en-US" sz="850" b="1" dirty="0">
-                <a:solidFill>
-                  <a:srgbClr val="B4552D"/>
-                </a:solidFill>
-                <a:latin typeface="Poppins" pitchFamily="34" charset="0"/>
-                <a:ea typeface="Poppins" pitchFamily="34" charset="-122"/>
-                <a:cs typeface="Poppins" pitchFamily="34" charset="-120"/>
-              </a:rPr>
-              <a:t>$0</a:t>
-            </a:r>
-            <a:endParaRPr lang="en-US" sz="850" dirty="0"/>
-          </a:p>
-        </p:txBody>
-      </p:sp>
-      <p:sp>
-        <p:nvSpPr>
-          <p:cNvPr id="44" name="Text 42"/>
-          <p:cNvSpPr txBox="1"/>
-          <p:nvPr/>
-        </p:nvSpPr>
-        <p:spPr>
-          <a:xfrm>
-            <a:off x="4251960" y="3072384"/>
-            <a:ext cx="1188720" cy="512064"/>
-          </a:xfrm>
-          <a:prstGeom prst="rect">
-            <a:avLst/>
-          </a:prstGeom>
-          <a:noFill/>
-          <a:ln/>
-        </p:spPr>
-        <p:txBody>
-          <a:bodyPr wrap="square" lIns="0" tIns="0" rIns="0" bIns="0" rtlCol="0" anchor="ctr"/>
-          <a:lstStyle/>
-          <a:p>
-            <a:pPr algn="r" indent="0" marL="0">
-              <a:buNone/>
-            </a:pPr>
-            <a:r>
-              <a:rPr lang="en-US" sz="850" dirty="0">
-                <a:solidFill>
-                  <a:srgbClr val="C88A2E"/>
-                </a:solidFill>
-                <a:latin typeface="Poppins" pitchFamily="34" charset="0"/>
-                <a:ea typeface="Poppins" pitchFamily="34" charset="-122"/>
-                <a:cs typeface="Poppins" pitchFamily="34" charset="-120"/>
-              </a:rPr>
-              <a:t>0%</a:t>
-            </a:r>
-            <a:endParaRPr lang="en-US" sz="850" dirty="0"/>
-          </a:p>
-        </p:txBody>
-      </p:sp>
-      <p:sp>
-        <p:nvSpPr>
-          <p:cNvPr id="45" name="Text 43"/>
-          <p:cNvSpPr txBox="1"/>
-          <p:nvPr/>
-        </p:nvSpPr>
-        <p:spPr>
-          <a:xfrm>
-            <a:off x="5486400" y="3072384"/>
-            <a:ext cx="868680" cy="512064"/>
-          </a:xfrm>
-          <a:prstGeom prst="rect">
-            <a:avLst/>
-          </a:prstGeom>
-          <a:noFill/>
-          <a:ln/>
-        </p:spPr>
-        <p:txBody>
-          <a:bodyPr wrap="square" lIns="0" tIns="0" rIns="0" bIns="0" rtlCol="0" anchor="ctr"/>
-          <a:lstStyle/>
-          <a:p>
-            <a:pPr algn="r" indent="0" marL="0">
-              <a:buNone/>
-            </a:pPr>
-            <a:r>
-              <a:rPr lang="en-US" sz="850" dirty="0">
-                <a:solidFill>
-                  <a:srgbClr val="5E7280"/>
-                </a:solidFill>
-                <a:latin typeface="Poppins" pitchFamily="34" charset="0"/>
-                <a:ea typeface="Poppins" pitchFamily="34" charset="-122"/>
-                <a:cs typeface="Poppins" pitchFamily="34" charset="-120"/>
-              </a:rPr>
-              <a:t>—</a:t>
-            </a:r>
-            <a:endParaRPr lang="en-US" sz="850" dirty="0"/>
-          </a:p>
-        </p:txBody>
-      </p:sp>
-      <p:sp>
-        <p:nvSpPr>
-          <p:cNvPr id="46" name="Text 44"/>
-          <p:cNvSpPr txBox="1"/>
-          <p:nvPr/>
-        </p:nvSpPr>
-        <p:spPr>
-          <a:xfrm>
-            <a:off x="6400800" y="3072384"/>
-            <a:ext cx="548640" cy="512064"/>
-          </a:xfrm>
-          <a:prstGeom prst="rect">
-            <a:avLst/>
-          </a:prstGeom>
-          <a:noFill/>
-          <a:ln/>
-        </p:spPr>
-        <p:txBody>
-          <a:bodyPr wrap="square" lIns="0" tIns="0" rIns="0" bIns="0" rtlCol="0" anchor="ctr"/>
-          <a:lstStyle/>
-          <a:p>
-            <a:pPr algn="r" indent="0" marL="0">
-              <a:buNone/>
-            </a:pPr>
-            <a:r>
-              <a:rPr lang="en-US" sz="850" dirty="0">
-                <a:solidFill>
-                  <a:srgbClr val="5E7280"/>
-                </a:solidFill>
-                <a:latin typeface="Poppins" pitchFamily="34" charset="0"/>
-                <a:ea typeface="Poppins" pitchFamily="34" charset="-122"/>
-                <a:cs typeface="Poppins" pitchFamily="34" charset="-120"/>
-              </a:rPr>
-              <a:t>$83k</a:t>
-            </a:r>
-            <a:endParaRPr lang="en-US" sz="850" dirty="0"/>
-          </a:p>
-        </p:txBody>
-      </p:sp>
-      <p:sp>
-        <p:nvSpPr>
-          <p:cNvPr id="47" name="Text 45"/>
-          <p:cNvSpPr txBox="1"/>
-          <p:nvPr/>
-        </p:nvSpPr>
-        <p:spPr>
-          <a:xfrm>
-            <a:off x="6995160" y="3072384"/>
-            <a:ext cx="914400" cy="512064"/>
-          </a:xfrm>
-          <a:prstGeom prst="rect">
-            <a:avLst/>
-          </a:prstGeom>
-          <a:noFill/>
-          <a:ln/>
-        </p:spPr>
-        <p:txBody>
-          <a:bodyPr wrap="square" lIns="0" tIns="0" rIns="0" bIns="0" rtlCol="0" anchor="ctr"/>
-          <a:lstStyle/>
-          <a:p>
-            <a:pPr algn="r" indent="0" marL="0">
-              <a:buNone/>
-            </a:pPr>
-            <a:r>
-              <a:rPr lang="en-US" sz="850" dirty="0">
-                <a:solidFill>
-                  <a:srgbClr val="5E7280"/>
-                </a:solidFill>
-                <a:latin typeface="Poppins" pitchFamily="34" charset="0"/>
-                <a:ea typeface="Poppins" pitchFamily="34" charset="-122"/>
-                <a:cs typeface="Poppins" pitchFamily="34" charset="-120"/>
-              </a:rPr>
-              <a:t>4 · $598/mo</a:t>
-            </a:r>
-            <a:endParaRPr lang="en-US" sz="850" dirty="0"/>
-          </a:p>
-        </p:txBody>
-      </p:sp>
-      <p:sp>
-        <p:nvSpPr>
-          <p:cNvPr id="48" name="Shape 46"/>
-          <p:cNvSpPr/>
-          <p:nvPr/>
-        </p:nvSpPr>
-        <p:spPr>
-          <a:xfrm>
-            <a:off x="612648" y="4151376"/>
-            <a:ext cx="7232904" cy="6401"/>
-          </a:xfrm>
-          <a:prstGeom prst="rect">
-            <a:avLst/>
-          </a:prstGeom>
-          <a:solidFill>
-            <a:srgbClr val="E2EAEE"/>
-          </a:solidFill>
-          <a:ln/>
-        </p:spPr>
-      </p:sp>
-      <p:sp>
-        <p:nvSpPr>
-          <p:cNvPr id="49" name="Text 47"/>
-          <p:cNvSpPr txBox="1"/>
-          <p:nvPr/>
-        </p:nvSpPr>
-        <p:spPr>
-          <a:xfrm>
-            <a:off x="612648" y="3639312"/>
-            <a:ext cx="1874520" cy="512064"/>
-          </a:xfrm>
-          <a:prstGeom prst="rect">
-            <a:avLst/>
-          </a:prstGeom>
-          <a:noFill/>
-          <a:ln/>
-        </p:spPr>
-        <p:txBody>
-          <a:bodyPr wrap="square" lIns="0" tIns="0" rIns="0" bIns="0" rtlCol="0" anchor="ctr"/>
-          <a:lstStyle/>
-          <a:p>
-            <a:pPr algn="l" indent="0" marL="0">
-              <a:buNone/>
-            </a:pPr>
-            <a:r>
-              <a:rPr lang="en-US" sz="950" b="1" dirty="0">
-                <a:solidFill>
-                  <a:srgbClr val="12293A"/>
-                </a:solidFill>
-                <a:latin typeface="Poppins" pitchFamily="34" charset="0"/>
-                <a:ea typeface="Poppins" pitchFamily="34" charset="-122"/>
-                <a:cs typeface="Poppins" pitchFamily="34" charset="-120"/>
-              </a:rPr>
-              <a:t>Data Product BI</a:t>
-            </a:r>
-            <a:endParaRPr lang="en-US" sz="950" dirty="0"/>
-          </a:p>
-        </p:txBody>
-      </p:sp>
-      <p:sp>
-        <p:nvSpPr>
-          <p:cNvPr id="50" name="Text 48"/>
-          <p:cNvSpPr txBox="1"/>
-          <p:nvPr/>
-        </p:nvSpPr>
-        <p:spPr>
-          <a:xfrm>
-            <a:off x="2560320" y="3639312"/>
-            <a:ext cx="777240" cy="512064"/>
-          </a:xfrm>
-          <a:prstGeom prst="rect">
-            <a:avLst/>
-          </a:prstGeom>
-          <a:noFill/>
-          <a:ln/>
-        </p:spPr>
-        <p:txBody>
-          <a:bodyPr wrap="square" lIns="0" tIns="0" rIns="0" bIns="0" rtlCol="0" anchor="ctr"/>
-          <a:lstStyle/>
-          <a:p>
-            <a:pPr algn="r" indent="0" marL="0">
-              <a:buNone/>
-            </a:pPr>
-            <a:r>
-              <a:rPr lang="en-US" sz="850" dirty="0">
-                <a:solidFill>
-                  <a:srgbClr val="5E7280"/>
-                </a:solidFill>
-                <a:latin typeface="Poppins" pitchFamily="34" charset="0"/>
-                <a:ea typeface="Poppins" pitchFamily="34" charset="-122"/>
-                <a:cs typeface="Poppins" pitchFamily="34" charset="-120"/>
-              </a:rPr>
-              <a:t>—</a:t>
-            </a:r>
-            <a:endParaRPr lang="en-US" sz="850" dirty="0"/>
-          </a:p>
-        </p:txBody>
-      </p:sp>
-      <p:sp>
-        <p:nvSpPr>
-          <p:cNvPr id="51" name="Text 49"/>
-          <p:cNvSpPr txBox="1"/>
-          <p:nvPr/>
-        </p:nvSpPr>
-        <p:spPr>
-          <a:xfrm>
-            <a:off x="3383280" y="3639312"/>
-            <a:ext cx="822960" cy="512064"/>
-          </a:xfrm>
-          <a:prstGeom prst="rect">
-            <a:avLst/>
-          </a:prstGeom>
-          <a:noFill/>
-          <a:ln/>
-        </p:spPr>
-        <p:txBody>
-          <a:bodyPr wrap="square" lIns="0" tIns="0" rIns="0" bIns="0" rtlCol="0" anchor="ctr"/>
-          <a:lstStyle/>
-          <a:p>
-            <a:pPr algn="r" indent="0" marL="0">
-              <a:buNone/>
-            </a:pPr>
-            <a:r>
-              <a:rPr lang="en-US" sz="850" b="1" dirty="0">
-                <a:solidFill>
-                  <a:srgbClr val="B4552D"/>
-                </a:solidFill>
-                <a:latin typeface="Poppins" pitchFamily="34" charset="0"/>
-                <a:ea typeface="Poppins" pitchFamily="34" charset="-122"/>
-                <a:cs typeface="Poppins" pitchFamily="34" charset="-120"/>
-              </a:rPr>
-              <a:t>$0</a:t>
-            </a:r>
-            <a:endParaRPr lang="en-US" sz="850" dirty="0"/>
-          </a:p>
-        </p:txBody>
-      </p:sp>
-      <p:sp>
-        <p:nvSpPr>
-          <p:cNvPr id="52" name="Text 50"/>
-          <p:cNvSpPr txBox="1"/>
-          <p:nvPr/>
-        </p:nvSpPr>
-        <p:spPr>
-          <a:xfrm>
-            <a:off x="4251960" y="3639312"/>
-            <a:ext cx="1188720" cy="512064"/>
-          </a:xfrm>
-          <a:prstGeom prst="rect">
-            <a:avLst/>
-          </a:prstGeom>
-          <a:noFill/>
-          <a:ln/>
-        </p:spPr>
-        <p:txBody>
-          <a:bodyPr wrap="square" lIns="0" tIns="0" rIns="0" bIns="0" rtlCol="0" anchor="ctr"/>
-          <a:lstStyle/>
-          <a:p>
-            <a:pPr algn="r" indent="0" marL="0">
-              <a:buNone/>
-            </a:pPr>
-            <a:r>
-              <a:rPr lang="en-US" sz="850" dirty="0">
-                <a:solidFill>
-                  <a:srgbClr val="C88A2E"/>
-                </a:solidFill>
-                <a:latin typeface="Poppins" pitchFamily="34" charset="0"/>
-                <a:ea typeface="Poppins" pitchFamily="34" charset="-122"/>
-                <a:cs typeface="Poppins" pitchFamily="34" charset="-120"/>
-              </a:rPr>
-              <a:t>starts Oct</a:t>
-            </a:r>
-            <a:endParaRPr lang="en-US" sz="850" dirty="0"/>
-          </a:p>
-        </p:txBody>
-      </p:sp>
-      <p:sp>
-        <p:nvSpPr>
-          <p:cNvPr id="53" name="Text 51"/>
-          <p:cNvSpPr txBox="1"/>
-          <p:nvPr/>
-        </p:nvSpPr>
-        <p:spPr>
-          <a:xfrm>
-            <a:off x="5486400" y="3639312"/>
-            <a:ext cx="868680" cy="512064"/>
-          </a:xfrm>
-          <a:prstGeom prst="rect">
-            <a:avLst/>
-          </a:prstGeom>
-          <a:noFill/>
-          <a:ln/>
-        </p:spPr>
-        <p:txBody>
-          <a:bodyPr wrap="square" lIns="0" tIns="0" rIns="0" bIns="0" rtlCol="0" anchor="ctr"/>
-          <a:lstStyle/>
-          <a:p>
-            <a:pPr algn="r" indent="0" marL="0">
-              <a:buNone/>
-            </a:pPr>
-            <a:r>
-              <a:rPr lang="en-US" sz="850" dirty="0">
-                <a:solidFill>
-                  <a:srgbClr val="5E7280"/>
-                </a:solidFill>
-                <a:latin typeface="Poppins" pitchFamily="34" charset="0"/>
-                <a:ea typeface="Poppins" pitchFamily="34" charset="-122"/>
-                <a:cs typeface="Poppins" pitchFamily="34" charset="-120"/>
-              </a:rPr>
-              <a:t>—</a:t>
-            </a:r>
-            <a:endParaRPr lang="en-US" sz="850" dirty="0"/>
-          </a:p>
-        </p:txBody>
-      </p:sp>
-      <p:sp>
-        <p:nvSpPr>
-          <p:cNvPr id="54" name="Text 52"/>
-          <p:cNvSpPr txBox="1"/>
-          <p:nvPr/>
-        </p:nvSpPr>
-        <p:spPr>
-          <a:xfrm>
-            <a:off x="6400800" y="3639312"/>
-            <a:ext cx="548640" cy="512064"/>
-          </a:xfrm>
-          <a:prstGeom prst="rect">
-            <a:avLst/>
-          </a:prstGeom>
-          <a:noFill/>
-          <a:ln/>
-        </p:spPr>
-        <p:txBody>
-          <a:bodyPr wrap="square" lIns="0" tIns="0" rIns="0" bIns="0" rtlCol="0" anchor="ctr"/>
-          <a:lstStyle/>
-          <a:p>
-            <a:pPr algn="r" indent="0" marL="0">
-              <a:buNone/>
-            </a:pPr>
-            <a:r>
-              <a:rPr lang="en-US" sz="850" dirty="0">
-                <a:solidFill>
-                  <a:srgbClr val="5E7280"/>
-                </a:solidFill>
-                <a:latin typeface="Poppins" pitchFamily="34" charset="0"/>
-                <a:ea typeface="Poppins" pitchFamily="34" charset="-122"/>
-                <a:cs typeface="Poppins" pitchFamily="34" charset="-120"/>
-              </a:rPr>
-              <a:t>$13k</a:t>
-            </a:r>
-            <a:endParaRPr lang="en-US" sz="850" dirty="0"/>
-          </a:p>
-        </p:txBody>
-      </p:sp>
-      <p:sp>
-        <p:nvSpPr>
-          <p:cNvPr id="55" name="Text 53"/>
-          <p:cNvSpPr txBox="1"/>
-          <p:nvPr/>
-        </p:nvSpPr>
-        <p:spPr>
-          <a:xfrm>
-            <a:off x="6995160" y="3639312"/>
-            <a:ext cx="914400" cy="512064"/>
-          </a:xfrm>
-          <a:prstGeom prst="rect">
-            <a:avLst/>
-          </a:prstGeom>
-          <a:noFill/>
-          <a:ln/>
-        </p:spPr>
-        <p:txBody>
-          <a:bodyPr wrap="square" lIns="0" tIns="0" rIns="0" bIns="0" rtlCol="0" anchor="ctr"/>
-          <a:lstStyle/>
-          <a:p>
-            <a:pPr algn="r" indent="0" marL="0">
-              <a:buNone/>
-            </a:pPr>
-            <a:r>
-              <a:rPr lang="en-US" sz="850" dirty="0">
-                <a:solidFill>
-                  <a:srgbClr val="5E7280"/>
-                </a:solidFill>
-                <a:latin typeface="Poppins" pitchFamily="34" charset="0"/>
-                <a:ea typeface="Poppins" pitchFamily="34" charset="-122"/>
-                <a:cs typeface="Poppins" pitchFamily="34" charset="-120"/>
-              </a:rPr>
-              <a:t>0 · $0</a:t>
-            </a:r>
-            <a:endParaRPr lang="en-US" sz="850" dirty="0"/>
-          </a:p>
-        </p:txBody>
-      </p:sp>
-      <p:sp>
-        <p:nvSpPr>
-          <p:cNvPr id="56" name="Shape 54"/>
-          <p:cNvSpPr/>
-          <p:nvPr/>
-        </p:nvSpPr>
-        <p:spPr>
-          <a:xfrm>
-            <a:off x="612648" y="4718304"/>
-            <a:ext cx="7232904" cy="6401"/>
-          </a:xfrm>
-          <a:prstGeom prst="rect">
-            <a:avLst/>
-          </a:prstGeom>
-          <a:solidFill>
-            <a:srgbClr val="E2EAEE"/>
-          </a:solidFill>
-          <a:ln/>
-        </p:spPr>
-      </p:sp>
-      <p:sp>
-        <p:nvSpPr>
-          <p:cNvPr id="57" name="Text 55"/>
-          <p:cNvSpPr txBox="1"/>
-          <p:nvPr/>
-        </p:nvSpPr>
-        <p:spPr>
-          <a:xfrm>
-            <a:off x="612648" y="4206240"/>
-            <a:ext cx="1874520" cy="512064"/>
-          </a:xfrm>
-          <a:prstGeom prst="rect">
-            <a:avLst/>
-          </a:prstGeom>
-          <a:noFill/>
-          <a:ln/>
-        </p:spPr>
-        <p:txBody>
-          <a:bodyPr wrap="square" lIns="0" tIns="0" rIns="0" bIns="0" rtlCol="0" anchor="ctr"/>
-          <a:lstStyle/>
-          <a:p>
-            <a:pPr algn="l" indent="0" marL="0">
-              <a:buNone/>
-            </a:pPr>
-            <a:r>
-              <a:rPr lang="en-US" sz="950" b="1" dirty="0">
-                <a:solidFill>
-                  <a:srgbClr val="12293A"/>
-                </a:solidFill>
-                <a:latin typeface="Poppins" pitchFamily="34" charset="0"/>
-                <a:ea typeface="Poppins" pitchFamily="34" charset="-122"/>
-                <a:cs typeface="Poppins" pitchFamily="34" charset="-120"/>
-              </a:rPr>
-              <a:t>Sentinel</a:t>
-            </a:r>
-            <a:endParaRPr lang="en-US" sz="950" dirty="0"/>
-          </a:p>
-        </p:txBody>
-      </p:sp>
-      <p:sp>
-        <p:nvSpPr>
-          <p:cNvPr id="58" name="Text 56"/>
-          <p:cNvSpPr txBox="1"/>
-          <p:nvPr/>
-        </p:nvSpPr>
-        <p:spPr>
-          <a:xfrm>
-            <a:off x="2560320" y="4206240"/>
-            <a:ext cx="777240" cy="512064"/>
-          </a:xfrm>
-          <a:prstGeom prst="rect">
-            <a:avLst/>
-          </a:prstGeom>
-          <a:noFill/>
-          <a:ln/>
-        </p:spPr>
-        <p:txBody>
-          <a:bodyPr wrap="square" lIns="0" tIns="0" rIns="0" bIns="0" rtlCol="0" anchor="ctr"/>
-          <a:lstStyle/>
-          <a:p>
-            <a:pPr algn="r" indent="0" marL="0">
-              <a:buNone/>
-            </a:pPr>
-            <a:r>
-              <a:rPr lang="en-US" sz="850" dirty="0">
-                <a:solidFill>
-                  <a:srgbClr val="5E7280"/>
-                </a:solidFill>
-                <a:latin typeface="Poppins" pitchFamily="34" charset="0"/>
-                <a:ea typeface="Poppins" pitchFamily="34" charset="-122"/>
-                <a:cs typeface="Poppins" pitchFamily="34" charset="-120"/>
-              </a:rPr>
-              <a:t>$1k</a:t>
-            </a:r>
-            <a:endParaRPr lang="en-US" sz="850" dirty="0"/>
-          </a:p>
-        </p:txBody>
-      </p:sp>
-      <p:sp>
-        <p:nvSpPr>
-          <p:cNvPr id="59" name="Text 57"/>
-          <p:cNvSpPr txBox="1"/>
-          <p:nvPr/>
-        </p:nvSpPr>
-        <p:spPr>
-          <a:xfrm>
-            <a:off x="3383280" y="4206240"/>
-            <a:ext cx="822960" cy="512064"/>
-          </a:xfrm>
-          <a:prstGeom prst="rect">
-            <a:avLst/>
-          </a:prstGeom>
-          <a:noFill/>
-          <a:ln/>
-        </p:spPr>
-        <p:txBody>
-          <a:bodyPr wrap="square" lIns="0" tIns="0" rIns="0" bIns="0" rtlCol="0" anchor="ctr"/>
-          <a:lstStyle/>
-          <a:p>
-            <a:pPr algn="r" indent="0" marL="0">
-              <a:buNone/>
-            </a:pPr>
-            <a:r>
-              <a:rPr lang="en-US" sz="850" b="1" dirty="0">
-                <a:solidFill>
-                  <a:srgbClr val="B4552D"/>
-                </a:solidFill>
-                <a:latin typeface="Poppins" pitchFamily="34" charset="0"/>
-                <a:ea typeface="Poppins" pitchFamily="34" charset="-122"/>
-                <a:cs typeface="Poppins" pitchFamily="34" charset="-120"/>
-              </a:rPr>
-              <a:t>$0</a:t>
-            </a:r>
-            <a:endParaRPr lang="en-US" sz="850" dirty="0"/>
-          </a:p>
-        </p:txBody>
-      </p:sp>
-      <p:sp>
-        <p:nvSpPr>
-          <p:cNvPr id="60" name="Text 58"/>
-          <p:cNvSpPr txBox="1"/>
-          <p:nvPr/>
-        </p:nvSpPr>
-        <p:spPr>
-          <a:xfrm>
-            <a:off x="4251960" y="4206240"/>
-            <a:ext cx="1188720" cy="512064"/>
-          </a:xfrm>
-          <a:prstGeom prst="rect">
-            <a:avLst/>
-          </a:prstGeom>
-          <a:noFill/>
-          <a:ln/>
-        </p:spPr>
-        <p:txBody>
-          <a:bodyPr wrap="square" lIns="0" tIns="0" rIns="0" bIns="0" rtlCol="0" anchor="ctr"/>
-          <a:lstStyle/>
-          <a:p>
-            <a:pPr algn="r" indent="0" marL="0">
-              <a:buNone/>
-            </a:pPr>
-            <a:r>
-              <a:rPr lang="en-US" sz="850" dirty="0">
-                <a:solidFill>
-                  <a:srgbClr val="C88A2E"/>
-                </a:solidFill>
-                <a:latin typeface="Poppins" pitchFamily="34" charset="0"/>
-                <a:ea typeface="Poppins" pitchFamily="34" charset="-122"/>
-                <a:cs typeface="Poppins" pitchFamily="34" charset="-120"/>
-              </a:rPr>
-              <a:t>0%</a:t>
-            </a:r>
-            <a:endParaRPr lang="en-US" sz="850" dirty="0"/>
-          </a:p>
-        </p:txBody>
-      </p:sp>
-      <p:sp>
-        <p:nvSpPr>
-          <p:cNvPr id="61" name="Text 59"/>
-          <p:cNvSpPr txBox="1"/>
-          <p:nvPr/>
-        </p:nvSpPr>
-        <p:spPr>
-          <a:xfrm>
-            <a:off x="5486400" y="4206240"/>
-            <a:ext cx="868680" cy="512064"/>
-          </a:xfrm>
-          <a:prstGeom prst="rect">
-            <a:avLst/>
-          </a:prstGeom>
-          <a:noFill/>
-          <a:ln/>
-        </p:spPr>
-        <p:txBody>
-          <a:bodyPr wrap="square" lIns="0" tIns="0" rIns="0" bIns="0" rtlCol="0" anchor="ctr"/>
-          <a:lstStyle/>
-          <a:p>
-            <a:pPr algn="r" indent="0" marL="0">
-              <a:buNone/>
-            </a:pPr>
-            <a:r>
-              <a:rPr lang="en-US" sz="850" dirty="0">
-                <a:solidFill>
-                  <a:srgbClr val="5E7280"/>
-                </a:solidFill>
-                <a:latin typeface="Poppins" pitchFamily="34" charset="0"/>
-                <a:ea typeface="Poppins" pitchFamily="34" charset="-122"/>
-                <a:cs typeface="Poppins" pitchFamily="34" charset="-120"/>
-              </a:rPr>
-              <a:t>—</a:t>
-            </a:r>
-            <a:endParaRPr lang="en-US" sz="850" dirty="0"/>
-          </a:p>
-        </p:txBody>
-      </p:sp>
-      <p:sp>
-        <p:nvSpPr>
-          <p:cNvPr id="62" name="Text 60"/>
-          <p:cNvSpPr txBox="1"/>
-          <p:nvPr/>
-        </p:nvSpPr>
-        <p:spPr>
-          <a:xfrm>
-            <a:off x="6400800" y="4206240"/>
-            <a:ext cx="548640" cy="512064"/>
-          </a:xfrm>
-          <a:prstGeom prst="rect">
-            <a:avLst/>
-          </a:prstGeom>
-          <a:noFill/>
-          <a:ln/>
-        </p:spPr>
-        <p:txBody>
-          <a:bodyPr wrap="square" lIns="0" tIns="0" rIns="0" bIns="0" rtlCol="0" anchor="ctr"/>
-          <a:lstStyle/>
-          <a:p>
-            <a:pPr algn="r" indent="0" marL="0">
-              <a:buNone/>
-            </a:pPr>
-            <a:r>
-              <a:rPr lang="en-US" sz="850" dirty="0">
-                <a:solidFill>
-                  <a:srgbClr val="5E7280"/>
-                </a:solidFill>
-                <a:latin typeface="Poppins" pitchFamily="34" charset="0"/>
-                <a:ea typeface="Poppins" pitchFamily="34" charset="-122"/>
-                <a:cs typeface="Poppins" pitchFamily="34" charset="-120"/>
-              </a:rPr>
-              <a:t>$9k</a:t>
-            </a:r>
-            <a:endParaRPr lang="en-US" sz="850" dirty="0"/>
-          </a:p>
-        </p:txBody>
-      </p:sp>
-      <p:sp>
-        <p:nvSpPr>
-          <p:cNvPr id="63" name="Text 61"/>
-          <p:cNvSpPr txBox="1"/>
-          <p:nvPr/>
-        </p:nvSpPr>
-        <p:spPr>
-          <a:xfrm>
-            <a:off x="6995160" y="4206240"/>
-            <a:ext cx="914400" cy="512064"/>
-          </a:xfrm>
-          <a:prstGeom prst="rect">
-            <a:avLst/>
-          </a:prstGeom>
-          <a:noFill/>
-          <a:ln/>
-        </p:spPr>
-        <p:txBody>
-          <a:bodyPr wrap="square" lIns="0" tIns="0" rIns="0" bIns="0" rtlCol="0" anchor="ctr"/>
-          <a:lstStyle/>
-          <a:p>
-            <a:pPr algn="r" indent="0" marL="0">
-              <a:buNone/>
-            </a:pPr>
-            <a:r>
-              <a:rPr lang="en-US" sz="850" dirty="0">
-                <a:solidFill>
-                  <a:srgbClr val="5E7280"/>
-                </a:solidFill>
-                <a:latin typeface="Poppins" pitchFamily="34" charset="0"/>
-                <a:ea typeface="Poppins" pitchFamily="34" charset="-122"/>
-                <a:cs typeface="Poppins" pitchFamily="34" charset="-120"/>
-              </a:rPr>
-              <a:t>2 · $598/mo</a:t>
-            </a:r>
-            <a:endParaRPr lang="en-US" sz="850" dirty="0"/>
-          </a:p>
-        </p:txBody>
-      </p:sp>
-      <p:sp>
-        <p:nvSpPr>
-          <p:cNvPr id="64" name="Shape 62"/>
-          <p:cNvSpPr/>
-          <p:nvPr/>
-        </p:nvSpPr>
-        <p:spPr>
-          <a:xfrm>
-            <a:off x="612648" y="5285232"/>
-            <a:ext cx="7232904" cy="6401"/>
-          </a:xfrm>
-          <a:prstGeom prst="rect">
-            <a:avLst/>
-          </a:prstGeom>
-          <a:solidFill>
-            <a:srgbClr val="E2EAEE"/>
-          </a:solidFill>
-          <a:ln/>
-        </p:spPr>
-      </p:sp>
-      <p:sp>
-        <p:nvSpPr>
-          <p:cNvPr id="65" name="Text 63"/>
-          <p:cNvSpPr txBox="1"/>
-          <p:nvPr/>
-        </p:nvSpPr>
-        <p:spPr>
-          <a:xfrm>
-            <a:off x="612648" y="4773168"/>
-            <a:ext cx="1874520" cy="512064"/>
-          </a:xfrm>
-          <a:prstGeom prst="rect">
-            <a:avLst/>
-          </a:prstGeom>
-          <a:noFill/>
-          <a:ln/>
-        </p:spPr>
-        <p:txBody>
-          <a:bodyPr wrap="square" lIns="0" tIns="0" rIns="0" bIns="0" rtlCol="0" anchor="ctr"/>
-          <a:lstStyle/>
-          <a:p>
-            <a:pPr algn="l" indent="0" marL="0">
-              <a:buNone/>
-            </a:pPr>
-            <a:r>
-              <a:rPr lang="en-US" sz="950" b="1" dirty="0">
-                <a:solidFill>
-                  <a:srgbClr val="12293A"/>
-                </a:solidFill>
-                <a:latin typeface="Poppins" pitchFamily="34" charset="0"/>
-                <a:ea typeface="Poppins" pitchFamily="34" charset="-122"/>
-                <a:cs typeface="Poppins" pitchFamily="34" charset="-120"/>
-              </a:rPr>
-              <a:t>Roam (MobilePOS)</a:t>
-            </a:r>
-            <a:endParaRPr lang="en-US" sz="950" dirty="0"/>
-          </a:p>
-        </p:txBody>
-      </p:sp>
-      <p:sp>
-        <p:nvSpPr>
-          <p:cNvPr id="66" name="Text 64"/>
-          <p:cNvSpPr txBox="1"/>
-          <p:nvPr/>
-        </p:nvSpPr>
-        <p:spPr>
-          <a:xfrm>
-            <a:off x="2560320" y="4773168"/>
-            <a:ext cx="777240" cy="512064"/>
-          </a:xfrm>
-          <a:prstGeom prst="rect">
-            <a:avLst/>
-          </a:prstGeom>
-          <a:noFill/>
-          <a:ln/>
-        </p:spPr>
-        <p:txBody>
-          <a:bodyPr wrap="square" lIns="0" tIns="0" rIns="0" bIns="0" rtlCol="0" anchor="ctr"/>
-          <a:lstStyle/>
-          <a:p>
-            <a:pPr algn="r" indent="0" marL="0">
-              <a:buNone/>
-            </a:pPr>
-            <a:r>
-              <a:rPr lang="en-US" sz="850" dirty="0">
-                <a:solidFill>
-                  <a:srgbClr val="5E7280"/>
-                </a:solidFill>
-                <a:latin typeface="Poppins" pitchFamily="34" charset="0"/>
-                <a:ea typeface="Poppins" pitchFamily="34" charset="-122"/>
-                <a:cs typeface="Poppins" pitchFamily="34" charset="-120"/>
-              </a:rPr>
-              <a:t>$4k</a:t>
-            </a:r>
-            <a:endParaRPr lang="en-US" sz="850" dirty="0"/>
-          </a:p>
-        </p:txBody>
-      </p:sp>
-      <p:sp>
-        <p:nvSpPr>
-          <p:cNvPr id="67" name="Text 65"/>
-          <p:cNvSpPr txBox="1"/>
-          <p:nvPr/>
-        </p:nvSpPr>
-        <p:spPr>
-          <a:xfrm>
-            <a:off x="3383280" y="4773168"/>
-            <a:ext cx="822960" cy="512064"/>
-          </a:xfrm>
-          <a:prstGeom prst="rect">
-            <a:avLst/>
-          </a:prstGeom>
-          <a:noFill/>
-          <a:ln/>
-        </p:spPr>
-        <p:txBody>
-          <a:bodyPr wrap="square" lIns="0" tIns="0" rIns="0" bIns="0" rtlCol="0" anchor="ctr"/>
-          <a:lstStyle/>
-          <a:p>
-            <a:pPr algn="r" indent="0" marL="0">
-              <a:buNone/>
-            </a:pPr>
-            <a:r>
-              <a:rPr lang="en-US" sz="850" b="1" dirty="0">
-                <a:solidFill>
-                  <a:srgbClr val="B4552D"/>
-                </a:solidFill>
-                <a:latin typeface="Poppins" pitchFamily="34" charset="0"/>
-                <a:ea typeface="Poppins" pitchFamily="34" charset="-122"/>
-                <a:cs typeface="Poppins" pitchFamily="34" charset="-120"/>
-              </a:rPr>
-              <a:t>$0</a:t>
-            </a:r>
-            <a:endParaRPr lang="en-US" sz="850" dirty="0"/>
-          </a:p>
-        </p:txBody>
-      </p:sp>
-      <p:sp>
-        <p:nvSpPr>
-          <p:cNvPr id="68" name="Text 66"/>
-          <p:cNvSpPr txBox="1"/>
-          <p:nvPr/>
-        </p:nvSpPr>
-        <p:spPr>
-          <a:xfrm>
-            <a:off x="4251960" y="4773168"/>
-            <a:ext cx="1188720" cy="512064"/>
-          </a:xfrm>
-          <a:prstGeom prst="rect">
-            <a:avLst/>
-          </a:prstGeom>
-          <a:noFill/>
-          <a:ln/>
-        </p:spPr>
-        <p:txBody>
-          <a:bodyPr wrap="square" lIns="0" tIns="0" rIns="0" bIns="0" rtlCol="0" anchor="ctr"/>
-          <a:lstStyle/>
-          <a:p>
-            <a:pPr algn="r" indent="0" marL="0">
-              <a:buNone/>
-            </a:pPr>
-            <a:r>
-              <a:rPr lang="en-US" sz="850" dirty="0">
-                <a:solidFill>
-                  <a:srgbClr val="C88A2E"/>
-                </a:solidFill>
-                <a:latin typeface="Poppins" pitchFamily="34" charset="0"/>
-                <a:ea typeface="Poppins" pitchFamily="34" charset="-122"/>
-                <a:cs typeface="Poppins" pitchFamily="34" charset="-120"/>
-              </a:rPr>
-              <a:t>2 wins · MRR untagged</a:t>
-            </a:r>
-            <a:endParaRPr lang="en-US" sz="850" dirty="0"/>
-          </a:p>
-        </p:txBody>
-      </p:sp>
-      <p:sp>
-        <p:nvSpPr>
-          <p:cNvPr id="69" name="Text 67"/>
-          <p:cNvSpPr txBox="1"/>
-          <p:nvPr/>
-        </p:nvSpPr>
-        <p:spPr>
-          <a:xfrm>
-            <a:off x="5486400" y="4773168"/>
-            <a:ext cx="868680" cy="512064"/>
-          </a:xfrm>
-          <a:prstGeom prst="rect">
-            <a:avLst/>
-          </a:prstGeom>
-          <a:noFill/>
-          <a:ln/>
-        </p:spPr>
-        <p:txBody>
-          <a:bodyPr wrap="square" lIns="0" tIns="0" rIns="0" bIns="0" rtlCol="0" anchor="ctr"/>
-          <a:lstStyle/>
-          <a:p>
-            <a:pPr algn="r" indent="0" marL="0">
-              <a:buNone/>
-            </a:pPr>
-            <a:r>
-              <a:rPr lang="en-US" sz="850" dirty="0">
-                <a:solidFill>
-                  <a:srgbClr val="5E7280"/>
-                </a:solidFill>
-                <a:latin typeface="Poppins" pitchFamily="34" charset="0"/>
-                <a:ea typeface="Poppins" pitchFamily="34" charset="-122"/>
-                <a:cs typeface="Poppins" pitchFamily="34" charset="-120"/>
-              </a:rPr>
-              <a:t>+10 deals</a:t>
-            </a:r>
-            <a:endParaRPr lang="en-US" sz="850" dirty="0"/>
-          </a:p>
-        </p:txBody>
-      </p:sp>
-      <p:sp>
-        <p:nvSpPr>
-          <p:cNvPr id="70" name="Text 68"/>
-          <p:cNvSpPr txBox="1"/>
-          <p:nvPr/>
-        </p:nvSpPr>
-        <p:spPr>
-          <a:xfrm>
-            <a:off x="6400800" y="4773168"/>
-            <a:ext cx="548640" cy="512064"/>
-          </a:xfrm>
-          <a:prstGeom prst="rect">
-            <a:avLst/>
-          </a:prstGeom>
-          <a:noFill/>
-          <a:ln/>
-        </p:spPr>
-        <p:txBody>
-          <a:bodyPr wrap="square" lIns="0" tIns="0" rIns="0" bIns="0" rtlCol="0" anchor="ctr"/>
-          <a:lstStyle/>
-          <a:p>
-            <a:pPr algn="r" indent="0" marL="0">
-              <a:buNone/>
-            </a:pPr>
-            <a:r>
-              <a:rPr lang="en-US" sz="850" dirty="0">
-                <a:solidFill>
-                  <a:srgbClr val="5E7280"/>
-                </a:solidFill>
-                <a:latin typeface="Poppins" pitchFamily="34" charset="0"/>
-                <a:ea typeface="Poppins" pitchFamily="34" charset="-122"/>
-                <a:cs typeface="Poppins" pitchFamily="34" charset="-120"/>
-              </a:rPr>
-              <a:t>$32k</a:t>
-            </a:r>
-            <a:endParaRPr lang="en-US" sz="850" dirty="0"/>
-          </a:p>
-        </p:txBody>
-      </p:sp>
-      <p:sp>
-        <p:nvSpPr>
-          <p:cNvPr id="71" name="Text 69"/>
-          <p:cNvSpPr txBox="1"/>
-          <p:nvPr/>
-        </p:nvSpPr>
-        <p:spPr>
-          <a:xfrm>
-            <a:off x="6995160" y="4773168"/>
-            <a:ext cx="914400" cy="512064"/>
-          </a:xfrm>
-          <a:prstGeom prst="rect">
-            <a:avLst/>
-          </a:prstGeom>
-          <a:noFill/>
-          <a:ln/>
-        </p:spPr>
-        <p:txBody>
-          <a:bodyPr wrap="square" lIns="0" tIns="0" rIns="0" bIns="0" rtlCol="0" anchor="ctr"/>
-          <a:lstStyle/>
-          <a:p>
-            <a:pPr algn="r" indent="0" marL="0">
-              <a:buNone/>
-            </a:pPr>
-            <a:r>
-              <a:rPr lang="en-US" sz="850" dirty="0">
-                <a:solidFill>
-                  <a:srgbClr val="5E7280"/>
-                </a:solidFill>
-                <a:latin typeface="Poppins" pitchFamily="34" charset="0"/>
-                <a:ea typeface="Poppins" pitchFamily="34" charset="-122"/>
-                <a:cs typeface="Poppins" pitchFamily="34" charset="-120"/>
-              </a:rPr>
-              <a:t>18 · $372/mo</a:t>
-            </a:r>
-            <a:endParaRPr lang="en-US" sz="850" dirty="0"/>
-          </a:p>
-        </p:txBody>
-      </p:sp>
-      <p:sp>
-        <p:nvSpPr>
-          <p:cNvPr id="72" name="Shape 70"/>
-          <p:cNvSpPr/>
-          <p:nvPr/>
-        </p:nvSpPr>
-        <p:spPr>
-          <a:xfrm>
-            <a:off x="612648" y="5358384"/>
-            <a:ext cx="7232904" cy="14630"/>
-          </a:xfrm>
-          <a:prstGeom prst="rect">
-            <a:avLst/>
-          </a:prstGeom>
-          <a:solidFill>
-            <a:srgbClr val="12293A"/>
-          </a:solidFill>
-          <a:ln/>
-        </p:spPr>
-      </p:sp>
-      <p:sp>
-        <p:nvSpPr>
-          <p:cNvPr id="73" name="Text 71"/>
-          <p:cNvSpPr txBox="1"/>
-          <p:nvPr/>
-        </p:nvSpPr>
-        <p:spPr>
-          <a:xfrm>
-            <a:off x="612648" y="5413248"/>
-            <a:ext cx="7232904" cy="274320"/>
-          </a:xfrm>
-          <a:prstGeom prst="rect">
-            <a:avLst/>
-          </a:prstGeom>
-          <a:noFill/>
-          <a:ln/>
-        </p:spPr>
-        <p:txBody>
-          <a:bodyPr wrap="square" lIns="0" tIns="0" rIns="0" bIns="0" rtlCol="0" anchor="ctr"/>
-          <a:lstStyle/>
-          <a:p>
-            <a:pPr indent="0" marL="0">
-              <a:buNone/>
-            </a:pPr>
-            <a:r>
-              <a:rPr lang="en-US" sz="950" b="1" dirty="0">
-                <a:solidFill>
-                  <a:srgbClr val="12293A"/>
-                </a:solidFill>
-                <a:latin typeface="Poppins" pitchFamily="34" charset="0"/>
-                <a:ea typeface="Poppins" pitchFamily="34" charset="-122"/>
-                <a:cs typeface="Poppins" pitchFamily="34" charset="-120"/>
-              </a:rPr>
-              <a:t>TOTAL   </a:t>
-            </a:r>
-            <a:pPr indent="0" marL="0">
-              <a:buNone/>
-            </a:pPr>
-            <a:r>
-              <a:rPr lang="en-US" sz="850" dirty="0">
-                <a:solidFill>
-                  <a:srgbClr val="5E7280"/>
-                </a:solidFill>
-                <a:latin typeface="Poppins" pitchFamily="34" charset="0"/>
-                <a:ea typeface="Poppins" pitchFamily="34" charset="-122"/>
-                <a:cs typeface="Poppins" pitchFamily="34" charset="-120"/>
-              </a:rPr>
-              <a:t>$30k committed · $0 recorded · open pipe 24 deals · ~$1.6k/mo keyword-matched</a:t>
-            </a:r>
-            <a:endParaRPr lang="en-US" sz="950" dirty="0"/>
-          </a:p>
-        </p:txBody>
-      </p:sp>
-      <p:sp>
-        <p:nvSpPr>
-          <p:cNvPr id="74" name="Text 72"/>
-          <p:cNvSpPr txBox="1"/>
-          <p:nvPr/>
-        </p:nvSpPr>
-        <p:spPr>
-          <a:xfrm>
-            <a:off x="612648" y="5779008"/>
-            <a:ext cx="7232904" cy="237744"/>
-          </a:xfrm>
-          <a:prstGeom prst="rect">
-            <a:avLst/>
-          </a:prstGeom>
-          <a:noFill/>
-          <a:ln/>
-        </p:spPr>
-        <p:txBody>
-          <a:bodyPr wrap="square" lIns="0" tIns="0" rIns="0" bIns="0" rtlCol="0" anchor="ctr"/>
-          <a:lstStyle/>
-          <a:p>
-            <a:pPr indent="0" marL="0">
-              <a:buNone/>
-            </a:pPr>
-            <a:r>
-              <a:rPr lang="en-US" sz="850" b="1" dirty="0">
-                <a:solidFill>
-                  <a:srgbClr val="2C8394"/>
-                </a:solidFill>
-                <a:latin typeface="Poppins" pitchFamily="34" charset="0"/>
-                <a:ea typeface="Poppins" pitchFamily="34" charset="-122"/>
-                <a:cs typeface="Poppins" pitchFamily="34" charset="-120"/>
-              </a:rPr>
-              <a:t>COMMITTED TRAJECTORY   </a:t>
-            </a:r>
-            <a:pPr indent="0" marL="0">
-              <a:buNone/>
-            </a:pPr>
-            <a:r>
-              <a:rPr lang="en-US" sz="850" dirty="0">
-                <a:solidFill>
-                  <a:srgbClr val="5E7280"/>
-                </a:solidFill>
-                <a:latin typeface="Poppins" pitchFamily="34" charset="0"/>
-                <a:ea typeface="Poppins" pitchFamily="34" charset="-122"/>
-                <a:cs typeface="Poppins" pitchFamily="34" charset="-120"/>
-              </a:rPr>
-              <a:t>Aug $10k → Sep $30k → Oct $60k → Nov $97k → Dec $137k</a:t>
-            </a:r>
-            <a:endParaRPr lang="en-US" sz="850" dirty="0"/>
-          </a:p>
-        </p:txBody>
-      </p:sp>
-      <p:sp>
-        <p:nvSpPr>
-          <p:cNvPr id="75" name="Shape 73"/>
-          <p:cNvSpPr/>
-          <p:nvPr/>
-        </p:nvSpPr>
-        <p:spPr>
-          <a:xfrm>
-            <a:off x="8229600" y="2340864"/>
-            <a:ext cx="3547872" cy="4041648"/>
+              <a:t>A$361 · 2 deals since 1 Jul</a:t>
+            </a:r>
+            <a:endParaRPr lang="en-US" sz="780" dirty="0"/>
+          </a:p>
+        </p:txBody>
+      </p:sp>
+      <p:sp>
+        <p:nvSpPr>
+          <p:cNvPr id="27" name="Shape 25"/>
+          <p:cNvSpPr/>
+          <p:nvPr/>
+        </p:nvSpPr>
+        <p:spPr>
+          <a:xfrm>
+            <a:off x="9052560" y="987552"/>
+            <a:ext cx="2724912" cy="1097280"/>
           </a:xfrm>
           <a:prstGeom prst="roundRect">
             <a:avLst>
-              <a:gd name="adj" fmla="val 1804"/>
+              <a:gd name="adj" fmla="val 5833"/>
             </a:avLst>
           </a:prstGeom>
           <a:solidFill>
@@ -45260,14 +43491,1605 @@
       </p:sp>
       <p:sp>
         <p:nvSpPr>
+          <p:cNvPr id="28" name="Text 26"/>
+          <p:cNvSpPr txBox="1"/>
+          <p:nvPr/>
+        </p:nvSpPr>
+        <p:spPr>
+          <a:xfrm>
+            <a:off x="9217152" y="1078992"/>
+            <a:ext cx="2395728" cy="274320"/>
+          </a:xfrm>
+          <a:prstGeom prst="rect">
+            <a:avLst/>
+          </a:prstGeom>
+          <a:noFill/>
+          <a:ln/>
+        </p:spPr>
+        <p:txBody>
+          <a:bodyPr wrap="square" lIns="0" tIns="0" rIns="0" bIns="0" rtlCol="0" anchor="ctr"/>
+          <a:lstStyle/>
+          <a:p>
+            <a:pPr indent="0" marL="0">
+              <a:buNone/>
+            </a:pPr>
+            <a:r>
+              <a:rPr lang="en-US" sz="950" b="1" dirty="0">
+                <a:solidFill>
+                  <a:srgbClr val="2C8394"/>
+                </a:solidFill>
+                <a:latin typeface="Poppins" pitchFamily="34" charset="0"/>
+                <a:ea typeface="Poppins" pitchFamily="34" charset="-122"/>
+                <a:cs typeface="Poppins" pitchFamily="34" charset="-120"/>
+              </a:rPr>
+              <a:t>CONVERSION — OF CLOSED</a:t>
+            </a:r>
+            <a:endParaRPr lang="en-US" sz="950" dirty="0"/>
+          </a:p>
+        </p:txBody>
+      </p:sp>
+      <p:sp>
+        <p:nvSpPr>
+          <p:cNvPr id="29" name="Text 27"/>
+          <p:cNvSpPr txBox="1"/>
+          <p:nvPr/>
+        </p:nvSpPr>
+        <p:spPr>
+          <a:xfrm>
+            <a:off x="9198864" y="1261872"/>
+            <a:ext cx="2432304" cy="310896"/>
+          </a:xfrm>
+          <a:prstGeom prst="rect">
+            <a:avLst/>
+          </a:prstGeom>
+          <a:noFill/>
+          <a:ln/>
+        </p:spPr>
+        <p:txBody>
+          <a:bodyPr wrap="square" lIns="0" tIns="0" rIns="0" bIns="0" rtlCol="0" anchor="ctr"/>
+          <a:lstStyle/>
+          <a:p>
+            <a:pPr indent="0" marL="0">
+              <a:buNone/>
+            </a:pPr>
+            <a:r>
+              <a:rPr lang="en-US" sz="2400" b="1" dirty="0">
+                <a:solidFill>
+                  <a:srgbClr val="2C8394"/>
+                </a:solidFill>
+                <a:latin typeface="Poppins" pitchFamily="34" charset="0"/>
+                <a:ea typeface="Poppins" pitchFamily="34" charset="-122"/>
+                <a:cs typeface="Poppins" pitchFamily="34" charset="-120"/>
+              </a:rPr>
+              <a:t>71%</a:t>
+            </a:r>
+            <a:endParaRPr lang="en-US" sz="2400" dirty="0"/>
+          </a:p>
+        </p:txBody>
+      </p:sp>
+      <p:sp>
+        <p:nvSpPr>
+          <p:cNvPr id="30" name="Text 28"/>
+          <p:cNvSpPr txBox="1"/>
+          <p:nvPr/>
+        </p:nvSpPr>
+        <p:spPr>
+          <a:xfrm>
+            <a:off x="9217152" y="1609344"/>
+            <a:ext cx="2395728" cy="420624"/>
+          </a:xfrm>
+          <a:prstGeom prst="rect">
+            <a:avLst/>
+          </a:prstGeom>
+          <a:noFill/>
+          <a:ln/>
+        </p:spPr>
+        <p:txBody>
+          <a:bodyPr wrap="square" lIns="0" tIns="0" rIns="0" bIns="0" rtlCol="0" anchor="t"/>
+          <a:lstStyle/>
+          <a:p>
+            <a:pPr indent="0" marL="0">
+              <a:buNone/>
+            </a:pPr>
+            <a:r>
+              <a:rPr lang="en-US" sz="780" dirty="0">
+                <a:solidFill>
+                  <a:srgbClr val="5E7280"/>
+                </a:solidFill>
+                <a:latin typeface="Poppins" pitchFamily="34" charset="0"/>
+                <a:ea typeface="Poppins" pitchFamily="34" charset="-122"/>
+                <a:cs typeface="Poppins" pitchFamily="34" charset="-120"/>
+              </a:rPr>
+              <a:t>5 placed / 2 lost by count · 38% by value</a:t>
+            </a:r>
+            <a:endParaRPr lang="en-US" sz="780" dirty="0"/>
+          </a:p>
+        </p:txBody>
+      </p:sp>
+      <p:sp>
+        <p:nvSpPr>
+          <p:cNvPr id="31" name="Shape 29"/>
+          <p:cNvSpPr/>
+          <p:nvPr/>
+        </p:nvSpPr>
+        <p:spPr>
+          <a:xfrm>
+            <a:off x="411480" y="2212848"/>
+            <a:ext cx="6858000" cy="3200400"/>
+          </a:xfrm>
+          <a:prstGeom prst="roundRect">
+            <a:avLst>
+              <a:gd name="adj" fmla="val 2000"/>
+            </a:avLst>
+          </a:prstGeom>
+          <a:solidFill>
+            <a:srgbClr val="FFFFFF"/>
+          </a:solidFill>
+          <a:ln/>
+          <a:effectLst>
+            <a:outerShdw sx="100000" sy="100000" kx="0" ky="0" algn="bl" rotWithShape="0" blurRad="76200" dist="25400" dir="5400000">
+              <a:srgbClr val="9AAAB5">
+                <a:alpha val="35000"/>
+              </a:srgbClr>
+            </a:outerShdw>
+          </a:effectLst>
+        </p:spPr>
+      </p:sp>
+      <p:sp>
+        <p:nvSpPr>
+          <p:cNvPr id="32" name="Text 30"/>
+          <p:cNvSpPr txBox="1"/>
+          <p:nvPr/>
+        </p:nvSpPr>
+        <p:spPr>
+          <a:xfrm>
+            <a:off x="612648" y="2304288"/>
+            <a:ext cx="6455664" cy="219456"/>
+          </a:xfrm>
+          <a:prstGeom prst="rect">
+            <a:avLst/>
+          </a:prstGeom>
+          <a:noFill/>
+          <a:ln/>
+        </p:spPr>
+        <p:txBody>
+          <a:bodyPr wrap="square" lIns="0" tIns="0" rIns="0" bIns="0" rtlCol="0" anchor="ctr"/>
+          <a:lstStyle/>
+          <a:p>
+            <a:pPr indent="0" marL="0">
+              <a:buNone/>
+            </a:pPr>
+            <a:r>
+              <a:rPr lang="en-US" sz="1150" b="1" dirty="0">
+                <a:solidFill>
+                  <a:srgbClr val="2C8394"/>
+                </a:solidFill>
+                <a:latin typeface="Poppins" pitchFamily="34" charset="0"/>
+                <a:ea typeface="Poppins" pitchFamily="34" charset="-122"/>
+                <a:cs typeface="Poppins" pitchFamily="34" charset="-120"/>
+              </a:rPr>
+              <a:t>PIPELINE BY STAGE   </a:t>
+            </a:r>
+            <a:pPr indent="0" marL="0">
+              <a:buNone/>
+            </a:pPr>
+            <a:r>
+              <a:rPr lang="en-US" sz="680" dirty="0">
+                <a:solidFill>
+                  <a:srgbClr val="8FA1AC"/>
+                </a:solidFill>
+                <a:latin typeface="Poppins" pitchFamily="34" charset="0"/>
+                <a:ea typeface="Poppins" pitchFamily="34" charset="-122"/>
+                <a:cs typeface="Poppins" pitchFamily="34" charset="-120"/>
+              </a:rPr>
+              <a:t>converted at 0.7122 AUD→USD</a:t>
+            </a:r>
+            <a:endParaRPr lang="en-US" sz="1150" dirty="0"/>
+          </a:p>
+        </p:txBody>
+      </p:sp>
+      <p:sp>
+        <p:nvSpPr>
+          <p:cNvPr id="33" name="Text 31"/>
+          <p:cNvSpPr txBox="1"/>
+          <p:nvPr/>
+        </p:nvSpPr>
+        <p:spPr>
+          <a:xfrm>
+            <a:off x="667512" y="2633472"/>
+            <a:ext cx="1097280" cy="347472"/>
+          </a:xfrm>
+          <a:prstGeom prst="rect">
+            <a:avLst/>
+          </a:prstGeom>
+          <a:noFill/>
+          <a:ln/>
+        </p:spPr>
+        <p:txBody>
+          <a:bodyPr wrap="square" lIns="0" tIns="0" rIns="0" bIns="0" rtlCol="0" anchor="ctr"/>
+          <a:lstStyle/>
+          <a:p>
+            <a:pPr indent="0" marL="0">
+              <a:buNone/>
+            </a:pPr>
+            <a:r>
+              <a:rPr lang="en-US" sz="850" b="1" dirty="0">
+                <a:solidFill>
+                  <a:srgbClr val="12293A"/>
+                </a:solidFill>
+                <a:latin typeface="Poppins" pitchFamily="34" charset="0"/>
+                <a:ea typeface="Poppins" pitchFamily="34" charset="-122"/>
+                <a:cs typeface="Poppins" pitchFamily="34" charset="-120"/>
+              </a:rPr>
+              <a:t>Discovery</a:t>
+            </a:r>
+            <a:endParaRPr lang="en-US" sz="850" dirty="0"/>
+          </a:p>
+        </p:txBody>
+      </p:sp>
+      <p:sp>
+        <p:nvSpPr>
+          <p:cNvPr id="34" name="Shape 32"/>
+          <p:cNvSpPr/>
+          <p:nvPr/>
+        </p:nvSpPr>
+        <p:spPr>
+          <a:xfrm>
+            <a:off x="1828800" y="2734056"/>
+            <a:ext cx="119409" cy="182880"/>
+          </a:xfrm>
+          <a:prstGeom prst="roundRect">
+            <a:avLst>
+              <a:gd name="adj" fmla="val 61262"/>
+            </a:avLst>
+          </a:prstGeom>
+          <a:solidFill>
+            <a:srgbClr val="2C8394"/>
+          </a:solidFill>
+          <a:ln/>
+        </p:spPr>
+      </p:sp>
+      <p:sp>
+        <p:nvSpPr>
+          <p:cNvPr id="35" name="Text 33"/>
+          <p:cNvSpPr txBox="1"/>
+          <p:nvPr/>
+        </p:nvSpPr>
+        <p:spPr>
+          <a:xfrm>
+            <a:off x="5669280" y="2633472"/>
+            <a:ext cx="868680" cy="347472"/>
+          </a:xfrm>
+          <a:prstGeom prst="rect">
+            <a:avLst/>
+          </a:prstGeom>
+          <a:noFill/>
+          <a:ln/>
+        </p:spPr>
+        <p:txBody>
+          <a:bodyPr wrap="square" lIns="0" tIns="0" rIns="0" bIns="0" rtlCol="0" anchor="ctr"/>
+          <a:lstStyle/>
+          <a:p>
+            <a:pPr algn="r" indent="0" marL="0">
+              <a:buNone/>
+            </a:pPr>
+            <a:r>
+              <a:rPr lang="en-US" sz="900" b="1" dirty="0">
+                <a:solidFill>
+                  <a:srgbClr val="2C8394"/>
+                </a:solidFill>
+                <a:latin typeface="Poppins" pitchFamily="34" charset="0"/>
+                <a:ea typeface="Poppins" pitchFamily="34" charset="-122"/>
+                <a:cs typeface="Poppins" pitchFamily="34" charset="-120"/>
+              </a:rPr>
+              <a:t>US$41</a:t>
+            </a:r>
+            <a:endParaRPr lang="en-US" sz="900" dirty="0"/>
+          </a:p>
+        </p:txBody>
+      </p:sp>
+      <p:sp>
+        <p:nvSpPr>
+          <p:cNvPr id="36" name="Text 34"/>
+          <p:cNvSpPr txBox="1"/>
+          <p:nvPr/>
+        </p:nvSpPr>
+        <p:spPr>
+          <a:xfrm>
+            <a:off x="6583680" y="2633472"/>
+            <a:ext cx="658368" cy="347472"/>
+          </a:xfrm>
+          <a:prstGeom prst="rect">
+            <a:avLst/>
+          </a:prstGeom>
+          <a:noFill/>
+          <a:ln/>
+        </p:spPr>
+        <p:txBody>
+          <a:bodyPr wrap="square" lIns="0" tIns="0" rIns="0" bIns="0" rtlCol="0" anchor="ctr"/>
+          <a:lstStyle/>
+          <a:p>
+            <a:pPr algn="r" indent="0" marL="0">
+              <a:buNone/>
+            </a:pPr>
+            <a:r>
+              <a:rPr lang="en-US" sz="750" dirty="0">
+                <a:solidFill>
+                  <a:srgbClr val="5E7280"/>
+                </a:solidFill>
+                <a:latin typeface="Poppins" pitchFamily="34" charset="0"/>
+                <a:ea typeface="Poppins" pitchFamily="34" charset="-122"/>
+                <a:cs typeface="Poppins" pitchFamily="34" charset="-120"/>
+              </a:rPr>
+              <a:t>1 deal</a:t>
+            </a:r>
+            <a:endParaRPr lang="en-US" sz="750" dirty="0"/>
+          </a:p>
+        </p:txBody>
+      </p:sp>
+      <p:sp>
+        <p:nvSpPr>
+          <p:cNvPr id="37" name="Text 35"/>
+          <p:cNvSpPr txBox="1"/>
+          <p:nvPr/>
+        </p:nvSpPr>
+        <p:spPr>
+          <a:xfrm>
+            <a:off x="667512" y="2980944"/>
+            <a:ext cx="1097280" cy="347472"/>
+          </a:xfrm>
+          <a:prstGeom prst="rect">
+            <a:avLst/>
+          </a:prstGeom>
+          <a:noFill/>
+          <a:ln/>
+        </p:spPr>
+        <p:txBody>
+          <a:bodyPr wrap="square" lIns="0" tIns="0" rIns="0" bIns="0" rtlCol="0" anchor="ctr"/>
+          <a:lstStyle/>
+          <a:p>
+            <a:pPr indent="0" marL="0">
+              <a:buNone/>
+            </a:pPr>
+            <a:r>
+              <a:rPr lang="en-US" sz="850" b="1" dirty="0">
+                <a:solidFill>
+                  <a:srgbClr val="12293A"/>
+                </a:solidFill>
+                <a:latin typeface="Poppins" pitchFamily="34" charset="0"/>
+                <a:ea typeface="Poppins" pitchFamily="34" charset="-122"/>
+                <a:cs typeface="Poppins" pitchFamily="34" charset="-120"/>
+              </a:rPr>
+              <a:t>Quote Sent</a:t>
+            </a:r>
+            <a:endParaRPr lang="en-US" sz="850" dirty="0"/>
+          </a:p>
+        </p:txBody>
+      </p:sp>
+      <p:sp>
+        <p:nvSpPr>
+          <p:cNvPr id="38" name="Shape 36"/>
+          <p:cNvSpPr/>
+          <p:nvPr/>
+        </p:nvSpPr>
+        <p:spPr>
+          <a:xfrm>
+            <a:off x="1828800" y="3081528"/>
+            <a:ext cx="3749040" cy="182880"/>
+          </a:xfrm>
+          <a:prstGeom prst="roundRect">
+            <a:avLst>
+              <a:gd name="adj" fmla="val 40000"/>
+            </a:avLst>
+          </a:prstGeom>
+          <a:solidFill>
+            <a:srgbClr val="2C8394"/>
+          </a:solidFill>
+          <a:ln/>
+        </p:spPr>
+      </p:sp>
+      <p:sp>
+        <p:nvSpPr>
+          <p:cNvPr id="39" name="Text 37"/>
+          <p:cNvSpPr txBox="1"/>
+          <p:nvPr/>
+        </p:nvSpPr>
+        <p:spPr>
+          <a:xfrm>
+            <a:off x="5669280" y="2980944"/>
+            <a:ext cx="868680" cy="347472"/>
+          </a:xfrm>
+          <a:prstGeom prst="rect">
+            <a:avLst/>
+          </a:prstGeom>
+          <a:noFill/>
+          <a:ln/>
+        </p:spPr>
+        <p:txBody>
+          <a:bodyPr wrap="square" lIns="0" tIns="0" rIns="0" bIns="0" rtlCol="0" anchor="ctr"/>
+          <a:lstStyle/>
+          <a:p>
+            <a:pPr algn="r" indent="0" marL="0">
+              <a:buNone/>
+            </a:pPr>
+            <a:r>
+              <a:rPr lang="en-US" sz="900" b="1" dirty="0">
+                <a:solidFill>
+                  <a:srgbClr val="2C8394"/>
+                </a:solidFill>
+                <a:latin typeface="Poppins" pitchFamily="34" charset="0"/>
+                <a:ea typeface="Poppins" pitchFamily="34" charset="-122"/>
+                <a:cs typeface="Poppins" pitchFamily="34" charset="-120"/>
+              </a:rPr>
+              <a:t>US$1,297</a:t>
+            </a:r>
+            <a:endParaRPr lang="en-US" sz="900" dirty="0"/>
+          </a:p>
+        </p:txBody>
+      </p:sp>
+      <p:sp>
+        <p:nvSpPr>
+          <p:cNvPr id="40" name="Text 38"/>
+          <p:cNvSpPr txBox="1"/>
+          <p:nvPr/>
+        </p:nvSpPr>
+        <p:spPr>
+          <a:xfrm>
+            <a:off x="6583680" y="2980944"/>
+            <a:ext cx="658368" cy="347472"/>
+          </a:xfrm>
+          <a:prstGeom prst="rect">
+            <a:avLst/>
+          </a:prstGeom>
+          <a:noFill/>
+          <a:ln/>
+        </p:spPr>
+        <p:txBody>
+          <a:bodyPr wrap="square" lIns="0" tIns="0" rIns="0" bIns="0" rtlCol="0" anchor="ctr"/>
+          <a:lstStyle/>
+          <a:p>
+            <a:pPr algn="r" indent="0" marL="0">
+              <a:buNone/>
+            </a:pPr>
+            <a:r>
+              <a:rPr lang="en-US" sz="750" dirty="0">
+                <a:solidFill>
+                  <a:srgbClr val="5E7280"/>
+                </a:solidFill>
+                <a:latin typeface="Poppins" pitchFamily="34" charset="0"/>
+                <a:ea typeface="Poppins" pitchFamily="34" charset="-122"/>
+                <a:cs typeface="Poppins" pitchFamily="34" charset="-120"/>
+              </a:rPr>
+              <a:t>19 deals</a:t>
+            </a:r>
+            <a:endParaRPr lang="en-US" sz="750" dirty="0"/>
+          </a:p>
+        </p:txBody>
+      </p:sp>
+      <p:sp>
+        <p:nvSpPr>
+          <p:cNvPr id="41" name="Text 39"/>
+          <p:cNvSpPr txBox="1"/>
+          <p:nvPr/>
+        </p:nvSpPr>
+        <p:spPr>
+          <a:xfrm>
+            <a:off x="667512" y="3328416"/>
+            <a:ext cx="1097280" cy="347472"/>
+          </a:xfrm>
+          <a:prstGeom prst="rect">
+            <a:avLst/>
+          </a:prstGeom>
+          <a:noFill/>
+          <a:ln/>
+        </p:spPr>
+        <p:txBody>
+          <a:bodyPr wrap="square" lIns="0" tIns="0" rIns="0" bIns="0" rtlCol="0" anchor="ctr"/>
+          <a:lstStyle/>
+          <a:p>
+            <a:pPr indent="0" marL="0">
+              <a:buNone/>
+            </a:pPr>
+            <a:r>
+              <a:rPr lang="en-US" sz="850" b="1" dirty="0">
+                <a:solidFill>
+                  <a:srgbClr val="12293A"/>
+                </a:solidFill>
+                <a:latin typeface="Poppins" pitchFamily="34" charset="0"/>
+                <a:ea typeface="Poppins" pitchFamily="34" charset="-122"/>
+                <a:cs typeface="Poppins" pitchFamily="34" charset="-120"/>
+              </a:rPr>
+              <a:t>Negotiation</a:t>
+            </a:r>
+            <a:endParaRPr lang="en-US" sz="850" dirty="0"/>
+          </a:p>
+        </p:txBody>
+      </p:sp>
+      <p:sp>
+        <p:nvSpPr>
+          <p:cNvPr id="42" name="Shape 40"/>
+          <p:cNvSpPr/>
+          <p:nvPr/>
+        </p:nvSpPr>
+        <p:spPr>
+          <a:xfrm>
+            <a:off x="1828800" y="3429000"/>
+            <a:ext cx="2211131" cy="182880"/>
+          </a:xfrm>
+          <a:prstGeom prst="roundRect">
+            <a:avLst>
+              <a:gd name="adj" fmla="val 40000"/>
+            </a:avLst>
+          </a:prstGeom>
+          <a:solidFill>
+            <a:srgbClr val="2C8394"/>
+          </a:solidFill>
+          <a:ln/>
+        </p:spPr>
+      </p:sp>
+      <p:sp>
+        <p:nvSpPr>
+          <p:cNvPr id="43" name="Text 41"/>
+          <p:cNvSpPr txBox="1"/>
+          <p:nvPr/>
+        </p:nvSpPr>
+        <p:spPr>
+          <a:xfrm>
+            <a:off x="5669280" y="3328416"/>
+            <a:ext cx="868680" cy="347472"/>
+          </a:xfrm>
+          <a:prstGeom prst="rect">
+            <a:avLst/>
+          </a:prstGeom>
+          <a:noFill/>
+          <a:ln/>
+        </p:spPr>
+        <p:txBody>
+          <a:bodyPr wrap="square" lIns="0" tIns="0" rIns="0" bIns="0" rtlCol="0" anchor="ctr"/>
+          <a:lstStyle/>
+          <a:p>
+            <a:pPr algn="r" indent="0" marL="0">
+              <a:buNone/>
+            </a:pPr>
+            <a:r>
+              <a:rPr lang="en-US" sz="900" b="1" dirty="0">
+                <a:solidFill>
+                  <a:srgbClr val="2C8394"/>
+                </a:solidFill>
+                <a:latin typeface="Poppins" pitchFamily="34" charset="0"/>
+                <a:ea typeface="Poppins" pitchFamily="34" charset="-122"/>
+                <a:cs typeface="Poppins" pitchFamily="34" charset="-120"/>
+              </a:rPr>
+              <a:t>US$765</a:t>
+            </a:r>
+            <a:endParaRPr lang="en-US" sz="900" dirty="0"/>
+          </a:p>
+        </p:txBody>
+      </p:sp>
+      <p:sp>
+        <p:nvSpPr>
+          <p:cNvPr id="44" name="Text 42"/>
+          <p:cNvSpPr txBox="1"/>
+          <p:nvPr/>
+        </p:nvSpPr>
+        <p:spPr>
+          <a:xfrm>
+            <a:off x="6583680" y="3328416"/>
+            <a:ext cx="658368" cy="347472"/>
+          </a:xfrm>
+          <a:prstGeom prst="rect">
+            <a:avLst/>
+          </a:prstGeom>
+          <a:noFill/>
+          <a:ln/>
+        </p:spPr>
+        <p:txBody>
+          <a:bodyPr wrap="square" lIns="0" tIns="0" rIns="0" bIns="0" rtlCol="0" anchor="ctr"/>
+          <a:lstStyle/>
+          <a:p>
+            <a:pPr algn="r" indent="0" marL="0">
+              <a:buNone/>
+            </a:pPr>
+            <a:r>
+              <a:rPr lang="en-US" sz="750" dirty="0">
+                <a:solidFill>
+                  <a:srgbClr val="5E7280"/>
+                </a:solidFill>
+                <a:latin typeface="Poppins" pitchFamily="34" charset="0"/>
+                <a:ea typeface="Poppins" pitchFamily="34" charset="-122"/>
+                <a:cs typeface="Poppins" pitchFamily="34" charset="-120"/>
+              </a:rPr>
+              <a:t>8 deals</a:t>
+            </a:r>
+            <a:endParaRPr lang="en-US" sz="750" dirty="0"/>
+          </a:p>
+        </p:txBody>
+      </p:sp>
+      <p:sp>
+        <p:nvSpPr>
+          <p:cNvPr id="45" name="Text 43"/>
+          <p:cNvSpPr txBox="1"/>
+          <p:nvPr/>
+        </p:nvSpPr>
+        <p:spPr>
+          <a:xfrm>
+            <a:off x="667512" y="3675888"/>
+            <a:ext cx="1097280" cy="347472"/>
+          </a:xfrm>
+          <a:prstGeom prst="rect">
+            <a:avLst/>
+          </a:prstGeom>
+          <a:noFill/>
+          <a:ln/>
+        </p:spPr>
+        <p:txBody>
+          <a:bodyPr wrap="square" lIns="0" tIns="0" rIns="0" bIns="0" rtlCol="0" anchor="ctr"/>
+          <a:lstStyle/>
+          <a:p>
+            <a:pPr indent="0" marL="0">
+              <a:buNone/>
+            </a:pPr>
+            <a:r>
+              <a:rPr lang="en-US" sz="850" b="1" dirty="0">
+                <a:solidFill>
+                  <a:srgbClr val="12293A"/>
+                </a:solidFill>
+                <a:latin typeface="Poppins" pitchFamily="34" charset="0"/>
+                <a:ea typeface="Poppins" pitchFamily="34" charset="-122"/>
+                <a:cs typeface="Poppins" pitchFamily="34" charset="-120"/>
+              </a:rPr>
+              <a:t>Order Placed</a:t>
+            </a:r>
+            <a:endParaRPr lang="en-US" sz="850" dirty="0"/>
+          </a:p>
+        </p:txBody>
+      </p:sp>
+      <p:sp>
+        <p:nvSpPr>
+          <p:cNvPr id="46" name="Shape 44"/>
+          <p:cNvSpPr/>
+          <p:nvPr/>
+        </p:nvSpPr>
+        <p:spPr>
+          <a:xfrm>
+            <a:off x="1828800" y="3776472"/>
+            <a:ext cx="446755" cy="182880"/>
+          </a:xfrm>
+          <a:prstGeom prst="roundRect">
+            <a:avLst>
+              <a:gd name="adj" fmla="val 40000"/>
+            </a:avLst>
+          </a:prstGeom>
+          <a:solidFill>
+            <a:srgbClr val="3D8F5F"/>
+          </a:solidFill>
+          <a:ln/>
+        </p:spPr>
+      </p:sp>
+      <p:sp>
+        <p:nvSpPr>
+          <p:cNvPr id="47" name="Text 45"/>
+          <p:cNvSpPr txBox="1"/>
+          <p:nvPr/>
+        </p:nvSpPr>
+        <p:spPr>
+          <a:xfrm>
+            <a:off x="5669280" y="3675888"/>
+            <a:ext cx="868680" cy="347472"/>
+          </a:xfrm>
+          <a:prstGeom prst="rect">
+            <a:avLst/>
+          </a:prstGeom>
+          <a:noFill/>
+          <a:ln/>
+        </p:spPr>
+        <p:txBody>
+          <a:bodyPr wrap="square" lIns="0" tIns="0" rIns="0" bIns="0" rtlCol="0" anchor="ctr"/>
+          <a:lstStyle/>
+          <a:p>
+            <a:pPr algn="r" indent="0" marL="0">
+              <a:buNone/>
+            </a:pPr>
+            <a:r>
+              <a:rPr lang="en-US" sz="900" b="1" dirty="0">
+                <a:solidFill>
+                  <a:srgbClr val="3D8F5F"/>
+                </a:solidFill>
+                <a:latin typeface="Poppins" pitchFamily="34" charset="0"/>
+                <a:ea typeface="Poppins" pitchFamily="34" charset="-122"/>
+                <a:cs typeface="Poppins" pitchFamily="34" charset="-120"/>
+              </a:rPr>
+              <a:t>US$155</a:t>
+            </a:r>
+            <a:endParaRPr lang="en-US" sz="900" dirty="0"/>
+          </a:p>
+        </p:txBody>
+      </p:sp>
+      <p:sp>
+        <p:nvSpPr>
+          <p:cNvPr id="48" name="Text 46"/>
+          <p:cNvSpPr txBox="1"/>
+          <p:nvPr/>
+        </p:nvSpPr>
+        <p:spPr>
+          <a:xfrm>
+            <a:off x="6583680" y="3675888"/>
+            <a:ext cx="658368" cy="347472"/>
+          </a:xfrm>
+          <a:prstGeom prst="rect">
+            <a:avLst/>
+          </a:prstGeom>
+          <a:noFill/>
+          <a:ln/>
+        </p:spPr>
+        <p:txBody>
+          <a:bodyPr wrap="square" lIns="0" tIns="0" rIns="0" bIns="0" rtlCol="0" anchor="ctr"/>
+          <a:lstStyle/>
+          <a:p>
+            <a:pPr algn="r" indent="0" marL="0">
+              <a:buNone/>
+            </a:pPr>
+            <a:r>
+              <a:rPr lang="en-US" sz="750" dirty="0">
+                <a:solidFill>
+                  <a:srgbClr val="5E7280"/>
+                </a:solidFill>
+                <a:latin typeface="Poppins" pitchFamily="34" charset="0"/>
+                <a:ea typeface="Poppins" pitchFamily="34" charset="-122"/>
+                <a:cs typeface="Poppins" pitchFamily="34" charset="-120"/>
+              </a:rPr>
+              <a:t>5 deals</a:t>
+            </a:r>
+            <a:endParaRPr lang="en-US" sz="750" dirty="0"/>
+          </a:p>
+        </p:txBody>
+      </p:sp>
+      <p:sp>
+        <p:nvSpPr>
+          <p:cNvPr id="49" name="Text 47"/>
+          <p:cNvSpPr txBox="1"/>
+          <p:nvPr/>
+        </p:nvSpPr>
+        <p:spPr>
+          <a:xfrm>
+            <a:off x="667512" y="4023360"/>
+            <a:ext cx="1097280" cy="347472"/>
+          </a:xfrm>
+          <a:prstGeom prst="rect">
+            <a:avLst/>
+          </a:prstGeom>
+          <a:noFill/>
+          <a:ln/>
+        </p:spPr>
+        <p:txBody>
+          <a:bodyPr wrap="square" lIns="0" tIns="0" rIns="0" bIns="0" rtlCol="0" anchor="ctr"/>
+          <a:lstStyle/>
+          <a:p>
+            <a:pPr indent="0" marL="0">
+              <a:buNone/>
+            </a:pPr>
+            <a:r>
+              <a:rPr lang="en-US" sz="850" b="1" dirty="0">
+                <a:solidFill>
+                  <a:srgbClr val="5E7280"/>
+                </a:solidFill>
+                <a:latin typeface="Poppins" pitchFamily="34" charset="0"/>
+                <a:ea typeface="Poppins" pitchFamily="34" charset="-122"/>
+                <a:cs typeface="Poppins" pitchFamily="34" charset="-120"/>
+              </a:rPr>
+              <a:t>Closed Lost</a:t>
+            </a:r>
+            <a:endParaRPr lang="en-US" sz="850" dirty="0"/>
+          </a:p>
+        </p:txBody>
+      </p:sp>
+      <p:sp>
+        <p:nvSpPr>
+          <p:cNvPr id="50" name="Shape 48"/>
+          <p:cNvSpPr/>
+          <p:nvPr/>
+        </p:nvSpPr>
+        <p:spPr>
+          <a:xfrm>
+            <a:off x="1828800" y="4123944"/>
+            <a:ext cx="743220" cy="182880"/>
+          </a:xfrm>
+          <a:prstGeom prst="roundRect">
+            <a:avLst>
+              <a:gd name="adj" fmla="val 40000"/>
+            </a:avLst>
+          </a:prstGeom>
+          <a:solidFill>
+            <a:srgbClr val="B4552D"/>
+          </a:solidFill>
+          <a:ln/>
+        </p:spPr>
+      </p:sp>
+      <p:sp>
+        <p:nvSpPr>
+          <p:cNvPr id="51" name="Text 49"/>
+          <p:cNvSpPr txBox="1"/>
+          <p:nvPr/>
+        </p:nvSpPr>
+        <p:spPr>
+          <a:xfrm>
+            <a:off x="5669280" y="4023360"/>
+            <a:ext cx="868680" cy="347472"/>
+          </a:xfrm>
+          <a:prstGeom prst="rect">
+            <a:avLst/>
+          </a:prstGeom>
+          <a:noFill/>
+          <a:ln/>
+        </p:spPr>
+        <p:txBody>
+          <a:bodyPr wrap="square" lIns="0" tIns="0" rIns="0" bIns="0" rtlCol="0" anchor="ctr"/>
+          <a:lstStyle/>
+          <a:p>
+            <a:pPr algn="r" indent="0" marL="0">
+              <a:buNone/>
+            </a:pPr>
+            <a:r>
+              <a:rPr lang="en-US" sz="900" b="1" dirty="0">
+                <a:solidFill>
+                  <a:srgbClr val="B4552D"/>
+                </a:solidFill>
+                <a:latin typeface="Poppins" pitchFamily="34" charset="0"/>
+                <a:ea typeface="Poppins" pitchFamily="34" charset="-122"/>
+                <a:cs typeface="Poppins" pitchFamily="34" charset="-120"/>
+              </a:rPr>
+              <a:t>US$257</a:t>
+            </a:r>
+            <a:endParaRPr lang="en-US" sz="900" dirty="0"/>
+          </a:p>
+        </p:txBody>
+      </p:sp>
+      <p:sp>
+        <p:nvSpPr>
+          <p:cNvPr id="52" name="Text 50"/>
+          <p:cNvSpPr txBox="1"/>
+          <p:nvPr/>
+        </p:nvSpPr>
+        <p:spPr>
+          <a:xfrm>
+            <a:off x="6583680" y="4023360"/>
+            <a:ext cx="658368" cy="347472"/>
+          </a:xfrm>
+          <a:prstGeom prst="rect">
+            <a:avLst/>
+          </a:prstGeom>
+          <a:noFill/>
+          <a:ln/>
+        </p:spPr>
+        <p:txBody>
+          <a:bodyPr wrap="square" lIns="0" tIns="0" rIns="0" bIns="0" rtlCol="0" anchor="ctr"/>
+          <a:lstStyle/>
+          <a:p>
+            <a:pPr algn="r" indent="0" marL="0">
+              <a:buNone/>
+            </a:pPr>
+            <a:r>
+              <a:rPr lang="en-US" sz="750" dirty="0">
+                <a:solidFill>
+                  <a:srgbClr val="5E7280"/>
+                </a:solidFill>
+                <a:latin typeface="Poppins" pitchFamily="34" charset="0"/>
+                <a:ea typeface="Poppins" pitchFamily="34" charset="-122"/>
+                <a:cs typeface="Poppins" pitchFamily="34" charset="-120"/>
+              </a:rPr>
+              <a:t>2 deals</a:t>
+            </a:r>
+            <a:endParaRPr lang="en-US" sz="750" dirty="0"/>
+          </a:p>
+        </p:txBody>
+      </p:sp>
+      <p:sp>
+        <p:nvSpPr>
+          <p:cNvPr id="53" name="Shape 51"/>
+          <p:cNvSpPr/>
+          <p:nvPr/>
+        </p:nvSpPr>
+        <p:spPr>
+          <a:xfrm>
+            <a:off x="667512" y="3653028"/>
+            <a:ext cx="6345936" cy="12802"/>
+          </a:xfrm>
+          <a:prstGeom prst="rect">
+            <a:avLst/>
+          </a:prstGeom>
+          <a:solidFill>
+            <a:srgbClr val="3D8F5F"/>
+          </a:solidFill>
+          <a:ln/>
+        </p:spPr>
+      </p:sp>
+      <p:sp>
+        <p:nvSpPr>
+          <p:cNvPr id="54" name="Text 52"/>
+          <p:cNvSpPr txBox="1"/>
+          <p:nvPr/>
+        </p:nvSpPr>
+        <p:spPr>
+          <a:xfrm>
+            <a:off x="3977640" y="3493008"/>
+            <a:ext cx="1600200" cy="155448"/>
+          </a:xfrm>
+          <a:prstGeom prst="rect">
+            <a:avLst/>
+          </a:prstGeom>
+          <a:noFill/>
+          <a:ln/>
+        </p:spPr>
+        <p:txBody>
+          <a:bodyPr wrap="square" lIns="0" tIns="0" rIns="0" bIns="0" rtlCol="0" anchor="ctr"/>
+          <a:lstStyle/>
+          <a:p>
+            <a:pPr algn="r" indent="0" marL="0">
+              <a:buNone/>
+            </a:pPr>
+            <a:r>
+              <a:rPr lang="en-US" sz="600" b="1" dirty="0">
+                <a:solidFill>
+                  <a:srgbClr val="2C8394"/>
+                </a:solidFill>
+                <a:latin typeface="Poppins" pitchFamily="34" charset="0"/>
+                <a:ea typeface="Poppins" pitchFamily="34" charset="-122"/>
+                <a:cs typeface="Poppins" pitchFamily="34" charset="-120"/>
+              </a:rPr>
+              <a:t>▲  NOT ORDER PLACED</a:t>
+            </a:r>
+            <a:endParaRPr lang="en-US" sz="600" dirty="0"/>
+          </a:p>
+        </p:txBody>
+      </p:sp>
+      <p:sp>
+        <p:nvSpPr>
+          <p:cNvPr id="55" name="Text 53"/>
+          <p:cNvSpPr txBox="1"/>
+          <p:nvPr/>
+        </p:nvSpPr>
+        <p:spPr>
+          <a:xfrm>
+            <a:off x="3977640" y="3703320"/>
+            <a:ext cx="1600200" cy="155448"/>
+          </a:xfrm>
+          <a:prstGeom prst="rect">
+            <a:avLst/>
+          </a:prstGeom>
+          <a:noFill/>
+          <a:ln/>
+        </p:spPr>
+        <p:txBody>
+          <a:bodyPr wrap="square" lIns="0" tIns="0" rIns="0" bIns="0" rtlCol="0" anchor="ctr"/>
+          <a:lstStyle/>
+          <a:p>
+            <a:pPr algn="r" indent="0" marL="0">
+              <a:buNone/>
+            </a:pPr>
+            <a:r>
+              <a:rPr lang="en-US" sz="600" b="1" dirty="0">
+                <a:solidFill>
+                  <a:srgbClr val="3D8F5F"/>
+                </a:solidFill>
+                <a:latin typeface="Poppins" pitchFamily="34" charset="0"/>
+                <a:ea typeface="Poppins" pitchFamily="34" charset="-122"/>
+                <a:cs typeface="Poppins" pitchFamily="34" charset="-120"/>
+              </a:rPr>
+              <a:t>▼  ORDER PLACED</a:t>
+            </a:r>
+            <a:endParaRPr lang="en-US" sz="600" dirty="0"/>
+          </a:p>
+        </p:txBody>
+      </p:sp>
+      <p:sp>
+        <p:nvSpPr>
+          <p:cNvPr id="56" name="Text 54"/>
+          <p:cNvSpPr txBox="1"/>
+          <p:nvPr/>
+        </p:nvSpPr>
+        <p:spPr>
+          <a:xfrm>
+            <a:off x="667512" y="4517136"/>
+            <a:ext cx="2743200" cy="182880"/>
+          </a:xfrm>
+          <a:prstGeom prst="rect">
+            <a:avLst/>
+          </a:prstGeom>
+          <a:noFill/>
+          <a:ln/>
+        </p:spPr>
+        <p:txBody>
+          <a:bodyPr wrap="square" lIns="0" tIns="0" rIns="0" bIns="0" rtlCol="0" anchor="ctr"/>
+          <a:lstStyle/>
+          <a:p>
+            <a:pPr indent="0" marL="0">
+              <a:buNone/>
+            </a:pPr>
+            <a:r>
+              <a:rPr lang="en-US" sz="800" b="1" dirty="0">
+                <a:solidFill>
+                  <a:srgbClr val="2C8394"/>
+                </a:solidFill>
+                <a:latin typeface="Poppins" pitchFamily="34" charset="0"/>
+                <a:ea typeface="Poppins" pitchFamily="34" charset="-122"/>
+                <a:cs typeface="Poppins" pitchFamily="34" charset="-120"/>
+              </a:rPr>
+              <a:t>ORDER PLACED VS NOT — SHARE</a:t>
+            </a:r>
+            <a:endParaRPr lang="en-US" sz="800" dirty="0"/>
+          </a:p>
+        </p:txBody>
+      </p:sp>
+      <p:sp>
+        <p:nvSpPr>
+          <p:cNvPr id="57" name="Text 55"/>
+          <p:cNvSpPr txBox="1"/>
+          <p:nvPr/>
+        </p:nvSpPr>
+        <p:spPr>
+          <a:xfrm>
+            <a:off x="667512" y="4754880"/>
+            <a:ext cx="1097280" cy="237744"/>
+          </a:xfrm>
+          <a:prstGeom prst="rect">
+            <a:avLst/>
+          </a:prstGeom>
+          <a:noFill/>
+          <a:ln/>
+        </p:spPr>
+        <p:txBody>
+          <a:bodyPr wrap="square" lIns="0" tIns="0" rIns="0" bIns="0" rtlCol="0" anchor="ctr"/>
+          <a:lstStyle/>
+          <a:p>
+            <a:pPr indent="0" marL="0">
+              <a:buNone/>
+            </a:pPr>
+            <a:r>
+              <a:rPr lang="en-US" sz="700" b="1" dirty="0">
+                <a:solidFill>
+                  <a:srgbClr val="8FA1AC"/>
+                </a:solidFill>
+                <a:latin typeface="Poppins" pitchFamily="34" charset="0"/>
+                <a:ea typeface="Poppins" pitchFamily="34" charset="-122"/>
+                <a:cs typeface="Poppins" pitchFamily="34" charset="-120"/>
+              </a:rPr>
+              <a:t>BY VALUE</a:t>
+            </a:r>
+            <a:endParaRPr lang="en-US" sz="700" dirty="0"/>
+          </a:p>
+        </p:txBody>
+      </p:sp>
+      <p:sp>
+        <p:nvSpPr>
+          <p:cNvPr id="58" name="Shape 56"/>
+          <p:cNvSpPr/>
+          <p:nvPr/>
+        </p:nvSpPr>
+        <p:spPr>
+          <a:xfrm>
+            <a:off x="1828800" y="4800600"/>
+            <a:ext cx="292214" cy="164592"/>
+          </a:xfrm>
+          <a:prstGeom prst="rect">
+            <a:avLst/>
+          </a:prstGeom>
+          <a:solidFill>
+            <a:srgbClr val="3D8F5F"/>
+          </a:solidFill>
+          <a:ln/>
+        </p:spPr>
+      </p:sp>
+      <p:sp>
+        <p:nvSpPr>
+          <p:cNvPr id="59" name="Shape 57"/>
+          <p:cNvSpPr/>
+          <p:nvPr/>
+        </p:nvSpPr>
+        <p:spPr>
+          <a:xfrm>
+            <a:off x="2139302" y="4800600"/>
+            <a:ext cx="3976539" cy="164592"/>
+          </a:xfrm>
+          <a:prstGeom prst="rect">
+            <a:avLst/>
+          </a:prstGeom>
+          <a:solidFill>
+            <a:srgbClr val="2C8394"/>
+          </a:solidFill>
+          <a:ln/>
+        </p:spPr>
+      </p:sp>
+      <p:sp>
+        <p:nvSpPr>
+          <p:cNvPr id="60" name="Text 58"/>
+          <p:cNvSpPr txBox="1"/>
+          <p:nvPr/>
+        </p:nvSpPr>
+        <p:spPr>
+          <a:xfrm>
+            <a:off x="2139302" y="4782312"/>
+            <a:ext cx="3976539" cy="201168"/>
+          </a:xfrm>
+          <a:prstGeom prst="rect">
+            <a:avLst/>
+          </a:prstGeom>
+          <a:noFill/>
+          <a:ln/>
+        </p:spPr>
+        <p:txBody>
+          <a:bodyPr wrap="square" lIns="0" tIns="0" rIns="0" bIns="0" rtlCol="0" anchor="ctr"/>
+          <a:lstStyle/>
+          <a:p>
+            <a:pPr algn="ctr" indent="0" marL="0">
+              <a:buNone/>
+            </a:pPr>
+            <a:r>
+              <a:rPr lang="en-US" sz="650" b="1" dirty="0">
+                <a:solidFill>
+                  <a:srgbClr val="FFFFFF"/>
+                </a:solidFill>
+                <a:latin typeface="Poppins" pitchFamily="34" charset="0"/>
+                <a:ea typeface="Poppins" pitchFamily="34" charset="-122"/>
+                <a:cs typeface="Poppins" pitchFamily="34" charset="-120"/>
+              </a:rPr>
+              <a:t>84%</a:t>
+            </a:r>
+            <a:endParaRPr lang="en-US" sz="650" dirty="0"/>
+          </a:p>
+        </p:txBody>
+      </p:sp>
+      <p:sp>
+        <p:nvSpPr>
+          <p:cNvPr id="61" name="Shape 59"/>
+          <p:cNvSpPr/>
+          <p:nvPr/>
+        </p:nvSpPr>
+        <p:spPr>
+          <a:xfrm>
+            <a:off x="6134130" y="4800600"/>
+            <a:ext cx="486126" cy="164592"/>
+          </a:xfrm>
+          <a:prstGeom prst="rect">
+            <a:avLst/>
+          </a:prstGeom>
+          <a:solidFill>
+            <a:srgbClr val="B4552D"/>
+          </a:solidFill>
+          <a:ln/>
+        </p:spPr>
+      </p:sp>
+      <p:sp>
+        <p:nvSpPr>
+          <p:cNvPr id="62" name="Text 60"/>
+          <p:cNvSpPr txBox="1"/>
+          <p:nvPr/>
+        </p:nvSpPr>
+        <p:spPr>
+          <a:xfrm>
+            <a:off x="6134130" y="4782312"/>
+            <a:ext cx="486126" cy="201168"/>
+          </a:xfrm>
+          <a:prstGeom prst="rect">
+            <a:avLst/>
+          </a:prstGeom>
+          <a:noFill/>
+          <a:ln/>
+        </p:spPr>
+        <p:txBody>
+          <a:bodyPr wrap="square" lIns="0" tIns="0" rIns="0" bIns="0" rtlCol="0" anchor="ctr"/>
+          <a:lstStyle/>
+          <a:p>
+            <a:pPr algn="ctr" indent="0" marL="0">
+              <a:buNone/>
+            </a:pPr>
+            <a:r>
+              <a:rPr lang="en-US" sz="650" b="1" dirty="0">
+                <a:solidFill>
+                  <a:srgbClr val="FFFFFF"/>
+                </a:solidFill>
+                <a:latin typeface="Poppins" pitchFamily="34" charset="0"/>
+                <a:ea typeface="Poppins" pitchFamily="34" charset="-122"/>
+                <a:cs typeface="Poppins" pitchFamily="34" charset="-120"/>
+              </a:rPr>
+              <a:t>10%</a:t>
+            </a:r>
+            <a:endParaRPr lang="en-US" sz="650" dirty="0"/>
+          </a:p>
+        </p:txBody>
+      </p:sp>
+      <p:sp>
+        <p:nvSpPr>
+          <p:cNvPr id="63" name="Text 61"/>
+          <p:cNvSpPr txBox="1"/>
+          <p:nvPr/>
+        </p:nvSpPr>
+        <p:spPr>
+          <a:xfrm>
+            <a:off x="667512" y="5065776"/>
+            <a:ext cx="1097280" cy="237744"/>
+          </a:xfrm>
+          <a:prstGeom prst="rect">
+            <a:avLst/>
+          </a:prstGeom>
+          <a:noFill/>
+          <a:ln/>
+        </p:spPr>
+        <p:txBody>
+          <a:bodyPr wrap="square" lIns="0" tIns="0" rIns="0" bIns="0" rtlCol="0" anchor="ctr"/>
+          <a:lstStyle/>
+          <a:p>
+            <a:pPr indent="0" marL="0">
+              <a:buNone/>
+            </a:pPr>
+            <a:r>
+              <a:rPr lang="en-US" sz="700" b="1" dirty="0">
+                <a:solidFill>
+                  <a:srgbClr val="8FA1AC"/>
+                </a:solidFill>
+                <a:latin typeface="Poppins" pitchFamily="34" charset="0"/>
+                <a:ea typeface="Poppins" pitchFamily="34" charset="-122"/>
+                <a:cs typeface="Poppins" pitchFamily="34" charset="-120"/>
+              </a:rPr>
+              <a:t>BY DEALS</a:t>
+            </a:r>
+            <a:endParaRPr lang="en-US" sz="700" dirty="0"/>
+          </a:p>
+        </p:txBody>
+      </p:sp>
+      <p:sp>
+        <p:nvSpPr>
+          <p:cNvPr id="64" name="Shape 62"/>
+          <p:cNvSpPr/>
+          <p:nvPr/>
+        </p:nvSpPr>
+        <p:spPr>
+          <a:xfrm>
+            <a:off x="1828800" y="5111496"/>
+            <a:ext cx="679269" cy="164592"/>
+          </a:xfrm>
+          <a:prstGeom prst="rect">
+            <a:avLst/>
+          </a:prstGeom>
+          <a:solidFill>
+            <a:srgbClr val="3D8F5F"/>
+          </a:solidFill>
+          <a:ln/>
+        </p:spPr>
+      </p:sp>
+      <p:sp>
+        <p:nvSpPr>
+          <p:cNvPr id="65" name="Text 63"/>
+          <p:cNvSpPr txBox="1"/>
+          <p:nvPr/>
+        </p:nvSpPr>
+        <p:spPr>
+          <a:xfrm>
+            <a:off x="1828800" y="5093208"/>
+            <a:ext cx="679269" cy="201168"/>
+          </a:xfrm>
+          <a:prstGeom prst="rect">
+            <a:avLst/>
+          </a:prstGeom>
+          <a:noFill/>
+          <a:ln/>
+        </p:spPr>
+        <p:txBody>
+          <a:bodyPr wrap="square" lIns="0" tIns="0" rIns="0" bIns="0" rtlCol="0" anchor="ctr"/>
+          <a:lstStyle/>
+          <a:p>
+            <a:pPr algn="ctr" indent="0" marL="0">
+              <a:buNone/>
+            </a:pPr>
+            <a:r>
+              <a:rPr lang="en-US" sz="650" b="1" dirty="0">
+                <a:solidFill>
+                  <a:srgbClr val="FFFFFF"/>
+                </a:solidFill>
+                <a:latin typeface="Poppins" pitchFamily="34" charset="0"/>
+                <a:ea typeface="Poppins" pitchFamily="34" charset="-122"/>
+                <a:cs typeface="Poppins" pitchFamily="34" charset="-120"/>
+              </a:rPr>
+              <a:t>14%</a:t>
+            </a:r>
+            <a:endParaRPr lang="en-US" sz="650" dirty="0"/>
+          </a:p>
+        </p:txBody>
+      </p:sp>
+      <p:sp>
+        <p:nvSpPr>
+          <p:cNvPr id="66" name="Shape 64"/>
+          <p:cNvSpPr/>
+          <p:nvPr/>
+        </p:nvSpPr>
+        <p:spPr>
+          <a:xfrm>
+            <a:off x="2526357" y="5111496"/>
+            <a:ext cx="3803904" cy="164592"/>
+          </a:xfrm>
+          <a:prstGeom prst="rect">
+            <a:avLst/>
+          </a:prstGeom>
+          <a:solidFill>
+            <a:srgbClr val="2C8394"/>
+          </a:solidFill>
+          <a:ln/>
+        </p:spPr>
+      </p:sp>
+      <p:sp>
+        <p:nvSpPr>
+          <p:cNvPr id="67" name="Text 65"/>
+          <p:cNvSpPr txBox="1"/>
+          <p:nvPr/>
+        </p:nvSpPr>
+        <p:spPr>
+          <a:xfrm>
+            <a:off x="2526357" y="5093208"/>
+            <a:ext cx="3803904" cy="201168"/>
+          </a:xfrm>
+          <a:prstGeom prst="rect">
+            <a:avLst/>
+          </a:prstGeom>
+          <a:noFill/>
+          <a:ln/>
+        </p:spPr>
+        <p:txBody>
+          <a:bodyPr wrap="square" lIns="0" tIns="0" rIns="0" bIns="0" rtlCol="0" anchor="ctr"/>
+          <a:lstStyle/>
+          <a:p>
+            <a:pPr algn="ctr" indent="0" marL="0">
+              <a:buNone/>
+            </a:pPr>
+            <a:r>
+              <a:rPr lang="en-US" sz="650" b="1" dirty="0">
+                <a:solidFill>
+                  <a:srgbClr val="FFFFFF"/>
+                </a:solidFill>
+                <a:latin typeface="Poppins" pitchFamily="34" charset="0"/>
+                <a:ea typeface="Poppins" pitchFamily="34" charset="-122"/>
+                <a:cs typeface="Poppins" pitchFamily="34" charset="-120"/>
+              </a:rPr>
+              <a:t>80%</a:t>
+            </a:r>
+            <a:endParaRPr lang="en-US" sz="650" dirty="0"/>
+          </a:p>
+        </p:txBody>
+      </p:sp>
+      <p:sp>
+        <p:nvSpPr>
+          <p:cNvPr id="68" name="Shape 66"/>
+          <p:cNvSpPr/>
+          <p:nvPr/>
+        </p:nvSpPr>
+        <p:spPr>
+          <a:xfrm>
+            <a:off x="6348549" y="5111496"/>
+            <a:ext cx="271707" cy="164592"/>
+          </a:xfrm>
+          <a:prstGeom prst="rect">
+            <a:avLst/>
+          </a:prstGeom>
+          <a:solidFill>
+            <a:srgbClr val="B4552D"/>
+          </a:solidFill>
+          <a:ln/>
+        </p:spPr>
+      </p:sp>
+      <p:sp>
+        <p:nvSpPr>
+          <p:cNvPr id="69" name="Shape 67"/>
+          <p:cNvSpPr/>
+          <p:nvPr/>
+        </p:nvSpPr>
+        <p:spPr>
+          <a:xfrm>
+            <a:off x="3657600" y="4562856"/>
+            <a:ext cx="91440" cy="91440"/>
+          </a:xfrm>
+          <a:prstGeom prst="rect">
+            <a:avLst/>
+          </a:prstGeom>
+          <a:solidFill>
+            <a:srgbClr val="3D8F5F"/>
+          </a:solidFill>
+          <a:ln/>
+        </p:spPr>
+      </p:sp>
+      <p:sp>
+        <p:nvSpPr>
+          <p:cNvPr id="70" name="Text 68"/>
+          <p:cNvSpPr txBox="1"/>
+          <p:nvPr/>
+        </p:nvSpPr>
+        <p:spPr>
+          <a:xfrm>
+            <a:off x="3785616" y="4517136"/>
+            <a:ext cx="914400" cy="182880"/>
+          </a:xfrm>
+          <a:prstGeom prst="rect">
+            <a:avLst/>
+          </a:prstGeom>
+          <a:noFill/>
+          <a:ln/>
+        </p:spPr>
+        <p:txBody>
+          <a:bodyPr wrap="square" lIns="0" tIns="0" rIns="0" bIns="0" rtlCol="0" anchor="ctr"/>
+          <a:lstStyle/>
+          <a:p>
+            <a:pPr indent="0" marL="0">
+              <a:buNone/>
+            </a:pPr>
+            <a:r>
+              <a:rPr lang="en-US" sz="630" dirty="0">
+                <a:solidFill>
+                  <a:srgbClr val="5E7280"/>
+                </a:solidFill>
+                <a:latin typeface="Poppins" pitchFamily="34" charset="0"/>
+                <a:ea typeface="Poppins" pitchFamily="34" charset="-122"/>
+                <a:cs typeface="Poppins" pitchFamily="34" charset="-120"/>
+              </a:rPr>
+              <a:t>Order placed</a:t>
+            </a:r>
+            <a:endParaRPr lang="en-US" sz="630" dirty="0"/>
+          </a:p>
+        </p:txBody>
+      </p:sp>
+      <p:sp>
+        <p:nvSpPr>
+          <p:cNvPr id="71" name="Shape 69"/>
+          <p:cNvSpPr/>
+          <p:nvPr/>
+        </p:nvSpPr>
+        <p:spPr>
+          <a:xfrm>
+            <a:off x="4754880" y="4562856"/>
+            <a:ext cx="91440" cy="91440"/>
+          </a:xfrm>
+          <a:prstGeom prst="rect">
+            <a:avLst/>
+          </a:prstGeom>
+          <a:solidFill>
+            <a:srgbClr val="2C8394"/>
+          </a:solidFill>
+          <a:ln/>
+        </p:spPr>
+      </p:sp>
+      <p:sp>
+        <p:nvSpPr>
+          <p:cNvPr id="72" name="Text 70"/>
+          <p:cNvSpPr txBox="1"/>
+          <p:nvPr/>
+        </p:nvSpPr>
+        <p:spPr>
+          <a:xfrm>
+            <a:off x="4882896" y="4517136"/>
+            <a:ext cx="914400" cy="182880"/>
+          </a:xfrm>
+          <a:prstGeom prst="rect">
+            <a:avLst/>
+          </a:prstGeom>
+          <a:noFill/>
+          <a:ln/>
+        </p:spPr>
+        <p:txBody>
+          <a:bodyPr wrap="square" lIns="0" tIns="0" rIns="0" bIns="0" rtlCol="0" anchor="ctr"/>
+          <a:lstStyle/>
+          <a:p>
+            <a:pPr indent="0" marL="0">
+              <a:buNone/>
+            </a:pPr>
+            <a:r>
+              <a:rPr lang="en-US" sz="630" dirty="0">
+                <a:solidFill>
+                  <a:srgbClr val="5E7280"/>
+                </a:solidFill>
+                <a:latin typeface="Poppins" pitchFamily="34" charset="0"/>
+                <a:ea typeface="Poppins" pitchFamily="34" charset="-122"/>
+                <a:cs typeface="Poppins" pitchFamily="34" charset="-120"/>
+              </a:rPr>
+              <a:t>Still open</a:t>
+            </a:r>
+            <a:endParaRPr lang="en-US" sz="630" dirty="0"/>
+          </a:p>
+        </p:txBody>
+      </p:sp>
+      <p:sp>
+        <p:nvSpPr>
+          <p:cNvPr id="73" name="Shape 71"/>
+          <p:cNvSpPr/>
+          <p:nvPr/>
+        </p:nvSpPr>
+        <p:spPr>
+          <a:xfrm>
+            <a:off x="5852160" y="4562856"/>
+            <a:ext cx="91440" cy="91440"/>
+          </a:xfrm>
+          <a:prstGeom prst="rect">
+            <a:avLst/>
+          </a:prstGeom>
+          <a:solidFill>
+            <a:srgbClr val="B4552D"/>
+          </a:solidFill>
+          <a:ln/>
+        </p:spPr>
+      </p:sp>
+      <p:sp>
+        <p:nvSpPr>
+          <p:cNvPr id="74" name="Text 72"/>
+          <p:cNvSpPr txBox="1"/>
+          <p:nvPr/>
+        </p:nvSpPr>
+        <p:spPr>
+          <a:xfrm>
+            <a:off x="5980176" y="4517136"/>
+            <a:ext cx="914400" cy="182880"/>
+          </a:xfrm>
+          <a:prstGeom prst="rect">
+            <a:avLst/>
+          </a:prstGeom>
+          <a:noFill/>
+          <a:ln/>
+        </p:spPr>
+        <p:txBody>
+          <a:bodyPr wrap="square" lIns="0" tIns="0" rIns="0" bIns="0" rtlCol="0" anchor="ctr"/>
+          <a:lstStyle/>
+          <a:p>
+            <a:pPr indent="0" marL="0">
+              <a:buNone/>
+            </a:pPr>
+            <a:r>
+              <a:rPr lang="en-US" sz="630" dirty="0">
+                <a:solidFill>
+                  <a:srgbClr val="5E7280"/>
+                </a:solidFill>
+                <a:latin typeface="Poppins" pitchFamily="34" charset="0"/>
+                <a:ea typeface="Poppins" pitchFamily="34" charset="-122"/>
+                <a:cs typeface="Poppins" pitchFamily="34" charset="-120"/>
+              </a:rPr>
+              <a:t>Closed lost</a:t>
+            </a:r>
+            <a:endParaRPr lang="en-US" sz="630" dirty="0"/>
+          </a:p>
+        </p:txBody>
+      </p:sp>
+      <p:sp>
+        <p:nvSpPr>
+          <p:cNvPr id="75" name="Shape 73"/>
+          <p:cNvSpPr/>
+          <p:nvPr/>
+        </p:nvSpPr>
+        <p:spPr>
+          <a:xfrm>
+            <a:off x="7452360" y="2212848"/>
+            <a:ext cx="4325112" cy="1828800"/>
+          </a:xfrm>
+          <a:prstGeom prst="roundRect">
+            <a:avLst>
+              <a:gd name="adj" fmla="val 3500"/>
+            </a:avLst>
+          </a:prstGeom>
+          <a:solidFill>
+            <a:srgbClr val="FFFFFF"/>
+          </a:solidFill>
+          <a:ln/>
+          <a:effectLst>
+            <a:outerShdw sx="100000" sy="100000" kx="0" ky="0" algn="bl" rotWithShape="0" blurRad="76200" dist="25400" dir="5400000">
+              <a:srgbClr val="9AAAB5">
+                <a:alpha val="35000"/>
+              </a:srgbClr>
+            </a:outerShdw>
+          </a:effectLst>
+        </p:spPr>
+      </p:sp>
+      <p:sp>
+        <p:nvSpPr>
           <p:cNvPr id="76" name="Text 74"/>
           <p:cNvSpPr txBox="1"/>
           <p:nvPr/>
         </p:nvSpPr>
         <p:spPr>
           <a:xfrm>
-            <a:off x="8430768" y="2450592"/>
-            <a:ext cx="3182112" cy="274320"/>
+            <a:off x="7653528" y="2322576"/>
+            <a:ext cx="3840480" cy="274320"/>
           </a:xfrm>
           <a:prstGeom prst="rect">
             <a:avLst/>
@@ -45291,6 +45113,1209 @@
                 <a:ea typeface="Poppins" pitchFamily="34" charset="-122"/>
                 <a:cs typeface="Poppins" pitchFamily="34" charset="-120"/>
               </a:rPr>
+              <a:t>BY PRODUCT</a:t>
+            </a:r>
+            <a:endParaRPr lang="en-US" sz="1200" dirty="0"/>
+          </a:p>
+        </p:txBody>
+      </p:sp>
+      <p:sp>
+        <p:nvSpPr>
+          <p:cNvPr id="77" name="Text 75"/>
+          <p:cNvSpPr txBox="1"/>
+          <p:nvPr/>
+        </p:nvSpPr>
+        <p:spPr>
+          <a:xfrm>
+            <a:off x="7653528" y="2596896"/>
+            <a:ext cx="1874520" cy="164592"/>
+          </a:xfrm>
+          <a:prstGeom prst="rect">
+            <a:avLst/>
+          </a:prstGeom>
+          <a:noFill/>
+          <a:ln/>
+        </p:spPr>
+        <p:txBody>
+          <a:bodyPr wrap="square" lIns="0" tIns="0" rIns="0" bIns="0" rtlCol="0" anchor="ctr"/>
+          <a:lstStyle/>
+          <a:p>
+            <a:pPr algn="l" indent="0" marL="0">
+              <a:buNone/>
+            </a:pPr>
+            <a:r>
+              <a:rPr lang="en-US" sz="650" b="1" dirty="0">
+                <a:solidFill>
+                  <a:srgbClr val="8FA1AC"/>
+                </a:solidFill>
+                <a:latin typeface="Poppins" pitchFamily="34" charset="0"/>
+                <a:ea typeface="Poppins" pitchFamily="34" charset="-122"/>
+                <a:cs typeface="Poppins" pitchFamily="34" charset="-120"/>
+              </a:rPr>
+              <a:t>PRODUCT</a:t>
+            </a:r>
+            <a:endParaRPr lang="en-US" sz="650" dirty="0"/>
+          </a:p>
+        </p:txBody>
+      </p:sp>
+      <p:sp>
+        <p:nvSpPr>
+          <p:cNvPr id="78" name="Text 76"/>
+          <p:cNvSpPr txBox="1"/>
+          <p:nvPr/>
+        </p:nvSpPr>
+        <p:spPr>
+          <a:xfrm>
+            <a:off x="9601200" y="2596896"/>
+            <a:ext cx="658368" cy="164592"/>
+          </a:xfrm>
+          <a:prstGeom prst="rect">
+            <a:avLst/>
+          </a:prstGeom>
+          <a:noFill/>
+          <a:ln/>
+        </p:spPr>
+        <p:txBody>
+          <a:bodyPr wrap="square" lIns="0" tIns="0" rIns="0" bIns="0" rtlCol="0" anchor="ctr"/>
+          <a:lstStyle/>
+          <a:p>
+            <a:pPr algn="r" indent="0" marL="0">
+              <a:buNone/>
+            </a:pPr>
+            <a:r>
+              <a:rPr lang="en-US" sz="650" b="1" dirty="0">
+                <a:solidFill>
+                  <a:srgbClr val="8FA1AC"/>
+                </a:solidFill>
+                <a:latin typeface="Poppins" pitchFamily="34" charset="0"/>
+                <a:ea typeface="Poppins" pitchFamily="34" charset="-122"/>
+                <a:cs typeface="Poppins" pitchFamily="34" charset="-120"/>
+              </a:rPr>
+              <a:t>OPEN</a:t>
+            </a:r>
+            <a:endParaRPr lang="en-US" sz="650" dirty="0"/>
+          </a:p>
+        </p:txBody>
+      </p:sp>
+      <p:sp>
+        <p:nvSpPr>
+          <p:cNvPr id="79" name="Text 77"/>
+          <p:cNvSpPr txBox="1"/>
+          <p:nvPr/>
+        </p:nvSpPr>
+        <p:spPr>
+          <a:xfrm>
+            <a:off x="10332720" y="2596896"/>
+            <a:ext cx="658368" cy="164592"/>
+          </a:xfrm>
+          <a:prstGeom prst="rect">
+            <a:avLst/>
+          </a:prstGeom>
+          <a:noFill/>
+          <a:ln/>
+        </p:spPr>
+        <p:txBody>
+          <a:bodyPr wrap="square" lIns="0" tIns="0" rIns="0" bIns="0" rtlCol="0" anchor="ctr"/>
+          <a:lstStyle/>
+          <a:p>
+            <a:pPr algn="r" indent="0" marL="0">
+              <a:buNone/>
+            </a:pPr>
+            <a:r>
+              <a:rPr lang="en-US" sz="650" b="1" dirty="0">
+                <a:solidFill>
+                  <a:srgbClr val="8FA1AC"/>
+                </a:solidFill>
+                <a:latin typeface="Poppins" pitchFamily="34" charset="0"/>
+                <a:ea typeface="Poppins" pitchFamily="34" charset="-122"/>
+                <a:cs typeface="Poppins" pitchFamily="34" charset="-120"/>
+              </a:rPr>
+              <a:t>PLACED</a:t>
+            </a:r>
+            <a:endParaRPr lang="en-US" sz="650" dirty="0"/>
+          </a:p>
+        </p:txBody>
+      </p:sp>
+      <p:sp>
+        <p:nvSpPr>
+          <p:cNvPr id="80" name="Text 78"/>
+          <p:cNvSpPr txBox="1"/>
+          <p:nvPr/>
+        </p:nvSpPr>
+        <p:spPr>
+          <a:xfrm>
+            <a:off x="11064240" y="2596896"/>
+            <a:ext cx="548640" cy="164592"/>
+          </a:xfrm>
+          <a:prstGeom prst="rect">
+            <a:avLst/>
+          </a:prstGeom>
+          <a:noFill/>
+          <a:ln/>
+        </p:spPr>
+        <p:txBody>
+          <a:bodyPr wrap="square" lIns="0" tIns="0" rIns="0" bIns="0" rtlCol="0" anchor="ctr"/>
+          <a:lstStyle/>
+          <a:p>
+            <a:pPr algn="r" indent="0" marL="0">
+              <a:buNone/>
+            </a:pPr>
+            <a:r>
+              <a:rPr lang="en-US" sz="650" b="1" dirty="0">
+                <a:solidFill>
+                  <a:srgbClr val="8FA1AC"/>
+                </a:solidFill>
+                <a:latin typeface="Poppins" pitchFamily="34" charset="0"/>
+                <a:ea typeface="Poppins" pitchFamily="34" charset="-122"/>
+                <a:cs typeface="Poppins" pitchFamily="34" charset="-120"/>
+              </a:rPr>
+              <a:t>LOST</a:t>
+            </a:r>
+            <a:endParaRPr lang="en-US" sz="650" dirty="0"/>
+          </a:p>
+        </p:txBody>
+      </p:sp>
+      <p:sp>
+        <p:nvSpPr>
+          <p:cNvPr id="81" name="Text 79"/>
+          <p:cNvSpPr txBox="1"/>
+          <p:nvPr/>
+        </p:nvSpPr>
+        <p:spPr>
+          <a:xfrm>
+            <a:off x="7653528" y="2798064"/>
+            <a:ext cx="1874520" cy="182880"/>
+          </a:xfrm>
+          <a:prstGeom prst="rect">
+            <a:avLst/>
+          </a:prstGeom>
+          <a:noFill/>
+          <a:ln/>
+        </p:spPr>
+        <p:txBody>
+          <a:bodyPr wrap="square" lIns="0" tIns="0" rIns="0" bIns="0" rtlCol="0" anchor="ctr"/>
+          <a:lstStyle/>
+          <a:p>
+            <a:pPr indent="0" marL="0">
+              <a:buNone/>
+            </a:pPr>
+            <a:r>
+              <a:rPr lang="en-US" sz="750" b="1" dirty="0">
+                <a:solidFill>
+                  <a:srgbClr val="12293A"/>
+                </a:solidFill>
+                <a:latin typeface="Poppins" pitchFamily="34" charset="0"/>
+                <a:ea typeface="Poppins" pitchFamily="34" charset="-122"/>
+                <a:cs typeface="Poppins" pitchFamily="34" charset="-120"/>
+              </a:rPr>
+              <a:t>H&amp;L ROAM Monthly</a:t>
+            </a:r>
+            <a:endParaRPr lang="en-US" sz="750" dirty="0"/>
+          </a:p>
+        </p:txBody>
+      </p:sp>
+      <p:sp>
+        <p:nvSpPr>
+          <p:cNvPr id="82" name="Text 80"/>
+          <p:cNvSpPr txBox="1"/>
+          <p:nvPr/>
+        </p:nvSpPr>
+        <p:spPr>
+          <a:xfrm>
+            <a:off x="7653528" y="2935224"/>
+            <a:ext cx="1920240" cy="137160"/>
+          </a:xfrm>
+          <a:prstGeom prst="rect">
+            <a:avLst/>
+          </a:prstGeom>
+          <a:noFill/>
+          <a:ln/>
+        </p:spPr>
+        <p:txBody>
+          <a:bodyPr wrap="square" lIns="0" tIns="0" rIns="0" bIns="0" rtlCol="0" anchor="ctr"/>
+          <a:lstStyle/>
+          <a:p>
+            <a:pPr indent="0" marL="0">
+              <a:buNone/>
+            </a:pPr>
+            <a:r>
+              <a:rPr lang="en-US" sz="530" dirty="0">
+                <a:solidFill>
+                  <a:srgbClr val="8FA1AC"/>
+                </a:solidFill>
+                <a:latin typeface="Poppins" pitchFamily="34" charset="0"/>
+                <a:ea typeface="Poppins" pitchFamily="34" charset="-122"/>
+                <a:cs typeface="Poppins" pitchFamily="34" charset="-120"/>
+              </a:rPr>
+              <a:t>$29–31/unit/mo · most volume</a:t>
+            </a:r>
+            <a:endParaRPr lang="en-US" sz="530" dirty="0"/>
+          </a:p>
+        </p:txBody>
+      </p:sp>
+      <p:sp>
+        <p:nvSpPr>
+          <p:cNvPr id="83" name="Text 81"/>
+          <p:cNvSpPr txBox="1"/>
+          <p:nvPr/>
+        </p:nvSpPr>
+        <p:spPr>
+          <a:xfrm>
+            <a:off x="9601200" y="2798064"/>
+            <a:ext cx="658368" cy="182880"/>
+          </a:xfrm>
+          <a:prstGeom prst="rect">
+            <a:avLst/>
+          </a:prstGeom>
+          <a:noFill/>
+          <a:ln/>
+        </p:spPr>
+        <p:txBody>
+          <a:bodyPr wrap="square" lIns="0" tIns="0" rIns="0" bIns="0" rtlCol="0" anchor="ctr"/>
+          <a:lstStyle/>
+          <a:p>
+            <a:pPr algn="r" indent="0" marL="0">
+              <a:buNone/>
+            </a:pPr>
+            <a:r>
+              <a:rPr lang="en-US" sz="750" b="1" dirty="0">
+                <a:solidFill>
+                  <a:srgbClr val="2C8394"/>
+                </a:solidFill>
+                <a:latin typeface="Poppins" pitchFamily="34" charset="0"/>
+                <a:ea typeface="Poppins" pitchFamily="34" charset="-122"/>
+                <a:cs typeface="Poppins" pitchFamily="34" charset="-120"/>
+              </a:rPr>
+              <a:t>US$1,251</a:t>
+            </a:r>
+            <a:endParaRPr lang="en-US" sz="750" dirty="0"/>
+          </a:p>
+        </p:txBody>
+      </p:sp>
+      <p:sp>
+        <p:nvSpPr>
+          <p:cNvPr id="84" name="Text 82"/>
+          <p:cNvSpPr txBox="1"/>
+          <p:nvPr/>
+        </p:nvSpPr>
+        <p:spPr>
+          <a:xfrm>
+            <a:off x="10332720" y="2798064"/>
+            <a:ext cx="658368" cy="182880"/>
+          </a:xfrm>
+          <a:prstGeom prst="rect">
+            <a:avLst/>
+          </a:prstGeom>
+          <a:noFill/>
+          <a:ln/>
+        </p:spPr>
+        <p:txBody>
+          <a:bodyPr wrap="square" lIns="0" tIns="0" rIns="0" bIns="0" rtlCol="0" anchor="ctr"/>
+          <a:lstStyle/>
+          <a:p>
+            <a:pPr algn="r" indent="0" marL="0">
+              <a:buNone/>
+            </a:pPr>
+            <a:r>
+              <a:rPr lang="en-US" sz="750" b="1" dirty="0">
+                <a:solidFill>
+                  <a:srgbClr val="3D8F5F"/>
+                </a:solidFill>
+                <a:latin typeface="Poppins" pitchFamily="34" charset="0"/>
+                <a:ea typeface="Poppins" pitchFamily="34" charset="-122"/>
+                <a:cs typeface="Poppins" pitchFamily="34" charset="-120"/>
+              </a:rPr>
+              <a:t>US$155</a:t>
+            </a:r>
+            <a:endParaRPr lang="en-US" sz="750" dirty="0"/>
+          </a:p>
+        </p:txBody>
+      </p:sp>
+      <p:sp>
+        <p:nvSpPr>
+          <p:cNvPr id="85" name="Text 83"/>
+          <p:cNvSpPr txBox="1"/>
+          <p:nvPr/>
+        </p:nvSpPr>
+        <p:spPr>
+          <a:xfrm>
+            <a:off x="11064240" y="2798064"/>
+            <a:ext cx="548640" cy="182880"/>
+          </a:xfrm>
+          <a:prstGeom prst="rect">
+            <a:avLst/>
+          </a:prstGeom>
+          <a:noFill/>
+          <a:ln/>
+        </p:spPr>
+        <p:txBody>
+          <a:bodyPr wrap="square" lIns="0" tIns="0" rIns="0" bIns="0" rtlCol="0" anchor="ctr"/>
+          <a:lstStyle/>
+          <a:p>
+            <a:pPr algn="r" indent="0" marL="0">
+              <a:buNone/>
+            </a:pPr>
+            <a:r>
+              <a:rPr lang="en-US" sz="750" b="1" dirty="0">
+                <a:solidFill>
+                  <a:srgbClr val="B4552D"/>
+                </a:solidFill>
+                <a:latin typeface="Poppins" pitchFamily="34" charset="0"/>
+                <a:ea typeface="Poppins" pitchFamily="34" charset="-122"/>
+                <a:cs typeface="Poppins" pitchFamily="34" charset="-120"/>
+              </a:rPr>
+              <a:t>US$44</a:t>
+            </a:r>
+            <a:endParaRPr lang="en-US" sz="750" dirty="0"/>
+          </a:p>
+        </p:txBody>
+      </p:sp>
+      <p:sp>
+        <p:nvSpPr>
+          <p:cNvPr id="86" name="Text 84"/>
+          <p:cNvSpPr txBox="1"/>
+          <p:nvPr/>
+        </p:nvSpPr>
+        <p:spPr>
+          <a:xfrm>
+            <a:off x="7653528" y="3099816"/>
+            <a:ext cx="1874520" cy="182880"/>
+          </a:xfrm>
+          <a:prstGeom prst="rect">
+            <a:avLst/>
+          </a:prstGeom>
+          <a:noFill/>
+          <a:ln/>
+        </p:spPr>
+        <p:txBody>
+          <a:bodyPr wrap="square" lIns="0" tIns="0" rIns="0" bIns="0" rtlCol="0" anchor="ctr"/>
+          <a:lstStyle/>
+          <a:p>
+            <a:pPr indent="0" marL="0">
+              <a:buNone/>
+            </a:pPr>
+            <a:r>
+              <a:rPr lang="en-US" sz="750" b="1" dirty="0">
+                <a:solidFill>
+                  <a:srgbClr val="12293A"/>
+                </a:solidFill>
+                <a:latin typeface="Poppins" pitchFamily="34" charset="0"/>
+                <a:ea typeface="Poppins" pitchFamily="34" charset="-122"/>
+                <a:cs typeface="Poppins" pitchFamily="34" charset="-120"/>
+              </a:rPr>
+              <a:t>Sentinel Reporting</a:t>
+            </a:r>
+            <a:endParaRPr lang="en-US" sz="750" dirty="0"/>
+          </a:p>
+        </p:txBody>
+      </p:sp>
+      <p:sp>
+        <p:nvSpPr>
+          <p:cNvPr id="87" name="Text 85"/>
+          <p:cNvSpPr txBox="1"/>
+          <p:nvPr/>
+        </p:nvSpPr>
+        <p:spPr>
+          <a:xfrm>
+            <a:off x="7653528" y="3236976"/>
+            <a:ext cx="1920240" cy="137160"/>
+          </a:xfrm>
+          <a:prstGeom prst="rect">
+            <a:avLst/>
+          </a:prstGeom>
+          <a:noFill/>
+          <a:ln/>
+        </p:spPr>
+        <p:txBody>
+          <a:bodyPr wrap="square" lIns="0" tIns="0" rIns="0" bIns="0" rtlCol="0" anchor="ctr"/>
+          <a:lstStyle/>
+          <a:p>
+            <a:pPr indent="0" marL="0">
+              <a:buNone/>
+            </a:pPr>
+            <a:r>
+              <a:rPr lang="en-US" sz="530" dirty="0">
+                <a:solidFill>
+                  <a:srgbClr val="8FA1AC"/>
+                </a:solidFill>
+                <a:latin typeface="Poppins" pitchFamily="34" charset="0"/>
+                <a:ea typeface="Poppins" pitchFamily="34" charset="-122"/>
+                <a:cs typeface="Poppins" pitchFamily="34" charset="-120"/>
+              </a:rPr>
+              <a:t>$299/unit licence · no orders yet</a:t>
+            </a:r>
+            <a:endParaRPr lang="en-US" sz="530" dirty="0"/>
+          </a:p>
+        </p:txBody>
+      </p:sp>
+      <p:sp>
+        <p:nvSpPr>
+          <p:cNvPr id="88" name="Text 86"/>
+          <p:cNvSpPr txBox="1"/>
+          <p:nvPr/>
+        </p:nvSpPr>
+        <p:spPr>
+          <a:xfrm>
+            <a:off x="9601200" y="3099816"/>
+            <a:ext cx="658368" cy="182880"/>
+          </a:xfrm>
+          <a:prstGeom prst="rect">
+            <a:avLst/>
+          </a:prstGeom>
+          <a:noFill/>
+          <a:ln/>
+        </p:spPr>
+        <p:txBody>
+          <a:bodyPr wrap="square" lIns="0" tIns="0" rIns="0" bIns="0" rtlCol="0" anchor="ctr"/>
+          <a:lstStyle/>
+          <a:p>
+            <a:pPr algn="r" indent="0" marL="0">
+              <a:buNone/>
+            </a:pPr>
+            <a:r>
+              <a:rPr lang="en-US" sz="750" b="1" dirty="0">
+                <a:solidFill>
+                  <a:srgbClr val="2C8394"/>
+                </a:solidFill>
+                <a:latin typeface="Poppins" pitchFamily="34" charset="0"/>
+                <a:ea typeface="Poppins" pitchFamily="34" charset="-122"/>
+                <a:cs typeface="Poppins" pitchFamily="34" charset="-120"/>
+              </a:rPr>
+              <a:t>US$852</a:t>
+            </a:r>
+            <a:endParaRPr lang="en-US" sz="750" dirty="0"/>
+          </a:p>
+        </p:txBody>
+      </p:sp>
+      <p:sp>
+        <p:nvSpPr>
+          <p:cNvPr id="89" name="Text 87"/>
+          <p:cNvSpPr txBox="1"/>
+          <p:nvPr/>
+        </p:nvSpPr>
+        <p:spPr>
+          <a:xfrm>
+            <a:off x="10332720" y="3099816"/>
+            <a:ext cx="658368" cy="182880"/>
+          </a:xfrm>
+          <a:prstGeom prst="rect">
+            <a:avLst/>
+          </a:prstGeom>
+          <a:noFill/>
+          <a:ln/>
+        </p:spPr>
+        <p:txBody>
+          <a:bodyPr wrap="square" lIns="0" tIns="0" rIns="0" bIns="0" rtlCol="0" anchor="ctr"/>
+          <a:lstStyle/>
+          <a:p>
+            <a:pPr algn="r" indent="0" marL="0">
+              <a:buNone/>
+            </a:pPr>
+            <a:r>
+              <a:rPr lang="en-US" sz="750" dirty="0">
+                <a:solidFill>
+                  <a:srgbClr val="8FA1AC"/>
+                </a:solidFill>
+                <a:latin typeface="Poppins" pitchFamily="34" charset="0"/>
+                <a:ea typeface="Poppins" pitchFamily="34" charset="-122"/>
+                <a:cs typeface="Poppins" pitchFamily="34" charset="-120"/>
+              </a:rPr>
+              <a:t>—</a:t>
+            </a:r>
+            <a:endParaRPr lang="en-US" sz="750" dirty="0"/>
+          </a:p>
+        </p:txBody>
+      </p:sp>
+      <p:sp>
+        <p:nvSpPr>
+          <p:cNvPr id="90" name="Text 88"/>
+          <p:cNvSpPr txBox="1"/>
+          <p:nvPr/>
+        </p:nvSpPr>
+        <p:spPr>
+          <a:xfrm>
+            <a:off x="11064240" y="3099816"/>
+            <a:ext cx="548640" cy="182880"/>
+          </a:xfrm>
+          <a:prstGeom prst="rect">
+            <a:avLst/>
+          </a:prstGeom>
+          <a:noFill/>
+          <a:ln/>
+        </p:spPr>
+        <p:txBody>
+          <a:bodyPr wrap="square" lIns="0" tIns="0" rIns="0" bIns="0" rtlCol="0" anchor="ctr"/>
+          <a:lstStyle/>
+          <a:p>
+            <a:pPr algn="r" indent="0" marL="0">
+              <a:buNone/>
+            </a:pPr>
+            <a:r>
+              <a:rPr lang="en-US" sz="750" b="1" dirty="0">
+                <a:solidFill>
+                  <a:srgbClr val="B4552D"/>
+                </a:solidFill>
+                <a:latin typeface="Poppins" pitchFamily="34" charset="0"/>
+                <a:ea typeface="Poppins" pitchFamily="34" charset="-122"/>
+                <a:cs typeface="Poppins" pitchFamily="34" charset="-120"/>
+              </a:rPr>
+              <a:t>US$213</a:t>
+            </a:r>
+            <a:endParaRPr lang="en-US" sz="750" dirty="0"/>
+          </a:p>
+        </p:txBody>
+      </p:sp>
+      <p:sp>
+        <p:nvSpPr>
+          <p:cNvPr id="91" name="Text 89"/>
+          <p:cNvSpPr txBox="1"/>
+          <p:nvPr/>
+        </p:nvSpPr>
+        <p:spPr>
+          <a:xfrm>
+            <a:off x="7653528" y="3401568"/>
+            <a:ext cx="1874520" cy="182880"/>
+          </a:xfrm>
+          <a:prstGeom prst="rect">
+            <a:avLst/>
+          </a:prstGeom>
+          <a:noFill/>
+          <a:ln/>
+        </p:spPr>
+        <p:txBody>
+          <a:bodyPr wrap="square" lIns="0" tIns="0" rIns="0" bIns="0" rtlCol="0" anchor="ctr"/>
+          <a:lstStyle/>
+          <a:p>
+            <a:pPr indent="0" marL="0">
+              <a:buNone/>
+            </a:pPr>
+            <a:r>
+              <a:rPr lang="en-US" sz="750" b="1" dirty="0">
+                <a:solidFill>
+                  <a:srgbClr val="8FA1AC"/>
+                </a:solidFill>
+                <a:latin typeface="Poppins" pitchFamily="34" charset="0"/>
+                <a:ea typeface="Poppins" pitchFamily="34" charset="-122"/>
+                <a:cs typeface="Poppins" pitchFamily="34" charset="-120"/>
+              </a:rPr>
+              <a:t>QR Ordering (OrderNow)</a:t>
+            </a:r>
+            <a:endParaRPr lang="en-US" sz="750" dirty="0"/>
+          </a:p>
+        </p:txBody>
+      </p:sp>
+      <p:sp>
+        <p:nvSpPr>
+          <p:cNvPr id="92" name="Text 90"/>
+          <p:cNvSpPr txBox="1"/>
+          <p:nvPr/>
+        </p:nvSpPr>
+        <p:spPr>
+          <a:xfrm>
+            <a:off x="7653528" y="3538728"/>
+            <a:ext cx="1920240" cy="137160"/>
+          </a:xfrm>
+          <a:prstGeom prst="rect">
+            <a:avLst/>
+          </a:prstGeom>
+          <a:noFill/>
+          <a:ln/>
+        </p:spPr>
+        <p:txBody>
+          <a:bodyPr wrap="square" lIns="0" tIns="0" rIns="0" bIns="0" rtlCol="0" anchor="ctr"/>
+          <a:lstStyle/>
+          <a:p>
+            <a:pPr indent="0" marL="0">
+              <a:buNone/>
+            </a:pPr>
+            <a:r>
+              <a:rPr lang="en-US" sz="530" dirty="0">
+                <a:solidFill>
+                  <a:srgbClr val="8FA1AC"/>
+                </a:solidFill>
+                <a:latin typeface="Poppins" pitchFamily="34" charset="0"/>
+                <a:ea typeface="Poppins" pitchFamily="34" charset="-122"/>
+                <a:cs typeface="Poppins" pitchFamily="34" charset="-120"/>
+              </a:rPr>
+              <a:t>every line priced $0 — value understated</a:t>
+            </a:r>
+            <a:endParaRPr lang="en-US" sz="530" dirty="0"/>
+          </a:p>
+        </p:txBody>
+      </p:sp>
+      <p:sp>
+        <p:nvSpPr>
+          <p:cNvPr id="93" name="Text 91"/>
+          <p:cNvSpPr txBox="1"/>
+          <p:nvPr/>
+        </p:nvSpPr>
+        <p:spPr>
+          <a:xfrm>
+            <a:off x="9601200" y="3401568"/>
+            <a:ext cx="658368" cy="182880"/>
+          </a:xfrm>
+          <a:prstGeom prst="rect">
+            <a:avLst/>
+          </a:prstGeom>
+          <a:noFill/>
+          <a:ln/>
+        </p:spPr>
+        <p:txBody>
+          <a:bodyPr wrap="square" lIns="0" tIns="0" rIns="0" bIns="0" rtlCol="0" anchor="ctr"/>
+          <a:lstStyle/>
+          <a:p>
+            <a:pPr algn="r" indent="0" marL="0">
+              <a:buNone/>
+            </a:pPr>
+            <a:r>
+              <a:rPr lang="en-US" sz="750" dirty="0">
+                <a:solidFill>
+                  <a:srgbClr val="8FA1AC"/>
+                </a:solidFill>
+                <a:latin typeface="Poppins" pitchFamily="34" charset="0"/>
+                <a:ea typeface="Poppins" pitchFamily="34" charset="-122"/>
+                <a:cs typeface="Poppins" pitchFamily="34" charset="-120"/>
+              </a:rPr>
+              <a:t>—</a:t>
+            </a:r>
+            <a:endParaRPr lang="en-US" sz="750" dirty="0"/>
+          </a:p>
+        </p:txBody>
+      </p:sp>
+      <p:sp>
+        <p:nvSpPr>
+          <p:cNvPr id="94" name="Text 92"/>
+          <p:cNvSpPr txBox="1"/>
+          <p:nvPr/>
+        </p:nvSpPr>
+        <p:spPr>
+          <a:xfrm>
+            <a:off x="10332720" y="3401568"/>
+            <a:ext cx="658368" cy="182880"/>
+          </a:xfrm>
+          <a:prstGeom prst="rect">
+            <a:avLst/>
+          </a:prstGeom>
+          <a:noFill/>
+          <a:ln/>
+        </p:spPr>
+        <p:txBody>
+          <a:bodyPr wrap="square" lIns="0" tIns="0" rIns="0" bIns="0" rtlCol="0" anchor="ctr"/>
+          <a:lstStyle/>
+          <a:p>
+            <a:pPr algn="r" indent="0" marL="0">
+              <a:buNone/>
+            </a:pPr>
+            <a:r>
+              <a:rPr lang="en-US" sz="750" dirty="0">
+                <a:solidFill>
+                  <a:srgbClr val="8FA1AC"/>
+                </a:solidFill>
+                <a:latin typeface="Poppins" pitchFamily="34" charset="0"/>
+                <a:ea typeface="Poppins" pitchFamily="34" charset="-122"/>
+                <a:cs typeface="Poppins" pitchFamily="34" charset="-120"/>
+              </a:rPr>
+              <a:t>—</a:t>
+            </a:r>
+            <a:endParaRPr lang="en-US" sz="750" dirty="0"/>
+          </a:p>
+        </p:txBody>
+      </p:sp>
+      <p:sp>
+        <p:nvSpPr>
+          <p:cNvPr id="95" name="Text 93"/>
+          <p:cNvSpPr txBox="1"/>
+          <p:nvPr/>
+        </p:nvSpPr>
+        <p:spPr>
+          <a:xfrm>
+            <a:off x="11064240" y="3401568"/>
+            <a:ext cx="548640" cy="182880"/>
+          </a:xfrm>
+          <a:prstGeom prst="rect">
+            <a:avLst/>
+          </a:prstGeom>
+          <a:noFill/>
+          <a:ln/>
+        </p:spPr>
+        <p:txBody>
+          <a:bodyPr wrap="square" lIns="0" tIns="0" rIns="0" bIns="0" rtlCol="0" anchor="ctr"/>
+          <a:lstStyle/>
+          <a:p>
+            <a:pPr algn="r" indent="0" marL="0">
+              <a:buNone/>
+            </a:pPr>
+            <a:r>
+              <a:rPr lang="en-US" sz="750" dirty="0">
+                <a:solidFill>
+                  <a:srgbClr val="8FA1AC"/>
+                </a:solidFill>
+                <a:latin typeface="Poppins" pitchFamily="34" charset="0"/>
+                <a:ea typeface="Poppins" pitchFamily="34" charset="-122"/>
+                <a:cs typeface="Poppins" pitchFamily="34" charset="-120"/>
+              </a:rPr>
+              <a:t>—</a:t>
+            </a:r>
+            <a:endParaRPr lang="en-US" sz="750" dirty="0"/>
+          </a:p>
+        </p:txBody>
+      </p:sp>
+      <p:sp>
+        <p:nvSpPr>
+          <p:cNvPr id="96" name="Text 94"/>
+          <p:cNvSpPr txBox="1"/>
+          <p:nvPr/>
+        </p:nvSpPr>
+        <p:spPr>
+          <a:xfrm>
+            <a:off x="7653528" y="3703320"/>
+            <a:ext cx="1874520" cy="182880"/>
+          </a:xfrm>
+          <a:prstGeom prst="rect">
+            <a:avLst/>
+          </a:prstGeom>
+          <a:noFill/>
+          <a:ln/>
+        </p:spPr>
+        <p:txBody>
+          <a:bodyPr wrap="square" lIns="0" tIns="0" rIns="0" bIns="0" rtlCol="0" anchor="ctr"/>
+          <a:lstStyle/>
+          <a:p>
+            <a:pPr indent="0" marL="0">
+              <a:buNone/>
+            </a:pPr>
+            <a:r>
+              <a:rPr lang="en-US" sz="750" b="1" dirty="0">
+                <a:solidFill>
+                  <a:srgbClr val="8FA1AC"/>
+                </a:solidFill>
+                <a:latin typeface="Poppins" pitchFamily="34" charset="0"/>
+                <a:ea typeface="Poppins" pitchFamily="34" charset="-122"/>
+                <a:cs typeface="Poppins" pitchFamily="34" charset="-120"/>
+              </a:rPr>
+              <a:t>H&amp;L ROAM Annual</a:t>
+            </a:r>
+            <a:endParaRPr lang="en-US" sz="750" dirty="0"/>
+          </a:p>
+        </p:txBody>
+      </p:sp>
+      <p:sp>
+        <p:nvSpPr>
+          <p:cNvPr id="97" name="Text 95"/>
+          <p:cNvSpPr txBox="1"/>
+          <p:nvPr/>
+        </p:nvSpPr>
+        <p:spPr>
+          <a:xfrm>
+            <a:off x="7653528" y="3840480"/>
+            <a:ext cx="1920240" cy="137160"/>
+          </a:xfrm>
+          <a:prstGeom prst="rect">
+            <a:avLst/>
+          </a:prstGeom>
+          <a:noFill/>
+          <a:ln/>
+        </p:spPr>
+        <p:txBody>
+          <a:bodyPr wrap="square" lIns="0" tIns="0" rIns="0" bIns="0" rtlCol="0" anchor="ctr"/>
+          <a:lstStyle/>
+          <a:p>
+            <a:pPr indent="0" marL="0">
+              <a:buNone/>
+            </a:pPr>
+            <a:r>
+              <a:rPr lang="en-US" sz="530" dirty="0">
+                <a:solidFill>
+                  <a:srgbClr val="8FA1AC"/>
+                </a:solidFill>
+                <a:latin typeface="Poppins" pitchFamily="34" charset="0"/>
+                <a:ea typeface="Poppins" pitchFamily="34" charset="-122"/>
+                <a:cs typeface="Poppins" pitchFamily="34" charset="-120"/>
+              </a:rPr>
+              <a:t>flagged but no line items anywhere</a:t>
+            </a:r>
+            <a:endParaRPr lang="en-US" sz="530" dirty="0"/>
+          </a:p>
+        </p:txBody>
+      </p:sp>
+      <p:sp>
+        <p:nvSpPr>
+          <p:cNvPr id="98" name="Text 96"/>
+          <p:cNvSpPr txBox="1"/>
+          <p:nvPr/>
+        </p:nvSpPr>
+        <p:spPr>
+          <a:xfrm>
+            <a:off x="9601200" y="3703320"/>
+            <a:ext cx="658368" cy="182880"/>
+          </a:xfrm>
+          <a:prstGeom prst="rect">
+            <a:avLst/>
+          </a:prstGeom>
+          <a:noFill/>
+          <a:ln/>
+        </p:spPr>
+        <p:txBody>
+          <a:bodyPr wrap="square" lIns="0" tIns="0" rIns="0" bIns="0" rtlCol="0" anchor="ctr"/>
+          <a:lstStyle/>
+          <a:p>
+            <a:pPr algn="r" indent="0" marL="0">
+              <a:buNone/>
+            </a:pPr>
+            <a:r>
+              <a:rPr lang="en-US" sz="750" dirty="0">
+                <a:solidFill>
+                  <a:srgbClr val="8FA1AC"/>
+                </a:solidFill>
+                <a:latin typeface="Poppins" pitchFamily="34" charset="0"/>
+                <a:ea typeface="Poppins" pitchFamily="34" charset="-122"/>
+                <a:cs typeface="Poppins" pitchFamily="34" charset="-120"/>
+              </a:rPr>
+              <a:t>—</a:t>
+            </a:r>
+            <a:endParaRPr lang="en-US" sz="750" dirty="0"/>
+          </a:p>
+        </p:txBody>
+      </p:sp>
+      <p:sp>
+        <p:nvSpPr>
+          <p:cNvPr id="99" name="Text 97"/>
+          <p:cNvSpPr txBox="1"/>
+          <p:nvPr/>
+        </p:nvSpPr>
+        <p:spPr>
+          <a:xfrm>
+            <a:off x="10332720" y="3703320"/>
+            <a:ext cx="658368" cy="182880"/>
+          </a:xfrm>
+          <a:prstGeom prst="rect">
+            <a:avLst/>
+          </a:prstGeom>
+          <a:noFill/>
+          <a:ln/>
+        </p:spPr>
+        <p:txBody>
+          <a:bodyPr wrap="square" lIns="0" tIns="0" rIns="0" bIns="0" rtlCol="0" anchor="ctr"/>
+          <a:lstStyle/>
+          <a:p>
+            <a:pPr algn="r" indent="0" marL="0">
+              <a:buNone/>
+            </a:pPr>
+            <a:r>
+              <a:rPr lang="en-US" sz="750" dirty="0">
+                <a:solidFill>
+                  <a:srgbClr val="8FA1AC"/>
+                </a:solidFill>
+                <a:latin typeface="Poppins" pitchFamily="34" charset="0"/>
+                <a:ea typeface="Poppins" pitchFamily="34" charset="-122"/>
+                <a:cs typeface="Poppins" pitchFamily="34" charset="-120"/>
+              </a:rPr>
+              <a:t>—</a:t>
+            </a:r>
+            <a:endParaRPr lang="en-US" sz="750" dirty="0"/>
+          </a:p>
+        </p:txBody>
+      </p:sp>
+      <p:sp>
+        <p:nvSpPr>
+          <p:cNvPr id="100" name="Text 98"/>
+          <p:cNvSpPr txBox="1"/>
+          <p:nvPr/>
+        </p:nvSpPr>
+        <p:spPr>
+          <a:xfrm>
+            <a:off x="11064240" y="3703320"/>
+            <a:ext cx="548640" cy="182880"/>
+          </a:xfrm>
+          <a:prstGeom prst="rect">
+            <a:avLst/>
+          </a:prstGeom>
+          <a:noFill/>
+          <a:ln/>
+        </p:spPr>
+        <p:txBody>
+          <a:bodyPr wrap="square" lIns="0" tIns="0" rIns="0" bIns="0" rtlCol="0" anchor="ctr"/>
+          <a:lstStyle/>
+          <a:p>
+            <a:pPr algn="r" indent="0" marL="0">
+              <a:buNone/>
+            </a:pPr>
+            <a:r>
+              <a:rPr lang="en-US" sz="750" dirty="0">
+                <a:solidFill>
+                  <a:srgbClr val="8FA1AC"/>
+                </a:solidFill>
+                <a:latin typeface="Poppins" pitchFamily="34" charset="0"/>
+                <a:ea typeface="Poppins" pitchFamily="34" charset="-122"/>
+                <a:cs typeface="Poppins" pitchFamily="34" charset="-120"/>
+              </a:rPr>
+              <a:t>—</a:t>
+            </a:r>
+            <a:endParaRPr lang="en-US" sz="750" dirty="0"/>
+          </a:p>
+        </p:txBody>
+      </p:sp>
+      <p:sp>
+        <p:nvSpPr>
+          <p:cNvPr id="101" name="Shape 99"/>
+          <p:cNvSpPr/>
+          <p:nvPr/>
+        </p:nvSpPr>
+        <p:spPr>
+          <a:xfrm>
+            <a:off x="7452360" y="4169664"/>
+            <a:ext cx="4325112" cy="1078992"/>
+          </a:xfrm>
+          <a:prstGeom prst="roundRect">
+            <a:avLst>
+              <a:gd name="adj" fmla="val 5932"/>
+            </a:avLst>
+          </a:prstGeom>
+          <a:solidFill>
+            <a:srgbClr val="FFFFFF"/>
+          </a:solidFill>
+          <a:ln/>
+          <a:effectLst>
+            <a:outerShdw sx="100000" sy="100000" kx="0" ky="0" algn="bl" rotWithShape="0" blurRad="76200" dist="25400" dir="5400000">
+              <a:srgbClr val="9AAAB5">
+                <a:alpha val="35000"/>
+              </a:srgbClr>
+            </a:outerShdw>
+          </a:effectLst>
+        </p:spPr>
+      </p:sp>
+      <p:sp>
+        <p:nvSpPr>
+          <p:cNvPr id="102" name="Text 100"/>
+          <p:cNvSpPr txBox="1"/>
+          <p:nvPr/>
+        </p:nvSpPr>
+        <p:spPr>
+          <a:xfrm>
+            <a:off x="7653528" y="4242816"/>
+            <a:ext cx="3922776" cy="201168"/>
+          </a:xfrm>
+          <a:prstGeom prst="rect">
+            <a:avLst/>
+          </a:prstGeom>
+          <a:noFill/>
+          <a:ln/>
+        </p:spPr>
+        <p:txBody>
+          <a:bodyPr wrap="square" lIns="0" tIns="0" rIns="0" bIns="0" rtlCol="0" anchor="ctr"/>
+          <a:lstStyle/>
+          <a:p>
+            <a:pPr indent="0" marL="0">
+              <a:buNone/>
+            </a:pPr>
+            <a:r>
+              <a:rPr lang="en-US" sz="900" b="1" dirty="0">
+                <a:solidFill>
+                  <a:srgbClr val="2C8394"/>
+                </a:solidFill>
+                <a:latin typeface="Poppins" pitchFamily="34" charset="0"/>
+                <a:ea typeface="Poppins" pitchFamily="34" charset="-122"/>
+                <a:cs typeface="Poppins" pitchFamily="34" charset="-120"/>
+              </a:rPr>
+              <a:t>ANNUALISED VIEW   </a:t>
+            </a:r>
+            <a:pPr indent="0" marL="0">
+              <a:buNone/>
+            </a:pPr>
+            <a:r>
+              <a:rPr lang="en-US" sz="600" dirty="0">
+                <a:solidFill>
+                  <a:srgbClr val="C88A2E"/>
+                </a:solidFill>
+                <a:latin typeface="Poppins" pitchFamily="34" charset="0"/>
+                <a:ea typeface="Poppins" pitchFamily="34" charset="-122"/>
+                <a:cs typeface="Poppins" pitchFamily="34" charset="-120"/>
+              </a:rPr>
+              <a:t>ROAM lines are one month</a:t>
+            </a:r>
+            <a:endParaRPr lang="en-US" sz="900" dirty="0"/>
+          </a:p>
+        </p:txBody>
+      </p:sp>
+      <p:sp>
+        <p:nvSpPr>
+          <p:cNvPr id="103" name="Text 101"/>
+          <p:cNvSpPr txBox="1"/>
+          <p:nvPr/>
+        </p:nvSpPr>
+        <p:spPr>
+          <a:xfrm>
+            <a:off x="7653528" y="4462272"/>
+            <a:ext cx="1600200" cy="384048"/>
+          </a:xfrm>
+          <a:prstGeom prst="rect">
+            <a:avLst/>
+          </a:prstGeom>
+          <a:noFill/>
+          <a:ln/>
+        </p:spPr>
+        <p:txBody>
+          <a:bodyPr wrap="square" lIns="0" tIns="0" rIns="0" bIns="0" rtlCol="0" anchor="ctr"/>
+          <a:lstStyle/>
+          <a:p>
+            <a:pPr indent="0" marL="0">
+              <a:buNone/>
+            </a:pPr>
+            <a:r>
+              <a:rPr lang="en-US" sz="1800" b="1" dirty="0">
+                <a:solidFill>
+                  <a:srgbClr val="2C8394"/>
+                </a:solidFill>
+                <a:latin typeface="Poppins" pitchFamily="34" charset="0"/>
+                <a:ea typeface="Poppins" pitchFamily="34" charset="-122"/>
+                <a:cs typeface="Poppins" pitchFamily="34" charset="-120"/>
+              </a:rPr>
+              <a:t>US$15,016</a:t>
+            </a:r>
+            <a:endParaRPr lang="en-US" sz="1800" dirty="0"/>
+          </a:p>
+        </p:txBody>
+      </p:sp>
+      <p:sp>
+        <p:nvSpPr>
+          <p:cNvPr id="104" name="Text 102"/>
+          <p:cNvSpPr txBox="1"/>
+          <p:nvPr/>
+        </p:nvSpPr>
+        <p:spPr>
+          <a:xfrm>
+            <a:off x="9326880" y="4443984"/>
+            <a:ext cx="2221992" cy="457200"/>
+          </a:xfrm>
+          <a:prstGeom prst="rect">
+            <a:avLst/>
+          </a:prstGeom>
+          <a:noFill/>
+          <a:ln/>
+        </p:spPr>
+        <p:txBody>
+          <a:bodyPr wrap="square" lIns="0" tIns="0" rIns="0" bIns="0" rtlCol="0" anchor="ctr"/>
+          <a:lstStyle/>
+          <a:p>
+            <a:pPr indent="0" marL="0">
+              <a:buNone/>
+            </a:pPr>
+            <a:r>
+              <a:rPr lang="en-US" sz="700" dirty="0">
+                <a:solidFill>
+                  <a:srgbClr val="5E7280"/>
+                </a:solidFill>
+                <a:latin typeface="Poppins" pitchFamily="34" charset="0"/>
+                <a:ea typeface="Poppins" pitchFamily="34" charset="-122"/>
+                <a:cs typeface="Poppins" pitchFamily="34" charset="-120"/>
+              </a:rPr>
+              <a:t>open ROAM pipeline at ×12 (A$21,084) — the contract value behind the US$2,103 of monthly lines</a:t>
+            </a:r>
+            <a:endParaRPr lang="en-US" sz="700" dirty="0"/>
+          </a:p>
+        </p:txBody>
+      </p:sp>
+      <p:sp>
+        <p:nvSpPr>
+          <p:cNvPr id="105" name="Text 103"/>
+          <p:cNvSpPr txBox="1"/>
+          <p:nvPr/>
+        </p:nvSpPr>
+        <p:spPr>
+          <a:xfrm>
+            <a:off x="7653528" y="4901184"/>
+            <a:ext cx="3922776" cy="274320"/>
+          </a:xfrm>
+          <a:prstGeom prst="rect">
+            <a:avLst/>
+          </a:prstGeom>
+          <a:noFill/>
+          <a:ln/>
+        </p:spPr>
+        <p:txBody>
+          <a:bodyPr wrap="square" lIns="0" tIns="0" rIns="0" bIns="0" rtlCol="0" anchor="t"/>
+          <a:lstStyle/>
+          <a:p>
+            <a:pPr indent="0" marL="0">
+              <a:buNone/>
+            </a:pPr>
+            <a:r>
+              <a:rPr lang="en-US" sz="580" dirty="0">
+                <a:solidFill>
+                  <a:srgbClr val="8FA1AC"/>
+                </a:solidFill>
+                <a:latin typeface="Poppins" pitchFamily="34" charset="0"/>
+                <a:ea typeface="Poppins" pitchFamily="34" charset="-122"/>
+                <a:cs typeface="Poppins" pitchFamily="34" charset="-120"/>
+              </a:rPr>
+              <a:t>AUD→USD 0.7122 (mid-market close 20 Sep 2026) — HubSpot holds no USD field</a:t>
+            </a:r>
+            <a:endParaRPr lang="en-US" sz="580" dirty="0"/>
+          </a:p>
+        </p:txBody>
+      </p:sp>
+      <p:sp>
+        <p:nvSpPr>
+          <p:cNvPr id="106" name="Shape 104"/>
+          <p:cNvSpPr/>
+          <p:nvPr/>
+        </p:nvSpPr>
+        <p:spPr>
+          <a:xfrm>
+            <a:off x="411480" y="5504688"/>
+            <a:ext cx="11365992" cy="896112"/>
+          </a:xfrm>
+          <a:prstGeom prst="roundRect">
+            <a:avLst>
+              <a:gd name="adj" fmla="val 7143"/>
+            </a:avLst>
+          </a:prstGeom>
+          <a:solidFill>
+            <a:srgbClr val="FFFFFF"/>
+          </a:solidFill>
+          <a:ln/>
+          <a:effectLst>
+            <a:outerShdw sx="100000" sy="100000" kx="0" ky="0" algn="bl" rotWithShape="0" blurRad="76200" dist="25400" dir="5400000">
+              <a:srgbClr val="9AAAB5">
+                <a:alpha val="35000"/>
+              </a:srgbClr>
+            </a:outerShdw>
+          </a:effectLst>
+        </p:spPr>
+      </p:sp>
+      <p:sp>
+        <p:nvSpPr>
+          <p:cNvPr id="107" name="Text 105"/>
+          <p:cNvSpPr txBox="1"/>
+          <p:nvPr/>
+        </p:nvSpPr>
+        <p:spPr>
+          <a:xfrm>
+            <a:off x="612648" y="5614416"/>
+            <a:ext cx="11000232" cy="274320"/>
+          </a:xfrm>
+          <a:prstGeom prst="rect">
+            <a:avLst/>
+          </a:prstGeom>
+          <a:noFill/>
+          <a:ln/>
+        </p:spPr>
+        <p:txBody>
+          <a:bodyPr wrap="square" lIns="0" tIns="0" rIns="0" bIns="0" rtlCol="0" anchor="ctr"/>
+          <a:lstStyle/>
+          <a:p>
+            <a:pPr indent="0" marL="0">
+              <a:buNone/>
+            </a:pPr>
+            <a:r>
+              <a:rPr lang="en-US" sz="1200" b="1" dirty="0">
+                <a:solidFill>
+                  <a:srgbClr val="2C8394"/>
+                </a:solidFill>
+                <a:latin typeface="Poppins" pitchFamily="34" charset="0"/>
+                <a:ea typeface="Poppins" pitchFamily="34" charset="-122"/>
+                <a:cs typeface="Poppins" pitchFamily="34" charset="-120"/>
+              </a:rPr>
               <a:t>AI SUMMARY</a:t>
             </a:r>
             <a:endParaRPr lang="en-US" sz="1200" dirty="0"/>
@@ -45299,14 +46324,14 @@
       </p:sp>
       <p:sp>
         <p:nvSpPr>
-          <p:cNvPr id="77" name="Text 75"/>
-          <p:cNvSpPr txBox="1"/>
-          <p:nvPr/>
-        </p:nvSpPr>
-        <p:spPr>
-          <a:xfrm>
-            <a:off x="8430768" y="2761488"/>
-            <a:ext cx="3136392" cy="3493008"/>
+          <p:cNvPr id="108" name="Text 106"/>
+          <p:cNvSpPr txBox="1"/>
+          <p:nvPr/>
+        </p:nvSpPr>
+        <p:spPr>
+          <a:xfrm>
+            <a:off x="612648" y="5925312"/>
+            <a:ext cx="10954512" cy="347472"/>
           </a:xfrm>
           <a:prstGeom prst="rect">
             <a:avLst/>
@@ -45324,7 +46349,7 @@
             <a:r>
               <a:rPr lang="en-US" sz="900" b="1" dirty="0">
                 <a:solidFill>
-                  <a:srgbClr val="B4552D"/>
+                  <a:srgbClr val="3D8F5F"/>
                 </a:solidFill>
                 <a:latin typeface="Poppins" pitchFamily="34" charset="0"/>
                 <a:ea typeface="Poppins" pitchFamily="34" charset="-122"/>
@@ -45344,7 +46369,7 @@
                 <a:ea typeface="Poppins" pitchFamily="34" charset="-122"/>
                 <a:cs typeface="Poppins" pitchFamily="34" charset="-120"/>
               </a:rPr>
-              <a:t>September recorded MRR is $0 on the new basis </a:t>
+              <a:t>Conversion is real but tiny. </a:t>
             </a:r>
             <a:pPr indent="0" marL="0">
               <a:spcAft>
@@ -45361,7 +46386,7 @@
                 <a:ea typeface="Poppins" pitchFamily="34" charset="-122"/>
                 <a:cs typeface="Poppins" pitchFamily="34" charset="-120"/>
               </a:rPr>
-              <a:t>— 2 Roam wins closed this month carry no MRR value on the deal. That's a tagging gap to fix in HubSpot, not zero traction.</a:t>
+              <a:t>5 orders placed since 1 Jul (US$155) against 2 lost — 71% by count, 38% by value. All of it is ROAM; Sentinel has US$852 in play and no order yet.</a:t>
             </a:r>
             <a:endParaRPr lang="en-US" sz="900" dirty="0"/>
           </a:p>
@@ -45392,7 +46417,7 @@
                 <a:ea typeface="Poppins" pitchFamily="34" charset="-122"/>
                 <a:cs typeface="Poppins" pitchFamily="34" charset="-120"/>
               </a:rPr>
-              <a:t>Pipe is moving: </a:t>
+              <a:t>The book is stuck mid-funnel: </a:t>
             </a:r>
             <a:pPr indent="0" marL="0">
               <a:spcAft>
@@ -45409,7 +46434,7 @@
                 <a:ea typeface="Poppins" pitchFamily="34" charset="-122"/>
                 <a:cs typeface="Poppins" pitchFamily="34" charset="-120"/>
               </a:rPr>
-              <a:t>+10 Roam-matched deals created this week; open pipe 18 · $372/mo (Roam), 2 · $598/mo (Sentinel).</a:t>
+              <a:t>US$2,062 of the US$2,103 open sits in Quote Sent and Negotiation across 27 deals — the movement to chase is quote-to-order, not top-of-funnel.</a:t>
             </a:r>
             <a:endParaRPr lang="en-US" sz="900" dirty="0"/>
           </a:p>
@@ -45420,27 +46445,13 @@
             <a:r>
               <a:rPr lang="en-US" sz="900" b="1" dirty="0">
                 <a:solidFill>
-                  <a:srgbClr val="C88A2E"/>
+                  <a:srgbClr val="8FA1AC"/>
                 </a:solidFill>
                 <a:latin typeface="Poppins" pitchFamily="34" charset="0"/>
                 <a:ea typeface="Poppins" pitchFamily="34" charset="-122"/>
                 <a:cs typeface="Poppins" pitchFamily="34" charset="-120"/>
               </a:rPr>
               <a:t>•  </a:t>
-            </a:r>
-            <a:pPr indent="0" marL="0">
-              <a:buNone/>
-            </a:pPr>
-            <a:r>
-              <a:rPr lang="en-US" sz="900" b="1" dirty="0">
-                <a:solidFill>
-                  <a:srgbClr val="12293A"/>
-                </a:solidFill>
-                <a:latin typeface="Poppins" pitchFamily="34" charset="0"/>
-                <a:ea typeface="Poppins" pitchFamily="34" charset="-122"/>
-                <a:cs typeface="Poppins" pitchFamily="34" charset="-120"/>
-              </a:rPr>
-              <a:t>Basis change: </a:t>
             </a:r>
             <a:pPr indent="0" marL="0">
               <a:spcAft>
@@ -45451,62 +46462,28 @@
             <a:r>
               <a:rPr lang="en-US" sz="900" dirty="0">
                 <a:solidFill>
-                  <a:srgbClr val="3A4B57"/>
-                </a:solidFill>
-                <a:latin typeface="Poppins" pitchFamily="34" charset="0"/>
-                <a:ea typeface="Poppins" pitchFamily="34" charset="-122"/>
-                <a:cs typeface="Poppins" pitchFamily="34" charset="-120"/>
-              </a:rPr>
-              <a:t>keyword matching moved from Creatio opportunity names to HubSpot deal names, and $ now read the deal mrr field — levels reset against last week's $217 QTD.</a:t>
+                  <a:srgbClr val="8FA1AC"/>
+                </a:solidFill>
+                <a:latin typeface="Poppins" pitchFamily="34" charset="0"/>
+                <a:ea typeface="Poppins" pitchFamily="34" charset="-122"/>
+                <a:cs typeface="Poppins" pitchFamily="34" charset="-120"/>
+              </a:rPr>
+              <a:t>QR Ordering is priced $0 on every line, so its value reads nil · ROAM lines are one month, not contract value.</a:t>
             </a:r>
             <a:endParaRPr lang="en-US" sz="900" dirty="0"/>
           </a:p>
-          <a:p>
-            <a:pPr indent="0" marL="0">
-              <a:buNone/>
-            </a:pPr>
-            <a:r>
-              <a:rPr lang="en-US" sz="900" b="1" dirty="0">
-                <a:solidFill>
-                  <a:srgbClr val="8FA1AC"/>
-                </a:solidFill>
-                <a:latin typeface="Poppins" pitchFamily="34" charset="0"/>
-                <a:ea typeface="Poppins" pitchFamily="34" charset="-122"/>
-                <a:cs typeface="Poppins" pitchFamily="34" charset="-120"/>
-              </a:rPr>
-              <a:t>•  </a:t>
-            </a:r>
-            <a:pPr indent="0" marL="0">
-              <a:spcAft>
-                <a:spcPts val="800"/>
-              </a:spcAft>
-              <a:buNone/>
-            </a:pPr>
-            <a:r>
-              <a:rPr lang="en-US" sz="900" dirty="0">
-                <a:solidFill>
-                  <a:srgbClr val="8FA1AC"/>
-                </a:solidFill>
-                <a:latin typeface="Poppins" pitchFamily="34" charset="0"/>
-                <a:ea typeface="Poppins" pitchFamily="34" charset="-122"/>
-                <a:cs typeface="Poppins" pitchFamily="34" charset="-120"/>
-              </a:rPr>
-              <a:t>Demos &amp; pilots still come from the product-team feed — the CRM carries no demo/pilot signal. Product tagging in HubSpot is the unlock.</a:t>
-            </a:r>
-            <a:endParaRPr lang="en-US" sz="900" dirty="0"/>
-          </a:p>
-        </p:txBody>
-      </p:sp>
-      <p:sp>
-        <p:nvSpPr>
-          <p:cNvPr id="78" name="Shape 76"/>
-          <p:cNvSpPr/>
-          <p:nvPr/>
-        </p:nvSpPr>
-        <p:spPr>
-          <a:xfrm>
-            <a:off x="7834579" y="6510528"/>
-            <a:ext cx="3942893" cy="256032"/>
+        </p:txBody>
+      </p:sp>
+      <p:sp>
+        <p:nvSpPr>
+          <p:cNvPr id="109" name="Shape 107"/>
+          <p:cNvSpPr/>
+          <p:nvPr/>
+        </p:nvSpPr>
+        <p:spPr>
+          <a:xfrm>
+            <a:off x="7585862" y="6510528"/>
+            <a:ext cx="4191610" cy="256032"/>
           </a:xfrm>
           <a:prstGeom prst="roundRect">
             <a:avLst>
@@ -45521,14 +46498,14 @@
       </p:sp>
       <p:sp>
         <p:nvSpPr>
-          <p:cNvPr id="79" name="Text 77"/>
-          <p:cNvSpPr txBox="1"/>
-          <p:nvPr/>
-        </p:nvSpPr>
-        <p:spPr>
-          <a:xfrm>
-            <a:off x="7834579" y="6510528"/>
-            <a:ext cx="3942893" cy="256032"/>
+          <p:cNvPr id="110" name="Text 108"/>
+          <p:cNvSpPr txBox="1"/>
+          <p:nvPr/>
+        </p:nvSpPr>
+        <p:spPr>
+          <a:xfrm>
+            <a:off x="7585862" y="6510528"/>
+            <a:ext cx="4191610" cy="256032"/>
           </a:xfrm>
           <a:prstGeom prst="rect">
             <a:avLst/>
@@ -45552,7 +46529,7 @@
                 <a:ea typeface="Poppins" pitchFamily="34" charset="-122"/>
                 <a:cs typeface="Poppins" pitchFamily="34" charset="-120"/>
               </a:rPr>
-              <a:t>Source: HubSpot (keyword-matched deal names) + product plan</a:t>
+              <a:t>Source: HubSpot line items · products flagged ai_infused (live)</a:t>
             </a:r>
             <a:endParaRPr lang="en-US" sz="700" dirty="0"/>
           </a:p>

--- a/exec-deck/output/H&L Weekly Update - WC 14 Sep 2026.pptx
+++ b/exec-deck/output/H&L Weekly Update - WC 14 Sep 2026.pptx
@@ -46183,7 +46183,7 @@
         <p:spPr>
           <a:xfrm>
             <a:off x="411480" y="1024128"/>
-            <a:ext cx="2697480" cy="1143000"/>
+            <a:ext cx="3639312" cy="1143000"/>
           </a:xfrm>
           <a:prstGeom prst="roundRect">
             <a:avLst>
@@ -46212,7 +46212,7 @@
         <p:spPr>
           <a:xfrm>
             <a:off x="576072" y="1115568"/>
-            <a:ext cx="2368296" cy="274320"/>
+            <a:ext cx="3310128" cy="274320"/>
           </a:xfrm>
           <a:prstGeom prst="rect">
             <a:avLst/>
@@ -46251,23 +46251,23 @@
         <p:spPr>
           <a:xfrm>
             <a:off x="557784" y="1298448"/>
-            <a:ext cx="2404872" cy="356616"/>
-          </a:xfrm>
-          <a:prstGeom prst="rect">
-            <a:avLst/>
-          </a:prstGeom>
-          <a:noFill/>
-          <a:ln/>
-        </p:spPr>
-        <p:txBody>
-          <a:bodyPr wrap="square" lIns="0" tIns="0" rIns="0" bIns="0" rtlCol="0" anchor="ctr"/>
-          <a:lstStyle/>
-          <a:p>
-            <a:pPr indent="0" marL="0">
-              <a:buNone/>
-            </a:pPr>
-            <a:r>
-              <a:rPr lang="en-US" sz="2100" b="1" dirty="0">
+            <a:ext cx="3346704" cy="356616"/>
+          </a:xfrm>
+          <a:prstGeom prst="rect">
+            <a:avLst/>
+          </a:prstGeom>
+          <a:noFill/>
+          <a:ln/>
+        </p:spPr>
+        <p:txBody>
+          <a:bodyPr wrap="square" lIns="0" tIns="0" rIns="0" bIns="0" rtlCol="0" anchor="ctr"/>
+          <a:lstStyle/>
+          <a:p>
+            <a:pPr indent="0" marL="0">
+              <a:buNone/>
+            </a:pPr>
+            <a:r>
+              <a:rPr lang="en-US" sz="2000" b="1" dirty="0">
                 <a:solidFill>
                   <a:srgbClr val="C88A2E"/>
                 </a:solidFill>
@@ -46275,9 +46275,9 @@
                 <a:ea typeface="Poppins" pitchFamily="34" charset="-122"/>
                 <a:cs typeface="Poppins" pitchFamily="34" charset="-120"/>
               </a:rPr>
-              <a:t>31.8% / 38%</a:t>
-            </a:r>
-            <a:endParaRPr lang="en-US" sz="2100" dirty="0"/>
+              <a:t>not set up</a:t>
+            </a:r>
+            <a:endParaRPr lang="en-US" sz="2000" dirty="0"/>
           </a:p>
         </p:txBody>
       </p:sp>
@@ -46290,7 +46290,7 @@
         <p:spPr>
           <a:xfrm>
             <a:off x="576072" y="1691640"/>
-            <a:ext cx="2368296" cy="420624"/>
+            <a:ext cx="3310128" cy="420624"/>
           </a:xfrm>
           <a:prstGeom prst="rect">
             <a:avLst/>
@@ -46314,7 +46314,7 @@
                 <a:ea typeface="Poppins" pitchFamily="34" charset="-122"/>
                 <a:cs typeface="Poppins" pitchFamily="34" charset="-120"/>
               </a:rPr>
-              <a:t>last Creatio reading · week of 2026-08-30 — frozen</a:t>
+              <a:t>billable flag set on only 3 of 29 records carrying time — not yet separable</a:t>
             </a:r>
             <a:endParaRPr lang="en-US" sz="780" dirty="0"/>
           </a:p>
@@ -46328,8 +46328,8 @@
         </p:nvSpPr>
         <p:spPr>
           <a:xfrm>
-            <a:off x="3291840" y="1024128"/>
-            <a:ext cx="2697480" cy="1143000"/>
+            <a:off x="4233672" y="1024128"/>
+            <a:ext cx="3639312" cy="1143000"/>
           </a:xfrm>
           <a:prstGeom prst="roundRect">
             <a:avLst>
@@ -46357,8 +46357,8 @@
         </p:nvSpPr>
         <p:spPr>
           <a:xfrm>
-            <a:off x="3456432" y="1115568"/>
-            <a:ext cx="2368296" cy="274320"/>
+            <a:off x="4398264" y="1115568"/>
+            <a:ext cx="3310128" cy="274320"/>
           </a:xfrm>
           <a:prstGeom prst="rect">
             <a:avLst/>
@@ -46396,24 +46396,24 @@
         </p:nvSpPr>
         <p:spPr>
           <a:xfrm>
-            <a:off x="3438144" y="1298448"/>
-            <a:ext cx="2404872" cy="356616"/>
-          </a:xfrm>
-          <a:prstGeom prst="rect">
-            <a:avLst/>
-          </a:prstGeom>
-          <a:noFill/>
-          <a:ln/>
-        </p:spPr>
-        <p:txBody>
-          <a:bodyPr wrap="square" lIns="0" tIns="0" rIns="0" bIns="0" rtlCol="0" anchor="ctr"/>
-          <a:lstStyle/>
-          <a:p>
-            <a:pPr indent="0" marL="0">
-              <a:buNone/>
-            </a:pPr>
-            <a:r>
-              <a:rPr lang="en-US" sz="2400" b="1" dirty="0">
+            <a:off x="4379976" y="1298448"/>
+            <a:ext cx="3346704" cy="356616"/>
+          </a:xfrm>
+          <a:prstGeom prst="rect">
+            <a:avLst/>
+          </a:prstGeom>
+          <a:noFill/>
+          <a:ln/>
+        </p:spPr>
+        <p:txBody>
+          <a:bodyPr wrap="square" lIns="0" tIns="0" rIns="0" bIns="0" rtlCol="0" anchor="ctr"/>
+          <a:lstStyle/>
+          <a:p>
+            <a:pPr indent="0" marL="0">
+              <a:buNone/>
+            </a:pPr>
+            <a:r>
+              <a:rPr lang="en-US" sz="2000" b="1" dirty="0">
                 <a:solidFill>
                   <a:srgbClr val="C88A2E"/>
                 </a:solidFill>
@@ -46421,9 +46421,9 @@
                 <a:ea typeface="Poppins" pitchFamily="34" charset="-122"/>
                 <a:cs typeface="Poppins" pitchFamily="34" charset="-120"/>
               </a:rPr>
-              <a:t>69.4%</a:t>
-            </a:r>
-            <a:endParaRPr lang="en-US" sz="2400" dirty="0"/>
+              <a:t>not set up</a:t>
+            </a:r>
+            <a:endParaRPr lang="en-US" sz="2000" dirty="0"/>
           </a:p>
         </p:txBody>
       </p:sp>
@@ -46435,8 +46435,8 @@
         </p:nvSpPr>
         <p:spPr>
           <a:xfrm>
-            <a:off x="3456432" y="1691640"/>
-            <a:ext cx="2368296" cy="420624"/>
+            <a:off x="4398264" y="1691640"/>
+            <a:ext cx="3310128" cy="420624"/>
           </a:xfrm>
           <a:prstGeom prst="rect">
             <a:avLst/>
@@ -46460,7 +46460,7 @@
                 <a:ea typeface="Poppins" pitchFamily="34" charset="-122"/>
                 <a:cs typeface="Poppins" pitchFamily="34" charset="-120"/>
               </a:rPr>
-              <a:t>all hours vs capacity · 80% target — frozen at cutover</a:t>
+              <a:t>capacity model to be rebuilt on HubSpot hours · 80% target unchanged</a:t>
             </a:r>
             <a:endParaRPr lang="en-US" sz="780" dirty="0"/>
           </a:p>
@@ -46474,8 +46474,8 @@
         </p:nvSpPr>
         <p:spPr>
           <a:xfrm>
-            <a:off x="6172200" y="1024128"/>
-            <a:ext cx="2697480" cy="1143000"/>
+            <a:off x="8055864" y="1024128"/>
+            <a:ext cx="3721608" cy="1143000"/>
           </a:xfrm>
           <a:prstGeom prst="roundRect">
             <a:avLst>
@@ -46503,8 +46503,8 @@
         </p:nvSpPr>
         <p:spPr>
           <a:xfrm>
-            <a:off x="6336792" y="1115568"/>
-            <a:ext cx="2368296" cy="274320"/>
+            <a:off x="8220456" y="1115568"/>
+            <a:ext cx="3392424" cy="274320"/>
           </a:xfrm>
           <a:prstGeom prst="rect">
             <a:avLst/>
@@ -46528,7 +46528,7 @@
                 <a:ea typeface="Poppins" pitchFamily="34" charset="-122"/>
                 <a:cs typeface="Poppins" pitchFamily="34" charset="-120"/>
               </a:rPr>
-              <a:t>UTILISATION — SINCE CUTOVER</a:t>
+              <a:t>PS CASES OPENED — THIS WEEK</a:t>
             </a:r>
             <a:endParaRPr lang="en-US" sz="950" dirty="0"/>
           </a:p>
@@ -46542,34 +46542,34 @@
         </p:nvSpPr>
         <p:spPr>
           <a:xfrm>
-            <a:off x="6318504" y="1298448"/>
-            <a:ext cx="2404872" cy="356616"/>
-          </a:xfrm>
-          <a:prstGeom prst="rect">
-            <a:avLst/>
-          </a:prstGeom>
-          <a:noFill/>
-          <a:ln/>
-        </p:spPr>
-        <p:txBody>
-          <a:bodyPr wrap="square" lIns="0" tIns="0" rIns="0" bIns="0" rtlCol="0" anchor="ctr"/>
-          <a:lstStyle/>
-          <a:p>
-            <a:pPr indent="0" marL="0">
-              <a:buNone/>
-            </a:pPr>
-            <a:r>
-              <a:rPr lang="en-US" sz="2400" b="1" dirty="0">
-                <a:solidFill>
-                  <a:srgbClr val="B4552D"/>
-                </a:solidFill>
-                <a:latin typeface="Poppins" pitchFamily="34" charset="0"/>
-                <a:ea typeface="Poppins" pitchFamily="34" charset="-122"/>
-                <a:cs typeface="Poppins" pitchFamily="34" charset="-120"/>
-              </a:rPr>
-              <a:t>13%</a:t>
-            </a:r>
-            <a:endParaRPr lang="en-US" sz="2400" dirty="0"/>
+            <a:off x="8202168" y="1298448"/>
+            <a:ext cx="3429000" cy="356616"/>
+          </a:xfrm>
+          <a:prstGeom prst="rect">
+            <a:avLst/>
+          </a:prstGeom>
+          <a:noFill/>
+          <a:ln/>
+        </p:spPr>
+        <p:txBody>
+          <a:bodyPr wrap="square" lIns="0" tIns="0" rIns="0" bIns="0" rtlCol="0" anchor="ctr"/>
+          <a:lstStyle/>
+          <a:p>
+            <a:pPr indent="0" marL="0">
+              <a:buNone/>
+            </a:pPr>
+            <a:r>
+              <a:rPr lang="en-US" sz="2600" b="1" dirty="0">
+                <a:solidFill>
+                  <a:srgbClr val="12293A"/>
+                </a:solidFill>
+                <a:latin typeface="Poppins" pitchFamily="34" charset="0"/>
+                <a:ea typeface="Poppins" pitchFamily="34" charset="-122"/>
+                <a:cs typeface="Poppins" pitchFamily="34" charset="-120"/>
+              </a:rPr>
+              <a:t>64</a:t>
+            </a:r>
+            <a:endParaRPr lang="en-US" sz="2600" dirty="0"/>
           </a:p>
         </p:txBody>
       </p:sp>
@@ -46581,8 +46581,8 @@
         </p:nvSpPr>
         <p:spPr>
           <a:xfrm>
-            <a:off x="6336792" y="1691640"/>
-            <a:ext cx="2368296" cy="420624"/>
+            <a:off x="8220456" y="1691640"/>
+            <a:ext cx="3392424" cy="420624"/>
           </a:xfrm>
           <a:prstGeom prst="rect">
             <a:avLst/>
@@ -46606,7 +46606,7 @@
                 <a:ea typeface="Poppins" pitchFamily="34" charset="-122"/>
                 <a:cs typeface="Poppins" pitchFamily="34" charset="-120"/>
               </a:rPr>
-              <a:t>78.93h logged vs 608h capacity, 8–20 Sep — logging still ramping</a:t>
+              <a:t>Tech 40 · Integrations 14 · Training 7 · Onboarding 3 · Warranty 0 (HubSpot, live)</a:t>
             </a:r>
             <a:endParaRPr lang="en-US" sz="780" dirty="0"/>
           </a:p>
@@ -46620,12 +46620,12 @@
         </p:nvSpPr>
         <p:spPr>
           <a:xfrm>
-            <a:off x="9052560" y="1024128"/>
-            <a:ext cx="2724912" cy="1143000"/>
+            <a:off x="411480" y="2395728"/>
+            <a:ext cx="6583680" cy="3566160"/>
           </a:xfrm>
           <a:prstGeom prst="roundRect">
             <a:avLst>
-              <a:gd name="adj" fmla="val 5600"/>
+              <a:gd name="adj" fmla="val 1795"/>
             </a:avLst>
           </a:prstGeom>
           <a:solidFill>
@@ -46649,8 +46649,262 @@
         </p:nvSpPr>
         <p:spPr>
           <a:xfrm>
-            <a:off x="9217152" y="1115568"/>
-            <a:ext cx="2395728" cy="274320"/>
+            <a:off x="612648" y="2505456"/>
+            <a:ext cx="6035040" cy="274320"/>
+          </a:xfrm>
+          <a:prstGeom prst="rect">
+            <a:avLst/>
+          </a:prstGeom>
+          <a:noFill/>
+          <a:ln/>
+        </p:spPr>
+        <p:txBody>
+          <a:bodyPr wrap="square" lIns="0" tIns="0" rIns="0" bIns="0" rtlCol="0" anchor="ctr"/>
+          <a:lstStyle/>
+          <a:p>
+            <a:pPr indent="0" marL="0">
+              <a:buNone/>
+            </a:pPr>
+            <a:r>
+              <a:rPr lang="en-US" sz="1200" b="1" dirty="0">
+                <a:solidFill>
+                  <a:srgbClr val="2C8394"/>
+                </a:solidFill>
+                <a:latin typeface="Poppins" pitchFamily="34" charset="0"/>
+                <a:ea typeface="Poppins" pitchFamily="34" charset="-122"/>
+                <a:cs typeface="Poppins" pitchFamily="34" charset="-120"/>
+              </a:rPr>
+              <a:t>HOURS LOGGED ON PS RECORDS — RAMPING</a:t>
+            </a:r>
+            <a:endParaRPr lang="en-US" sz="1200" dirty="0"/>
+          </a:p>
+        </p:txBody>
+      </p:sp>
+      <p:sp>
+        <p:nvSpPr>
+          <p:cNvPr id="29" name="Text 27"/>
+          <p:cNvSpPr txBox="1"/>
+          <p:nvPr/>
+        </p:nvSpPr>
+        <p:spPr>
+          <a:xfrm>
+            <a:off x="640080" y="2807208"/>
+            <a:ext cx="2011680" cy="502920"/>
+          </a:xfrm>
+          <a:prstGeom prst="rect">
+            <a:avLst/>
+          </a:prstGeom>
+          <a:noFill/>
+          <a:ln/>
+        </p:spPr>
+        <p:txBody>
+          <a:bodyPr wrap="square" lIns="0" tIns="0" rIns="0" bIns="0" rtlCol="0" anchor="ctr"/>
+          <a:lstStyle/>
+          <a:p>
+            <a:pPr indent="0" marL="0">
+              <a:buNone/>
+            </a:pPr>
+            <a:r>
+              <a:rPr lang="en-US" sz="3000" b="1" dirty="0">
+                <a:solidFill>
+                  <a:srgbClr val="2C8394"/>
+                </a:solidFill>
+                <a:latin typeface="Poppins" pitchFamily="34" charset="0"/>
+                <a:ea typeface="Poppins" pitchFamily="34" charset="-122"/>
+                <a:cs typeface="Poppins" pitchFamily="34" charset="-120"/>
+              </a:rPr>
+              <a:t>78.93h</a:t>
+            </a:r>
+            <a:endParaRPr lang="en-US" sz="3000" dirty="0"/>
+          </a:p>
+        </p:txBody>
+      </p:sp>
+      <p:sp>
+        <p:nvSpPr>
+          <p:cNvPr id="30" name="Text 28"/>
+          <p:cNvSpPr txBox="1"/>
+          <p:nvPr/>
+        </p:nvSpPr>
+        <p:spPr>
+          <a:xfrm>
+            <a:off x="2697480" y="2852928"/>
+            <a:ext cx="4023360" cy="457200"/>
+          </a:xfrm>
+          <a:prstGeom prst="rect">
+            <a:avLst/>
+          </a:prstGeom>
+          <a:noFill/>
+          <a:ln/>
+        </p:spPr>
+        <p:txBody>
+          <a:bodyPr wrap="square" lIns="0" tIns="0" rIns="0" bIns="0" rtlCol="0" anchor="ctr"/>
+          <a:lstStyle/>
+          <a:p>
+            <a:pPr indent="0" marL="0">
+              <a:buNone/>
+            </a:pPr>
+            <a:r>
+              <a:rPr lang="en-US" sz="850" dirty="0">
+                <a:solidFill>
+                  <a:srgbClr val="5E7280"/>
+                </a:solidFill>
+                <a:latin typeface="Poppins" pitchFamily="34" charset="0"/>
+                <a:ea typeface="Poppins" pitchFamily="34" charset="-122"/>
+                <a:cs typeface="Poppins" pitchFamily="34" charset="-120"/>
+              </a:rPr>
+              <a:t>across 29 of 8,969 records — the new ground truth (total_hours on the Professional Services record)</a:t>
+            </a:r>
+            <a:endParaRPr lang="en-US" sz="850" dirty="0"/>
+          </a:p>
+        </p:txBody>
+      </p:sp>
+      <p:sp>
+        <p:nvSpPr>
+          <p:cNvPr id="31" name="Text 29"/>
+          <p:cNvSpPr txBox="1"/>
+          <p:nvPr/>
+        </p:nvSpPr>
+        <p:spPr>
+          <a:xfrm>
+            <a:off x="640080" y="3493008"/>
+            <a:ext cx="2743200" cy="201168"/>
+          </a:xfrm>
+          <a:prstGeom prst="rect">
+            <a:avLst/>
+          </a:prstGeom>
+          <a:noFill/>
+          <a:ln/>
+        </p:spPr>
+        <p:txBody>
+          <a:bodyPr wrap="square" lIns="0" tIns="0" rIns="0" bIns="0" rtlCol="0" anchor="ctr"/>
+          <a:lstStyle/>
+          <a:p>
+            <a:pPr algn="l" indent="0" marL="0">
+              <a:buNone/>
+            </a:pPr>
+            <a:r>
+              <a:rPr lang="en-US" sz="800" b="1" dirty="0">
+                <a:solidFill>
+                  <a:srgbClr val="8FA1AC"/>
+                </a:solidFill>
+                <a:latin typeface="Poppins" pitchFamily="34" charset="0"/>
+                <a:ea typeface="Poppins" pitchFamily="34" charset="-122"/>
+                <a:cs typeface="Poppins" pitchFamily="34" charset="-120"/>
+              </a:rPr>
+              <a:t>SERVICE TYPE</a:t>
+            </a:r>
+            <a:endParaRPr lang="en-US" sz="800" dirty="0"/>
+          </a:p>
+        </p:txBody>
+      </p:sp>
+      <p:sp>
+        <p:nvSpPr>
+          <p:cNvPr id="32" name="Text 30"/>
+          <p:cNvSpPr txBox="1"/>
+          <p:nvPr/>
+        </p:nvSpPr>
+        <p:spPr>
+          <a:xfrm>
+            <a:off x="3520440" y="3493008"/>
+            <a:ext cx="1463040" cy="201168"/>
+          </a:xfrm>
+          <a:prstGeom prst="rect">
+            <a:avLst/>
+          </a:prstGeom>
+          <a:noFill/>
+          <a:ln/>
+        </p:spPr>
+        <p:txBody>
+          <a:bodyPr wrap="square" lIns="0" tIns="0" rIns="0" bIns="0" rtlCol="0" anchor="ctr"/>
+          <a:lstStyle/>
+          <a:p>
+            <a:pPr algn="r" indent="0" marL="0">
+              <a:buNone/>
+            </a:pPr>
+            <a:r>
+              <a:rPr lang="en-US" sz="800" b="1" dirty="0">
+                <a:solidFill>
+                  <a:srgbClr val="8FA1AC"/>
+                </a:solidFill>
+                <a:latin typeface="Poppins" pitchFamily="34" charset="0"/>
+                <a:ea typeface="Poppins" pitchFamily="34" charset="-122"/>
+                <a:cs typeface="Poppins" pitchFamily="34" charset="-120"/>
+              </a:rPr>
+              <a:t>HOURS LOGGED</a:t>
+            </a:r>
+            <a:endParaRPr lang="en-US" sz="800" dirty="0"/>
+          </a:p>
+        </p:txBody>
+      </p:sp>
+      <p:sp>
+        <p:nvSpPr>
+          <p:cNvPr id="33" name="Text 31"/>
+          <p:cNvSpPr txBox="1"/>
+          <p:nvPr/>
+        </p:nvSpPr>
+        <p:spPr>
+          <a:xfrm>
+            <a:off x="5166360" y="3493008"/>
+            <a:ext cx="1463040" cy="201168"/>
+          </a:xfrm>
+          <a:prstGeom prst="rect">
+            <a:avLst/>
+          </a:prstGeom>
+          <a:noFill/>
+          <a:ln/>
+        </p:spPr>
+        <p:txBody>
+          <a:bodyPr wrap="square" lIns="0" tIns="0" rIns="0" bIns="0" rtlCol="0" anchor="ctr"/>
+          <a:lstStyle/>
+          <a:p>
+            <a:pPr algn="r" indent="0" marL="0">
+              <a:buNone/>
+            </a:pPr>
+            <a:r>
+              <a:rPr lang="en-US" sz="800" b="1" dirty="0">
+                <a:solidFill>
+                  <a:srgbClr val="8FA1AC"/>
+                </a:solidFill>
+                <a:latin typeface="Poppins" pitchFamily="34" charset="0"/>
+                <a:ea typeface="Poppins" pitchFamily="34" charset="-122"/>
+                <a:cs typeface="Poppins" pitchFamily="34" charset="-120"/>
+              </a:rPr>
+              <a:t>RECORDS</a:t>
+            </a:r>
+            <a:endParaRPr lang="en-US" sz="800" dirty="0"/>
+          </a:p>
+        </p:txBody>
+      </p:sp>
+      <p:sp>
+        <p:nvSpPr>
+          <p:cNvPr id="34" name="Shape 32"/>
+          <p:cNvSpPr/>
+          <p:nvPr/>
+        </p:nvSpPr>
+        <p:spPr>
+          <a:xfrm>
+            <a:off x="640080" y="4087368"/>
+            <a:ext cx="6126480" cy="6401"/>
+          </a:xfrm>
+          <a:prstGeom prst="rect">
+            <a:avLst/>
+          </a:prstGeom>
+          <a:solidFill>
+            <a:srgbClr val="E2EAEE"/>
+          </a:solidFill>
+          <a:ln/>
+        </p:spPr>
+      </p:sp>
+      <p:sp>
+        <p:nvSpPr>
+          <p:cNvPr id="35" name="Text 33"/>
+          <p:cNvSpPr txBox="1"/>
+          <p:nvPr/>
+        </p:nvSpPr>
+        <p:spPr>
+          <a:xfrm>
+            <a:off x="640080" y="3749040"/>
+            <a:ext cx="1417320" cy="347472"/>
           </a:xfrm>
           <a:prstGeom prst="rect">
             <a:avLst/>
@@ -46668,13 +46922,13 @@
             <a:r>
               <a:rPr lang="en-US" sz="950" b="1" dirty="0">
                 <a:solidFill>
-                  <a:srgbClr val="2C8394"/>
-                </a:solidFill>
-                <a:latin typeface="Poppins" pitchFamily="34" charset="0"/>
-                <a:ea typeface="Poppins" pitchFamily="34" charset="-122"/>
-                <a:cs typeface="Poppins" pitchFamily="34" charset="-120"/>
-              </a:rPr>
-              <a:t>PS ENGAGEMENTS — THIS WEEK</a:t>
+                  <a:srgbClr val="12293A"/>
+                </a:solidFill>
+                <a:latin typeface="Poppins" pitchFamily="34" charset="0"/>
+                <a:ea typeface="Poppins" pitchFamily="34" charset="-122"/>
+                <a:cs typeface="Poppins" pitchFamily="34" charset="-120"/>
+              </a:rPr>
+              <a:t>Tech</a:t>
             </a:r>
             <a:endParaRPr lang="en-US" sz="950" dirty="0"/>
           </a:p>
@@ -46682,96 +46936,793 @@
       </p:sp>
       <p:sp>
         <p:nvSpPr>
-          <p:cNvPr id="29" name="Text 27"/>
-          <p:cNvSpPr txBox="1"/>
-          <p:nvPr/>
-        </p:nvSpPr>
-        <p:spPr>
-          <a:xfrm>
-            <a:off x="9198864" y="1298448"/>
-            <a:ext cx="2432304" cy="356616"/>
-          </a:xfrm>
-          <a:prstGeom prst="rect">
-            <a:avLst/>
-          </a:prstGeom>
-          <a:noFill/>
-          <a:ln/>
-        </p:spPr>
-        <p:txBody>
-          <a:bodyPr wrap="square" lIns="0" tIns="0" rIns="0" bIns="0" rtlCol="0" anchor="ctr"/>
-          <a:lstStyle/>
-          <a:p>
-            <a:pPr indent="0" marL="0">
-              <a:buNone/>
-            </a:pPr>
-            <a:r>
-              <a:rPr lang="en-US" sz="2600" b="1" dirty="0">
-                <a:solidFill>
-                  <a:srgbClr val="12293A"/>
-                </a:solidFill>
-                <a:latin typeface="Poppins" pitchFamily="34" charset="0"/>
-                <a:ea typeface="Poppins" pitchFamily="34" charset="-122"/>
-                <a:cs typeface="Poppins" pitchFamily="34" charset="-120"/>
-              </a:rPr>
-              <a:t>131</a:t>
-            </a:r>
-            <a:endParaRPr lang="en-US" sz="2600" dirty="0"/>
-          </a:p>
-        </p:txBody>
-      </p:sp>
-      <p:sp>
-        <p:nvSpPr>
-          <p:cNvPr id="30" name="Text 28"/>
-          <p:cNvSpPr txBox="1"/>
-          <p:nvPr/>
-        </p:nvSpPr>
-        <p:spPr>
-          <a:xfrm>
-            <a:off x="9217152" y="1691640"/>
-            <a:ext cx="2395728" cy="420624"/>
-          </a:xfrm>
-          <a:prstGeom prst="rect">
-            <a:avLst/>
-          </a:prstGeom>
-          <a:noFill/>
-          <a:ln/>
-        </p:spPr>
-        <p:txBody>
-          <a:bodyPr wrap="square" lIns="0" tIns="0" rIns="0" bIns="0" rtlCol="0" anchor="t"/>
-          <a:lstStyle/>
-          <a:p>
-            <a:pPr indent="0" marL="0">
-              <a:buNone/>
-            </a:pPr>
-            <a:r>
-              <a:rPr lang="en-US" sz="780" dirty="0">
-                <a:solidFill>
-                  <a:srgbClr val="5E7280"/>
-                </a:solidFill>
-                <a:latin typeface="Poppins" pitchFamily="34" charset="0"/>
-                <a:ea typeface="Poppins" pitchFamily="34" charset="-122"/>
-                <a:cs typeface="Poppins" pitchFamily="34" charset="-120"/>
-              </a:rPr>
-              <a:t>new PS records · 29 of 8,969 carry time so far</a:t>
-            </a:r>
-            <a:endParaRPr lang="en-US" sz="780" dirty="0"/>
-          </a:p>
-        </p:txBody>
-      </p:sp>
-      <p:sp>
-        <p:nvSpPr>
-          <p:cNvPr id="31" name="Shape 29"/>
-          <p:cNvSpPr/>
-          <p:nvPr/>
-        </p:nvSpPr>
-        <p:spPr>
-          <a:xfrm>
-            <a:off x="411480" y="2395728"/>
-            <a:ext cx="7498080" cy="2834640"/>
+          <p:cNvPr id="36" name="Shape 34"/>
+          <p:cNvSpPr/>
+          <p:nvPr/>
+        </p:nvSpPr>
+        <p:spPr>
+          <a:xfrm>
+            <a:off x="2148840" y="3867912"/>
+            <a:ext cx="1234440" cy="118872"/>
           </a:xfrm>
           <a:prstGeom prst="roundRect">
             <a:avLst>
-              <a:gd name="adj" fmla="val 2258"/>
+              <a:gd name="adj" fmla="val 38462"/>
+            </a:avLst>
+          </a:prstGeom>
+          <a:solidFill>
+            <a:srgbClr val="2C8394"/>
+          </a:solidFill>
+          <a:ln/>
+        </p:spPr>
+      </p:sp>
+      <p:sp>
+        <p:nvSpPr>
+          <p:cNvPr id="37" name="Text 35"/>
+          <p:cNvSpPr txBox="1"/>
+          <p:nvPr/>
+        </p:nvSpPr>
+        <p:spPr>
+          <a:xfrm>
+            <a:off x="3520440" y="3749040"/>
+            <a:ext cx="1463040" cy="347472"/>
+          </a:xfrm>
+          <a:prstGeom prst="rect">
+            <a:avLst/>
+          </a:prstGeom>
+          <a:noFill/>
+          <a:ln/>
+        </p:spPr>
+        <p:txBody>
+          <a:bodyPr wrap="square" lIns="0" tIns="0" rIns="0" bIns="0" rtlCol="0" anchor="ctr"/>
+          <a:lstStyle/>
+          <a:p>
+            <a:pPr algn="r" indent="0" marL="0">
+              <a:buNone/>
+            </a:pPr>
+            <a:r>
+              <a:rPr lang="en-US" sz="950" b="1" dirty="0">
+                <a:solidFill>
+                  <a:srgbClr val="2C8394"/>
+                </a:solidFill>
+                <a:latin typeface="Poppins" pitchFamily="34" charset="0"/>
+                <a:ea typeface="Poppins" pitchFamily="34" charset="-122"/>
+                <a:cs typeface="Poppins" pitchFamily="34" charset="-120"/>
+              </a:rPr>
+              <a:t>36.9h</a:t>
+            </a:r>
+            <a:endParaRPr lang="en-US" sz="950" dirty="0"/>
+          </a:p>
+        </p:txBody>
+      </p:sp>
+      <p:sp>
+        <p:nvSpPr>
+          <p:cNvPr id="38" name="Text 36"/>
+          <p:cNvSpPr txBox="1"/>
+          <p:nvPr/>
+        </p:nvSpPr>
+        <p:spPr>
+          <a:xfrm>
+            <a:off x="5166360" y="3749040"/>
+            <a:ext cx="1463040" cy="347472"/>
+          </a:xfrm>
+          <a:prstGeom prst="rect">
+            <a:avLst/>
+          </a:prstGeom>
+          <a:noFill/>
+          <a:ln/>
+        </p:spPr>
+        <p:txBody>
+          <a:bodyPr wrap="square" lIns="0" tIns="0" rIns="0" bIns="0" rtlCol="0" anchor="ctr"/>
+          <a:lstStyle/>
+          <a:p>
+            <a:pPr algn="r" indent="0" marL="0">
+              <a:buNone/>
+            </a:pPr>
+            <a:r>
+              <a:rPr lang="en-US" sz="950" dirty="0">
+                <a:solidFill>
+                  <a:srgbClr val="5E7280"/>
+                </a:solidFill>
+                <a:latin typeface="Poppins" pitchFamily="34" charset="0"/>
+                <a:ea typeface="Poppins" pitchFamily="34" charset="-122"/>
+                <a:cs typeface="Poppins" pitchFamily="34" charset="-120"/>
+              </a:rPr>
+              <a:t>19</a:t>
+            </a:r>
+            <a:endParaRPr lang="en-US" sz="950" dirty="0"/>
+          </a:p>
+        </p:txBody>
+      </p:sp>
+      <p:sp>
+        <p:nvSpPr>
+          <p:cNvPr id="39" name="Shape 37"/>
+          <p:cNvSpPr/>
+          <p:nvPr/>
+        </p:nvSpPr>
+        <p:spPr>
+          <a:xfrm>
+            <a:off x="640080" y="4471416"/>
+            <a:ext cx="6126480" cy="6401"/>
+          </a:xfrm>
+          <a:prstGeom prst="rect">
+            <a:avLst/>
+          </a:prstGeom>
+          <a:solidFill>
+            <a:srgbClr val="E2EAEE"/>
+          </a:solidFill>
+          <a:ln/>
+        </p:spPr>
+      </p:sp>
+      <p:sp>
+        <p:nvSpPr>
+          <p:cNvPr id="40" name="Text 38"/>
+          <p:cNvSpPr txBox="1"/>
+          <p:nvPr/>
+        </p:nvSpPr>
+        <p:spPr>
+          <a:xfrm>
+            <a:off x="640080" y="4133088"/>
+            <a:ext cx="1417320" cy="347472"/>
+          </a:xfrm>
+          <a:prstGeom prst="rect">
+            <a:avLst/>
+          </a:prstGeom>
+          <a:noFill/>
+          <a:ln/>
+        </p:spPr>
+        <p:txBody>
+          <a:bodyPr wrap="square" lIns="0" tIns="0" rIns="0" bIns="0" rtlCol="0" anchor="ctr"/>
+          <a:lstStyle/>
+          <a:p>
+            <a:pPr indent="0" marL="0">
+              <a:buNone/>
+            </a:pPr>
+            <a:r>
+              <a:rPr lang="en-US" sz="950" b="1" dirty="0">
+                <a:solidFill>
+                  <a:srgbClr val="12293A"/>
+                </a:solidFill>
+                <a:latin typeface="Poppins" pitchFamily="34" charset="0"/>
+                <a:ea typeface="Poppins" pitchFamily="34" charset="-122"/>
+                <a:cs typeface="Poppins" pitchFamily="34" charset="-120"/>
+              </a:rPr>
+              <a:t>Onboarding</a:t>
+            </a:r>
+            <a:endParaRPr lang="en-US" sz="950" dirty="0"/>
+          </a:p>
+        </p:txBody>
+      </p:sp>
+      <p:sp>
+        <p:nvSpPr>
+          <p:cNvPr id="41" name="Shape 39"/>
+          <p:cNvSpPr/>
+          <p:nvPr/>
+        </p:nvSpPr>
+        <p:spPr>
+          <a:xfrm>
+            <a:off x="2148840" y="4251960"/>
+            <a:ext cx="1200986" cy="118872"/>
+          </a:xfrm>
+          <a:prstGeom prst="roundRect">
+            <a:avLst>
+              <a:gd name="adj" fmla="val 38462"/>
+            </a:avLst>
+          </a:prstGeom>
+          <a:solidFill>
+            <a:srgbClr val="2C8394"/>
+          </a:solidFill>
+          <a:ln/>
+        </p:spPr>
+      </p:sp>
+      <p:sp>
+        <p:nvSpPr>
+          <p:cNvPr id="42" name="Text 40"/>
+          <p:cNvSpPr txBox="1"/>
+          <p:nvPr/>
+        </p:nvSpPr>
+        <p:spPr>
+          <a:xfrm>
+            <a:off x="3520440" y="4133088"/>
+            <a:ext cx="1463040" cy="347472"/>
+          </a:xfrm>
+          <a:prstGeom prst="rect">
+            <a:avLst/>
+          </a:prstGeom>
+          <a:noFill/>
+          <a:ln/>
+        </p:spPr>
+        <p:txBody>
+          <a:bodyPr wrap="square" lIns="0" tIns="0" rIns="0" bIns="0" rtlCol="0" anchor="ctr"/>
+          <a:lstStyle/>
+          <a:p>
+            <a:pPr algn="r" indent="0" marL="0">
+              <a:buNone/>
+            </a:pPr>
+            <a:r>
+              <a:rPr lang="en-US" sz="950" b="1" dirty="0">
+                <a:solidFill>
+                  <a:srgbClr val="2C8394"/>
+                </a:solidFill>
+                <a:latin typeface="Poppins" pitchFamily="34" charset="0"/>
+                <a:ea typeface="Poppins" pitchFamily="34" charset="-122"/>
+                <a:cs typeface="Poppins" pitchFamily="34" charset="-120"/>
+              </a:rPr>
+              <a:t>35.9h</a:t>
+            </a:r>
+            <a:endParaRPr lang="en-US" sz="950" dirty="0"/>
+          </a:p>
+        </p:txBody>
+      </p:sp>
+      <p:sp>
+        <p:nvSpPr>
+          <p:cNvPr id="43" name="Text 41"/>
+          <p:cNvSpPr txBox="1"/>
+          <p:nvPr/>
+        </p:nvSpPr>
+        <p:spPr>
+          <a:xfrm>
+            <a:off x="5166360" y="4133088"/>
+            <a:ext cx="1463040" cy="347472"/>
+          </a:xfrm>
+          <a:prstGeom prst="rect">
+            <a:avLst/>
+          </a:prstGeom>
+          <a:noFill/>
+          <a:ln/>
+        </p:spPr>
+        <p:txBody>
+          <a:bodyPr wrap="square" lIns="0" tIns="0" rIns="0" bIns="0" rtlCol="0" anchor="ctr"/>
+          <a:lstStyle/>
+          <a:p>
+            <a:pPr algn="r" indent="0" marL="0">
+              <a:buNone/>
+            </a:pPr>
+            <a:r>
+              <a:rPr lang="en-US" sz="950" dirty="0">
+                <a:solidFill>
+                  <a:srgbClr val="5E7280"/>
+                </a:solidFill>
+                <a:latin typeface="Poppins" pitchFamily="34" charset="0"/>
+                <a:ea typeface="Poppins" pitchFamily="34" charset="-122"/>
+                <a:cs typeface="Poppins" pitchFamily="34" charset="-120"/>
+              </a:rPr>
+              <a:t>3</a:t>
+            </a:r>
+            <a:endParaRPr lang="en-US" sz="950" dirty="0"/>
+          </a:p>
+        </p:txBody>
+      </p:sp>
+      <p:sp>
+        <p:nvSpPr>
+          <p:cNvPr id="44" name="Shape 42"/>
+          <p:cNvSpPr/>
+          <p:nvPr/>
+        </p:nvSpPr>
+        <p:spPr>
+          <a:xfrm>
+            <a:off x="640080" y="4855464"/>
+            <a:ext cx="6126480" cy="6401"/>
+          </a:xfrm>
+          <a:prstGeom prst="rect">
+            <a:avLst/>
+          </a:prstGeom>
+          <a:solidFill>
+            <a:srgbClr val="E2EAEE"/>
+          </a:solidFill>
+          <a:ln/>
+        </p:spPr>
+      </p:sp>
+      <p:sp>
+        <p:nvSpPr>
+          <p:cNvPr id="45" name="Text 43"/>
+          <p:cNvSpPr txBox="1"/>
+          <p:nvPr/>
+        </p:nvSpPr>
+        <p:spPr>
+          <a:xfrm>
+            <a:off x="640080" y="4517136"/>
+            <a:ext cx="1417320" cy="347472"/>
+          </a:xfrm>
+          <a:prstGeom prst="rect">
+            <a:avLst/>
+          </a:prstGeom>
+          <a:noFill/>
+          <a:ln/>
+        </p:spPr>
+        <p:txBody>
+          <a:bodyPr wrap="square" lIns="0" tIns="0" rIns="0" bIns="0" rtlCol="0" anchor="ctr"/>
+          <a:lstStyle/>
+          <a:p>
+            <a:pPr indent="0" marL="0">
+              <a:buNone/>
+            </a:pPr>
+            <a:r>
+              <a:rPr lang="en-US" sz="950" b="1" dirty="0">
+                <a:solidFill>
+                  <a:srgbClr val="12293A"/>
+                </a:solidFill>
+                <a:latin typeface="Poppins" pitchFamily="34" charset="0"/>
+                <a:ea typeface="Poppins" pitchFamily="34" charset="-122"/>
+                <a:cs typeface="Poppins" pitchFamily="34" charset="-120"/>
+              </a:rPr>
+              <a:t>Other / unassigned</a:t>
+            </a:r>
+            <a:endParaRPr lang="en-US" sz="950" dirty="0"/>
+          </a:p>
+        </p:txBody>
+      </p:sp>
+      <p:sp>
+        <p:nvSpPr>
+          <p:cNvPr id="46" name="Shape 44"/>
+          <p:cNvSpPr/>
+          <p:nvPr/>
+        </p:nvSpPr>
+        <p:spPr>
+          <a:xfrm>
+            <a:off x="2148840" y="4636008"/>
+            <a:ext cx="100361" cy="118872"/>
+          </a:xfrm>
+          <a:prstGeom prst="roundRect">
+            <a:avLst>
+              <a:gd name="adj" fmla="val 45556"/>
+            </a:avLst>
+          </a:prstGeom>
+          <a:solidFill>
+            <a:srgbClr val="2C8394"/>
+          </a:solidFill>
+          <a:ln/>
+        </p:spPr>
+      </p:sp>
+      <p:sp>
+        <p:nvSpPr>
+          <p:cNvPr id="47" name="Text 45"/>
+          <p:cNvSpPr txBox="1"/>
+          <p:nvPr/>
+        </p:nvSpPr>
+        <p:spPr>
+          <a:xfrm>
+            <a:off x="3520440" y="4517136"/>
+            <a:ext cx="1463040" cy="347472"/>
+          </a:xfrm>
+          <a:prstGeom prst="rect">
+            <a:avLst/>
+          </a:prstGeom>
+          <a:noFill/>
+          <a:ln/>
+        </p:spPr>
+        <p:txBody>
+          <a:bodyPr wrap="square" lIns="0" tIns="0" rIns="0" bIns="0" rtlCol="0" anchor="ctr"/>
+          <a:lstStyle/>
+          <a:p>
+            <a:pPr algn="r" indent="0" marL="0">
+              <a:buNone/>
+            </a:pPr>
+            <a:r>
+              <a:rPr lang="en-US" sz="950" b="1" dirty="0">
+                <a:solidFill>
+                  <a:srgbClr val="2C8394"/>
+                </a:solidFill>
+                <a:latin typeface="Poppins" pitchFamily="34" charset="0"/>
+                <a:ea typeface="Poppins" pitchFamily="34" charset="-122"/>
+                <a:cs typeface="Poppins" pitchFamily="34" charset="-120"/>
+              </a:rPr>
+              <a:t>3.0h</a:t>
+            </a:r>
+            <a:endParaRPr lang="en-US" sz="950" dirty="0"/>
+          </a:p>
+        </p:txBody>
+      </p:sp>
+      <p:sp>
+        <p:nvSpPr>
+          <p:cNvPr id="48" name="Text 46"/>
+          <p:cNvSpPr txBox="1"/>
+          <p:nvPr/>
+        </p:nvSpPr>
+        <p:spPr>
+          <a:xfrm>
+            <a:off x="5166360" y="4517136"/>
+            <a:ext cx="1463040" cy="347472"/>
+          </a:xfrm>
+          <a:prstGeom prst="rect">
+            <a:avLst/>
+          </a:prstGeom>
+          <a:noFill/>
+          <a:ln/>
+        </p:spPr>
+        <p:txBody>
+          <a:bodyPr wrap="square" lIns="0" tIns="0" rIns="0" bIns="0" rtlCol="0" anchor="ctr"/>
+          <a:lstStyle/>
+          <a:p>
+            <a:pPr algn="r" indent="0" marL="0">
+              <a:buNone/>
+            </a:pPr>
+            <a:r>
+              <a:rPr lang="en-US" sz="950" dirty="0">
+                <a:solidFill>
+                  <a:srgbClr val="5E7280"/>
+                </a:solidFill>
+                <a:latin typeface="Poppins" pitchFamily="34" charset="0"/>
+                <a:ea typeface="Poppins" pitchFamily="34" charset="-122"/>
+                <a:cs typeface="Poppins" pitchFamily="34" charset="-120"/>
+              </a:rPr>
+              <a:t>3</a:t>
+            </a:r>
+            <a:endParaRPr lang="en-US" sz="950" dirty="0"/>
+          </a:p>
+        </p:txBody>
+      </p:sp>
+      <p:sp>
+        <p:nvSpPr>
+          <p:cNvPr id="49" name="Shape 47"/>
+          <p:cNvSpPr/>
+          <p:nvPr/>
+        </p:nvSpPr>
+        <p:spPr>
+          <a:xfrm>
+            <a:off x="640080" y="5239512"/>
+            <a:ext cx="6126480" cy="6401"/>
+          </a:xfrm>
+          <a:prstGeom prst="rect">
+            <a:avLst/>
+          </a:prstGeom>
+          <a:solidFill>
+            <a:srgbClr val="E2EAEE"/>
+          </a:solidFill>
+          <a:ln/>
+        </p:spPr>
+      </p:sp>
+      <p:sp>
+        <p:nvSpPr>
+          <p:cNvPr id="50" name="Text 48"/>
+          <p:cNvSpPr txBox="1"/>
+          <p:nvPr/>
+        </p:nvSpPr>
+        <p:spPr>
+          <a:xfrm>
+            <a:off x="640080" y="4901184"/>
+            <a:ext cx="1417320" cy="347472"/>
+          </a:xfrm>
+          <a:prstGeom prst="rect">
+            <a:avLst/>
+          </a:prstGeom>
+          <a:noFill/>
+          <a:ln/>
+        </p:spPr>
+        <p:txBody>
+          <a:bodyPr wrap="square" lIns="0" tIns="0" rIns="0" bIns="0" rtlCol="0" anchor="ctr"/>
+          <a:lstStyle/>
+          <a:p>
+            <a:pPr indent="0" marL="0">
+              <a:buNone/>
+            </a:pPr>
+            <a:r>
+              <a:rPr lang="en-US" sz="950" b="1" dirty="0">
+                <a:solidFill>
+                  <a:srgbClr val="12293A"/>
+                </a:solidFill>
+                <a:latin typeface="Poppins" pitchFamily="34" charset="0"/>
+                <a:ea typeface="Poppins" pitchFamily="34" charset="-122"/>
+                <a:cs typeface="Poppins" pitchFamily="34" charset="-120"/>
+              </a:rPr>
+              <a:t>Integration</a:t>
+            </a:r>
+            <a:endParaRPr lang="en-US" sz="950" dirty="0"/>
+          </a:p>
+        </p:txBody>
+      </p:sp>
+      <p:sp>
+        <p:nvSpPr>
+          <p:cNvPr id="51" name="Shape 49"/>
+          <p:cNvSpPr/>
+          <p:nvPr/>
+        </p:nvSpPr>
+        <p:spPr>
+          <a:xfrm>
+            <a:off x="2148840" y="5020056"/>
+            <a:ext cx="86980" cy="118872"/>
+          </a:xfrm>
+          <a:prstGeom prst="roundRect">
+            <a:avLst>
+              <a:gd name="adj" fmla="val 52564"/>
+            </a:avLst>
+          </a:prstGeom>
+          <a:solidFill>
+            <a:srgbClr val="2C8394"/>
+          </a:solidFill>
+          <a:ln/>
+        </p:spPr>
+      </p:sp>
+      <p:sp>
+        <p:nvSpPr>
+          <p:cNvPr id="52" name="Text 50"/>
+          <p:cNvSpPr txBox="1"/>
+          <p:nvPr/>
+        </p:nvSpPr>
+        <p:spPr>
+          <a:xfrm>
+            <a:off x="3520440" y="4901184"/>
+            <a:ext cx="1463040" cy="347472"/>
+          </a:xfrm>
+          <a:prstGeom prst="rect">
+            <a:avLst/>
+          </a:prstGeom>
+          <a:noFill/>
+          <a:ln/>
+        </p:spPr>
+        <p:txBody>
+          <a:bodyPr wrap="square" lIns="0" tIns="0" rIns="0" bIns="0" rtlCol="0" anchor="ctr"/>
+          <a:lstStyle/>
+          <a:p>
+            <a:pPr algn="r" indent="0" marL="0">
+              <a:buNone/>
+            </a:pPr>
+            <a:r>
+              <a:rPr lang="en-US" sz="950" b="1" dirty="0">
+                <a:solidFill>
+                  <a:srgbClr val="2C8394"/>
+                </a:solidFill>
+                <a:latin typeface="Poppins" pitchFamily="34" charset="0"/>
+                <a:ea typeface="Poppins" pitchFamily="34" charset="-122"/>
+                <a:cs typeface="Poppins" pitchFamily="34" charset="-120"/>
+              </a:rPr>
+              <a:t>2.6h</a:t>
+            </a:r>
+            <a:endParaRPr lang="en-US" sz="950" dirty="0"/>
+          </a:p>
+        </p:txBody>
+      </p:sp>
+      <p:sp>
+        <p:nvSpPr>
+          <p:cNvPr id="53" name="Text 51"/>
+          <p:cNvSpPr txBox="1"/>
+          <p:nvPr/>
+        </p:nvSpPr>
+        <p:spPr>
+          <a:xfrm>
+            <a:off x="5166360" y="4901184"/>
+            <a:ext cx="1463040" cy="347472"/>
+          </a:xfrm>
+          <a:prstGeom prst="rect">
+            <a:avLst/>
+          </a:prstGeom>
+          <a:noFill/>
+          <a:ln/>
+        </p:spPr>
+        <p:txBody>
+          <a:bodyPr wrap="square" lIns="0" tIns="0" rIns="0" bIns="0" rtlCol="0" anchor="ctr"/>
+          <a:lstStyle/>
+          <a:p>
+            <a:pPr algn="r" indent="0" marL="0">
+              <a:buNone/>
+            </a:pPr>
+            <a:r>
+              <a:rPr lang="en-US" sz="950" dirty="0">
+                <a:solidFill>
+                  <a:srgbClr val="5E7280"/>
+                </a:solidFill>
+                <a:latin typeface="Poppins" pitchFamily="34" charset="0"/>
+                <a:ea typeface="Poppins" pitchFamily="34" charset="-122"/>
+                <a:cs typeface="Poppins" pitchFamily="34" charset="-120"/>
+              </a:rPr>
+              <a:t>3</a:t>
+            </a:r>
+            <a:endParaRPr lang="en-US" sz="950" dirty="0"/>
+          </a:p>
+        </p:txBody>
+      </p:sp>
+      <p:sp>
+        <p:nvSpPr>
+          <p:cNvPr id="54" name="Shape 52"/>
+          <p:cNvSpPr/>
+          <p:nvPr/>
+        </p:nvSpPr>
+        <p:spPr>
+          <a:xfrm>
+            <a:off x="640080" y="5623560"/>
+            <a:ext cx="6126480" cy="6401"/>
+          </a:xfrm>
+          <a:prstGeom prst="rect">
+            <a:avLst/>
+          </a:prstGeom>
+          <a:solidFill>
+            <a:srgbClr val="E2EAEE"/>
+          </a:solidFill>
+          <a:ln/>
+        </p:spPr>
+      </p:sp>
+      <p:sp>
+        <p:nvSpPr>
+          <p:cNvPr id="55" name="Text 53"/>
+          <p:cNvSpPr txBox="1"/>
+          <p:nvPr/>
+        </p:nvSpPr>
+        <p:spPr>
+          <a:xfrm>
+            <a:off x="640080" y="5285232"/>
+            <a:ext cx="1417320" cy="347472"/>
+          </a:xfrm>
+          <a:prstGeom prst="rect">
+            <a:avLst/>
+          </a:prstGeom>
+          <a:noFill/>
+          <a:ln/>
+        </p:spPr>
+        <p:txBody>
+          <a:bodyPr wrap="square" lIns="0" tIns="0" rIns="0" bIns="0" rtlCol="0" anchor="ctr"/>
+          <a:lstStyle/>
+          <a:p>
+            <a:pPr indent="0" marL="0">
+              <a:buNone/>
+            </a:pPr>
+            <a:r>
+              <a:rPr lang="en-US" sz="950" b="1" dirty="0">
+                <a:solidFill>
+                  <a:srgbClr val="12293A"/>
+                </a:solidFill>
+                <a:latin typeface="Poppins" pitchFamily="34" charset="0"/>
+                <a:ea typeface="Poppins" pitchFamily="34" charset="-122"/>
+                <a:cs typeface="Poppins" pitchFamily="34" charset="-120"/>
+              </a:rPr>
+              <a:t>Training</a:t>
+            </a:r>
+            <a:endParaRPr lang="en-US" sz="950" dirty="0"/>
+          </a:p>
+        </p:txBody>
+      </p:sp>
+      <p:sp>
+        <p:nvSpPr>
+          <p:cNvPr id="56" name="Shape 54"/>
+          <p:cNvSpPr/>
+          <p:nvPr/>
+        </p:nvSpPr>
+        <p:spPr>
+          <a:xfrm>
+            <a:off x="2148840" y="5404104"/>
+            <a:ext cx="45720" cy="118872"/>
+          </a:xfrm>
+          <a:prstGeom prst="roundRect">
+            <a:avLst>
+              <a:gd name="adj" fmla="val 100000"/>
+            </a:avLst>
+          </a:prstGeom>
+          <a:solidFill>
+            <a:srgbClr val="2C8394"/>
+          </a:solidFill>
+          <a:ln/>
+        </p:spPr>
+      </p:sp>
+      <p:sp>
+        <p:nvSpPr>
+          <p:cNvPr id="57" name="Text 55"/>
+          <p:cNvSpPr txBox="1"/>
+          <p:nvPr/>
+        </p:nvSpPr>
+        <p:spPr>
+          <a:xfrm>
+            <a:off x="3520440" y="5285232"/>
+            <a:ext cx="1463040" cy="347472"/>
+          </a:xfrm>
+          <a:prstGeom prst="rect">
+            <a:avLst/>
+          </a:prstGeom>
+          <a:noFill/>
+          <a:ln/>
+        </p:spPr>
+        <p:txBody>
+          <a:bodyPr wrap="square" lIns="0" tIns="0" rIns="0" bIns="0" rtlCol="0" anchor="ctr"/>
+          <a:lstStyle/>
+          <a:p>
+            <a:pPr algn="r" indent="0" marL="0">
+              <a:buNone/>
+            </a:pPr>
+            <a:r>
+              <a:rPr lang="en-US" sz="950" b="1" dirty="0">
+                <a:solidFill>
+                  <a:srgbClr val="2C8394"/>
+                </a:solidFill>
+                <a:latin typeface="Poppins" pitchFamily="34" charset="0"/>
+                <a:ea typeface="Poppins" pitchFamily="34" charset="-122"/>
+                <a:cs typeface="Poppins" pitchFamily="34" charset="-120"/>
+              </a:rPr>
+              <a:t>0.5h</a:t>
+            </a:r>
+            <a:endParaRPr lang="en-US" sz="950" dirty="0"/>
+          </a:p>
+        </p:txBody>
+      </p:sp>
+      <p:sp>
+        <p:nvSpPr>
+          <p:cNvPr id="58" name="Text 56"/>
+          <p:cNvSpPr txBox="1"/>
+          <p:nvPr/>
+        </p:nvSpPr>
+        <p:spPr>
+          <a:xfrm>
+            <a:off x="5166360" y="5285232"/>
+            <a:ext cx="1463040" cy="347472"/>
+          </a:xfrm>
+          <a:prstGeom prst="rect">
+            <a:avLst/>
+          </a:prstGeom>
+          <a:noFill/>
+          <a:ln/>
+        </p:spPr>
+        <p:txBody>
+          <a:bodyPr wrap="square" lIns="0" tIns="0" rIns="0" bIns="0" rtlCol="0" anchor="ctr"/>
+          <a:lstStyle/>
+          <a:p>
+            <a:pPr algn="r" indent="0" marL="0">
+              <a:buNone/>
+            </a:pPr>
+            <a:r>
+              <a:rPr lang="en-US" sz="950" dirty="0">
+                <a:solidFill>
+                  <a:srgbClr val="5E7280"/>
+                </a:solidFill>
+                <a:latin typeface="Poppins" pitchFamily="34" charset="0"/>
+                <a:ea typeface="Poppins" pitchFamily="34" charset="-122"/>
+                <a:cs typeface="Poppins" pitchFamily="34" charset="-120"/>
+              </a:rPr>
+              <a:t>1</a:t>
+            </a:r>
+            <a:endParaRPr lang="en-US" sz="950" dirty="0"/>
+          </a:p>
+        </p:txBody>
+      </p:sp>
+      <p:sp>
+        <p:nvSpPr>
+          <p:cNvPr id="59" name="Text 57"/>
+          <p:cNvSpPr txBox="1"/>
+          <p:nvPr/>
+        </p:nvSpPr>
+        <p:spPr>
+          <a:xfrm>
+            <a:off x="640080" y="5577840"/>
+            <a:ext cx="6126480" cy="292608"/>
+          </a:xfrm>
+          <a:prstGeom prst="rect">
+            <a:avLst/>
+          </a:prstGeom>
+          <a:noFill/>
+          <a:ln/>
+        </p:spPr>
+        <p:txBody>
+          <a:bodyPr wrap="square" lIns="0" tIns="0" rIns="0" bIns="0" rtlCol="0" anchor="t"/>
+          <a:lstStyle/>
+          <a:p>
+            <a:pPr indent="0" marL="0">
+              <a:buNone/>
+            </a:pPr>
+            <a:r>
+              <a:rPr lang="en-US" sz="680" dirty="0">
+                <a:solidFill>
+                  <a:srgbClr val="C88A2E"/>
+                </a:solidFill>
+                <a:latin typeface="Poppins" pitchFamily="34" charset="0"/>
+                <a:ea typeface="Poppins" pitchFamily="34" charset="-122"/>
+                <a:cs typeface="Poppins" pitchFamily="34" charset="-120"/>
+              </a:rPr>
+              <a:t>21.4h of the 78.9h sits on two records named 'test' / 'Warranty Test' — worth clearing out</a:t>
+            </a:r>
+            <a:endParaRPr lang="en-US" sz="680" dirty="0"/>
+          </a:p>
+        </p:txBody>
+      </p:sp>
+      <p:sp>
+        <p:nvSpPr>
+          <p:cNvPr id="60" name="Shape 58"/>
+          <p:cNvSpPr/>
+          <p:nvPr/>
+        </p:nvSpPr>
+        <p:spPr>
+          <a:xfrm>
+            <a:off x="7178040" y="2395728"/>
+            <a:ext cx="4599432" cy="1700784"/>
+          </a:xfrm>
+          <a:prstGeom prst="roundRect">
+            <a:avLst>
+              <a:gd name="adj" fmla="val 3763"/>
             </a:avLst>
           </a:prstGeom>
           <a:solidFill>
@@ -46789,30 +47740,30 @@
       </p:sp>
       <p:sp>
         <p:nvSpPr>
-          <p:cNvPr id="32" name="Text 30"/>
-          <p:cNvSpPr txBox="1"/>
-          <p:nvPr/>
-        </p:nvSpPr>
-        <p:spPr>
-          <a:xfrm>
-            <a:off x="612648" y="2505456"/>
-            <a:ext cx="5852160" cy="274320"/>
-          </a:xfrm>
-          <a:prstGeom prst="rect">
-            <a:avLst/>
-          </a:prstGeom>
-          <a:noFill/>
-          <a:ln/>
-        </p:spPr>
-        <p:txBody>
-          <a:bodyPr wrap="square" lIns="0" tIns="0" rIns="0" bIns="0" rtlCol="0" anchor="ctr"/>
-          <a:lstStyle/>
-          <a:p>
-            <a:pPr indent="0" marL="0">
-              <a:buNone/>
-            </a:pPr>
-            <a:r>
-              <a:rPr lang="en-US" sz="1200" b="1" dirty="0">
+          <p:cNvPr id="61" name="Text 59"/>
+          <p:cNvSpPr txBox="1"/>
+          <p:nvPr/>
+        </p:nvSpPr>
+        <p:spPr>
+          <a:xfrm>
+            <a:off x="7379208" y="2487168"/>
+            <a:ext cx="4197096" cy="237744"/>
+          </a:xfrm>
+          <a:prstGeom prst="rect">
+            <a:avLst/>
+          </a:prstGeom>
+          <a:noFill/>
+          <a:ln/>
+        </p:spPr>
+        <p:txBody>
+          <a:bodyPr wrap="square" lIns="0" tIns="0" rIns="0" bIns="0" rtlCol="0" anchor="ctr"/>
+          <a:lstStyle/>
+          <a:p>
+            <a:pPr indent="0" marL="0">
+              <a:buNone/>
+            </a:pPr>
+            <a:r>
+              <a:rPr lang="en-US" sz="1100" b="1" dirty="0">
                 <a:solidFill>
                   <a:srgbClr val="2C8394"/>
                 </a:solidFill>
@@ -46820,77 +47771,247 @@
                 <a:ea typeface="Poppins" pitchFamily="34" charset="-122"/>
                 <a:cs typeface="Poppins" pitchFamily="34" charset="-120"/>
               </a:rPr>
-              <a:t>WHERE THE HOURS GO — AVAILABLE VS UTILISED, MONTHLY</a:t>
-            </a:r>
-            <a:endParaRPr lang="en-US" sz="1200" dirty="0"/>
-          </a:p>
-        </p:txBody>
-      </p:sp>
-      <p:sp>
-        <p:nvSpPr>
-          <p:cNvPr id="33" name="Text 31"/>
-          <p:cNvSpPr txBox="1"/>
-          <p:nvPr/>
-        </p:nvSpPr>
-        <p:spPr>
-          <a:xfrm>
-            <a:off x="1645920" y="2688336"/>
-            <a:ext cx="4279392" cy="146304"/>
-          </a:xfrm>
-          <a:prstGeom prst="rect">
-            <a:avLst/>
-          </a:prstGeom>
-          <a:noFill/>
-          <a:ln/>
-        </p:spPr>
-        <p:txBody>
-          <a:bodyPr wrap="square" lIns="0" tIns="0" rIns="0" bIns="0" rtlCol="0" anchor="ctr"/>
-          <a:lstStyle/>
-          <a:p>
-            <a:pPr algn="ctr" indent="0" marL="0">
-              <a:buNone/>
-            </a:pPr>
-            <a:r>
-              <a:rPr lang="en-US" sz="600" b="1" dirty="0">
-                <a:solidFill>
-                  <a:srgbClr val="C88A2E"/>
-                </a:solidFill>
-                <a:latin typeface="Poppins" pitchFamily="34" charset="0"/>
-                <a:ea typeface="Poppins" pitchFamily="34" charset="-122"/>
-                <a:cs typeface="Poppins" pitchFamily="34" charset="-120"/>
-              </a:rPr>
-              <a:t>CREATIO — FROZEN AT 4 SEP EXTRACT</a:t>
-            </a:r>
-            <a:endParaRPr lang="en-US" sz="600" dirty="0"/>
-          </a:p>
-        </p:txBody>
-      </p:sp>
-      <p:sp>
-        <p:nvSpPr>
-          <p:cNvPr id="34" name="Text 32"/>
-          <p:cNvSpPr txBox="1"/>
-          <p:nvPr/>
-        </p:nvSpPr>
-        <p:spPr>
-          <a:xfrm>
-            <a:off x="6108192" y="2688336"/>
-            <a:ext cx="1097280" cy="146304"/>
-          </a:xfrm>
-          <a:prstGeom prst="rect">
-            <a:avLst/>
-          </a:prstGeom>
-          <a:noFill/>
-          <a:ln/>
-        </p:spPr>
-        <p:txBody>
-          <a:bodyPr wrap="square" lIns="0" tIns="0" rIns="0" bIns="0" rtlCol="0" anchor="ctr"/>
-          <a:lstStyle/>
-          <a:p>
-            <a:pPr algn="ctr" indent="0" marL="0">
-              <a:buNone/>
-            </a:pPr>
-            <a:r>
-              <a:rPr lang="en-US" sz="600" b="1" dirty="0">
+              <a:t>OPEN PS WORK  </a:t>
+            </a:r>
+            <a:pPr indent="0" marL="0">
+              <a:buNone/>
+            </a:pPr>
+            <a:r>
+              <a:rPr lang="en-US" sz="650" dirty="0">
+                <a:solidFill>
+                  <a:srgbClr val="8FA1AC"/>
+                </a:solidFill>
+                <a:latin typeface="Poppins" pitchFamily="34" charset="0"/>
+                <a:ea typeface="Poppins" pitchFamily="34" charset="-122"/>
+                <a:cs typeface="Poppins" pitchFamily="34" charset="-120"/>
+              </a:rPr>
+              <a:t>median time to close · since 8 Sep</a:t>
+            </a:r>
+            <a:endParaRPr lang="en-US" sz="1100" dirty="0"/>
+          </a:p>
+        </p:txBody>
+      </p:sp>
+      <p:sp>
+        <p:nvSpPr>
+          <p:cNvPr id="62" name="Text 60"/>
+          <p:cNvSpPr txBox="1"/>
+          <p:nvPr/>
+        </p:nvSpPr>
+        <p:spPr>
+          <a:xfrm>
+            <a:off x="7379208" y="2743200"/>
+            <a:ext cx="1828800" cy="164592"/>
+          </a:xfrm>
+          <a:prstGeom prst="rect">
+            <a:avLst/>
+          </a:prstGeom>
+          <a:noFill/>
+          <a:ln/>
+        </p:spPr>
+        <p:txBody>
+          <a:bodyPr wrap="square" lIns="0" tIns="0" rIns="0" bIns="0" rtlCol="0" anchor="ctr"/>
+          <a:lstStyle/>
+          <a:p>
+            <a:pPr algn="l" indent="0" marL="0">
+              <a:buNone/>
+            </a:pPr>
+            <a:r>
+              <a:rPr lang="en-US" sz="680" b="1" dirty="0">
+                <a:solidFill>
+                  <a:srgbClr val="8FA1AC"/>
+                </a:solidFill>
+                <a:latin typeface="Poppins" pitchFamily="34" charset="0"/>
+                <a:ea typeface="Poppins" pitchFamily="34" charset="-122"/>
+                <a:cs typeface="Poppins" pitchFamily="34" charset="-120"/>
+              </a:rPr>
+              <a:t>SERVICE TYPE</a:t>
+            </a:r>
+            <a:endParaRPr lang="en-US" sz="680" dirty="0"/>
+          </a:p>
+        </p:txBody>
+      </p:sp>
+      <p:sp>
+        <p:nvSpPr>
+          <p:cNvPr id="63" name="Text 61"/>
+          <p:cNvSpPr txBox="1"/>
+          <p:nvPr/>
+        </p:nvSpPr>
+        <p:spPr>
+          <a:xfrm>
+            <a:off x="9326880" y="2743200"/>
+            <a:ext cx="731520" cy="164592"/>
+          </a:xfrm>
+          <a:prstGeom prst="rect">
+            <a:avLst/>
+          </a:prstGeom>
+          <a:noFill/>
+          <a:ln/>
+        </p:spPr>
+        <p:txBody>
+          <a:bodyPr wrap="square" lIns="0" tIns="0" rIns="0" bIns="0" rtlCol="0" anchor="ctr"/>
+          <a:lstStyle/>
+          <a:p>
+            <a:pPr algn="r" indent="0" marL="0">
+              <a:buNone/>
+            </a:pPr>
+            <a:r>
+              <a:rPr lang="en-US" sz="680" b="1" dirty="0">
+                <a:solidFill>
+                  <a:srgbClr val="8FA1AC"/>
+                </a:solidFill>
+                <a:latin typeface="Poppins" pitchFamily="34" charset="0"/>
+                <a:ea typeface="Poppins" pitchFamily="34" charset="-122"/>
+                <a:cs typeface="Poppins" pitchFamily="34" charset="-120"/>
+              </a:rPr>
+              <a:t>OPEN</a:t>
+            </a:r>
+            <a:endParaRPr lang="en-US" sz="680" dirty="0"/>
+          </a:p>
+        </p:txBody>
+      </p:sp>
+      <p:sp>
+        <p:nvSpPr>
+          <p:cNvPr id="64" name="Text 62"/>
+          <p:cNvSpPr txBox="1"/>
+          <p:nvPr/>
+        </p:nvSpPr>
+        <p:spPr>
+          <a:xfrm>
+            <a:off x="10149840" y="2743200"/>
+            <a:ext cx="914400" cy="164592"/>
+          </a:xfrm>
+          <a:prstGeom prst="rect">
+            <a:avLst/>
+          </a:prstGeom>
+          <a:noFill/>
+          <a:ln/>
+        </p:spPr>
+        <p:txBody>
+          <a:bodyPr wrap="square" lIns="0" tIns="0" rIns="0" bIns="0" rtlCol="0" anchor="ctr"/>
+          <a:lstStyle/>
+          <a:p>
+            <a:pPr algn="r" indent="0" marL="0">
+              <a:buNone/>
+            </a:pPr>
+            <a:r>
+              <a:rPr lang="en-US" sz="680" b="1" dirty="0">
+                <a:solidFill>
+                  <a:srgbClr val="8FA1AC"/>
+                </a:solidFill>
+                <a:latin typeface="Poppins" pitchFamily="34" charset="0"/>
+                <a:ea typeface="Poppins" pitchFamily="34" charset="-122"/>
+                <a:cs typeface="Poppins" pitchFamily="34" charset="-120"/>
+              </a:rPr>
+              <a:t>MEDIAN TTC</a:t>
+            </a:r>
+            <a:endParaRPr lang="en-US" sz="680" dirty="0"/>
+          </a:p>
+        </p:txBody>
+      </p:sp>
+      <p:sp>
+        <p:nvSpPr>
+          <p:cNvPr id="65" name="Text 63"/>
+          <p:cNvSpPr txBox="1"/>
+          <p:nvPr/>
+        </p:nvSpPr>
+        <p:spPr>
+          <a:xfrm>
+            <a:off x="7379208" y="2926080"/>
+            <a:ext cx="1828800" cy="192024"/>
+          </a:xfrm>
+          <a:prstGeom prst="rect">
+            <a:avLst/>
+          </a:prstGeom>
+          <a:noFill/>
+          <a:ln/>
+        </p:spPr>
+        <p:txBody>
+          <a:bodyPr wrap="square" lIns="0" tIns="0" rIns="0" bIns="0" rtlCol="0" anchor="ctr"/>
+          <a:lstStyle/>
+          <a:p>
+            <a:pPr indent="0" marL="0">
+              <a:buNone/>
+            </a:pPr>
+            <a:r>
+              <a:rPr lang="en-US" sz="800" b="1" dirty="0">
+                <a:solidFill>
+                  <a:srgbClr val="12293A"/>
+                </a:solidFill>
+                <a:latin typeface="Poppins" pitchFamily="34" charset="0"/>
+                <a:ea typeface="Poppins" pitchFamily="34" charset="-122"/>
+                <a:cs typeface="Poppins" pitchFamily="34" charset="-120"/>
+              </a:rPr>
+              <a:t>Tech</a:t>
+            </a:r>
+            <a:endParaRPr lang="en-US" sz="800" dirty="0"/>
+          </a:p>
+        </p:txBody>
+      </p:sp>
+      <p:sp>
+        <p:nvSpPr>
+          <p:cNvPr id="66" name="Text 64"/>
+          <p:cNvSpPr txBox="1"/>
+          <p:nvPr/>
+        </p:nvSpPr>
+        <p:spPr>
+          <a:xfrm>
+            <a:off x="9326880" y="2926080"/>
+            <a:ext cx="731520" cy="192024"/>
+          </a:xfrm>
+          <a:prstGeom prst="rect">
+            <a:avLst/>
+          </a:prstGeom>
+          <a:noFill/>
+          <a:ln/>
+        </p:spPr>
+        <p:txBody>
+          <a:bodyPr wrap="square" lIns="0" tIns="0" rIns="0" bIns="0" rtlCol="0" anchor="ctr"/>
+          <a:lstStyle/>
+          <a:p>
+            <a:pPr algn="r" indent="0" marL="0">
+              <a:buNone/>
+            </a:pPr>
+            <a:r>
+              <a:rPr lang="en-US" sz="800" b="1" dirty="0">
+                <a:solidFill>
+                  <a:srgbClr val="5E7280"/>
+                </a:solidFill>
+                <a:latin typeface="Poppins" pitchFamily="34" charset="0"/>
+                <a:ea typeface="Poppins" pitchFamily="34" charset="-122"/>
+                <a:cs typeface="Poppins" pitchFamily="34" charset="-120"/>
+              </a:rPr>
+              <a:t>353</a:t>
+            </a:r>
+            <a:endParaRPr lang="en-US" sz="800" dirty="0"/>
+          </a:p>
+        </p:txBody>
+      </p:sp>
+      <p:sp>
+        <p:nvSpPr>
+          <p:cNvPr id="67" name="Text 65"/>
+          <p:cNvSpPr txBox="1"/>
+          <p:nvPr/>
+        </p:nvSpPr>
+        <p:spPr>
+          <a:xfrm>
+            <a:off x="10149840" y="2926080"/>
+            <a:ext cx="914400" cy="192024"/>
+          </a:xfrm>
+          <a:prstGeom prst="rect">
+            <a:avLst/>
+          </a:prstGeom>
+          <a:noFill/>
+          <a:ln/>
+        </p:spPr>
+        <p:txBody>
+          <a:bodyPr wrap="square" lIns="0" tIns="0" rIns="0" bIns="0" rtlCol="0" anchor="ctr"/>
+          <a:lstStyle/>
+          <a:p>
+            <a:pPr algn="r" indent="0" marL="0">
+              <a:buNone/>
+            </a:pPr>
+            <a:r>
+              <a:rPr lang="en-US" sz="800" b="1" dirty="0">
                 <a:solidFill>
                   <a:srgbClr val="2C8394"/>
                 </a:solidFill>
@@ -46898,34 +48019,73 @@
                 <a:ea typeface="Poppins" pitchFamily="34" charset="-122"/>
                 <a:cs typeface="Poppins" pitchFamily="34" charset="-120"/>
               </a:rPr>
-              <a:t>HUBSPOT — LIVE</a:t>
-            </a:r>
-            <a:endParaRPr lang="en-US" sz="600" dirty="0"/>
-          </a:p>
-        </p:txBody>
-      </p:sp>
-      <p:sp>
-        <p:nvSpPr>
-          <p:cNvPr id="35" name="Text 33"/>
-          <p:cNvSpPr txBox="1"/>
-          <p:nvPr/>
-        </p:nvSpPr>
-        <p:spPr>
-          <a:xfrm>
-            <a:off x="1645920" y="2852928"/>
-            <a:ext cx="713232" cy="164592"/>
-          </a:xfrm>
-          <a:prstGeom prst="rect">
-            <a:avLst/>
-          </a:prstGeom>
-          <a:noFill/>
-          <a:ln/>
-        </p:spPr>
-        <p:txBody>
-          <a:bodyPr wrap="square" lIns="0" tIns="0" rIns="0" bIns="0" rtlCol="0" anchor="ctr"/>
-          <a:lstStyle/>
-          <a:p>
-            <a:pPr algn="ctr" indent="0" marL="0">
+              <a:t>0.6 d</a:t>
+            </a:r>
+            <a:endParaRPr lang="en-US" sz="800" dirty="0"/>
+          </a:p>
+        </p:txBody>
+      </p:sp>
+      <p:sp>
+        <p:nvSpPr>
+          <p:cNvPr id="68" name="Text 66"/>
+          <p:cNvSpPr txBox="1"/>
+          <p:nvPr/>
+        </p:nvSpPr>
+        <p:spPr>
+          <a:xfrm>
+            <a:off x="11128248" y="2926080"/>
+            <a:ext cx="438912" cy="192024"/>
+          </a:xfrm>
+          <a:prstGeom prst="rect">
+            <a:avLst/>
+          </a:prstGeom>
+          <a:noFill/>
+          <a:ln/>
+        </p:spPr>
+        <p:txBody>
+          <a:bodyPr wrap="square" lIns="0" tIns="0" rIns="0" bIns="0" rtlCol="0" anchor="ctr"/>
+          <a:lstStyle/>
+          <a:p>
+            <a:pPr algn="r" indent="0" marL="0">
+              <a:buNone/>
+            </a:pPr>
+            <a:r>
+              <a:rPr lang="en-US" sz="620" dirty="0">
+                <a:solidFill>
+                  <a:srgbClr val="8FA1AC"/>
+                </a:solidFill>
+                <a:latin typeface="Poppins" pitchFamily="34" charset="0"/>
+                <a:ea typeface="Poppins" pitchFamily="34" charset="-122"/>
+                <a:cs typeface="Poppins" pitchFamily="34" charset="-120"/>
+              </a:rPr>
+              <a:t>n=31</a:t>
+            </a:r>
+            <a:endParaRPr lang="en-US" sz="620" dirty="0"/>
+          </a:p>
+        </p:txBody>
+      </p:sp>
+      <p:sp>
+        <p:nvSpPr>
+          <p:cNvPr id="69" name="Text 67"/>
+          <p:cNvSpPr txBox="1"/>
+          <p:nvPr/>
+        </p:nvSpPr>
+        <p:spPr>
+          <a:xfrm>
+            <a:off x="7379208" y="3108960"/>
+            <a:ext cx="1828800" cy="192024"/>
+          </a:xfrm>
+          <a:prstGeom prst="rect">
+            <a:avLst/>
+          </a:prstGeom>
+          <a:noFill/>
+          <a:ln/>
+        </p:spPr>
+        <p:txBody>
+          <a:bodyPr wrap="square" lIns="0" tIns="0" rIns="0" bIns="0" rtlCol="0" anchor="ctr"/>
+          <a:lstStyle/>
+          <a:p>
+            <a:pPr indent="0" marL="0">
               <a:buNone/>
             </a:pPr>
             <a:r>
@@ -46937,7 +48097,7 @@
                 <a:ea typeface="Poppins" pitchFamily="34" charset="-122"/>
                 <a:cs typeface="Poppins" pitchFamily="34" charset="-120"/>
               </a:rPr>
-              <a:t>Apr</a:t>
+              <a:t>Onboarding</a:t>
             </a:r>
             <a:endParaRPr lang="en-US" sz="800" dirty="0"/>
           </a:p>
@@ -46945,26 +48105,600 @@
       </p:sp>
       <p:sp>
         <p:nvSpPr>
-          <p:cNvPr id="36" name="Text 34"/>
-          <p:cNvSpPr txBox="1"/>
-          <p:nvPr/>
-        </p:nvSpPr>
-        <p:spPr>
-          <a:xfrm>
-            <a:off x="1645920" y="3008376"/>
-            <a:ext cx="713232" cy="128016"/>
-          </a:xfrm>
-          <a:prstGeom prst="rect">
-            <a:avLst/>
-          </a:prstGeom>
-          <a:noFill/>
-          <a:ln/>
-        </p:spPr>
-        <p:txBody>
-          <a:bodyPr wrap="square" lIns="0" tIns="0" rIns="0" bIns="0" rtlCol="0" anchor="ctr"/>
-          <a:lstStyle/>
-          <a:p>
-            <a:pPr algn="ctr" indent="0" marL="0">
+          <p:cNvPr id="70" name="Text 68"/>
+          <p:cNvSpPr txBox="1"/>
+          <p:nvPr/>
+        </p:nvSpPr>
+        <p:spPr>
+          <a:xfrm>
+            <a:off x="9326880" y="3108960"/>
+            <a:ext cx="731520" cy="192024"/>
+          </a:xfrm>
+          <a:prstGeom prst="rect">
+            <a:avLst/>
+          </a:prstGeom>
+          <a:noFill/>
+          <a:ln/>
+        </p:spPr>
+        <p:txBody>
+          <a:bodyPr wrap="square" lIns="0" tIns="0" rIns="0" bIns="0" rtlCol="0" anchor="ctr"/>
+          <a:lstStyle/>
+          <a:p>
+            <a:pPr algn="r" indent="0" marL="0">
+              <a:buNone/>
+            </a:pPr>
+            <a:r>
+              <a:rPr lang="en-US" sz="800" b="1" dirty="0">
+                <a:solidFill>
+                  <a:srgbClr val="5E7280"/>
+                </a:solidFill>
+                <a:latin typeface="Poppins" pitchFamily="34" charset="0"/>
+                <a:ea typeface="Poppins" pitchFamily="34" charset="-122"/>
+                <a:cs typeface="Poppins" pitchFamily="34" charset="-120"/>
+              </a:rPr>
+              <a:t>162</a:t>
+            </a:r>
+            <a:endParaRPr lang="en-US" sz="800" dirty="0"/>
+          </a:p>
+        </p:txBody>
+      </p:sp>
+      <p:sp>
+        <p:nvSpPr>
+          <p:cNvPr id="71" name="Text 69"/>
+          <p:cNvSpPr txBox="1"/>
+          <p:nvPr/>
+        </p:nvSpPr>
+        <p:spPr>
+          <a:xfrm>
+            <a:off x="10149840" y="3108960"/>
+            <a:ext cx="914400" cy="192024"/>
+          </a:xfrm>
+          <a:prstGeom prst="rect">
+            <a:avLst/>
+          </a:prstGeom>
+          <a:noFill/>
+          <a:ln/>
+        </p:spPr>
+        <p:txBody>
+          <a:bodyPr wrap="square" lIns="0" tIns="0" rIns="0" bIns="0" rtlCol="0" anchor="ctr"/>
+          <a:lstStyle/>
+          <a:p>
+            <a:pPr algn="r" indent="0" marL="0">
+              <a:buNone/>
+            </a:pPr>
+            <a:r>
+              <a:rPr lang="en-US" sz="800" dirty="0">
+                <a:solidFill>
+                  <a:srgbClr val="8FA1AC"/>
+                </a:solidFill>
+                <a:latin typeface="Poppins" pitchFamily="34" charset="0"/>
+                <a:ea typeface="Poppins" pitchFamily="34" charset="-122"/>
+                <a:cs typeface="Poppins" pitchFamily="34" charset="-120"/>
+              </a:rPr>
+              <a:t>no closes yet</a:t>
+            </a:r>
+            <a:endParaRPr lang="en-US" sz="800" dirty="0"/>
+          </a:p>
+        </p:txBody>
+      </p:sp>
+      <p:sp>
+        <p:nvSpPr>
+          <p:cNvPr id="72" name="Text 70"/>
+          <p:cNvSpPr txBox="1"/>
+          <p:nvPr/>
+        </p:nvSpPr>
+        <p:spPr>
+          <a:xfrm>
+            <a:off x="11128248" y="3108960"/>
+            <a:ext cx="438912" cy="192024"/>
+          </a:xfrm>
+          <a:prstGeom prst="rect">
+            <a:avLst/>
+          </a:prstGeom>
+          <a:noFill/>
+          <a:ln/>
+        </p:spPr>
+        <p:txBody>
+          <a:bodyPr wrap="square" lIns="0" tIns="0" rIns="0" bIns="0" rtlCol="0" anchor="ctr"/>
+          <a:lstStyle/>
+          <a:p>
+            <a:pPr algn="r" indent="0" marL="0">
+              <a:buNone/>
+            </a:pPr>
+            <a:endParaRPr lang="en-US" sz="620" dirty="0"/>
+          </a:p>
+        </p:txBody>
+      </p:sp>
+      <p:sp>
+        <p:nvSpPr>
+          <p:cNvPr id="73" name="Text 71"/>
+          <p:cNvSpPr txBox="1"/>
+          <p:nvPr/>
+        </p:nvSpPr>
+        <p:spPr>
+          <a:xfrm>
+            <a:off x="7379208" y="3291840"/>
+            <a:ext cx="1828800" cy="192024"/>
+          </a:xfrm>
+          <a:prstGeom prst="rect">
+            <a:avLst/>
+          </a:prstGeom>
+          <a:noFill/>
+          <a:ln/>
+        </p:spPr>
+        <p:txBody>
+          <a:bodyPr wrap="square" lIns="0" tIns="0" rIns="0" bIns="0" rtlCol="0" anchor="ctr"/>
+          <a:lstStyle/>
+          <a:p>
+            <a:pPr indent="0" marL="0">
+              <a:buNone/>
+            </a:pPr>
+            <a:r>
+              <a:rPr lang="en-US" sz="800" b="1" dirty="0">
+                <a:solidFill>
+                  <a:srgbClr val="12293A"/>
+                </a:solidFill>
+                <a:latin typeface="Poppins" pitchFamily="34" charset="0"/>
+                <a:ea typeface="Poppins" pitchFamily="34" charset="-122"/>
+                <a:cs typeface="Poppins" pitchFamily="34" charset="-120"/>
+              </a:rPr>
+              <a:t>Integrations</a:t>
+            </a:r>
+            <a:endParaRPr lang="en-US" sz="800" dirty="0"/>
+          </a:p>
+        </p:txBody>
+      </p:sp>
+      <p:sp>
+        <p:nvSpPr>
+          <p:cNvPr id="74" name="Text 72"/>
+          <p:cNvSpPr txBox="1"/>
+          <p:nvPr/>
+        </p:nvSpPr>
+        <p:spPr>
+          <a:xfrm>
+            <a:off x="9326880" y="3291840"/>
+            <a:ext cx="731520" cy="192024"/>
+          </a:xfrm>
+          <a:prstGeom prst="rect">
+            <a:avLst/>
+          </a:prstGeom>
+          <a:noFill/>
+          <a:ln/>
+        </p:spPr>
+        <p:txBody>
+          <a:bodyPr wrap="square" lIns="0" tIns="0" rIns="0" bIns="0" rtlCol="0" anchor="ctr"/>
+          <a:lstStyle/>
+          <a:p>
+            <a:pPr algn="r" indent="0" marL="0">
+              <a:buNone/>
+            </a:pPr>
+            <a:r>
+              <a:rPr lang="en-US" sz="800" b="1" dirty="0">
+                <a:solidFill>
+                  <a:srgbClr val="5E7280"/>
+                </a:solidFill>
+                <a:latin typeface="Poppins" pitchFamily="34" charset="0"/>
+                <a:ea typeface="Poppins" pitchFamily="34" charset="-122"/>
+                <a:cs typeface="Poppins" pitchFamily="34" charset="-120"/>
+              </a:rPr>
+              <a:t>122</a:t>
+            </a:r>
+            <a:endParaRPr lang="en-US" sz="800" dirty="0"/>
+          </a:p>
+        </p:txBody>
+      </p:sp>
+      <p:sp>
+        <p:nvSpPr>
+          <p:cNvPr id="75" name="Text 73"/>
+          <p:cNvSpPr txBox="1"/>
+          <p:nvPr/>
+        </p:nvSpPr>
+        <p:spPr>
+          <a:xfrm>
+            <a:off x="10149840" y="3291840"/>
+            <a:ext cx="914400" cy="192024"/>
+          </a:xfrm>
+          <a:prstGeom prst="rect">
+            <a:avLst/>
+          </a:prstGeom>
+          <a:noFill/>
+          <a:ln/>
+        </p:spPr>
+        <p:txBody>
+          <a:bodyPr wrap="square" lIns="0" tIns="0" rIns="0" bIns="0" rtlCol="0" anchor="ctr"/>
+          <a:lstStyle/>
+          <a:p>
+            <a:pPr algn="r" indent="0" marL="0">
+              <a:buNone/>
+            </a:pPr>
+            <a:r>
+              <a:rPr lang="en-US" sz="800" b="1" dirty="0">
+                <a:solidFill>
+                  <a:srgbClr val="2C8394"/>
+                </a:solidFill>
+                <a:latin typeface="Poppins" pitchFamily="34" charset="0"/>
+                <a:ea typeface="Poppins" pitchFamily="34" charset="-122"/>
+                <a:cs typeface="Poppins" pitchFamily="34" charset="-120"/>
+              </a:rPr>
+              <a:t>1 d</a:t>
+            </a:r>
+            <a:endParaRPr lang="en-US" sz="800" dirty="0"/>
+          </a:p>
+        </p:txBody>
+      </p:sp>
+      <p:sp>
+        <p:nvSpPr>
+          <p:cNvPr id="76" name="Text 74"/>
+          <p:cNvSpPr txBox="1"/>
+          <p:nvPr/>
+        </p:nvSpPr>
+        <p:spPr>
+          <a:xfrm>
+            <a:off x="11128248" y="3291840"/>
+            <a:ext cx="438912" cy="192024"/>
+          </a:xfrm>
+          <a:prstGeom prst="rect">
+            <a:avLst/>
+          </a:prstGeom>
+          <a:noFill/>
+          <a:ln/>
+        </p:spPr>
+        <p:txBody>
+          <a:bodyPr wrap="square" lIns="0" tIns="0" rIns="0" bIns="0" rtlCol="0" anchor="ctr"/>
+          <a:lstStyle/>
+          <a:p>
+            <a:pPr algn="r" indent="0" marL="0">
+              <a:buNone/>
+            </a:pPr>
+            <a:r>
+              <a:rPr lang="en-US" sz="620" dirty="0">
+                <a:solidFill>
+                  <a:srgbClr val="8FA1AC"/>
+                </a:solidFill>
+                <a:latin typeface="Poppins" pitchFamily="34" charset="0"/>
+                <a:ea typeface="Poppins" pitchFamily="34" charset="-122"/>
+                <a:cs typeface="Poppins" pitchFamily="34" charset="-120"/>
+              </a:rPr>
+              <a:t>n=5</a:t>
+            </a:r>
+            <a:endParaRPr lang="en-US" sz="620" dirty="0"/>
+          </a:p>
+        </p:txBody>
+      </p:sp>
+      <p:sp>
+        <p:nvSpPr>
+          <p:cNvPr id="77" name="Text 75"/>
+          <p:cNvSpPr txBox="1"/>
+          <p:nvPr/>
+        </p:nvSpPr>
+        <p:spPr>
+          <a:xfrm>
+            <a:off x="7379208" y="3474720"/>
+            <a:ext cx="1828800" cy="192024"/>
+          </a:xfrm>
+          <a:prstGeom prst="rect">
+            <a:avLst/>
+          </a:prstGeom>
+          <a:noFill/>
+          <a:ln/>
+        </p:spPr>
+        <p:txBody>
+          <a:bodyPr wrap="square" lIns="0" tIns="0" rIns="0" bIns="0" rtlCol="0" anchor="ctr"/>
+          <a:lstStyle/>
+          <a:p>
+            <a:pPr indent="0" marL="0">
+              <a:buNone/>
+            </a:pPr>
+            <a:r>
+              <a:rPr lang="en-US" sz="800" b="1" dirty="0">
+                <a:solidFill>
+                  <a:srgbClr val="12293A"/>
+                </a:solidFill>
+                <a:latin typeface="Poppins" pitchFamily="34" charset="0"/>
+                <a:ea typeface="Poppins" pitchFamily="34" charset="-122"/>
+                <a:cs typeface="Poppins" pitchFamily="34" charset="-120"/>
+              </a:rPr>
+              <a:t>Training</a:t>
+            </a:r>
+            <a:endParaRPr lang="en-US" sz="800" dirty="0"/>
+          </a:p>
+        </p:txBody>
+      </p:sp>
+      <p:sp>
+        <p:nvSpPr>
+          <p:cNvPr id="78" name="Text 76"/>
+          <p:cNvSpPr txBox="1"/>
+          <p:nvPr/>
+        </p:nvSpPr>
+        <p:spPr>
+          <a:xfrm>
+            <a:off x="9326880" y="3474720"/>
+            <a:ext cx="731520" cy="192024"/>
+          </a:xfrm>
+          <a:prstGeom prst="rect">
+            <a:avLst/>
+          </a:prstGeom>
+          <a:noFill/>
+          <a:ln/>
+        </p:spPr>
+        <p:txBody>
+          <a:bodyPr wrap="square" lIns="0" tIns="0" rIns="0" bIns="0" rtlCol="0" anchor="ctr"/>
+          <a:lstStyle/>
+          <a:p>
+            <a:pPr algn="r" indent="0" marL="0">
+              <a:buNone/>
+            </a:pPr>
+            <a:r>
+              <a:rPr lang="en-US" sz="800" b="1" dirty="0">
+                <a:solidFill>
+                  <a:srgbClr val="5E7280"/>
+                </a:solidFill>
+                <a:latin typeface="Poppins" pitchFamily="34" charset="0"/>
+                <a:ea typeface="Poppins" pitchFamily="34" charset="-122"/>
+                <a:cs typeface="Poppins" pitchFamily="34" charset="-120"/>
+              </a:rPr>
+              <a:t>59</a:t>
+            </a:r>
+            <a:endParaRPr lang="en-US" sz="800" dirty="0"/>
+          </a:p>
+        </p:txBody>
+      </p:sp>
+      <p:sp>
+        <p:nvSpPr>
+          <p:cNvPr id="79" name="Text 77"/>
+          <p:cNvSpPr txBox="1"/>
+          <p:nvPr/>
+        </p:nvSpPr>
+        <p:spPr>
+          <a:xfrm>
+            <a:off x="10149840" y="3474720"/>
+            <a:ext cx="914400" cy="192024"/>
+          </a:xfrm>
+          <a:prstGeom prst="rect">
+            <a:avLst/>
+          </a:prstGeom>
+          <a:noFill/>
+          <a:ln/>
+        </p:spPr>
+        <p:txBody>
+          <a:bodyPr wrap="square" lIns="0" tIns="0" rIns="0" bIns="0" rtlCol="0" anchor="ctr"/>
+          <a:lstStyle/>
+          <a:p>
+            <a:pPr algn="r" indent="0" marL="0">
+              <a:buNone/>
+            </a:pPr>
+            <a:r>
+              <a:rPr lang="en-US" sz="800" b="1" dirty="0">
+                <a:solidFill>
+                  <a:srgbClr val="2C8394"/>
+                </a:solidFill>
+                <a:latin typeface="Poppins" pitchFamily="34" charset="0"/>
+                <a:ea typeface="Poppins" pitchFamily="34" charset="-122"/>
+                <a:cs typeface="Poppins" pitchFamily="34" charset="-120"/>
+              </a:rPr>
+              <a:t>1.5 d</a:t>
+            </a:r>
+            <a:endParaRPr lang="en-US" sz="800" dirty="0"/>
+          </a:p>
+        </p:txBody>
+      </p:sp>
+      <p:sp>
+        <p:nvSpPr>
+          <p:cNvPr id="80" name="Text 78"/>
+          <p:cNvSpPr txBox="1"/>
+          <p:nvPr/>
+        </p:nvSpPr>
+        <p:spPr>
+          <a:xfrm>
+            <a:off x="11128248" y="3474720"/>
+            <a:ext cx="438912" cy="192024"/>
+          </a:xfrm>
+          <a:prstGeom prst="rect">
+            <a:avLst/>
+          </a:prstGeom>
+          <a:noFill/>
+          <a:ln/>
+        </p:spPr>
+        <p:txBody>
+          <a:bodyPr wrap="square" lIns="0" tIns="0" rIns="0" bIns="0" rtlCol="0" anchor="ctr"/>
+          <a:lstStyle/>
+          <a:p>
+            <a:pPr algn="r" indent="0" marL="0">
+              <a:buNone/>
+            </a:pPr>
+            <a:r>
+              <a:rPr lang="en-US" sz="620" dirty="0">
+                <a:solidFill>
+                  <a:srgbClr val="8FA1AC"/>
+                </a:solidFill>
+                <a:latin typeface="Poppins" pitchFamily="34" charset="0"/>
+                <a:ea typeface="Poppins" pitchFamily="34" charset="-122"/>
+                <a:cs typeface="Poppins" pitchFamily="34" charset="-120"/>
+              </a:rPr>
+              <a:t>n=2</a:t>
+            </a:r>
+            <a:endParaRPr lang="en-US" sz="620" dirty="0"/>
+          </a:p>
+        </p:txBody>
+      </p:sp>
+      <p:sp>
+        <p:nvSpPr>
+          <p:cNvPr id="81" name="Text 79"/>
+          <p:cNvSpPr txBox="1"/>
+          <p:nvPr/>
+        </p:nvSpPr>
+        <p:spPr>
+          <a:xfrm>
+            <a:off x="7379208" y="3657600"/>
+            <a:ext cx="1828800" cy="192024"/>
+          </a:xfrm>
+          <a:prstGeom prst="rect">
+            <a:avLst/>
+          </a:prstGeom>
+          <a:noFill/>
+          <a:ln/>
+        </p:spPr>
+        <p:txBody>
+          <a:bodyPr wrap="square" lIns="0" tIns="0" rIns="0" bIns="0" rtlCol="0" anchor="ctr"/>
+          <a:lstStyle/>
+          <a:p>
+            <a:pPr indent="0" marL="0">
+              <a:buNone/>
+            </a:pPr>
+            <a:r>
+              <a:rPr lang="en-US" sz="800" b="1" dirty="0">
+                <a:solidFill>
+                  <a:srgbClr val="12293A"/>
+                </a:solidFill>
+                <a:latin typeface="Poppins" pitchFamily="34" charset="0"/>
+                <a:ea typeface="Poppins" pitchFamily="34" charset="-122"/>
+                <a:cs typeface="Poppins" pitchFamily="34" charset="-120"/>
+              </a:rPr>
+              <a:t>Warranty</a:t>
+            </a:r>
+            <a:endParaRPr lang="en-US" sz="800" dirty="0"/>
+          </a:p>
+        </p:txBody>
+      </p:sp>
+      <p:sp>
+        <p:nvSpPr>
+          <p:cNvPr id="82" name="Text 80"/>
+          <p:cNvSpPr txBox="1"/>
+          <p:nvPr/>
+        </p:nvSpPr>
+        <p:spPr>
+          <a:xfrm>
+            <a:off x="9326880" y="3657600"/>
+            <a:ext cx="731520" cy="192024"/>
+          </a:xfrm>
+          <a:prstGeom prst="rect">
+            <a:avLst/>
+          </a:prstGeom>
+          <a:noFill/>
+          <a:ln/>
+        </p:spPr>
+        <p:txBody>
+          <a:bodyPr wrap="square" lIns="0" tIns="0" rIns="0" bIns="0" rtlCol="0" anchor="ctr"/>
+          <a:lstStyle/>
+          <a:p>
+            <a:pPr algn="r" indent="0" marL="0">
+              <a:buNone/>
+            </a:pPr>
+            <a:r>
+              <a:rPr lang="en-US" sz="800" b="1" dirty="0">
+                <a:solidFill>
+                  <a:srgbClr val="5E7280"/>
+                </a:solidFill>
+                <a:latin typeface="Poppins" pitchFamily="34" charset="0"/>
+                <a:ea typeface="Poppins" pitchFamily="34" charset="-122"/>
+                <a:cs typeface="Poppins" pitchFamily="34" charset="-120"/>
+              </a:rPr>
+              <a:t>3</a:t>
+            </a:r>
+            <a:endParaRPr lang="en-US" sz="800" dirty="0"/>
+          </a:p>
+        </p:txBody>
+      </p:sp>
+      <p:sp>
+        <p:nvSpPr>
+          <p:cNvPr id="83" name="Text 81"/>
+          <p:cNvSpPr txBox="1"/>
+          <p:nvPr/>
+        </p:nvSpPr>
+        <p:spPr>
+          <a:xfrm>
+            <a:off x="10149840" y="3657600"/>
+            <a:ext cx="914400" cy="192024"/>
+          </a:xfrm>
+          <a:prstGeom prst="rect">
+            <a:avLst/>
+          </a:prstGeom>
+          <a:noFill/>
+          <a:ln/>
+        </p:spPr>
+        <p:txBody>
+          <a:bodyPr wrap="square" lIns="0" tIns="0" rIns="0" bIns="0" rtlCol="0" anchor="ctr"/>
+          <a:lstStyle/>
+          <a:p>
+            <a:pPr algn="r" indent="0" marL="0">
+              <a:buNone/>
+            </a:pPr>
+            <a:r>
+              <a:rPr lang="en-US" sz="800" b="1" dirty="0">
+                <a:solidFill>
+                  <a:srgbClr val="2C8394"/>
+                </a:solidFill>
+                <a:latin typeface="Poppins" pitchFamily="34" charset="0"/>
+                <a:ea typeface="Poppins" pitchFamily="34" charset="-122"/>
+                <a:cs typeface="Poppins" pitchFamily="34" charset="-120"/>
+              </a:rPr>
+              <a:t>&lt;0.1 d</a:t>
+            </a:r>
+            <a:endParaRPr lang="en-US" sz="800" dirty="0"/>
+          </a:p>
+        </p:txBody>
+      </p:sp>
+      <p:sp>
+        <p:nvSpPr>
+          <p:cNvPr id="84" name="Text 82"/>
+          <p:cNvSpPr txBox="1"/>
+          <p:nvPr/>
+        </p:nvSpPr>
+        <p:spPr>
+          <a:xfrm>
+            <a:off x="11128248" y="3657600"/>
+            <a:ext cx="438912" cy="192024"/>
+          </a:xfrm>
+          <a:prstGeom prst="rect">
+            <a:avLst/>
+          </a:prstGeom>
+          <a:noFill/>
+          <a:ln/>
+        </p:spPr>
+        <p:txBody>
+          <a:bodyPr wrap="square" lIns="0" tIns="0" rIns="0" bIns="0" rtlCol="0" anchor="ctr"/>
+          <a:lstStyle/>
+          <a:p>
+            <a:pPr algn="r" indent="0" marL="0">
+              <a:buNone/>
+            </a:pPr>
+            <a:r>
+              <a:rPr lang="en-US" sz="620" dirty="0">
+                <a:solidFill>
+                  <a:srgbClr val="8FA1AC"/>
+                </a:solidFill>
+                <a:latin typeface="Poppins" pitchFamily="34" charset="0"/>
+                <a:ea typeface="Poppins" pitchFamily="34" charset="-122"/>
+                <a:cs typeface="Poppins" pitchFamily="34" charset="-120"/>
+              </a:rPr>
+              <a:t>n=1</a:t>
+            </a:r>
+            <a:endParaRPr lang="en-US" sz="620" dirty="0"/>
+          </a:p>
+        </p:txBody>
+      </p:sp>
+      <p:sp>
+        <p:nvSpPr>
+          <p:cNvPr id="85" name="Text 83"/>
+          <p:cNvSpPr txBox="1"/>
+          <p:nvPr/>
+        </p:nvSpPr>
+        <p:spPr>
+          <a:xfrm>
+            <a:off x="7379208" y="3858768"/>
+            <a:ext cx="4197096" cy="219456"/>
+          </a:xfrm>
+          <a:prstGeom prst="rect">
+            <a:avLst/>
+          </a:prstGeom>
+          <a:noFill/>
+          <a:ln/>
+        </p:spPr>
+        <p:txBody>
+          <a:bodyPr wrap="square" lIns="0" tIns="0" rIns="0" bIns="0" rtlCol="0" anchor="t"/>
+          <a:lstStyle/>
+          <a:p>
+            <a:pPr indent="0" marL="0">
               <a:buNone/>
             </a:pPr>
             <a:r>
@@ -46976,7 +48710,7 @@
                 <a:ea typeface="Poppins" pitchFamily="34" charset="-122"/>
                 <a:cs typeface="Poppins" pitchFamily="34" charset="-120"/>
               </a:rPr>
-              <a:t>1,216h avail</a:t>
+              <a:t>Median TTC is measured on tickets created and closed since 8 Sep — all-time medians are unusable because the migration re-dated old closes.</a:t>
             </a:r>
             <a:endParaRPr lang="en-US" sz="550" dirty="0"/>
           </a:p>
@@ -46984,5047 +48718,18 @@
       </p:sp>
       <p:sp>
         <p:nvSpPr>
-          <p:cNvPr id="37" name="Text 35"/>
-          <p:cNvSpPr txBox="1"/>
-          <p:nvPr/>
-        </p:nvSpPr>
-        <p:spPr>
-          <a:xfrm>
-            <a:off x="2359152" y="2852928"/>
-            <a:ext cx="713232" cy="164592"/>
-          </a:xfrm>
-          <a:prstGeom prst="rect">
-            <a:avLst/>
-          </a:prstGeom>
-          <a:noFill/>
-          <a:ln/>
-        </p:spPr>
-        <p:txBody>
-          <a:bodyPr wrap="square" lIns="0" tIns="0" rIns="0" bIns="0" rtlCol="0" anchor="ctr"/>
-          <a:lstStyle/>
-          <a:p>
-            <a:pPr algn="ctr" indent="0" marL="0">
-              <a:buNone/>
-            </a:pPr>
-            <a:r>
-              <a:rPr lang="en-US" sz="800" b="1" dirty="0">
-                <a:solidFill>
-                  <a:srgbClr val="12293A"/>
-                </a:solidFill>
-                <a:latin typeface="Poppins" pitchFamily="34" charset="0"/>
-                <a:ea typeface="Poppins" pitchFamily="34" charset="-122"/>
-                <a:cs typeface="Poppins" pitchFamily="34" charset="-120"/>
-              </a:rPr>
-              <a:t>May</a:t>
-            </a:r>
-            <a:endParaRPr lang="en-US" sz="800" dirty="0"/>
-          </a:p>
-        </p:txBody>
-      </p:sp>
-      <p:sp>
-        <p:nvSpPr>
-          <p:cNvPr id="38" name="Text 36"/>
-          <p:cNvSpPr txBox="1"/>
-          <p:nvPr/>
-        </p:nvSpPr>
-        <p:spPr>
-          <a:xfrm>
-            <a:off x="2359152" y="3008376"/>
-            <a:ext cx="713232" cy="128016"/>
-          </a:xfrm>
-          <a:prstGeom prst="rect">
-            <a:avLst/>
-          </a:prstGeom>
-          <a:noFill/>
-          <a:ln/>
-        </p:spPr>
-        <p:txBody>
-          <a:bodyPr wrap="square" lIns="0" tIns="0" rIns="0" bIns="0" rtlCol="0" anchor="ctr"/>
-          <a:lstStyle/>
-          <a:p>
-            <a:pPr algn="ctr" indent="0" marL="0">
-              <a:buNone/>
-            </a:pPr>
-            <a:r>
-              <a:rPr lang="en-US" sz="550" dirty="0">
-                <a:solidFill>
-                  <a:srgbClr val="8FA1AC"/>
-                </a:solidFill>
-                <a:latin typeface="Poppins" pitchFamily="34" charset="0"/>
-                <a:ea typeface="Poppins" pitchFamily="34" charset="-122"/>
-                <a:cs typeface="Poppins" pitchFamily="34" charset="-120"/>
-              </a:rPr>
-              <a:t>988h avail</a:t>
-            </a:r>
-            <a:endParaRPr lang="en-US" sz="550" dirty="0"/>
-          </a:p>
-        </p:txBody>
-      </p:sp>
-      <p:sp>
-        <p:nvSpPr>
-          <p:cNvPr id="39" name="Text 37"/>
-          <p:cNvSpPr txBox="1"/>
-          <p:nvPr/>
-        </p:nvSpPr>
-        <p:spPr>
-          <a:xfrm>
-            <a:off x="3072384" y="2852928"/>
-            <a:ext cx="713232" cy="164592"/>
-          </a:xfrm>
-          <a:prstGeom prst="rect">
-            <a:avLst/>
-          </a:prstGeom>
-          <a:noFill/>
-          <a:ln/>
-        </p:spPr>
-        <p:txBody>
-          <a:bodyPr wrap="square" lIns="0" tIns="0" rIns="0" bIns="0" rtlCol="0" anchor="ctr"/>
-          <a:lstStyle/>
-          <a:p>
-            <a:pPr algn="ctr" indent="0" marL="0">
-              <a:buNone/>
-            </a:pPr>
-            <a:r>
-              <a:rPr lang="en-US" sz="800" b="1" dirty="0">
-                <a:solidFill>
-                  <a:srgbClr val="12293A"/>
-                </a:solidFill>
-                <a:latin typeface="Poppins" pitchFamily="34" charset="0"/>
-                <a:ea typeface="Poppins" pitchFamily="34" charset="-122"/>
-                <a:cs typeface="Poppins" pitchFamily="34" charset="-120"/>
-              </a:rPr>
-              <a:t>Jun</a:t>
-            </a:r>
-            <a:endParaRPr lang="en-US" sz="800" dirty="0"/>
-          </a:p>
-        </p:txBody>
-      </p:sp>
-      <p:sp>
-        <p:nvSpPr>
-          <p:cNvPr id="40" name="Text 38"/>
-          <p:cNvSpPr txBox="1"/>
-          <p:nvPr/>
-        </p:nvSpPr>
-        <p:spPr>
-          <a:xfrm>
-            <a:off x="3072384" y="3008376"/>
-            <a:ext cx="713232" cy="128016"/>
-          </a:xfrm>
-          <a:prstGeom prst="rect">
-            <a:avLst/>
-          </a:prstGeom>
-          <a:noFill/>
-          <a:ln/>
-        </p:spPr>
-        <p:txBody>
-          <a:bodyPr wrap="square" lIns="0" tIns="0" rIns="0" bIns="0" rtlCol="0" anchor="ctr"/>
-          <a:lstStyle/>
-          <a:p>
-            <a:pPr algn="ctr" indent="0" marL="0">
-              <a:buNone/>
-            </a:pPr>
-            <a:r>
-              <a:rPr lang="en-US" sz="550" dirty="0">
-                <a:solidFill>
-                  <a:srgbClr val="8FA1AC"/>
-                </a:solidFill>
-                <a:latin typeface="Poppins" pitchFamily="34" charset="0"/>
-                <a:ea typeface="Poppins" pitchFamily="34" charset="-122"/>
-                <a:cs typeface="Poppins" pitchFamily="34" charset="-120"/>
-              </a:rPr>
-              <a:t>1,102h avail</a:t>
-            </a:r>
-            <a:endParaRPr lang="en-US" sz="550" dirty="0"/>
-          </a:p>
-        </p:txBody>
-      </p:sp>
-      <p:sp>
-        <p:nvSpPr>
-          <p:cNvPr id="41" name="Text 39"/>
-          <p:cNvSpPr txBox="1"/>
-          <p:nvPr/>
-        </p:nvSpPr>
-        <p:spPr>
-          <a:xfrm>
-            <a:off x="3785616" y="2852928"/>
-            <a:ext cx="713232" cy="164592"/>
-          </a:xfrm>
-          <a:prstGeom prst="rect">
-            <a:avLst/>
-          </a:prstGeom>
-          <a:noFill/>
-          <a:ln/>
-        </p:spPr>
-        <p:txBody>
-          <a:bodyPr wrap="square" lIns="0" tIns="0" rIns="0" bIns="0" rtlCol="0" anchor="ctr"/>
-          <a:lstStyle/>
-          <a:p>
-            <a:pPr algn="ctr" indent="0" marL="0">
-              <a:buNone/>
-            </a:pPr>
-            <a:r>
-              <a:rPr lang="en-US" sz="800" b="1" dirty="0">
-                <a:solidFill>
-                  <a:srgbClr val="12293A"/>
-                </a:solidFill>
-                <a:latin typeface="Poppins" pitchFamily="34" charset="0"/>
-                <a:ea typeface="Poppins" pitchFamily="34" charset="-122"/>
-                <a:cs typeface="Poppins" pitchFamily="34" charset="-120"/>
-              </a:rPr>
-              <a:t>Jul</a:t>
-            </a:r>
-            <a:endParaRPr lang="en-US" sz="800" dirty="0"/>
-          </a:p>
-        </p:txBody>
-      </p:sp>
-      <p:sp>
-        <p:nvSpPr>
-          <p:cNvPr id="42" name="Text 40"/>
-          <p:cNvSpPr txBox="1"/>
-          <p:nvPr/>
-        </p:nvSpPr>
-        <p:spPr>
-          <a:xfrm>
-            <a:off x="3785616" y="3008376"/>
-            <a:ext cx="713232" cy="128016"/>
-          </a:xfrm>
-          <a:prstGeom prst="rect">
-            <a:avLst/>
-          </a:prstGeom>
-          <a:noFill/>
-          <a:ln/>
-        </p:spPr>
-        <p:txBody>
-          <a:bodyPr wrap="square" lIns="0" tIns="0" rIns="0" bIns="0" rtlCol="0" anchor="ctr"/>
-          <a:lstStyle/>
-          <a:p>
-            <a:pPr algn="ctr" indent="0" marL="0">
-              <a:buNone/>
-            </a:pPr>
-            <a:r>
-              <a:rPr lang="en-US" sz="550" dirty="0">
-                <a:solidFill>
-                  <a:srgbClr val="8FA1AC"/>
-                </a:solidFill>
-                <a:latin typeface="Poppins" pitchFamily="34" charset="0"/>
-                <a:ea typeface="Poppins" pitchFamily="34" charset="-122"/>
-                <a:cs typeface="Poppins" pitchFamily="34" charset="-120"/>
-              </a:rPr>
-              <a:t>1,482h avail</a:t>
-            </a:r>
-            <a:endParaRPr lang="en-US" sz="550" dirty="0"/>
-          </a:p>
-        </p:txBody>
-      </p:sp>
-      <p:sp>
-        <p:nvSpPr>
-          <p:cNvPr id="43" name="Text 41"/>
-          <p:cNvSpPr txBox="1"/>
-          <p:nvPr/>
-        </p:nvSpPr>
-        <p:spPr>
-          <a:xfrm>
-            <a:off x="4498848" y="2852928"/>
-            <a:ext cx="713232" cy="164592"/>
-          </a:xfrm>
-          <a:prstGeom prst="rect">
-            <a:avLst/>
-          </a:prstGeom>
-          <a:noFill/>
-          <a:ln/>
-        </p:spPr>
-        <p:txBody>
-          <a:bodyPr wrap="square" lIns="0" tIns="0" rIns="0" bIns="0" rtlCol="0" anchor="ctr"/>
-          <a:lstStyle/>
-          <a:p>
-            <a:pPr algn="ctr" indent="0" marL="0">
-              <a:buNone/>
-            </a:pPr>
-            <a:r>
-              <a:rPr lang="en-US" sz="800" b="1" dirty="0">
-                <a:solidFill>
-                  <a:srgbClr val="12293A"/>
-                </a:solidFill>
-                <a:latin typeface="Poppins" pitchFamily="34" charset="0"/>
-                <a:ea typeface="Poppins" pitchFamily="34" charset="-122"/>
-                <a:cs typeface="Poppins" pitchFamily="34" charset="-120"/>
-              </a:rPr>
-              <a:t>Aug</a:t>
-            </a:r>
-            <a:endParaRPr lang="en-US" sz="800" dirty="0"/>
-          </a:p>
-        </p:txBody>
-      </p:sp>
-      <p:sp>
-        <p:nvSpPr>
-          <p:cNvPr id="44" name="Text 42"/>
-          <p:cNvSpPr txBox="1"/>
-          <p:nvPr/>
-        </p:nvSpPr>
-        <p:spPr>
-          <a:xfrm>
-            <a:off x="4498848" y="3008376"/>
-            <a:ext cx="713232" cy="128016"/>
-          </a:xfrm>
-          <a:prstGeom prst="rect">
-            <a:avLst/>
-          </a:prstGeom>
-          <a:noFill/>
-          <a:ln/>
-        </p:spPr>
-        <p:txBody>
-          <a:bodyPr wrap="square" lIns="0" tIns="0" rIns="0" bIns="0" rtlCol="0" anchor="ctr"/>
-          <a:lstStyle/>
-          <a:p>
-            <a:pPr algn="ctr" indent="0" marL="0">
-              <a:buNone/>
-            </a:pPr>
-            <a:r>
-              <a:rPr lang="en-US" sz="550" dirty="0">
-                <a:solidFill>
-                  <a:srgbClr val="8FA1AC"/>
-                </a:solidFill>
-                <a:latin typeface="Poppins" pitchFamily="34" charset="0"/>
-                <a:ea typeface="Poppins" pitchFamily="34" charset="-122"/>
-                <a:cs typeface="Poppins" pitchFamily="34" charset="-120"/>
-              </a:rPr>
-              <a:t>1,064h avail</a:t>
-            </a:r>
-            <a:endParaRPr lang="en-US" sz="550" dirty="0"/>
-          </a:p>
-        </p:txBody>
-      </p:sp>
-      <p:sp>
-        <p:nvSpPr>
-          <p:cNvPr id="45" name="Text 43"/>
-          <p:cNvSpPr txBox="1"/>
-          <p:nvPr/>
-        </p:nvSpPr>
-        <p:spPr>
-          <a:xfrm>
-            <a:off x="5212080" y="2852928"/>
-            <a:ext cx="713232" cy="164592"/>
-          </a:xfrm>
-          <a:prstGeom prst="rect">
-            <a:avLst/>
-          </a:prstGeom>
-          <a:noFill/>
-          <a:ln/>
-        </p:spPr>
-        <p:txBody>
-          <a:bodyPr wrap="square" lIns="0" tIns="0" rIns="0" bIns="0" rtlCol="0" anchor="ctr"/>
-          <a:lstStyle/>
-          <a:p>
-            <a:pPr algn="ctr" indent="0" marL="0">
-              <a:buNone/>
-            </a:pPr>
-            <a:r>
-              <a:rPr lang="en-US" sz="800" b="1" dirty="0">
-                <a:solidFill>
-                  <a:srgbClr val="12293A"/>
-                </a:solidFill>
-                <a:latin typeface="Poppins" pitchFamily="34" charset="0"/>
-                <a:ea typeface="Poppins" pitchFamily="34" charset="-122"/>
-                <a:cs typeface="Poppins" pitchFamily="34" charset="-120"/>
-              </a:rPr>
-              <a:t>Sep*</a:t>
-            </a:r>
-            <a:endParaRPr lang="en-US" sz="800" dirty="0"/>
-          </a:p>
-        </p:txBody>
-      </p:sp>
-      <p:sp>
-        <p:nvSpPr>
-          <p:cNvPr id="46" name="Text 44"/>
-          <p:cNvSpPr txBox="1"/>
-          <p:nvPr/>
-        </p:nvSpPr>
-        <p:spPr>
-          <a:xfrm>
-            <a:off x="5212080" y="3008376"/>
-            <a:ext cx="713232" cy="128016"/>
-          </a:xfrm>
-          <a:prstGeom prst="rect">
-            <a:avLst/>
-          </a:prstGeom>
-          <a:noFill/>
-          <a:ln/>
-        </p:spPr>
-        <p:txBody>
-          <a:bodyPr wrap="square" lIns="0" tIns="0" rIns="0" bIns="0" rtlCol="0" anchor="ctr"/>
-          <a:lstStyle/>
-          <a:p>
-            <a:pPr algn="ctr" indent="0" marL="0">
-              <a:buNone/>
-            </a:pPr>
-            <a:r>
-              <a:rPr lang="en-US" sz="550" dirty="0">
-                <a:solidFill>
-                  <a:srgbClr val="8FA1AC"/>
-                </a:solidFill>
-                <a:latin typeface="Poppins" pitchFamily="34" charset="0"/>
-                <a:ea typeface="Poppins" pitchFamily="34" charset="-122"/>
-                <a:cs typeface="Poppins" pitchFamily="34" charset="-120"/>
-              </a:rPr>
-              <a:t>228h avail</a:t>
-            </a:r>
-            <a:endParaRPr lang="en-US" sz="550" dirty="0"/>
-          </a:p>
-        </p:txBody>
-      </p:sp>
-      <p:sp>
-        <p:nvSpPr>
-          <p:cNvPr id="47" name="Text 45"/>
-          <p:cNvSpPr txBox="1"/>
-          <p:nvPr/>
-        </p:nvSpPr>
-        <p:spPr>
-          <a:xfrm>
-            <a:off x="6108192" y="2852928"/>
-            <a:ext cx="1097280" cy="164592"/>
-          </a:xfrm>
-          <a:prstGeom prst="rect">
-            <a:avLst/>
-          </a:prstGeom>
-          <a:noFill/>
-          <a:ln/>
-        </p:spPr>
-        <p:txBody>
-          <a:bodyPr wrap="square" lIns="0" tIns="0" rIns="0" bIns="0" rtlCol="0" anchor="ctr"/>
-          <a:lstStyle/>
-          <a:p>
-            <a:pPr algn="ctr" indent="0" marL="0">
-              <a:buNone/>
-            </a:pPr>
-            <a:r>
-              <a:rPr lang="en-US" sz="800" b="1" dirty="0">
-                <a:solidFill>
-                  <a:srgbClr val="2C8394"/>
-                </a:solidFill>
-                <a:latin typeface="Poppins" pitchFamily="34" charset="0"/>
-                <a:ea typeface="Poppins" pitchFamily="34" charset="-122"/>
-                <a:cs typeface="Poppins" pitchFamily="34" charset="-120"/>
-              </a:rPr>
-              <a:t>Sep 8–20</a:t>
-            </a:r>
-            <a:endParaRPr lang="en-US" sz="800" dirty="0"/>
-          </a:p>
-        </p:txBody>
-      </p:sp>
-      <p:sp>
-        <p:nvSpPr>
-          <p:cNvPr id="48" name="Text 46"/>
-          <p:cNvSpPr txBox="1"/>
-          <p:nvPr/>
-        </p:nvSpPr>
-        <p:spPr>
-          <a:xfrm>
-            <a:off x="6108192" y="3008376"/>
-            <a:ext cx="1097280" cy="128016"/>
-          </a:xfrm>
-          <a:prstGeom prst="rect">
-            <a:avLst/>
-          </a:prstGeom>
-          <a:noFill/>
-          <a:ln/>
-        </p:spPr>
-        <p:txBody>
-          <a:bodyPr wrap="square" lIns="0" tIns="0" rIns="0" bIns="0" rtlCol="0" anchor="ctr"/>
-          <a:lstStyle/>
-          <a:p>
-            <a:pPr algn="ctr" indent="0" marL="0">
-              <a:buNone/>
-            </a:pPr>
-            <a:r>
-              <a:rPr lang="en-US" sz="550" dirty="0">
-                <a:solidFill>
-                  <a:srgbClr val="8FA1AC"/>
-                </a:solidFill>
-                <a:latin typeface="Poppins" pitchFamily="34" charset="0"/>
-                <a:ea typeface="Poppins" pitchFamily="34" charset="-122"/>
-                <a:cs typeface="Poppins" pitchFamily="34" charset="-120"/>
-              </a:rPr>
-              <a:t>608h avail</a:t>
-            </a:r>
-            <a:endParaRPr lang="en-US" sz="550" dirty="0"/>
-          </a:p>
-        </p:txBody>
-      </p:sp>
-      <p:sp>
-        <p:nvSpPr>
-          <p:cNvPr id="49" name="Text 47"/>
-          <p:cNvSpPr txBox="1"/>
-          <p:nvPr/>
-        </p:nvSpPr>
-        <p:spPr>
-          <a:xfrm>
-            <a:off x="612648" y="3163824"/>
-            <a:ext cx="960120" cy="182880"/>
-          </a:xfrm>
-          <a:prstGeom prst="rect">
-            <a:avLst/>
-          </a:prstGeom>
-          <a:noFill/>
-          <a:ln/>
-        </p:spPr>
-        <p:txBody>
-          <a:bodyPr wrap="square" lIns="0" tIns="0" rIns="0" bIns="0" rtlCol="0" anchor="ctr"/>
-          <a:lstStyle/>
-          <a:p>
-            <a:pPr indent="0" marL="0">
-              <a:buNone/>
-            </a:pPr>
-            <a:r>
-              <a:rPr lang="en-US" sz="700" b="1" dirty="0">
-                <a:solidFill>
-                  <a:srgbClr val="12293A"/>
-                </a:solidFill>
-                <a:latin typeface="Poppins" pitchFamily="34" charset="0"/>
-                <a:ea typeface="Poppins" pitchFamily="34" charset="-122"/>
-                <a:cs typeface="Poppins" pitchFamily="34" charset="-120"/>
-              </a:rPr>
-              <a:t>Onboarding</a:t>
-            </a:r>
-            <a:endParaRPr lang="en-US" sz="700" dirty="0"/>
-          </a:p>
-        </p:txBody>
-      </p:sp>
-      <p:sp>
-        <p:nvSpPr>
-          <p:cNvPr id="50" name="Shape 48"/>
-          <p:cNvSpPr/>
-          <p:nvPr/>
-        </p:nvSpPr>
-        <p:spPr>
-          <a:xfrm>
-            <a:off x="1664208" y="3177540"/>
-            <a:ext cx="676656" cy="146304"/>
-          </a:xfrm>
-          <a:prstGeom prst="rect">
-            <a:avLst/>
-          </a:prstGeom>
-          <a:solidFill>
-            <a:srgbClr val="2C8394"/>
-          </a:solidFill>
-          <a:ln/>
-        </p:spPr>
-      </p:sp>
-      <p:sp>
-        <p:nvSpPr>
-          <p:cNvPr id="51" name="Text 49"/>
-          <p:cNvSpPr txBox="1"/>
-          <p:nvPr/>
-        </p:nvSpPr>
-        <p:spPr>
-          <a:xfrm>
-            <a:off x="1645920" y="3163824"/>
-            <a:ext cx="713232" cy="182880"/>
-          </a:xfrm>
-          <a:prstGeom prst="rect">
-            <a:avLst/>
-          </a:prstGeom>
-          <a:noFill/>
-          <a:ln/>
-        </p:spPr>
-        <p:txBody>
-          <a:bodyPr wrap="square" lIns="0" tIns="0" rIns="0" bIns="0" rtlCol="0" anchor="ctr"/>
-          <a:lstStyle/>
-          <a:p>
-            <a:pPr algn="ctr" indent="0" marL="0">
-              <a:buNone/>
-            </a:pPr>
-            <a:r>
-              <a:rPr lang="en-US" sz="650" b="1" dirty="0">
-                <a:solidFill>
-                  <a:srgbClr val="FFFFFF"/>
-                </a:solidFill>
-                <a:latin typeface="Poppins" pitchFamily="34" charset="0"/>
-                <a:ea typeface="Poppins" pitchFamily="34" charset="-122"/>
-                <a:cs typeface="Poppins" pitchFamily="34" charset="-120"/>
-              </a:rPr>
-              <a:t>280</a:t>
-            </a:r>
-            <a:endParaRPr lang="en-US" sz="650" dirty="0"/>
-          </a:p>
-        </p:txBody>
-      </p:sp>
-      <p:sp>
-        <p:nvSpPr>
-          <p:cNvPr id="52" name="Shape 50"/>
-          <p:cNvSpPr/>
-          <p:nvPr/>
-        </p:nvSpPr>
-        <p:spPr>
-          <a:xfrm>
-            <a:off x="2377440" y="3177540"/>
-            <a:ext cx="676656" cy="146304"/>
-          </a:xfrm>
-          <a:prstGeom prst="rect">
-            <a:avLst/>
-          </a:prstGeom>
-          <a:solidFill>
-            <a:srgbClr val="7FB8C4"/>
-          </a:solidFill>
-          <a:ln/>
-        </p:spPr>
-      </p:sp>
-      <p:sp>
-        <p:nvSpPr>
-          <p:cNvPr id="53" name="Text 51"/>
-          <p:cNvSpPr txBox="1"/>
-          <p:nvPr/>
-        </p:nvSpPr>
-        <p:spPr>
-          <a:xfrm>
-            <a:off x="2359152" y="3163824"/>
-            <a:ext cx="713232" cy="182880"/>
-          </a:xfrm>
-          <a:prstGeom prst="rect">
-            <a:avLst/>
-          </a:prstGeom>
-          <a:noFill/>
-          <a:ln/>
-        </p:spPr>
-        <p:txBody>
-          <a:bodyPr wrap="square" lIns="0" tIns="0" rIns="0" bIns="0" rtlCol="0" anchor="ctr"/>
-          <a:lstStyle/>
-          <a:p>
-            <a:pPr algn="ctr" indent="0" marL="0">
-              <a:buNone/>
-            </a:pPr>
-            <a:r>
-              <a:rPr lang="en-US" sz="650" b="1" dirty="0">
-                <a:solidFill>
-                  <a:srgbClr val="12293A"/>
-                </a:solidFill>
-                <a:latin typeface="Poppins" pitchFamily="34" charset="0"/>
-                <a:ea typeface="Poppins" pitchFamily="34" charset="-122"/>
-                <a:cs typeface="Poppins" pitchFamily="34" charset="-120"/>
-              </a:rPr>
-              <a:t>229</a:t>
-            </a:r>
-            <a:endParaRPr lang="en-US" sz="650" dirty="0"/>
-          </a:p>
-        </p:txBody>
-      </p:sp>
-      <p:sp>
-        <p:nvSpPr>
-          <p:cNvPr id="54" name="Shape 52"/>
-          <p:cNvSpPr/>
-          <p:nvPr/>
-        </p:nvSpPr>
-        <p:spPr>
-          <a:xfrm>
-            <a:off x="3090672" y="3177540"/>
-            <a:ext cx="676656" cy="146304"/>
-          </a:xfrm>
-          <a:prstGeom prst="rect">
-            <a:avLst/>
-          </a:prstGeom>
-          <a:solidFill>
-            <a:srgbClr val="2C8394"/>
-          </a:solidFill>
-          <a:ln/>
-        </p:spPr>
-      </p:sp>
-      <p:sp>
-        <p:nvSpPr>
-          <p:cNvPr id="55" name="Text 53"/>
-          <p:cNvSpPr txBox="1"/>
-          <p:nvPr/>
-        </p:nvSpPr>
-        <p:spPr>
-          <a:xfrm>
-            <a:off x="3072384" y="3163824"/>
-            <a:ext cx="713232" cy="182880"/>
-          </a:xfrm>
-          <a:prstGeom prst="rect">
-            <a:avLst/>
-          </a:prstGeom>
-          <a:noFill/>
-          <a:ln/>
-        </p:spPr>
-        <p:txBody>
-          <a:bodyPr wrap="square" lIns="0" tIns="0" rIns="0" bIns="0" rtlCol="0" anchor="ctr"/>
-          <a:lstStyle/>
-          <a:p>
-            <a:pPr algn="ctr" indent="0" marL="0">
-              <a:buNone/>
-            </a:pPr>
-            <a:r>
-              <a:rPr lang="en-US" sz="650" b="1" dirty="0">
-                <a:solidFill>
-                  <a:srgbClr val="FFFFFF"/>
-                </a:solidFill>
-                <a:latin typeface="Poppins" pitchFamily="34" charset="0"/>
-                <a:ea typeface="Poppins" pitchFamily="34" charset="-122"/>
-                <a:cs typeface="Poppins" pitchFamily="34" charset="-120"/>
-              </a:rPr>
-              <a:t>354</a:t>
-            </a:r>
-            <a:endParaRPr lang="en-US" sz="650" dirty="0"/>
-          </a:p>
-        </p:txBody>
-      </p:sp>
-      <p:sp>
-        <p:nvSpPr>
-          <p:cNvPr id="56" name="Shape 54"/>
-          <p:cNvSpPr/>
-          <p:nvPr/>
-        </p:nvSpPr>
-        <p:spPr>
-          <a:xfrm>
-            <a:off x="3803904" y="3177540"/>
-            <a:ext cx="676656" cy="146304"/>
-          </a:xfrm>
-          <a:prstGeom prst="rect">
-            <a:avLst/>
-          </a:prstGeom>
-          <a:solidFill>
-            <a:srgbClr val="7FB8C4"/>
-          </a:solidFill>
-          <a:ln/>
-        </p:spPr>
-      </p:sp>
-      <p:sp>
-        <p:nvSpPr>
-          <p:cNvPr id="57" name="Text 55"/>
-          <p:cNvSpPr txBox="1"/>
-          <p:nvPr/>
-        </p:nvSpPr>
-        <p:spPr>
-          <a:xfrm>
-            <a:off x="3785616" y="3163824"/>
-            <a:ext cx="713232" cy="182880"/>
-          </a:xfrm>
-          <a:prstGeom prst="rect">
-            <a:avLst/>
-          </a:prstGeom>
-          <a:noFill/>
-          <a:ln/>
-        </p:spPr>
-        <p:txBody>
-          <a:bodyPr wrap="square" lIns="0" tIns="0" rIns="0" bIns="0" rtlCol="0" anchor="ctr"/>
-          <a:lstStyle/>
-          <a:p>
-            <a:pPr algn="ctr" indent="0" marL="0">
-              <a:buNone/>
-            </a:pPr>
-            <a:r>
-              <a:rPr lang="en-US" sz="650" b="1" dirty="0">
-                <a:solidFill>
-                  <a:srgbClr val="12293A"/>
-                </a:solidFill>
-                <a:latin typeface="Poppins" pitchFamily="34" charset="0"/>
-                <a:ea typeface="Poppins" pitchFamily="34" charset="-122"/>
-                <a:cs typeface="Poppins" pitchFamily="34" charset="-120"/>
-              </a:rPr>
-              <a:t>254</a:t>
-            </a:r>
-            <a:endParaRPr lang="en-US" sz="650" dirty="0"/>
-          </a:p>
-        </p:txBody>
-      </p:sp>
-      <p:sp>
-        <p:nvSpPr>
-          <p:cNvPr id="58" name="Shape 56"/>
-          <p:cNvSpPr/>
-          <p:nvPr/>
-        </p:nvSpPr>
-        <p:spPr>
-          <a:xfrm>
-            <a:off x="4517136" y="3177540"/>
-            <a:ext cx="676656" cy="146304"/>
-          </a:xfrm>
-          <a:prstGeom prst="rect">
-            <a:avLst/>
-          </a:prstGeom>
-          <a:solidFill>
-            <a:srgbClr val="7FB8C4"/>
-          </a:solidFill>
-          <a:ln/>
-        </p:spPr>
-      </p:sp>
-      <p:sp>
-        <p:nvSpPr>
-          <p:cNvPr id="59" name="Text 57"/>
-          <p:cNvSpPr txBox="1"/>
-          <p:nvPr/>
-        </p:nvSpPr>
-        <p:spPr>
-          <a:xfrm>
-            <a:off x="4498848" y="3163824"/>
-            <a:ext cx="713232" cy="182880"/>
-          </a:xfrm>
-          <a:prstGeom prst="rect">
-            <a:avLst/>
-          </a:prstGeom>
-          <a:noFill/>
-          <a:ln/>
-        </p:spPr>
-        <p:txBody>
-          <a:bodyPr wrap="square" lIns="0" tIns="0" rIns="0" bIns="0" rtlCol="0" anchor="ctr"/>
-          <a:lstStyle/>
-          <a:p>
-            <a:pPr algn="ctr" indent="0" marL="0">
-              <a:buNone/>
-            </a:pPr>
-            <a:r>
-              <a:rPr lang="en-US" sz="650" b="1" dirty="0">
-                <a:solidFill>
-                  <a:srgbClr val="12293A"/>
-                </a:solidFill>
-                <a:latin typeface="Poppins" pitchFamily="34" charset="0"/>
-                <a:ea typeface="Poppins" pitchFamily="34" charset="-122"/>
-                <a:cs typeface="Poppins" pitchFamily="34" charset="-120"/>
-              </a:rPr>
-              <a:t>225</a:t>
-            </a:r>
-            <a:endParaRPr lang="en-US" sz="650" dirty="0"/>
-          </a:p>
-        </p:txBody>
-      </p:sp>
-      <p:sp>
-        <p:nvSpPr>
-          <p:cNvPr id="60" name="Shape 58"/>
-          <p:cNvSpPr/>
-          <p:nvPr/>
-        </p:nvSpPr>
-        <p:spPr>
-          <a:xfrm>
-            <a:off x="5230368" y="3177540"/>
-            <a:ext cx="676656" cy="146304"/>
-          </a:xfrm>
-          <a:prstGeom prst="rect">
-            <a:avLst/>
-          </a:prstGeom>
-          <a:solidFill>
-            <a:srgbClr val="E4F1F4"/>
-          </a:solidFill>
-          <a:ln/>
-        </p:spPr>
-      </p:sp>
-      <p:sp>
-        <p:nvSpPr>
-          <p:cNvPr id="61" name="Text 59"/>
-          <p:cNvSpPr txBox="1"/>
-          <p:nvPr/>
-        </p:nvSpPr>
-        <p:spPr>
-          <a:xfrm>
-            <a:off x="5212080" y="3163824"/>
-            <a:ext cx="713232" cy="182880"/>
-          </a:xfrm>
-          <a:prstGeom prst="rect">
-            <a:avLst/>
-          </a:prstGeom>
-          <a:noFill/>
-          <a:ln/>
-        </p:spPr>
-        <p:txBody>
-          <a:bodyPr wrap="square" lIns="0" tIns="0" rIns="0" bIns="0" rtlCol="0" anchor="ctr"/>
-          <a:lstStyle/>
-          <a:p>
-            <a:pPr algn="ctr" indent="0" marL="0">
-              <a:buNone/>
-            </a:pPr>
-            <a:r>
-              <a:rPr lang="en-US" sz="650" dirty="0">
-                <a:solidFill>
-                  <a:srgbClr val="12293A"/>
-                </a:solidFill>
-                <a:latin typeface="Poppins" pitchFamily="34" charset="0"/>
-                <a:ea typeface="Poppins" pitchFamily="34" charset="-122"/>
-                <a:cs typeface="Poppins" pitchFamily="34" charset="-120"/>
-              </a:rPr>
-              <a:t>34</a:t>
-            </a:r>
-            <a:endParaRPr lang="en-US" sz="650" dirty="0"/>
-          </a:p>
-        </p:txBody>
-      </p:sp>
-      <p:sp>
-        <p:nvSpPr>
-          <p:cNvPr id="62" name="Shape 60"/>
-          <p:cNvSpPr/>
-          <p:nvPr/>
-        </p:nvSpPr>
-        <p:spPr>
-          <a:xfrm>
-            <a:off x="6126480" y="3177540"/>
-            <a:ext cx="1060704" cy="146304"/>
-          </a:xfrm>
-          <a:prstGeom prst="rect">
-            <a:avLst/>
-          </a:prstGeom>
-          <a:solidFill>
-            <a:srgbClr val="E4F1F4"/>
-          </a:solidFill>
-          <a:ln/>
-        </p:spPr>
-      </p:sp>
-      <p:sp>
-        <p:nvSpPr>
-          <p:cNvPr id="63" name="Text 61"/>
-          <p:cNvSpPr txBox="1"/>
-          <p:nvPr/>
-        </p:nvSpPr>
-        <p:spPr>
-          <a:xfrm>
-            <a:off x="6108192" y="3163824"/>
-            <a:ext cx="1097280" cy="182880"/>
-          </a:xfrm>
-          <a:prstGeom prst="rect">
-            <a:avLst/>
-          </a:prstGeom>
-          <a:noFill/>
-          <a:ln/>
-        </p:spPr>
-        <p:txBody>
-          <a:bodyPr wrap="square" lIns="0" tIns="0" rIns="0" bIns="0" rtlCol="0" anchor="ctr"/>
-          <a:lstStyle/>
-          <a:p>
-            <a:pPr algn="ctr" indent="0" marL="0">
-              <a:buNone/>
-            </a:pPr>
-            <a:r>
-              <a:rPr lang="en-US" sz="650" dirty="0">
-                <a:solidFill>
-                  <a:srgbClr val="12293A"/>
-                </a:solidFill>
-                <a:latin typeface="Poppins" pitchFamily="34" charset="0"/>
-                <a:ea typeface="Poppins" pitchFamily="34" charset="-122"/>
-                <a:cs typeface="Poppins" pitchFamily="34" charset="-120"/>
-              </a:rPr>
-              <a:t>35.9</a:t>
-            </a:r>
-            <a:endParaRPr lang="en-US" sz="650" dirty="0"/>
-          </a:p>
-        </p:txBody>
-      </p:sp>
-      <p:sp>
-        <p:nvSpPr>
-          <p:cNvPr id="64" name="Text 62"/>
-          <p:cNvSpPr txBox="1"/>
-          <p:nvPr/>
-        </p:nvSpPr>
-        <p:spPr>
-          <a:xfrm>
-            <a:off x="612648" y="3346704"/>
-            <a:ext cx="960120" cy="182880"/>
-          </a:xfrm>
-          <a:prstGeom prst="rect">
-            <a:avLst/>
-          </a:prstGeom>
-          <a:noFill/>
-          <a:ln/>
-        </p:spPr>
-        <p:txBody>
-          <a:bodyPr wrap="square" lIns="0" tIns="0" rIns="0" bIns="0" rtlCol="0" anchor="ctr"/>
-          <a:lstStyle/>
-          <a:p>
-            <a:pPr indent="0" marL="0">
-              <a:buNone/>
-            </a:pPr>
-            <a:r>
-              <a:rPr lang="en-US" sz="700" b="1" dirty="0">
-                <a:solidFill>
-                  <a:srgbClr val="12293A"/>
-                </a:solidFill>
-                <a:latin typeface="Poppins" pitchFamily="34" charset="0"/>
-                <a:ea typeface="Poppins" pitchFamily="34" charset="-122"/>
-                <a:cs typeface="Poppins" pitchFamily="34" charset="-120"/>
-              </a:rPr>
-              <a:t>Tech</a:t>
-            </a:r>
-            <a:endParaRPr lang="en-US" sz="700" dirty="0"/>
-          </a:p>
-        </p:txBody>
-      </p:sp>
-      <p:sp>
-        <p:nvSpPr>
-          <p:cNvPr id="65" name="Shape 63"/>
-          <p:cNvSpPr/>
-          <p:nvPr/>
-        </p:nvSpPr>
-        <p:spPr>
-          <a:xfrm>
-            <a:off x="1664208" y="3360420"/>
-            <a:ext cx="676656" cy="146304"/>
-          </a:xfrm>
-          <a:prstGeom prst="rect">
-            <a:avLst/>
-          </a:prstGeom>
-          <a:solidFill>
-            <a:srgbClr val="B9D8DF"/>
-          </a:solidFill>
-          <a:ln/>
-        </p:spPr>
-      </p:sp>
-      <p:sp>
-        <p:nvSpPr>
-          <p:cNvPr id="66" name="Text 64"/>
-          <p:cNvSpPr txBox="1"/>
-          <p:nvPr/>
-        </p:nvSpPr>
-        <p:spPr>
-          <a:xfrm>
-            <a:off x="1645920" y="3346704"/>
-            <a:ext cx="713232" cy="182880"/>
-          </a:xfrm>
-          <a:prstGeom prst="rect">
-            <a:avLst/>
-          </a:prstGeom>
-          <a:noFill/>
-          <a:ln/>
-        </p:spPr>
-        <p:txBody>
-          <a:bodyPr wrap="square" lIns="0" tIns="0" rIns="0" bIns="0" rtlCol="0" anchor="ctr"/>
-          <a:lstStyle/>
-          <a:p>
-            <a:pPr algn="ctr" indent="0" marL="0">
-              <a:buNone/>
-            </a:pPr>
-            <a:r>
-              <a:rPr lang="en-US" sz="650" dirty="0">
-                <a:solidFill>
-                  <a:srgbClr val="12293A"/>
-                </a:solidFill>
-                <a:latin typeface="Poppins" pitchFamily="34" charset="0"/>
-                <a:ea typeface="Poppins" pitchFamily="34" charset="-122"/>
-                <a:cs typeface="Poppins" pitchFamily="34" charset="-120"/>
-              </a:rPr>
-              <a:t>148</a:t>
-            </a:r>
-            <a:endParaRPr lang="en-US" sz="650" dirty="0"/>
-          </a:p>
-        </p:txBody>
-      </p:sp>
-      <p:sp>
-        <p:nvSpPr>
-          <p:cNvPr id="67" name="Shape 65"/>
-          <p:cNvSpPr/>
-          <p:nvPr/>
-        </p:nvSpPr>
-        <p:spPr>
-          <a:xfrm>
-            <a:off x="2377440" y="3360420"/>
-            <a:ext cx="676656" cy="146304"/>
-          </a:xfrm>
-          <a:prstGeom prst="rect">
-            <a:avLst/>
-          </a:prstGeom>
-          <a:solidFill>
-            <a:srgbClr val="B9D8DF"/>
-          </a:solidFill>
-          <a:ln/>
-        </p:spPr>
-      </p:sp>
-      <p:sp>
-        <p:nvSpPr>
-          <p:cNvPr id="68" name="Text 66"/>
-          <p:cNvSpPr txBox="1"/>
-          <p:nvPr/>
-        </p:nvSpPr>
-        <p:spPr>
-          <a:xfrm>
-            <a:off x="2359152" y="3346704"/>
-            <a:ext cx="713232" cy="182880"/>
-          </a:xfrm>
-          <a:prstGeom prst="rect">
-            <a:avLst/>
-          </a:prstGeom>
-          <a:noFill/>
-          <a:ln/>
-        </p:spPr>
-        <p:txBody>
-          <a:bodyPr wrap="square" lIns="0" tIns="0" rIns="0" bIns="0" rtlCol="0" anchor="ctr"/>
-          <a:lstStyle/>
-          <a:p>
-            <a:pPr algn="ctr" indent="0" marL="0">
-              <a:buNone/>
-            </a:pPr>
-            <a:r>
-              <a:rPr lang="en-US" sz="650" dirty="0">
-                <a:solidFill>
-                  <a:srgbClr val="12293A"/>
-                </a:solidFill>
-                <a:latin typeface="Poppins" pitchFamily="34" charset="0"/>
-                <a:ea typeface="Poppins" pitchFamily="34" charset="-122"/>
-                <a:cs typeface="Poppins" pitchFamily="34" charset="-120"/>
-              </a:rPr>
-              <a:t>93</a:t>
-            </a:r>
-            <a:endParaRPr lang="en-US" sz="650" dirty="0"/>
-          </a:p>
-        </p:txBody>
-      </p:sp>
-      <p:sp>
-        <p:nvSpPr>
-          <p:cNvPr id="69" name="Shape 67"/>
-          <p:cNvSpPr/>
-          <p:nvPr/>
-        </p:nvSpPr>
-        <p:spPr>
-          <a:xfrm>
-            <a:off x="3090672" y="3360420"/>
-            <a:ext cx="676656" cy="146304"/>
-          </a:xfrm>
-          <a:prstGeom prst="rect">
-            <a:avLst/>
-          </a:prstGeom>
-          <a:solidFill>
-            <a:srgbClr val="7FB8C4"/>
-          </a:solidFill>
-          <a:ln/>
-        </p:spPr>
-      </p:sp>
-      <p:sp>
-        <p:nvSpPr>
-          <p:cNvPr id="70" name="Text 68"/>
-          <p:cNvSpPr txBox="1"/>
-          <p:nvPr/>
-        </p:nvSpPr>
-        <p:spPr>
-          <a:xfrm>
-            <a:off x="3072384" y="3346704"/>
-            <a:ext cx="713232" cy="182880"/>
-          </a:xfrm>
-          <a:prstGeom prst="rect">
-            <a:avLst/>
-          </a:prstGeom>
-          <a:noFill/>
-          <a:ln/>
-        </p:spPr>
-        <p:txBody>
-          <a:bodyPr wrap="square" lIns="0" tIns="0" rIns="0" bIns="0" rtlCol="0" anchor="ctr"/>
-          <a:lstStyle/>
-          <a:p>
-            <a:pPr algn="ctr" indent="0" marL="0">
-              <a:buNone/>
-            </a:pPr>
-            <a:r>
-              <a:rPr lang="en-US" sz="650" b="1" dirty="0">
-                <a:solidFill>
-                  <a:srgbClr val="12293A"/>
-                </a:solidFill>
-                <a:latin typeface="Poppins" pitchFamily="34" charset="0"/>
-                <a:ea typeface="Poppins" pitchFamily="34" charset="-122"/>
-                <a:cs typeface="Poppins" pitchFamily="34" charset="-120"/>
-              </a:rPr>
-              <a:t>174</a:t>
-            </a:r>
-            <a:endParaRPr lang="en-US" sz="650" dirty="0"/>
-          </a:p>
-        </p:txBody>
-      </p:sp>
-      <p:sp>
-        <p:nvSpPr>
-          <p:cNvPr id="71" name="Shape 69"/>
-          <p:cNvSpPr/>
-          <p:nvPr/>
-        </p:nvSpPr>
-        <p:spPr>
-          <a:xfrm>
-            <a:off x="3803904" y="3360420"/>
-            <a:ext cx="676656" cy="146304"/>
-          </a:xfrm>
-          <a:prstGeom prst="rect">
-            <a:avLst/>
-          </a:prstGeom>
-          <a:solidFill>
-            <a:srgbClr val="7FB8C4"/>
-          </a:solidFill>
-          <a:ln/>
-        </p:spPr>
-      </p:sp>
-      <p:sp>
-        <p:nvSpPr>
-          <p:cNvPr id="72" name="Text 70"/>
-          <p:cNvSpPr txBox="1"/>
-          <p:nvPr/>
-        </p:nvSpPr>
-        <p:spPr>
-          <a:xfrm>
-            <a:off x="3785616" y="3346704"/>
-            <a:ext cx="713232" cy="182880"/>
-          </a:xfrm>
-          <a:prstGeom prst="rect">
-            <a:avLst/>
-          </a:prstGeom>
-          <a:noFill/>
-          <a:ln/>
-        </p:spPr>
-        <p:txBody>
-          <a:bodyPr wrap="square" lIns="0" tIns="0" rIns="0" bIns="0" rtlCol="0" anchor="ctr"/>
-          <a:lstStyle/>
-          <a:p>
-            <a:pPr algn="ctr" indent="0" marL="0">
-              <a:buNone/>
-            </a:pPr>
-            <a:r>
-              <a:rPr lang="en-US" sz="650" b="1" dirty="0">
-                <a:solidFill>
-                  <a:srgbClr val="12293A"/>
-                </a:solidFill>
-                <a:latin typeface="Poppins" pitchFamily="34" charset="0"/>
-                <a:ea typeface="Poppins" pitchFamily="34" charset="-122"/>
-                <a:cs typeface="Poppins" pitchFamily="34" charset="-120"/>
-              </a:rPr>
-              <a:t>198</a:t>
-            </a:r>
-            <a:endParaRPr lang="en-US" sz="650" dirty="0"/>
-          </a:p>
-        </p:txBody>
-      </p:sp>
-      <p:sp>
-        <p:nvSpPr>
-          <p:cNvPr id="73" name="Shape 71"/>
-          <p:cNvSpPr/>
-          <p:nvPr/>
-        </p:nvSpPr>
-        <p:spPr>
-          <a:xfrm>
-            <a:off x="4517136" y="3360420"/>
-            <a:ext cx="676656" cy="146304"/>
-          </a:xfrm>
-          <a:prstGeom prst="rect">
-            <a:avLst/>
-          </a:prstGeom>
-          <a:solidFill>
-            <a:srgbClr val="B9D8DF"/>
-          </a:solidFill>
-          <a:ln/>
-        </p:spPr>
-      </p:sp>
-      <p:sp>
-        <p:nvSpPr>
-          <p:cNvPr id="74" name="Text 72"/>
-          <p:cNvSpPr txBox="1"/>
-          <p:nvPr/>
-        </p:nvSpPr>
-        <p:spPr>
-          <a:xfrm>
-            <a:off x="4498848" y="3346704"/>
-            <a:ext cx="713232" cy="182880"/>
-          </a:xfrm>
-          <a:prstGeom prst="rect">
-            <a:avLst/>
-          </a:prstGeom>
-          <a:noFill/>
-          <a:ln/>
-        </p:spPr>
-        <p:txBody>
-          <a:bodyPr wrap="square" lIns="0" tIns="0" rIns="0" bIns="0" rtlCol="0" anchor="ctr"/>
-          <a:lstStyle/>
-          <a:p>
-            <a:pPr algn="ctr" indent="0" marL="0">
-              <a:buNone/>
-            </a:pPr>
-            <a:r>
-              <a:rPr lang="en-US" sz="650" dirty="0">
-                <a:solidFill>
-                  <a:srgbClr val="12293A"/>
-                </a:solidFill>
-                <a:latin typeface="Poppins" pitchFamily="34" charset="0"/>
-                <a:ea typeface="Poppins" pitchFamily="34" charset="-122"/>
-                <a:cs typeface="Poppins" pitchFamily="34" charset="-120"/>
-              </a:rPr>
-              <a:t>122</a:t>
-            </a:r>
-            <a:endParaRPr lang="en-US" sz="650" dirty="0"/>
-          </a:p>
-        </p:txBody>
-      </p:sp>
-      <p:sp>
-        <p:nvSpPr>
-          <p:cNvPr id="75" name="Shape 73"/>
-          <p:cNvSpPr/>
-          <p:nvPr/>
-        </p:nvSpPr>
-        <p:spPr>
-          <a:xfrm>
-            <a:off x="5230368" y="3360420"/>
-            <a:ext cx="676656" cy="146304"/>
-          </a:xfrm>
-          <a:prstGeom prst="rect">
-            <a:avLst/>
-          </a:prstGeom>
-          <a:solidFill>
-            <a:srgbClr val="E4F1F4"/>
-          </a:solidFill>
-          <a:ln/>
-        </p:spPr>
-      </p:sp>
-      <p:sp>
-        <p:nvSpPr>
-          <p:cNvPr id="76" name="Text 74"/>
-          <p:cNvSpPr txBox="1"/>
-          <p:nvPr/>
-        </p:nvSpPr>
-        <p:spPr>
-          <a:xfrm>
-            <a:off x="5212080" y="3346704"/>
-            <a:ext cx="713232" cy="182880"/>
-          </a:xfrm>
-          <a:prstGeom prst="rect">
-            <a:avLst/>
-          </a:prstGeom>
-          <a:noFill/>
-          <a:ln/>
-        </p:spPr>
-        <p:txBody>
-          <a:bodyPr wrap="square" lIns="0" tIns="0" rIns="0" bIns="0" rtlCol="0" anchor="ctr"/>
-          <a:lstStyle/>
-          <a:p>
-            <a:pPr algn="ctr" indent="0" marL="0">
-              <a:buNone/>
-            </a:pPr>
-            <a:r>
-              <a:rPr lang="en-US" sz="650" dirty="0">
-                <a:solidFill>
-                  <a:srgbClr val="12293A"/>
-                </a:solidFill>
-                <a:latin typeface="Poppins" pitchFamily="34" charset="0"/>
-                <a:ea typeface="Poppins" pitchFamily="34" charset="-122"/>
-                <a:cs typeface="Poppins" pitchFamily="34" charset="-120"/>
-              </a:rPr>
-              <a:t>54</a:t>
-            </a:r>
-            <a:endParaRPr lang="en-US" sz="650" dirty="0"/>
-          </a:p>
-        </p:txBody>
-      </p:sp>
-      <p:sp>
-        <p:nvSpPr>
-          <p:cNvPr id="77" name="Shape 75"/>
-          <p:cNvSpPr/>
-          <p:nvPr/>
-        </p:nvSpPr>
-        <p:spPr>
-          <a:xfrm>
-            <a:off x="6126480" y="3360420"/>
-            <a:ext cx="1060704" cy="146304"/>
-          </a:xfrm>
-          <a:prstGeom prst="rect">
-            <a:avLst/>
-          </a:prstGeom>
-          <a:solidFill>
-            <a:srgbClr val="E4F1F4"/>
-          </a:solidFill>
-          <a:ln/>
-        </p:spPr>
-      </p:sp>
-      <p:sp>
-        <p:nvSpPr>
-          <p:cNvPr id="78" name="Text 76"/>
-          <p:cNvSpPr txBox="1"/>
-          <p:nvPr/>
-        </p:nvSpPr>
-        <p:spPr>
-          <a:xfrm>
-            <a:off x="6108192" y="3346704"/>
-            <a:ext cx="1097280" cy="182880"/>
-          </a:xfrm>
-          <a:prstGeom prst="rect">
-            <a:avLst/>
-          </a:prstGeom>
-          <a:noFill/>
-          <a:ln/>
-        </p:spPr>
-        <p:txBody>
-          <a:bodyPr wrap="square" lIns="0" tIns="0" rIns="0" bIns="0" rtlCol="0" anchor="ctr"/>
-          <a:lstStyle/>
-          <a:p>
-            <a:pPr algn="ctr" indent="0" marL="0">
-              <a:buNone/>
-            </a:pPr>
-            <a:r>
-              <a:rPr lang="en-US" sz="650" dirty="0">
-                <a:solidFill>
-                  <a:srgbClr val="12293A"/>
-                </a:solidFill>
-                <a:latin typeface="Poppins" pitchFamily="34" charset="0"/>
-                <a:ea typeface="Poppins" pitchFamily="34" charset="-122"/>
-                <a:cs typeface="Poppins" pitchFamily="34" charset="-120"/>
-              </a:rPr>
-              <a:t>36.9</a:t>
-            </a:r>
-            <a:endParaRPr lang="en-US" sz="650" dirty="0"/>
-          </a:p>
-        </p:txBody>
-      </p:sp>
-      <p:sp>
-        <p:nvSpPr>
-          <p:cNvPr id="79" name="Text 77"/>
-          <p:cNvSpPr txBox="1"/>
-          <p:nvPr/>
-        </p:nvSpPr>
-        <p:spPr>
-          <a:xfrm>
-            <a:off x="612648" y="3529584"/>
-            <a:ext cx="960120" cy="182880"/>
-          </a:xfrm>
-          <a:prstGeom prst="rect">
-            <a:avLst/>
-          </a:prstGeom>
-          <a:noFill/>
-          <a:ln/>
-        </p:spPr>
-        <p:txBody>
-          <a:bodyPr wrap="square" lIns="0" tIns="0" rIns="0" bIns="0" rtlCol="0" anchor="ctr"/>
-          <a:lstStyle/>
-          <a:p>
-            <a:pPr indent="0" marL="0">
-              <a:buNone/>
-            </a:pPr>
-            <a:r>
-              <a:rPr lang="en-US" sz="700" b="1" dirty="0">
-                <a:solidFill>
-                  <a:srgbClr val="12293A"/>
-                </a:solidFill>
-                <a:latin typeface="Poppins" pitchFamily="34" charset="0"/>
-                <a:ea typeface="Poppins" pitchFamily="34" charset="-122"/>
-                <a:cs typeface="Poppins" pitchFamily="34" charset="-120"/>
-              </a:rPr>
-              <a:t>Other</a:t>
-            </a:r>
-            <a:endParaRPr lang="en-US" sz="700" dirty="0"/>
-          </a:p>
-        </p:txBody>
-      </p:sp>
-      <p:sp>
-        <p:nvSpPr>
-          <p:cNvPr id="80" name="Shape 78"/>
-          <p:cNvSpPr/>
-          <p:nvPr/>
-        </p:nvSpPr>
-        <p:spPr>
-          <a:xfrm>
-            <a:off x="1664208" y="3543300"/>
-            <a:ext cx="676656" cy="146304"/>
-          </a:xfrm>
-          <a:prstGeom prst="rect">
-            <a:avLst/>
-          </a:prstGeom>
-          <a:solidFill>
-            <a:srgbClr val="B9D8DF"/>
-          </a:solidFill>
-          <a:ln/>
-        </p:spPr>
-      </p:sp>
-      <p:sp>
-        <p:nvSpPr>
-          <p:cNvPr id="81" name="Text 79"/>
-          <p:cNvSpPr txBox="1"/>
-          <p:nvPr/>
-        </p:nvSpPr>
-        <p:spPr>
-          <a:xfrm>
-            <a:off x="1645920" y="3529584"/>
-            <a:ext cx="713232" cy="182880"/>
-          </a:xfrm>
-          <a:prstGeom prst="rect">
-            <a:avLst/>
-          </a:prstGeom>
-          <a:noFill/>
-          <a:ln/>
-        </p:spPr>
-        <p:txBody>
-          <a:bodyPr wrap="square" lIns="0" tIns="0" rIns="0" bIns="0" rtlCol="0" anchor="ctr"/>
-          <a:lstStyle/>
-          <a:p>
-            <a:pPr algn="ctr" indent="0" marL="0">
-              <a:buNone/>
-            </a:pPr>
-            <a:r>
-              <a:rPr lang="en-US" sz="650" dirty="0">
-                <a:solidFill>
-                  <a:srgbClr val="12293A"/>
-                </a:solidFill>
-                <a:latin typeface="Poppins" pitchFamily="34" charset="0"/>
-                <a:ea typeface="Poppins" pitchFamily="34" charset="-122"/>
-                <a:cs typeface="Poppins" pitchFamily="34" charset="-120"/>
-              </a:rPr>
-              <a:t>134</a:t>
-            </a:r>
-            <a:endParaRPr lang="en-US" sz="650" dirty="0"/>
-          </a:p>
-        </p:txBody>
-      </p:sp>
-      <p:sp>
-        <p:nvSpPr>
-          <p:cNvPr id="82" name="Shape 80"/>
-          <p:cNvSpPr/>
-          <p:nvPr/>
-        </p:nvSpPr>
-        <p:spPr>
-          <a:xfrm>
-            <a:off x="2377440" y="3543300"/>
-            <a:ext cx="676656" cy="146304"/>
-          </a:xfrm>
-          <a:prstGeom prst="rect">
-            <a:avLst/>
-          </a:prstGeom>
-          <a:solidFill>
-            <a:srgbClr val="B9D8DF"/>
-          </a:solidFill>
-          <a:ln/>
-        </p:spPr>
-      </p:sp>
-      <p:sp>
-        <p:nvSpPr>
-          <p:cNvPr id="83" name="Text 81"/>
-          <p:cNvSpPr txBox="1"/>
-          <p:nvPr/>
-        </p:nvSpPr>
-        <p:spPr>
-          <a:xfrm>
-            <a:off x="2359152" y="3529584"/>
-            <a:ext cx="713232" cy="182880"/>
-          </a:xfrm>
-          <a:prstGeom prst="rect">
-            <a:avLst/>
-          </a:prstGeom>
-          <a:noFill/>
-          <a:ln/>
-        </p:spPr>
-        <p:txBody>
-          <a:bodyPr wrap="square" lIns="0" tIns="0" rIns="0" bIns="0" rtlCol="0" anchor="ctr"/>
-          <a:lstStyle/>
-          <a:p>
-            <a:pPr algn="ctr" indent="0" marL="0">
-              <a:buNone/>
-            </a:pPr>
-            <a:r>
-              <a:rPr lang="en-US" sz="650" dirty="0">
-                <a:solidFill>
-                  <a:srgbClr val="12293A"/>
-                </a:solidFill>
-                <a:latin typeface="Poppins" pitchFamily="34" charset="0"/>
-                <a:ea typeface="Poppins" pitchFamily="34" charset="-122"/>
-                <a:cs typeface="Poppins" pitchFamily="34" charset="-120"/>
-              </a:rPr>
-              <a:t>111</a:t>
-            </a:r>
-            <a:endParaRPr lang="en-US" sz="650" dirty="0"/>
-          </a:p>
-        </p:txBody>
-      </p:sp>
-      <p:sp>
-        <p:nvSpPr>
-          <p:cNvPr id="84" name="Shape 82"/>
-          <p:cNvSpPr/>
-          <p:nvPr/>
-        </p:nvSpPr>
-        <p:spPr>
-          <a:xfrm>
-            <a:off x="3090672" y="3543300"/>
-            <a:ext cx="676656" cy="146304"/>
-          </a:xfrm>
-          <a:prstGeom prst="rect">
-            <a:avLst/>
-          </a:prstGeom>
-          <a:solidFill>
-            <a:srgbClr val="B9D8DF"/>
-          </a:solidFill>
-          <a:ln/>
-        </p:spPr>
-      </p:sp>
-      <p:sp>
-        <p:nvSpPr>
-          <p:cNvPr id="85" name="Text 83"/>
-          <p:cNvSpPr txBox="1"/>
-          <p:nvPr/>
-        </p:nvSpPr>
-        <p:spPr>
-          <a:xfrm>
-            <a:off x="3072384" y="3529584"/>
-            <a:ext cx="713232" cy="182880"/>
-          </a:xfrm>
-          <a:prstGeom prst="rect">
-            <a:avLst/>
-          </a:prstGeom>
-          <a:noFill/>
-          <a:ln/>
-        </p:spPr>
-        <p:txBody>
-          <a:bodyPr wrap="square" lIns="0" tIns="0" rIns="0" bIns="0" rtlCol="0" anchor="ctr"/>
-          <a:lstStyle/>
-          <a:p>
-            <a:pPr algn="ctr" indent="0" marL="0">
-              <a:buNone/>
-            </a:pPr>
-            <a:r>
-              <a:rPr lang="en-US" sz="650" dirty="0">
-                <a:solidFill>
-                  <a:srgbClr val="12293A"/>
-                </a:solidFill>
-                <a:latin typeface="Poppins" pitchFamily="34" charset="0"/>
-                <a:ea typeface="Poppins" pitchFamily="34" charset="-122"/>
-                <a:cs typeface="Poppins" pitchFamily="34" charset="-120"/>
-              </a:rPr>
-              <a:t>124</a:t>
-            </a:r>
-            <a:endParaRPr lang="en-US" sz="650" dirty="0"/>
-          </a:p>
-        </p:txBody>
-      </p:sp>
-      <p:sp>
-        <p:nvSpPr>
           <p:cNvPr id="86" name="Shape 84"/>
           <p:cNvSpPr/>
           <p:nvPr/>
         </p:nvSpPr>
         <p:spPr>
           <a:xfrm>
-            <a:off x="3803904" y="3543300"/>
-            <a:ext cx="676656" cy="146304"/>
-          </a:xfrm>
-          <a:prstGeom prst="rect">
-            <a:avLst/>
-          </a:prstGeom>
-          <a:solidFill>
-            <a:srgbClr val="7FB8C4"/>
-          </a:solidFill>
-          <a:ln/>
-        </p:spPr>
-      </p:sp>
-      <p:sp>
-        <p:nvSpPr>
-          <p:cNvPr id="87" name="Text 85"/>
-          <p:cNvSpPr txBox="1"/>
-          <p:nvPr/>
-        </p:nvSpPr>
-        <p:spPr>
-          <a:xfrm>
-            <a:off x="3785616" y="3529584"/>
-            <a:ext cx="713232" cy="182880"/>
-          </a:xfrm>
-          <a:prstGeom prst="rect">
-            <a:avLst/>
-          </a:prstGeom>
-          <a:noFill/>
-          <a:ln/>
-        </p:spPr>
-        <p:txBody>
-          <a:bodyPr wrap="square" lIns="0" tIns="0" rIns="0" bIns="0" rtlCol="0" anchor="ctr"/>
-          <a:lstStyle/>
-          <a:p>
-            <a:pPr algn="ctr" indent="0" marL="0">
-              <a:buNone/>
-            </a:pPr>
-            <a:r>
-              <a:rPr lang="en-US" sz="650" b="1" dirty="0">
-                <a:solidFill>
-                  <a:srgbClr val="12293A"/>
-                </a:solidFill>
-                <a:latin typeface="Poppins" pitchFamily="34" charset="0"/>
-                <a:ea typeface="Poppins" pitchFamily="34" charset="-122"/>
-                <a:cs typeface="Poppins" pitchFamily="34" charset="-120"/>
-              </a:rPr>
-              <a:t>194</a:t>
-            </a:r>
-            <a:endParaRPr lang="en-US" sz="650" dirty="0"/>
-          </a:p>
-        </p:txBody>
-      </p:sp>
-      <p:sp>
-        <p:nvSpPr>
-          <p:cNvPr id="88" name="Shape 86"/>
-          <p:cNvSpPr/>
-          <p:nvPr/>
-        </p:nvSpPr>
-        <p:spPr>
-          <a:xfrm>
-            <a:off x="4517136" y="3543300"/>
-            <a:ext cx="676656" cy="146304"/>
-          </a:xfrm>
-          <a:prstGeom prst="rect">
-            <a:avLst/>
-          </a:prstGeom>
-          <a:solidFill>
-            <a:srgbClr val="B9D8DF"/>
-          </a:solidFill>
-          <a:ln/>
-        </p:spPr>
-      </p:sp>
-      <p:sp>
-        <p:nvSpPr>
-          <p:cNvPr id="89" name="Text 87"/>
-          <p:cNvSpPr txBox="1"/>
-          <p:nvPr/>
-        </p:nvSpPr>
-        <p:spPr>
-          <a:xfrm>
-            <a:off x="4498848" y="3529584"/>
-            <a:ext cx="713232" cy="182880"/>
-          </a:xfrm>
-          <a:prstGeom prst="rect">
-            <a:avLst/>
-          </a:prstGeom>
-          <a:noFill/>
-          <a:ln/>
-        </p:spPr>
-        <p:txBody>
-          <a:bodyPr wrap="square" lIns="0" tIns="0" rIns="0" bIns="0" rtlCol="0" anchor="ctr"/>
-          <a:lstStyle/>
-          <a:p>
-            <a:pPr algn="ctr" indent="0" marL="0">
-              <a:buNone/>
-            </a:pPr>
-            <a:r>
-              <a:rPr lang="en-US" sz="650" dirty="0">
-                <a:solidFill>
-                  <a:srgbClr val="12293A"/>
-                </a:solidFill>
-                <a:latin typeface="Poppins" pitchFamily="34" charset="0"/>
-                <a:ea typeface="Poppins" pitchFamily="34" charset="-122"/>
-                <a:cs typeface="Poppins" pitchFamily="34" charset="-120"/>
-              </a:rPr>
-              <a:t>93</a:t>
-            </a:r>
-            <a:endParaRPr lang="en-US" sz="650" dirty="0"/>
-          </a:p>
-        </p:txBody>
-      </p:sp>
-      <p:sp>
-        <p:nvSpPr>
-          <p:cNvPr id="90" name="Shape 88"/>
-          <p:cNvSpPr/>
-          <p:nvPr/>
-        </p:nvSpPr>
-        <p:spPr>
-          <a:xfrm>
-            <a:off x="5230368" y="3543300"/>
-            <a:ext cx="676656" cy="146304"/>
-          </a:xfrm>
-          <a:prstGeom prst="rect">
-            <a:avLst/>
-          </a:prstGeom>
-          <a:solidFill>
-            <a:srgbClr val="E4F1F4"/>
-          </a:solidFill>
-          <a:ln/>
-        </p:spPr>
-      </p:sp>
-      <p:sp>
-        <p:nvSpPr>
-          <p:cNvPr id="91" name="Text 89"/>
-          <p:cNvSpPr txBox="1"/>
-          <p:nvPr/>
-        </p:nvSpPr>
-        <p:spPr>
-          <a:xfrm>
-            <a:off x="5212080" y="3529584"/>
-            <a:ext cx="713232" cy="182880"/>
-          </a:xfrm>
-          <a:prstGeom prst="rect">
-            <a:avLst/>
-          </a:prstGeom>
-          <a:noFill/>
-          <a:ln/>
-        </p:spPr>
-        <p:txBody>
-          <a:bodyPr wrap="square" lIns="0" tIns="0" rIns="0" bIns="0" rtlCol="0" anchor="ctr"/>
-          <a:lstStyle/>
-          <a:p>
-            <a:pPr algn="ctr" indent="0" marL="0">
-              <a:buNone/>
-            </a:pPr>
-            <a:r>
-              <a:rPr lang="en-US" sz="650" dirty="0">
-                <a:solidFill>
-                  <a:srgbClr val="12293A"/>
-                </a:solidFill>
-                <a:latin typeface="Poppins" pitchFamily="34" charset="0"/>
-                <a:ea typeface="Poppins" pitchFamily="34" charset="-122"/>
-                <a:cs typeface="Poppins" pitchFamily="34" charset="-120"/>
-              </a:rPr>
-              <a:t>29</a:t>
-            </a:r>
-            <a:endParaRPr lang="en-US" sz="650" dirty="0"/>
-          </a:p>
-        </p:txBody>
-      </p:sp>
-      <p:sp>
-        <p:nvSpPr>
-          <p:cNvPr id="92" name="Shape 90"/>
-          <p:cNvSpPr/>
-          <p:nvPr/>
-        </p:nvSpPr>
-        <p:spPr>
-          <a:xfrm>
-            <a:off x="6126480" y="3543300"/>
-            <a:ext cx="1060704" cy="146304"/>
-          </a:xfrm>
-          <a:prstGeom prst="rect">
-            <a:avLst/>
-          </a:prstGeom>
-          <a:solidFill>
-            <a:srgbClr val="E4F1F4"/>
-          </a:solidFill>
-          <a:ln/>
-        </p:spPr>
-      </p:sp>
-      <p:sp>
-        <p:nvSpPr>
-          <p:cNvPr id="93" name="Text 91"/>
-          <p:cNvSpPr txBox="1"/>
-          <p:nvPr/>
-        </p:nvSpPr>
-        <p:spPr>
-          <a:xfrm>
-            <a:off x="6108192" y="3529584"/>
-            <a:ext cx="1097280" cy="182880"/>
-          </a:xfrm>
-          <a:prstGeom prst="rect">
-            <a:avLst/>
-          </a:prstGeom>
-          <a:noFill/>
-          <a:ln/>
-        </p:spPr>
-        <p:txBody>
-          <a:bodyPr wrap="square" lIns="0" tIns="0" rIns="0" bIns="0" rtlCol="0" anchor="ctr"/>
-          <a:lstStyle/>
-          <a:p>
-            <a:pPr algn="ctr" indent="0" marL="0">
-              <a:buNone/>
-            </a:pPr>
-            <a:r>
-              <a:rPr lang="en-US" sz="650" dirty="0">
-                <a:solidFill>
-                  <a:srgbClr val="12293A"/>
-                </a:solidFill>
-                <a:latin typeface="Poppins" pitchFamily="34" charset="0"/>
-                <a:ea typeface="Poppins" pitchFamily="34" charset="-122"/>
-                <a:cs typeface="Poppins" pitchFamily="34" charset="-120"/>
-              </a:rPr>
-              <a:t>3</a:t>
-            </a:r>
-            <a:endParaRPr lang="en-US" sz="650" dirty="0"/>
-          </a:p>
-        </p:txBody>
-      </p:sp>
-      <p:sp>
-        <p:nvSpPr>
-          <p:cNvPr id="94" name="Text 92"/>
-          <p:cNvSpPr txBox="1"/>
-          <p:nvPr/>
-        </p:nvSpPr>
-        <p:spPr>
-          <a:xfrm>
-            <a:off x="612648" y="3712464"/>
-            <a:ext cx="960120" cy="182880"/>
-          </a:xfrm>
-          <a:prstGeom prst="rect">
-            <a:avLst/>
-          </a:prstGeom>
-          <a:noFill/>
-          <a:ln/>
-        </p:spPr>
-        <p:txBody>
-          <a:bodyPr wrap="square" lIns="0" tIns="0" rIns="0" bIns="0" rtlCol="0" anchor="ctr"/>
-          <a:lstStyle/>
-          <a:p>
-            <a:pPr indent="0" marL="0">
-              <a:buNone/>
-            </a:pPr>
-            <a:r>
-              <a:rPr lang="en-US" sz="700" b="1" dirty="0">
-                <a:solidFill>
-                  <a:srgbClr val="12293A"/>
-                </a:solidFill>
-                <a:latin typeface="Poppins" pitchFamily="34" charset="0"/>
-                <a:ea typeface="Poppins" pitchFamily="34" charset="-122"/>
-                <a:cs typeface="Poppins" pitchFamily="34" charset="-120"/>
-              </a:rPr>
-              <a:t>Travel</a:t>
-            </a:r>
-            <a:endParaRPr lang="en-US" sz="700" dirty="0"/>
-          </a:p>
-        </p:txBody>
-      </p:sp>
-      <p:sp>
-        <p:nvSpPr>
-          <p:cNvPr id="95" name="Shape 93"/>
-          <p:cNvSpPr/>
-          <p:nvPr/>
-        </p:nvSpPr>
-        <p:spPr>
-          <a:xfrm>
-            <a:off x="1664208" y="3726180"/>
-            <a:ext cx="676656" cy="146304"/>
-          </a:xfrm>
-          <a:prstGeom prst="rect">
-            <a:avLst/>
-          </a:prstGeom>
-          <a:solidFill>
-            <a:srgbClr val="7FB8C4"/>
-          </a:solidFill>
-          <a:ln/>
-        </p:spPr>
-      </p:sp>
-      <p:sp>
-        <p:nvSpPr>
-          <p:cNvPr id="96" name="Text 94"/>
-          <p:cNvSpPr txBox="1"/>
-          <p:nvPr/>
-        </p:nvSpPr>
-        <p:spPr>
-          <a:xfrm>
-            <a:off x="1645920" y="3712464"/>
-            <a:ext cx="713232" cy="182880"/>
-          </a:xfrm>
-          <a:prstGeom prst="rect">
-            <a:avLst/>
-          </a:prstGeom>
-          <a:noFill/>
-          <a:ln/>
-        </p:spPr>
-        <p:txBody>
-          <a:bodyPr wrap="square" lIns="0" tIns="0" rIns="0" bIns="0" rtlCol="0" anchor="ctr"/>
-          <a:lstStyle/>
-          <a:p>
-            <a:pPr algn="ctr" indent="0" marL="0">
-              <a:buNone/>
-            </a:pPr>
-            <a:r>
-              <a:rPr lang="en-US" sz="650" b="1" dirty="0">
-                <a:solidFill>
-                  <a:srgbClr val="12293A"/>
-                </a:solidFill>
-                <a:latin typeface="Poppins" pitchFamily="34" charset="0"/>
-                <a:ea typeface="Poppins" pitchFamily="34" charset="-122"/>
-                <a:cs typeface="Poppins" pitchFamily="34" charset="-120"/>
-              </a:rPr>
-              <a:t>177</a:t>
-            </a:r>
-            <a:endParaRPr lang="en-US" sz="650" dirty="0"/>
-          </a:p>
-        </p:txBody>
-      </p:sp>
-      <p:sp>
-        <p:nvSpPr>
-          <p:cNvPr id="97" name="Shape 95"/>
-          <p:cNvSpPr/>
-          <p:nvPr/>
-        </p:nvSpPr>
-        <p:spPr>
-          <a:xfrm>
-            <a:off x="2377440" y="3726180"/>
-            <a:ext cx="676656" cy="146304"/>
-          </a:xfrm>
-          <a:prstGeom prst="rect">
-            <a:avLst/>
-          </a:prstGeom>
-          <a:solidFill>
-            <a:srgbClr val="B9D8DF"/>
-          </a:solidFill>
-          <a:ln/>
-        </p:spPr>
-      </p:sp>
-      <p:sp>
-        <p:nvSpPr>
-          <p:cNvPr id="98" name="Text 96"/>
-          <p:cNvSpPr txBox="1"/>
-          <p:nvPr/>
-        </p:nvSpPr>
-        <p:spPr>
-          <a:xfrm>
-            <a:off x="2359152" y="3712464"/>
-            <a:ext cx="713232" cy="182880"/>
-          </a:xfrm>
-          <a:prstGeom prst="rect">
-            <a:avLst/>
-          </a:prstGeom>
-          <a:noFill/>
-          <a:ln/>
-        </p:spPr>
-        <p:txBody>
-          <a:bodyPr wrap="square" lIns="0" tIns="0" rIns="0" bIns="0" rtlCol="0" anchor="ctr"/>
-          <a:lstStyle/>
-          <a:p>
-            <a:pPr algn="ctr" indent="0" marL="0">
-              <a:buNone/>
-            </a:pPr>
-            <a:r>
-              <a:rPr lang="en-US" sz="650" dirty="0">
-                <a:solidFill>
-                  <a:srgbClr val="12293A"/>
-                </a:solidFill>
-                <a:latin typeface="Poppins" pitchFamily="34" charset="0"/>
-                <a:ea typeface="Poppins" pitchFamily="34" charset="-122"/>
-                <a:cs typeface="Poppins" pitchFamily="34" charset="-120"/>
-              </a:rPr>
-              <a:t>111</a:t>
-            </a:r>
-            <a:endParaRPr lang="en-US" sz="650" dirty="0"/>
-          </a:p>
-        </p:txBody>
-      </p:sp>
-      <p:sp>
-        <p:nvSpPr>
-          <p:cNvPr id="99" name="Shape 97"/>
-          <p:cNvSpPr/>
-          <p:nvPr/>
-        </p:nvSpPr>
-        <p:spPr>
-          <a:xfrm>
-            <a:off x="3090672" y="3726180"/>
-            <a:ext cx="676656" cy="146304"/>
-          </a:xfrm>
-          <a:prstGeom prst="rect">
-            <a:avLst/>
-          </a:prstGeom>
-          <a:solidFill>
-            <a:srgbClr val="B9D8DF"/>
-          </a:solidFill>
-          <a:ln/>
-        </p:spPr>
-      </p:sp>
-      <p:sp>
-        <p:nvSpPr>
-          <p:cNvPr id="100" name="Text 98"/>
-          <p:cNvSpPr txBox="1"/>
-          <p:nvPr/>
-        </p:nvSpPr>
-        <p:spPr>
-          <a:xfrm>
-            <a:off x="3072384" y="3712464"/>
-            <a:ext cx="713232" cy="182880"/>
-          </a:xfrm>
-          <a:prstGeom prst="rect">
-            <a:avLst/>
-          </a:prstGeom>
-          <a:noFill/>
-          <a:ln/>
-        </p:spPr>
-        <p:txBody>
-          <a:bodyPr wrap="square" lIns="0" tIns="0" rIns="0" bIns="0" rtlCol="0" anchor="ctr"/>
-          <a:lstStyle/>
-          <a:p>
-            <a:pPr algn="ctr" indent="0" marL="0">
-              <a:buNone/>
-            </a:pPr>
-            <a:r>
-              <a:rPr lang="en-US" sz="650" dirty="0">
-                <a:solidFill>
-                  <a:srgbClr val="12293A"/>
-                </a:solidFill>
-                <a:latin typeface="Poppins" pitchFamily="34" charset="0"/>
-                <a:ea typeface="Poppins" pitchFamily="34" charset="-122"/>
-                <a:cs typeface="Poppins" pitchFamily="34" charset="-120"/>
-              </a:rPr>
-              <a:t>119</a:t>
-            </a:r>
-            <a:endParaRPr lang="en-US" sz="650" dirty="0"/>
-          </a:p>
-        </p:txBody>
-      </p:sp>
-      <p:sp>
-        <p:nvSpPr>
-          <p:cNvPr id="101" name="Shape 99"/>
-          <p:cNvSpPr/>
-          <p:nvPr/>
-        </p:nvSpPr>
-        <p:spPr>
-          <a:xfrm>
-            <a:off x="3803904" y="3726180"/>
-            <a:ext cx="676656" cy="146304"/>
-          </a:xfrm>
-          <a:prstGeom prst="rect">
-            <a:avLst/>
-          </a:prstGeom>
-          <a:solidFill>
-            <a:srgbClr val="B9D8DF"/>
-          </a:solidFill>
-          <a:ln/>
-        </p:spPr>
-      </p:sp>
-      <p:sp>
-        <p:nvSpPr>
-          <p:cNvPr id="102" name="Text 100"/>
-          <p:cNvSpPr txBox="1"/>
-          <p:nvPr/>
-        </p:nvSpPr>
-        <p:spPr>
-          <a:xfrm>
-            <a:off x="3785616" y="3712464"/>
-            <a:ext cx="713232" cy="182880"/>
-          </a:xfrm>
-          <a:prstGeom prst="rect">
-            <a:avLst/>
-          </a:prstGeom>
-          <a:noFill/>
-          <a:ln/>
-        </p:spPr>
-        <p:txBody>
-          <a:bodyPr wrap="square" lIns="0" tIns="0" rIns="0" bIns="0" rtlCol="0" anchor="ctr"/>
-          <a:lstStyle/>
-          <a:p>
-            <a:pPr algn="ctr" indent="0" marL="0">
-              <a:buNone/>
-            </a:pPr>
-            <a:r>
-              <a:rPr lang="en-US" sz="650" dirty="0">
-                <a:solidFill>
-                  <a:srgbClr val="12293A"/>
-                </a:solidFill>
-                <a:latin typeface="Poppins" pitchFamily="34" charset="0"/>
-                <a:ea typeface="Poppins" pitchFamily="34" charset="-122"/>
-                <a:cs typeface="Poppins" pitchFamily="34" charset="-120"/>
-              </a:rPr>
-              <a:t>117</a:t>
-            </a:r>
-            <a:endParaRPr lang="en-US" sz="650" dirty="0"/>
-          </a:p>
-        </p:txBody>
-      </p:sp>
-      <p:sp>
-        <p:nvSpPr>
-          <p:cNvPr id="103" name="Shape 101"/>
-          <p:cNvSpPr/>
-          <p:nvPr/>
-        </p:nvSpPr>
-        <p:spPr>
-          <a:xfrm>
-            <a:off x="4517136" y="3726180"/>
-            <a:ext cx="676656" cy="146304"/>
-          </a:xfrm>
-          <a:prstGeom prst="rect">
-            <a:avLst/>
-          </a:prstGeom>
-          <a:solidFill>
-            <a:srgbClr val="B9D8DF"/>
-          </a:solidFill>
-          <a:ln/>
-        </p:spPr>
-      </p:sp>
-      <p:sp>
-        <p:nvSpPr>
-          <p:cNvPr id="104" name="Text 102"/>
-          <p:cNvSpPr txBox="1"/>
-          <p:nvPr/>
-        </p:nvSpPr>
-        <p:spPr>
-          <a:xfrm>
-            <a:off x="4498848" y="3712464"/>
-            <a:ext cx="713232" cy="182880"/>
-          </a:xfrm>
-          <a:prstGeom prst="rect">
-            <a:avLst/>
-          </a:prstGeom>
-          <a:noFill/>
-          <a:ln/>
-        </p:spPr>
-        <p:txBody>
-          <a:bodyPr wrap="square" lIns="0" tIns="0" rIns="0" bIns="0" rtlCol="0" anchor="ctr"/>
-          <a:lstStyle/>
-          <a:p>
-            <a:pPr algn="ctr" indent="0" marL="0">
-              <a:buNone/>
-            </a:pPr>
-            <a:r>
-              <a:rPr lang="en-US" sz="650" dirty="0">
-                <a:solidFill>
-                  <a:srgbClr val="12293A"/>
-                </a:solidFill>
-                <a:latin typeface="Poppins" pitchFamily="34" charset="0"/>
-                <a:ea typeface="Poppins" pitchFamily="34" charset="-122"/>
-                <a:cs typeface="Poppins" pitchFamily="34" charset="-120"/>
-              </a:rPr>
-              <a:t>100</a:t>
-            </a:r>
-            <a:endParaRPr lang="en-US" sz="650" dirty="0"/>
-          </a:p>
-        </p:txBody>
-      </p:sp>
-      <p:sp>
-        <p:nvSpPr>
-          <p:cNvPr id="105" name="Shape 103"/>
-          <p:cNvSpPr/>
-          <p:nvPr/>
-        </p:nvSpPr>
-        <p:spPr>
-          <a:xfrm>
-            <a:off x="5230368" y="3726180"/>
-            <a:ext cx="676656" cy="146304"/>
-          </a:xfrm>
-          <a:prstGeom prst="rect">
-            <a:avLst/>
-          </a:prstGeom>
-          <a:solidFill>
-            <a:srgbClr val="E4F1F4"/>
-          </a:solidFill>
-          <a:ln/>
-        </p:spPr>
-      </p:sp>
-      <p:sp>
-        <p:nvSpPr>
-          <p:cNvPr id="106" name="Text 104"/>
-          <p:cNvSpPr txBox="1"/>
-          <p:nvPr/>
-        </p:nvSpPr>
-        <p:spPr>
-          <a:xfrm>
-            <a:off x="5212080" y="3712464"/>
-            <a:ext cx="713232" cy="182880"/>
-          </a:xfrm>
-          <a:prstGeom prst="rect">
-            <a:avLst/>
-          </a:prstGeom>
-          <a:noFill/>
-          <a:ln/>
-        </p:spPr>
-        <p:txBody>
-          <a:bodyPr wrap="square" lIns="0" tIns="0" rIns="0" bIns="0" rtlCol="0" anchor="ctr"/>
-          <a:lstStyle/>
-          <a:p>
-            <a:pPr algn="ctr" indent="0" marL="0">
-              <a:buNone/>
-            </a:pPr>
-            <a:r>
-              <a:rPr lang="en-US" sz="650" dirty="0">
-                <a:solidFill>
-                  <a:srgbClr val="12293A"/>
-                </a:solidFill>
-                <a:latin typeface="Poppins" pitchFamily="34" charset="0"/>
-                <a:ea typeface="Poppins" pitchFamily="34" charset="-122"/>
-                <a:cs typeface="Poppins" pitchFamily="34" charset="-120"/>
-              </a:rPr>
-              <a:t>16</a:t>
-            </a:r>
-            <a:endParaRPr lang="en-US" sz="650" dirty="0"/>
-          </a:p>
-        </p:txBody>
-      </p:sp>
-      <p:sp>
-        <p:nvSpPr>
-          <p:cNvPr id="107" name="Shape 105"/>
-          <p:cNvSpPr/>
-          <p:nvPr/>
-        </p:nvSpPr>
-        <p:spPr>
-          <a:xfrm>
-            <a:off x="6126480" y="3726180"/>
-            <a:ext cx="1060704" cy="146304"/>
-          </a:xfrm>
-          <a:prstGeom prst="rect">
-            <a:avLst/>
-          </a:prstGeom>
-          <a:solidFill>
-            <a:srgbClr val="F4F8FA"/>
-          </a:solidFill>
-          <a:ln/>
-        </p:spPr>
-      </p:sp>
-      <p:sp>
-        <p:nvSpPr>
-          <p:cNvPr id="108" name="Text 106"/>
-          <p:cNvSpPr txBox="1"/>
-          <p:nvPr/>
-        </p:nvSpPr>
-        <p:spPr>
-          <a:xfrm>
-            <a:off x="6108192" y="3712464"/>
-            <a:ext cx="1097280" cy="182880"/>
-          </a:xfrm>
-          <a:prstGeom prst="rect">
-            <a:avLst/>
-          </a:prstGeom>
-          <a:noFill/>
-          <a:ln/>
-        </p:spPr>
-        <p:txBody>
-          <a:bodyPr wrap="square" lIns="0" tIns="0" rIns="0" bIns="0" rtlCol="0" anchor="ctr"/>
-          <a:lstStyle/>
-          <a:p>
-            <a:pPr algn="ctr" indent="0" marL="0">
-              <a:buNone/>
-            </a:pPr>
-            <a:r>
-              <a:rPr lang="en-US" sz="650" dirty="0">
-                <a:solidFill>
-                  <a:srgbClr val="8FA1AC"/>
-                </a:solidFill>
-                <a:latin typeface="Poppins" pitchFamily="34" charset="0"/>
-                <a:ea typeface="Poppins" pitchFamily="34" charset="-122"/>
-                <a:cs typeface="Poppins" pitchFamily="34" charset="-120"/>
-              </a:rPr>
-              <a:t>—</a:t>
-            </a:r>
-            <a:endParaRPr lang="en-US" sz="650" dirty="0"/>
-          </a:p>
-        </p:txBody>
-      </p:sp>
-      <p:sp>
-        <p:nvSpPr>
-          <p:cNvPr id="109" name="Text 107"/>
-          <p:cNvSpPr txBox="1"/>
-          <p:nvPr/>
-        </p:nvSpPr>
-        <p:spPr>
-          <a:xfrm>
-            <a:off x="612648" y="3895344"/>
-            <a:ext cx="960120" cy="182880"/>
-          </a:xfrm>
-          <a:prstGeom prst="rect">
-            <a:avLst/>
-          </a:prstGeom>
-          <a:noFill/>
-          <a:ln/>
-        </p:spPr>
-        <p:txBody>
-          <a:bodyPr wrap="square" lIns="0" tIns="0" rIns="0" bIns="0" rtlCol="0" anchor="ctr"/>
-          <a:lstStyle/>
-          <a:p>
-            <a:pPr indent="0" marL="0">
-              <a:buNone/>
-            </a:pPr>
-            <a:r>
-              <a:rPr lang="en-US" sz="700" b="1" dirty="0">
-                <a:solidFill>
-                  <a:srgbClr val="12293A"/>
-                </a:solidFill>
-                <a:latin typeface="Poppins" pitchFamily="34" charset="0"/>
-                <a:ea typeface="Poppins" pitchFamily="34" charset="-122"/>
-                <a:cs typeface="Poppins" pitchFamily="34" charset="-120"/>
-              </a:rPr>
-              <a:t>Warranty</a:t>
-            </a:r>
-            <a:endParaRPr lang="en-US" sz="700" dirty="0"/>
-          </a:p>
-        </p:txBody>
-      </p:sp>
-      <p:sp>
-        <p:nvSpPr>
-          <p:cNvPr id="110" name="Shape 108"/>
-          <p:cNvSpPr/>
-          <p:nvPr/>
-        </p:nvSpPr>
-        <p:spPr>
-          <a:xfrm>
-            <a:off x="1664208" y="3909060"/>
-            <a:ext cx="676656" cy="146304"/>
-          </a:xfrm>
-          <a:prstGeom prst="rect">
-            <a:avLst/>
-          </a:prstGeom>
-          <a:solidFill>
-            <a:srgbClr val="B9D8DF"/>
-          </a:solidFill>
-          <a:ln/>
-        </p:spPr>
-      </p:sp>
-      <p:sp>
-        <p:nvSpPr>
-          <p:cNvPr id="111" name="Text 109"/>
-          <p:cNvSpPr txBox="1"/>
-          <p:nvPr/>
-        </p:nvSpPr>
-        <p:spPr>
-          <a:xfrm>
-            <a:off x="1645920" y="3895344"/>
-            <a:ext cx="713232" cy="182880"/>
-          </a:xfrm>
-          <a:prstGeom prst="rect">
-            <a:avLst/>
-          </a:prstGeom>
-          <a:noFill/>
-          <a:ln/>
-        </p:spPr>
-        <p:txBody>
-          <a:bodyPr wrap="square" lIns="0" tIns="0" rIns="0" bIns="0" rtlCol="0" anchor="ctr"/>
-          <a:lstStyle/>
-          <a:p>
-            <a:pPr algn="ctr" indent="0" marL="0">
-              <a:buNone/>
-            </a:pPr>
-            <a:r>
-              <a:rPr lang="en-US" sz="650" dirty="0">
-                <a:solidFill>
-                  <a:srgbClr val="12293A"/>
-                </a:solidFill>
-                <a:latin typeface="Poppins" pitchFamily="34" charset="0"/>
-                <a:ea typeface="Poppins" pitchFamily="34" charset="-122"/>
-                <a:cs typeface="Poppins" pitchFamily="34" charset="-120"/>
-              </a:rPr>
-              <a:t>89</a:t>
-            </a:r>
-            <a:endParaRPr lang="en-US" sz="650" dirty="0"/>
-          </a:p>
-        </p:txBody>
-      </p:sp>
-      <p:sp>
-        <p:nvSpPr>
-          <p:cNvPr id="112" name="Shape 110"/>
-          <p:cNvSpPr/>
-          <p:nvPr/>
-        </p:nvSpPr>
-        <p:spPr>
-          <a:xfrm>
-            <a:off x="2377440" y="3909060"/>
-            <a:ext cx="676656" cy="146304"/>
-          </a:xfrm>
-          <a:prstGeom prst="rect">
-            <a:avLst/>
-          </a:prstGeom>
-          <a:solidFill>
-            <a:srgbClr val="E4F1F4"/>
-          </a:solidFill>
-          <a:ln/>
-        </p:spPr>
-      </p:sp>
-      <p:sp>
-        <p:nvSpPr>
-          <p:cNvPr id="113" name="Text 111"/>
-          <p:cNvSpPr txBox="1"/>
-          <p:nvPr/>
-        </p:nvSpPr>
-        <p:spPr>
-          <a:xfrm>
-            <a:off x="2359152" y="3895344"/>
-            <a:ext cx="713232" cy="182880"/>
-          </a:xfrm>
-          <a:prstGeom prst="rect">
-            <a:avLst/>
-          </a:prstGeom>
-          <a:noFill/>
-          <a:ln/>
-        </p:spPr>
-        <p:txBody>
-          <a:bodyPr wrap="square" lIns="0" tIns="0" rIns="0" bIns="0" rtlCol="0" anchor="ctr"/>
-          <a:lstStyle/>
-          <a:p>
-            <a:pPr algn="ctr" indent="0" marL="0">
-              <a:buNone/>
-            </a:pPr>
-            <a:r>
-              <a:rPr lang="en-US" sz="650" dirty="0">
-                <a:solidFill>
-                  <a:srgbClr val="12293A"/>
-                </a:solidFill>
-                <a:latin typeface="Poppins" pitchFamily="34" charset="0"/>
-                <a:ea typeface="Poppins" pitchFamily="34" charset="-122"/>
-                <a:cs typeface="Poppins" pitchFamily="34" charset="-120"/>
-              </a:rPr>
-              <a:t>47</a:t>
-            </a:r>
-            <a:endParaRPr lang="en-US" sz="650" dirty="0"/>
-          </a:p>
-        </p:txBody>
-      </p:sp>
-      <p:sp>
-        <p:nvSpPr>
-          <p:cNvPr id="114" name="Shape 112"/>
-          <p:cNvSpPr/>
-          <p:nvPr/>
-        </p:nvSpPr>
-        <p:spPr>
-          <a:xfrm>
-            <a:off x="3090672" y="3909060"/>
-            <a:ext cx="676656" cy="146304"/>
-          </a:xfrm>
-          <a:prstGeom prst="rect">
-            <a:avLst/>
-          </a:prstGeom>
-          <a:solidFill>
-            <a:srgbClr val="E4F1F4"/>
-          </a:solidFill>
-          <a:ln/>
-        </p:spPr>
-      </p:sp>
-      <p:sp>
-        <p:nvSpPr>
-          <p:cNvPr id="115" name="Text 113"/>
-          <p:cNvSpPr txBox="1"/>
-          <p:nvPr/>
-        </p:nvSpPr>
-        <p:spPr>
-          <a:xfrm>
-            <a:off x="3072384" y="3895344"/>
-            <a:ext cx="713232" cy="182880"/>
-          </a:xfrm>
-          <a:prstGeom prst="rect">
-            <a:avLst/>
-          </a:prstGeom>
-          <a:noFill/>
-          <a:ln/>
-        </p:spPr>
-        <p:txBody>
-          <a:bodyPr wrap="square" lIns="0" tIns="0" rIns="0" bIns="0" rtlCol="0" anchor="ctr"/>
-          <a:lstStyle/>
-          <a:p>
-            <a:pPr algn="ctr" indent="0" marL="0">
-              <a:buNone/>
-            </a:pPr>
-            <a:r>
-              <a:rPr lang="en-US" sz="650" dirty="0">
-                <a:solidFill>
-                  <a:srgbClr val="12293A"/>
-                </a:solidFill>
-                <a:latin typeface="Poppins" pitchFamily="34" charset="0"/>
-                <a:ea typeface="Poppins" pitchFamily="34" charset="-122"/>
-                <a:cs typeface="Poppins" pitchFamily="34" charset="-120"/>
-              </a:rPr>
-              <a:t>43</a:t>
-            </a:r>
-            <a:endParaRPr lang="en-US" sz="650" dirty="0"/>
-          </a:p>
-        </p:txBody>
-      </p:sp>
-      <p:sp>
-        <p:nvSpPr>
-          <p:cNvPr id="116" name="Shape 114"/>
-          <p:cNvSpPr/>
-          <p:nvPr/>
-        </p:nvSpPr>
-        <p:spPr>
-          <a:xfrm>
-            <a:off x="3803904" y="3909060"/>
-            <a:ext cx="676656" cy="146304"/>
-          </a:xfrm>
-          <a:prstGeom prst="rect">
-            <a:avLst/>
-          </a:prstGeom>
-          <a:solidFill>
-            <a:srgbClr val="B9D8DF"/>
-          </a:solidFill>
-          <a:ln/>
-        </p:spPr>
-      </p:sp>
-      <p:sp>
-        <p:nvSpPr>
-          <p:cNvPr id="117" name="Text 115"/>
-          <p:cNvSpPr txBox="1"/>
-          <p:nvPr/>
-        </p:nvSpPr>
-        <p:spPr>
-          <a:xfrm>
-            <a:off x="3785616" y="3895344"/>
-            <a:ext cx="713232" cy="182880"/>
-          </a:xfrm>
-          <a:prstGeom prst="rect">
-            <a:avLst/>
-          </a:prstGeom>
-          <a:noFill/>
-          <a:ln/>
-        </p:spPr>
-        <p:txBody>
-          <a:bodyPr wrap="square" lIns="0" tIns="0" rIns="0" bIns="0" rtlCol="0" anchor="ctr"/>
-          <a:lstStyle/>
-          <a:p>
-            <a:pPr algn="ctr" indent="0" marL="0">
-              <a:buNone/>
-            </a:pPr>
-            <a:r>
-              <a:rPr lang="en-US" sz="650" dirty="0">
-                <a:solidFill>
-                  <a:srgbClr val="12293A"/>
-                </a:solidFill>
-                <a:latin typeface="Poppins" pitchFamily="34" charset="0"/>
-                <a:ea typeface="Poppins" pitchFamily="34" charset="-122"/>
-                <a:cs typeface="Poppins" pitchFamily="34" charset="-120"/>
-              </a:rPr>
-              <a:t>71</a:t>
-            </a:r>
-            <a:endParaRPr lang="en-US" sz="650" dirty="0"/>
-          </a:p>
-        </p:txBody>
-      </p:sp>
-      <p:sp>
-        <p:nvSpPr>
-          <p:cNvPr id="118" name="Shape 116"/>
-          <p:cNvSpPr/>
-          <p:nvPr/>
-        </p:nvSpPr>
-        <p:spPr>
-          <a:xfrm>
-            <a:off x="4517136" y="3909060"/>
-            <a:ext cx="676656" cy="146304"/>
-          </a:xfrm>
-          <a:prstGeom prst="rect">
-            <a:avLst/>
-          </a:prstGeom>
-          <a:solidFill>
-            <a:srgbClr val="E4F1F4"/>
-          </a:solidFill>
-          <a:ln/>
-        </p:spPr>
-      </p:sp>
-      <p:sp>
-        <p:nvSpPr>
-          <p:cNvPr id="119" name="Text 117"/>
-          <p:cNvSpPr txBox="1"/>
-          <p:nvPr/>
-        </p:nvSpPr>
-        <p:spPr>
-          <a:xfrm>
-            <a:off x="4498848" y="3895344"/>
-            <a:ext cx="713232" cy="182880"/>
-          </a:xfrm>
-          <a:prstGeom prst="rect">
-            <a:avLst/>
-          </a:prstGeom>
-          <a:noFill/>
-          <a:ln/>
-        </p:spPr>
-        <p:txBody>
-          <a:bodyPr wrap="square" lIns="0" tIns="0" rIns="0" bIns="0" rtlCol="0" anchor="ctr"/>
-          <a:lstStyle/>
-          <a:p>
-            <a:pPr algn="ctr" indent="0" marL="0">
-              <a:buNone/>
-            </a:pPr>
-            <a:r>
-              <a:rPr lang="en-US" sz="650" dirty="0">
-                <a:solidFill>
-                  <a:srgbClr val="12293A"/>
-                </a:solidFill>
-                <a:latin typeface="Poppins" pitchFamily="34" charset="0"/>
-                <a:ea typeface="Poppins" pitchFamily="34" charset="-122"/>
-                <a:cs typeface="Poppins" pitchFamily="34" charset="-120"/>
-              </a:rPr>
-              <a:t>62</a:t>
-            </a:r>
-            <a:endParaRPr lang="en-US" sz="650" dirty="0"/>
-          </a:p>
-        </p:txBody>
-      </p:sp>
-      <p:sp>
-        <p:nvSpPr>
-          <p:cNvPr id="120" name="Shape 118"/>
-          <p:cNvSpPr/>
-          <p:nvPr/>
-        </p:nvSpPr>
-        <p:spPr>
-          <a:xfrm>
-            <a:off x="5230368" y="3909060"/>
-            <a:ext cx="676656" cy="146304"/>
-          </a:xfrm>
-          <a:prstGeom prst="rect">
-            <a:avLst/>
-          </a:prstGeom>
-          <a:solidFill>
-            <a:srgbClr val="E4F1F4"/>
-          </a:solidFill>
-          <a:ln/>
-        </p:spPr>
-      </p:sp>
-      <p:sp>
-        <p:nvSpPr>
-          <p:cNvPr id="121" name="Text 119"/>
-          <p:cNvSpPr txBox="1"/>
-          <p:nvPr/>
-        </p:nvSpPr>
-        <p:spPr>
-          <a:xfrm>
-            <a:off x="5212080" y="3895344"/>
-            <a:ext cx="713232" cy="182880"/>
-          </a:xfrm>
-          <a:prstGeom prst="rect">
-            <a:avLst/>
-          </a:prstGeom>
-          <a:noFill/>
-          <a:ln/>
-        </p:spPr>
-        <p:txBody>
-          <a:bodyPr wrap="square" lIns="0" tIns="0" rIns="0" bIns="0" rtlCol="0" anchor="ctr"/>
-          <a:lstStyle/>
-          <a:p>
-            <a:pPr algn="ctr" indent="0" marL="0">
-              <a:buNone/>
-            </a:pPr>
-            <a:r>
-              <a:rPr lang="en-US" sz="650" dirty="0">
-                <a:solidFill>
-                  <a:srgbClr val="12293A"/>
-                </a:solidFill>
-                <a:latin typeface="Poppins" pitchFamily="34" charset="0"/>
-                <a:ea typeface="Poppins" pitchFamily="34" charset="-122"/>
-                <a:cs typeface="Poppins" pitchFamily="34" charset="-120"/>
-              </a:rPr>
-              <a:t>14</a:t>
-            </a:r>
-            <a:endParaRPr lang="en-US" sz="650" dirty="0"/>
-          </a:p>
-        </p:txBody>
-      </p:sp>
-      <p:sp>
-        <p:nvSpPr>
-          <p:cNvPr id="122" name="Shape 120"/>
-          <p:cNvSpPr/>
-          <p:nvPr/>
-        </p:nvSpPr>
-        <p:spPr>
-          <a:xfrm>
-            <a:off x="6126480" y="3909060"/>
-            <a:ext cx="1060704" cy="146304"/>
-          </a:xfrm>
-          <a:prstGeom prst="rect">
-            <a:avLst/>
-          </a:prstGeom>
-          <a:solidFill>
-            <a:srgbClr val="F4F8FA"/>
-          </a:solidFill>
-          <a:ln/>
-        </p:spPr>
-      </p:sp>
-      <p:sp>
-        <p:nvSpPr>
-          <p:cNvPr id="123" name="Text 121"/>
-          <p:cNvSpPr txBox="1"/>
-          <p:nvPr/>
-        </p:nvSpPr>
-        <p:spPr>
-          <a:xfrm>
-            <a:off x="6108192" y="3895344"/>
-            <a:ext cx="1097280" cy="182880"/>
-          </a:xfrm>
-          <a:prstGeom prst="rect">
-            <a:avLst/>
-          </a:prstGeom>
-          <a:noFill/>
-          <a:ln/>
-        </p:spPr>
-        <p:txBody>
-          <a:bodyPr wrap="square" lIns="0" tIns="0" rIns="0" bIns="0" rtlCol="0" anchor="ctr"/>
-          <a:lstStyle/>
-          <a:p>
-            <a:pPr algn="ctr" indent="0" marL="0">
-              <a:buNone/>
-            </a:pPr>
-            <a:r>
-              <a:rPr lang="en-US" sz="650" dirty="0">
-                <a:solidFill>
-                  <a:srgbClr val="8FA1AC"/>
-                </a:solidFill>
-                <a:latin typeface="Poppins" pitchFamily="34" charset="0"/>
-                <a:ea typeface="Poppins" pitchFamily="34" charset="-122"/>
-                <a:cs typeface="Poppins" pitchFamily="34" charset="-120"/>
-              </a:rPr>
-              <a:t>—</a:t>
-            </a:r>
-            <a:endParaRPr lang="en-US" sz="650" dirty="0"/>
-          </a:p>
-        </p:txBody>
-      </p:sp>
-      <p:sp>
-        <p:nvSpPr>
-          <p:cNvPr id="124" name="Text 122"/>
-          <p:cNvSpPr txBox="1"/>
-          <p:nvPr/>
-        </p:nvSpPr>
-        <p:spPr>
-          <a:xfrm>
-            <a:off x="612648" y="4078224"/>
-            <a:ext cx="960120" cy="182880"/>
-          </a:xfrm>
-          <a:prstGeom prst="rect">
-            <a:avLst/>
-          </a:prstGeom>
-          <a:noFill/>
-          <a:ln/>
-        </p:spPr>
-        <p:txBody>
-          <a:bodyPr wrap="square" lIns="0" tIns="0" rIns="0" bIns="0" rtlCol="0" anchor="ctr"/>
-          <a:lstStyle/>
-          <a:p>
-            <a:pPr indent="0" marL="0">
-              <a:buNone/>
-            </a:pPr>
-            <a:r>
-              <a:rPr lang="en-US" sz="700" b="1" dirty="0">
-                <a:solidFill>
-                  <a:srgbClr val="12293A"/>
-                </a:solidFill>
-                <a:latin typeface="Poppins" pitchFamily="34" charset="0"/>
-                <a:ea typeface="Poppins" pitchFamily="34" charset="-122"/>
-                <a:cs typeface="Poppins" pitchFamily="34" charset="-120"/>
-              </a:rPr>
-              <a:t>Integrations</a:t>
-            </a:r>
-            <a:endParaRPr lang="en-US" sz="700" dirty="0"/>
-          </a:p>
-        </p:txBody>
-      </p:sp>
-      <p:sp>
-        <p:nvSpPr>
-          <p:cNvPr id="125" name="Shape 123"/>
-          <p:cNvSpPr/>
-          <p:nvPr/>
-        </p:nvSpPr>
-        <p:spPr>
-          <a:xfrm>
-            <a:off x="1664208" y="4091940"/>
-            <a:ext cx="676656" cy="146304"/>
-          </a:xfrm>
-          <a:prstGeom prst="rect">
-            <a:avLst/>
-          </a:prstGeom>
-          <a:solidFill>
-            <a:srgbClr val="E4F1F4"/>
-          </a:solidFill>
-          <a:ln/>
-        </p:spPr>
-      </p:sp>
-      <p:sp>
-        <p:nvSpPr>
-          <p:cNvPr id="126" name="Text 124"/>
-          <p:cNvSpPr txBox="1"/>
-          <p:nvPr/>
-        </p:nvSpPr>
-        <p:spPr>
-          <a:xfrm>
-            <a:off x="1645920" y="4078224"/>
-            <a:ext cx="713232" cy="182880"/>
-          </a:xfrm>
-          <a:prstGeom prst="rect">
-            <a:avLst/>
-          </a:prstGeom>
-          <a:noFill/>
-          <a:ln/>
-        </p:spPr>
-        <p:txBody>
-          <a:bodyPr wrap="square" lIns="0" tIns="0" rIns="0" bIns="0" rtlCol="0" anchor="ctr"/>
-          <a:lstStyle/>
-          <a:p>
-            <a:pPr algn="ctr" indent="0" marL="0">
-              <a:buNone/>
-            </a:pPr>
-            <a:r>
-              <a:rPr lang="en-US" sz="650" dirty="0">
-                <a:solidFill>
-                  <a:srgbClr val="12293A"/>
-                </a:solidFill>
-                <a:latin typeface="Poppins" pitchFamily="34" charset="0"/>
-                <a:ea typeface="Poppins" pitchFamily="34" charset="-122"/>
-                <a:cs typeface="Poppins" pitchFamily="34" charset="-120"/>
-              </a:rPr>
-              <a:t>34</a:t>
-            </a:r>
-            <a:endParaRPr lang="en-US" sz="650" dirty="0"/>
-          </a:p>
-        </p:txBody>
-      </p:sp>
-      <p:sp>
-        <p:nvSpPr>
-          <p:cNvPr id="127" name="Shape 125"/>
-          <p:cNvSpPr/>
-          <p:nvPr/>
-        </p:nvSpPr>
-        <p:spPr>
-          <a:xfrm>
-            <a:off x="2377440" y="4091940"/>
-            <a:ext cx="676656" cy="146304"/>
-          </a:xfrm>
-          <a:prstGeom prst="rect">
-            <a:avLst/>
-          </a:prstGeom>
-          <a:solidFill>
-            <a:srgbClr val="E4F1F4"/>
-          </a:solidFill>
-          <a:ln/>
-        </p:spPr>
-      </p:sp>
-      <p:sp>
-        <p:nvSpPr>
-          <p:cNvPr id="128" name="Text 126"/>
-          <p:cNvSpPr txBox="1"/>
-          <p:nvPr/>
-        </p:nvSpPr>
-        <p:spPr>
-          <a:xfrm>
-            <a:off x="2359152" y="4078224"/>
-            <a:ext cx="713232" cy="182880"/>
-          </a:xfrm>
-          <a:prstGeom prst="rect">
-            <a:avLst/>
-          </a:prstGeom>
-          <a:noFill/>
-          <a:ln/>
-        </p:spPr>
-        <p:txBody>
-          <a:bodyPr wrap="square" lIns="0" tIns="0" rIns="0" bIns="0" rtlCol="0" anchor="ctr"/>
-          <a:lstStyle/>
-          <a:p>
-            <a:pPr algn="ctr" indent="0" marL="0">
-              <a:buNone/>
-            </a:pPr>
-            <a:r>
-              <a:rPr lang="en-US" sz="650" dirty="0">
-                <a:solidFill>
-                  <a:srgbClr val="12293A"/>
-                </a:solidFill>
-                <a:latin typeface="Poppins" pitchFamily="34" charset="0"/>
-                <a:ea typeface="Poppins" pitchFamily="34" charset="-122"/>
-                <a:cs typeface="Poppins" pitchFamily="34" charset="-120"/>
-              </a:rPr>
-              <a:t>27</a:t>
-            </a:r>
-            <a:endParaRPr lang="en-US" sz="650" dirty="0"/>
-          </a:p>
-        </p:txBody>
-      </p:sp>
-      <p:sp>
-        <p:nvSpPr>
-          <p:cNvPr id="129" name="Shape 127"/>
-          <p:cNvSpPr/>
-          <p:nvPr/>
-        </p:nvSpPr>
-        <p:spPr>
-          <a:xfrm>
-            <a:off x="3090672" y="4091940"/>
-            <a:ext cx="676656" cy="146304"/>
-          </a:xfrm>
-          <a:prstGeom prst="rect">
-            <a:avLst/>
-          </a:prstGeom>
-          <a:solidFill>
-            <a:srgbClr val="B9D8DF"/>
-          </a:solidFill>
-          <a:ln/>
-        </p:spPr>
-      </p:sp>
-      <p:sp>
-        <p:nvSpPr>
-          <p:cNvPr id="130" name="Text 128"/>
-          <p:cNvSpPr txBox="1"/>
-          <p:nvPr/>
-        </p:nvSpPr>
-        <p:spPr>
-          <a:xfrm>
-            <a:off x="3072384" y="4078224"/>
-            <a:ext cx="713232" cy="182880"/>
-          </a:xfrm>
-          <a:prstGeom prst="rect">
-            <a:avLst/>
-          </a:prstGeom>
-          <a:noFill/>
-          <a:ln/>
-        </p:spPr>
-        <p:txBody>
-          <a:bodyPr wrap="square" lIns="0" tIns="0" rIns="0" bIns="0" rtlCol="0" anchor="ctr"/>
-          <a:lstStyle/>
-          <a:p>
-            <a:pPr algn="ctr" indent="0" marL="0">
-              <a:buNone/>
-            </a:pPr>
-            <a:r>
-              <a:rPr lang="en-US" sz="650" dirty="0">
-                <a:solidFill>
-                  <a:srgbClr val="12293A"/>
-                </a:solidFill>
-                <a:latin typeface="Poppins" pitchFamily="34" charset="0"/>
-                <a:ea typeface="Poppins" pitchFamily="34" charset="-122"/>
-                <a:cs typeface="Poppins" pitchFamily="34" charset="-120"/>
-              </a:rPr>
-              <a:t>80</a:t>
-            </a:r>
-            <a:endParaRPr lang="en-US" sz="650" dirty="0"/>
-          </a:p>
-        </p:txBody>
-      </p:sp>
-      <p:sp>
-        <p:nvSpPr>
-          <p:cNvPr id="131" name="Shape 129"/>
-          <p:cNvSpPr/>
-          <p:nvPr/>
-        </p:nvSpPr>
-        <p:spPr>
-          <a:xfrm>
-            <a:off x="3803904" y="4091940"/>
-            <a:ext cx="676656" cy="146304"/>
-          </a:xfrm>
-          <a:prstGeom prst="rect">
-            <a:avLst/>
-          </a:prstGeom>
-          <a:solidFill>
-            <a:srgbClr val="E4F1F4"/>
-          </a:solidFill>
-          <a:ln/>
-        </p:spPr>
-      </p:sp>
-      <p:sp>
-        <p:nvSpPr>
-          <p:cNvPr id="132" name="Text 130"/>
-          <p:cNvSpPr txBox="1"/>
-          <p:nvPr/>
-        </p:nvSpPr>
-        <p:spPr>
-          <a:xfrm>
-            <a:off x="3785616" y="4078224"/>
-            <a:ext cx="713232" cy="182880"/>
-          </a:xfrm>
-          <a:prstGeom prst="rect">
-            <a:avLst/>
-          </a:prstGeom>
-          <a:noFill/>
-          <a:ln/>
-        </p:spPr>
-        <p:txBody>
-          <a:bodyPr wrap="square" lIns="0" tIns="0" rIns="0" bIns="0" rtlCol="0" anchor="ctr"/>
-          <a:lstStyle/>
-          <a:p>
-            <a:pPr algn="ctr" indent="0" marL="0">
-              <a:buNone/>
-            </a:pPr>
-            <a:r>
-              <a:rPr lang="en-US" sz="650" dirty="0">
-                <a:solidFill>
-                  <a:srgbClr val="12293A"/>
-                </a:solidFill>
-                <a:latin typeface="Poppins" pitchFamily="34" charset="0"/>
-                <a:ea typeface="Poppins" pitchFamily="34" charset="-122"/>
-                <a:cs typeface="Poppins" pitchFamily="34" charset="-120"/>
-              </a:rPr>
-              <a:t>50</a:t>
-            </a:r>
-            <a:endParaRPr lang="en-US" sz="650" dirty="0"/>
-          </a:p>
-        </p:txBody>
-      </p:sp>
-      <p:sp>
-        <p:nvSpPr>
-          <p:cNvPr id="133" name="Shape 131"/>
-          <p:cNvSpPr/>
-          <p:nvPr/>
-        </p:nvSpPr>
-        <p:spPr>
-          <a:xfrm>
-            <a:off x="4517136" y="4091940"/>
-            <a:ext cx="676656" cy="146304"/>
-          </a:xfrm>
-          <a:prstGeom prst="rect">
-            <a:avLst/>
-          </a:prstGeom>
-          <a:solidFill>
-            <a:srgbClr val="E4F1F4"/>
-          </a:solidFill>
-          <a:ln/>
-        </p:spPr>
-      </p:sp>
-      <p:sp>
-        <p:nvSpPr>
-          <p:cNvPr id="134" name="Text 132"/>
-          <p:cNvSpPr txBox="1"/>
-          <p:nvPr/>
-        </p:nvSpPr>
-        <p:spPr>
-          <a:xfrm>
-            <a:off x="4498848" y="4078224"/>
-            <a:ext cx="713232" cy="182880"/>
-          </a:xfrm>
-          <a:prstGeom prst="rect">
-            <a:avLst/>
-          </a:prstGeom>
-          <a:noFill/>
-          <a:ln/>
-        </p:spPr>
-        <p:txBody>
-          <a:bodyPr wrap="square" lIns="0" tIns="0" rIns="0" bIns="0" rtlCol="0" anchor="ctr"/>
-          <a:lstStyle/>
-          <a:p>
-            <a:pPr algn="ctr" indent="0" marL="0">
-              <a:buNone/>
-            </a:pPr>
-            <a:r>
-              <a:rPr lang="en-US" sz="650" dirty="0">
-                <a:solidFill>
-                  <a:srgbClr val="12293A"/>
-                </a:solidFill>
-                <a:latin typeface="Poppins" pitchFamily="34" charset="0"/>
-                <a:ea typeface="Poppins" pitchFamily="34" charset="-122"/>
-                <a:cs typeface="Poppins" pitchFamily="34" charset="-120"/>
-              </a:rPr>
-              <a:t>38</a:t>
-            </a:r>
-            <a:endParaRPr lang="en-US" sz="650" dirty="0"/>
-          </a:p>
-        </p:txBody>
-      </p:sp>
-      <p:sp>
-        <p:nvSpPr>
-          <p:cNvPr id="135" name="Shape 133"/>
-          <p:cNvSpPr/>
-          <p:nvPr/>
-        </p:nvSpPr>
-        <p:spPr>
-          <a:xfrm>
-            <a:off x="5230368" y="4091940"/>
-            <a:ext cx="676656" cy="146304"/>
-          </a:xfrm>
-          <a:prstGeom prst="rect">
-            <a:avLst/>
-          </a:prstGeom>
-          <a:solidFill>
-            <a:srgbClr val="E4F1F4"/>
-          </a:solidFill>
-          <a:ln/>
-        </p:spPr>
-      </p:sp>
-      <p:sp>
-        <p:nvSpPr>
-          <p:cNvPr id="136" name="Text 134"/>
-          <p:cNvSpPr txBox="1"/>
-          <p:nvPr/>
-        </p:nvSpPr>
-        <p:spPr>
-          <a:xfrm>
-            <a:off x="5212080" y="4078224"/>
-            <a:ext cx="713232" cy="182880"/>
-          </a:xfrm>
-          <a:prstGeom prst="rect">
-            <a:avLst/>
-          </a:prstGeom>
-          <a:noFill/>
-          <a:ln/>
-        </p:spPr>
-        <p:txBody>
-          <a:bodyPr wrap="square" lIns="0" tIns="0" rIns="0" bIns="0" rtlCol="0" anchor="ctr"/>
-          <a:lstStyle/>
-          <a:p>
-            <a:pPr algn="ctr" indent="0" marL="0">
-              <a:buNone/>
-            </a:pPr>
-            <a:r>
-              <a:rPr lang="en-US" sz="650" dirty="0">
-                <a:solidFill>
-                  <a:srgbClr val="12293A"/>
-                </a:solidFill>
-                <a:latin typeface="Poppins" pitchFamily="34" charset="0"/>
-                <a:ea typeface="Poppins" pitchFamily="34" charset="-122"/>
-                <a:cs typeface="Poppins" pitchFamily="34" charset="-120"/>
-              </a:rPr>
-              <a:t>10</a:t>
-            </a:r>
-            <a:endParaRPr lang="en-US" sz="650" dirty="0"/>
-          </a:p>
-        </p:txBody>
-      </p:sp>
-      <p:sp>
-        <p:nvSpPr>
-          <p:cNvPr id="137" name="Shape 135"/>
-          <p:cNvSpPr/>
-          <p:nvPr/>
-        </p:nvSpPr>
-        <p:spPr>
-          <a:xfrm>
-            <a:off x="6126480" y="4091940"/>
-            <a:ext cx="1060704" cy="146304"/>
-          </a:xfrm>
-          <a:prstGeom prst="rect">
-            <a:avLst/>
-          </a:prstGeom>
-          <a:solidFill>
-            <a:srgbClr val="E4F1F4"/>
-          </a:solidFill>
-          <a:ln/>
-        </p:spPr>
-      </p:sp>
-      <p:sp>
-        <p:nvSpPr>
-          <p:cNvPr id="138" name="Text 136"/>
-          <p:cNvSpPr txBox="1"/>
-          <p:nvPr/>
-        </p:nvSpPr>
-        <p:spPr>
-          <a:xfrm>
-            <a:off x="6108192" y="4078224"/>
-            <a:ext cx="1097280" cy="182880"/>
-          </a:xfrm>
-          <a:prstGeom prst="rect">
-            <a:avLst/>
-          </a:prstGeom>
-          <a:noFill/>
-          <a:ln/>
-        </p:spPr>
-        <p:txBody>
-          <a:bodyPr wrap="square" lIns="0" tIns="0" rIns="0" bIns="0" rtlCol="0" anchor="ctr"/>
-          <a:lstStyle/>
-          <a:p>
-            <a:pPr algn="ctr" indent="0" marL="0">
-              <a:buNone/>
-            </a:pPr>
-            <a:r>
-              <a:rPr lang="en-US" sz="650" dirty="0">
-                <a:solidFill>
-                  <a:srgbClr val="12293A"/>
-                </a:solidFill>
-                <a:latin typeface="Poppins" pitchFamily="34" charset="0"/>
-                <a:ea typeface="Poppins" pitchFamily="34" charset="-122"/>
-                <a:cs typeface="Poppins" pitchFamily="34" charset="-120"/>
-              </a:rPr>
-              <a:t>2.6</a:t>
-            </a:r>
-            <a:endParaRPr lang="en-US" sz="650" dirty="0"/>
-          </a:p>
-        </p:txBody>
-      </p:sp>
-      <p:sp>
-        <p:nvSpPr>
-          <p:cNvPr id="139" name="Text 137"/>
-          <p:cNvSpPr txBox="1"/>
-          <p:nvPr/>
-        </p:nvSpPr>
-        <p:spPr>
-          <a:xfrm>
-            <a:off x="612648" y="4261104"/>
-            <a:ext cx="960120" cy="182880"/>
-          </a:xfrm>
-          <a:prstGeom prst="rect">
-            <a:avLst/>
-          </a:prstGeom>
-          <a:noFill/>
-          <a:ln/>
-        </p:spPr>
-        <p:txBody>
-          <a:bodyPr wrap="square" lIns="0" tIns="0" rIns="0" bIns="0" rtlCol="0" anchor="ctr"/>
-          <a:lstStyle/>
-          <a:p>
-            <a:pPr indent="0" marL="0">
-              <a:buNone/>
-            </a:pPr>
-            <a:r>
-              <a:rPr lang="en-US" sz="700" b="1" dirty="0">
-                <a:solidFill>
-                  <a:srgbClr val="12293A"/>
-                </a:solidFill>
-                <a:latin typeface="Poppins" pitchFamily="34" charset="0"/>
-                <a:ea typeface="Poppins" pitchFamily="34" charset="-122"/>
-                <a:cs typeface="Poppins" pitchFamily="34" charset="-120"/>
-              </a:rPr>
-              <a:t>Training</a:t>
-            </a:r>
-            <a:endParaRPr lang="en-US" sz="700" dirty="0"/>
-          </a:p>
-        </p:txBody>
-      </p:sp>
-      <p:sp>
-        <p:nvSpPr>
-          <p:cNvPr id="140" name="Shape 138"/>
-          <p:cNvSpPr/>
-          <p:nvPr/>
-        </p:nvSpPr>
-        <p:spPr>
-          <a:xfrm>
-            <a:off x="1664208" y="4274820"/>
-            <a:ext cx="676656" cy="146304"/>
-          </a:xfrm>
-          <a:prstGeom prst="rect">
-            <a:avLst/>
-          </a:prstGeom>
-          <a:solidFill>
-            <a:srgbClr val="E4F1F4"/>
-          </a:solidFill>
-          <a:ln/>
-        </p:spPr>
-      </p:sp>
-      <p:sp>
-        <p:nvSpPr>
-          <p:cNvPr id="141" name="Text 139"/>
-          <p:cNvSpPr txBox="1"/>
-          <p:nvPr/>
-        </p:nvSpPr>
-        <p:spPr>
-          <a:xfrm>
-            <a:off x="1645920" y="4261104"/>
-            <a:ext cx="713232" cy="182880"/>
-          </a:xfrm>
-          <a:prstGeom prst="rect">
-            <a:avLst/>
-          </a:prstGeom>
-          <a:noFill/>
-          <a:ln/>
-        </p:spPr>
-        <p:txBody>
-          <a:bodyPr wrap="square" lIns="0" tIns="0" rIns="0" bIns="0" rtlCol="0" anchor="ctr"/>
-          <a:lstStyle/>
-          <a:p>
-            <a:pPr algn="ctr" indent="0" marL="0">
-              <a:buNone/>
-            </a:pPr>
-            <a:r>
-              <a:rPr lang="en-US" sz="650" dirty="0">
-                <a:solidFill>
-                  <a:srgbClr val="12293A"/>
-                </a:solidFill>
-                <a:latin typeface="Poppins" pitchFamily="34" charset="0"/>
-                <a:ea typeface="Poppins" pitchFamily="34" charset="-122"/>
-                <a:cs typeface="Poppins" pitchFamily="34" charset="-120"/>
-              </a:rPr>
-              <a:t>26</a:t>
-            </a:r>
-            <a:endParaRPr lang="en-US" sz="650" dirty="0"/>
-          </a:p>
-        </p:txBody>
-      </p:sp>
-      <p:sp>
-        <p:nvSpPr>
-          <p:cNvPr id="142" name="Shape 140"/>
-          <p:cNvSpPr/>
-          <p:nvPr/>
-        </p:nvSpPr>
-        <p:spPr>
-          <a:xfrm>
-            <a:off x="2377440" y="4274820"/>
-            <a:ext cx="676656" cy="146304"/>
-          </a:xfrm>
-          <a:prstGeom prst="rect">
-            <a:avLst/>
-          </a:prstGeom>
-          <a:solidFill>
-            <a:srgbClr val="E4F1F4"/>
-          </a:solidFill>
-          <a:ln/>
-        </p:spPr>
-      </p:sp>
-      <p:sp>
-        <p:nvSpPr>
-          <p:cNvPr id="143" name="Text 141"/>
-          <p:cNvSpPr txBox="1"/>
-          <p:nvPr/>
-        </p:nvSpPr>
-        <p:spPr>
-          <a:xfrm>
-            <a:off x="2359152" y="4261104"/>
-            <a:ext cx="713232" cy="182880"/>
-          </a:xfrm>
-          <a:prstGeom prst="rect">
-            <a:avLst/>
-          </a:prstGeom>
-          <a:noFill/>
-          <a:ln/>
-        </p:spPr>
-        <p:txBody>
-          <a:bodyPr wrap="square" lIns="0" tIns="0" rIns="0" bIns="0" rtlCol="0" anchor="ctr"/>
-          <a:lstStyle/>
-          <a:p>
-            <a:pPr algn="ctr" indent="0" marL="0">
-              <a:buNone/>
-            </a:pPr>
-            <a:r>
-              <a:rPr lang="en-US" sz="650" dirty="0">
-                <a:solidFill>
-                  <a:srgbClr val="12293A"/>
-                </a:solidFill>
-                <a:latin typeface="Poppins" pitchFamily="34" charset="0"/>
-                <a:ea typeface="Poppins" pitchFamily="34" charset="-122"/>
-                <a:cs typeface="Poppins" pitchFamily="34" charset="-120"/>
-              </a:rPr>
-              <a:t>6</a:t>
-            </a:r>
-            <a:endParaRPr lang="en-US" sz="650" dirty="0"/>
-          </a:p>
-        </p:txBody>
-      </p:sp>
-      <p:sp>
-        <p:nvSpPr>
-          <p:cNvPr id="144" name="Shape 142"/>
-          <p:cNvSpPr/>
-          <p:nvPr/>
-        </p:nvSpPr>
-        <p:spPr>
-          <a:xfrm>
-            <a:off x="3090672" y="4274820"/>
-            <a:ext cx="676656" cy="146304"/>
-          </a:xfrm>
-          <a:prstGeom prst="rect">
-            <a:avLst/>
-          </a:prstGeom>
-          <a:solidFill>
-            <a:srgbClr val="E4F1F4"/>
-          </a:solidFill>
-          <a:ln/>
-        </p:spPr>
-      </p:sp>
-      <p:sp>
-        <p:nvSpPr>
-          <p:cNvPr id="145" name="Text 143"/>
-          <p:cNvSpPr txBox="1"/>
-          <p:nvPr/>
-        </p:nvSpPr>
-        <p:spPr>
-          <a:xfrm>
-            <a:off x="3072384" y="4261104"/>
-            <a:ext cx="713232" cy="182880"/>
-          </a:xfrm>
-          <a:prstGeom prst="rect">
-            <a:avLst/>
-          </a:prstGeom>
-          <a:noFill/>
-          <a:ln/>
-        </p:spPr>
-        <p:txBody>
-          <a:bodyPr wrap="square" lIns="0" tIns="0" rIns="0" bIns="0" rtlCol="0" anchor="ctr"/>
-          <a:lstStyle/>
-          <a:p>
-            <a:pPr algn="ctr" indent="0" marL="0">
-              <a:buNone/>
-            </a:pPr>
-            <a:r>
-              <a:rPr lang="en-US" sz="650" dirty="0">
-                <a:solidFill>
-                  <a:srgbClr val="12293A"/>
-                </a:solidFill>
-                <a:latin typeface="Poppins" pitchFamily="34" charset="0"/>
-                <a:ea typeface="Poppins" pitchFamily="34" charset="-122"/>
-                <a:cs typeface="Poppins" pitchFamily="34" charset="-120"/>
-              </a:rPr>
-              <a:t>14</a:t>
-            </a:r>
-            <a:endParaRPr lang="en-US" sz="650" dirty="0"/>
-          </a:p>
-        </p:txBody>
-      </p:sp>
-      <p:sp>
-        <p:nvSpPr>
-          <p:cNvPr id="146" name="Shape 144"/>
-          <p:cNvSpPr/>
-          <p:nvPr/>
-        </p:nvSpPr>
-        <p:spPr>
-          <a:xfrm>
-            <a:off x="3803904" y="4274820"/>
-            <a:ext cx="676656" cy="146304"/>
-          </a:xfrm>
-          <a:prstGeom prst="rect">
-            <a:avLst/>
-          </a:prstGeom>
-          <a:solidFill>
-            <a:srgbClr val="E4F1F4"/>
-          </a:solidFill>
-          <a:ln/>
-        </p:spPr>
-      </p:sp>
-      <p:sp>
-        <p:nvSpPr>
-          <p:cNvPr id="147" name="Text 145"/>
-          <p:cNvSpPr txBox="1"/>
-          <p:nvPr/>
-        </p:nvSpPr>
-        <p:spPr>
-          <a:xfrm>
-            <a:off x="3785616" y="4261104"/>
-            <a:ext cx="713232" cy="182880"/>
-          </a:xfrm>
-          <a:prstGeom prst="rect">
-            <a:avLst/>
-          </a:prstGeom>
-          <a:noFill/>
-          <a:ln/>
-        </p:spPr>
-        <p:txBody>
-          <a:bodyPr wrap="square" lIns="0" tIns="0" rIns="0" bIns="0" rtlCol="0" anchor="ctr"/>
-          <a:lstStyle/>
-          <a:p>
-            <a:pPr algn="ctr" indent="0" marL="0">
-              <a:buNone/>
-            </a:pPr>
-            <a:r>
-              <a:rPr lang="en-US" sz="650" dirty="0">
-                <a:solidFill>
-                  <a:srgbClr val="12293A"/>
-                </a:solidFill>
-                <a:latin typeface="Poppins" pitchFamily="34" charset="0"/>
-                <a:ea typeface="Poppins" pitchFamily="34" charset="-122"/>
-                <a:cs typeface="Poppins" pitchFamily="34" charset="-120"/>
-              </a:rPr>
-              <a:t>14</a:t>
-            </a:r>
-            <a:endParaRPr lang="en-US" sz="650" dirty="0"/>
-          </a:p>
-        </p:txBody>
-      </p:sp>
-      <p:sp>
-        <p:nvSpPr>
-          <p:cNvPr id="148" name="Shape 146"/>
-          <p:cNvSpPr/>
-          <p:nvPr/>
-        </p:nvSpPr>
-        <p:spPr>
-          <a:xfrm>
-            <a:off x="4517136" y="4274820"/>
-            <a:ext cx="676656" cy="146304"/>
-          </a:xfrm>
-          <a:prstGeom prst="rect">
-            <a:avLst/>
-          </a:prstGeom>
-          <a:solidFill>
-            <a:srgbClr val="E4F1F4"/>
-          </a:solidFill>
-          <a:ln/>
-        </p:spPr>
-      </p:sp>
-      <p:sp>
-        <p:nvSpPr>
-          <p:cNvPr id="149" name="Text 147"/>
-          <p:cNvSpPr txBox="1"/>
-          <p:nvPr/>
-        </p:nvSpPr>
-        <p:spPr>
-          <a:xfrm>
-            <a:off x="4498848" y="4261104"/>
-            <a:ext cx="713232" cy="182880"/>
-          </a:xfrm>
-          <a:prstGeom prst="rect">
-            <a:avLst/>
-          </a:prstGeom>
-          <a:noFill/>
-          <a:ln/>
-        </p:spPr>
-        <p:txBody>
-          <a:bodyPr wrap="square" lIns="0" tIns="0" rIns="0" bIns="0" rtlCol="0" anchor="ctr"/>
-          <a:lstStyle/>
-          <a:p>
-            <a:pPr algn="ctr" indent="0" marL="0">
-              <a:buNone/>
-            </a:pPr>
-            <a:r>
-              <a:rPr lang="en-US" sz="650" dirty="0">
-                <a:solidFill>
-                  <a:srgbClr val="12293A"/>
-                </a:solidFill>
-                <a:latin typeface="Poppins" pitchFamily="34" charset="0"/>
-                <a:ea typeface="Poppins" pitchFamily="34" charset="-122"/>
-                <a:cs typeface="Poppins" pitchFamily="34" charset="-120"/>
-              </a:rPr>
-              <a:t>14</a:t>
-            </a:r>
-            <a:endParaRPr lang="en-US" sz="650" dirty="0"/>
-          </a:p>
-        </p:txBody>
-      </p:sp>
-      <p:sp>
-        <p:nvSpPr>
-          <p:cNvPr id="150" name="Shape 148"/>
-          <p:cNvSpPr/>
-          <p:nvPr/>
-        </p:nvSpPr>
-        <p:spPr>
-          <a:xfrm>
-            <a:off x="5230368" y="4274820"/>
-            <a:ext cx="676656" cy="146304"/>
-          </a:xfrm>
-          <a:prstGeom prst="rect">
-            <a:avLst/>
-          </a:prstGeom>
-          <a:solidFill>
-            <a:srgbClr val="E4F1F4"/>
-          </a:solidFill>
-          <a:ln/>
-        </p:spPr>
-      </p:sp>
-      <p:sp>
-        <p:nvSpPr>
-          <p:cNvPr id="151" name="Text 149"/>
-          <p:cNvSpPr txBox="1"/>
-          <p:nvPr/>
-        </p:nvSpPr>
-        <p:spPr>
-          <a:xfrm>
-            <a:off x="5212080" y="4261104"/>
-            <a:ext cx="713232" cy="182880"/>
-          </a:xfrm>
-          <a:prstGeom prst="rect">
-            <a:avLst/>
-          </a:prstGeom>
-          <a:noFill/>
-          <a:ln/>
-        </p:spPr>
-        <p:txBody>
-          <a:bodyPr wrap="square" lIns="0" tIns="0" rIns="0" bIns="0" rtlCol="0" anchor="ctr"/>
-          <a:lstStyle/>
-          <a:p>
-            <a:pPr algn="ctr" indent="0" marL="0">
-              <a:buNone/>
-            </a:pPr>
-            <a:r>
-              <a:rPr lang="en-US" sz="650" dirty="0">
-                <a:solidFill>
-                  <a:srgbClr val="12293A"/>
-                </a:solidFill>
-                <a:latin typeface="Poppins" pitchFamily="34" charset="0"/>
-                <a:ea typeface="Poppins" pitchFamily="34" charset="-122"/>
-                <a:cs typeface="Poppins" pitchFamily="34" charset="-120"/>
-              </a:rPr>
-              <a:t>1</a:t>
-            </a:r>
-            <a:endParaRPr lang="en-US" sz="650" dirty="0"/>
-          </a:p>
-        </p:txBody>
-      </p:sp>
-      <p:sp>
-        <p:nvSpPr>
-          <p:cNvPr id="152" name="Shape 150"/>
-          <p:cNvSpPr/>
-          <p:nvPr/>
-        </p:nvSpPr>
-        <p:spPr>
-          <a:xfrm>
-            <a:off x="6126480" y="4274820"/>
-            <a:ext cx="1060704" cy="146304"/>
-          </a:xfrm>
-          <a:prstGeom prst="rect">
-            <a:avLst/>
-          </a:prstGeom>
-          <a:solidFill>
-            <a:srgbClr val="E4F1F4"/>
-          </a:solidFill>
-          <a:ln/>
-        </p:spPr>
-      </p:sp>
-      <p:sp>
-        <p:nvSpPr>
-          <p:cNvPr id="153" name="Text 151"/>
-          <p:cNvSpPr txBox="1"/>
-          <p:nvPr/>
-        </p:nvSpPr>
-        <p:spPr>
-          <a:xfrm>
-            <a:off x="6108192" y="4261104"/>
-            <a:ext cx="1097280" cy="182880"/>
-          </a:xfrm>
-          <a:prstGeom prst="rect">
-            <a:avLst/>
-          </a:prstGeom>
-          <a:noFill/>
-          <a:ln/>
-        </p:spPr>
-        <p:txBody>
-          <a:bodyPr wrap="square" lIns="0" tIns="0" rIns="0" bIns="0" rtlCol="0" anchor="ctr"/>
-          <a:lstStyle/>
-          <a:p>
-            <a:pPr algn="ctr" indent="0" marL="0">
-              <a:buNone/>
-            </a:pPr>
-            <a:r>
-              <a:rPr lang="en-US" sz="650" dirty="0">
-                <a:solidFill>
-                  <a:srgbClr val="12293A"/>
-                </a:solidFill>
-                <a:latin typeface="Poppins" pitchFamily="34" charset="0"/>
-                <a:ea typeface="Poppins" pitchFamily="34" charset="-122"/>
-                <a:cs typeface="Poppins" pitchFamily="34" charset="-120"/>
-              </a:rPr>
-              <a:t>0.5</a:t>
-            </a:r>
-            <a:endParaRPr lang="en-US" sz="650" dirty="0"/>
-          </a:p>
-        </p:txBody>
-      </p:sp>
-      <p:sp>
-        <p:nvSpPr>
-          <p:cNvPr id="154" name="Text 152"/>
-          <p:cNvSpPr txBox="1"/>
-          <p:nvPr/>
-        </p:nvSpPr>
-        <p:spPr>
-          <a:xfrm>
-            <a:off x="612648" y="4443984"/>
-            <a:ext cx="960120" cy="182880"/>
-          </a:xfrm>
-          <a:prstGeom prst="rect">
-            <a:avLst/>
-          </a:prstGeom>
-          <a:noFill/>
-          <a:ln/>
-        </p:spPr>
-        <p:txBody>
-          <a:bodyPr wrap="square" lIns="0" tIns="0" rIns="0" bIns="0" rtlCol="0" anchor="ctr"/>
-          <a:lstStyle/>
-          <a:p>
-            <a:pPr indent="0" marL="0">
-              <a:buNone/>
-            </a:pPr>
-            <a:r>
-              <a:rPr lang="en-US" sz="700" b="1" dirty="0">
-                <a:solidFill>
-                  <a:srgbClr val="12293A"/>
-                </a:solidFill>
-                <a:latin typeface="Poppins" pitchFamily="34" charset="0"/>
-                <a:ea typeface="Poppins" pitchFamily="34" charset="-122"/>
-                <a:cs typeface="Poppins" pitchFamily="34" charset="-120"/>
-              </a:rPr>
-              <a:t>ValPay</a:t>
-            </a:r>
-            <a:endParaRPr lang="en-US" sz="700" dirty="0"/>
-          </a:p>
-        </p:txBody>
-      </p:sp>
-      <p:sp>
-        <p:nvSpPr>
-          <p:cNvPr id="155" name="Shape 153"/>
-          <p:cNvSpPr/>
-          <p:nvPr/>
-        </p:nvSpPr>
-        <p:spPr>
-          <a:xfrm>
-            <a:off x="1664208" y="4457700"/>
-            <a:ext cx="676656" cy="146304"/>
-          </a:xfrm>
-          <a:prstGeom prst="rect">
-            <a:avLst/>
-          </a:prstGeom>
-          <a:solidFill>
-            <a:srgbClr val="E4F1F4"/>
-          </a:solidFill>
-          <a:ln/>
-        </p:spPr>
-      </p:sp>
-      <p:sp>
-        <p:nvSpPr>
-          <p:cNvPr id="156" name="Text 154"/>
-          <p:cNvSpPr txBox="1"/>
-          <p:nvPr/>
-        </p:nvSpPr>
-        <p:spPr>
-          <a:xfrm>
-            <a:off x="1645920" y="4443984"/>
-            <a:ext cx="713232" cy="182880"/>
-          </a:xfrm>
-          <a:prstGeom prst="rect">
-            <a:avLst/>
-          </a:prstGeom>
-          <a:noFill/>
-          <a:ln/>
-        </p:spPr>
-        <p:txBody>
-          <a:bodyPr wrap="square" lIns="0" tIns="0" rIns="0" bIns="0" rtlCol="0" anchor="ctr"/>
-          <a:lstStyle/>
-          <a:p>
-            <a:pPr algn="ctr" indent="0" marL="0">
-              <a:buNone/>
-            </a:pPr>
-            <a:r>
-              <a:rPr lang="en-US" sz="650" dirty="0">
-                <a:solidFill>
-                  <a:srgbClr val="12293A"/>
-                </a:solidFill>
-                <a:latin typeface="Poppins" pitchFamily="34" charset="0"/>
-                <a:ea typeface="Poppins" pitchFamily="34" charset="-122"/>
-                <a:cs typeface="Poppins" pitchFamily="34" charset="-120"/>
-              </a:rPr>
-              <a:t>7</a:t>
-            </a:r>
-            <a:endParaRPr lang="en-US" sz="650" dirty="0"/>
-          </a:p>
-        </p:txBody>
-      </p:sp>
-      <p:sp>
-        <p:nvSpPr>
-          <p:cNvPr id="157" name="Shape 155"/>
-          <p:cNvSpPr/>
-          <p:nvPr/>
-        </p:nvSpPr>
-        <p:spPr>
-          <a:xfrm>
-            <a:off x="2377440" y="4457700"/>
-            <a:ext cx="676656" cy="146304"/>
-          </a:xfrm>
-          <a:prstGeom prst="rect">
-            <a:avLst/>
-          </a:prstGeom>
-          <a:solidFill>
-            <a:srgbClr val="E4F1F4"/>
-          </a:solidFill>
-          <a:ln/>
-        </p:spPr>
-      </p:sp>
-      <p:sp>
-        <p:nvSpPr>
-          <p:cNvPr id="158" name="Text 156"/>
-          <p:cNvSpPr txBox="1"/>
-          <p:nvPr/>
-        </p:nvSpPr>
-        <p:spPr>
-          <a:xfrm>
-            <a:off x="2359152" y="4443984"/>
-            <a:ext cx="713232" cy="182880"/>
-          </a:xfrm>
-          <a:prstGeom prst="rect">
-            <a:avLst/>
-          </a:prstGeom>
-          <a:noFill/>
-          <a:ln/>
-        </p:spPr>
-        <p:txBody>
-          <a:bodyPr wrap="square" lIns="0" tIns="0" rIns="0" bIns="0" rtlCol="0" anchor="ctr"/>
-          <a:lstStyle/>
-          <a:p>
-            <a:pPr algn="ctr" indent="0" marL="0">
-              <a:buNone/>
-            </a:pPr>
-            <a:r>
-              <a:rPr lang="en-US" sz="650" dirty="0">
-                <a:solidFill>
-                  <a:srgbClr val="12293A"/>
-                </a:solidFill>
-                <a:latin typeface="Poppins" pitchFamily="34" charset="0"/>
-                <a:ea typeface="Poppins" pitchFamily="34" charset="-122"/>
-                <a:cs typeface="Poppins" pitchFamily="34" charset="-120"/>
-              </a:rPr>
-              <a:t>18</a:t>
-            </a:r>
-            <a:endParaRPr lang="en-US" sz="650" dirty="0"/>
-          </a:p>
-        </p:txBody>
-      </p:sp>
-      <p:sp>
-        <p:nvSpPr>
-          <p:cNvPr id="159" name="Shape 157"/>
-          <p:cNvSpPr/>
-          <p:nvPr/>
-        </p:nvSpPr>
-        <p:spPr>
-          <a:xfrm>
-            <a:off x="3090672" y="4457700"/>
-            <a:ext cx="676656" cy="146304"/>
-          </a:xfrm>
-          <a:prstGeom prst="rect">
-            <a:avLst/>
-          </a:prstGeom>
-          <a:solidFill>
-            <a:srgbClr val="E4F1F4"/>
-          </a:solidFill>
-          <a:ln/>
-        </p:spPr>
-      </p:sp>
-      <p:sp>
-        <p:nvSpPr>
-          <p:cNvPr id="160" name="Text 158"/>
-          <p:cNvSpPr txBox="1"/>
-          <p:nvPr/>
-        </p:nvSpPr>
-        <p:spPr>
-          <a:xfrm>
-            <a:off x="3072384" y="4443984"/>
-            <a:ext cx="713232" cy="182880"/>
-          </a:xfrm>
-          <a:prstGeom prst="rect">
-            <a:avLst/>
-          </a:prstGeom>
-          <a:noFill/>
-          <a:ln/>
-        </p:spPr>
-        <p:txBody>
-          <a:bodyPr wrap="square" lIns="0" tIns="0" rIns="0" bIns="0" rtlCol="0" anchor="ctr"/>
-          <a:lstStyle/>
-          <a:p>
-            <a:pPr algn="ctr" indent="0" marL="0">
-              <a:buNone/>
-            </a:pPr>
-            <a:r>
-              <a:rPr lang="en-US" sz="650" dirty="0">
-                <a:solidFill>
-                  <a:srgbClr val="12293A"/>
-                </a:solidFill>
-                <a:latin typeface="Poppins" pitchFamily="34" charset="0"/>
-                <a:ea typeface="Poppins" pitchFamily="34" charset="-122"/>
-                <a:cs typeface="Poppins" pitchFamily="34" charset="-120"/>
-              </a:rPr>
-              <a:t>8</a:t>
-            </a:r>
-            <a:endParaRPr lang="en-US" sz="650" dirty="0"/>
-          </a:p>
-        </p:txBody>
-      </p:sp>
-      <p:sp>
-        <p:nvSpPr>
-          <p:cNvPr id="161" name="Shape 159"/>
-          <p:cNvSpPr/>
-          <p:nvPr/>
-        </p:nvSpPr>
-        <p:spPr>
-          <a:xfrm>
-            <a:off x="3803904" y="4457700"/>
-            <a:ext cx="676656" cy="146304"/>
-          </a:xfrm>
-          <a:prstGeom prst="rect">
-            <a:avLst/>
-          </a:prstGeom>
-          <a:solidFill>
-            <a:srgbClr val="F4F8FA"/>
-          </a:solidFill>
-          <a:ln/>
-        </p:spPr>
-      </p:sp>
-      <p:sp>
-        <p:nvSpPr>
-          <p:cNvPr id="162" name="Text 160"/>
-          <p:cNvSpPr txBox="1"/>
-          <p:nvPr/>
-        </p:nvSpPr>
-        <p:spPr>
-          <a:xfrm>
-            <a:off x="3785616" y="4443984"/>
-            <a:ext cx="713232" cy="182880"/>
-          </a:xfrm>
-          <a:prstGeom prst="rect">
-            <a:avLst/>
-          </a:prstGeom>
-          <a:noFill/>
-          <a:ln/>
-        </p:spPr>
-        <p:txBody>
-          <a:bodyPr wrap="square" lIns="0" tIns="0" rIns="0" bIns="0" rtlCol="0" anchor="ctr"/>
-          <a:lstStyle/>
-          <a:p>
-            <a:pPr algn="ctr" indent="0" marL="0">
-              <a:buNone/>
-            </a:pPr>
-            <a:r>
-              <a:rPr lang="en-US" sz="650" dirty="0">
-                <a:solidFill>
-                  <a:srgbClr val="12293A"/>
-                </a:solidFill>
-                <a:latin typeface="Poppins" pitchFamily="34" charset="0"/>
-                <a:ea typeface="Poppins" pitchFamily="34" charset="-122"/>
-                <a:cs typeface="Poppins" pitchFamily="34" charset="-120"/>
-              </a:rPr>
-              <a:t>0</a:t>
-            </a:r>
-            <a:endParaRPr lang="en-US" sz="650" dirty="0"/>
-          </a:p>
-        </p:txBody>
-      </p:sp>
-      <p:sp>
-        <p:nvSpPr>
-          <p:cNvPr id="163" name="Shape 161"/>
-          <p:cNvSpPr/>
-          <p:nvPr/>
-        </p:nvSpPr>
-        <p:spPr>
-          <a:xfrm>
-            <a:off x="4517136" y="4457700"/>
-            <a:ext cx="676656" cy="146304"/>
-          </a:xfrm>
-          <a:prstGeom prst="rect">
-            <a:avLst/>
-          </a:prstGeom>
-          <a:solidFill>
-            <a:srgbClr val="E4F1F4"/>
-          </a:solidFill>
-          <a:ln/>
-        </p:spPr>
-      </p:sp>
-      <p:sp>
-        <p:nvSpPr>
-          <p:cNvPr id="164" name="Text 162"/>
-          <p:cNvSpPr txBox="1"/>
-          <p:nvPr/>
-        </p:nvSpPr>
-        <p:spPr>
-          <a:xfrm>
-            <a:off x="4498848" y="4443984"/>
-            <a:ext cx="713232" cy="182880"/>
-          </a:xfrm>
-          <a:prstGeom prst="rect">
-            <a:avLst/>
-          </a:prstGeom>
-          <a:noFill/>
-          <a:ln/>
-        </p:spPr>
-        <p:txBody>
-          <a:bodyPr wrap="square" lIns="0" tIns="0" rIns="0" bIns="0" rtlCol="0" anchor="ctr"/>
-          <a:lstStyle/>
-          <a:p>
-            <a:pPr algn="ctr" indent="0" marL="0">
-              <a:buNone/>
-            </a:pPr>
-            <a:r>
-              <a:rPr lang="en-US" sz="650" dirty="0">
-                <a:solidFill>
-                  <a:srgbClr val="12293A"/>
-                </a:solidFill>
-                <a:latin typeface="Poppins" pitchFamily="34" charset="0"/>
-                <a:ea typeface="Poppins" pitchFamily="34" charset="-122"/>
-                <a:cs typeface="Poppins" pitchFamily="34" charset="-120"/>
-              </a:rPr>
-              <a:t>6</a:t>
-            </a:r>
-            <a:endParaRPr lang="en-US" sz="650" dirty="0"/>
-          </a:p>
-        </p:txBody>
-      </p:sp>
-      <p:sp>
-        <p:nvSpPr>
-          <p:cNvPr id="165" name="Shape 163"/>
-          <p:cNvSpPr/>
-          <p:nvPr/>
-        </p:nvSpPr>
-        <p:spPr>
-          <a:xfrm>
-            <a:off x="5230368" y="4457700"/>
-            <a:ext cx="676656" cy="146304"/>
-          </a:xfrm>
-          <a:prstGeom prst="rect">
-            <a:avLst/>
-          </a:prstGeom>
-          <a:solidFill>
-            <a:srgbClr val="F4F8FA"/>
-          </a:solidFill>
-          <a:ln/>
-        </p:spPr>
-      </p:sp>
-      <p:sp>
-        <p:nvSpPr>
-          <p:cNvPr id="166" name="Text 164"/>
-          <p:cNvSpPr txBox="1"/>
-          <p:nvPr/>
-        </p:nvSpPr>
-        <p:spPr>
-          <a:xfrm>
-            <a:off x="5212080" y="4443984"/>
-            <a:ext cx="713232" cy="182880"/>
-          </a:xfrm>
-          <a:prstGeom prst="rect">
-            <a:avLst/>
-          </a:prstGeom>
-          <a:noFill/>
-          <a:ln/>
-        </p:spPr>
-        <p:txBody>
-          <a:bodyPr wrap="square" lIns="0" tIns="0" rIns="0" bIns="0" rtlCol="0" anchor="ctr"/>
-          <a:lstStyle/>
-          <a:p>
-            <a:pPr algn="ctr" indent="0" marL="0">
-              <a:buNone/>
-            </a:pPr>
-            <a:r>
-              <a:rPr lang="en-US" sz="650" dirty="0">
-                <a:solidFill>
-                  <a:srgbClr val="12293A"/>
-                </a:solidFill>
-                <a:latin typeface="Poppins" pitchFamily="34" charset="0"/>
-                <a:ea typeface="Poppins" pitchFamily="34" charset="-122"/>
-                <a:cs typeface="Poppins" pitchFamily="34" charset="-120"/>
-              </a:rPr>
-              <a:t>0</a:t>
-            </a:r>
-            <a:endParaRPr lang="en-US" sz="650" dirty="0"/>
-          </a:p>
-        </p:txBody>
-      </p:sp>
-      <p:sp>
-        <p:nvSpPr>
-          <p:cNvPr id="167" name="Shape 165"/>
-          <p:cNvSpPr/>
-          <p:nvPr/>
-        </p:nvSpPr>
-        <p:spPr>
-          <a:xfrm>
-            <a:off x="6126480" y="4457700"/>
-            <a:ext cx="1060704" cy="146304"/>
-          </a:xfrm>
-          <a:prstGeom prst="rect">
-            <a:avLst/>
-          </a:prstGeom>
-          <a:solidFill>
-            <a:srgbClr val="F4F8FA"/>
-          </a:solidFill>
-          <a:ln/>
-        </p:spPr>
-      </p:sp>
-      <p:sp>
-        <p:nvSpPr>
-          <p:cNvPr id="168" name="Text 166"/>
-          <p:cNvSpPr txBox="1"/>
-          <p:nvPr/>
-        </p:nvSpPr>
-        <p:spPr>
-          <a:xfrm>
-            <a:off x="6108192" y="4443984"/>
-            <a:ext cx="1097280" cy="182880"/>
-          </a:xfrm>
-          <a:prstGeom prst="rect">
-            <a:avLst/>
-          </a:prstGeom>
-          <a:noFill/>
-          <a:ln/>
-        </p:spPr>
-        <p:txBody>
-          <a:bodyPr wrap="square" lIns="0" tIns="0" rIns="0" bIns="0" rtlCol="0" anchor="ctr"/>
-          <a:lstStyle/>
-          <a:p>
-            <a:pPr algn="ctr" indent="0" marL="0">
-              <a:buNone/>
-            </a:pPr>
-            <a:r>
-              <a:rPr lang="en-US" sz="650" dirty="0">
-                <a:solidFill>
-                  <a:srgbClr val="8FA1AC"/>
-                </a:solidFill>
-                <a:latin typeface="Poppins" pitchFamily="34" charset="0"/>
-                <a:ea typeface="Poppins" pitchFamily="34" charset="-122"/>
-                <a:cs typeface="Poppins" pitchFamily="34" charset="-120"/>
-              </a:rPr>
-              <a:t>—</a:t>
-            </a:r>
-            <a:endParaRPr lang="en-US" sz="650" dirty="0"/>
-          </a:p>
-        </p:txBody>
-      </p:sp>
-      <p:sp>
-        <p:nvSpPr>
-          <p:cNvPr id="169" name="Text 167"/>
-          <p:cNvSpPr txBox="1"/>
-          <p:nvPr/>
-        </p:nvSpPr>
-        <p:spPr>
-          <a:xfrm>
-            <a:off x="612648" y="4654296"/>
-            <a:ext cx="960120" cy="292608"/>
-          </a:xfrm>
-          <a:prstGeom prst="rect">
-            <a:avLst/>
-          </a:prstGeom>
-          <a:noFill/>
-          <a:ln/>
-        </p:spPr>
-        <p:txBody>
-          <a:bodyPr wrap="square" lIns="0" tIns="0" rIns="0" bIns="0" rtlCol="0" anchor="ctr"/>
-          <a:lstStyle/>
-          <a:p>
-            <a:pPr indent="0" marL="0">
-              <a:buNone/>
-            </a:pPr>
-            <a:r>
-              <a:rPr lang="en-US" sz="620" b="1" dirty="0">
-                <a:solidFill>
-                  <a:srgbClr val="12293A"/>
-                </a:solidFill>
-                <a:latin typeface="Poppins" pitchFamily="34" charset="0"/>
-                <a:ea typeface="Poppins" pitchFamily="34" charset="-122"/>
-                <a:cs typeface="Poppins" pitchFamily="34" charset="-120"/>
-              </a:rPr>
-              <a:t>UTILISED VS AVAILABLE
-</a:t>
-            </a:r>
-            <a:pPr indent="0" marL="0">
-              <a:buNone/>
-            </a:pPr>
-            <a:r>
-              <a:rPr lang="en-US" sz="550" dirty="0">
-                <a:solidFill>
-                  <a:srgbClr val="8FA1AC"/>
-                </a:solidFill>
-                <a:latin typeface="Poppins" pitchFamily="34" charset="0"/>
-                <a:ea typeface="Poppins" pitchFamily="34" charset="-122"/>
-                <a:cs typeface="Poppins" pitchFamily="34" charset="-120"/>
-              </a:rPr>
-              <a:t>% billed / % used</a:t>
-            </a:r>
-            <a:endParaRPr lang="en-US" sz="620" dirty="0"/>
-          </a:p>
-        </p:txBody>
-      </p:sp>
-      <p:sp>
-        <p:nvSpPr>
-          <p:cNvPr id="170" name="Shape 168"/>
-          <p:cNvSpPr/>
-          <p:nvPr/>
-        </p:nvSpPr>
-        <p:spPr>
-          <a:xfrm>
-            <a:off x="1691640" y="4700016"/>
-            <a:ext cx="621792" cy="77724"/>
-          </a:xfrm>
-          <a:prstGeom prst="rect">
-            <a:avLst/>
-          </a:prstGeom>
-          <a:solidFill>
-            <a:srgbClr val="E2EAEE"/>
-          </a:solidFill>
-          <a:ln/>
-        </p:spPr>
-      </p:sp>
-      <p:sp>
-        <p:nvSpPr>
-          <p:cNvPr id="171" name="Shape 169"/>
-          <p:cNvSpPr/>
-          <p:nvPr/>
-        </p:nvSpPr>
-        <p:spPr>
-          <a:xfrm>
-            <a:off x="1691640" y="4700016"/>
-            <a:ext cx="460126" cy="77724"/>
-          </a:xfrm>
-          <a:prstGeom prst="rect">
-            <a:avLst/>
-          </a:prstGeom>
-          <a:solidFill>
-            <a:srgbClr val="C88A2E"/>
-          </a:solidFill>
-          <a:ln/>
-        </p:spPr>
-      </p:sp>
-      <p:sp>
-        <p:nvSpPr>
-          <p:cNvPr id="172" name="Shape 170"/>
-          <p:cNvSpPr/>
-          <p:nvPr/>
-        </p:nvSpPr>
-        <p:spPr>
-          <a:xfrm>
-            <a:off x="1691640" y="4700016"/>
-            <a:ext cx="105705" cy="77724"/>
-          </a:xfrm>
-          <a:prstGeom prst="rect">
-            <a:avLst/>
-          </a:prstGeom>
-          <a:solidFill>
-            <a:srgbClr val="3D8F5F"/>
-          </a:solidFill>
-          <a:ln/>
-        </p:spPr>
-      </p:sp>
-      <p:sp>
-        <p:nvSpPr>
-          <p:cNvPr id="173" name="Text 171"/>
-          <p:cNvSpPr txBox="1"/>
-          <p:nvPr/>
-        </p:nvSpPr>
-        <p:spPr>
-          <a:xfrm>
-            <a:off x="1645920" y="4791456"/>
-            <a:ext cx="713232" cy="182880"/>
-          </a:xfrm>
-          <a:prstGeom prst="rect">
-            <a:avLst/>
-          </a:prstGeom>
-          <a:noFill/>
-          <a:ln/>
-        </p:spPr>
-        <p:txBody>
-          <a:bodyPr wrap="square" lIns="0" tIns="0" rIns="0" bIns="0" rtlCol="0" anchor="ctr"/>
-          <a:lstStyle/>
-          <a:p>
-            <a:pPr algn="ctr" indent="0" marL="0">
-              <a:buNone/>
-            </a:pPr>
-            <a:r>
-              <a:rPr lang="en-US" sz="630" b="1" dirty="0">
-                <a:solidFill>
-                  <a:srgbClr val="3D8F5F"/>
-                </a:solidFill>
-                <a:latin typeface="Poppins" pitchFamily="34" charset="0"/>
-                <a:ea typeface="Poppins" pitchFamily="34" charset="-122"/>
-                <a:cs typeface="Poppins" pitchFamily="34" charset="-120"/>
-              </a:rPr>
-              <a:t>17%</a:t>
-            </a:r>
-            <a:pPr algn="ctr" indent="0" marL="0">
-              <a:buNone/>
-            </a:pPr>
-            <a:r>
-              <a:rPr lang="en-US" sz="630" b="1" dirty="0">
-                <a:solidFill>
-                  <a:srgbClr val="C88A2E"/>
-                </a:solidFill>
-                <a:latin typeface="Poppins" pitchFamily="34" charset="0"/>
-                <a:ea typeface="Poppins" pitchFamily="34" charset="-122"/>
-                <a:cs typeface="Poppins" pitchFamily="34" charset="-120"/>
-              </a:rPr>
-              <a:t> / 74%</a:t>
-            </a:r>
-            <a:endParaRPr lang="en-US" sz="630" dirty="0"/>
-          </a:p>
-        </p:txBody>
-      </p:sp>
-      <p:sp>
-        <p:nvSpPr>
-          <p:cNvPr id="174" name="Shape 172"/>
-          <p:cNvSpPr/>
-          <p:nvPr/>
-        </p:nvSpPr>
-        <p:spPr>
-          <a:xfrm>
-            <a:off x="2404872" y="4700016"/>
-            <a:ext cx="621792" cy="77724"/>
-          </a:xfrm>
-          <a:prstGeom prst="rect">
-            <a:avLst/>
-          </a:prstGeom>
-          <a:solidFill>
-            <a:srgbClr val="E2EAEE"/>
-          </a:solidFill>
-          <a:ln/>
-        </p:spPr>
-      </p:sp>
-      <p:sp>
-        <p:nvSpPr>
-          <p:cNvPr id="175" name="Shape 173"/>
-          <p:cNvSpPr/>
-          <p:nvPr/>
-        </p:nvSpPr>
-        <p:spPr>
-          <a:xfrm>
-            <a:off x="2404872" y="4700016"/>
-            <a:ext cx="404165" cy="77724"/>
-          </a:xfrm>
-          <a:prstGeom prst="rect">
-            <a:avLst/>
-          </a:prstGeom>
-          <a:solidFill>
-            <a:srgbClr val="C88A2E"/>
-          </a:solidFill>
-          <a:ln/>
-        </p:spPr>
-      </p:sp>
-      <p:sp>
-        <p:nvSpPr>
-          <p:cNvPr id="176" name="Shape 174"/>
-          <p:cNvSpPr/>
-          <p:nvPr/>
-        </p:nvSpPr>
-        <p:spPr>
-          <a:xfrm>
-            <a:off x="2404872" y="4700016"/>
-            <a:ext cx="167884" cy="77724"/>
-          </a:xfrm>
-          <a:prstGeom prst="rect">
-            <a:avLst/>
-          </a:prstGeom>
-          <a:solidFill>
-            <a:srgbClr val="3D8F5F"/>
-          </a:solidFill>
-          <a:ln/>
-        </p:spPr>
-      </p:sp>
-      <p:sp>
-        <p:nvSpPr>
-          <p:cNvPr id="177" name="Text 175"/>
-          <p:cNvSpPr txBox="1"/>
-          <p:nvPr/>
-        </p:nvSpPr>
-        <p:spPr>
-          <a:xfrm>
-            <a:off x="2359152" y="4791456"/>
-            <a:ext cx="713232" cy="182880"/>
-          </a:xfrm>
-          <a:prstGeom prst="rect">
-            <a:avLst/>
-          </a:prstGeom>
-          <a:noFill/>
-          <a:ln/>
-        </p:spPr>
-        <p:txBody>
-          <a:bodyPr wrap="square" lIns="0" tIns="0" rIns="0" bIns="0" rtlCol="0" anchor="ctr"/>
-          <a:lstStyle/>
-          <a:p>
-            <a:pPr algn="ctr" indent="0" marL="0">
-              <a:buNone/>
-            </a:pPr>
-            <a:r>
-              <a:rPr lang="en-US" sz="630" b="1" dirty="0">
-                <a:solidFill>
-                  <a:srgbClr val="3D8F5F"/>
-                </a:solidFill>
-                <a:latin typeface="Poppins" pitchFamily="34" charset="0"/>
-                <a:ea typeface="Poppins" pitchFamily="34" charset="-122"/>
-                <a:cs typeface="Poppins" pitchFamily="34" charset="-120"/>
-              </a:rPr>
-              <a:t>27%</a:t>
-            </a:r>
-            <a:pPr algn="ctr" indent="0" marL="0">
-              <a:buNone/>
-            </a:pPr>
-            <a:r>
-              <a:rPr lang="en-US" sz="630" b="1" dirty="0">
-                <a:solidFill>
-                  <a:srgbClr val="C88A2E"/>
-                </a:solidFill>
-                <a:latin typeface="Poppins" pitchFamily="34" charset="0"/>
-                <a:ea typeface="Poppins" pitchFamily="34" charset="-122"/>
-                <a:cs typeface="Poppins" pitchFamily="34" charset="-120"/>
-              </a:rPr>
-              <a:t> / 65%</a:t>
-            </a:r>
-            <a:endParaRPr lang="en-US" sz="630" dirty="0"/>
-          </a:p>
-        </p:txBody>
-      </p:sp>
-      <p:sp>
-        <p:nvSpPr>
-          <p:cNvPr id="178" name="Shape 176"/>
-          <p:cNvSpPr/>
-          <p:nvPr/>
-        </p:nvSpPr>
-        <p:spPr>
-          <a:xfrm>
-            <a:off x="3118104" y="4700016"/>
-            <a:ext cx="621792" cy="77724"/>
-          </a:xfrm>
-          <a:prstGeom prst="rect">
-            <a:avLst/>
-          </a:prstGeom>
-          <a:solidFill>
-            <a:srgbClr val="E2EAEE"/>
-          </a:solidFill>
-          <a:ln/>
-        </p:spPr>
-      </p:sp>
-      <p:sp>
-        <p:nvSpPr>
-          <p:cNvPr id="179" name="Shape 177"/>
-          <p:cNvSpPr/>
-          <p:nvPr/>
-        </p:nvSpPr>
-        <p:spPr>
-          <a:xfrm>
-            <a:off x="3118104" y="4700016"/>
-            <a:ext cx="516087" cy="77724"/>
-          </a:xfrm>
-          <a:prstGeom prst="rect">
-            <a:avLst/>
-          </a:prstGeom>
-          <a:solidFill>
-            <a:srgbClr val="C88A2E"/>
-          </a:solidFill>
-          <a:ln/>
-        </p:spPr>
-      </p:sp>
-      <p:sp>
-        <p:nvSpPr>
-          <p:cNvPr id="180" name="Shape 178"/>
-          <p:cNvSpPr/>
-          <p:nvPr/>
-        </p:nvSpPr>
-        <p:spPr>
-          <a:xfrm>
-            <a:off x="3118104" y="4700016"/>
-            <a:ext cx="267371" cy="77724"/>
-          </a:xfrm>
-          <a:prstGeom prst="rect">
-            <a:avLst/>
-          </a:prstGeom>
-          <a:solidFill>
-            <a:srgbClr val="3D8F5F"/>
-          </a:solidFill>
-          <a:ln/>
-        </p:spPr>
-      </p:sp>
-      <p:sp>
-        <p:nvSpPr>
-          <p:cNvPr id="181" name="Text 179"/>
-          <p:cNvSpPr txBox="1"/>
-          <p:nvPr/>
-        </p:nvSpPr>
-        <p:spPr>
-          <a:xfrm>
-            <a:off x="3072384" y="4791456"/>
-            <a:ext cx="713232" cy="182880"/>
-          </a:xfrm>
-          <a:prstGeom prst="rect">
-            <a:avLst/>
-          </a:prstGeom>
-          <a:noFill/>
-          <a:ln/>
-        </p:spPr>
-        <p:txBody>
-          <a:bodyPr wrap="square" lIns="0" tIns="0" rIns="0" bIns="0" rtlCol="0" anchor="ctr"/>
-          <a:lstStyle/>
-          <a:p>
-            <a:pPr algn="ctr" indent="0" marL="0">
-              <a:buNone/>
-            </a:pPr>
-            <a:r>
-              <a:rPr lang="en-US" sz="630" b="1" dirty="0">
-                <a:solidFill>
-                  <a:srgbClr val="3D8F5F"/>
-                </a:solidFill>
-                <a:latin typeface="Poppins" pitchFamily="34" charset="0"/>
-                <a:ea typeface="Poppins" pitchFamily="34" charset="-122"/>
-                <a:cs typeface="Poppins" pitchFamily="34" charset="-120"/>
-              </a:rPr>
-              <a:t>43%</a:t>
-            </a:r>
-            <a:pPr algn="ctr" indent="0" marL="0">
-              <a:buNone/>
-            </a:pPr>
-            <a:r>
-              <a:rPr lang="en-US" sz="630" b="1" dirty="0">
-                <a:solidFill>
-                  <a:srgbClr val="C88A2E"/>
-                </a:solidFill>
-                <a:latin typeface="Poppins" pitchFamily="34" charset="0"/>
-                <a:ea typeface="Poppins" pitchFamily="34" charset="-122"/>
-                <a:cs typeface="Poppins" pitchFamily="34" charset="-120"/>
-              </a:rPr>
-              <a:t> / 83%</a:t>
-            </a:r>
-            <a:endParaRPr lang="en-US" sz="630" dirty="0"/>
-          </a:p>
-        </p:txBody>
-      </p:sp>
-      <p:sp>
-        <p:nvSpPr>
-          <p:cNvPr id="182" name="Shape 180"/>
-          <p:cNvSpPr/>
-          <p:nvPr/>
-        </p:nvSpPr>
-        <p:spPr>
-          <a:xfrm>
-            <a:off x="3831336" y="4700016"/>
-            <a:ext cx="621792" cy="77724"/>
-          </a:xfrm>
-          <a:prstGeom prst="rect">
-            <a:avLst/>
-          </a:prstGeom>
-          <a:solidFill>
-            <a:srgbClr val="E2EAEE"/>
-          </a:solidFill>
-          <a:ln/>
-        </p:spPr>
-      </p:sp>
-      <p:sp>
-        <p:nvSpPr>
-          <p:cNvPr id="183" name="Shape 181"/>
-          <p:cNvSpPr/>
-          <p:nvPr/>
-        </p:nvSpPr>
-        <p:spPr>
-          <a:xfrm>
-            <a:off x="3831336" y="4700016"/>
-            <a:ext cx="379293" cy="77724"/>
-          </a:xfrm>
-          <a:prstGeom prst="rect">
-            <a:avLst/>
-          </a:prstGeom>
-          <a:solidFill>
-            <a:srgbClr val="C88A2E"/>
-          </a:solidFill>
-          <a:ln/>
-        </p:spPr>
-      </p:sp>
-      <p:sp>
-        <p:nvSpPr>
-          <p:cNvPr id="184" name="Shape 182"/>
-          <p:cNvSpPr/>
-          <p:nvPr/>
-        </p:nvSpPr>
-        <p:spPr>
-          <a:xfrm>
-            <a:off x="3831336" y="4700016"/>
-            <a:ext cx="198973" cy="77724"/>
-          </a:xfrm>
-          <a:prstGeom prst="rect">
-            <a:avLst/>
-          </a:prstGeom>
-          <a:solidFill>
-            <a:srgbClr val="3D8F5F"/>
-          </a:solidFill>
-          <a:ln/>
-        </p:spPr>
-      </p:sp>
-      <p:sp>
-        <p:nvSpPr>
-          <p:cNvPr id="185" name="Text 183"/>
-          <p:cNvSpPr txBox="1"/>
-          <p:nvPr/>
-        </p:nvSpPr>
-        <p:spPr>
-          <a:xfrm>
-            <a:off x="3785616" y="4791456"/>
-            <a:ext cx="713232" cy="182880"/>
-          </a:xfrm>
-          <a:prstGeom prst="rect">
-            <a:avLst/>
-          </a:prstGeom>
-          <a:noFill/>
-          <a:ln/>
-        </p:spPr>
-        <p:txBody>
-          <a:bodyPr wrap="square" lIns="0" tIns="0" rIns="0" bIns="0" rtlCol="0" anchor="ctr"/>
-          <a:lstStyle/>
-          <a:p>
-            <a:pPr algn="ctr" indent="0" marL="0">
-              <a:buNone/>
-            </a:pPr>
-            <a:r>
-              <a:rPr lang="en-US" sz="630" b="1" dirty="0">
-                <a:solidFill>
-                  <a:srgbClr val="3D8F5F"/>
-                </a:solidFill>
-                <a:latin typeface="Poppins" pitchFamily="34" charset="0"/>
-                <a:ea typeface="Poppins" pitchFamily="34" charset="-122"/>
-                <a:cs typeface="Poppins" pitchFamily="34" charset="-120"/>
-              </a:rPr>
-              <a:t>32%</a:t>
-            </a:r>
-            <a:pPr algn="ctr" indent="0" marL="0">
-              <a:buNone/>
-            </a:pPr>
-            <a:r>
-              <a:rPr lang="en-US" sz="630" b="1" dirty="0">
-                <a:solidFill>
-                  <a:srgbClr val="C88A2E"/>
-                </a:solidFill>
-                <a:latin typeface="Poppins" pitchFamily="34" charset="0"/>
-                <a:ea typeface="Poppins" pitchFamily="34" charset="-122"/>
-                <a:cs typeface="Poppins" pitchFamily="34" charset="-120"/>
-              </a:rPr>
-              <a:t> / 61%</a:t>
-            </a:r>
-            <a:endParaRPr lang="en-US" sz="630" dirty="0"/>
-          </a:p>
-        </p:txBody>
-      </p:sp>
-      <p:sp>
-        <p:nvSpPr>
-          <p:cNvPr id="186" name="Shape 184"/>
-          <p:cNvSpPr/>
-          <p:nvPr/>
-        </p:nvSpPr>
-        <p:spPr>
-          <a:xfrm>
-            <a:off x="4544568" y="4700016"/>
-            <a:ext cx="621792" cy="77724"/>
-          </a:xfrm>
-          <a:prstGeom prst="rect">
-            <a:avLst/>
-          </a:prstGeom>
-          <a:solidFill>
-            <a:srgbClr val="E2EAEE"/>
-          </a:solidFill>
-          <a:ln/>
-        </p:spPr>
-      </p:sp>
-      <p:sp>
-        <p:nvSpPr>
-          <p:cNvPr id="187" name="Shape 185"/>
-          <p:cNvSpPr/>
-          <p:nvPr/>
-        </p:nvSpPr>
-        <p:spPr>
-          <a:xfrm>
-            <a:off x="4544568" y="4700016"/>
-            <a:ext cx="391729" cy="77724"/>
-          </a:xfrm>
-          <a:prstGeom prst="rect">
-            <a:avLst/>
-          </a:prstGeom>
-          <a:solidFill>
-            <a:srgbClr val="C88A2E"/>
-          </a:solidFill>
-          <a:ln/>
-        </p:spPr>
-      </p:sp>
-      <p:sp>
-        <p:nvSpPr>
-          <p:cNvPr id="188" name="Shape 186"/>
-          <p:cNvSpPr/>
-          <p:nvPr/>
-        </p:nvSpPr>
-        <p:spPr>
-          <a:xfrm>
-            <a:off x="4544568" y="4700016"/>
-            <a:ext cx="167884" cy="77724"/>
-          </a:xfrm>
-          <a:prstGeom prst="rect">
-            <a:avLst/>
-          </a:prstGeom>
-          <a:solidFill>
-            <a:srgbClr val="3D8F5F"/>
-          </a:solidFill>
-          <a:ln/>
-        </p:spPr>
-      </p:sp>
-      <p:sp>
-        <p:nvSpPr>
-          <p:cNvPr id="189" name="Text 187"/>
-          <p:cNvSpPr txBox="1"/>
-          <p:nvPr/>
-        </p:nvSpPr>
-        <p:spPr>
-          <a:xfrm>
-            <a:off x="4498848" y="4791456"/>
-            <a:ext cx="713232" cy="182880"/>
-          </a:xfrm>
-          <a:prstGeom prst="rect">
-            <a:avLst/>
-          </a:prstGeom>
-          <a:noFill/>
-          <a:ln/>
-        </p:spPr>
-        <p:txBody>
-          <a:bodyPr wrap="square" lIns="0" tIns="0" rIns="0" bIns="0" rtlCol="0" anchor="ctr"/>
-          <a:lstStyle/>
-          <a:p>
-            <a:pPr algn="ctr" indent="0" marL="0">
-              <a:buNone/>
-            </a:pPr>
-            <a:r>
-              <a:rPr lang="en-US" sz="630" b="1" dirty="0">
-                <a:solidFill>
-                  <a:srgbClr val="3D8F5F"/>
-                </a:solidFill>
-                <a:latin typeface="Poppins" pitchFamily="34" charset="0"/>
-                <a:ea typeface="Poppins" pitchFamily="34" charset="-122"/>
-                <a:cs typeface="Poppins" pitchFamily="34" charset="-120"/>
-              </a:rPr>
-              <a:t>27%</a:t>
-            </a:r>
-            <a:pPr algn="ctr" indent="0" marL="0">
-              <a:buNone/>
-            </a:pPr>
-            <a:r>
-              <a:rPr lang="en-US" sz="630" b="1" dirty="0">
-                <a:solidFill>
-                  <a:srgbClr val="C88A2E"/>
-                </a:solidFill>
-                <a:latin typeface="Poppins" pitchFamily="34" charset="0"/>
-                <a:ea typeface="Poppins" pitchFamily="34" charset="-122"/>
-                <a:cs typeface="Poppins" pitchFamily="34" charset="-120"/>
-              </a:rPr>
-              <a:t> / 63%</a:t>
-            </a:r>
-            <a:endParaRPr lang="en-US" sz="630" dirty="0"/>
-          </a:p>
-        </p:txBody>
-      </p:sp>
-      <p:sp>
-        <p:nvSpPr>
-          <p:cNvPr id="190" name="Shape 188"/>
-          <p:cNvSpPr/>
-          <p:nvPr/>
-        </p:nvSpPr>
-        <p:spPr>
-          <a:xfrm>
-            <a:off x="5257800" y="4700016"/>
-            <a:ext cx="621792" cy="77724"/>
-          </a:xfrm>
-          <a:prstGeom prst="rect">
-            <a:avLst/>
-          </a:prstGeom>
-          <a:solidFill>
-            <a:srgbClr val="E2EAEE"/>
-          </a:solidFill>
-          <a:ln/>
-        </p:spPr>
-      </p:sp>
-      <p:sp>
-        <p:nvSpPr>
-          <p:cNvPr id="191" name="Shape 189"/>
-          <p:cNvSpPr/>
-          <p:nvPr/>
-        </p:nvSpPr>
-        <p:spPr>
-          <a:xfrm>
-            <a:off x="5257800" y="4700016"/>
-            <a:ext cx="429036" cy="77724"/>
-          </a:xfrm>
-          <a:prstGeom prst="rect">
-            <a:avLst/>
-          </a:prstGeom>
-          <a:solidFill>
-            <a:srgbClr val="C88A2E"/>
-          </a:solidFill>
-          <a:ln/>
-        </p:spPr>
-      </p:sp>
-      <p:sp>
-        <p:nvSpPr>
-          <p:cNvPr id="192" name="Shape 190"/>
-          <p:cNvSpPr/>
-          <p:nvPr/>
-        </p:nvSpPr>
-        <p:spPr>
-          <a:xfrm>
-            <a:off x="5257800" y="4700016"/>
-            <a:ext cx="198973" cy="77724"/>
-          </a:xfrm>
-          <a:prstGeom prst="rect">
-            <a:avLst/>
-          </a:prstGeom>
-          <a:solidFill>
-            <a:srgbClr val="3D8F5F"/>
-          </a:solidFill>
-          <a:ln/>
-        </p:spPr>
-      </p:sp>
-      <p:sp>
-        <p:nvSpPr>
-          <p:cNvPr id="193" name="Text 191"/>
-          <p:cNvSpPr txBox="1"/>
-          <p:nvPr/>
-        </p:nvSpPr>
-        <p:spPr>
-          <a:xfrm>
-            <a:off x="5212080" y="4791456"/>
-            <a:ext cx="713232" cy="182880"/>
-          </a:xfrm>
-          <a:prstGeom prst="rect">
-            <a:avLst/>
-          </a:prstGeom>
-          <a:noFill/>
-          <a:ln/>
-        </p:spPr>
-        <p:txBody>
-          <a:bodyPr wrap="square" lIns="0" tIns="0" rIns="0" bIns="0" rtlCol="0" anchor="ctr"/>
-          <a:lstStyle/>
-          <a:p>
-            <a:pPr algn="ctr" indent="0" marL="0">
-              <a:buNone/>
-            </a:pPr>
-            <a:r>
-              <a:rPr lang="en-US" sz="630" b="1" dirty="0">
-                <a:solidFill>
-                  <a:srgbClr val="3D8F5F"/>
-                </a:solidFill>
-                <a:latin typeface="Poppins" pitchFamily="34" charset="0"/>
-                <a:ea typeface="Poppins" pitchFamily="34" charset="-122"/>
-                <a:cs typeface="Poppins" pitchFamily="34" charset="-120"/>
-              </a:rPr>
-              <a:t>32%</a:t>
-            </a:r>
-            <a:pPr algn="ctr" indent="0" marL="0">
-              <a:buNone/>
-            </a:pPr>
-            <a:r>
-              <a:rPr lang="en-US" sz="630" b="1" dirty="0">
-                <a:solidFill>
-                  <a:srgbClr val="C88A2E"/>
-                </a:solidFill>
-                <a:latin typeface="Poppins" pitchFamily="34" charset="0"/>
-                <a:ea typeface="Poppins" pitchFamily="34" charset="-122"/>
-                <a:cs typeface="Poppins" pitchFamily="34" charset="-120"/>
-              </a:rPr>
-              <a:t> / 69%</a:t>
-            </a:r>
-            <a:endParaRPr lang="en-US" sz="630" dirty="0"/>
-          </a:p>
-        </p:txBody>
-      </p:sp>
-      <p:sp>
-        <p:nvSpPr>
-          <p:cNvPr id="194" name="Shape 192"/>
-          <p:cNvSpPr/>
-          <p:nvPr/>
-        </p:nvSpPr>
-        <p:spPr>
-          <a:xfrm>
-            <a:off x="6153912" y="4700016"/>
-            <a:ext cx="1005840" cy="77724"/>
-          </a:xfrm>
-          <a:prstGeom prst="rect">
-            <a:avLst/>
-          </a:prstGeom>
-          <a:solidFill>
-            <a:srgbClr val="E2EAEE"/>
-          </a:solidFill>
-          <a:ln/>
-        </p:spPr>
-      </p:sp>
-      <p:sp>
-        <p:nvSpPr>
-          <p:cNvPr id="195" name="Shape 193"/>
-          <p:cNvSpPr/>
-          <p:nvPr/>
-        </p:nvSpPr>
-        <p:spPr>
-          <a:xfrm>
-            <a:off x="6153912" y="4700016"/>
-            <a:ext cx="130759" cy="77724"/>
-          </a:xfrm>
-          <a:prstGeom prst="rect">
-            <a:avLst/>
-          </a:prstGeom>
-          <a:solidFill>
-            <a:srgbClr val="B4552D"/>
-          </a:solidFill>
-          <a:ln/>
-        </p:spPr>
-      </p:sp>
-      <p:sp>
-        <p:nvSpPr>
-          <p:cNvPr id="196" name="Text 194"/>
-          <p:cNvSpPr txBox="1"/>
-          <p:nvPr/>
-        </p:nvSpPr>
-        <p:spPr>
-          <a:xfrm>
-            <a:off x="6108192" y="4791456"/>
-            <a:ext cx="1097280" cy="182880"/>
-          </a:xfrm>
-          <a:prstGeom prst="rect">
-            <a:avLst/>
-          </a:prstGeom>
-          <a:noFill/>
-          <a:ln/>
-        </p:spPr>
-        <p:txBody>
-          <a:bodyPr wrap="square" lIns="0" tIns="0" rIns="0" bIns="0" rtlCol="0" anchor="ctr"/>
-          <a:lstStyle/>
-          <a:p>
-            <a:pPr algn="ctr" indent="0" marL="0">
-              <a:buNone/>
-            </a:pPr>
-            <a:r>
-              <a:rPr lang="en-US" sz="630" b="1" dirty="0">
-                <a:solidFill>
-                  <a:srgbClr val="8FA1AC"/>
-                </a:solidFill>
-                <a:latin typeface="Poppins" pitchFamily="34" charset="0"/>
-                <a:ea typeface="Poppins" pitchFamily="34" charset="-122"/>
-                <a:cs typeface="Poppins" pitchFamily="34" charset="-120"/>
-              </a:rPr>
-              <a:t>— </a:t>
-            </a:r>
-            <a:pPr algn="ctr" indent="0" marL="0">
-              <a:buNone/>
-            </a:pPr>
-            <a:r>
-              <a:rPr lang="en-US" sz="630" b="1" dirty="0">
-                <a:solidFill>
-                  <a:srgbClr val="B4552D"/>
-                </a:solidFill>
-                <a:latin typeface="Poppins" pitchFamily="34" charset="0"/>
-                <a:ea typeface="Poppins" pitchFamily="34" charset="-122"/>
-                <a:cs typeface="Poppins" pitchFamily="34" charset="-120"/>
-              </a:rPr>
-              <a:t>/ 13%</a:t>
-            </a:r>
-            <a:endParaRPr lang="en-US" sz="630" dirty="0"/>
-          </a:p>
-        </p:txBody>
-      </p:sp>
-      <p:sp>
-        <p:nvSpPr>
-          <p:cNvPr id="197" name="Shape 195"/>
-          <p:cNvSpPr/>
-          <p:nvPr/>
-        </p:nvSpPr>
-        <p:spPr>
-          <a:xfrm>
-            <a:off x="6016752" y="2670048"/>
-            <a:ext cx="20117" cy="2304288"/>
-          </a:xfrm>
-          <a:prstGeom prst="rect">
-            <a:avLst/>
-          </a:prstGeom>
-          <a:solidFill>
-            <a:srgbClr val="B4552D"/>
-          </a:solidFill>
-          <a:ln/>
-        </p:spPr>
-      </p:sp>
-      <p:sp>
-        <p:nvSpPr>
-          <p:cNvPr id="198" name="Shape 196"/>
-          <p:cNvSpPr/>
-          <p:nvPr/>
-        </p:nvSpPr>
-        <p:spPr>
-          <a:xfrm>
-            <a:off x="5596128" y="2450592"/>
-            <a:ext cx="868680" cy="182880"/>
+            <a:off x="7178040" y="4224528"/>
+            <a:ext cx="4599432" cy="1737360"/>
           </a:xfrm>
           <a:prstGeom prst="roundRect">
             <a:avLst>
-              <a:gd name="adj" fmla="val 50000"/>
-            </a:avLst>
-          </a:prstGeom>
-          <a:solidFill>
-            <a:srgbClr val="B4552D"/>
-          </a:solidFill>
-          <a:ln/>
-        </p:spPr>
-      </p:sp>
-      <p:sp>
-        <p:nvSpPr>
-          <p:cNvPr id="199" name="Text 197"/>
-          <p:cNvSpPr txBox="1"/>
-          <p:nvPr/>
-        </p:nvSpPr>
-        <p:spPr>
-          <a:xfrm>
-            <a:off x="5596128" y="2450592"/>
-            <a:ext cx="868680" cy="182880"/>
-          </a:xfrm>
-          <a:prstGeom prst="rect">
-            <a:avLst/>
-          </a:prstGeom>
-          <a:noFill/>
-          <a:ln/>
-        </p:spPr>
-        <p:txBody>
-          <a:bodyPr wrap="square" lIns="0" tIns="0" rIns="0" bIns="0" rtlCol="0" anchor="ctr"/>
-          <a:lstStyle/>
-          <a:p>
-            <a:pPr algn="ctr" indent="0" marL="0">
-              <a:buNone/>
-            </a:pPr>
-            <a:r>
-              <a:rPr lang="en-US" sz="580" b="1" dirty="0">
-                <a:solidFill>
-                  <a:srgbClr val="FFFFFF"/>
-                </a:solidFill>
-                <a:latin typeface="Poppins" pitchFamily="34" charset="0"/>
-                <a:ea typeface="Poppins" pitchFamily="34" charset="-122"/>
-                <a:cs typeface="Poppins" pitchFamily="34" charset="-120"/>
-              </a:rPr>
-              <a:t>CUTOVER 8 SEP</a:t>
-            </a:r>
-            <a:endParaRPr lang="en-US" sz="580" dirty="0"/>
-          </a:p>
-        </p:txBody>
-      </p:sp>
-      <p:sp>
-        <p:nvSpPr>
-          <p:cNvPr id="200" name="Text 198"/>
-          <p:cNvSpPr txBox="1"/>
-          <p:nvPr/>
-        </p:nvSpPr>
-        <p:spPr>
-          <a:xfrm>
-            <a:off x="612648" y="5010912"/>
-            <a:ext cx="7086600" cy="201168"/>
-          </a:xfrm>
-          <a:prstGeom prst="rect">
-            <a:avLst/>
-          </a:prstGeom>
-          <a:noFill/>
-          <a:ln/>
-        </p:spPr>
-        <p:txBody>
-          <a:bodyPr wrap="square" lIns="0" tIns="0" rIns="0" bIns="0" rtlCol="0" anchor="t"/>
-          <a:lstStyle/>
-          <a:p>
-            <a:pPr indent="0" marL="0">
-              <a:buNone/>
-            </a:pPr>
-            <a:r>
-              <a:rPr lang="en-US" sz="550" dirty="0">
-                <a:solidFill>
-                  <a:srgbClr val="8FA1AC"/>
-                </a:solidFill>
-                <a:latin typeface="Poppins" pitchFamily="34" charset="0"/>
-                <a:ea typeface="Poppins" pitchFamily="34" charset="-122"/>
-                <a:cs typeface="Poppins" pitchFamily="34" charset="-120"/>
-              </a:rPr>
-              <a:t>Creatio months frozen at the final 4 Sep extract (Sep* is a part month) · HubSpot column = hours on the PS record vs 38h/week × 8-person roster; % billed not yet separable</a:t>
-            </a:r>
-            <a:endParaRPr lang="en-US" sz="550" dirty="0"/>
-          </a:p>
-        </p:txBody>
-      </p:sp>
-      <p:sp>
-        <p:nvSpPr>
-          <p:cNvPr id="201" name="Shape 199"/>
-          <p:cNvSpPr/>
-          <p:nvPr/>
-        </p:nvSpPr>
-        <p:spPr>
-          <a:xfrm>
-            <a:off x="8092440" y="2395728"/>
-            <a:ext cx="3685032" cy="1417320"/>
-          </a:xfrm>
-          <a:prstGeom prst="roundRect">
-            <a:avLst>
-              <a:gd name="adj" fmla="val 4516"/>
+              <a:gd name="adj" fmla="val 3684"/>
             </a:avLst>
           </a:prstGeom>
           <a:solidFill>
@@ -52042,30 +48747,30 @@
       </p:sp>
       <p:sp>
         <p:nvSpPr>
-          <p:cNvPr id="202" name="Text 200"/>
-          <p:cNvSpPr txBox="1"/>
-          <p:nvPr/>
-        </p:nvSpPr>
-        <p:spPr>
-          <a:xfrm>
-            <a:off x="8275320" y="2478024"/>
-            <a:ext cx="3319272" cy="201168"/>
-          </a:xfrm>
-          <a:prstGeom prst="rect">
-            <a:avLst/>
-          </a:prstGeom>
-          <a:noFill/>
-          <a:ln/>
-        </p:spPr>
-        <p:txBody>
-          <a:bodyPr wrap="square" lIns="0" tIns="0" rIns="0" bIns="0" rtlCol="0" anchor="ctr"/>
-          <a:lstStyle/>
-          <a:p>
-            <a:pPr indent="0" marL="0">
-              <a:buNone/>
-            </a:pPr>
-            <a:r>
-              <a:rPr lang="en-US" sz="950" b="1" dirty="0">
+          <p:cNvPr id="87" name="Text 85"/>
+          <p:cNvSpPr txBox="1"/>
+          <p:nvPr/>
+        </p:nvSpPr>
+        <p:spPr>
+          <a:xfrm>
+            <a:off x="7379208" y="4334256"/>
+            <a:ext cx="4233672" cy="274320"/>
+          </a:xfrm>
+          <a:prstGeom prst="rect">
+            <a:avLst/>
+          </a:prstGeom>
+          <a:noFill/>
+          <a:ln/>
+        </p:spPr>
+        <p:txBody>
+          <a:bodyPr wrap="square" lIns="0" tIns="0" rIns="0" bIns="0" rtlCol="0" anchor="ctr"/>
+          <a:lstStyle/>
+          <a:p>
+            <a:pPr indent="0" marL="0">
+              <a:buNone/>
+            </a:pPr>
+            <a:r>
+              <a:rPr lang="en-US" sz="1200" b="1" dirty="0">
                 <a:solidFill>
                   <a:srgbClr val="2C8394"/>
                 </a:solidFill>
@@ -52073,52 +48778,52 @@
                 <a:ea typeface="Poppins" pitchFamily="34" charset="-122"/>
                 <a:cs typeface="Poppins" pitchFamily="34" charset="-120"/>
               </a:rPr>
-              <a:t>BILLABLE BY MEMBER  </a:t>
-            </a:r>
-            <a:pPr indent="0" marL="0">
-              <a:buNone/>
-            </a:pPr>
-            <a:r>
-              <a:rPr lang="en-US" sz="600" dirty="0">
-                <a:solidFill>
-                  <a:srgbClr val="C88A2E"/>
-                </a:solidFill>
-                <a:latin typeface="Poppins" pitchFamily="34" charset="0"/>
-                <a:ea typeface="Poppins" pitchFamily="34" charset="-122"/>
-                <a:cs typeface="Poppins" pitchFamily="34" charset="-120"/>
-              </a:rPr>
-              <a:t>wk 2026-08-30 · frozen</a:t>
-            </a:r>
-            <a:endParaRPr lang="en-US" sz="950" dirty="0"/>
-          </a:p>
-        </p:txBody>
-      </p:sp>
-      <p:sp>
-        <p:nvSpPr>
-          <p:cNvPr id="203" name="Text 201"/>
-          <p:cNvSpPr txBox="1"/>
-          <p:nvPr/>
-        </p:nvSpPr>
-        <p:spPr>
-          <a:xfrm>
-            <a:off x="8275320" y="2706624"/>
-            <a:ext cx="3319272" cy="132588"/>
-          </a:xfrm>
-          <a:prstGeom prst="rect">
-            <a:avLst/>
-          </a:prstGeom>
-          <a:noFill/>
-          <a:ln/>
-        </p:spPr>
-        <p:txBody>
-          <a:bodyPr wrap="square" lIns="0" tIns="0" rIns="0" bIns="0" rtlCol="0" anchor="ctr"/>
-          <a:lstStyle/>
-          <a:p>
-            <a:pPr indent="0" marL="0">
-              <a:buNone/>
-            </a:pPr>
-            <a:r>
-              <a:rPr lang="en-US" sz="700" b="1" dirty="0">
+              <a:t>AI SUMMARY</a:t>
+            </a:r>
+            <a:endParaRPr lang="en-US" sz="1200" dirty="0"/>
+          </a:p>
+        </p:txBody>
+      </p:sp>
+      <p:sp>
+        <p:nvSpPr>
+          <p:cNvPr id="88" name="Text 86"/>
+          <p:cNvSpPr txBox="1"/>
+          <p:nvPr/>
+        </p:nvSpPr>
+        <p:spPr>
+          <a:xfrm>
+            <a:off x="7379208" y="4645152"/>
+            <a:ext cx="4187952" cy="1188720"/>
+          </a:xfrm>
+          <a:prstGeom prst="rect">
+            <a:avLst/>
+          </a:prstGeom>
+          <a:noFill/>
+          <a:ln/>
+        </p:spPr>
+        <p:txBody>
+          <a:bodyPr wrap="square" lIns="0" tIns="0" rIns="0" bIns="0" rtlCol="0" anchor="t"/>
+          <a:lstStyle/>
+          <a:p>
+            <a:pPr indent="0" marL="0">
+              <a:buNone/>
+            </a:pPr>
+            <a:r>
+              <a:rPr lang="en-US" sz="900" b="1" dirty="0">
+                <a:solidFill>
+                  <a:srgbClr val="B4552D"/>
+                </a:solidFill>
+                <a:latin typeface="Poppins" pitchFamily="34" charset="0"/>
+                <a:ea typeface="Poppins" pitchFamily="34" charset="-122"/>
+                <a:cs typeface="Poppins" pitchFamily="34" charset="-120"/>
+              </a:rPr>
+              <a:t>•  </a:t>
+            </a:r>
+            <a:pPr indent="0" marL="0">
+              <a:buNone/>
+            </a:pPr>
+            <a:r>
+              <a:rPr lang="en-US" sz="900" b="1" dirty="0">
                 <a:solidFill>
                   <a:srgbClr val="12293A"/>
                 </a:solidFill>
@@ -52126,1207 +48831,7 @@
                 <a:ea typeface="Poppins" pitchFamily="34" charset="-122"/>
                 <a:cs typeface="Poppins" pitchFamily="34" charset="-120"/>
               </a:rPr>
-              <a:t>Greg S.  </a:t>
-            </a:r>
-            <a:pPr indent="0" marL="0">
-              <a:buNone/>
-            </a:pPr>
-            <a:r>
-              <a:rPr lang="en-US" sz="700" b="1" dirty="0">
-                <a:solidFill>
-                  <a:srgbClr val="3D8F5F"/>
-                </a:solidFill>
-                <a:latin typeface="Poppins" pitchFamily="34" charset="0"/>
-                <a:ea typeface="Poppins" pitchFamily="34" charset="-122"/>
-                <a:cs typeface="Poppins" pitchFamily="34" charset="-120"/>
-              </a:rPr>
-              <a:t>105%</a:t>
-            </a:r>
-            <a:pPr indent="0" marL="0">
-              <a:buNone/>
-            </a:pPr>
-            <a:r>
-              <a:rPr lang="en-US" sz="650" dirty="0">
-                <a:solidFill>
-                  <a:srgbClr val="8FA1AC"/>
-                </a:solidFill>
-                <a:latin typeface="Poppins" pitchFamily="34" charset="0"/>
-                <a:ea typeface="Poppins" pitchFamily="34" charset="-122"/>
-                <a:cs typeface="Poppins" pitchFamily="34" charset="-120"/>
-              </a:rPr>
-              <a:t>  (11%)  ·  39.8h</a:t>
-            </a:r>
-            <a:endParaRPr lang="en-US" sz="700" dirty="0"/>
-          </a:p>
-        </p:txBody>
-      </p:sp>
-      <p:sp>
-        <p:nvSpPr>
-          <p:cNvPr id="204" name="Text 202"/>
-          <p:cNvSpPr txBox="1"/>
-          <p:nvPr/>
-        </p:nvSpPr>
-        <p:spPr>
-          <a:xfrm>
-            <a:off x="8275320" y="2841955"/>
-            <a:ext cx="3319272" cy="132588"/>
-          </a:xfrm>
-          <a:prstGeom prst="rect">
-            <a:avLst/>
-          </a:prstGeom>
-          <a:noFill/>
-          <a:ln/>
-        </p:spPr>
-        <p:txBody>
-          <a:bodyPr wrap="square" lIns="0" tIns="0" rIns="0" bIns="0" rtlCol="0" anchor="ctr"/>
-          <a:lstStyle/>
-          <a:p>
-            <a:pPr indent="0" marL="0">
-              <a:buNone/>
-            </a:pPr>
-            <a:r>
-              <a:rPr lang="en-US" sz="700" b="1" dirty="0">
-                <a:solidFill>
-                  <a:srgbClr val="12293A"/>
-                </a:solidFill>
-                <a:latin typeface="Poppins" pitchFamily="34" charset="0"/>
-                <a:ea typeface="Poppins" pitchFamily="34" charset="-122"/>
-                <a:cs typeface="Poppins" pitchFamily="34" charset="-120"/>
-              </a:rPr>
-              <a:t>Isayah K.  </a:t>
-            </a:r>
-            <a:pPr indent="0" marL="0">
-              <a:buNone/>
-            </a:pPr>
-            <a:r>
-              <a:rPr lang="en-US" sz="700" b="1" dirty="0">
-                <a:solidFill>
-                  <a:srgbClr val="5E7280"/>
-                </a:solidFill>
-                <a:latin typeface="Poppins" pitchFamily="34" charset="0"/>
-                <a:ea typeface="Poppins" pitchFamily="34" charset="-122"/>
-                <a:cs typeface="Poppins" pitchFamily="34" charset="-120"/>
-              </a:rPr>
-              <a:t>32%</a:t>
-            </a:r>
-            <a:pPr indent="0" marL="0">
-              <a:buNone/>
-            </a:pPr>
-            <a:r>
-              <a:rPr lang="en-US" sz="650" dirty="0">
-                <a:solidFill>
-                  <a:srgbClr val="8FA1AC"/>
-                </a:solidFill>
-                <a:latin typeface="Poppins" pitchFamily="34" charset="0"/>
-                <a:ea typeface="Poppins" pitchFamily="34" charset="-122"/>
-                <a:cs typeface="Poppins" pitchFamily="34" charset="-120"/>
-              </a:rPr>
-              <a:t>  (14%)  ·  12h</a:t>
-            </a:r>
-            <a:endParaRPr lang="en-US" sz="700" dirty="0"/>
-          </a:p>
-        </p:txBody>
-      </p:sp>
-      <p:sp>
-        <p:nvSpPr>
-          <p:cNvPr id="205" name="Text 203"/>
-          <p:cNvSpPr txBox="1"/>
-          <p:nvPr/>
-        </p:nvSpPr>
-        <p:spPr>
-          <a:xfrm>
-            <a:off x="8275320" y="2977286"/>
-            <a:ext cx="3319272" cy="132588"/>
-          </a:xfrm>
-          <a:prstGeom prst="rect">
-            <a:avLst/>
-          </a:prstGeom>
-          <a:noFill/>
-          <a:ln/>
-        </p:spPr>
-        <p:txBody>
-          <a:bodyPr wrap="square" lIns="0" tIns="0" rIns="0" bIns="0" rtlCol="0" anchor="ctr"/>
-          <a:lstStyle/>
-          <a:p>
-            <a:pPr indent="0" marL="0">
-              <a:buNone/>
-            </a:pPr>
-            <a:r>
-              <a:rPr lang="en-US" sz="700" b="1" dirty="0">
-                <a:solidFill>
-                  <a:srgbClr val="12293A"/>
-                </a:solidFill>
-                <a:latin typeface="Poppins" pitchFamily="34" charset="0"/>
-                <a:ea typeface="Poppins" pitchFamily="34" charset="-122"/>
-                <a:cs typeface="Poppins" pitchFamily="34" charset="-120"/>
-              </a:rPr>
-              <a:t>Argenis G.  </a:t>
-            </a:r>
-            <a:pPr indent="0" marL="0">
-              <a:buNone/>
-            </a:pPr>
-            <a:r>
-              <a:rPr lang="en-US" sz="700" b="1" dirty="0">
-                <a:solidFill>
-                  <a:srgbClr val="5E7280"/>
-                </a:solidFill>
-                <a:latin typeface="Poppins" pitchFamily="34" charset="0"/>
-                <a:ea typeface="Poppins" pitchFamily="34" charset="-122"/>
-                <a:cs typeface="Poppins" pitchFamily="34" charset="-120"/>
-              </a:rPr>
-              <a:t>29%</a:t>
-            </a:r>
-            <a:pPr indent="0" marL="0">
-              <a:buNone/>
-            </a:pPr>
-            <a:r>
-              <a:rPr lang="en-US" sz="650" dirty="0">
-                <a:solidFill>
-                  <a:srgbClr val="8FA1AC"/>
-                </a:solidFill>
-                <a:latin typeface="Poppins" pitchFamily="34" charset="0"/>
-                <a:ea typeface="Poppins" pitchFamily="34" charset="-122"/>
-                <a:cs typeface="Poppins" pitchFamily="34" charset="-120"/>
-              </a:rPr>
-              <a:t>  (16%)  ·  11.2h</a:t>
-            </a:r>
-            <a:endParaRPr lang="en-US" sz="700" dirty="0"/>
-          </a:p>
-        </p:txBody>
-      </p:sp>
-      <p:sp>
-        <p:nvSpPr>
-          <p:cNvPr id="206" name="Text 204"/>
-          <p:cNvSpPr txBox="1"/>
-          <p:nvPr/>
-        </p:nvSpPr>
-        <p:spPr>
-          <a:xfrm>
-            <a:off x="8275320" y="3112618"/>
-            <a:ext cx="3319272" cy="132588"/>
-          </a:xfrm>
-          <a:prstGeom prst="rect">
-            <a:avLst/>
-          </a:prstGeom>
-          <a:noFill/>
-          <a:ln/>
-        </p:spPr>
-        <p:txBody>
-          <a:bodyPr wrap="square" lIns="0" tIns="0" rIns="0" bIns="0" rtlCol="0" anchor="ctr"/>
-          <a:lstStyle/>
-          <a:p>
-            <a:pPr indent="0" marL="0">
-              <a:buNone/>
-            </a:pPr>
-            <a:r>
-              <a:rPr lang="en-US" sz="700" b="1" dirty="0">
-                <a:solidFill>
-                  <a:srgbClr val="12293A"/>
-                </a:solidFill>
-                <a:latin typeface="Poppins" pitchFamily="34" charset="0"/>
-                <a:ea typeface="Poppins" pitchFamily="34" charset="-122"/>
-                <a:cs typeface="Poppins" pitchFamily="34" charset="-120"/>
-              </a:rPr>
-              <a:t>Isaac M.  </a:t>
-            </a:r>
-            <a:pPr indent="0" marL="0">
-              <a:buNone/>
-            </a:pPr>
-            <a:r>
-              <a:rPr lang="en-US" sz="700" b="1" dirty="0">
-                <a:solidFill>
-                  <a:srgbClr val="5E7280"/>
-                </a:solidFill>
-                <a:latin typeface="Poppins" pitchFamily="34" charset="0"/>
-                <a:ea typeface="Poppins" pitchFamily="34" charset="-122"/>
-                <a:cs typeface="Poppins" pitchFamily="34" charset="-120"/>
-              </a:rPr>
-              <a:t>17%</a:t>
-            </a:r>
-            <a:pPr indent="0" marL="0">
-              <a:buNone/>
-            </a:pPr>
-            <a:r>
-              <a:rPr lang="en-US" sz="650" dirty="0">
-                <a:solidFill>
-                  <a:srgbClr val="8FA1AC"/>
-                </a:solidFill>
-                <a:latin typeface="Poppins" pitchFamily="34" charset="0"/>
-                <a:ea typeface="Poppins" pitchFamily="34" charset="-122"/>
-                <a:cs typeface="Poppins" pitchFamily="34" charset="-120"/>
-              </a:rPr>
-              <a:t>  (20%)  ·  6.5h</a:t>
-            </a:r>
-            <a:endParaRPr lang="en-US" sz="700" dirty="0"/>
-          </a:p>
-        </p:txBody>
-      </p:sp>
-      <p:sp>
-        <p:nvSpPr>
-          <p:cNvPr id="207" name="Text 205"/>
-          <p:cNvSpPr txBox="1"/>
-          <p:nvPr/>
-        </p:nvSpPr>
-        <p:spPr>
-          <a:xfrm>
-            <a:off x="8275320" y="3247949"/>
-            <a:ext cx="3319272" cy="132588"/>
-          </a:xfrm>
-          <a:prstGeom prst="rect">
-            <a:avLst/>
-          </a:prstGeom>
-          <a:noFill/>
-          <a:ln/>
-        </p:spPr>
-        <p:txBody>
-          <a:bodyPr wrap="square" lIns="0" tIns="0" rIns="0" bIns="0" rtlCol="0" anchor="ctr"/>
-          <a:lstStyle/>
-          <a:p>
-            <a:pPr indent="0" marL="0">
-              <a:buNone/>
-            </a:pPr>
-            <a:r>
-              <a:rPr lang="en-US" sz="700" b="1" dirty="0">
-                <a:solidFill>
-                  <a:srgbClr val="12293A"/>
-                </a:solidFill>
-                <a:latin typeface="Poppins" pitchFamily="34" charset="0"/>
-                <a:ea typeface="Poppins" pitchFamily="34" charset="-122"/>
-                <a:cs typeface="Poppins" pitchFamily="34" charset="-120"/>
-              </a:rPr>
-              <a:t>Rhys W.  </a:t>
-            </a:r>
-            <a:pPr indent="0" marL="0">
-              <a:buNone/>
-            </a:pPr>
-            <a:r>
-              <a:rPr lang="en-US" sz="700" b="1" dirty="0">
-                <a:solidFill>
-                  <a:srgbClr val="5E7280"/>
-                </a:solidFill>
-                <a:latin typeface="Poppins" pitchFamily="34" charset="0"/>
-                <a:ea typeface="Poppins" pitchFamily="34" charset="-122"/>
-                <a:cs typeface="Poppins" pitchFamily="34" charset="-120"/>
-              </a:rPr>
-              <a:t>5%</a:t>
-            </a:r>
-            <a:pPr indent="0" marL="0">
-              <a:buNone/>
-            </a:pPr>
-            <a:r>
-              <a:rPr lang="en-US" sz="650" dirty="0">
-                <a:solidFill>
-                  <a:srgbClr val="8FA1AC"/>
-                </a:solidFill>
-                <a:latin typeface="Poppins" pitchFamily="34" charset="0"/>
-                <a:ea typeface="Poppins" pitchFamily="34" charset="-122"/>
-                <a:cs typeface="Poppins" pitchFamily="34" charset="-120"/>
-              </a:rPr>
-              <a:t>  (74%)  ·  2h</a:t>
-            </a:r>
-            <a:endParaRPr lang="en-US" sz="700" dirty="0"/>
-          </a:p>
-        </p:txBody>
-      </p:sp>
-      <p:sp>
-        <p:nvSpPr>
-          <p:cNvPr id="208" name="Text 206"/>
-          <p:cNvSpPr txBox="1"/>
-          <p:nvPr/>
-        </p:nvSpPr>
-        <p:spPr>
-          <a:xfrm>
-            <a:off x="8275320" y="3383280"/>
-            <a:ext cx="3319272" cy="132588"/>
-          </a:xfrm>
-          <a:prstGeom prst="rect">
-            <a:avLst/>
-          </a:prstGeom>
-          <a:noFill/>
-          <a:ln/>
-        </p:spPr>
-        <p:txBody>
-          <a:bodyPr wrap="square" lIns="0" tIns="0" rIns="0" bIns="0" rtlCol="0" anchor="ctr"/>
-          <a:lstStyle/>
-          <a:p>
-            <a:pPr indent="0" marL="0">
-              <a:buNone/>
-            </a:pPr>
-            <a:r>
-              <a:rPr lang="en-US" sz="700" b="1" dirty="0">
-                <a:solidFill>
-                  <a:srgbClr val="12293A"/>
-                </a:solidFill>
-                <a:latin typeface="Poppins" pitchFamily="34" charset="0"/>
-                <a:ea typeface="Poppins" pitchFamily="34" charset="-122"/>
-                <a:cs typeface="Poppins" pitchFamily="34" charset="-120"/>
-              </a:rPr>
-              <a:t>Josh C.  </a:t>
-            </a:r>
-            <a:pPr indent="0" marL="0">
-              <a:buNone/>
-            </a:pPr>
-            <a:r>
-              <a:rPr lang="en-US" sz="700" b="1" dirty="0">
-                <a:solidFill>
-                  <a:srgbClr val="5E7280"/>
-                </a:solidFill>
-                <a:latin typeface="Poppins" pitchFamily="34" charset="0"/>
-                <a:ea typeface="Poppins" pitchFamily="34" charset="-122"/>
-                <a:cs typeface="Poppins" pitchFamily="34" charset="-120"/>
-              </a:rPr>
-              <a:t>3%</a:t>
-            </a:r>
-            <a:pPr indent="0" marL="0">
-              <a:buNone/>
-            </a:pPr>
-            <a:r>
-              <a:rPr lang="en-US" sz="650" dirty="0">
-                <a:solidFill>
-                  <a:srgbClr val="8FA1AC"/>
-                </a:solidFill>
-                <a:latin typeface="Poppins" pitchFamily="34" charset="0"/>
-                <a:ea typeface="Poppins" pitchFamily="34" charset="-122"/>
-                <a:cs typeface="Poppins" pitchFamily="34" charset="-120"/>
-              </a:rPr>
-              <a:t>  (92%)  ·  1h</a:t>
-            </a:r>
-            <a:endParaRPr lang="en-US" sz="700" dirty="0"/>
-          </a:p>
-        </p:txBody>
-      </p:sp>
-      <p:sp>
-        <p:nvSpPr>
-          <p:cNvPr id="209" name="Text 207"/>
-          <p:cNvSpPr txBox="1"/>
-          <p:nvPr/>
-        </p:nvSpPr>
-        <p:spPr>
-          <a:xfrm>
-            <a:off x="8275320" y="3518611"/>
-            <a:ext cx="3319272" cy="132588"/>
-          </a:xfrm>
-          <a:prstGeom prst="rect">
-            <a:avLst/>
-          </a:prstGeom>
-          <a:noFill/>
-          <a:ln/>
-        </p:spPr>
-        <p:txBody>
-          <a:bodyPr wrap="square" lIns="0" tIns="0" rIns="0" bIns="0" rtlCol="0" anchor="ctr"/>
-          <a:lstStyle/>
-          <a:p>
-            <a:pPr indent="0" marL="0">
-              <a:buNone/>
-            </a:pPr>
-            <a:r>
-              <a:rPr lang="en-US" sz="700" b="1" dirty="0">
-                <a:solidFill>
-                  <a:srgbClr val="12293A"/>
-                </a:solidFill>
-                <a:latin typeface="Poppins" pitchFamily="34" charset="0"/>
-                <a:ea typeface="Poppins" pitchFamily="34" charset="-122"/>
-                <a:cs typeface="Poppins" pitchFamily="34" charset="-120"/>
-              </a:rPr>
-              <a:t>Karim R.  </a:t>
-            </a:r>
-            <a:pPr indent="0" marL="0">
-              <a:buNone/>
-            </a:pPr>
-            <a:r>
-              <a:rPr lang="en-US" sz="700" b="1" dirty="0">
-                <a:solidFill>
-                  <a:srgbClr val="5E7280"/>
-                </a:solidFill>
-                <a:latin typeface="Poppins" pitchFamily="34" charset="0"/>
-                <a:ea typeface="Poppins" pitchFamily="34" charset="-122"/>
-                <a:cs typeface="Poppins" pitchFamily="34" charset="-120"/>
-              </a:rPr>
-              <a:t>0%</a:t>
-            </a:r>
-            <a:pPr indent="0" marL="0">
-              <a:buNone/>
-            </a:pPr>
-            <a:r>
-              <a:rPr lang="en-US" sz="650" dirty="0">
-                <a:solidFill>
-                  <a:srgbClr val="8FA1AC"/>
-                </a:solidFill>
-                <a:latin typeface="Poppins" pitchFamily="34" charset="0"/>
-                <a:ea typeface="Poppins" pitchFamily="34" charset="-122"/>
-                <a:cs typeface="Poppins" pitchFamily="34" charset="-120"/>
-              </a:rPr>
-              <a:t>  (0%)  ·  0h</a:t>
-            </a:r>
-            <a:endParaRPr lang="en-US" sz="700" dirty="0"/>
-          </a:p>
-        </p:txBody>
-      </p:sp>
-      <p:sp>
-        <p:nvSpPr>
-          <p:cNvPr id="210" name="Text 208"/>
-          <p:cNvSpPr txBox="1"/>
-          <p:nvPr/>
-        </p:nvSpPr>
-        <p:spPr>
-          <a:xfrm>
-            <a:off x="8275320" y="3653942"/>
-            <a:ext cx="3319272" cy="132588"/>
-          </a:xfrm>
-          <a:prstGeom prst="rect">
-            <a:avLst/>
-          </a:prstGeom>
-          <a:noFill/>
-          <a:ln/>
-        </p:spPr>
-        <p:txBody>
-          <a:bodyPr wrap="square" lIns="0" tIns="0" rIns="0" bIns="0" rtlCol="0" anchor="ctr"/>
-          <a:lstStyle/>
-          <a:p>
-            <a:pPr indent="0" marL="0">
-              <a:buNone/>
-            </a:pPr>
-            <a:r>
-              <a:rPr lang="en-US" sz="700" b="1" dirty="0">
-                <a:solidFill>
-                  <a:srgbClr val="12293A"/>
-                </a:solidFill>
-                <a:latin typeface="Poppins" pitchFamily="34" charset="0"/>
-                <a:ea typeface="Poppins" pitchFamily="34" charset="-122"/>
-                <a:cs typeface="Poppins" pitchFamily="34" charset="-120"/>
-              </a:rPr>
-              <a:t>Rodney N.  </a:t>
-            </a:r>
-            <a:pPr indent="0" marL="0">
-              <a:buNone/>
-            </a:pPr>
-            <a:r>
-              <a:rPr lang="en-US" sz="700" b="1" dirty="0">
-                <a:solidFill>
-                  <a:srgbClr val="5E7280"/>
-                </a:solidFill>
-                <a:latin typeface="Poppins" pitchFamily="34" charset="0"/>
-                <a:ea typeface="Poppins" pitchFamily="34" charset="-122"/>
-                <a:cs typeface="Poppins" pitchFamily="34" charset="-120"/>
-              </a:rPr>
-              <a:t>0%</a:t>
-            </a:r>
-            <a:pPr indent="0" marL="0">
-              <a:buNone/>
-            </a:pPr>
-            <a:r>
-              <a:rPr lang="en-US" sz="650" dirty="0">
-                <a:solidFill>
-                  <a:srgbClr val="8FA1AC"/>
-                </a:solidFill>
-                <a:latin typeface="Poppins" pitchFamily="34" charset="0"/>
-                <a:ea typeface="Poppins" pitchFamily="34" charset="-122"/>
-                <a:cs typeface="Poppins" pitchFamily="34" charset="-120"/>
-              </a:rPr>
-              <a:t>  (4%)  ·  0h</a:t>
-            </a:r>
-            <a:endParaRPr lang="en-US" sz="700" dirty="0"/>
-          </a:p>
-        </p:txBody>
-      </p:sp>
-      <p:sp>
-        <p:nvSpPr>
-          <p:cNvPr id="211" name="Shape 209"/>
-          <p:cNvSpPr/>
-          <p:nvPr/>
-        </p:nvSpPr>
-        <p:spPr>
-          <a:xfrm>
-            <a:off x="8092440" y="3931920"/>
-            <a:ext cx="3685032" cy="1298448"/>
-          </a:xfrm>
-          <a:prstGeom prst="roundRect">
-            <a:avLst>
-              <a:gd name="adj" fmla="val 4930"/>
-            </a:avLst>
-          </a:prstGeom>
-          <a:solidFill>
-            <a:srgbClr val="FFFFFF"/>
-          </a:solidFill>
-          <a:ln/>
-          <a:effectLst>
-            <a:outerShdw sx="100000" sy="100000" kx="0" ky="0" algn="bl" rotWithShape="0" blurRad="76200" dist="25400" dir="5400000">
-              <a:srgbClr val="9AAAB5">
-                <a:alpha val="35000"/>
-              </a:srgbClr>
-            </a:outerShdw>
-          </a:effectLst>
-        </p:spPr>
-      </p:sp>
-      <p:sp>
-        <p:nvSpPr>
-          <p:cNvPr id="212" name="Text 210"/>
-          <p:cNvSpPr txBox="1"/>
-          <p:nvPr/>
-        </p:nvSpPr>
-        <p:spPr>
-          <a:xfrm>
-            <a:off x="8275320" y="4014216"/>
-            <a:ext cx="3319272" cy="201168"/>
-          </a:xfrm>
-          <a:prstGeom prst="rect">
-            <a:avLst/>
-          </a:prstGeom>
-          <a:noFill/>
-          <a:ln/>
-        </p:spPr>
-        <p:txBody>
-          <a:bodyPr wrap="square" lIns="0" tIns="0" rIns="0" bIns="0" rtlCol="0" anchor="ctr"/>
-          <a:lstStyle/>
-          <a:p>
-            <a:pPr indent="0" marL="0">
-              <a:buNone/>
-            </a:pPr>
-            <a:r>
-              <a:rPr lang="en-US" sz="950" b="1" dirty="0">
-                <a:solidFill>
-                  <a:srgbClr val="2C8394"/>
-                </a:solidFill>
-                <a:latin typeface="Poppins" pitchFamily="34" charset="0"/>
-                <a:ea typeface="Poppins" pitchFamily="34" charset="-122"/>
-                <a:cs typeface="Poppins" pitchFamily="34" charset="-120"/>
-              </a:rPr>
-              <a:t>OPEN PS WORK  </a:t>
-            </a:r>
-            <a:pPr indent="0" marL="0">
-              <a:buNone/>
-            </a:pPr>
-            <a:r>
-              <a:rPr lang="en-US" sz="600" dirty="0">
-                <a:solidFill>
-                  <a:srgbClr val="3D8F5F"/>
-                </a:solidFill>
-                <a:latin typeface="Poppins" pitchFamily="34" charset="0"/>
-                <a:ea typeface="Poppins" pitchFamily="34" charset="-122"/>
-                <a:cs typeface="Poppins" pitchFamily="34" charset="-120"/>
-              </a:rPr>
-              <a:t>HubSpot · live</a:t>
-            </a:r>
-            <a:endParaRPr lang="en-US" sz="950" dirty="0"/>
-          </a:p>
-        </p:txBody>
-      </p:sp>
-      <p:sp>
-        <p:nvSpPr>
-          <p:cNvPr id="213" name="Text 211"/>
-          <p:cNvSpPr txBox="1"/>
-          <p:nvPr/>
-        </p:nvSpPr>
-        <p:spPr>
-          <a:xfrm>
-            <a:off x="8275320" y="4242816"/>
-            <a:ext cx="1005840" cy="173736"/>
-          </a:xfrm>
-          <a:prstGeom prst="rect">
-            <a:avLst/>
-          </a:prstGeom>
-          <a:noFill/>
-          <a:ln/>
-        </p:spPr>
-        <p:txBody>
-          <a:bodyPr wrap="square" lIns="0" tIns="0" rIns="0" bIns="0" rtlCol="0" anchor="ctr"/>
-          <a:lstStyle/>
-          <a:p>
-            <a:pPr indent="0" marL="0">
-              <a:buNone/>
-            </a:pPr>
-            <a:r>
-              <a:rPr lang="en-US" sz="700" dirty="0">
-                <a:solidFill>
-                  <a:srgbClr val="12293A"/>
-                </a:solidFill>
-                <a:latin typeface="Poppins" pitchFamily="34" charset="0"/>
-                <a:ea typeface="Poppins" pitchFamily="34" charset="-122"/>
-                <a:cs typeface="Poppins" pitchFamily="34" charset="-120"/>
-              </a:rPr>
-              <a:t>Tech</a:t>
-            </a:r>
-            <a:endParaRPr lang="en-US" sz="700" dirty="0"/>
-          </a:p>
-        </p:txBody>
-      </p:sp>
-      <p:sp>
-        <p:nvSpPr>
-          <p:cNvPr id="214" name="Shape 212"/>
-          <p:cNvSpPr/>
-          <p:nvPr/>
-        </p:nvSpPr>
-        <p:spPr>
-          <a:xfrm>
-            <a:off x="9326880" y="4293108"/>
-            <a:ext cx="1783080" cy="77724"/>
-          </a:xfrm>
-          <a:prstGeom prst="roundRect">
-            <a:avLst>
-              <a:gd name="adj" fmla="val 41176"/>
-            </a:avLst>
-          </a:prstGeom>
-          <a:solidFill>
-            <a:srgbClr val="2C8394"/>
-          </a:solidFill>
-          <a:ln/>
-        </p:spPr>
-      </p:sp>
-      <p:sp>
-        <p:nvSpPr>
-          <p:cNvPr id="215" name="Text 213"/>
-          <p:cNvSpPr txBox="1"/>
-          <p:nvPr/>
-        </p:nvSpPr>
-        <p:spPr>
-          <a:xfrm>
-            <a:off x="11201400" y="4242816"/>
-            <a:ext cx="411480" cy="173736"/>
-          </a:xfrm>
-          <a:prstGeom prst="rect">
-            <a:avLst/>
-          </a:prstGeom>
-          <a:noFill/>
-          <a:ln/>
-        </p:spPr>
-        <p:txBody>
-          <a:bodyPr wrap="square" lIns="0" tIns="0" rIns="0" bIns="0" rtlCol="0" anchor="ctr"/>
-          <a:lstStyle/>
-          <a:p>
-            <a:pPr algn="r" indent="0" marL="0">
-              <a:buNone/>
-            </a:pPr>
-            <a:r>
-              <a:rPr lang="en-US" sz="700" b="1" dirty="0">
-                <a:solidFill>
-                  <a:srgbClr val="5E7280"/>
-                </a:solidFill>
-                <a:latin typeface="Poppins" pitchFamily="34" charset="0"/>
-                <a:ea typeface="Poppins" pitchFamily="34" charset="-122"/>
-                <a:cs typeface="Poppins" pitchFamily="34" charset="-120"/>
-              </a:rPr>
-              <a:t>348</a:t>
-            </a:r>
-            <a:endParaRPr lang="en-US" sz="700" dirty="0"/>
-          </a:p>
-        </p:txBody>
-      </p:sp>
-      <p:sp>
-        <p:nvSpPr>
-          <p:cNvPr id="216" name="Text 214"/>
-          <p:cNvSpPr txBox="1"/>
-          <p:nvPr/>
-        </p:nvSpPr>
-        <p:spPr>
-          <a:xfrm>
-            <a:off x="8275320" y="4425696"/>
-            <a:ext cx="1005840" cy="173736"/>
-          </a:xfrm>
-          <a:prstGeom prst="rect">
-            <a:avLst/>
-          </a:prstGeom>
-          <a:noFill/>
-          <a:ln/>
-        </p:spPr>
-        <p:txBody>
-          <a:bodyPr wrap="square" lIns="0" tIns="0" rIns="0" bIns="0" rtlCol="0" anchor="ctr"/>
-          <a:lstStyle/>
-          <a:p>
-            <a:pPr indent="0" marL="0">
-              <a:buNone/>
-            </a:pPr>
-            <a:r>
-              <a:rPr lang="en-US" sz="700" dirty="0">
-                <a:solidFill>
-                  <a:srgbClr val="12293A"/>
-                </a:solidFill>
-                <a:latin typeface="Poppins" pitchFamily="34" charset="0"/>
-                <a:ea typeface="Poppins" pitchFamily="34" charset="-122"/>
-                <a:cs typeface="Poppins" pitchFamily="34" charset="-120"/>
-              </a:rPr>
-              <a:t>Onboarding</a:t>
-            </a:r>
-            <a:endParaRPr lang="en-US" sz="700" dirty="0"/>
-          </a:p>
-        </p:txBody>
-      </p:sp>
-      <p:sp>
-        <p:nvSpPr>
-          <p:cNvPr id="217" name="Shape 215"/>
-          <p:cNvSpPr/>
-          <p:nvPr/>
-        </p:nvSpPr>
-        <p:spPr>
-          <a:xfrm>
-            <a:off x="9326880" y="4475988"/>
-            <a:ext cx="824931" cy="77724"/>
-          </a:xfrm>
-          <a:prstGeom prst="roundRect">
-            <a:avLst>
-              <a:gd name="adj" fmla="val 41176"/>
-            </a:avLst>
-          </a:prstGeom>
-          <a:solidFill>
-            <a:srgbClr val="2C8394"/>
-          </a:solidFill>
-          <a:ln/>
-        </p:spPr>
-      </p:sp>
-      <p:sp>
-        <p:nvSpPr>
-          <p:cNvPr id="218" name="Text 216"/>
-          <p:cNvSpPr txBox="1"/>
-          <p:nvPr/>
-        </p:nvSpPr>
-        <p:spPr>
-          <a:xfrm>
-            <a:off x="11201400" y="4425696"/>
-            <a:ext cx="411480" cy="173736"/>
-          </a:xfrm>
-          <a:prstGeom prst="rect">
-            <a:avLst/>
-          </a:prstGeom>
-          <a:noFill/>
-          <a:ln/>
-        </p:spPr>
-        <p:txBody>
-          <a:bodyPr wrap="square" lIns="0" tIns="0" rIns="0" bIns="0" rtlCol="0" anchor="ctr"/>
-          <a:lstStyle/>
-          <a:p>
-            <a:pPr algn="r" indent="0" marL="0">
-              <a:buNone/>
-            </a:pPr>
-            <a:r>
-              <a:rPr lang="en-US" sz="700" b="1" dirty="0">
-                <a:solidFill>
-                  <a:srgbClr val="5E7280"/>
-                </a:solidFill>
-                <a:latin typeface="Poppins" pitchFamily="34" charset="0"/>
-                <a:ea typeface="Poppins" pitchFamily="34" charset="-122"/>
-                <a:cs typeface="Poppins" pitchFamily="34" charset="-120"/>
-              </a:rPr>
-              <a:t>161</a:t>
-            </a:r>
-            <a:endParaRPr lang="en-US" sz="700" dirty="0"/>
-          </a:p>
-        </p:txBody>
-      </p:sp>
-      <p:sp>
-        <p:nvSpPr>
-          <p:cNvPr id="219" name="Text 217"/>
-          <p:cNvSpPr txBox="1"/>
-          <p:nvPr/>
-        </p:nvSpPr>
-        <p:spPr>
-          <a:xfrm>
-            <a:off x="8275320" y="4608576"/>
-            <a:ext cx="1005840" cy="173736"/>
-          </a:xfrm>
-          <a:prstGeom prst="rect">
-            <a:avLst/>
-          </a:prstGeom>
-          <a:noFill/>
-          <a:ln/>
-        </p:spPr>
-        <p:txBody>
-          <a:bodyPr wrap="square" lIns="0" tIns="0" rIns="0" bIns="0" rtlCol="0" anchor="ctr"/>
-          <a:lstStyle/>
-          <a:p>
-            <a:pPr indent="0" marL="0">
-              <a:buNone/>
-            </a:pPr>
-            <a:r>
-              <a:rPr lang="en-US" sz="700" dirty="0">
-                <a:solidFill>
-                  <a:srgbClr val="12293A"/>
-                </a:solidFill>
-                <a:latin typeface="Poppins" pitchFamily="34" charset="0"/>
-                <a:ea typeface="Poppins" pitchFamily="34" charset="-122"/>
-                <a:cs typeface="Poppins" pitchFamily="34" charset="-120"/>
-              </a:rPr>
-              <a:t>Integrations</a:t>
-            </a:r>
-            <a:endParaRPr lang="en-US" sz="700" dirty="0"/>
-          </a:p>
-        </p:txBody>
-      </p:sp>
-      <p:sp>
-        <p:nvSpPr>
-          <p:cNvPr id="220" name="Shape 218"/>
-          <p:cNvSpPr/>
-          <p:nvPr/>
-        </p:nvSpPr>
-        <p:spPr>
-          <a:xfrm>
-            <a:off x="9326880" y="4658868"/>
-            <a:ext cx="625103" cy="77724"/>
-          </a:xfrm>
-          <a:prstGeom prst="roundRect">
-            <a:avLst>
-              <a:gd name="adj" fmla="val 41176"/>
-            </a:avLst>
-          </a:prstGeom>
-          <a:solidFill>
-            <a:srgbClr val="2C8394"/>
-          </a:solidFill>
-          <a:ln/>
-        </p:spPr>
-      </p:sp>
-      <p:sp>
-        <p:nvSpPr>
-          <p:cNvPr id="221" name="Text 219"/>
-          <p:cNvSpPr txBox="1"/>
-          <p:nvPr/>
-        </p:nvSpPr>
-        <p:spPr>
-          <a:xfrm>
-            <a:off x="11201400" y="4608576"/>
-            <a:ext cx="411480" cy="173736"/>
-          </a:xfrm>
-          <a:prstGeom prst="rect">
-            <a:avLst/>
-          </a:prstGeom>
-          <a:noFill/>
-          <a:ln/>
-        </p:spPr>
-        <p:txBody>
-          <a:bodyPr wrap="square" lIns="0" tIns="0" rIns="0" bIns="0" rtlCol="0" anchor="ctr"/>
-          <a:lstStyle/>
-          <a:p>
-            <a:pPr algn="r" indent="0" marL="0">
-              <a:buNone/>
-            </a:pPr>
-            <a:r>
-              <a:rPr lang="en-US" sz="700" b="1" dirty="0">
-                <a:solidFill>
-                  <a:srgbClr val="5E7280"/>
-                </a:solidFill>
-                <a:latin typeface="Poppins" pitchFamily="34" charset="0"/>
-                <a:ea typeface="Poppins" pitchFamily="34" charset="-122"/>
-                <a:cs typeface="Poppins" pitchFamily="34" charset="-120"/>
-              </a:rPr>
-              <a:t>122</a:t>
-            </a:r>
-            <a:endParaRPr lang="en-US" sz="700" dirty="0"/>
-          </a:p>
-        </p:txBody>
-      </p:sp>
-      <p:sp>
-        <p:nvSpPr>
-          <p:cNvPr id="222" name="Text 220"/>
-          <p:cNvSpPr txBox="1"/>
-          <p:nvPr/>
-        </p:nvSpPr>
-        <p:spPr>
-          <a:xfrm>
-            <a:off x="8275320" y="4791456"/>
-            <a:ext cx="1005840" cy="173736"/>
-          </a:xfrm>
-          <a:prstGeom prst="rect">
-            <a:avLst/>
-          </a:prstGeom>
-          <a:noFill/>
-          <a:ln/>
-        </p:spPr>
-        <p:txBody>
-          <a:bodyPr wrap="square" lIns="0" tIns="0" rIns="0" bIns="0" rtlCol="0" anchor="ctr"/>
-          <a:lstStyle/>
-          <a:p>
-            <a:pPr indent="0" marL="0">
-              <a:buNone/>
-            </a:pPr>
-            <a:r>
-              <a:rPr lang="en-US" sz="700" dirty="0">
-                <a:solidFill>
-                  <a:srgbClr val="12293A"/>
-                </a:solidFill>
-                <a:latin typeface="Poppins" pitchFamily="34" charset="0"/>
-                <a:ea typeface="Poppins" pitchFamily="34" charset="-122"/>
-                <a:cs typeface="Poppins" pitchFamily="34" charset="-120"/>
-              </a:rPr>
-              <a:t>Training</a:t>
-            </a:r>
-            <a:endParaRPr lang="en-US" sz="700" dirty="0"/>
-          </a:p>
-        </p:txBody>
-      </p:sp>
-      <p:sp>
-        <p:nvSpPr>
-          <p:cNvPr id="223" name="Shape 221"/>
-          <p:cNvSpPr/>
-          <p:nvPr/>
-        </p:nvSpPr>
-        <p:spPr>
-          <a:xfrm>
-            <a:off x="9326880" y="4841748"/>
-            <a:ext cx="302304" cy="77724"/>
-          </a:xfrm>
-          <a:prstGeom prst="roundRect">
-            <a:avLst>
-              <a:gd name="adj" fmla="val 41176"/>
-            </a:avLst>
-          </a:prstGeom>
-          <a:solidFill>
-            <a:srgbClr val="2C8394"/>
-          </a:solidFill>
-          <a:ln/>
-        </p:spPr>
-      </p:sp>
-      <p:sp>
-        <p:nvSpPr>
-          <p:cNvPr id="224" name="Text 222"/>
-          <p:cNvSpPr txBox="1"/>
-          <p:nvPr/>
-        </p:nvSpPr>
-        <p:spPr>
-          <a:xfrm>
-            <a:off x="11201400" y="4791456"/>
-            <a:ext cx="411480" cy="173736"/>
-          </a:xfrm>
-          <a:prstGeom prst="rect">
-            <a:avLst/>
-          </a:prstGeom>
-          <a:noFill/>
-          <a:ln/>
-        </p:spPr>
-        <p:txBody>
-          <a:bodyPr wrap="square" lIns="0" tIns="0" rIns="0" bIns="0" rtlCol="0" anchor="ctr"/>
-          <a:lstStyle/>
-          <a:p>
-            <a:pPr algn="r" indent="0" marL="0">
-              <a:buNone/>
-            </a:pPr>
-            <a:r>
-              <a:rPr lang="en-US" sz="700" b="1" dirty="0">
-                <a:solidFill>
-                  <a:srgbClr val="5E7280"/>
-                </a:solidFill>
-                <a:latin typeface="Poppins" pitchFamily="34" charset="0"/>
-                <a:ea typeface="Poppins" pitchFamily="34" charset="-122"/>
-                <a:cs typeface="Poppins" pitchFamily="34" charset="-120"/>
-              </a:rPr>
-              <a:t>59</a:t>
-            </a:r>
-            <a:endParaRPr lang="en-US" sz="700" dirty="0"/>
-          </a:p>
-        </p:txBody>
-      </p:sp>
-      <p:sp>
-        <p:nvSpPr>
-          <p:cNvPr id="225" name="Text 223"/>
-          <p:cNvSpPr txBox="1"/>
-          <p:nvPr/>
-        </p:nvSpPr>
-        <p:spPr>
-          <a:xfrm>
-            <a:off x="8275320" y="4974336"/>
-            <a:ext cx="1005840" cy="173736"/>
-          </a:xfrm>
-          <a:prstGeom prst="rect">
-            <a:avLst/>
-          </a:prstGeom>
-          <a:noFill/>
-          <a:ln/>
-        </p:spPr>
-        <p:txBody>
-          <a:bodyPr wrap="square" lIns="0" tIns="0" rIns="0" bIns="0" rtlCol="0" anchor="ctr"/>
-          <a:lstStyle/>
-          <a:p>
-            <a:pPr indent="0" marL="0">
-              <a:buNone/>
-            </a:pPr>
-            <a:r>
-              <a:rPr lang="en-US" sz="700" dirty="0">
-                <a:solidFill>
-                  <a:srgbClr val="12293A"/>
-                </a:solidFill>
-                <a:latin typeface="Poppins" pitchFamily="34" charset="0"/>
-                <a:ea typeface="Poppins" pitchFamily="34" charset="-122"/>
-                <a:cs typeface="Poppins" pitchFamily="34" charset="-120"/>
-              </a:rPr>
-              <a:t>Warranty</a:t>
-            </a:r>
-            <a:endParaRPr lang="en-US" sz="700" dirty="0"/>
-          </a:p>
-        </p:txBody>
-      </p:sp>
-      <p:sp>
-        <p:nvSpPr>
-          <p:cNvPr id="226" name="Shape 224"/>
-          <p:cNvSpPr/>
-          <p:nvPr/>
-        </p:nvSpPr>
-        <p:spPr>
-          <a:xfrm>
-            <a:off x="9326880" y="5024628"/>
-            <a:ext cx="45720" cy="77724"/>
-          </a:xfrm>
-          <a:prstGeom prst="roundRect">
-            <a:avLst>
-              <a:gd name="adj" fmla="val 70000"/>
-            </a:avLst>
-          </a:prstGeom>
-          <a:solidFill>
-            <a:srgbClr val="2C8394"/>
-          </a:solidFill>
-          <a:ln/>
-        </p:spPr>
-      </p:sp>
-      <p:sp>
-        <p:nvSpPr>
-          <p:cNvPr id="227" name="Text 225"/>
-          <p:cNvSpPr txBox="1"/>
-          <p:nvPr/>
-        </p:nvSpPr>
-        <p:spPr>
-          <a:xfrm>
-            <a:off x="11201400" y="4974336"/>
-            <a:ext cx="411480" cy="173736"/>
-          </a:xfrm>
-          <a:prstGeom prst="rect">
-            <a:avLst/>
-          </a:prstGeom>
-          <a:noFill/>
-          <a:ln/>
-        </p:spPr>
-        <p:txBody>
-          <a:bodyPr wrap="square" lIns="0" tIns="0" rIns="0" bIns="0" rtlCol="0" anchor="ctr"/>
-          <a:lstStyle/>
-          <a:p>
-            <a:pPr algn="r" indent="0" marL="0">
-              <a:buNone/>
-            </a:pPr>
-            <a:r>
-              <a:rPr lang="en-US" sz="700" b="1" dirty="0">
-                <a:solidFill>
-                  <a:srgbClr val="5E7280"/>
-                </a:solidFill>
-                <a:latin typeface="Poppins" pitchFamily="34" charset="0"/>
-                <a:ea typeface="Poppins" pitchFamily="34" charset="-122"/>
-                <a:cs typeface="Poppins" pitchFamily="34" charset="-120"/>
-              </a:rPr>
-              <a:t>2</a:t>
-            </a:r>
-            <a:endParaRPr lang="en-US" sz="700" dirty="0"/>
-          </a:p>
-        </p:txBody>
-      </p:sp>
-      <p:sp>
-        <p:nvSpPr>
-          <p:cNvPr id="228" name="Shape 226"/>
-          <p:cNvSpPr/>
-          <p:nvPr/>
-        </p:nvSpPr>
-        <p:spPr>
-          <a:xfrm>
-            <a:off x="411480" y="5349240"/>
-            <a:ext cx="11365992" cy="1033272"/>
-          </a:xfrm>
-          <a:prstGeom prst="roundRect">
-            <a:avLst>
-              <a:gd name="adj" fmla="val 6195"/>
-            </a:avLst>
-          </a:prstGeom>
-          <a:solidFill>
-            <a:srgbClr val="FFFFFF"/>
-          </a:solidFill>
-          <a:ln/>
-          <a:effectLst>
-            <a:outerShdw sx="100000" sy="100000" kx="0" ky="0" algn="bl" rotWithShape="0" blurRad="76200" dist="25400" dir="5400000">
-              <a:srgbClr val="9AAAB5">
-                <a:alpha val="35000"/>
-              </a:srgbClr>
-            </a:outerShdw>
-          </a:effectLst>
-        </p:spPr>
-      </p:sp>
-      <p:sp>
-        <p:nvSpPr>
-          <p:cNvPr id="229" name="Text 227"/>
-          <p:cNvSpPr txBox="1"/>
-          <p:nvPr/>
-        </p:nvSpPr>
-        <p:spPr>
-          <a:xfrm>
-            <a:off x="612648" y="5458968"/>
-            <a:ext cx="11000232" cy="274320"/>
-          </a:xfrm>
-          <a:prstGeom prst="rect">
-            <a:avLst/>
-          </a:prstGeom>
-          <a:noFill/>
-          <a:ln/>
-        </p:spPr>
-        <p:txBody>
-          <a:bodyPr wrap="square" lIns="0" tIns="0" rIns="0" bIns="0" rtlCol="0" anchor="ctr"/>
-          <a:lstStyle/>
-          <a:p>
-            <a:pPr indent="0" marL="0">
-              <a:buNone/>
-            </a:pPr>
-            <a:r>
-              <a:rPr lang="en-US" sz="1200" b="1" dirty="0">
-                <a:solidFill>
-                  <a:srgbClr val="2C8394"/>
-                </a:solidFill>
-                <a:latin typeface="Poppins" pitchFamily="34" charset="0"/>
-                <a:ea typeface="Poppins" pitchFamily="34" charset="-122"/>
-                <a:cs typeface="Poppins" pitchFamily="34" charset="-120"/>
-              </a:rPr>
-              <a:t>AI SUMMARY</a:t>
-            </a:r>
-            <a:endParaRPr lang="en-US" sz="1200" dirty="0"/>
-          </a:p>
-        </p:txBody>
-      </p:sp>
-      <p:sp>
-        <p:nvSpPr>
-          <p:cNvPr id="230" name="Text 228"/>
-          <p:cNvSpPr txBox="1"/>
-          <p:nvPr/>
-        </p:nvSpPr>
-        <p:spPr>
-          <a:xfrm>
-            <a:off x="612648" y="5769864"/>
-            <a:ext cx="10954512" cy="484632"/>
-          </a:xfrm>
-          <a:prstGeom prst="rect">
-            <a:avLst/>
-          </a:prstGeom>
-          <a:noFill/>
-          <a:ln/>
-        </p:spPr>
-        <p:txBody>
-          <a:bodyPr wrap="square" lIns="0" tIns="0" rIns="0" bIns="0" rtlCol="0" anchor="t"/>
-          <a:lstStyle/>
-          <a:p>
-            <a:pPr indent="0" marL="0">
-              <a:buNone/>
-            </a:pPr>
-            <a:r>
-              <a:rPr lang="en-US" sz="900" b="1" dirty="0">
-                <a:solidFill>
-                  <a:srgbClr val="B4552D"/>
-                </a:solidFill>
-                <a:latin typeface="Poppins" pitchFamily="34" charset="0"/>
-                <a:ea typeface="Poppins" pitchFamily="34" charset="-122"/>
-                <a:cs typeface="Poppins" pitchFamily="34" charset="-120"/>
-              </a:rPr>
-              <a:t>•  </a:t>
-            </a:r>
-            <a:pPr indent="0" marL="0">
-              <a:buNone/>
-            </a:pPr>
-            <a:r>
-              <a:rPr lang="en-US" sz="900" b="1" dirty="0">
-                <a:solidFill>
-                  <a:srgbClr val="12293A"/>
-                </a:solidFill>
-                <a:latin typeface="Poppins" pitchFamily="34" charset="0"/>
-                <a:ea typeface="Poppins" pitchFamily="34" charset="-122"/>
-                <a:cs typeface="Poppins" pitchFamily="34" charset="-120"/>
-              </a:rPr>
-              <a:t>Utilisation continues across the cutover, on a thinner meter. </a:t>
+              <a:t>Utilisation is deliberately blank this week. </a:t>
             </a:r>
             <a:pPr indent="0" marL="0">
               <a:spcAft>
@@ -53343,7 +48848,7 @@
                 <a:ea typeface="Poppins" pitchFamily="34" charset="-122"/>
                 <a:cs typeface="Poppins" pitchFamily="34" charset="-120"/>
               </a:rPr>
-              <a:t>13% of the 608h capacity is logged for 8–20 Sep (78.93h on 29 records) against 69.4% in the last full Creatio week — that gap is logging coverage, not idle teams: 131 PS engagements were opened this week and only 29 carry time.</a:t>
+              <a:t>Time logging covers 78.93h on 29 of 8,969 PS records. Computing a percentage on that coverage would fabricate a collapse that isn't real.</a:t>
             </a:r>
             <a:endParaRPr lang="en-US" sz="900" dirty="0"/>
           </a:p>
@@ -53374,7 +48879,7 @@
                 <a:ea typeface="Poppins" pitchFamily="34" charset="-122"/>
                 <a:cs typeface="Poppins" pitchFamily="34" charset="-120"/>
               </a:rPr>
-              <a:t>Where the hours are going is consistent: </a:t>
+              <a:t>What it takes to switch this back on: </a:t>
             </a:r>
             <a:pPr indent="0" marL="0">
               <a:spcAft>
@@ -53391,22 +48896,109 @@
                 <a:ea typeface="Poppins" pitchFamily="34" charset="-122"/>
                 <a:cs typeface="Poppins" pitchFamily="34" charset="-120"/>
               </a:rPr>
-              <a:t>Tech (36.9h) and Onboarding (35.9h) dominate, the same two categories that led every Creatio month. 21.4h of the 78.9h sits on two records named 'test' / 'Warranty Test' — worth clearing out.</a:t>
+              <a:t>PS members logging hours on every Professional Services record, plus the 38h/week capacity roster re-based in the new reporting. The number returns automatically as coverage lands.</a:t>
             </a:r>
             <a:endParaRPr lang="en-US" sz="900" dirty="0"/>
           </a:p>
-        </p:txBody>
-      </p:sp>
-      <p:sp>
-        <p:nvSpPr>
-          <p:cNvPr id="231" name="Shape 229"/>
-          <p:cNvSpPr/>
-          <p:nvPr/>
-        </p:nvSpPr>
-        <p:spPr>
-          <a:xfrm>
-            <a:off x="7710221" y="6510528"/>
-            <a:ext cx="4067251" cy="256032"/>
+          <a:p>
+            <a:pPr indent="0" marL="0">
+              <a:buNone/>
+            </a:pPr>
+            <a:r>
+              <a:rPr lang="en-US" sz="900" b="1" dirty="0">
+                <a:solidFill>
+                  <a:srgbClr val="C88A2E"/>
+                </a:solidFill>
+                <a:latin typeface="Poppins" pitchFamily="34" charset="0"/>
+                <a:ea typeface="Poppins" pitchFamily="34" charset="-122"/>
+                <a:cs typeface="Poppins" pitchFamily="34" charset="-120"/>
+              </a:rPr>
+              <a:t>•  </a:t>
+            </a:r>
+            <a:pPr indent="0" marL="0">
+              <a:buNone/>
+            </a:pPr>
+            <a:r>
+              <a:rPr lang="en-US" sz="900" b="1" dirty="0">
+                <a:solidFill>
+                  <a:srgbClr val="12293A"/>
+                </a:solidFill>
+                <a:latin typeface="Poppins" pitchFamily="34" charset="0"/>
+                <a:ea typeface="Poppins" pitchFamily="34" charset="-122"/>
+                <a:cs typeface="Poppins" pitchFamily="34" charset="-120"/>
+              </a:rPr>
+              <a:t>Demand signal is live meanwhile: </a:t>
+            </a:r>
+            <a:pPr indent="0" marL="0">
+              <a:spcAft>
+                <a:spcPts val="800"/>
+              </a:spcAft>
+              <a:buNone/>
+            </a:pPr>
+            <a:r>
+              <a:rPr lang="en-US" sz="900" dirty="0">
+                <a:solidFill>
+                  <a:srgbClr val="3A4B57"/>
+                </a:solidFill>
+                <a:latin typeface="Poppins" pitchFamily="34" charset="0"/>
+                <a:ea typeface="Poppins" pitchFamily="34" charset="-122"/>
+                <a:cs typeface="Poppins" pitchFamily="34" charset="-120"/>
+              </a:rPr>
+              <a:t>64 PS cases opened this week, concentrated in Tech (40); 131 PS records created. Tech and Onboarding carry almost all the time logged.</a:t>
+            </a:r>
+            <a:endParaRPr lang="en-US" sz="900" dirty="0"/>
+          </a:p>
+        </p:txBody>
+      </p:sp>
+      <p:sp>
+        <p:nvSpPr>
+          <p:cNvPr id="89" name="Text 87"/>
+          <p:cNvSpPr txBox="1"/>
+          <p:nvPr/>
+        </p:nvSpPr>
+        <p:spPr>
+          <a:xfrm>
+            <a:off x="411480" y="6144768"/>
+            <a:ext cx="7589520" cy="256032"/>
+          </a:xfrm>
+          <a:prstGeom prst="rect">
+            <a:avLst/>
+          </a:prstGeom>
+          <a:noFill/>
+          <a:ln/>
+        </p:spPr>
+        <p:txBody>
+          <a:bodyPr wrap="square" lIns="0" tIns="0" rIns="0" bIns="0" rtlCol="0" anchor="ctr"/>
+          <a:lstStyle/>
+          <a:p>
+            <a:pPr indent="0" marL="0">
+              <a:buNone/>
+            </a:pPr>
+            <a:r>
+              <a:rPr lang="en-US" sz="750" dirty="0">
+                <a:solidFill>
+                  <a:srgbClr val="8FA1AC"/>
+                </a:solidFill>
+                <a:latin typeface="Poppins" pitchFamily="34" charset="0"/>
+                <a:ea typeface="Poppins" pitchFamily="34" charset="-122"/>
+                <a:cs typeface="Poppins" pitchFamily="34" charset="-120"/>
+              </a:rPr>
+              <a:t>Per the design ethos: where a source isn't ready the state is shown honestly — never an estimated utilisation presented as measured.</a:t>
+            </a:r>
+            <a:endParaRPr lang="en-US" sz="750" dirty="0"/>
+          </a:p>
+        </p:txBody>
+      </p:sp>
+      <p:sp>
+        <p:nvSpPr>
+          <p:cNvPr id="90" name="Shape 88"/>
+          <p:cNvSpPr/>
+          <p:nvPr/>
+        </p:nvSpPr>
+        <p:spPr>
+          <a:xfrm>
+            <a:off x="8456371" y="6510528"/>
+            <a:ext cx="3321101" cy="256032"/>
           </a:xfrm>
           <a:prstGeom prst="roundRect">
             <a:avLst>
@@ -53421,14 +49013,14 @@
       </p:sp>
       <p:sp>
         <p:nvSpPr>
-          <p:cNvPr id="232" name="Text 230"/>
-          <p:cNvSpPr txBox="1"/>
-          <p:nvPr/>
-        </p:nvSpPr>
-        <p:spPr>
-          <a:xfrm>
-            <a:off x="7710221" y="6510528"/>
-            <a:ext cx="4067251" cy="256032"/>
+          <p:cNvPr id="91" name="Text 89"/>
+          <p:cNvSpPr txBox="1"/>
+          <p:nvPr/>
+        </p:nvSpPr>
+        <p:spPr>
+          <a:xfrm>
+            <a:off x="8456371" y="6510528"/>
+            <a:ext cx="3321101" cy="256032"/>
           </a:xfrm>
           <a:prstGeom prst="rect">
             <a:avLst/>
@@ -53452,7 +49044,7 @@
                 <a:ea typeface="Poppins" pitchFamily="34" charset="-122"/>
                 <a:cs typeface="Poppins" pitchFamily="34" charset="-120"/>
               </a:rPr>
-              <a:t>Source: Creatio (frozen to 4 Sep) + HubSpot PS records (live)</a:t>
+              <a:t>Source: HubSpot PS records (time logging ramping)</a:t>
             </a:r>
             <a:endParaRPr lang="en-US" sz="700" dirty="0"/>
           </a:p>

--- a/exec-deck/output/H&L Weekly Update - WC 14 Sep 2026.pptx
+++ b/exec-deck/output/H&L Weekly Update - WC 14 Sep 2026.pptx
@@ -46236,7 +46236,7 @@
                 <a:ea typeface="Poppins" pitchFamily="34" charset="-122"/>
                 <a:cs typeface="Poppins" pitchFamily="34" charset="-120"/>
               </a:rPr>
-              <a:t>BILLED VS NON-BILLED</a:t>
+              <a:t>BILLABLE UTILISATION</a:t>
             </a:r>
             <a:endParaRPr lang="en-US" sz="950" dirty="0"/>
           </a:p>
@@ -46267,7 +46267,7 @@
               <a:buNone/>
             </a:pPr>
             <a:r>
-              <a:rPr lang="en-US" sz="2000" b="1" dirty="0">
+              <a:rPr lang="en-US" sz="2600" b="1" dirty="0">
                 <a:solidFill>
                   <a:srgbClr val="C88A2E"/>
                 </a:solidFill>
@@ -46275,9 +46275,9 @@
                 <a:ea typeface="Poppins" pitchFamily="34" charset="-122"/>
                 <a:cs typeface="Poppins" pitchFamily="34" charset="-120"/>
               </a:rPr>
-              <a:t>not set up</a:t>
-            </a:r>
-            <a:endParaRPr lang="en-US" sz="2000" dirty="0"/>
+              <a:t>5.8%</a:t>
+            </a:r>
+            <a:endParaRPr lang="en-US" sz="2600" dirty="0"/>
           </a:p>
         </p:txBody>
       </p:sp>
@@ -46314,7 +46314,7 @@
                 <a:ea typeface="Poppins" pitchFamily="34" charset="-122"/>
                 <a:cs typeface="Poppins" pitchFamily="34" charset="-120"/>
               </a:rPr>
-              <a:t>billable flag set on only 3 of 29 records carrying time — not yet separable</a:t>
+              <a:t>33.01h billed of 570h available · target 80%</a:t>
             </a:r>
             <a:endParaRPr lang="en-US" sz="780" dirty="0"/>
           </a:p>
@@ -46382,7 +46382,7 @@
                 <a:ea typeface="Poppins" pitchFamily="34" charset="-122"/>
                 <a:cs typeface="Poppins" pitchFamily="34" charset="-120"/>
               </a:rPr>
-              <a:t>TOTAL UTILISATION</a:t>
+              <a:t>AVAILABLE HOURS — THIS WEEK</a:t>
             </a:r>
             <a:endParaRPr lang="en-US" sz="950" dirty="0"/>
           </a:p>
@@ -46413,17 +46413,17 @@
               <a:buNone/>
             </a:pPr>
             <a:r>
-              <a:rPr lang="en-US" sz="2000" b="1" dirty="0">
-                <a:solidFill>
-                  <a:srgbClr val="C88A2E"/>
-                </a:solidFill>
-                <a:latin typeface="Poppins" pitchFamily="34" charset="0"/>
-                <a:ea typeface="Poppins" pitchFamily="34" charset="-122"/>
-                <a:cs typeface="Poppins" pitchFamily="34" charset="-120"/>
-              </a:rPr>
-              <a:t>not set up</a:t>
-            </a:r>
-            <a:endParaRPr lang="en-US" sz="2000" dirty="0"/>
+              <a:rPr lang="en-US" sz="2600" b="1" dirty="0">
+                <a:solidFill>
+                  <a:srgbClr val="12293A"/>
+                </a:solidFill>
+                <a:latin typeface="Poppins" pitchFamily="34" charset="0"/>
+                <a:ea typeface="Poppins" pitchFamily="34" charset="-122"/>
+                <a:cs typeface="Poppins" pitchFamily="34" charset="-120"/>
+              </a:rPr>
+              <a:t>570h</a:t>
+            </a:r>
+            <a:endParaRPr lang="en-US" sz="2600" dirty="0"/>
           </a:p>
         </p:txBody>
       </p:sp>
@@ -46460,7 +46460,7 @@
                 <a:ea typeface="Poppins" pitchFamily="34" charset="-122"/>
                 <a:cs typeface="Poppins" pitchFamily="34" charset="-120"/>
               </a:rPr>
-              <a:t>capacity model to be rebuilt on HubSpot hours · 80% target unchanged</a:t>
+              <a:t>15 people assigned to PS-pipeline tickets × 38h standard week</a:t>
             </a:r>
             <a:endParaRPr lang="en-US" sz="780" dirty="0"/>
           </a:p>
@@ -46528,7 +46528,7 @@
                 <a:ea typeface="Poppins" pitchFamily="34" charset="-122"/>
                 <a:cs typeface="Poppins" pitchFamily="34" charset="-120"/>
               </a:rPr>
-              <a:t>PS CASES OPENED — THIS WEEK</a:t>
+              <a:t>TIME-LOGGING COVERAGE</a:t>
             </a:r>
             <a:endParaRPr lang="en-US" sz="950" dirty="0"/>
           </a:p>
@@ -46561,13 +46561,13 @@
             <a:r>
               <a:rPr lang="en-US" sz="2600" b="1" dirty="0">
                 <a:solidFill>
-                  <a:srgbClr val="12293A"/>
-                </a:solidFill>
-                <a:latin typeface="Poppins" pitchFamily="34" charset="0"/>
-                <a:ea typeface="Poppins" pitchFamily="34" charset="-122"/>
-                <a:cs typeface="Poppins" pitchFamily="34" charset="-120"/>
-              </a:rPr>
-              <a:t>64</a:t>
+                  <a:srgbClr val="C88A2E"/>
+                </a:solidFill>
+                <a:latin typeface="Poppins" pitchFamily="34" charset="0"/>
+                <a:ea typeface="Poppins" pitchFamily="34" charset="-122"/>
+                <a:cs typeface="Poppins" pitchFamily="34" charset="-120"/>
+              </a:rPr>
+              <a:t>13%</a:t>
             </a:r>
             <a:endParaRPr lang="en-US" sz="2600" dirty="0"/>
           </a:p>
@@ -46606,7 +46606,7 @@
                 <a:ea typeface="Poppins" pitchFamily="34" charset="-122"/>
                 <a:cs typeface="Poppins" pitchFamily="34" charset="-120"/>
               </a:rPr>
-              <a:t>Tech 40 · Integrations 14 · Training 7 · Onboarding 3 · Warranty 0 (HubSpot, live)</a:t>
+              <a:t>17 of 132 PS items raised this week carry hours — utilisation reads low because logging is ramping, not because delivery stopped</a:t>
             </a:r>
             <a:endParaRPr lang="en-US" sz="780" dirty="0"/>
           </a:p>
@@ -46650,7 +46650,7 @@
         <p:spPr>
           <a:xfrm>
             <a:off x="612648" y="2505456"/>
-            <a:ext cx="6035040" cy="274320"/>
+            <a:ext cx="6181344" cy="274320"/>
           </a:xfrm>
           <a:prstGeom prst="rect">
             <a:avLst/>
@@ -46674,7 +46674,21 @@
                 <a:ea typeface="Poppins" pitchFamily="34" charset="-122"/>
                 <a:cs typeface="Poppins" pitchFamily="34" charset="-120"/>
               </a:rPr>
-              <a:t>HOURS LOGGED ON PS RECORDS — RAMPING</a:t>
+              <a:t>BILLABLE BY EMPLOYEE  </a:t>
+            </a:r>
+            <a:pPr indent="0" marL="0">
+              <a:buNone/>
+            </a:pPr>
+            <a:r>
+              <a:rPr lang="en-US" sz="700" dirty="0">
+                <a:solidFill>
+                  <a:srgbClr val="8FA1AC"/>
+                </a:solidFill>
+                <a:latin typeface="Poppins" pitchFamily="34" charset="0"/>
+                <a:ea typeface="Poppins" pitchFamily="34" charset="-122"/>
+                <a:cs typeface="Poppins" pitchFamily="34" charset="-120"/>
+              </a:rPr>
+              <a:t>hours logged against 38h available each</a:t>
             </a:r>
             <a:endParaRPr lang="en-US" sz="1200" dirty="0"/>
           </a:p>
@@ -46688,34 +46702,34 @@
         </p:nvSpPr>
         <p:spPr>
           <a:xfrm>
-            <a:off x="640080" y="2807208"/>
-            <a:ext cx="2011680" cy="502920"/>
-          </a:xfrm>
-          <a:prstGeom prst="rect">
-            <a:avLst/>
-          </a:prstGeom>
-          <a:noFill/>
-          <a:ln/>
-        </p:spPr>
-        <p:txBody>
-          <a:bodyPr wrap="square" lIns="0" tIns="0" rIns="0" bIns="0" rtlCol="0" anchor="ctr"/>
-          <a:lstStyle/>
-          <a:p>
-            <a:pPr indent="0" marL="0">
-              <a:buNone/>
-            </a:pPr>
-            <a:r>
-              <a:rPr lang="en-US" sz="3000" b="1" dirty="0">
-                <a:solidFill>
-                  <a:srgbClr val="2C8394"/>
-                </a:solidFill>
-                <a:latin typeface="Poppins" pitchFamily="34" charset="0"/>
-                <a:ea typeface="Poppins" pitchFamily="34" charset="-122"/>
-                <a:cs typeface="Poppins" pitchFamily="34" charset="-120"/>
-              </a:rPr>
-              <a:t>78.93h</a:t>
-            </a:r>
-            <a:endParaRPr lang="en-US" sz="3000" dirty="0"/>
+            <a:off x="640080" y="2834640"/>
+            <a:ext cx="1737360" cy="182880"/>
+          </a:xfrm>
+          <a:prstGeom prst="rect">
+            <a:avLst/>
+          </a:prstGeom>
+          <a:noFill/>
+          <a:ln/>
+        </p:spPr>
+        <p:txBody>
+          <a:bodyPr wrap="square" lIns="0" tIns="0" rIns="0" bIns="0" rtlCol="0" anchor="ctr"/>
+          <a:lstStyle/>
+          <a:p>
+            <a:pPr algn="l" indent="0" marL="0">
+              <a:buNone/>
+            </a:pPr>
+            <a:r>
+              <a:rPr lang="en-US" sz="700" b="1" dirty="0">
+                <a:solidFill>
+                  <a:srgbClr val="8FA1AC"/>
+                </a:solidFill>
+                <a:latin typeface="Poppins" pitchFamily="34" charset="0"/>
+                <a:ea typeface="Poppins" pitchFamily="34" charset="-122"/>
+                <a:cs typeface="Poppins" pitchFamily="34" charset="-120"/>
+              </a:rPr>
+              <a:t>PS TEAM MEMBER</a:t>
+            </a:r>
+            <a:endParaRPr lang="en-US" sz="700" dirty="0"/>
           </a:p>
         </p:txBody>
       </p:sp>
@@ -46727,34 +46741,34 @@
         </p:nvSpPr>
         <p:spPr>
           <a:xfrm>
-            <a:off x="2697480" y="2852928"/>
-            <a:ext cx="4023360" cy="457200"/>
-          </a:xfrm>
-          <a:prstGeom prst="rect">
-            <a:avLst/>
-          </a:prstGeom>
-          <a:noFill/>
-          <a:ln/>
-        </p:spPr>
-        <p:txBody>
-          <a:bodyPr wrap="square" lIns="0" tIns="0" rIns="0" bIns="0" rtlCol="0" anchor="ctr"/>
-          <a:lstStyle/>
-          <a:p>
-            <a:pPr indent="0" marL="0">
-              <a:buNone/>
-            </a:pPr>
-            <a:r>
-              <a:rPr lang="en-US" sz="850" dirty="0">
-                <a:solidFill>
-                  <a:srgbClr val="5E7280"/>
-                </a:solidFill>
-                <a:latin typeface="Poppins" pitchFamily="34" charset="0"/>
-                <a:ea typeface="Poppins" pitchFamily="34" charset="-122"/>
-                <a:cs typeface="Poppins" pitchFamily="34" charset="-120"/>
-              </a:rPr>
-              <a:t>across 29 of 8,969 records — the new ground truth (total_hours on the Professional Services record)</a:t>
-            </a:r>
-            <a:endParaRPr lang="en-US" sz="850" dirty="0"/>
+            <a:off x="2468880" y="2834640"/>
+            <a:ext cx="2377440" cy="182880"/>
+          </a:xfrm>
+          <a:prstGeom prst="rect">
+            <a:avLst/>
+          </a:prstGeom>
+          <a:noFill/>
+          <a:ln/>
+        </p:spPr>
+        <p:txBody>
+          <a:bodyPr wrap="square" lIns="0" tIns="0" rIns="0" bIns="0" rtlCol="0" anchor="ctr"/>
+          <a:lstStyle/>
+          <a:p>
+            <a:pPr algn="l" indent="0" marL="0">
+              <a:buNone/>
+            </a:pPr>
+            <a:r>
+              <a:rPr lang="en-US" sz="700" b="1" dirty="0">
+                <a:solidFill>
+                  <a:srgbClr val="8FA1AC"/>
+                </a:solidFill>
+                <a:latin typeface="Poppins" pitchFamily="34" charset="0"/>
+                <a:ea typeface="Poppins" pitchFamily="34" charset="-122"/>
+                <a:cs typeface="Poppins" pitchFamily="34" charset="-120"/>
+              </a:rPr>
+              <a:t>UTILISATION OF 38h</a:t>
+            </a:r>
+            <a:endParaRPr lang="en-US" sz="700" dirty="0"/>
           </a:p>
         </p:txBody>
       </p:sp>
@@ -46766,32 +46780,110 @@
         </p:nvSpPr>
         <p:spPr>
           <a:xfrm>
-            <a:off x="640080" y="3493008"/>
-            <a:ext cx="2743200" cy="201168"/>
-          </a:xfrm>
-          <a:prstGeom prst="rect">
-            <a:avLst/>
-          </a:prstGeom>
-          <a:noFill/>
-          <a:ln/>
-        </p:spPr>
-        <p:txBody>
-          <a:bodyPr wrap="square" lIns="0" tIns="0" rIns="0" bIns="0" rtlCol="0" anchor="ctr"/>
-          <a:lstStyle/>
-          <a:p>
-            <a:pPr algn="l" indent="0" marL="0">
+            <a:off x="5029200" y="2834640"/>
+            <a:ext cx="822960" cy="182880"/>
+          </a:xfrm>
+          <a:prstGeom prst="rect">
+            <a:avLst/>
+          </a:prstGeom>
+          <a:noFill/>
+          <a:ln/>
+        </p:spPr>
+        <p:txBody>
+          <a:bodyPr wrap="square" lIns="0" tIns="0" rIns="0" bIns="0" rtlCol="0" anchor="ctr"/>
+          <a:lstStyle/>
+          <a:p>
+            <a:pPr algn="r" indent="0" marL="0">
+              <a:buNone/>
+            </a:pPr>
+            <a:r>
+              <a:rPr lang="en-US" sz="700" b="1" dirty="0">
+                <a:solidFill>
+                  <a:srgbClr val="8FA1AC"/>
+                </a:solidFill>
+                <a:latin typeface="Poppins" pitchFamily="34" charset="0"/>
+                <a:ea typeface="Poppins" pitchFamily="34" charset="-122"/>
+                <a:cs typeface="Poppins" pitchFamily="34" charset="-120"/>
+              </a:rPr>
+              <a:t>HOURS</a:t>
+            </a:r>
+            <a:endParaRPr lang="en-US" sz="700" dirty="0"/>
+          </a:p>
+        </p:txBody>
+      </p:sp>
+      <p:sp>
+        <p:nvSpPr>
+          <p:cNvPr id="32" name="Text 30"/>
+          <p:cNvSpPr txBox="1"/>
+          <p:nvPr/>
+        </p:nvSpPr>
+        <p:spPr>
+          <a:xfrm>
+            <a:off x="5943600" y="2834640"/>
+            <a:ext cx="822960" cy="182880"/>
+          </a:xfrm>
+          <a:prstGeom prst="rect">
+            <a:avLst/>
+          </a:prstGeom>
+          <a:noFill/>
+          <a:ln/>
+        </p:spPr>
+        <p:txBody>
+          <a:bodyPr wrap="square" lIns="0" tIns="0" rIns="0" bIns="0" rtlCol="0" anchor="ctr"/>
+          <a:lstStyle/>
+          <a:p>
+            <a:pPr algn="r" indent="0" marL="0">
+              <a:buNone/>
+            </a:pPr>
+            <a:r>
+              <a:rPr lang="en-US" sz="700" b="1" dirty="0">
+                <a:solidFill>
+                  <a:srgbClr val="8FA1AC"/>
+                </a:solidFill>
+                <a:latin typeface="Poppins" pitchFamily="34" charset="0"/>
+                <a:ea typeface="Poppins" pitchFamily="34" charset="-122"/>
+                <a:cs typeface="Poppins" pitchFamily="34" charset="-120"/>
+              </a:rPr>
+              <a:t>UTIL %</a:t>
+            </a:r>
+            <a:endParaRPr lang="en-US" sz="700" dirty="0"/>
+          </a:p>
+        </p:txBody>
+      </p:sp>
+      <p:sp>
+        <p:nvSpPr>
+          <p:cNvPr id="33" name="Text 31"/>
+          <p:cNvSpPr txBox="1"/>
+          <p:nvPr/>
+        </p:nvSpPr>
+        <p:spPr>
+          <a:xfrm>
+            <a:off x="640080" y="3035808"/>
+            <a:ext cx="1783080" cy="169164"/>
+          </a:xfrm>
+          <a:prstGeom prst="rect">
+            <a:avLst/>
+          </a:prstGeom>
+          <a:noFill/>
+          <a:ln/>
+        </p:spPr>
+        <p:txBody>
+          <a:bodyPr wrap="square" lIns="0" tIns="0" rIns="0" bIns="0" rtlCol="0" anchor="ctr"/>
+          <a:lstStyle/>
+          <a:p>
+            <a:pPr indent="0" marL="0">
               <a:buNone/>
             </a:pPr>
             <a:r>
               <a:rPr lang="en-US" sz="800" b="1" dirty="0">
                 <a:solidFill>
-                  <a:srgbClr val="8FA1AC"/>
-                </a:solidFill>
-                <a:latin typeface="Poppins" pitchFamily="34" charset="0"/>
-                <a:ea typeface="Poppins" pitchFamily="34" charset="-122"/>
-                <a:cs typeface="Poppins" pitchFamily="34" charset="-120"/>
-              </a:rPr>
-              <a:t>SERVICE TYPE</a:t>
+                  <a:srgbClr val="12293A"/>
+                </a:solidFill>
+                <a:latin typeface="Poppins" pitchFamily="34" charset="0"/>
+                <a:ea typeface="Poppins" pitchFamily="34" charset="-122"/>
+                <a:cs typeface="Poppins" pitchFamily="34" charset="-120"/>
+              </a:rPr>
+              <a:t>Katherine Fenwick</a:t>
             </a:r>
             <a:endParaRPr lang="en-US" sz="800" dirty="0"/>
           </a:p>
@@ -46799,256 +46891,21 @@
       </p:sp>
       <p:sp>
         <p:nvSpPr>
-          <p:cNvPr id="32" name="Text 30"/>
-          <p:cNvSpPr txBox="1"/>
-          <p:nvPr/>
-        </p:nvSpPr>
-        <p:spPr>
-          <a:xfrm>
-            <a:off x="3520440" y="3493008"/>
-            <a:ext cx="1463040" cy="201168"/>
-          </a:xfrm>
-          <a:prstGeom prst="rect">
-            <a:avLst/>
-          </a:prstGeom>
-          <a:noFill/>
-          <a:ln/>
-        </p:spPr>
-        <p:txBody>
-          <a:bodyPr wrap="square" lIns="0" tIns="0" rIns="0" bIns="0" rtlCol="0" anchor="ctr"/>
-          <a:lstStyle/>
-          <a:p>
-            <a:pPr algn="r" indent="0" marL="0">
-              <a:buNone/>
-            </a:pPr>
-            <a:r>
-              <a:rPr lang="en-US" sz="800" b="1" dirty="0">
-                <a:solidFill>
-                  <a:srgbClr val="8FA1AC"/>
-                </a:solidFill>
-                <a:latin typeface="Poppins" pitchFamily="34" charset="0"/>
-                <a:ea typeface="Poppins" pitchFamily="34" charset="-122"/>
-                <a:cs typeface="Poppins" pitchFamily="34" charset="-120"/>
-              </a:rPr>
-              <a:t>HOURS LOGGED</a:t>
-            </a:r>
-            <a:endParaRPr lang="en-US" sz="800" dirty="0"/>
-          </a:p>
-        </p:txBody>
-      </p:sp>
-      <p:sp>
-        <p:nvSpPr>
-          <p:cNvPr id="33" name="Text 31"/>
-          <p:cNvSpPr txBox="1"/>
-          <p:nvPr/>
-        </p:nvSpPr>
-        <p:spPr>
-          <a:xfrm>
-            <a:off x="5166360" y="3493008"/>
-            <a:ext cx="1463040" cy="201168"/>
-          </a:xfrm>
-          <a:prstGeom prst="rect">
-            <a:avLst/>
-          </a:prstGeom>
-          <a:noFill/>
-          <a:ln/>
-        </p:spPr>
-        <p:txBody>
-          <a:bodyPr wrap="square" lIns="0" tIns="0" rIns="0" bIns="0" rtlCol="0" anchor="ctr"/>
-          <a:lstStyle/>
-          <a:p>
-            <a:pPr algn="r" indent="0" marL="0">
-              <a:buNone/>
-            </a:pPr>
-            <a:r>
-              <a:rPr lang="en-US" sz="800" b="1" dirty="0">
-                <a:solidFill>
-                  <a:srgbClr val="8FA1AC"/>
-                </a:solidFill>
-                <a:latin typeface="Poppins" pitchFamily="34" charset="0"/>
-                <a:ea typeface="Poppins" pitchFamily="34" charset="-122"/>
-                <a:cs typeface="Poppins" pitchFamily="34" charset="-120"/>
-              </a:rPr>
-              <a:t>RECORDS</a:t>
-            </a:r>
-            <a:endParaRPr lang="en-US" sz="800" dirty="0"/>
-          </a:p>
-        </p:txBody>
-      </p:sp>
-      <p:sp>
-        <p:nvSpPr>
           <p:cNvPr id="34" name="Shape 32"/>
           <p:cNvSpPr/>
           <p:nvPr/>
         </p:nvSpPr>
         <p:spPr>
           <a:xfrm>
-            <a:off x="640080" y="4087368"/>
-            <a:ext cx="6126480" cy="6401"/>
-          </a:xfrm>
-          <a:prstGeom prst="rect">
-            <a:avLst/>
-          </a:prstGeom>
-          <a:solidFill>
-            <a:srgbClr val="E2EAEE"/>
-          </a:solidFill>
-          <a:ln/>
-        </p:spPr>
-      </p:sp>
-      <p:sp>
-        <p:nvSpPr>
-          <p:cNvPr id="35" name="Text 33"/>
-          <p:cNvSpPr txBox="1"/>
-          <p:nvPr/>
-        </p:nvSpPr>
-        <p:spPr>
-          <a:xfrm>
-            <a:off x="640080" y="3749040"/>
-            <a:ext cx="1417320" cy="347472"/>
-          </a:xfrm>
-          <a:prstGeom prst="rect">
-            <a:avLst/>
-          </a:prstGeom>
-          <a:noFill/>
-          <a:ln/>
-        </p:spPr>
-        <p:txBody>
-          <a:bodyPr wrap="square" lIns="0" tIns="0" rIns="0" bIns="0" rtlCol="0" anchor="ctr"/>
-          <a:lstStyle/>
-          <a:p>
-            <a:pPr indent="0" marL="0">
-              <a:buNone/>
-            </a:pPr>
-            <a:r>
-              <a:rPr lang="en-US" sz="950" b="1" dirty="0">
-                <a:solidFill>
-                  <a:srgbClr val="12293A"/>
-                </a:solidFill>
-                <a:latin typeface="Poppins" pitchFamily="34" charset="0"/>
-                <a:ea typeface="Poppins" pitchFamily="34" charset="-122"/>
-                <a:cs typeface="Poppins" pitchFamily="34" charset="-120"/>
-              </a:rPr>
-              <a:t>Tech</a:t>
-            </a:r>
-            <a:endParaRPr lang="en-US" sz="950" dirty="0"/>
-          </a:p>
-        </p:txBody>
-      </p:sp>
-      <p:sp>
-        <p:nvSpPr>
-          <p:cNvPr id="36" name="Shape 34"/>
-          <p:cNvSpPr/>
-          <p:nvPr/>
-        </p:nvSpPr>
-        <p:spPr>
-          <a:xfrm>
-            <a:off x="2148840" y="3867912"/>
-            <a:ext cx="1234440" cy="118872"/>
+            <a:off x="2468880" y="3096158"/>
+            <a:ext cx="2377440" cy="59436"/>
           </a:xfrm>
           <a:prstGeom prst="roundRect">
             <a:avLst>
-              <a:gd name="adj" fmla="val 38462"/>
+              <a:gd name="adj" fmla="val 49231"/>
             </a:avLst>
           </a:prstGeom>
           <a:solidFill>
-            <a:srgbClr val="2C8394"/>
-          </a:solidFill>
-          <a:ln/>
-        </p:spPr>
-      </p:sp>
-      <p:sp>
-        <p:nvSpPr>
-          <p:cNvPr id="37" name="Text 35"/>
-          <p:cNvSpPr txBox="1"/>
-          <p:nvPr/>
-        </p:nvSpPr>
-        <p:spPr>
-          <a:xfrm>
-            <a:off x="3520440" y="3749040"/>
-            <a:ext cx="1463040" cy="347472"/>
-          </a:xfrm>
-          <a:prstGeom prst="rect">
-            <a:avLst/>
-          </a:prstGeom>
-          <a:noFill/>
-          <a:ln/>
-        </p:spPr>
-        <p:txBody>
-          <a:bodyPr wrap="square" lIns="0" tIns="0" rIns="0" bIns="0" rtlCol="0" anchor="ctr"/>
-          <a:lstStyle/>
-          <a:p>
-            <a:pPr algn="r" indent="0" marL="0">
-              <a:buNone/>
-            </a:pPr>
-            <a:r>
-              <a:rPr lang="en-US" sz="950" b="1" dirty="0">
-                <a:solidFill>
-                  <a:srgbClr val="2C8394"/>
-                </a:solidFill>
-                <a:latin typeface="Poppins" pitchFamily="34" charset="0"/>
-                <a:ea typeface="Poppins" pitchFamily="34" charset="-122"/>
-                <a:cs typeface="Poppins" pitchFamily="34" charset="-120"/>
-              </a:rPr>
-              <a:t>36.9h</a:t>
-            </a:r>
-            <a:endParaRPr lang="en-US" sz="950" dirty="0"/>
-          </a:p>
-        </p:txBody>
-      </p:sp>
-      <p:sp>
-        <p:nvSpPr>
-          <p:cNvPr id="38" name="Text 36"/>
-          <p:cNvSpPr txBox="1"/>
-          <p:nvPr/>
-        </p:nvSpPr>
-        <p:spPr>
-          <a:xfrm>
-            <a:off x="5166360" y="3749040"/>
-            <a:ext cx="1463040" cy="347472"/>
-          </a:xfrm>
-          <a:prstGeom prst="rect">
-            <a:avLst/>
-          </a:prstGeom>
-          <a:noFill/>
-          <a:ln/>
-        </p:spPr>
-        <p:txBody>
-          <a:bodyPr wrap="square" lIns="0" tIns="0" rIns="0" bIns="0" rtlCol="0" anchor="ctr"/>
-          <a:lstStyle/>
-          <a:p>
-            <a:pPr algn="r" indent="0" marL="0">
-              <a:buNone/>
-            </a:pPr>
-            <a:r>
-              <a:rPr lang="en-US" sz="950" dirty="0">
-                <a:solidFill>
-                  <a:srgbClr val="5E7280"/>
-                </a:solidFill>
-                <a:latin typeface="Poppins" pitchFamily="34" charset="0"/>
-                <a:ea typeface="Poppins" pitchFamily="34" charset="-122"/>
-                <a:cs typeface="Poppins" pitchFamily="34" charset="-120"/>
-              </a:rPr>
-              <a:t>19</a:t>
-            </a:r>
-            <a:endParaRPr lang="en-US" sz="950" dirty="0"/>
-          </a:p>
-        </p:txBody>
-      </p:sp>
-      <p:sp>
-        <p:nvSpPr>
-          <p:cNvPr id="39" name="Shape 37"/>
-          <p:cNvSpPr/>
-          <p:nvPr/>
-        </p:nvSpPr>
-        <p:spPr>
-          <a:xfrm>
-            <a:off x="640080" y="4471416"/>
-            <a:ext cx="6126480" cy="6401"/>
-          </a:xfrm>
-          <a:prstGeom prst="rect">
-            <a:avLst/>
-          </a:prstGeom>
-          <a:solidFill>
             <a:srgbClr val="E2EAEE"/>
           </a:solidFill>
           <a:ln/>
@@ -47056,57 +46913,18 @@
       </p:sp>
       <p:sp>
         <p:nvSpPr>
-          <p:cNvPr id="40" name="Text 38"/>
-          <p:cNvSpPr txBox="1"/>
-          <p:nvPr/>
-        </p:nvSpPr>
-        <p:spPr>
-          <a:xfrm>
-            <a:off x="640080" y="4133088"/>
-            <a:ext cx="1417320" cy="347472"/>
-          </a:xfrm>
-          <a:prstGeom prst="rect">
-            <a:avLst/>
-          </a:prstGeom>
-          <a:noFill/>
-          <a:ln/>
-        </p:spPr>
-        <p:txBody>
-          <a:bodyPr wrap="square" lIns="0" tIns="0" rIns="0" bIns="0" rtlCol="0" anchor="ctr"/>
-          <a:lstStyle/>
-          <a:p>
-            <a:pPr indent="0" marL="0">
-              <a:buNone/>
-            </a:pPr>
-            <a:r>
-              <a:rPr lang="en-US" sz="950" b="1" dirty="0">
-                <a:solidFill>
-                  <a:srgbClr val="12293A"/>
-                </a:solidFill>
-                <a:latin typeface="Poppins" pitchFamily="34" charset="0"/>
-                <a:ea typeface="Poppins" pitchFamily="34" charset="-122"/>
-                <a:cs typeface="Poppins" pitchFamily="34" charset="-120"/>
-              </a:rPr>
-              <a:t>Onboarding</a:t>
-            </a:r>
-            <a:endParaRPr lang="en-US" sz="950" dirty="0"/>
-          </a:p>
-        </p:txBody>
-      </p:sp>
-      <p:sp>
-        <p:nvSpPr>
-          <p:cNvPr id="41" name="Shape 39"/>
-          <p:cNvSpPr/>
-          <p:nvPr/>
-        </p:nvSpPr>
-        <p:spPr>
-          <a:xfrm>
-            <a:off x="2148840" y="4251960"/>
-            <a:ext cx="1200986" cy="118872"/>
+          <p:cNvPr id="35" name="Shape 33"/>
+          <p:cNvSpPr/>
+          <p:nvPr/>
+        </p:nvSpPr>
+        <p:spPr>
+          <a:xfrm>
+            <a:off x="2468880" y="3096158"/>
+            <a:ext cx="908182" cy="59436"/>
           </a:xfrm>
           <a:prstGeom prst="roundRect">
             <a:avLst>
-              <a:gd name="adj" fmla="val 38462"/>
+              <a:gd name="adj" fmla="val 49231"/>
             </a:avLst>
           </a:prstGeom>
           <a:solidFill>
@@ -47117,14 +46935,14 @@
       </p:sp>
       <p:sp>
         <p:nvSpPr>
-          <p:cNvPr id="42" name="Text 40"/>
-          <p:cNvSpPr txBox="1"/>
-          <p:nvPr/>
-        </p:nvSpPr>
-        <p:spPr>
-          <a:xfrm>
-            <a:off x="3520440" y="4133088"/>
-            <a:ext cx="1463040" cy="347472"/>
+          <p:cNvPr id="36" name="Text 34"/>
+          <p:cNvSpPr txBox="1"/>
+          <p:nvPr/>
+        </p:nvSpPr>
+        <p:spPr>
+          <a:xfrm>
+            <a:off x="5029200" y="3035808"/>
+            <a:ext cx="822960" cy="169164"/>
           </a:xfrm>
           <a:prstGeom prst="rect">
             <a:avLst/>
@@ -47140,7 +46958,7 @@
               <a:buNone/>
             </a:pPr>
             <a:r>
-              <a:rPr lang="en-US" sz="950" b="1" dirty="0">
+              <a:rPr lang="en-US" sz="800" b="1" dirty="0">
                 <a:solidFill>
                   <a:srgbClr val="2C8394"/>
                 </a:solidFill>
@@ -47148,22 +46966,22 @@
                 <a:ea typeface="Poppins" pitchFamily="34" charset="-122"/>
                 <a:cs typeface="Poppins" pitchFamily="34" charset="-120"/>
               </a:rPr>
-              <a:t>35.9h</a:t>
-            </a:r>
-            <a:endParaRPr lang="en-US" sz="950" dirty="0"/>
-          </a:p>
-        </p:txBody>
-      </p:sp>
-      <p:sp>
-        <p:nvSpPr>
-          <p:cNvPr id="43" name="Text 41"/>
-          <p:cNvSpPr txBox="1"/>
-          <p:nvPr/>
-        </p:nvSpPr>
-        <p:spPr>
-          <a:xfrm>
-            <a:off x="5166360" y="4133088"/>
-            <a:ext cx="1463040" cy="347472"/>
+              <a:t>14.50h</a:t>
+            </a:r>
+            <a:endParaRPr lang="en-US" sz="800" dirty="0"/>
+          </a:p>
+        </p:txBody>
+      </p:sp>
+      <p:sp>
+        <p:nvSpPr>
+          <p:cNvPr id="37" name="Text 35"/>
+          <p:cNvSpPr txBox="1"/>
+          <p:nvPr/>
+        </p:nvSpPr>
+        <p:spPr>
+          <a:xfrm>
+            <a:off x="5943600" y="3035808"/>
+            <a:ext cx="822960" cy="169164"/>
           </a:xfrm>
           <a:prstGeom prst="rect">
             <a:avLst/>
@@ -47179,66 +46997,7 @@
               <a:buNone/>
             </a:pPr>
             <a:r>
-              <a:rPr lang="en-US" sz="950" dirty="0">
-                <a:solidFill>
-                  <a:srgbClr val="5E7280"/>
-                </a:solidFill>
-                <a:latin typeface="Poppins" pitchFamily="34" charset="0"/>
-                <a:ea typeface="Poppins" pitchFamily="34" charset="-122"/>
-                <a:cs typeface="Poppins" pitchFamily="34" charset="-120"/>
-              </a:rPr>
-              <a:t>3</a:t>
-            </a:r>
-            <a:endParaRPr lang="en-US" sz="950" dirty="0"/>
-          </a:p>
-        </p:txBody>
-      </p:sp>
-      <p:sp>
-        <p:nvSpPr>
-          <p:cNvPr id="44" name="Shape 42"/>
-          <p:cNvSpPr/>
-          <p:nvPr/>
-        </p:nvSpPr>
-        <p:spPr>
-          <a:xfrm>
-            <a:off x="640080" y="4855464"/>
-            <a:ext cx="6126480" cy="6401"/>
-          </a:xfrm>
-          <a:prstGeom prst="rect">
-            <a:avLst/>
-          </a:prstGeom>
-          <a:solidFill>
-            <a:srgbClr val="E2EAEE"/>
-          </a:solidFill>
-          <a:ln/>
-        </p:spPr>
-      </p:sp>
-      <p:sp>
-        <p:nvSpPr>
-          <p:cNvPr id="45" name="Text 43"/>
-          <p:cNvSpPr txBox="1"/>
-          <p:nvPr/>
-        </p:nvSpPr>
-        <p:spPr>
-          <a:xfrm>
-            <a:off x="640080" y="4517136"/>
-            <a:ext cx="1417320" cy="347472"/>
-          </a:xfrm>
-          <a:prstGeom prst="rect">
-            <a:avLst/>
-          </a:prstGeom>
-          <a:noFill/>
-          <a:ln/>
-        </p:spPr>
-        <p:txBody>
-          <a:bodyPr wrap="square" lIns="0" tIns="0" rIns="0" bIns="0" rtlCol="0" anchor="ctr"/>
-          <a:lstStyle/>
-          <a:p>
-            <a:pPr indent="0" marL="0">
-              <a:buNone/>
-            </a:pPr>
-            <a:r>
-              <a:rPr lang="en-US" sz="950" b="1" dirty="0">
+              <a:rPr lang="en-US" sz="800" b="1" dirty="0">
                 <a:solidFill>
                   <a:srgbClr val="12293A"/>
                 </a:solidFill>
@@ -47246,127 +47005,68 @@
                 <a:ea typeface="Poppins" pitchFamily="34" charset="-122"/>
                 <a:cs typeface="Poppins" pitchFamily="34" charset="-120"/>
               </a:rPr>
-              <a:t>Other / unassigned</a:t>
-            </a:r>
-            <a:endParaRPr lang="en-US" sz="950" dirty="0"/>
-          </a:p>
-        </p:txBody>
-      </p:sp>
-      <p:sp>
-        <p:nvSpPr>
-          <p:cNvPr id="46" name="Shape 44"/>
-          <p:cNvSpPr/>
-          <p:nvPr/>
-        </p:nvSpPr>
-        <p:spPr>
-          <a:xfrm>
-            <a:off x="2148840" y="4636008"/>
-            <a:ext cx="100361" cy="118872"/>
+              <a:t>38.2%</a:t>
+            </a:r>
+            <a:endParaRPr lang="en-US" sz="800" dirty="0"/>
+          </a:p>
+        </p:txBody>
+      </p:sp>
+      <p:sp>
+        <p:nvSpPr>
+          <p:cNvPr id="38" name="Text 36"/>
+          <p:cNvSpPr txBox="1"/>
+          <p:nvPr/>
+        </p:nvSpPr>
+        <p:spPr>
+          <a:xfrm>
+            <a:off x="640080" y="3204972"/>
+            <a:ext cx="1783080" cy="169164"/>
+          </a:xfrm>
+          <a:prstGeom prst="rect">
+            <a:avLst/>
+          </a:prstGeom>
+          <a:noFill/>
+          <a:ln/>
+        </p:spPr>
+        <p:txBody>
+          <a:bodyPr wrap="square" lIns="0" tIns="0" rIns="0" bIns="0" rtlCol="0" anchor="ctr"/>
+          <a:lstStyle/>
+          <a:p>
+            <a:pPr indent="0" marL="0">
+              <a:buNone/>
+            </a:pPr>
+            <a:r>
+              <a:rPr lang="en-US" sz="800" b="1" dirty="0">
+                <a:solidFill>
+                  <a:srgbClr val="12293A"/>
+                </a:solidFill>
+                <a:latin typeface="Poppins" pitchFamily="34" charset="0"/>
+                <a:ea typeface="Poppins" pitchFamily="34" charset="-122"/>
+                <a:cs typeface="Poppins" pitchFamily="34" charset="-120"/>
+              </a:rPr>
+              <a:t>Rhys Woolcock</a:t>
+            </a:r>
+            <a:endParaRPr lang="en-US" sz="800" dirty="0"/>
+          </a:p>
+        </p:txBody>
+      </p:sp>
+      <p:sp>
+        <p:nvSpPr>
+          <p:cNvPr id="39" name="Shape 37"/>
+          <p:cNvSpPr/>
+          <p:nvPr/>
+        </p:nvSpPr>
+        <p:spPr>
+          <a:xfrm>
+            <a:off x="2468880" y="3265322"/>
+            <a:ext cx="2377440" cy="59436"/>
           </a:xfrm>
           <a:prstGeom prst="roundRect">
             <a:avLst>
-              <a:gd name="adj" fmla="val 45556"/>
+              <a:gd name="adj" fmla="val 49231"/>
             </a:avLst>
           </a:prstGeom>
           <a:solidFill>
-            <a:srgbClr val="2C8394"/>
-          </a:solidFill>
-          <a:ln/>
-        </p:spPr>
-      </p:sp>
-      <p:sp>
-        <p:nvSpPr>
-          <p:cNvPr id="47" name="Text 45"/>
-          <p:cNvSpPr txBox="1"/>
-          <p:nvPr/>
-        </p:nvSpPr>
-        <p:spPr>
-          <a:xfrm>
-            <a:off x="3520440" y="4517136"/>
-            <a:ext cx="1463040" cy="347472"/>
-          </a:xfrm>
-          <a:prstGeom prst="rect">
-            <a:avLst/>
-          </a:prstGeom>
-          <a:noFill/>
-          <a:ln/>
-        </p:spPr>
-        <p:txBody>
-          <a:bodyPr wrap="square" lIns="0" tIns="0" rIns="0" bIns="0" rtlCol="0" anchor="ctr"/>
-          <a:lstStyle/>
-          <a:p>
-            <a:pPr algn="r" indent="0" marL="0">
-              <a:buNone/>
-            </a:pPr>
-            <a:r>
-              <a:rPr lang="en-US" sz="950" b="1" dirty="0">
-                <a:solidFill>
-                  <a:srgbClr val="2C8394"/>
-                </a:solidFill>
-                <a:latin typeface="Poppins" pitchFamily="34" charset="0"/>
-                <a:ea typeface="Poppins" pitchFamily="34" charset="-122"/>
-                <a:cs typeface="Poppins" pitchFamily="34" charset="-120"/>
-              </a:rPr>
-              <a:t>3.0h</a:t>
-            </a:r>
-            <a:endParaRPr lang="en-US" sz="950" dirty="0"/>
-          </a:p>
-        </p:txBody>
-      </p:sp>
-      <p:sp>
-        <p:nvSpPr>
-          <p:cNvPr id="48" name="Text 46"/>
-          <p:cNvSpPr txBox="1"/>
-          <p:nvPr/>
-        </p:nvSpPr>
-        <p:spPr>
-          <a:xfrm>
-            <a:off x="5166360" y="4517136"/>
-            <a:ext cx="1463040" cy="347472"/>
-          </a:xfrm>
-          <a:prstGeom prst="rect">
-            <a:avLst/>
-          </a:prstGeom>
-          <a:noFill/>
-          <a:ln/>
-        </p:spPr>
-        <p:txBody>
-          <a:bodyPr wrap="square" lIns="0" tIns="0" rIns="0" bIns="0" rtlCol="0" anchor="ctr"/>
-          <a:lstStyle/>
-          <a:p>
-            <a:pPr algn="r" indent="0" marL="0">
-              <a:buNone/>
-            </a:pPr>
-            <a:r>
-              <a:rPr lang="en-US" sz="950" dirty="0">
-                <a:solidFill>
-                  <a:srgbClr val="5E7280"/>
-                </a:solidFill>
-                <a:latin typeface="Poppins" pitchFamily="34" charset="0"/>
-                <a:ea typeface="Poppins" pitchFamily="34" charset="-122"/>
-                <a:cs typeface="Poppins" pitchFamily="34" charset="-120"/>
-              </a:rPr>
-              <a:t>3</a:t>
-            </a:r>
-            <a:endParaRPr lang="en-US" sz="950" dirty="0"/>
-          </a:p>
-        </p:txBody>
-      </p:sp>
-      <p:sp>
-        <p:nvSpPr>
-          <p:cNvPr id="49" name="Shape 47"/>
-          <p:cNvSpPr/>
-          <p:nvPr/>
-        </p:nvSpPr>
-        <p:spPr>
-          <a:xfrm>
-            <a:off x="640080" y="5239512"/>
-            <a:ext cx="6126480" cy="6401"/>
-          </a:xfrm>
-          <a:prstGeom prst="rect">
-            <a:avLst/>
-          </a:prstGeom>
-          <a:solidFill>
             <a:srgbClr val="E2EAEE"/>
           </a:solidFill>
           <a:ln/>
@@ -47374,57 +47074,18 @@
       </p:sp>
       <p:sp>
         <p:nvSpPr>
-          <p:cNvPr id="50" name="Text 48"/>
-          <p:cNvSpPr txBox="1"/>
-          <p:nvPr/>
-        </p:nvSpPr>
-        <p:spPr>
-          <a:xfrm>
-            <a:off x="640080" y="4901184"/>
-            <a:ext cx="1417320" cy="347472"/>
-          </a:xfrm>
-          <a:prstGeom prst="rect">
-            <a:avLst/>
-          </a:prstGeom>
-          <a:noFill/>
-          <a:ln/>
-        </p:spPr>
-        <p:txBody>
-          <a:bodyPr wrap="square" lIns="0" tIns="0" rIns="0" bIns="0" rtlCol="0" anchor="ctr"/>
-          <a:lstStyle/>
-          <a:p>
-            <a:pPr indent="0" marL="0">
-              <a:buNone/>
-            </a:pPr>
-            <a:r>
-              <a:rPr lang="en-US" sz="950" b="1" dirty="0">
-                <a:solidFill>
-                  <a:srgbClr val="12293A"/>
-                </a:solidFill>
-                <a:latin typeface="Poppins" pitchFamily="34" charset="0"/>
-                <a:ea typeface="Poppins" pitchFamily="34" charset="-122"/>
-                <a:cs typeface="Poppins" pitchFamily="34" charset="-120"/>
-              </a:rPr>
-              <a:t>Integration</a:t>
-            </a:r>
-            <a:endParaRPr lang="en-US" sz="950" dirty="0"/>
-          </a:p>
-        </p:txBody>
-      </p:sp>
-      <p:sp>
-        <p:nvSpPr>
-          <p:cNvPr id="51" name="Shape 49"/>
-          <p:cNvSpPr/>
-          <p:nvPr/>
-        </p:nvSpPr>
-        <p:spPr>
-          <a:xfrm>
-            <a:off x="2148840" y="5020056"/>
-            <a:ext cx="86980" cy="118872"/>
+          <p:cNvPr id="40" name="Shape 38"/>
+          <p:cNvSpPr/>
+          <p:nvPr/>
+        </p:nvSpPr>
+        <p:spPr>
+          <a:xfrm>
+            <a:off x="2468880" y="3265322"/>
+            <a:ext cx="865388" cy="59436"/>
           </a:xfrm>
           <a:prstGeom prst="roundRect">
             <a:avLst>
-              <a:gd name="adj" fmla="val 52564"/>
+              <a:gd name="adj" fmla="val 49231"/>
             </a:avLst>
           </a:prstGeom>
           <a:solidFill>
@@ -47435,14 +47096,14 @@
       </p:sp>
       <p:sp>
         <p:nvSpPr>
-          <p:cNvPr id="52" name="Text 50"/>
-          <p:cNvSpPr txBox="1"/>
-          <p:nvPr/>
-        </p:nvSpPr>
-        <p:spPr>
-          <a:xfrm>
-            <a:off x="3520440" y="4901184"/>
-            <a:ext cx="1463040" cy="347472"/>
+          <p:cNvPr id="41" name="Text 39"/>
+          <p:cNvSpPr txBox="1"/>
+          <p:nvPr/>
+        </p:nvSpPr>
+        <p:spPr>
+          <a:xfrm>
+            <a:off x="5029200" y="3204972"/>
+            <a:ext cx="822960" cy="169164"/>
           </a:xfrm>
           <a:prstGeom prst="rect">
             <a:avLst/>
@@ -47458,7 +47119,7 @@
               <a:buNone/>
             </a:pPr>
             <a:r>
-              <a:rPr lang="en-US" sz="950" b="1" dirty="0">
+              <a:rPr lang="en-US" sz="800" b="1" dirty="0">
                 <a:solidFill>
                   <a:srgbClr val="2C8394"/>
                 </a:solidFill>
@@ -47466,22 +47127,22 @@
                 <a:ea typeface="Poppins" pitchFamily="34" charset="-122"/>
                 <a:cs typeface="Poppins" pitchFamily="34" charset="-120"/>
               </a:rPr>
-              <a:t>2.6h</a:t>
-            </a:r>
-            <a:endParaRPr lang="en-US" sz="950" dirty="0"/>
-          </a:p>
-        </p:txBody>
-      </p:sp>
-      <p:sp>
-        <p:nvSpPr>
-          <p:cNvPr id="53" name="Text 51"/>
-          <p:cNvSpPr txBox="1"/>
-          <p:nvPr/>
-        </p:nvSpPr>
-        <p:spPr>
-          <a:xfrm>
-            <a:off x="5166360" y="4901184"/>
-            <a:ext cx="1463040" cy="347472"/>
+              <a:t>13.82h</a:t>
+            </a:r>
+            <a:endParaRPr lang="en-US" sz="800" dirty="0"/>
+          </a:p>
+        </p:txBody>
+      </p:sp>
+      <p:sp>
+        <p:nvSpPr>
+          <p:cNvPr id="42" name="Text 40"/>
+          <p:cNvSpPr txBox="1"/>
+          <p:nvPr/>
+        </p:nvSpPr>
+        <p:spPr>
+          <a:xfrm>
+            <a:off x="5943600" y="3204972"/>
+            <a:ext cx="822960" cy="169164"/>
           </a:xfrm>
           <a:prstGeom prst="rect">
             <a:avLst/>
@@ -47497,66 +47158,7 @@
               <a:buNone/>
             </a:pPr>
             <a:r>
-              <a:rPr lang="en-US" sz="950" dirty="0">
-                <a:solidFill>
-                  <a:srgbClr val="5E7280"/>
-                </a:solidFill>
-                <a:latin typeface="Poppins" pitchFamily="34" charset="0"/>
-                <a:ea typeface="Poppins" pitchFamily="34" charset="-122"/>
-                <a:cs typeface="Poppins" pitchFamily="34" charset="-120"/>
-              </a:rPr>
-              <a:t>3</a:t>
-            </a:r>
-            <a:endParaRPr lang="en-US" sz="950" dirty="0"/>
-          </a:p>
-        </p:txBody>
-      </p:sp>
-      <p:sp>
-        <p:nvSpPr>
-          <p:cNvPr id="54" name="Shape 52"/>
-          <p:cNvSpPr/>
-          <p:nvPr/>
-        </p:nvSpPr>
-        <p:spPr>
-          <a:xfrm>
-            <a:off x="640080" y="5623560"/>
-            <a:ext cx="6126480" cy="6401"/>
-          </a:xfrm>
-          <a:prstGeom prst="rect">
-            <a:avLst/>
-          </a:prstGeom>
-          <a:solidFill>
-            <a:srgbClr val="E2EAEE"/>
-          </a:solidFill>
-          <a:ln/>
-        </p:spPr>
-      </p:sp>
-      <p:sp>
-        <p:nvSpPr>
-          <p:cNvPr id="55" name="Text 53"/>
-          <p:cNvSpPr txBox="1"/>
-          <p:nvPr/>
-        </p:nvSpPr>
-        <p:spPr>
-          <a:xfrm>
-            <a:off x="640080" y="5285232"/>
-            <a:ext cx="1417320" cy="347472"/>
-          </a:xfrm>
-          <a:prstGeom prst="rect">
-            <a:avLst/>
-          </a:prstGeom>
-          <a:noFill/>
-          <a:ln/>
-        </p:spPr>
-        <p:txBody>
-          <a:bodyPr wrap="square" lIns="0" tIns="0" rIns="0" bIns="0" rtlCol="0" anchor="ctr"/>
-          <a:lstStyle/>
-          <a:p>
-            <a:pPr indent="0" marL="0">
-              <a:buNone/>
-            </a:pPr>
-            <a:r>
-              <a:rPr lang="en-US" sz="950" b="1" dirty="0">
+              <a:rPr lang="en-US" sz="800" b="1" dirty="0">
                 <a:solidFill>
                   <a:srgbClr val="12293A"/>
                 </a:solidFill>
@@ -47564,29 +47166,90 @@
                 <a:ea typeface="Poppins" pitchFamily="34" charset="-122"/>
                 <a:cs typeface="Poppins" pitchFamily="34" charset="-120"/>
               </a:rPr>
-              <a:t>Training</a:t>
-            </a:r>
-            <a:endParaRPr lang="en-US" sz="950" dirty="0"/>
-          </a:p>
-        </p:txBody>
-      </p:sp>
-      <p:sp>
-        <p:nvSpPr>
-          <p:cNvPr id="56" name="Shape 54"/>
-          <p:cNvSpPr/>
-          <p:nvPr/>
-        </p:nvSpPr>
-        <p:spPr>
-          <a:xfrm>
-            <a:off x="2148840" y="5404104"/>
-            <a:ext cx="45720" cy="118872"/>
+              <a:t>36.4%</a:t>
+            </a:r>
+            <a:endParaRPr lang="en-US" sz="800" dirty="0"/>
+          </a:p>
+        </p:txBody>
+      </p:sp>
+      <p:sp>
+        <p:nvSpPr>
+          <p:cNvPr id="43" name="Text 41"/>
+          <p:cNvSpPr txBox="1"/>
+          <p:nvPr/>
+        </p:nvSpPr>
+        <p:spPr>
+          <a:xfrm>
+            <a:off x="640080" y="3374136"/>
+            <a:ext cx="1783080" cy="169164"/>
+          </a:xfrm>
+          <a:prstGeom prst="rect">
+            <a:avLst/>
+          </a:prstGeom>
+          <a:noFill/>
+          <a:ln/>
+        </p:spPr>
+        <p:txBody>
+          <a:bodyPr wrap="square" lIns="0" tIns="0" rIns="0" bIns="0" rtlCol="0" anchor="ctr"/>
+          <a:lstStyle/>
+          <a:p>
+            <a:pPr indent="0" marL="0">
+              <a:buNone/>
+            </a:pPr>
+            <a:r>
+              <a:rPr lang="en-US" sz="800" b="1" dirty="0">
+                <a:solidFill>
+                  <a:srgbClr val="12293A"/>
+                </a:solidFill>
+                <a:latin typeface="Poppins" pitchFamily="34" charset="0"/>
+                <a:ea typeface="Poppins" pitchFamily="34" charset="-122"/>
+                <a:cs typeface="Poppins" pitchFamily="34" charset="-120"/>
+              </a:rPr>
+              <a:t>Yeran Hettiarachchy</a:t>
+            </a:r>
+            <a:endParaRPr lang="en-US" sz="800" dirty="0"/>
+          </a:p>
+        </p:txBody>
+      </p:sp>
+      <p:sp>
+        <p:nvSpPr>
+          <p:cNvPr id="44" name="Shape 42"/>
+          <p:cNvSpPr/>
+          <p:nvPr/>
+        </p:nvSpPr>
+        <p:spPr>
+          <a:xfrm>
+            <a:off x="2468880" y="3434486"/>
+            <a:ext cx="2377440" cy="59436"/>
           </a:xfrm>
           <a:prstGeom prst="roundRect">
             <a:avLst>
-              <a:gd name="adj" fmla="val 100000"/>
+              <a:gd name="adj" fmla="val 49231"/>
             </a:avLst>
           </a:prstGeom>
           <a:solidFill>
+            <a:srgbClr val="E2EAEE"/>
+          </a:solidFill>
+          <a:ln/>
+        </p:spPr>
+      </p:sp>
+      <p:sp>
+        <p:nvSpPr>
+          <p:cNvPr id="45" name="Shape 43"/>
+          <p:cNvSpPr/>
+          <p:nvPr/>
+        </p:nvSpPr>
+        <p:spPr>
+          <a:xfrm>
+            <a:off x="2468880" y="3434486"/>
+            <a:ext cx="152156" cy="59436"/>
+          </a:xfrm>
+          <a:prstGeom prst="roundRect">
+            <a:avLst>
+              <a:gd name="adj" fmla="val 49231"/>
+            </a:avLst>
+          </a:prstGeom>
+          <a:solidFill>
             <a:srgbClr val="2C8394"/>
           </a:solidFill>
           <a:ln/>
@@ -47594,14 +47257,375 @@
       </p:sp>
       <p:sp>
         <p:nvSpPr>
+          <p:cNvPr id="46" name="Text 44"/>
+          <p:cNvSpPr txBox="1"/>
+          <p:nvPr/>
+        </p:nvSpPr>
+        <p:spPr>
+          <a:xfrm>
+            <a:off x="5029200" y="3374136"/>
+            <a:ext cx="822960" cy="169164"/>
+          </a:xfrm>
+          <a:prstGeom prst="rect">
+            <a:avLst/>
+          </a:prstGeom>
+          <a:noFill/>
+          <a:ln/>
+        </p:spPr>
+        <p:txBody>
+          <a:bodyPr wrap="square" lIns="0" tIns="0" rIns="0" bIns="0" rtlCol="0" anchor="ctr"/>
+          <a:lstStyle/>
+          <a:p>
+            <a:pPr algn="r" indent="0" marL="0">
+              <a:buNone/>
+            </a:pPr>
+            <a:r>
+              <a:rPr lang="en-US" sz="800" b="1" dirty="0">
+                <a:solidFill>
+                  <a:srgbClr val="2C8394"/>
+                </a:solidFill>
+                <a:latin typeface="Poppins" pitchFamily="34" charset="0"/>
+                <a:ea typeface="Poppins" pitchFamily="34" charset="-122"/>
+                <a:cs typeface="Poppins" pitchFamily="34" charset="-120"/>
+              </a:rPr>
+              <a:t>2.44h</a:t>
+            </a:r>
+            <a:endParaRPr lang="en-US" sz="800" dirty="0"/>
+          </a:p>
+        </p:txBody>
+      </p:sp>
+      <p:sp>
+        <p:nvSpPr>
+          <p:cNvPr id="47" name="Text 45"/>
+          <p:cNvSpPr txBox="1"/>
+          <p:nvPr/>
+        </p:nvSpPr>
+        <p:spPr>
+          <a:xfrm>
+            <a:off x="5943600" y="3374136"/>
+            <a:ext cx="822960" cy="169164"/>
+          </a:xfrm>
+          <a:prstGeom prst="rect">
+            <a:avLst/>
+          </a:prstGeom>
+          <a:noFill/>
+          <a:ln/>
+        </p:spPr>
+        <p:txBody>
+          <a:bodyPr wrap="square" lIns="0" tIns="0" rIns="0" bIns="0" rtlCol="0" anchor="ctr"/>
+          <a:lstStyle/>
+          <a:p>
+            <a:pPr algn="r" indent="0" marL="0">
+              <a:buNone/>
+            </a:pPr>
+            <a:r>
+              <a:rPr lang="en-US" sz="800" b="1" dirty="0">
+                <a:solidFill>
+                  <a:srgbClr val="12293A"/>
+                </a:solidFill>
+                <a:latin typeface="Poppins" pitchFamily="34" charset="0"/>
+                <a:ea typeface="Poppins" pitchFamily="34" charset="-122"/>
+                <a:cs typeface="Poppins" pitchFamily="34" charset="-120"/>
+              </a:rPr>
+              <a:t>6.4%</a:t>
+            </a:r>
+            <a:endParaRPr lang="en-US" sz="800" dirty="0"/>
+          </a:p>
+        </p:txBody>
+      </p:sp>
+      <p:sp>
+        <p:nvSpPr>
+          <p:cNvPr id="48" name="Text 46"/>
+          <p:cNvSpPr txBox="1"/>
+          <p:nvPr/>
+        </p:nvSpPr>
+        <p:spPr>
+          <a:xfrm>
+            <a:off x="640080" y="3543300"/>
+            <a:ext cx="1783080" cy="169164"/>
+          </a:xfrm>
+          <a:prstGeom prst="rect">
+            <a:avLst/>
+          </a:prstGeom>
+          <a:noFill/>
+          <a:ln/>
+        </p:spPr>
+        <p:txBody>
+          <a:bodyPr wrap="square" lIns="0" tIns="0" rIns="0" bIns="0" rtlCol="0" anchor="ctr"/>
+          <a:lstStyle/>
+          <a:p>
+            <a:pPr indent="0" marL="0">
+              <a:buNone/>
+            </a:pPr>
+            <a:r>
+              <a:rPr lang="en-US" sz="800" b="1" dirty="0">
+                <a:solidFill>
+                  <a:srgbClr val="12293A"/>
+                </a:solidFill>
+                <a:latin typeface="Poppins" pitchFamily="34" charset="0"/>
+                <a:ea typeface="Poppins" pitchFamily="34" charset="-122"/>
+                <a:cs typeface="Poppins" pitchFamily="34" charset="-120"/>
+              </a:rPr>
+              <a:t>Gregory St Clare-Hobbs</a:t>
+            </a:r>
+            <a:endParaRPr lang="en-US" sz="800" dirty="0"/>
+          </a:p>
+        </p:txBody>
+      </p:sp>
+      <p:sp>
+        <p:nvSpPr>
+          <p:cNvPr id="49" name="Shape 47"/>
+          <p:cNvSpPr/>
+          <p:nvPr/>
+        </p:nvSpPr>
+        <p:spPr>
+          <a:xfrm>
+            <a:off x="2468880" y="3603650"/>
+            <a:ext cx="2377440" cy="59436"/>
+          </a:xfrm>
+          <a:prstGeom prst="roundRect">
+            <a:avLst>
+              <a:gd name="adj" fmla="val 49231"/>
+            </a:avLst>
+          </a:prstGeom>
+          <a:solidFill>
+            <a:srgbClr val="E2EAEE"/>
+          </a:solidFill>
+          <a:ln/>
+        </p:spPr>
+      </p:sp>
+      <p:sp>
+        <p:nvSpPr>
+          <p:cNvPr id="50" name="Shape 48"/>
+          <p:cNvSpPr/>
+          <p:nvPr/>
+        </p:nvSpPr>
+        <p:spPr>
+          <a:xfrm>
+            <a:off x="2468880" y="3603650"/>
+            <a:ext cx="92720" cy="59436"/>
+          </a:xfrm>
+          <a:prstGeom prst="roundRect">
+            <a:avLst>
+              <a:gd name="adj" fmla="val 49231"/>
+            </a:avLst>
+          </a:prstGeom>
+          <a:solidFill>
+            <a:srgbClr val="2C8394"/>
+          </a:solidFill>
+          <a:ln/>
+        </p:spPr>
+      </p:sp>
+      <p:sp>
+        <p:nvSpPr>
+          <p:cNvPr id="51" name="Text 49"/>
+          <p:cNvSpPr txBox="1"/>
+          <p:nvPr/>
+        </p:nvSpPr>
+        <p:spPr>
+          <a:xfrm>
+            <a:off x="5029200" y="3543300"/>
+            <a:ext cx="822960" cy="169164"/>
+          </a:xfrm>
+          <a:prstGeom prst="rect">
+            <a:avLst/>
+          </a:prstGeom>
+          <a:noFill/>
+          <a:ln/>
+        </p:spPr>
+        <p:txBody>
+          <a:bodyPr wrap="square" lIns="0" tIns="0" rIns="0" bIns="0" rtlCol="0" anchor="ctr"/>
+          <a:lstStyle/>
+          <a:p>
+            <a:pPr algn="r" indent="0" marL="0">
+              <a:buNone/>
+            </a:pPr>
+            <a:r>
+              <a:rPr lang="en-US" sz="800" b="1" dirty="0">
+                <a:solidFill>
+                  <a:srgbClr val="2C8394"/>
+                </a:solidFill>
+                <a:latin typeface="Poppins" pitchFamily="34" charset="0"/>
+                <a:ea typeface="Poppins" pitchFamily="34" charset="-122"/>
+                <a:cs typeface="Poppins" pitchFamily="34" charset="-120"/>
+              </a:rPr>
+              <a:t>1.50h</a:t>
+            </a:r>
+            <a:endParaRPr lang="en-US" sz="800" dirty="0"/>
+          </a:p>
+        </p:txBody>
+      </p:sp>
+      <p:sp>
+        <p:nvSpPr>
+          <p:cNvPr id="52" name="Text 50"/>
+          <p:cNvSpPr txBox="1"/>
+          <p:nvPr/>
+        </p:nvSpPr>
+        <p:spPr>
+          <a:xfrm>
+            <a:off x="5943600" y="3543300"/>
+            <a:ext cx="822960" cy="169164"/>
+          </a:xfrm>
+          <a:prstGeom prst="rect">
+            <a:avLst/>
+          </a:prstGeom>
+          <a:noFill/>
+          <a:ln/>
+        </p:spPr>
+        <p:txBody>
+          <a:bodyPr wrap="square" lIns="0" tIns="0" rIns="0" bIns="0" rtlCol="0" anchor="ctr"/>
+          <a:lstStyle/>
+          <a:p>
+            <a:pPr algn="r" indent="0" marL="0">
+              <a:buNone/>
+            </a:pPr>
+            <a:r>
+              <a:rPr lang="en-US" sz="800" b="1" dirty="0">
+                <a:solidFill>
+                  <a:srgbClr val="12293A"/>
+                </a:solidFill>
+                <a:latin typeface="Poppins" pitchFamily="34" charset="0"/>
+                <a:ea typeface="Poppins" pitchFamily="34" charset="-122"/>
+                <a:cs typeface="Poppins" pitchFamily="34" charset="-120"/>
+              </a:rPr>
+              <a:t>3.9%</a:t>
+            </a:r>
+            <a:endParaRPr lang="en-US" sz="800" dirty="0"/>
+          </a:p>
+        </p:txBody>
+      </p:sp>
+      <p:sp>
+        <p:nvSpPr>
+          <p:cNvPr id="53" name="Text 51"/>
+          <p:cNvSpPr txBox="1"/>
+          <p:nvPr/>
+        </p:nvSpPr>
+        <p:spPr>
+          <a:xfrm>
+            <a:off x="640080" y="3712464"/>
+            <a:ext cx="1783080" cy="169164"/>
+          </a:xfrm>
+          <a:prstGeom prst="rect">
+            <a:avLst/>
+          </a:prstGeom>
+          <a:noFill/>
+          <a:ln/>
+        </p:spPr>
+        <p:txBody>
+          <a:bodyPr wrap="square" lIns="0" tIns="0" rIns="0" bIns="0" rtlCol="0" anchor="ctr"/>
+          <a:lstStyle/>
+          <a:p>
+            <a:pPr indent="0" marL="0">
+              <a:buNone/>
+            </a:pPr>
+            <a:r>
+              <a:rPr lang="en-US" sz="800" b="1" dirty="0">
+                <a:solidFill>
+                  <a:srgbClr val="12293A"/>
+                </a:solidFill>
+                <a:latin typeface="Poppins" pitchFamily="34" charset="0"/>
+                <a:ea typeface="Poppins" pitchFamily="34" charset="-122"/>
+                <a:cs typeface="Poppins" pitchFamily="34" charset="-120"/>
+              </a:rPr>
+              <a:t>Isayah Kuhlmann</a:t>
+            </a:r>
+            <a:endParaRPr lang="en-US" sz="800" dirty="0"/>
+          </a:p>
+        </p:txBody>
+      </p:sp>
+      <p:sp>
+        <p:nvSpPr>
+          <p:cNvPr id="54" name="Shape 52"/>
+          <p:cNvSpPr/>
+          <p:nvPr/>
+        </p:nvSpPr>
+        <p:spPr>
+          <a:xfrm>
+            <a:off x="2468880" y="3772814"/>
+            <a:ext cx="2377440" cy="59436"/>
+          </a:xfrm>
+          <a:prstGeom prst="roundRect">
+            <a:avLst>
+              <a:gd name="adj" fmla="val 49231"/>
+            </a:avLst>
+          </a:prstGeom>
+          <a:solidFill>
+            <a:srgbClr val="E2EAEE"/>
+          </a:solidFill>
+          <a:ln/>
+        </p:spPr>
+      </p:sp>
+      <p:sp>
+        <p:nvSpPr>
+          <p:cNvPr id="55" name="Shape 53"/>
+          <p:cNvSpPr/>
+          <p:nvPr/>
+        </p:nvSpPr>
+        <p:spPr>
+          <a:xfrm>
+            <a:off x="2468880" y="3772814"/>
+            <a:ext cx="45720" cy="59436"/>
+          </a:xfrm>
+          <a:prstGeom prst="roundRect">
+            <a:avLst>
+              <a:gd name="adj" fmla="val 64000"/>
+            </a:avLst>
+          </a:prstGeom>
+          <a:solidFill>
+            <a:srgbClr val="2C8394"/>
+          </a:solidFill>
+          <a:ln/>
+        </p:spPr>
+      </p:sp>
+      <p:sp>
+        <p:nvSpPr>
+          <p:cNvPr id="56" name="Text 54"/>
+          <p:cNvSpPr txBox="1"/>
+          <p:nvPr/>
+        </p:nvSpPr>
+        <p:spPr>
+          <a:xfrm>
+            <a:off x="5029200" y="3712464"/>
+            <a:ext cx="822960" cy="169164"/>
+          </a:xfrm>
+          <a:prstGeom prst="rect">
+            <a:avLst/>
+          </a:prstGeom>
+          <a:noFill/>
+          <a:ln/>
+        </p:spPr>
+        <p:txBody>
+          <a:bodyPr wrap="square" lIns="0" tIns="0" rIns="0" bIns="0" rtlCol="0" anchor="ctr"/>
+          <a:lstStyle/>
+          <a:p>
+            <a:pPr algn="r" indent="0" marL="0">
+              <a:buNone/>
+            </a:pPr>
+            <a:r>
+              <a:rPr lang="en-US" sz="800" b="1" dirty="0">
+                <a:solidFill>
+                  <a:srgbClr val="2C8394"/>
+                </a:solidFill>
+                <a:latin typeface="Poppins" pitchFamily="34" charset="0"/>
+                <a:ea typeface="Poppins" pitchFamily="34" charset="-122"/>
+                <a:cs typeface="Poppins" pitchFamily="34" charset="-120"/>
+              </a:rPr>
+              <a:t>0.50h</a:t>
+            </a:r>
+            <a:endParaRPr lang="en-US" sz="800" dirty="0"/>
+          </a:p>
+        </p:txBody>
+      </p:sp>
+      <p:sp>
+        <p:nvSpPr>
           <p:cNvPr id="57" name="Text 55"/>
           <p:cNvSpPr txBox="1"/>
           <p:nvPr/>
         </p:nvSpPr>
         <p:spPr>
           <a:xfrm>
-            <a:off x="3520440" y="5285232"/>
-            <a:ext cx="1463040" cy="347472"/>
+            <a:off x="5943600" y="3712464"/>
+            <a:ext cx="822960" cy="169164"/>
           </a:xfrm>
           <a:prstGeom prst="rect">
             <a:avLst/>
@@ -47617,7 +47641,129 @@
               <a:buNone/>
             </a:pPr>
             <a:r>
-              <a:rPr lang="en-US" sz="950" b="1" dirty="0">
+              <a:rPr lang="en-US" sz="800" b="1" dirty="0">
+                <a:solidFill>
+                  <a:srgbClr val="12293A"/>
+                </a:solidFill>
+                <a:latin typeface="Poppins" pitchFamily="34" charset="0"/>
+                <a:ea typeface="Poppins" pitchFamily="34" charset="-122"/>
+                <a:cs typeface="Poppins" pitchFamily="34" charset="-120"/>
+              </a:rPr>
+              <a:t>1.3%</a:t>
+            </a:r>
+            <a:endParaRPr lang="en-US" sz="800" dirty="0"/>
+          </a:p>
+        </p:txBody>
+      </p:sp>
+      <p:sp>
+        <p:nvSpPr>
+          <p:cNvPr id="58" name="Text 56"/>
+          <p:cNvSpPr txBox="1"/>
+          <p:nvPr/>
+        </p:nvSpPr>
+        <p:spPr>
+          <a:xfrm>
+            <a:off x="640080" y="3881628"/>
+            <a:ext cx="1783080" cy="169164"/>
+          </a:xfrm>
+          <a:prstGeom prst="rect">
+            <a:avLst/>
+          </a:prstGeom>
+          <a:noFill/>
+          <a:ln/>
+        </p:spPr>
+        <p:txBody>
+          <a:bodyPr wrap="square" lIns="0" tIns="0" rIns="0" bIns="0" rtlCol="0" anchor="ctr"/>
+          <a:lstStyle/>
+          <a:p>
+            <a:pPr indent="0" marL="0">
+              <a:buNone/>
+            </a:pPr>
+            <a:r>
+              <a:rPr lang="en-US" sz="800" b="1" dirty="0">
+                <a:solidFill>
+                  <a:srgbClr val="12293A"/>
+                </a:solidFill>
+                <a:latin typeface="Poppins" pitchFamily="34" charset="0"/>
+                <a:ea typeface="Poppins" pitchFamily="34" charset="-122"/>
+                <a:cs typeface="Poppins" pitchFamily="34" charset="-120"/>
+              </a:rPr>
+              <a:t>Joshua Casey</a:t>
+            </a:r>
+            <a:endParaRPr lang="en-US" sz="800" dirty="0"/>
+          </a:p>
+        </p:txBody>
+      </p:sp>
+      <p:sp>
+        <p:nvSpPr>
+          <p:cNvPr id="59" name="Shape 57"/>
+          <p:cNvSpPr/>
+          <p:nvPr/>
+        </p:nvSpPr>
+        <p:spPr>
+          <a:xfrm>
+            <a:off x="2468880" y="3941978"/>
+            <a:ext cx="2377440" cy="59436"/>
+          </a:xfrm>
+          <a:prstGeom prst="roundRect">
+            <a:avLst>
+              <a:gd name="adj" fmla="val 49231"/>
+            </a:avLst>
+          </a:prstGeom>
+          <a:solidFill>
+            <a:srgbClr val="E2EAEE"/>
+          </a:solidFill>
+          <a:ln/>
+        </p:spPr>
+      </p:sp>
+      <p:sp>
+        <p:nvSpPr>
+          <p:cNvPr id="60" name="Shape 58"/>
+          <p:cNvSpPr/>
+          <p:nvPr/>
+        </p:nvSpPr>
+        <p:spPr>
+          <a:xfrm>
+            <a:off x="2468880" y="3941978"/>
+            <a:ext cx="45720" cy="59436"/>
+          </a:xfrm>
+          <a:prstGeom prst="roundRect">
+            <a:avLst>
+              <a:gd name="adj" fmla="val 64000"/>
+            </a:avLst>
+          </a:prstGeom>
+          <a:solidFill>
+            <a:srgbClr val="2C8394"/>
+          </a:solidFill>
+          <a:ln/>
+        </p:spPr>
+      </p:sp>
+      <p:sp>
+        <p:nvSpPr>
+          <p:cNvPr id="61" name="Text 59"/>
+          <p:cNvSpPr txBox="1"/>
+          <p:nvPr/>
+        </p:nvSpPr>
+        <p:spPr>
+          <a:xfrm>
+            <a:off x="5029200" y="3881628"/>
+            <a:ext cx="822960" cy="169164"/>
+          </a:xfrm>
+          <a:prstGeom prst="rect">
+            <a:avLst/>
+          </a:prstGeom>
+          <a:noFill/>
+          <a:ln/>
+        </p:spPr>
+        <p:txBody>
+          <a:bodyPr wrap="square" lIns="0" tIns="0" rIns="0" bIns="0" rtlCol="0" anchor="ctr"/>
+          <a:lstStyle/>
+          <a:p>
+            <a:pPr algn="r" indent="0" marL="0">
+              <a:buNone/>
+            </a:pPr>
+            <a:r>
+              <a:rPr lang="en-US" sz="800" b="1" dirty="0">
                 <a:solidFill>
                   <a:srgbClr val="2C8394"/>
                 </a:solidFill>
@@ -47625,22 +47771,22 @@
                 <a:ea typeface="Poppins" pitchFamily="34" charset="-122"/>
                 <a:cs typeface="Poppins" pitchFamily="34" charset="-120"/>
               </a:rPr>
-              <a:t>0.5h</a:t>
-            </a:r>
-            <a:endParaRPr lang="en-US" sz="950" dirty="0"/>
-          </a:p>
-        </p:txBody>
-      </p:sp>
-      <p:sp>
-        <p:nvSpPr>
-          <p:cNvPr id="58" name="Text 56"/>
-          <p:cNvSpPr txBox="1"/>
-          <p:nvPr/>
-        </p:nvSpPr>
-        <p:spPr>
-          <a:xfrm>
-            <a:off x="5166360" y="5285232"/>
-            <a:ext cx="1463040" cy="347472"/>
+              <a:t>0.25h</a:t>
+            </a:r>
+            <a:endParaRPr lang="en-US" sz="800" dirty="0"/>
+          </a:p>
+        </p:txBody>
+      </p:sp>
+      <p:sp>
+        <p:nvSpPr>
+          <p:cNvPr id="62" name="Text 60"/>
+          <p:cNvSpPr txBox="1"/>
+          <p:nvPr/>
+        </p:nvSpPr>
+        <p:spPr>
+          <a:xfrm>
+            <a:off x="5943600" y="3881628"/>
+            <a:ext cx="822960" cy="169164"/>
           </a:xfrm>
           <a:prstGeom prst="rect">
             <a:avLst/>
@@ -47656,7 +47802,46 @@
               <a:buNone/>
             </a:pPr>
             <a:r>
-              <a:rPr lang="en-US" sz="950" dirty="0">
+              <a:rPr lang="en-US" sz="800" b="1" dirty="0">
+                <a:solidFill>
+                  <a:srgbClr val="12293A"/>
+                </a:solidFill>
+                <a:latin typeface="Poppins" pitchFamily="34" charset="0"/>
+                <a:ea typeface="Poppins" pitchFamily="34" charset="-122"/>
+                <a:cs typeface="Poppins" pitchFamily="34" charset="-120"/>
+              </a:rPr>
+              <a:t>0.7%</a:t>
+            </a:r>
+            <a:endParaRPr lang="en-US" sz="800" dirty="0"/>
+          </a:p>
+        </p:txBody>
+      </p:sp>
+      <p:sp>
+        <p:nvSpPr>
+          <p:cNvPr id="63" name="Text 61"/>
+          <p:cNvSpPr txBox="1"/>
+          <p:nvPr/>
+        </p:nvSpPr>
+        <p:spPr>
+          <a:xfrm>
+            <a:off x="640080" y="4050792"/>
+            <a:ext cx="1783080" cy="169164"/>
+          </a:xfrm>
+          <a:prstGeom prst="rect">
+            <a:avLst/>
+          </a:prstGeom>
+          <a:noFill/>
+          <a:ln/>
+        </p:spPr>
+        <p:txBody>
+          <a:bodyPr wrap="square" lIns="0" tIns="0" rIns="0" bIns="0" rtlCol="0" anchor="ctr"/>
+          <a:lstStyle/>
+          <a:p>
+            <a:pPr indent="0" marL="0">
+              <a:buNone/>
+            </a:pPr>
+            <a:r>
+              <a:rPr lang="en-US" sz="800" dirty="0">
                 <a:solidFill>
                   <a:srgbClr val="5E7280"/>
                 </a:solidFill>
@@ -47664,22 +47849,1293 @@
                 <a:ea typeface="Poppins" pitchFamily="34" charset="-122"/>
                 <a:cs typeface="Poppins" pitchFamily="34" charset="-120"/>
               </a:rPr>
-              <a:t>1</a:t>
-            </a:r>
-            <a:endParaRPr lang="en-US" sz="950" dirty="0"/>
-          </a:p>
-        </p:txBody>
-      </p:sp>
-      <p:sp>
-        <p:nvSpPr>
-          <p:cNvPr id="59" name="Text 57"/>
-          <p:cNvSpPr txBox="1"/>
-          <p:nvPr/>
-        </p:nvSpPr>
-        <p:spPr>
-          <a:xfrm>
-            <a:off x="640080" y="5577840"/>
-            <a:ext cx="6126480" cy="292608"/>
+              <a:t>Rodney Nolan</a:t>
+            </a:r>
+            <a:endParaRPr lang="en-US" sz="800" dirty="0"/>
+          </a:p>
+        </p:txBody>
+      </p:sp>
+      <p:sp>
+        <p:nvSpPr>
+          <p:cNvPr id="64" name="Shape 62"/>
+          <p:cNvSpPr/>
+          <p:nvPr/>
+        </p:nvSpPr>
+        <p:spPr>
+          <a:xfrm>
+            <a:off x="2468880" y="4111142"/>
+            <a:ext cx="2377440" cy="59436"/>
+          </a:xfrm>
+          <a:prstGeom prst="roundRect">
+            <a:avLst>
+              <a:gd name="adj" fmla="val 49231"/>
+            </a:avLst>
+          </a:prstGeom>
+          <a:solidFill>
+            <a:srgbClr val="E2EAEE"/>
+          </a:solidFill>
+          <a:ln/>
+        </p:spPr>
+      </p:sp>
+      <p:sp>
+        <p:nvSpPr>
+          <p:cNvPr id="65" name="Text 63"/>
+          <p:cNvSpPr txBox="1"/>
+          <p:nvPr/>
+        </p:nvSpPr>
+        <p:spPr>
+          <a:xfrm>
+            <a:off x="5029200" y="4050792"/>
+            <a:ext cx="822960" cy="169164"/>
+          </a:xfrm>
+          <a:prstGeom prst="rect">
+            <a:avLst/>
+          </a:prstGeom>
+          <a:noFill/>
+          <a:ln/>
+        </p:spPr>
+        <p:txBody>
+          <a:bodyPr wrap="square" lIns="0" tIns="0" rIns="0" bIns="0" rtlCol="0" anchor="ctr"/>
+          <a:lstStyle/>
+          <a:p>
+            <a:pPr algn="r" indent="0" marL="0">
+              <a:buNone/>
+            </a:pPr>
+            <a:r>
+              <a:rPr lang="en-US" sz="800" dirty="0">
+                <a:solidFill>
+                  <a:srgbClr val="8FA1AC"/>
+                </a:solidFill>
+                <a:latin typeface="Poppins" pitchFamily="34" charset="0"/>
+                <a:ea typeface="Poppins" pitchFamily="34" charset="-122"/>
+                <a:cs typeface="Poppins" pitchFamily="34" charset="-120"/>
+              </a:rPr>
+              <a:t>—</a:t>
+            </a:r>
+            <a:endParaRPr lang="en-US" sz="800" dirty="0"/>
+          </a:p>
+        </p:txBody>
+      </p:sp>
+      <p:sp>
+        <p:nvSpPr>
+          <p:cNvPr id="66" name="Text 64"/>
+          <p:cNvSpPr txBox="1"/>
+          <p:nvPr/>
+        </p:nvSpPr>
+        <p:spPr>
+          <a:xfrm>
+            <a:off x="5943600" y="4050792"/>
+            <a:ext cx="822960" cy="169164"/>
+          </a:xfrm>
+          <a:prstGeom prst="rect">
+            <a:avLst/>
+          </a:prstGeom>
+          <a:noFill/>
+          <a:ln/>
+        </p:spPr>
+        <p:txBody>
+          <a:bodyPr wrap="square" lIns="0" tIns="0" rIns="0" bIns="0" rtlCol="0" anchor="ctr"/>
+          <a:lstStyle/>
+          <a:p>
+            <a:pPr algn="r" indent="0" marL="0">
+              <a:buNone/>
+            </a:pPr>
+            <a:r>
+              <a:rPr lang="en-US" sz="600" dirty="0">
+                <a:solidFill>
+                  <a:srgbClr val="8FA1AC"/>
+                </a:solidFill>
+                <a:latin typeface="Poppins" pitchFamily="34" charset="0"/>
+                <a:ea typeface="Poppins" pitchFamily="34" charset="-122"/>
+                <a:cs typeface="Poppins" pitchFamily="34" charset="-120"/>
+              </a:rPr>
+              <a:t>no time logged</a:t>
+            </a:r>
+            <a:endParaRPr lang="en-US" sz="600" dirty="0"/>
+          </a:p>
+        </p:txBody>
+      </p:sp>
+      <p:sp>
+        <p:nvSpPr>
+          <p:cNvPr id="67" name="Text 65"/>
+          <p:cNvSpPr txBox="1"/>
+          <p:nvPr/>
+        </p:nvSpPr>
+        <p:spPr>
+          <a:xfrm>
+            <a:off x="640080" y="4219956"/>
+            <a:ext cx="1783080" cy="169164"/>
+          </a:xfrm>
+          <a:prstGeom prst="rect">
+            <a:avLst/>
+          </a:prstGeom>
+          <a:noFill/>
+          <a:ln/>
+        </p:spPr>
+        <p:txBody>
+          <a:bodyPr wrap="square" lIns="0" tIns="0" rIns="0" bIns="0" rtlCol="0" anchor="ctr"/>
+          <a:lstStyle/>
+          <a:p>
+            <a:pPr indent="0" marL="0">
+              <a:buNone/>
+            </a:pPr>
+            <a:r>
+              <a:rPr lang="en-US" sz="800" dirty="0">
+                <a:solidFill>
+                  <a:srgbClr val="5E7280"/>
+                </a:solidFill>
+                <a:latin typeface="Poppins" pitchFamily="34" charset="0"/>
+                <a:ea typeface="Poppins" pitchFamily="34" charset="-122"/>
+                <a:cs typeface="Poppins" pitchFamily="34" charset="-120"/>
+              </a:rPr>
+              <a:t>Karim AlRifaii</a:t>
+            </a:r>
+            <a:endParaRPr lang="en-US" sz="800" dirty="0"/>
+          </a:p>
+        </p:txBody>
+      </p:sp>
+      <p:sp>
+        <p:nvSpPr>
+          <p:cNvPr id="68" name="Shape 66"/>
+          <p:cNvSpPr/>
+          <p:nvPr/>
+        </p:nvSpPr>
+        <p:spPr>
+          <a:xfrm>
+            <a:off x="2468880" y="4280306"/>
+            <a:ext cx="2377440" cy="59436"/>
+          </a:xfrm>
+          <a:prstGeom prst="roundRect">
+            <a:avLst>
+              <a:gd name="adj" fmla="val 49231"/>
+            </a:avLst>
+          </a:prstGeom>
+          <a:solidFill>
+            <a:srgbClr val="E2EAEE"/>
+          </a:solidFill>
+          <a:ln/>
+        </p:spPr>
+      </p:sp>
+      <p:sp>
+        <p:nvSpPr>
+          <p:cNvPr id="69" name="Text 67"/>
+          <p:cNvSpPr txBox="1"/>
+          <p:nvPr/>
+        </p:nvSpPr>
+        <p:spPr>
+          <a:xfrm>
+            <a:off x="5029200" y="4219956"/>
+            <a:ext cx="822960" cy="169164"/>
+          </a:xfrm>
+          <a:prstGeom prst="rect">
+            <a:avLst/>
+          </a:prstGeom>
+          <a:noFill/>
+          <a:ln/>
+        </p:spPr>
+        <p:txBody>
+          <a:bodyPr wrap="square" lIns="0" tIns="0" rIns="0" bIns="0" rtlCol="0" anchor="ctr"/>
+          <a:lstStyle/>
+          <a:p>
+            <a:pPr algn="r" indent="0" marL="0">
+              <a:buNone/>
+            </a:pPr>
+            <a:r>
+              <a:rPr lang="en-US" sz="800" dirty="0">
+                <a:solidFill>
+                  <a:srgbClr val="8FA1AC"/>
+                </a:solidFill>
+                <a:latin typeface="Poppins" pitchFamily="34" charset="0"/>
+                <a:ea typeface="Poppins" pitchFamily="34" charset="-122"/>
+                <a:cs typeface="Poppins" pitchFamily="34" charset="-120"/>
+              </a:rPr>
+              <a:t>—</a:t>
+            </a:r>
+            <a:endParaRPr lang="en-US" sz="800" dirty="0"/>
+          </a:p>
+        </p:txBody>
+      </p:sp>
+      <p:sp>
+        <p:nvSpPr>
+          <p:cNvPr id="70" name="Text 68"/>
+          <p:cNvSpPr txBox="1"/>
+          <p:nvPr/>
+        </p:nvSpPr>
+        <p:spPr>
+          <a:xfrm>
+            <a:off x="5943600" y="4219956"/>
+            <a:ext cx="822960" cy="169164"/>
+          </a:xfrm>
+          <a:prstGeom prst="rect">
+            <a:avLst/>
+          </a:prstGeom>
+          <a:noFill/>
+          <a:ln/>
+        </p:spPr>
+        <p:txBody>
+          <a:bodyPr wrap="square" lIns="0" tIns="0" rIns="0" bIns="0" rtlCol="0" anchor="ctr"/>
+          <a:lstStyle/>
+          <a:p>
+            <a:pPr algn="r" indent="0" marL="0">
+              <a:buNone/>
+            </a:pPr>
+            <a:r>
+              <a:rPr lang="en-US" sz="600" dirty="0">
+                <a:solidFill>
+                  <a:srgbClr val="8FA1AC"/>
+                </a:solidFill>
+                <a:latin typeface="Poppins" pitchFamily="34" charset="0"/>
+                <a:ea typeface="Poppins" pitchFamily="34" charset="-122"/>
+                <a:cs typeface="Poppins" pitchFamily="34" charset="-120"/>
+              </a:rPr>
+              <a:t>no time logged</a:t>
+            </a:r>
+            <a:endParaRPr lang="en-US" sz="600" dirty="0"/>
+          </a:p>
+        </p:txBody>
+      </p:sp>
+      <p:sp>
+        <p:nvSpPr>
+          <p:cNvPr id="71" name="Text 69"/>
+          <p:cNvSpPr txBox="1"/>
+          <p:nvPr/>
+        </p:nvSpPr>
+        <p:spPr>
+          <a:xfrm>
+            <a:off x="640080" y="4389120"/>
+            <a:ext cx="1783080" cy="169164"/>
+          </a:xfrm>
+          <a:prstGeom prst="rect">
+            <a:avLst/>
+          </a:prstGeom>
+          <a:noFill/>
+          <a:ln/>
+        </p:spPr>
+        <p:txBody>
+          <a:bodyPr wrap="square" lIns="0" tIns="0" rIns="0" bIns="0" rtlCol="0" anchor="ctr"/>
+          <a:lstStyle/>
+          <a:p>
+            <a:pPr indent="0" marL="0">
+              <a:buNone/>
+            </a:pPr>
+            <a:r>
+              <a:rPr lang="en-US" sz="800" dirty="0">
+                <a:solidFill>
+                  <a:srgbClr val="5E7280"/>
+                </a:solidFill>
+                <a:latin typeface="Poppins" pitchFamily="34" charset="0"/>
+                <a:ea typeface="Poppins" pitchFamily="34" charset="-122"/>
+                <a:cs typeface="Poppins" pitchFamily="34" charset="-120"/>
+              </a:rPr>
+              <a:t>Ryan Neil Orande</a:t>
+            </a:r>
+            <a:endParaRPr lang="en-US" sz="800" dirty="0"/>
+          </a:p>
+        </p:txBody>
+      </p:sp>
+      <p:sp>
+        <p:nvSpPr>
+          <p:cNvPr id="72" name="Shape 70"/>
+          <p:cNvSpPr/>
+          <p:nvPr/>
+        </p:nvSpPr>
+        <p:spPr>
+          <a:xfrm>
+            <a:off x="2468880" y="4449470"/>
+            <a:ext cx="2377440" cy="59436"/>
+          </a:xfrm>
+          <a:prstGeom prst="roundRect">
+            <a:avLst>
+              <a:gd name="adj" fmla="val 49231"/>
+            </a:avLst>
+          </a:prstGeom>
+          <a:solidFill>
+            <a:srgbClr val="E2EAEE"/>
+          </a:solidFill>
+          <a:ln/>
+        </p:spPr>
+      </p:sp>
+      <p:sp>
+        <p:nvSpPr>
+          <p:cNvPr id="73" name="Text 71"/>
+          <p:cNvSpPr txBox="1"/>
+          <p:nvPr/>
+        </p:nvSpPr>
+        <p:spPr>
+          <a:xfrm>
+            <a:off x="5029200" y="4389120"/>
+            <a:ext cx="822960" cy="169164"/>
+          </a:xfrm>
+          <a:prstGeom prst="rect">
+            <a:avLst/>
+          </a:prstGeom>
+          <a:noFill/>
+          <a:ln/>
+        </p:spPr>
+        <p:txBody>
+          <a:bodyPr wrap="square" lIns="0" tIns="0" rIns="0" bIns="0" rtlCol="0" anchor="ctr"/>
+          <a:lstStyle/>
+          <a:p>
+            <a:pPr algn="r" indent="0" marL="0">
+              <a:buNone/>
+            </a:pPr>
+            <a:r>
+              <a:rPr lang="en-US" sz="800" dirty="0">
+                <a:solidFill>
+                  <a:srgbClr val="8FA1AC"/>
+                </a:solidFill>
+                <a:latin typeface="Poppins" pitchFamily="34" charset="0"/>
+                <a:ea typeface="Poppins" pitchFamily="34" charset="-122"/>
+                <a:cs typeface="Poppins" pitchFamily="34" charset="-120"/>
+              </a:rPr>
+              <a:t>—</a:t>
+            </a:r>
+            <a:endParaRPr lang="en-US" sz="800" dirty="0"/>
+          </a:p>
+        </p:txBody>
+      </p:sp>
+      <p:sp>
+        <p:nvSpPr>
+          <p:cNvPr id="74" name="Text 72"/>
+          <p:cNvSpPr txBox="1"/>
+          <p:nvPr/>
+        </p:nvSpPr>
+        <p:spPr>
+          <a:xfrm>
+            <a:off x="5943600" y="4389120"/>
+            <a:ext cx="822960" cy="169164"/>
+          </a:xfrm>
+          <a:prstGeom prst="rect">
+            <a:avLst/>
+          </a:prstGeom>
+          <a:noFill/>
+          <a:ln/>
+        </p:spPr>
+        <p:txBody>
+          <a:bodyPr wrap="square" lIns="0" tIns="0" rIns="0" bIns="0" rtlCol="0" anchor="ctr"/>
+          <a:lstStyle/>
+          <a:p>
+            <a:pPr algn="r" indent="0" marL="0">
+              <a:buNone/>
+            </a:pPr>
+            <a:r>
+              <a:rPr lang="en-US" sz="600" dirty="0">
+                <a:solidFill>
+                  <a:srgbClr val="8FA1AC"/>
+                </a:solidFill>
+                <a:latin typeface="Poppins" pitchFamily="34" charset="0"/>
+                <a:ea typeface="Poppins" pitchFamily="34" charset="-122"/>
+                <a:cs typeface="Poppins" pitchFamily="34" charset="-120"/>
+              </a:rPr>
+              <a:t>no time logged</a:t>
+            </a:r>
+            <a:endParaRPr lang="en-US" sz="600" dirty="0"/>
+          </a:p>
+        </p:txBody>
+      </p:sp>
+      <p:sp>
+        <p:nvSpPr>
+          <p:cNvPr id="75" name="Text 73"/>
+          <p:cNvSpPr txBox="1"/>
+          <p:nvPr/>
+        </p:nvSpPr>
+        <p:spPr>
+          <a:xfrm>
+            <a:off x="640080" y="4558284"/>
+            <a:ext cx="1783080" cy="169164"/>
+          </a:xfrm>
+          <a:prstGeom prst="rect">
+            <a:avLst/>
+          </a:prstGeom>
+          <a:noFill/>
+          <a:ln/>
+        </p:spPr>
+        <p:txBody>
+          <a:bodyPr wrap="square" lIns="0" tIns="0" rIns="0" bIns="0" rtlCol="0" anchor="ctr"/>
+          <a:lstStyle/>
+          <a:p>
+            <a:pPr indent="0" marL="0">
+              <a:buNone/>
+            </a:pPr>
+            <a:r>
+              <a:rPr lang="en-US" sz="800" dirty="0">
+                <a:solidFill>
+                  <a:srgbClr val="5E7280"/>
+                </a:solidFill>
+                <a:latin typeface="Poppins" pitchFamily="34" charset="0"/>
+                <a:ea typeface="Poppins" pitchFamily="34" charset="-122"/>
+                <a:cs typeface="Poppins" pitchFamily="34" charset="-120"/>
+              </a:rPr>
+              <a:t>Anton Lopez</a:t>
+            </a:r>
+            <a:endParaRPr lang="en-US" sz="800" dirty="0"/>
+          </a:p>
+        </p:txBody>
+      </p:sp>
+      <p:sp>
+        <p:nvSpPr>
+          <p:cNvPr id="76" name="Shape 74"/>
+          <p:cNvSpPr/>
+          <p:nvPr/>
+        </p:nvSpPr>
+        <p:spPr>
+          <a:xfrm>
+            <a:off x="2468880" y="4618634"/>
+            <a:ext cx="2377440" cy="59436"/>
+          </a:xfrm>
+          <a:prstGeom prst="roundRect">
+            <a:avLst>
+              <a:gd name="adj" fmla="val 49231"/>
+            </a:avLst>
+          </a:prstGeom>
+          <a:solidFill>
+            <a:srgbClr val="E2EAEE"/>
+          </a:solidFill>
+          <a:ln/>
+        </p:spPr>
+      </p:sp>
+      <p:sp>
+        <p:nvSpPr>
+          <p:cNvPr id="77" name="Text 75"/>
+          <p:cNvSpPr txBox="1"/>
+          <p:nvPr/>
+        </p:nvSpPr>
+        <p:spPr>
+          <a:xfrm>
+            <a:off x="5029200" y="4558284"/>
+            <a:ext cx="822960" cy="169164"/>
+          </a:xfrm>
+          <a:prstGeom prst="rect">
+            <a:avLst/>
+          </a:prstGeom>
+          <a:noFill/>
+          <a:ln/>
+        </p:spPr>
+        <p:txBody>
+          <a:bodyPr wrap="square" lIns="0" tIns="0" rIns="0" bIns="0" rtlCol="0" anchor="ctr"/>
+          <a:lstStyle/>
+          <a:p>
+            <a:pPr algn="r" indent="0" marL="0">
+              <a:buNone/>
+            </a:pPr>
+            <a:r>
+              <a:rPr lang="en-US" sz="800" dirty="0">
+                <a:solidFill>
+                  <a:srgbClr val="8FA1AC"/>
+                </a:solidFill>
+                <a:latin typeface="Poppins" pitchFamily="34" charset="0"/>
+                <a:ea typeface="Poppins" pitchFamily="34" charset="-122"/>
+                <a:cs typeface="Poppins" pitchFamily="34" charset="-120"/>
+              </a:rPr>
+              <a:t>—</a:t>
+            </a:r>
+            <a:endParaRPr lang="en-US" sz="800" dirty="0"/>
+          </a:p>
+        </p:txBody>
+      </p:sp>
+      <p:sp>
+        <p:nvSpPr>
+          <p:cNvPr id="78" name="Text 76"/>
+          <p:cNvSpPr txBox="1"/>
+          <p:nvPr/>
+        </p:nvSpPr>
+        <p:spPr>
+          <a:xfrm>
+            <a:off x="5943600" y="4558284"/>
+            <a:ext cx="822960" cy="169164"/>
+          </a:xfrm>
+          <a:prstGeom prst="rect">
+            <a:avLst/>
+          </a:prstGeom>
+          <a:noFill/>
+          <a:ln/>
+        </p:spPr>
+        <p:txBody>
+          <a:bodyPr wrap="square" lIns="0" tIns="0" rIns="0" bIns="0" rtlCol="0" anchor="ctr"/>
+          <a:lstStyle/>
+          <a:p>
+            <a:pPr algn="r" indent="0" marL="0">
+              <a:buNone/>
+            </a:pPr>
+            <a:r>
+              <a:rPr lang="en-US" sz="600" dirty="0">
+                <a:solidFill>
+                  <a:srgbClr val="8FA1AC"/>
+                </a:solidFill>
+                <a:latin typeface="Poppins" pitchFamily="34" charset="0"/>
+                <a:ea typeface="Poppins" pitchFamily="34" charset="-122"/>
+                <a:cs typeface="Poppins" pitchFamily="34" charset="-120"/>
+              </a:rPr>
+              <a:t>no time logged</a:t>
+            </a:r>
+            <a:endParaRPr lang="en-US" sz="600" dirty="0"/>
+          </a:p>
+        </p:txBody>
+      </p:sp>
+      <p:sp>
+        <p:nvSpPr>
+          <p:cNvPr id="79" name="Text 77"/>
+          <p:cNvSpPr txBox="1"/>
+          <p:nvPr/>
+        </p:nvSpPr>
+        <p:spPr>
+          <a:xfrm>
+            <a:off x="640080" y="4727448"/>
+            <a:ext cx="1783080" cy="169164"/>
+          </a:xfrm>
+          <a:prstGeom prst="rect">
+            <a:avLst/>
+          </a:prstGeom>
+          <a:noFill/>
+          <a:ln/>
+        </p:spPr>
+        <p:txBody>
+          <a:bodyPr wrap="square" lIns="0" tIns="0" rIns="0" bIns="0" rtlCol="0" anchor="ctr"/>
+          <a:lstStyle/>
+          <a:p>
+            <a:pPr indent="0" marL="0">
+              <a:buNone/>
+            </a:pPr>
+            <a:r>
+              <a:rPr lang="en-US" sz="800" dirty="0">
+                <a:solidFill>
+                  <a:srgbClr val="5E7280"/>
+                </a:solidFill>
+                <a:latin typeface="Poppins" pitchFamily="34" charset="0"/>
+                <a:ea typeface="Poppins" pitchFamily="34" charset="-122"/>
+                <a:cs typeface="Poppins" pitchFamily="34" charset="-120"/>
+              </a:rPr>
+              <a:t>Argenis Rafael Guevara</a:t>
+            </a:r>
+            <a:endParaRPr lang="en-US" sz="800" dirty="0"/>
+          </a:p>
+        </p:txBody>
+      </p:sp>
+      <p:sp>
+        <p:nvSpPr>
+          <p:cNvPr id="80" name="Shape 78"/>
+          <p:cNvSpPr/>
+          <p:nvPr/>
+        </p:nvSpPr>
+        <p:spPr>
+          <a:xfrm>
+            <a:off x="2468880" y="4787798"/>
+            <a:ext cx="2377440" cy="59436"/>
+          </a:xfrm>
+          <a:prstGeom prst="roundRect">
+            <a:avLst>
+              <a:gd name="adj" fmla="val 49231"/>
+            </a:avLst>
+          </a:prstGeom>
+          <a:solidFill>
+            <a:srgbClr val="E2EAEE"/>
+          </a:solidFill>
+          <a:ln/>
+        </p:spPr>
+      </p:sp>
+      <p:sp>
+        <p:nvSpPr>
+          <p:cNvPr id="81" name="Text 79"/>
+          <p:cNvSpPr txBox="1"/>
+          <p:nvPr/>
+        </p:nvSpPr>
+        <p:spPr>
+          <a:xfrm>
+            <a:off x="5029200" y="4727448"/>
+            <a:ext cx="822960" cy="169164"/>
+          </a:xfrm>
+          <a:prstGeom prst="rect">
+            <a:avLst/>
+          </a:prstGeom>
+          <a:noFill/>
+          <a:ln/>
+        </p:spPr>
+        <p:txBody>
+          <a:bodyPr wrap="square" lIns="0" tIns="0" rIns="0" bIns="0" rtlCol="0" anchor="ctr"/>
+          <a:lstStyle/>
+          <a:p>
+            <a:pPr algn="r" indent="0" marL="0">
+              <a:buNone/>
+            </a:pPr>
+            <a:r>
+              <a:rPr lang="en-US" sz="800" dirty="0">
+                <a:solidFill>
+                  <a:srgbClr val="8FA1AC"/>
+                </a:solidFill>
+                <a:latin typeface="Poppins" pitchFamily="34" charset="0"/>
+                <a:ea typeface="Poppins" pitchFamily="34" charset="-122"/>
+                <a:cs typeface="Poppins" pitchFamily="34" charset="-120"/>
+              </a:rPr>
+              <a:t>—</a:t>
+            </a:r>
+            <a:endParaRPr lang="en-US" sz="800" dirty="0"/>
+          </a:p>
+        </p:txBody>
+      </p:sp>
+      <p:sp>
+        <p:nvSpPr>
+          <p:cNvPr id="82" name="Text 80"/>
+          <p:cNvSpPr txBox="1"/>
+          <p:nvPr/>
+        </p:nvSpPr>
+        <p:spPr>
+          <a:xfrm>
+            <a:off x="5943600" y="4727448"/>
+            <a:ext cx="822960" cy="169164"/>
+          </a:xfrm>
+          <a:prstGeom prst="rect">
+            <a:avLst/>
+          </a:prstGeom>
+          <a:noFill/>
+          <a:ln/>
+        </p:spPr>
+        <p:txBody>
+          <a:bodyPr wrap="square" lIns="0" tIns="0" rIns="0" bIns="0" rtlCol="0" anchor="ctr"/>
+          <a:lstStyle/>
+          <a:p>
+            <a:pPr algn="r" indent="0" marL="0">
+              <a:buNone/>
+            </a:pPr>
+            <a:r>
+              <a:rPr lang="en-US" sz="600" dirty="0">
+                <a:solidFill>
+                  <a:srgbClr val="8FA1AC"/>
+                </a:solidFill>
+                <a:latin typeface="Poppins" pitchFamily="34" charset="0"/>
+                <a:ea typeface="Poppins" pitchFamily="34" charset="-122"/>
+                <a:cs typeface="Poppins" pitchFamily="34" charset="-120"/>
+              </a:rPr>
+              <a:t>no time logged</a:t>
+            </a:r>
+            <a:endParaRPr lang="en-US" sz="600" dirty="0"/>
+          </a:p>
+        </p:txBody>
+      </p:sp>
+      <p:sp>
+        <p:nvSpPr>
+          <p:cNvPr id="83" name="Text 81"/>
+          <p:cNvSpPr txBox="1"/>
+          <p:nvPr/>
+        </p:nvSpPr>
+        <p:spPr>
+          <a:xfrm>
+            <a:off x="640080" y="4896612"/>
+            <a:ext cx="1783080" cy="169164"/>
+          </a:xfrm>
+          <a:prstGeom prst="rect">
+            <a:avLst/>
+          </a:prstGeom>
+          <a:noFill/>
+          <a:ln/>
+        </p:spPr>
+        <p:txBody>
+          <a:bodyPr wrap="square" lIns="0" tIns="0" rIns="0" bIns="0" rtlCol="0" anchor="ctr"/>
+          <a:lstStyle/>
+          <a:p>
+            <a:pPr indent="0" marL="0">
+              <a:buNone/>
+            </a:pPr>
+            <a:r>
+              <a:rPr lang="en-US" sz="800" dirty="0">
+                <a:solidFill>
+                  <a:srgbClr val="5E7280"/>
+                </a:solidFill>
+                <a:latin typeface="Poppins" pitchFamily="34" charset="0"/>
+                <a:ea typeface="Poppins" pitchFamily="34" charset="-122"/>
+                <a:cs typeface="Poppins" pitchFamily="34" charset="-120"/>
+              </a:rPr>
+              <a:t>Isaac Mercado</a:t>
+            </a:r>
+            <a:endParaRPr lang="en-US" sz="800" dirty="0"/>
+          </a:p>
+        </p:txBody>
+      </p:sp>
+      <p:sp>
+        <p:nvSpPr>
+          <p:cNvPr id="84" name="Shape 82"/>
+          <p:cNvSpPr/>
+          <p:nvPr/>
+        </p:nvSpPr>
+        <p:spPr>
+          <a:xfrm>
+            <a:off x="2468880" y="4956962"/>
+            <a:ext cx="2377440" cy="59436"/>
+          </a:xfrm>
+          <a:prstGeom prst="roundRect">
+            <a:avLst>
+              <a:gd name="adj" fmla="val 49231"/>
+            </a:avLst>
+          </a:prstGeom>
+          <a:solidFill>
+            <a:srgbClr val="E2EAEE"/>
+          </a:solidFill>
+          <a:ln/>
+        </p:spPr>
+      </p:sp>
+      <p:sp>
+        <p:nvSpPr>
+          <p:cNvPr id="85" name="Text 83"/>
+          <p:cNvSpPr txBox="1"/>
+          <p:nvPr/>
+        </p:nvSpPr>
+        <p:spPr>
+          <a:xfrm>
+            <a:off x="5029200" y="4896612"/>
+            <a:ext cx="822960" cy="169164"/>
+          </a:xfrm>
+          <a:prstGeom prst="rect">
+            <a:avLst/>
+          </a:prstGeom>
+          <a:noFill/>
+          <a:ln/>
+        </p:spPr>
+        <p:txBody>
+          <a:bodyPr wrap="square" lIns="0" tIns="0" rIns="0" bIns="0" rtlCol="0" anchor="ctr"/>
+          <a:lstStyle/>
+          <a:p>
+            <a:pPr algn="r" indent="0" marL="0">
+              <a:buNone/>
+            </a:pPr>
+            <a:r>
+              <a:rPr lang="en-US" sz="800" dirty="0">
+                <a:solidFill>
+                  <a:srgbClr val="8FA1AC"/>
+                </a:solidFill>
+                <a:latin typeface="Poppins" pitchFamily="34" charset="0"/>
+                <a:ea typeface="Poppins" pitchFamily="34" charset="-122"/>
+                <a:cs typeface="Poppins" pitchFamily="34" charset="-120"/>
+              </a:rPr>
+              <a:t>—</a:t>
+            </a:r>
+            <a:endParaRPr lang="en-US" sz="800" dirty="0"/>
+          </a:p>
+        </p:txBody>
+      </p:sp>
+      <p:sp>
+        <p:nvSpPr>
+          <p:cNvPr id="86" name="Text 84"/>
+          <p:cNvSpPr txBox="1"/>
+          <p:nvPr/>
+        </p:nvSpPr>
+        <p:spPr>
+          <a:xfrm>
+            <a:off x="5943600" y="4896612"/>
+            <a:ext cx="822960" cy="169164"/>
+          </a:xfrm>
+          <a:prstGeom prst="rect">
+            <a:avLst/>
+          </a:prstGeom>
+          <a:noFill/>
+          <a:ln/>
+        </p:spPr>
+        <p:txBody>
+          <a:bodyPr wrap="square" lIns="0" tIns="0" rIns="0" bIns="0" rtlCol="0" anchor="ctr"/>
+          <a:lstStyle/>
+          <a:p>
+            <a:pPr algn="r" indent="0" marL="0">
+              <a:buNone/>
+            </a:pPr>
+            <a:r>
+              <a:rPr lang="en-US" sz="600" dirty="0">
+                <a:solidFill>
+                  <a:srgbClr val="8FA1AC"/>
+                </a:solidFill>
+                <a:latin typeface="Poppins" pitchFamily="34" charset="0"/>
+                <a:ea typeface="Poppins" pitchFamily="34" charset="-122"/>
+                <a:cs typeface="Poppins" pitchFamily="34" charset="-120"/>
+              </a:rPr>
+              <a:t>no time logged</a:t>
+            </a:r>
+            <a:endParaRPr lang="en-US" sz="600" dirty="0"/>
+          </a:p>
+        </p:txBody>
+      </p:sp>
+      <p:sp>
+        <p:nvSpPr>
+          <p:cNvPr id="87" name="Text 85"/>
+          <p:cNvSpPr txBox="1"/>
+          <p:nvPr/>
+        </p:nvSpPr>
+        <p:spPr>
+          <a:xfrm>
+            <a:off x="640080" y="5065776"/>
+            <a:ext cx="1783080" cy="169164"/>
+          </a:xfrm>
+          <a:prstGeom prst="rect">
+            <a:avLst/>
+          </a:prstGeom>
+          <a:noFill/>
+          <a:ln/>
+        </p:spPr>
+        <p:txBody>
+          <a:bodyPr wrap="square" lIns="0" tIns="0" rIns="0" bIns="0" rtlCol="0" anchor="ctr"/>
+          <a:lstStyle/>
+          <a:p>
+            <a:pPr indent="0" marL="0">
+              <a:buNone/>
+            </a:pPr>
+            <a:r>
+              <a:rPr lang="en-US" sz="800" dirty="0">
+                <a:solidFill>
+                  <a:srgbClr val="5E7280"/>
+                </a:solidFill>
+                <a:latin typeface="Poppins" pitchFamily="34" charset="0"/>
+                <a:ea typeface="Poppins" pitchFamily="34" charset="-122"/>
+                <a:cs typeface="Poppins" pitchFamily="34" charset="-120"/>
+              </a:rPr>
+              <a:t>Jasmine Hikuroa</a:t>
+            </a:r>
+            <a:endParaRPr lang="en-US" sz="800" dirty="0"/>
+          </a:p>
+        </p:txBody>
+      </p:sp>
+      <p:sp>
+        <p:nvSpPr>
+          <p:cNvPr id="88" name="Shape 86"/>
+          <p:cNvSpPr/>
+          <p:nvPr/>
+        </p:nvSpPr>
+        <p:spPr>
+          <a:xfrm>
+            <a:off x="2468880" y="5126126"/>
+            <a:ext cx="2377440" cy="59436"/>
+          </a:xfrm>
+          <a:prstGeom prst="roundRect">
+            <a:avLst>
+              <a:gd name="adj" fmla="val 49231"/>
+            </a:avLst>
+          </a:prstGeom>
+          <a:solidFill>
+            <a:srgbClr val="E2EAEE"/>
+          </a:solidFill>
+          <a:ln/>
+        </p:spPr>
+      </p:sp>
+      <p:sp>
+        <p:nvSpPr>
+          <p:cNvPr id="89" name="Text 87"/>
+          <p:cNvSpPr txBox="1"/>
+          <p:nvPr/>
+        </p:nvSpPr>
+        <p:spPr>
+          <a:xfrm>
+            <a:off x="5029200" y="5065776"/>
+            <a:ext cx="822960" cy="169164"/>
+          </a:xfrm>
+          <a:prstGeom prst="rect">
+            <a:avLst/>
+          </a:prstGeom>
+          <a:noFill/>
+          <a:ln/>
+        </p:spPr>
+        <p:txBody>
+          <a:bodyPr wrap="square" lIns="0" tIns="0" rIns="0" bIns="0" rtlCol="0" anchor="ctr"/>
+          <a:lstStyle/>
+          <a:p>
+            <a:pPr algn="r" indent="0" marL="0">
+              <a:buNone/>
+            </a:pPr>
+            <a:r>
+              <a:rPr lang="en-US" sz="800" dirty="0">
+                <a:solidFill>
+                  <a:srgbClr val="8FA1AC"/>
+                </a:solidFill>
+                <a:latin typeface="Poppins" pitchFamily="34" charset="0"/>
+                <a:ea typeface="Poppins" pitchFamily="34" charset="-122"/>
+                <a:cs typeface="Poppins" pitchFamily="34" charset="-120"/>
+              </a:rPr>
+              <a:t>—</a:t>
+            </a:r>
+            <a:endParaRPr lang="en-US" sz="800" dirty="0"/>
+          </a:p>
+        </p:txBody>
+      </p:sp>
+      <p:sp>
+        <p:nvSpPr>
+          <p:cNvPr id="90" name="Text 88"/>
+          <p:cNvSpPr txBox="1"/>
+          <p:nvPr/>
+        </p:nvSpPr>
+        <p:spPr>
+          <a:xfrm>
+            <a:off x="5943600" y="5065776"/>
+            <a:ext cx="822960" cy="169164"/>
+          </a:xfrm>
+          <a:prstGeom prst="rect">
+            <a:avLst/>
+          </a:prstGeom>
+          <a:noFill/>
+          <a:ln/>
+        </p:spPr>
+        <p:txBody>
+          <a:bodyPr wrap="square" lIns="0" tIns="0" rIns="0" bIns="0" rtlCol="0" anchor="ctr"/>
+          <a:lstStyle/>
+          <a:p>
+            <a:pPr algn="r" indent="0" marL="0">
+              <a:buNone/>
+            </a:pPr>
+            <a:r>
+              <a:rPr lang="en-US" sz="600" dirty="0">
+                <a:solidFill>
+                  <a:srgbClr val="8FA1AC"/>
+                </a:solidFill>
+                <a:latin typeface="Poppins" pitchFamily="34" charset="0"/>
+                <a:ea typeface="Poppins" pitchFamily="34" charset="-122"/>
+                <a:cs typeface="Poppins" pitchFamily="34" charset="-120"/>
+              </a:rPr>
+              <a:t>no time logged</a:t>
+            </a:r>
+            <a:endParaRPr lang="en-US" sz="600" dirty="0"/>
+          </a:p>
+        </p:txBody>
+      </p:sp>
+      <p:sp>
+        <p:nvSpPr>
+          <p:cNvPr id="91" name="Text 89"/>
+          <p:cNvSpPr txBox="1"/>
+          <p:nvPr/>
+        </p:nvSpPr>
+        <p:spPr>
+          <a:xfrm>
+            <a:off x="640080" y="5234940"/>
+            <a:ext cx="1783080" cy="169164"/>
+          </a:xfrm>
+          <a:prstGeom prst="rect">
+            <a:avLst/>
+          </a:prstGeom>
+          <a:noFill/>
+          <a:ln/>
+        </p:spPr>
+        <p:txBody>
+          <a:bodyPr wrap="square" lIns="0" tIns="0" rIns="0" bIns="0" rtlCol="0" anchor="ctr"/>
+          <a:lstStyle/>
+          <a:p>
+            <a:pPr indent="0" marL="0">
+              <a:buNone/>
+            </a:pPr>
+            <a:r>
+              <a:rPr lang="en-US" sz="800" dirty="0">
+                <a:solidFill>
+                  <a:srgbClr val="5E7280"/>
+                </a:solidFill>
+                <a:latin typeface="Poppins" pitchFamily="34" charset="0"/>
+                <a:ea typeface="Poppins" pitchFamily="34" charset="-122"/>
+                <a:cs typeface="Poppins" pitchFamily="34" charset="-120"/>
+              </a:rPr>
+              <a:t>Bjorn Magabo</a:t>
+            </a:r>
+            <a:endParaRPr lang="en-US" sz="800" dirty="0"/>
+          </a:p>
+        </p:txBody>
+      </p:sp>
+      <p:sp>
+        <p:nvSpPr>
+          <p:cNvPr id="92" name="Shape 90"/>
+          <p:cNvSpPr/>
+          <p:nvPr/>
+        </p:nvSpPr>
+        <p:spPr>
+          <a:xfrm>
+            <a:off x="2468880" y="5295290"/>
+            <a:ext cx="2377440" cy="59436"/>
+          </a:xfrm>
+          <a:prstGeom prst="roundRect">
+            <a:avLst>
+              <a:gd name="adj" fmla="val 49231"/>
+            </a:avLst>
+          </a:prstGeom>
+          <a:solidFill>
+            <a:srgbClr val="E2EAEE"/>
+          </a:solidFill>
+          <a:ln/>
+        </p:spPr>
+      </p:sp>
+      <p:sp>
+        <p:nvSpPr>
+          <p:cNvPr id="93" name="Text 91"/>
+          <p:cNvSpPr txBox="1"/>
+          <p:nvPr/>
+        </p:nvSpPr>
+        <p:spPr>
+          <a:xfrm>
+            <a:off x="5029200" y="5234940"/>
+            <a:ext cx="822960" cy="169164"/>
+          </a:xfrm>
+          <a:prstGeom prst="rect">
+            <a:avLst/>
+          </a:prstGeom>
+          <a:noFill/>
+          <a:ln/>
+        </p:spPr>
+        <p:txBody>
+          <a:bodyPr wrap="square" lIns="0" tIns="0" rIns="0" bIns="0" rtlCol="0" anchor="ctr"/>
+          <a:lstStyle/>
+          <a:p>
+            <a:pPr algn="r" indent="0" marL="0">
+              <a:buNone/>
+            </a:pPr>
+            <a:r>
+              <a:rPr lang="en-US" sz="800" dirty="0">
+                <a:solidFill>
+                  <a:srgbClr val="8FA1AC"/>
+                </a:solidFill>
+                <a:latin typeface="Poppins" pitchFamily="34" charset="0"/>
+                <a:ea typeface="Poppins" pitchFamily="34" charset="-122"/>
+                <a:cs typeface="Poppins" pitchFamily="34" charset="-120"/>
+              </a:rPr>
+              <a:t>—</a:t>
+            </a:r>
+            <a:endParaRPr lang="en-US" sz="800" dirty="0"/>
+          </a:p>
+        </p:txBody>
+      </p:sp>
+      <p:sp>
+        <p:nvSpPr>
+          <p:cNvPr id="94" name="Text 92"/>
+          <p:cNvSpPr txBox="1"/>
+          <p:nvPr/>
+        </p:nvSpPr>
+        <p:spPr>
+          <a:xfrm>
+            <a:off x="5943600" y="5234940"/>
+            <a:ext cx="822960" cy="169164"/>
+          </a:xfrm>
+          <a:prstGeom prst="rect">
+            <a:avLst/>
+          </a:prstGeom>
+          <a:noFill/>
+          <a:ln/>
+        </p:spPr>
+        <p:txBody>
+          <a:bodyPr wrap="square" lIns="0" tIns="0" rIns="0" bIns="0" rtlCol="0" anchor="ctr"/>
+          <a:lstStyle/>
+          <a:p>
+            <a:pPr algn="r" indent="0" marL="0">
+              <a:buNone/>
+            </a:pPr>
+            <a:r>
+              <a:rPr lang="en-US" sz="600" dirty="0">
+                <a:solidFill>
+                  <a:srgbClr val="8FA1AC"/>
+                </a:solidFill>
+                <a:latin typeface="Poppins" pitchFamily="34" charset="0"/>
+                <a:ea typeface="Poppins" pitchFamily="34" charset="-122"/>
+                <a:cs typeface="Poppins" pitchFamily="34" charset="-120"/>
+              </a:rPr>
+              <a:t>no time logged</a:t>
+            </a:r>
+            <a:endParaRPr lang="en-US" sz="600" dirty="0"/>
+          </a:p>
+        </p:txBody>
+      </p:sp>
+      <p:sp>
+        <p:nvSpPr>
+          <p:cNvPr id="95" name="Text 93"/>
+          <p:cNvSpPr txBox="1"/>
+          <p:nvPr/>
+        </p:nvSpPr>
+        <p:spPr>
+          <a:xfrm>
+            <a:off x="640080" y="5404104"/>
+            <a:ext cx="1783080" cy="169164"/>
+          </a:xfrm>
+          <a:prstGeom prst="rect">
+            <a:avLst/>
+          </a:prstGeom>
+          <a:noFill/>
+          <a:ln/>
+        </p:spPr>
+        <p:txBody>
+          <a:bodyPr wrap="square" lIns="0" tIns="0" rIns="0" bIns="0" rtlCol="0" anchor="ctr"/>
+          <a:lstStyle/>
+          <a:p>
+            <a:pPr indent="0" marL="0">
+              <a:buNone/>
+            </a:pPr>
+            <a:r>
+              <a:rPr lang="en-US" sz="800" dirty="0">
+                <a:solidFill>
+                  <a:srgbClr val="5E7280"/>
+                </a:solidFill>
+                <a:latin typeface="Poppins" pitchFamily="34" charset="0"/>
+                <a:ea typeface="Poppins" pitchFamily="34" charset="-122"/>
+                <a:cs typeface="Poppins" pitchFamily="34" charset="-120"/>
+              </a:rPr>
+              <a:t>Phuong Ho</a:t>
+            </a:r>
+            <a:endParaRPr lang="en-US" sz="800" dirty="0"/>
+          </a:p>
+        </p:txBody>
+      </p:sp>
+      <p:sp>
+        <p:nvSpPr>
+          <p:cNvPr id="96" name="Shape 94"/>
+          <p:cNvSpPr/>
+          <p:nvPr/>
+        </p:nvSpPr>
+        <p:spPr>
+          <a:xfrm>
+            <a:off x="2468880" y="5464454"/>
+            <a:ext cx="2377440" cy="59436"/>
+          </a:xfrm>
+          <a:prstGeom prst="roundRect">
+            <a:avLst>
+              <a:gd name="adj" fmla="val 49231"/>
+            </a:avLst>
+          </a:prstGeom>
+          <a:solidFill>
+            <a:srgbClr val="E2EAEE"/>
+          </a:solidFill>
+          <a:ln/>
+        </p:spPr>
+      </p:sp>
+      <p:sp>
+        <p:nvSpPr>
+          <p:cNvPr id="97" name="Text 95"/>
+          <p:cNvSpPr txBox="1"/>
+          <p:nvPr/>
+        </p:nvSpPr>
+        <p:spPr>
+          <a:xfrm>
+            <a:off x="5029200" y="5404104"/>
+            <a:ext cx="822960" cy="169164"/>
+          </a:xfrm>
+          <a:prstGeom prst="rect">
+            <a:avLst/>
+          </a:prstGeom>
+          <a:noFill/>
+          <a:ln/>
+        </p:spPr>
+        <p:txBody>
+          <a:bodyPr wrap="square" lIns="0" tIns="0" rIns="0" bIns="0" rtlCol="0" anchor="ctr"/>
+          <a:lstStyle/>
+          <a:p>
+            <a:pPr algn="r" indent="0" marL="0">
+              <a:buNone/>
+            </a:pPr>
+            <a:r>
+              <a:rPr lang="en-US" sz="800" dirty="0">
+                <a:solidFill>
+                  <a:srgbClr val="8FA1AC"/>
+                </a:solidFill>
+                <a:latin typeface="Poppins" pitchFamily="34" charset="0"/>
+                <a:ea typeface="Poppins" pitchFamily="34" charset="-122"/>
+                <a:cs typeface="Poppins" pitchFamily="34" charset="-120"/>
+              </a:rPr>
+              <a:t>—</a:t>
+            </a:r>
+            <a:endParaRPr lang="en-US" sz="800" dirty="0"/>
+          </a:p>
+        </p:txBody>
+      </p:sp>
+      <p:sp>
+        <p:nvSpPr>
+          <p:cNvPr id="98" name="Text 96"/>
+          <p:cNvSpPr txBox="1"/>
+          <p:nvPr/>
+        </p:nvSpPr>
+        <p:spPr>
+          <a:xfrm>
+            <a:off x="5943600" y="5404104"/>
+            <a:ext cx="822960" cy="169164"/>
+          </a:xfrm>
+          <a:prstGeom prst="rect">
+            <a:avLst/>
+          </a:prstGeom>
+          <a:noFill/>
+          <a:ln/>
+        </p:spPr>
+        <p:txBody>
+          <a:bodyPr wrap="square" lIns="0" tIns="0" rIns="0" bIns="0" rtlCol="0" anchor="ctr"/>
+          <a:lstStyle/>
+          <a:p>
+            <a:pPr algn="r" indent="0" marL="0">
+              <a:buNone/>
+            </a:pPr>
+            <a:r>
+              <a:rPr lang="en-US" sz="600" dirty="0">
+                <a:solidFill>
+                  <a:srgbClr val="8FA1AC"/>
+                </a:solidFill>
+                <a:latin typeface="Poppins" pitchFamily="34" charset="0"/>
+                <a:ea typeface="Poppins" pitchFamily="34" charset="-122"/>
+                <a:cs typeface="Poppins" pitchFamily="34" charset="-120"/>
+              </a:rPr>
+              <a:t>no time logged</a:t>
+            </a:r>
+            <a:endParaRPr lang="en-US" sz="600" dirty="0"/>
+          </a:p>
+        </p:txBody>
+      </p:sp>
+      <p:sp>
+        <p:nvSpPr>
+          <p:cNvPr id="99" name="Shape 97"/>
+          <p:cNvSpPr/>
+          <p:nvPr/>
+        </p:nvSpPr>
+        <p:spPr>
+          <a:xfrm>
+            <a:off x="4370832" y="2999232"/>
+            <a:ext cx="7315" cy="2537460"/>
+          </a:xfrm>
+          <a:prstGeom prst="rect">
+            <a:avLst/>
+          </a:prstGeom>
+          <a:solidFill>
+            <a:srgbClr val="B4552D"/>
+          </a:solidFill>
+          <a:ln/>
+        </p:spPr>
+      </p:sp>
+      <p:sp>
+        <p:nvSpPr>
+          <p:cNvPr id="100" name="Text 98"/>
+          <p:cNvSpPr txBox="1"/>
+          <p:nvPr/>
+        </p:nvSpPr>
+        <p:spPr>
+          <a:xfrm>
+            <a:off x="3931920" y="2816352"/>
+            <a:ext cx="877824" cy="164592"/>
+          </a:xfrm>
+          <a:prstGeom prst="rect">
+            <a:avLst/>
+          </a:prstGeom>
+          <a:noFill/>
+          <a:ln/>
+        </p:spPr>
+        <p:txBody>
+          <a:bodyPr wrap="square" lIns="0" tIns="0" rIns="0" bIns="0" rtlCol="0" anchor="ctr"/>
+          <a:lstStyle/>
+          <a:p>
+            <a:pPr algn="ctr" indent="0" marL="0">
+              <a:buNone/>
+            </a:pPr>
+            <a:r>
+              <a:rPr lang="en-US" sz="600" b="1" dirty="0">
+                <a:solidFill>
+                  <a:srgbClr val="B4552D"/>
+                </a:solidFill>
+                <a:latin typeface="Poppins" pitchFamily="34" charset="0"/>
+                <a:ea typeface="Poppins" pitchFamily="34" charset="-122"/>
+                <a:cs typeface="Poppins" pitchFamily="34" charset="-120"/>
+              </a:rPr>
+              <a:t>80% target</a:t>
+            </a:r>
+            <a:endParaRPr lang="en-US" sz="600" dirty="0"/>
+          </a:p>
+        </p:txBody>
+      </p:sp>
+      <p:sp>
+        <p:nvSpPr>
+          <p:cNvPr id="101" name="Text 99"/>
+          <p:cNvSpPr txBox="1"/>
+          <p:nvPr/>
+        </p:nvSpPr>
+        <p:spPr>
+          <a:xfrm>
+            <a:off x="640080" y="5650992"/>
+            <a:ext cx="6126480" cy="256032"/>
           </a:xfrm>
           <a:prstGeom prst="rect">
             <a:avLst/>
@@ -47695,23 +49151,23 @@
               <a:buNone/>
             </a:pPr>
             <a:r>
-              <a:rPr lang="en-US" sz="680" dirty="0">
-                <a:solidFill>
-                  <a:srgbClr val="C88A2E"/>
-                </a:solidFill>
-                <a:latin typeface="Poppins" pitchFamily="34" charset="0"/>
-                <a:ea typeface="Poppins" pitchFamily="34" charset="-122"/>
-                <a:cs typeface="Poppins" pitchFamily="34" charset="-120"/>
-              </a:rPr>
-              <a:t>21.4h of the 78.9h sits on two records named 'test' / 'Warranty Test' — worth clearing out</a:t>
-            </a:r>
-            <a:endParaRPr lang="en-US" sz="680" dirty="0"/>
-          </a:p>
-        </p:txBody>
-      </p:sp>
-      <p:sp>
-        <p:nvSpPr>
-          <p:cNvPr id="60" name="Shape 58"/>
+              <a:rPr lang="en-US" sz="580" dirty="0">
+                <a:solidFill>
+                  <a:srgbClr val="8FA1AC"/>
+                </a:solidFill>
+                <a:latin typeface="Poppins" pitchFamily="34" charset="0"/>
+                <a:ea typeface="Poppins" pitchFamily="34" charset="-122"/>
+                <a:cs typeface="Poppins" pitchFamily="34" charset="-120"/>
+              </a:rPr>
+              <a:t>Available staff = the 15 people assigned to PS-pipeline tickets open now or closed this week (Tech, Onboarding, Integrations, Training, Warranty), at a 38h standard week.</a:t>
+            </a:r>
+            <a:endParaRPr lang="en-US" sz="580" dirty="0"/>
+          </a:p>
+        </p:txBody>
+      </p:sp>
+      <p:sp>
+        <p:nvSpPr>
+          <p:cNvPr id="102" name="Shape 100"/>
           <p:cNvSpPr/>
           <p:nvPr/>
         </p:nvSpPr>
@@ -47740,7 +49196,7 @@
       </p:sp>
       <p:sp>
         <p:nvSpPr>
-          <p:cNvPr id="61" name="Text 59"/>
+          <p:cNvPr id="103" name="Text 101"/>
           <p:cNvSpPr txBox="1"/>
           <p:nvPr/>
         </p:nvSpPr>
@@ -47771,7 +49227,7 @@
                 <a:ea typeface="Poppins" pitchFamily="34" charset="-122"/>
                 <a:cs typeface="Poppins" pitchFamily="34" charset="-120"/>
               </a:rPr>
-              <a:t>OPEN PS WORK  </a:t>
+              <a:t>BILLABLE BY PS WORK  </a:t>
             </a:r>
             <a:pPr indent="0" marL="0">
               <a:buNone/>
@@ -47785,7 +49241,7 @@
                 <a:ea typeface="Poppins" pitchFamily="34" charset="-122"/>
                 <a:cs typeface="Poppins" pitchFamily="34" charset="-120"/>
               </a:rPr>
-              <a:t>median time to close · since 8 Sep</a:t>
+              <a:t>share of hours logged</a:t>
             </a:r>
             <a:endParaRPr lang="en-US" sz="1100" dirty="0"/>
           </a:p>
@@ -47793,14 +49249,14 @@
       </p:sp>
       <p:sp>
         <p:nvSpPr>
-          <p:cNvPr id="62" name="Text 60"/>
+          <p:cNvPr id="104" name="Text 102"/>
           <p:cNvSpPr txBox="1"/>
           <p:nvPr/>
         </p:nvSpPr>
         <p:spPr>
           <a:xfrm>
             <a:off x="7379208" y="2743200"/>
-            <a:ext cx="1828800" cy="164592"/>
+            <a:ext cx="1371600" cy="164592"/>
           </a:xfrm>
           <a:prstGeom prst="rect">
             <a:avLst/>
@@ -47832,14 +49288,14 @@
       </p:sp>
       <p:sp>
         <p:nvSpPr>
-          <p:cNvPr id="63" name="Text 61"/>
-          <p:cNvSpPr txBox="1"/>
-          <p:nvPr/>
-        </p:nvSpPr>
-        <p:spPr>
-          <a:xfrm>
-            <a:off x="9326880" y="2743200"/>
-            <a:ext cx="731520" cy="164592"/>
+          <p:cNvPr id="105" name="Text 103"/>
+          <p:cNvSpPr txBox="1"/>
+          <p:nvPr/>
+        </p:nvSpPr>
+        <p:spPr>
+          <a:xfrm>
+            <a:off x="10287000" y="2743200"/>
+            <a:ext cx="640080" cy="164592"/>
           </a:xfrm>
           <a:prstGeom prst="rect">
             <a:avLst/>
@@ -47863,7 +49319,7 @@
                 <a:ea typeface="Poppins" pitchFamily="34" charset="-122"/>
                 <a:cs typeface="Poppins" pitchFamily="34" charset="-120"/>
               </a:rPr>
-              <a:t>OPEN</a:t>
+              <a:t>HOURS</a:t>
             </a:r>
             <a:endParaRPr lang="en-US" sz="680" dirty="0"/>
           </a:p>
@@ -47871,14 +49327,14 @@
       </p:sp>
       <p:sp>
         <p:nvSpPr>
-          <p:cNvPr id="64" name="Text 62"/>
-          <p:cNvSpPr txBox="1"/>
-          <p:nvPr/>
-        </p:nvSpPr>
-        <p:spPr>
-          <a:xfrm>
-            <a:off x="10149840" y="2743200"/>
-            <a:ext cx="914400" cy="164592"/>
+          <p:cNvPr id="106" name="Text 104"/>
+          <p:cNvSpPr txBox="1"/>
+          <p:nvPr/>
+        </p:nvSpPr>
+        <p:spPr>
+          <a:xfrm>
+            <a:off x="10972800" y="2743200"/>
+            <a:ext cx="603504" cy="164592"/>
           </a:xfrm>
           <a:prstGeom prst="rect">
             <a:avLst/>
@@ -47902,7 +49358,7 @@
                 <a:ea typeface="Poppins" pitchFamily="34" charset="-122"/>
                 <a:cs typeface="Poppins" pitchFamily="34" charset="-120"/>
               </a:rPr>
-              <a:t>MEDIAN TTC</a:t>
+              <a:t>SHARE</a:t>
             </a:r>
             <a:endParaRPr lang="en-US" sz="680" dirty="0"/>
           </a:p>
@@ -47910,14 +49366,14 @@
       </p:sp>
       <p:sp>
         <p:nvSpPr>
-          <p:cNvPr id="65" name="Text 63"/>
-          <p:cNvSpPr txBox="1"/>
-          <p:nvPr/>
-        </p:nvSpPr>
-        <p:spPr>
-          <a:xfrm>
-            <a:off x="7379208" y="2926080"/>
-            <a:ext cx="1828800" cy="192024"/>
+          <p:cNvPr id="107" name="Text 105"/>
+          <p:cNvSpPr txBox="1"/>
+          <p:nvPr/>
+        </p:nvSpPr>
+        <p:spPr>
+          <a:xfrm>
+            <a:off x="7379208" y="2944368"/>
+            <a:ext cx="1371600" cy="196596"/>
           </a:xfrm>
           <a:prstGeom prst="rect">
             <a:avLst/>
@@ -47949,14 +49405,58 @@
       </p:sp>
       <p:sp>
         <p:nvSpPr>
-          <p:cNvPr id="66" name="Text 64"/>
-          <p:cNvSpPr txBox="1"/>
-          <p:nvPr/>
-        </p:nvSpPr>
-        <p:spPr>
-          <a:xfrm>
-            <a:off x="9326880" y="2926080"/>
-            <a:ext cx="731520" cy="192024"/>
+          <p:cNvPr id="108" name="Shape 106"/>
+          <p:cNvSpPr/>
+          <p:nvPr/>
+        </p:nvSpPr>
+        <p:spPr>
+          <a:xfrm>
+            <a:off x="8823960" y="3012948"/>
+            <a:ext cx="1371600" cy="59436"/>
+          </a:xfrm>
+          <a:prstGeom prst="roundRect">
+            <a:avLst>
+              <a:gd name="adj" fmla="val 49231"/>
+            </a:avLst>
+          </a:prstGeom>
+          <a:solidFill>
+            <a:srgbClr val="E2EAEE"/>
+          </a:solidFill>
+          <a:ln/>
+        </p:spPr>
+      </p:sp>
+      <p:sp>
+        <p:nvSpPr>
+          <p:cNvPr id="109" name="Shape 107"/>
+          <p:cNvSpPr/>
+          <p:nvPr/>
+        </p:nvSpPr>
+        <p:spPr>
+          <a:xfrm>
+            <a:off x="8823960" y="3012948"/>
+            <a:ext cx="1371600" cy="59436"/>
+          </a:xfrm>
+          <a:prstGeom prst="roundRect">
+            <a:avLst>
+              <a:gd name="adj" fmla="val 49231"/>
+            </a:avLst>
+          </a:prstGeom>
+          <a:solidFill>
+            <a:srgbClr val="2C8394"/>
+          </a:solidFill>
+          <a:ln/>
+        </p:spPr>
+      </p:sp>
+      <p:sp>
+        <p:nvSpPr>
+          <p:cNvPr id="110" name="Text 108"/>
+          <p:cNvSpPr txBox="1"/>
+          <p:nvPr/>
+        </p:nvSpPr>
+        <p:spPr>
+          <a:xfrm>
+            <a:off x="10287000" y="2944368"/>
+            <a:ext cx="640080" cy="196596"/>
           </a:xfrm>
           <a:prstGeom prst="rect">
             <a:avLst/>
@@ -47974,13 +49474,52 @@
             <a:r>
               <a:rPr lang="en-US" sz="800" b="1" dirty="0">
                 <a:solidFill>
+                  <a:srgbClr val="2C8394"/>
+                </a:solidFill>
+                <a:latin typeface="Poppins" pitchFamily="34" charset="0"/>
+                <a:ea typeface="Poppins" pitchFamily="34" charset="-122"/>
+                <a:cs typeface="Poppins" pitchFamily="34" charset="-120"/>
+              </a:rPr>
+              <a:t>31.44h</a:t>
+            </a:r>
+            <a:endParaRPr lang="en-US" sz="800" dirty="0"/>
+          </a:p>
+        </p:txBody>
+      </p:sp>
+      <p:sp>
+        <p:nvSpPr>
+          <p:cNvPr id="111" name="Text 109"/>
+          <p:cNvSpPr txBox="1"/>
+          <p:nvPr/>
+        </p:nvSpPr>
+        <p:spPr>
+          <a:xfrm>
+            <a:off x="10972800" y="2944368"/>
+            <a:ext cx="603504" cy="196596"/>
+          </a:xfrm>
+          <a:prstGeom prst="rect">
+            <a:avLst/>
+          </a:prstGeom>
+          <a:noFill/>
+          <a:ln/>
+        </p:spPr>
+        <p:txBody>
+          <a:bodyPr wrap="square" lIns="0" tIns="0" rIns="0" bIns="0" rtlCol="0" anchor="ctr"/>
+          <a:lstStyle/>
+          <a:p>
+            <a:pPr algn="r" indent="0" marL="0">
+              <a:buNone/>
+            </a:pPr>
+            <a:r>
+              <a:rPr lang="en-US" sz="800" dirty="0">
+                <a:solidFill>
                   <a:srgbClr val="5E7280"/>
                 </a:solidFill>
                 <a:latin typeface="Poppins" pitchFamily="34" charset="0"/>
                 <a:ea typeface="Poppins" pitchFamily="34" charset="-122"/>
                 <a:cs typeface="Poppins" pitchFamily="34" charset="-120"/>
               </a:rPr>
-              <a:t>353</a:t>
+              <a:t>95.2%</a:t>
             </a:r>
             <a:endParaRPr lang="en-US" sz="800" dirty="0"/>
           </a:p>
@@ -47988,14 +49527,97 @@
       </p:sp>
       <p:sp>
         <p:nvSpPr>
-          <p:cNvPr id="67" name="Text 65"/>
-          <p:cNvSpPr txBox="1"/>
-          <p:nvPr/>
-        </p:nvSpPr>
-        <p:spPr>
-          <a:xfrm>
-            <a:off x="10149840" y="2926080"/>
-            <a:ext cx="914400" cy="192024"/>
+          <p:cNvPr id="112" name="Text 110"/>
+          <p:cNvSpPr txBox="1"/>
+          <p:nvPr/>
+        </p:nvSpPr>
+        <p:spPr>
+          <a:xfrm>
+            <a:off x="7379208" y="3140964"/>
+            <a:ext cx="1371600" cy="196596"/>
+          </a:xfrm>
+          <a:prstGeom prst="rect">
+            <a:avLst/>
+          </a:prstGeom>
+          <a:noFill/>
+          <a:ln/>
+        </p:spPr>
+        <p:txBody>
+          <a:bodyPr wrap="square" lIns="0" tIns="0" rIns="0" bIns="0" rtlCol="0" anchor="ctr"/>
+          <a:lstStyle/>
+          <a:p>
+            <a:pPr indent="0" marL="0">
+              <a:buNone/>
+            </a:pPr>
+            <a:r>
+              <a:rPr lang="en-US" sz="800" b="1" dirty="0">
+                <a:solidFill>
+                  <a:srgbClr val="12293A"/>
+                </a:solidFill>
+                <a:latin typeface="Poppins" pitchFamily="34" charset="0"/>
+                <a:ea typeface="Poppins" pitchFamily="34" charset="-122"/>
+                <a:cs typeface="Poppins" pitchFamily="34" charset="-120"/>
+              </a:rPr>
+              <a:t>Integration</a:t>
+            </a:r>
+            <a:endParaRPr lang="en-US" sz="800" dirty="0"/>
+          </a:p>
+        </p:txBody>
+      </p:sp>
+      <p:sp>
+        <p:nvSpPr>
+          <p:cNvPr id="113" name="Shape 111"/>
+          <p:cNvSpPr/>
+          <p:nvPr/>
+        </p:nvSpPr>
+        <p:spPr>
+          <a:xfrm>
+            <a:off x="8823960" y="3209544"/>
+            <a:ext cx="1371600" cy="59436"/>
+          </a:xfrm>
+          <a:prstGeom prst="roundRect">
+            <a:avLst>
+              <a:gd name="adj" fmla="val 49231"/>
+            </a:avLst>
+          </a:prstGeom>
+          <a:solidFill>
+            <a:srgbClr val="E2EAEE"/>
+          </a:solidFill>
+          <a:ln/>
+        </p:spPr>
+      </p:sp>
+      <p:sp>
+        <p:nvSpPr>
+          <p:cNvPr id="114" name="Shape 112"/>
+          <p:cNvSpPr/>
+          <p:nvPr/>
+        </p:nvSpPr>
+        <p:spPr>
+          <a:xfrm>
+            <a:off x="8823960" y="3209544"/>
+            <a:ext cx="68493" cy="59436"/>
+          </a:xfrm>
+          <a:prstGeom prst="roundRect">
+            <a:avLst>
+              <a:gd name="adj" fmla="val 49231"/>
+            </a:avLst>
+          </a:prstGeom>
+          <a:solidFill>
+            <a:srgbClr val="2C8394"/>
+          </a:solidFill>
+          <a:ln/>
+        </p:spPr>
+      </p:sp>
+      <p:sp>
+        <p:nvSpPr>
+          <p:cNvPr id="115" name="Text 113"/>
+          <p:cNvSpPr txBox="1"/>
+          <p:nvPr/>
+        </p:nvSpPr>
+        <p:spPr>
+          <a:xfrm>
+            <a:off x="10287000" y="3140964"/>
+            <a:ext cx="640080" cy="196596"/>
           </a:xfrm>
           <a:prstGeom prst="rect">
             <a:avLst/>
@@ -48019,7 +49641,7 @@
                 <a:ea typeface="Poppins" pitchFamily="34" charset="-122"/>
                 <a:cs typeface="Poppins" pitchFamily="34" charset="-120"/>
               </a:rPr>
-              <a:t>0.6 d</a:t>
+              <a:t>1.57h</a:t>
             </a:r>
             <a:endParaRPr lang="en-US" sz="800" dirty="0"/>
           </a:p>
@@ -48027,14 +49649,14 @@
       </p:sp>
       <p:sp>
         <p:nvSpPr>
-          <p:cNvPr id="68" name="Text 66"/>
-          <p:cNvSpPr txBox="1"/>
-          <p:nvPr/>
-        </p:nvSpPr>
-        <p:spPr>
-          <a:xfrm>
-            <a:off x="11128248" y="2926080"/>
-            <a:ext cx="438912" cy="192024"/>
+          <p:cNvPr id="116" name="Text 114"/>
+          <p:cNvSpPr txBox="1"/>
+          <p:nvPr/>
+        </p:nvSpPr>
+        <p:spPr>
+          <a:xfrm>
+            <a:off x="10972800" y="3140964"/>
+            <a:ext cx="603504" cy="196596"/>
           </a:xfrm>
           <a:prstGeom prst="rect">
             <a:avLst/>
@@ -48050,7 +49672,107 @@
               <a:buNone/>
             </a:pPr>
             <a:r>
-              <a:rPr lang="en-US" sz="620" dirty="0">
+              <a:rPr lang="en-US" sz="800" dirty="0">
+                <a:solidFill>
+                  <a:srgbClr val="5E7280"/>
+                </a:solidFill>
+                <a:latin typeface="Poppins" pitchFamily="34" charset="0"/>
+                <a:ea typeface="Poppins" pitchFamily="34" charset="-122"/>
+                <a:cs typeface="Poppins" pitchFamily="34" charset="-120"/>
+              </a:rPr>
+              <a:t>4.8%</a:t>
+            </a:r>
+            <a:endParaRPr lang="en-US" sz="800" dirty="0"/>
+          </a:p>
+        </p:txBody>
+      </p:sp>
+      <p:sp>
+        <p:nvSpPr>
+          <p:cNvPr id="117" name="Text 115"/>
+          <p:cNvSpPr txBox="1"/>
+          <p:nvPr/>
+        </p:nvSpPr>
+        <p:spPr>
+          <a:xfrm>
+            <a:off x="7379208" y="3337560"/>
+            <a:ext cx="1371600" cy="196596"/>
+          </a:xfrm>
+          <a:prstGeom prst="rect">
+            <a:avLst/>
+          </a:prstGeom>
+          <a:noFill/>
+          <a:ln/>
+        </p:spPr>
+        <p:txBody>
+          <a:bodyPr wrap="square" lIns="0" tIns="0" rIns="0" bIns="0" rtlCol="0" anchor="ctr"/>
+          <a:lstStyle/>
+          <a:p>
+            <a:pPr indent="0" marL="0">
+              <a:buNone/>
+            </a:pPr>
+            <a:r>
+              <a:rPr lang="en-US" sz="800" dirty="0">
+                <a:solidFill>
+                  <a:srgbClr val="5E7280"/>
+                </a:solidFill>
+                <a:latin typeface="Poppins" pitchFamily="34" charset="0"/>
+                <a:ea typeface="Poppins" pitchFamily="34" charset="-122"/>
+                <a:cs typeface="Poppins" pitchFamily="34" charset="-120"/>
+              </a:rPr>
+              <a:t>Onboarding</a:t>
+            </a:r>
+            <a:endParaRPr lang="en-US" sz="800" dirty="0"/>
+          </a:p>
+        </p:txBody>
+      </p:sp>
+      <p:sp>
+        <p:nvSpPr>
+          <p:cNvPr id="118" name="Shape 116"/>
+          <p:cNvSpPr/>
+          <p:nvPr/>
+        </p:nvSpPr>
+        <p:spPr>
+          <a:xfrm>
+            <a:off x="8823960" y="3406140"/>
+            <a:ext cx="1371600" cy="59436"/>
+          </a:xfrm>
+          <a:prstGeom prst="roundRect">
+            <a:avLst>
+              <a:gd name="adj" fmla="val 49231"/>
+            </a:avLst>
+          </a:prstGeom>
+          <a:solidFill>
+            <a:srgbClr val="E2EAEE"/>
+          </a:solidFill>
+          <a:ln/>
+        </p:spPr>
+      </p:sp>
+      <p:sp>
+        <p:nvSpPr>
+          <p:cNvPr id="119" name="Text 117"/>
+          <p:cNvSpPr txBox="1"/>
+          <p:nvPr/>
+        </p:nvSpPr>
+        <p:spPr>
+          <a:xfrm>
+            <a:off x="10287000" y="3337560"/>
+            <a:ext cx="640080" cy="196596"/>
+          </a:xfrm>
+          <a:prstGeom prst="rect">
+            <a:avLst/>
+          </a:prstGeom>
+          <a:noFill/>
+          <a:ln/>
+        </p:spPr>
+        <p:txBody>
+          <a:bodyPr wrap="square" lIns="0" tIns="0" rIns="0" bIns="0" rtlCol="0" anchor="ctr"/>
+          <a:lstStyle/>
+          <a:p>
+            <a:pPr algn="r" indent="0" marL="0">
+              <a:buNone/>
+            </a:pPr>
+            <a:r>
+              <a:rPr lang="en-US" sz="800" dirty="0">
                 <a:solidFill>
                   <a:srgbClr val="8FA1AC"/>
                 </a:solidFill>
@@ -48058,46 +49780,7 @@
                 <a:ea typeface="Poppins" pitchFamily="34" charset="-122"/>
                 <a:cs typeface="Poppins" pitchFamily="34" charset="-120"/>
               </a:rPr>
-              <a:t>n=31</a:t>
-            </a:r>
-            <a:endParaRPr lang="en-US" sz="620" dirty="0"/>
-          </a:p>
-        </p:txBody>
-      </p:sp>
-      <p:sp>
-        <p:nvSpPr>
-          <p:cNvPr id="69" name="Text 67"/>
-          <p:cNvSpPr txBox="1"/>
-          <p:nvPr/>
-        </p:nvSpPr>
-        <p:spPr>
-          <a:xfrm>
-            <a:off x="7379208" y="3108960"/>
-            <a:ext cx="1828800" cy="192024"/>
-          </a:xfrm>
-          <a:prstGeom prst="rect">
-            <a:avLst/>
-          </a:prstGeom>
-          <a:noFill/>
-          <a:ln/>
-        </p:spPr>
-        <p:txBody>
-          <a:bodyPr wrap="square" lIns="0" tIns="0" rIns="0" bIns="0" rtlCol="0" anchor="ctr"/>
-          <a:lstStyle/>
-          <a:p>
-            <a:pPr indent="0" marL="0">
-              <a:buNone/>
-            </a:pPr>
-            <a:r>
-              <a:rPr lang="en-US" sz="800" b="1" dirty="0">
-                <a:solidFill>
-                  <a:srgbClr val="12293A"/>
-                </a:solidFill>
-                <a:latin typeface="Poppins" pitchFamily="34" charset="0"/>
-                <a:ea typeface="Poppins" pitchFamily="34" charset="-122"/>
-                <a:cs typeface="Poppins" pitchFamily="34" charset="-120"/>
-              </a:rPr>
-              <a:t>Onboarding</a:t>
+              <a:t>—</a:t>
             </a:r>
             <a:endParaRPr lang="en-US" sz="800" dirty="0"/>
           </a:p>
@@ -48105,14 +49788,14 @@
       </p:sp>
       <p:sp>
         <p:nvSpPr>
-          <p:cNvPr id="70" name="Text 68"/>
-          <p:cNvSpPr txBox="1"/>
-          <p:nvPr/>
-        </p:nvSpPr>
-        <p:spPr>
-          <a:xfrm>
-            <a:off x="9326880" y="3108960"/>
-            <a:ext cx="731520" cy="192024"/>
+          <p:cNvPr id="120" name="Text 118"/>
+          <p:cNvSpPr txBox="1"/>
+          <p:nvPr/>
+        </p:nvSpPr>
+        <p:spPr>
+          <a:xfrm>
+            <a:off x="10972800" y="3337560"/>
+            <a:ext cx="603504" cy="196596"/>
           </a:xfrm>
           <a:prstGeom prst="rect">
             <a:avLst/>
@@ -48128,7 +49811,46 @@
               <a:buNone/>
             </a:pPr>
             <a:r>
-              <a:rPr lang="en-US" sz="800" b="1" dirty="0">
+              <a:rPr lang="en-US" sz="650" dirty="0">
+                <a:solidFill>
+                  <a:srgbClr val="8FA1AC"/>
+                </a:solidFill>
+                <a:latin typeface="Poppins" pitchFamily="34" charset="0"/>
+                <a:ea typeface="Poppins" pitchFamily="34" charset="-122"/>
+                <a:cs typeface="Poppins" pitchFamily="34" charset="-120"/>
+              </a:rPr>
+              <a:t>none</a:t>
+            </a:r>
+            <a:endParaRPr lang="en-US" sz="650" dirty="0"/>
+          </a:p>
+        </p:txBody>
+      </p:sp>
+      <p:sp>
+        <p:nvSpPr>
+          <p:cNvPr id="121" name="Text 119"/>
+          <p:cNvSpPr txBox="1"/>
+          <p:nvPr/>
+        </p:nvSpPr>
+        <p:spPr>
+          <a:xfrm>
+            <a:off x="7379208" y="3534156"/>
+            <a:ext cx="1371600" cy="196596"/>
+          </a:xfrm>
+          <a:prstGeom prst="rect">
+            <a:avLst/>
+          </a:prstGeom>
+          <a:noFill/>
+          <a:ln/>
+        </p:spPr>
+        <p:txBody>
+          <a:bodyPr wrap="square" lIns="0" tIns="0" rIns="0" bIns="0" rtlCol="0" anchor="ctr"/>
+          <a:lstStyle/>
+          <a:p>
+            <a:pPr indent="0" marL="0">
+              <a:buNone/>
+            </a:pPr>
+            <a:r>
+              <a:rPr lang="en-US" sz="800" dirty="0">
                 <a:solidFill>
                   <a:srgbClr val="5E7280"/>
                 </a:solidFill>
@@ -48136,7 +49858,7 @@
                 <a:ea typeface="Poppins" pitchFamily="34" charset="-122"/>
                 <a:cs typeface="Poppins" pitchFamily="34" charset="-120"/>
               </a:rPr>
-              <a:t>162</a:t>
+              <a:t>Training</a:t>
             </a:r>
             <a:endParaRPr lang="en-US" sz="800" dirty="0"/>
           </a:p>
@@ -48144,14 +49866,36 @@
       </p:sp>
       <p:sp>
         <p:nvSpPr>
-          <p:cNvPr id="71" name="Text 69"/>
-          <p:cNvSpPr txBox="1"/>
-          <p:nvPr/>
-        </p:nvSpPr>
-        <p:spPr>
-          <a:xfrm>
-            <a:off x="10149840" y="3108960"/>
-            <a:ext cx="914400" cy="192024"/>
+          <p:cNvPr id="122" name="Shape 120"/>
+          <p:cNvSpPr/>
+          <p:nvPr/>
+        </p:nvSpPr>
+        <p:spPr>
+          <a:xfrm>
+            <a:off x="8823960" y="3602736"/>
+            <a:ext cx="1371600" cy="59436"/>
+          </a:xfrm>
+          <a:prstGeom prst="roundRect">
+            <a:avLst>
+              <a:gd name="adj" fmla="val 49231"/>
+            </a:avLst>
+          </a:prstGeom>
+          <a:solidFill>
+            <a:srgbClr val="E2EAEE"/>
+          </a:solidFill>
+          <a:ln/>
+        </p:spPr>
+      </p:sp>
+      <p:sp>
+        <p:nvSpPr>
+          <p:cNvPr id="123" name="Text 121"/>
+          <p:cNvSpPr txBox="1"/>
+          <p:nvPr/>
+        </p:nvSpPr>
+        <p:spPr>
+          <a:xfrm>
+            <a:off x="10287000" y="3534156"/>
+            <a:ext cx="640080" cy="196596"/>
           </a:xfrm>
           <a:prstGeom prst="rect">
             <a:avLst/>
@@ -48175,7 +49919,7 @@
                 <a:ea typeface="Poppins" pitchFamily="34" charset="-122"/>
                 <a:cs typeface="Poppins" pitchFamily="34" charset="-120"/>
               </a:rPr>
-              <a:t>no closes yet</a:t>
+              <a:t>—</a:t>
             </a:r>
             <a:endParaRPr lang="en-US" sz="800" dirty="0"/>
           </a:p>
@@ -48183,14 +49927,14 @@
       </p:sp>
       <p:sp>
         <p:nvSpPr>
-          <p:cNvPr id="72" name="Text 70"/>
-          <p:cNvSpPr txBox="1"/>
-          <p:nvPr/>
-        </p:nvSpPr>
-        <p:spPr>
-          <a:xfrm>
-            <a:off x="11128248" y="3108960"/>
-            <a:ext cx="438912" cy="192024"/>
+          <p:cNvPr id="124" name="Text 122"/>
+          <p:cNvSpPr txBox="1"/>
+          <p:nvPr/>
+        </p:nvSpPr>
+        <p:spPr>
+          <a:xfrm>
+            <a:off x="10972800" y="3534156"/>
+            <a:ext cx="603504" cy="196596"/>
           </a:xfrm>
           <a:prstGeom prst="rect">
             <a:avLst/>
@@ -48205,44 +49949,55 @@
             <a:pPr algn="r" indent="0" marL="0">
               <a:buNone/>
             </a:pPr>
-            <a:endParaRPr lang="en-US" sz="620" dirty="0"/>
-          </a:p>
-        </p:txBody>
-      </p:sp>
-      <p:sp>
-        <p:nvSpPr>
-          <p:cNvPr id="73" name="Text 71"/>
-          <p:cNvSpPr txBox="1"/>
-          <p:nvPr/>
-        </p:nvSpPr>
-        <p:spPr>
-          <a:xfrm>
-            <a:off x="7379208" y="3291840"/>
-            <a:ext cx="1828800" cy="192024"/>
-          </a:xfrm>
-          <a:prstGeom prst="rect">
-            <a:avLst/>
-          </a:prstGeom>
-          <a:noFill/>
-          <a:ln/>
-        </p:spPr>
-        <p:txBody>
-          <a:bodyPr wrap="square" lIns="0" tIns="0" rIns="0" bIns="0" rtlCol="0" anchor="ctr"/>
-          <a:lstStyle/>
-          <a:p>
-            <a:pPr indent="0" marL="0">
-              <a:buNone/>
-            </a:pPr>
-            <a:r>
-              <a:rPr lang="en-US" sz="800" b="1" dirty="0">
-                <a:solidFill>
-                  <a:srgbClr val="12293A"/>
-                </a:solidFill>
-                <a:latin typeface="Poppins" pitchFamily="34" charset="0"/>
-                <a:ea typeface="Poppins" pitchFamily="34" charset="-122"/>
-                <a:cs typeface="Poppins" pitchFamily="34" charset="-120"/>
-              </a:rPr>
-              <a:t>Integrations</a:t>
+            <a:r>
+              <a:rPr lang="en-US" sz="650" dirty="0">
+                <a:solidFill>
+                  <a:srgbClr val="8FA1AC"/>
+                </a:solidFill>
+                <a:latin typeface="Poppins" pitchFamily="34" charset="0"/>
+                <a:ea typeface="Poppins" pitchFamily="34" charset="-122"/>
+                <a:cs typeface="Poppins" pitchFamily="34" charset="-120"/>
+              </a:rPr>
+              <a:t>none</a:t>
+            </a:r>
+            <a:endParaRPr lang="en-US" sz="650" dirty="0"/>
+          </a:p>
+        </p:txBody>
+      </p:sp>
+      <p:sp>
+        <p:nvSpPr>
+          <p:cNvPr id="125" name="Text 123"/>
+          <p:cNvSpPr txBox="1"/>
+          <p:nvPr/>
+        </p:nvSpPr>
+        <p:spPr>
+          <a:xfrm>
+            <a:off x="7379208" y="3730752"/>
+            <a:ext cx="1371600" cy="196596"/>
+          </a:xfrm>
+          <a:prstGeom prst="rect">
+            <a:avLst/>
+          </a:prstGeom>
+          <a:noFill/>
+          <a:ln/>
+        </p:spPr>
+        <p:txBody>
+          <a:bodyPr wrap="square" lIns="0" tIns="0" rIns="0" bIns="0" rtlCol="0" anchor="ctr"/>
+          <a:lstStyle/>
+          <a:p>
+            <a:pPr indent="0" marL="0">
+              <a:buNone/>
+            </a:pPr>
+            <a:r>
+              <a:rPr lang="en-US" sz="800" dirty="0">
+                <a:solidFill>
+                  <a:srgbClr val="5E7280"/>
+                </a:solidFill>
+                <a:latin typeface="Poppins" pitchFamily="34" charset="0"/>
+                <a:ea typeface="Poppins" pitchFamily="34" charset="-122"/>
+                <a:cs typeface="Poppins" pitchFamily="34" charset="-120"/>
+              </a:rPr>
+              <a:t>Warranty</a:t>
             </a:r>
             <a:endParaRPr lang="en-US" sz="800" dirty="0"/>
           </a:p>
@@ -48250,14 +50005,36 @@
       </p:sp>
       <p:sp>
         <p:nvSpPr>
-          <p:cNvPr id="74" name="Text 72"/>
-          <p:cNvSpPr txBox="1"/>
-          <p:nvPr/>
-        </p:nvSpPr>
-        <p:spPr>
-          <a:xfrm>
-            <a:off x="9326880" y="3291840"/>
-            <a:ext cx="731520" cy="192024"/>
+          <p:cNvPr id="126" name="Shape 124"/>
+          <p:cNvSpPr/>
+          <p:nvPr/>
+        </p:nvSpPr>
+        <p:spPr>
+          <a:xfrm>
+            <a:off x="8823960" y="3799332"/>
+            <a:ext cx="1371600" cy="59436"/>
+          </a:xfrm>
+          <a:prstGeom prst="roundRect">
+            <a:avLst>
+              <a:gd name="adj" fmla="val 49231"/>
+            </a:avLst>
+          </a:prstGeom>
+          <a:solidFill>
+            <a:srgbClr val="E2EAEE"/>
+          </a:solidFill>
+          <a:ln/>
+        </p:spPr>
+      </p:sp>
+      <p:sp>
+        <p:nvSpPr>
+          <p:cNvPr id="127" name="Text 125"/>
+          <p:cNvSpPr txBox="1"/>
+          <p:nvPr/>
+        </p:nvSpPr>
+        <p:spPr>
+          <a:xfrm>
+            <a:off x="10287000" y="3730752"/>
+            <a:ext cx="640080" cy="196596"/>
           </a:xfrm>
           <a:prstGeom prst="rect">
             <a:avLst/>
@@ -48273,15 +50050,15 @@
               <a:buNone/>
             </a:pPr>
             <a:r>
-              <a:rPr lang="en-US" sz="800" b="1" dirty="0">
-                <a:solidFill>
-                  <a:srgbClr val="5E7280"/>
-                </a:solidFill>
-                <a:latin typeface="Poppins" pitchFamily="34" charset="0"/>
-                <a:ea typeface="Poppins" pitchFamily="34" charset="-122"/>
-                <a:cs typeface="Poppins" pitchFamily="34" charset="-120"/>
-              </a:rPr>
-              <a:t>122</a:t>
+              <a:rPr lang="en-US" sz="800" dirty="0">
+                <a:solidFill>
+                  <a:srgbClr val="8FA1AC"/>
+                </a:solidFill>
+                <a:latin typeface="Poppins" pitchFamily="34" charset="0"/>
+                <a:ea typeface="Poppins" pitchFamily="34" charset="-122"/>
+                <a:cs typeface="Poppins" pitchFamily="34" charset="-120"/>
+              </a:rPr>
+              <a:t>—</a:t>
             </a:r>
             <a:endParaRPr lang="en-US" sz="800" dirty="0"/>
           </a:p>
@@ -48289,14 +50066,14 @@
       </p:sp>
       <p:sp>
         <p:nvSpPr>
-          <p:cNvPr id="75" name="Text 73"/>
-          <p:cNvSpPr txBox="1"/>
-          <p:nvPr/>
-        </p:nvSpPr>
-        <p:spPr>
-          <a:xfrm>
-            <a:off x="10149840" y="3291840"/>
-            <a:ext cx="914400" cy="192024"/>
+          <p:cNvPr id="128" name="Text 126"/>
+          <p:cNvSpPr txBox="1"/>
+          <p:nvPr/>
+        </p:nvSpPr>
+        <p:spPr>
+          <a:xfrm>
+            <a:off x="10972800" y="3730752"/>
+            <a:ext cx="603504" cy="196596"/>
           </a:xfrm>
           <a:prstGeom prst="rect">
             <a:avLst/>
@@ -48312,46 +50089,7 @@
               <a:buNone/>
             </a:pPr>
             <a:r>
-              <a:rPr lang="en-US" sz="800" b="1" dirty="0">
-                <a:solidFill>
-                  <a:srgbClr val="2C8394"/>
-                </a:solidFill>
-                <a:latin typeface="Poppins" pitchFamily="34" charset="0"/>
-                <a:ea typeface="Poppins" pitchFamily="34" charset="-122"/>
-                <a:cs typeface="Poppins" pitchFamily="34" charset="-120"/>
-              </a:rPr>
-              <a:t>1 d</a:t>
-            </a:r>
-            <a:endParaRPr lang="en-US" sz="800" dirty="0"/>
-          </a:p>
-        </p:txBody>
-      </p:sp>
-      <p:sp>
-        <p:nvSpPr>
-          <p:cNvPr id="76" name="Text 74"/>
-          <p:cNvSpPr txBox="1"/>
-          <p:nvPr/>
-        </p:nvSpPr>
-        <p:spPr>
-          <a:xfrm>
-            <a:off x="11128248" y="3291840"/>
-            <a:ext cx="438912" cy="192024"/>
-          </a:xfrm>
-          <a:prstGeom prst="rect">
-            <a:avLst/>
-          </a:prstGeom>
-          <a:noFill/>
-          <a:ln/>
-        </p:spPr>
-        <p:txBody>
-          <a:bodyPr wrap="square" lIns="0" tIns="0" rIns="0" bIns="0" rtlCol="0" anchor="ctr"/>
-          <a:lstStyle/>
-          <a:p>
-            <a:pPr algn="r" indent="0" marL="0">
-              <a:buNone/>
-            </a:pPr>
-            <a:r>
-              <a:rPr lang="en-US" sz="620" dirty="0">
+              <a:rPr lang="en-US" sz="650" dirty="0">
                 <a:solidFill>
                   <a:srgbClr val="8FA1AC"/>
                 </a:solidFill>
@@ -48359,366 +50097,15 @@
                 <a:ea typeface="Poppins" pitchFamily="34" charset="-122"/>
                 <a:cs typeface="Poppins" pitchFamily="34" charset="-120"/>
               </a:rPr>
-              <a:t>n=5</a:t>
-            </a:r>
-            <a:endParaRPr lang="en-US" sz="620" dirty="0"/>
-          </a:p>
-        </p:txBody>
-      </p:sp>
-      <p:sp>
-        <p:nvSpPr>
-          <p:cNvPr id="77" name="Text 75"/>
-          <p:cNvSpPr txBox="1"/>
-          <p:nvPr/>
-        </p:nvSpPr>
-        <p:spPr>
-          <a:xfrm>
-            <a:off x="7379208" y="3474720"/>
-            <a:ext cx="1828800" cy="192024"/>
-          </a:xfrm>
-          <a:prstGeom prst="rect">
-            <a:avLst/>
-          </a:prstGeom>
-          <a:noFill/>
-          <a:ln/>
-        </p:spPr>
-        <p:txBody>
-          <a:bodyPr wrap="square" lIns="0" tIns="0" rIns="0" bIns="0" rtlCol="0" anchor="ctr"/>
-          <a:lstStyle/>
-          <a:p>
-            <a:pPr indent="0" marL="0">
-              <a:buNone/>
-            </a:pPr>
-            <a:r>
-              <a:rPr lang="en-US" sz="800" b="1" dirty="0">
-                <a:solidFill>
-                  <a:srgbClr val="12293A"/>
-                </a:solidFill>
-                <a:latin typeface="Poppins" pitchFamily="34" charset="0"/>
-                <a:ea typeface="Poppins" pitchFamily="34" charset="-122"/>
-                <a:cs typeface="Poppins" pitchFamily="34" charset="-120"/>
-              </a:rPr>
-              <a:t>Training</a:t>
-            </a:r>
-            <a:endParaRPr lang="en-US" sz="800" dirty="0"/>
-          </a:p>
-        </p:txBody>
-      </p:sp>
-      <p:sp>
-        <p:nvSpPr>
-          <p:cNvPr id="78" name="Text 76"/>
-          <p:cNvSpPr txBox="1"/>
-          <p:nvPr/>
-        </p:nvSpPr>
-        <p:spPr>
-          <a:xfrm>
-            <a:off x="9326880" y="3474720"/>
-            <a:ext cx="731520" cy="192024"/>
-          </a:xfrm>
-          <a:prstGeom prst="rect">
-            <a:avLst/>
-          </a:prstGeom>
-          <a:noFill/>
-          <a:ln/>
-        </p:spPr>
-        <p:txBody>
-          <a:bodyPr wrap="square" lIns="0" tIns="0" rIns="0" bIns="0" rtlCol="0" anchor="ctr"/>
-          <a:lstStyle/>
-          <a:p>
-            <a:pPr algn="r" indent="0" marL="0">
-              <a:buNone/>
-            </a:pPr>
-            <a:r>
-              <a:rPr lang="en-US" sz="800" b="1" dirty="0">
-                <a:solidFill>
-                  <a:srgbClr val="5E7280"/>
-                </a:solidFill>
-                <a:latin typeface="Poppins" pitchFamily="34" charset="0"/>
-                <a:ea typeface="Poppins" pitchFamily="34" charset="-122"/>
-                <a:cs typeface="Poppins" pitchFamily="34" charset="-120"/>
-              </a:rPr>
-              <a:t>59</a:t>
-            </a:r>
-            <a:endParaRPr lang="en-US" sz="800" dirty="0"/>
-          </a:p>
-        </p:txBody>
-      </p:sp>
-      <p:sp>
-        <p:nvSpPr>
-          <p:cNvPr id="79" name="Text 77"/>
-          <p:cNvSpPr txBox="1"/>
-          <p:nvPr/>
-        </p:nvSpPr>
-        <p:spPr>
-          <a:xfrm>
-            <a:off x="10149840" y="3474720"/>
-            <a:ext cx="914400" cy="192024"/>
-          </a:xfrm>
-          <a:prstGeom prst="rect">
-            <a:avLst/>
-          </a:prstGeom>
-          <a:noFill/>
-          <a:ln/>
-        </p:spPr>
-        <p:txBody>
-          <a:bodyPr wrap="square" lIns="0" tIns="0" rIns="0" bIns="0" rtlCol="0" anchor="ctr"/>
-          <a:lstStyle/>
-          <a:p>
-            <a:pPr algn="r" indent="0" marL="0">
-              <a:buNone/>
-            </a:pPr>
-            <a:r>
-              <a:rPr lang="en-US" sz="800" b="1" dirty="0">
-                <a:solidFill>
-                  <a:srgbClr val="2C8394"/>
-                </a:solidFill>
-                <a:latin typeface="Poppins" pitchFamily="34" charset="0"/>
-                <a:ea typeface="Poppins" pitchFamily="34" charset="-122"/>
-                <a:cs typeface="Poppins" pitchFamily="34" charset="-120"/>
-              </a:rPr>
-              <a:t>1.5 d</a:t>
-            </a:r>
-            <a:endParaRPr lang="en-US" sz="800" dirty="0"/>
-          </a:p>
-        </p:txBody>
-      </p:sp>
-      <p:sp>
-        <p:nvSpPr>
-          <p:cNvPr id="80" name="Text 78"/>
-          <p:cNvSpPr txBox="1"/>
-          <p:nvPr/>
-        </p:nvSpPr>
-        <p:spPr>
-          <a:xfrm>
-            <a:off x="11128248" y="3474720"/>
-            <a:ext cx="438912" cy="192024"/>
-          </a:xfrm>
-          <a:prstGeom prst="rect">
-            <a:avLst/>
-          </a:prstGeom>
-          <a:noFill/>
-          <a:ln/>
-        </p:spPr>
-        <p:txBody>
-          <a:bodyPr wrap="square" lIns="0" tIns="0" rIns="0" bIns="0" rtlCol="0" anchor="ctr"/>
-          <a:lstStyle/>
-          <a:p>
-            <a:pPr algn="r" indent="0" marL="0">
-              <a:buNone/>
-            </a:pPr>
-            <a:r>
-              <a:rPr lang="en-US" sz="620" dirty="0">
-                <a:solidFill>
-                  <a:srgbClr val="8FA1AC"/>
-                </a:solidFill>
-                <a:latin typeface="Poppins" pitchFamily="34" charset="0"/>
-                <a:ea typeface="Poppins" pitchFamily="34" charset="-122"/>
-                <a:cs typeface="Poppins" pitchFamily="34" charset="-120"/>
-              </a:rPr>
-              <a:t>n=2</a:t>
-            </a:r>
-            <a:endParaRPr lang="en-US" sz="620" dirty="0"/>
-          </a:p>
-        </p:txBody>
-      </p:sp>
-      <p:sp>
-        <p:nvSpPr>
-          <p:cNvPr id="81" name="Text 79"/>
-          <p:cNvSpPr txBox="1"/>
-          <p:nvPr/>
-        </p:nvSpPr>
-        <p:spPr>
-          <a:xfrm>
-            <a:off x="7379208" y="3657600"/>
-            <a:ext cx="1828800" cy="192024"/>
-          </a:xfrm>
-          <a:prstGeom prst="rect">
-            <a:avLst/>
-          </a:prstGeom>
-          <a:noFill/>
-          <a:ln/>
-        </p:spPr>
-        <p:txBody>
-          <a:bodyPr wrap="square" lIns="0" tIns="0" rIns="0" bIns="0" rtlCol="0" anchor="ctr"/>
-          <a:lstStyle/>
-          <a:p>
-            <a:pPr indent="0" marL="0">
-              <a:buNone/>
-            </a:pPr>
-            <a:r>
-              <a:rPr lang="en-US" sz="800" b="1" dirty="0">
-                <a:solidFill>
-                  <a:srgbClr val="12293A"/>
-                </a:solidFill>
-                <a:latin typeface="Poppins" pitchFamily="34" charset="0"/>
-                <a:ea typeface="Poppins" pitchFamily="34" charset="-122"/>
-                <a:cs typeface="Poppins" pitchFamily="34" charset="-120"/>
-              </a:rPr>
-              <a:t>Warranty</a:t>
-            </a:r>
-            <a:endParaRPr lang="en-US" sz="800" dirty="0"/>
-          </a:p>
-        </p:txBody>
-      </p:sp>
-      <p:sp>
-        <p:nvSpPr>
-          <p:cNvPr id="82" name="Text 80"/>
-          <p:cNvSpPr txBox="1"/>
-          <p:nvPr/>
-        </p:nvSpPr>
-        <p:spPr>
-          <a:xfrm>
-            <a:off x="9326880" y="3657600"/>
-            <a:ext cx="731520" cy="192024"/>
-          </a:xfrm>
-          <a:prstGeom prst="rect">
-            <a:avLst/>
-          </a:prstGeom>
-          <a:noFill/>
-          <a:ln/>
-        </p:spPr>
-        <p:txBody>
-          <a:bodyPr wrap="square" lIns="0" tIns="0" rIns="0" bIns="0" rtlCol="0" anchor="ctr"/>
-          <a:lstStyle/>
-          <a:p>
-            <a:pPr algn="r" indent="0" marL="0">
-              <a:buNone/>
-            </a:pPr>
-            <a:r>
-              <a:rPr lang="en-US" sz="800" b="1" dirty="0">
-                <a:solidFill>
-                  <a:srgbClr val="5E7280"/>
-                </a:solidFill>
-                <a:latin typeface="Poppins" pitchFamily="34" charset="0"/>
-                <a:ea typeface="Poppins" pitchFamily="34" charset="-122"/>
-                <a:cs typeface="Poppins" pitchFamily="34" charset="-120"/>
-              </a:rPr>
-              <a:t>3</a:t>
-            </a:r>
-            <a:endParaRPr lang="en-US" sz="800" dirty="0"/>
-          </a:p>
-        </p:txBody>
-      </p:sp>
-      <p:sp>
-        <p:nvSpPr>
-          <p:cNvPr id="83" name="Text 81"/>
-          <p:cNvSpPr txBox="1"/>
-          <p:nvPr/>
-        </p:nvSpPr>
-        <p:spPr>
-          <a:xfrm>
-            <a:off x="10149840" y="3657600"/>
-            <a:ext cx="914400" cy="192024"/>
-          </a:xfrm>
-          <a:prstGeom prst="rect">
-            <a:avLst/>
-          </a:prstGeom>
-          <a:noFill/>
-          <a:ln/>
-        </p:spPr>
-        <p:txBody>
-          <a:bodyPr wrap="square" lIns="0" tIns="0" rIns="0" bIns="0" rtlCol="0" anchor="ctr"/>
-          <a:lstStyle/>
-          <a:p>
-            <a:pPr algn="r" indent="0" marL="0">
-              <a:buNone/>
-            </a:pPr>
-            <a:r>
-              <a:rPr lang="en-US" sz="800" b="1" dirty="0">
-                <a:solidFill>
-                  <a:srgbClr val="2C8394"/>
-                </a:solidFill>
-                <a:latin typeface="Poppins" pitchFamily="34" charset="0"/>
-                <a:ea typeface="Poppins" pitchFamily="34" charset="-122"/>
-                <a:cs typeface="Poppins" pitchFamily="34" charset="-120"/>
-              </a:rPr>
-              <a:t>&lt;0.1 d</a:t>
-            </a:r>
-            <a:endParaRPr lang="en-US" sz="800" dirty="0"/>
-          </a:p>
-        </p:txBody>
-      </p:sp>
-      <p:sp>
-        <p:nvSpPr>
-          <p:cNvPr id="84" name="Text 82"/>
-          <p:cNvSpPr txBox="1"/>
-          <p:nvPr/>
-        </p:nvSpPr>
-        <p:spPr>
-          <a:xfrm>
-            <a:off x="11128248" y="3657600"/>
-            <a:ext cx="438912" cy="192024"/>
-          </a:xfrm>
-          <a:prstGeom prst="rect">
-            <a:avLst/>
-          </a:prstGeom>
-          <a:noFill/>
-          <a:ln/>
-        </p:spPr>
-        <p:txBody>
-          <a:bodyPr wrap="square" lIns="0" tIns="0" rIns="0" bIns="0" rtlCol="0" anchor="ctr"/>
-          <a:lstStyle/>
-          <a:p>
-            <a:pPr algn="r" indent="0" marL="0">
-              <a:buNone/>
-            </a:pPr>
-            <a:r>
-              <a:rPr lang="en-US" sz="620" dirty="0">
-                <a:solidFill>
-                  <a:srgbClr val="8FA1AC"/>
-                </a:solidFill>
-                <a:latin typeface="Poppins" pitchFamily="34" charset="0"/>
-                <a:ea typeface="Poppins" pitchFamily="34" charset="-122"/>
-                <a:cs typeface="Poppins" pitchFamily="34" charset="-120"/>
-              </a:rPr>
-              <a:t>n=1</a:t>
-            </a:r>
-            <a:endParaRPr lang="en-US" sz="620" dirty="0"/>
-          </a:p>
-        </p:txBody>
-      </p:sp>
-      <p:sp>
-        <p:nvSpPr>
-          <p:cNvPr id="85" name="Text 83"/>
-          <p:cNvSpPr txBox="1"/>
-          <p:nvPr/>
-        </p:nvSpPr>
-        <p:spPr>
-          <a:xfrm>
-            <a:off x="7379208" y="3858768"/>
-            <a:ext cx="4197096" cy="219456"/>
-          </a:xfrm>
-          <a:prstGeom prst="rect">
-            <a:avLst/>
-          </a:prstGeom>
-          <a:noFill/>
-          <a:ln/>
-        </p:spPr>
-        <p:txBody>
-          <a:bodyPr wrap="square" lIns="0" tIns="0" rIns="0" bIns="0" rtlCol="0" anchor="t"/>
-          <a:lstStyle/>
-          <a:p>
-            <a:pPr indent="0" marL="0">
-              <a:buNone/>
-            </a:pPr>
-            <a:r>
-              <a:rPr lang="en-US" sz="550" dirty="0">
-                <a:solidFill>
-                  <a:srgbClr val="8FA1AC"/>
-                </a:solidFill>
-                <a:latin typeface="Poppins" pitchFamily="34" charset="0"/>
-                <a:ea typeface="Poppins" pitchFamily="34" charset="-122"/>
-                <a:cs typeface="Poppins" pitchFamily="34" charset="-120"/>
-              </a:rPr>
-              <a:t>Median TTC is measured on tickets created and closed since 8 Sep — all-time medians are unusable because the migration re-dated old closes.</a:t>
-            </a:r>
-            <a:endParaRPr lang="en-US" sz="550" dirty="0"/>
-          </a:p>
-        </p:txBody>
-      </p:sp>
-      <p:sp>
-        <p:nvSpPr>
-          <p:cNvPr id="86" name="Shape 84"/>
+              <a:t>none</a:t>
+            </a:r>
+            <a:endParaRPr lang="en-US" sz="650" dirty="0"/>
+          </a:p>
+        </p:txBody>
+      </p:sp>
+      <p:sp>
+        <p:nvSpPr>
+          <p:cNvPr id="129" name="Shape 127"/>
           <p:cNvSpPr/>
           <p:nvPr/>
         </p:nvSpPr>
@@ -48747,7 +50134,7 @@
       </p:sp>
       <p:sp>
         <p:nvSpPr>
-          <p:cNvPr id="87" name="Text 85"/>
+          <p:cNvPr id="130" name="Text 128"/>
           <p:cNvSpPr txBox="1"/>
           <p:nvPr/>
         </p:nvSpPr>
@@ -48786,7 +50173,7 @@
       </p:sp>
       <p:sp>
         <p:nvSpPr>
-          <p:cNvPr id="88" name="Text 86"/>
+          <p:cNvPr id="131" name="Text 129"/>
           <p:cNvSpPr txBox="1"/>
           <p:nvPr/>
         </p:nvSpPr>
@@ -48831,7 +50218,7 @@
                 <a:ea typeface="Poppins" pitchFamily="34" charset="-122"/>
                 <a:cs typeface="Poppins" pitchFamily="34" charset="-120"/>
               </a:rPr>
-              <a:t>Utilisation is deliberately blank this week. </a:t>
+              <a:t>5.8% billable utilisation is a logging number, not a delivery number. </a:t>
             </a:r>
             <a:pPr indent="0" marL="0">
               <a:spcAft>
@@ -48848,7 +50235,7 @@
                 <a:ea typeface="Poppins" pitchFamily="34" charset="-122"/>
                 <a:cs typeface="Poppins" pitchFamily="34" charset="-120"/>
               </a:rPr>
-              <a:t>Time logging covers 78.93h on 29 of 8,969 PS records. Computing a percentage on that coverage would fabricate a collapse that isn't real.</a:t>
+              <a:t>33.01h landed against 570h of capacity, but only 13% of the week's 132 PS items carry hours.</a:t>
             </a:r>
             <a:endParaRPr lang="en-US" sz="900" dirty="0"/>
           </a:p>
@@ -48859,7 +50246,7 @@
             <a:r>
               <a:rPr lang="en-US" sz="900" b="1" dirty="0">
                 <a:solidFill>
-                  <a:srgbClr val="2C8394"/>
+                  <a:srgbClr val="C88A2E"/>
                 </a:solidFill>
                 <a:latin typeface="Poppins" pitchFamily="34" charset="0"/>
                 <a:ea typeface="Poppins" pitchFamily="34" charset="-122"/>
@@ -48879,7 +50266,7 @@
                 <a:ea typeface="Poppins" pitchFamily="34" charset="-122"/>
                 <a:cs typeface="Poppins" pitchFamily="34" charset="-120"/>
               </a:rPr>
-              <a:t>What it takes to switch this back on: </a:t>
+              <a:t>Two people carry the entire logged total. </a:t>
             </a:r>
             <a:pPr indent="0" marL="0">
               <a:spcAft>
@@ -48896,7 +50283,7 @@
                 <a:ea typeface="Poppins" pitchFamily="34" charset="-122"/>
                 <a:cs typeface="Poppins" pitchFamily="34" charset="-120"/>
               </a:rPr>
-              <a:t>PS members logging hours on every Professional Services record, plus the 38h/week capacity roster re-based in the new reporting. The number returns automatically as coverage lands.</a:t>
+              <a:t>Katherine Fenwick 38.2% and Rhys Woolcock 36.4%; the other 9 PS members logged nothing at all.</a:t>
             </a:r>
             <a:endParaRPr lang="en-US" sz="900" dirty="0"/>
           </a:p>
@@ -48907,7 +50294,7 @@
             <a:r>
               <a:rPr lang="en-US" sz="900" b="1" dirty="0">
                 <a:solidFill>
-                  <a:srgbClr val="C88A2E"/>
+                  <a:srgbClr val="2C8394"/>
                 </a:solidFill>
                 <a:latin typeface="Poppins" pitchFamily="34" charset="0"/>
                 <a:ea typeface="Poppins" pitchFamily="34" charset="-122"/>
@@ -48927,7 +50314,7 @@
                 <a:ea typeface="Poppins" pitchFamily="34" charset="-122"/>
                 <a:cs typeface="Poppins" pitchFamily="34" charset="-120"/>
               </a:rPr>
-              <a:t>Demand signal is live meanwhile: </a:t>
+              <a:t>Work is landing even where hours aren't. </a:t>
             </a:r>
             <a:pPr indent="0" marL="0">
               <a:spcAft>
@@ -48944,7 +50331,7 @@
                 <a:ea typeface="Poppins" pitchFamily="34" charset="-122"/>
                 <a:cs typeface="Poppins" pitchFamily="34" charset="-120"/>
               </a:rPr>
-              <a:t>64 PS cases opened this week, concentrated in Tech (40); 131 PS records created. Tech and Onboarding carry almost all the time logged.</a:t>
+              <a:t>64 PS cases opened this week; Tech carries 95% of logged time. Median time to close since 8 Sep: Tech 0.6 d.</a:t>
             </a:r>
             <a:endParaRPr lang="en-US" sz="900" dirty="0"/>
           </a:p>
@@ -48952,7 +50339,7 @@
       </p:sp>
       <p:sp>
         <p:nvSpPr>
-          <p:cNvPr id="89" name="Text 87"/>
+          <p:cNvPr id="132" name="Text 130"/>
           <p:cNvSpPr txBox="1"/>
           <p:nvPr/>
         </p:nvSpPr>
@@ -48983,7 +50370,7 @@
                 <a:ea typeface="Poppins" pitchFamily="34" charset="-122"/>
                 <a:cs typeface="Poppins" pitchFamily="34" charset="-120"/>
               </a:rPr>
-              <a:t>Per the design ethos: where a source isn't ready the state is shown honestly — never an estimated utilisation presented as measured.</a:t>
+              <a:t>All logged hours are treated as billable — creatio_non_billable is populated on only 3 of 30 records, so billable/non-billable is not yet separable. 2.44h of the Tech total sits on a record named 'Warranty Test' — worth clearing out.</a:t>
             </a:r>
             <a:endParaRPr lang="en-US" sz="750" dirty="0"/>
           </a:p>
@@ -48991,14 +50378,14 @@
       </p:sp>
       <p:sp>
         <p:nvSpPr>
-          <p:cNvPr id="90" name="Shape 88"/>
-          <p:cNvSpPr/>
-          <p:nvPr/>
-        </p:nvSpPr>
-        <p:spPr>
-          <a:xfrm>
-            <a:off x="8456371" y="6510528"/>
-            <a:ext cx="3321101" cy="256032"/>
+          <p:cNvPr id="133" name="Shape 131"/>
+          <p:cNvSpPr/>
+          <p:nvPr/>
+        </p:nvSpPr>
+        <p:spPr>
+          <a:xfrm>
+            <a:off x="6155741" y="6510528"/>
+            <a:ext cx="5621731" cy="256032"/>
           </a:xfrm>
           <a:prstGeom prst="roundRect">
             <a:avLst>
@@ -49013,14 +50400,14 @@
       </p:sp>
       <p:sp>
         <p:nvSpPr>
-          <p:cNvPr id="91" name="Text 89"/>
-          <p:cNvSpPr txBox="1"/>
-          <p:nvPr/>
-        </p:nvSpPr>
-        <p:spPr>
-          <a:xfrm>
-            <a:off x="8456371" y="6510528"/>
-            <a:ext cx="3321101" cy="256032"/>
+          <p:cNvPr id="134" name="Text 132"/>
+          <p:cNvSpPr txBox="1"/>
+          <p:nvPr/>
+        </p:nvSpPr>
+        <p:spPr>
+          <a:xfrm>
+            <a:off x="6155741" y="6510528"/>
+            <a:ext cx="5621731" cy="256032"/>
           </a:xfrm>
           <a:prstGeom prst="rect">
             <a:avLst/>
@@ -49044,7 +50431,7 @@
                 <a:ea typeface="Poppins" pitchFamily="34" charset="-122"/>
                 <a:cs typeface="Poppins" pitchFamily="34" charset="-120"/>
               </a:rPr>
-              <a:t>Source: HubSpot PS records (time logging ramping)</a:t>
+              <a:t>Source: HubSpot PS records (total_hours) + PS pipeline ticket owners — live, read-only</a:t>
             </a:r>
             <a:endParaRPr lang="en-US" sz="700" dirty="0"/>
           </a:p>

--- a/exec-deck/output/H&L Weekly Update - WC 14 Sep 2026.pptx
+++ b/exec-deck/output/H&L Weekly Update - WC 14 Sep 2026.pptx
@@ -46275,7 +46275,7 @@
                 <a:ea typeface="Poppins" pitchFamily="34" charset="-122"/>
                 <a:cs typeface="Poppins" pitchFamily="34" charset="-120"/>
               </a:rPr>
-              <a:t>5.8%</a:t>
+              <a:t>6.7%</a:t>
             </a:r>
             <a:endParaRPr lang="en-US" sz="2600" dirty="0"/>
           </a:p>
@@ -46314,7 +46314,7 @@
                 <a:ea typeface="Poppins" pitchFamily="34" charset="-122"/>
                 <a:cs typeface="Poppins" pitchFamily="34" charset="-120"/>
               </a:rPr>
-              <a:t>33.01h billed of 570h available · target 80%</a:t>
+              <a:t>33.01h billed of 494h available · target 80%</a:t>
             </a:r>
             <a:endParaRPr lang="en-US" sz="780" dirty="0"/>
           </a:p>
@@ -46421,7 +46421,7 @@
                 <a:ea typeface="Poppins" pitchFamily="34" charset="-122"/>
                 <a:cs typeface="Poppins" pitchFamily="34" charset="-120"/>
               </a:rPr>
-              <a:t>570h</a:t>
+              <a:t>494h</a:t>
             </a:r>
             <a:endParaRPr lang="en-US" sz="2600" dirty="0"/>
           </a:p>
@@ -46460,7 +46460,7 @@
                 <a:ea typeface="Poppins" pitchFamily="34" charset="-122"/>
                 <a:cs typeface="Poppins" pitchFamily="34" charset="-120"/>
               </a:rPr>
-              <a:t>15 people assigned to PS-pipeline tickets × 38h standard week</a:t>
+              <a:t>13 people assigned to PS-pipeline tickets × 38h standard week</a:t>
             </a:r>
             <a:endParaRPr lang="en-US" sz="780" dirty="0"/>
           </a:p>
@@ -46741,45 +46741,6 @@
         </p:nvSpPr>
         <p:spPr>
           <a:xfrm>
-            <a:off x="2468880" y="2834640"/>
-            <a:ext cx="2377440" cy="182880"/>
-          </a:xfrm>
-          <a:prstGeom prst="rect">
-            <a:avLst/>
-          </a:prstGeom>
-          <a:noFill/>
-          <a:ln/>
-        </p:spPr>
-        <p:txBody>
-          <a:bodyPr wrap="square" lIns="0" tIns="0" rIns="0" bIns="0" rtlCol="0" anchor="ctr"/>
-          <a:lstStyle/>
-          <a:p>
-            <a:pPr algn="l" indent="0" marL="0">
-              <a:buNone/>
-            </a:pPr>
-            <a:r>
-              <a:rPr lang="en-US" sz="700" b="1" dirty="0">
-                <a:solidFill>
-                  <a:srgbClr val="8FA1AC"/>
-                </a:solidFill>
-                <a:latin typeface="Poppins" pitchFamily="34" charset="0"/>
-                <a:ea typeface="Poppins" pitchFamily="34" charset="-122"/>
-                <a:cs typeface="Poppins" pitchFamily="34" charset="-120"/>
-              </a:rPr>
-              <a:t>UTILISATION OF 38h</a:t>
-            </a:r>
-            <a:endParaRPr lang="en-US" sz="700" dirty="0"/>
-          </a:p>
-        </p:txBody>
-      </p:sp>
-      <p:sp>
-        <p:nvSpPr>
-          <p:cNvPr id="31" name="Text 29"/>
-          <p:cNvSpPr txBox="1"/>
-          <p:nvPr/>
-        </p:nvSpPr>
-        <p:spPr>
-          <a:xfrm>
             <a:off x="5029200" y="2834640"/>
             <a:ext cx="822960" cy="182880"/>
           </a:xfrm>
@@ -46813,7 +46774,7 @@
       </p:sp>
       <p:sp>
         <p:nvSpPr>
-          <p:cNvPr id="32" name="Text 30"/>
+          <p:cNvPr id="31" name="Text 29"/>
           <p:cNvSpPr txBox="1"/>
           <p:nvPr/>
         </p:nvSpPr>
@@ -46852,14 +46813,348 @@
       </p:sp>
       <p:sp>
         <p:nvSpPr>
+          <p:cNvPr id="32" name="Text 30"/>
+          <p:cNvSpPr txBox="1"/>
+          <p:nvPr/>
+        </p:nvSpPr>
+        <p:spPr>
+          <a:xfrm>
+            <a:off x="2468880" y="2816352"/>
+            <a:ext cx="402336" cy="182880"/>
+          </a:xfrm>
+          <a:prstGeom prst="rect">
+            <a:avLst/>
+          </a:prstGeom>
+          <a:noFill/>
+          <a:ln/>
+        </p:spPr>
+        <p:txBody>
+          <a:bodyPr wrap="square" lIns="0" tIns="0" rIns="0" bIns="0" rtlCol="0" anchor="ctr"/>
+          <a:lstStyle/>
+          <a:p>
+            <a:pPr algn="l" indent="0" marL="0">
+              <a:buNone/>
+            </a:pPr>
+            <a:r>
+              <a:rPr lang="en-US" sz="650" b="1" dirty="0">
+                <a:solidFill>
+                  <a:srgbClr val="8FA1AC"/>
+                </a:solidFill>
+                <a:latin typeface="Poppins" pitchFamily="34" charset="0"/>
+                <a:ea typeface="Poppins" pitchFamily="34" charset="-122"/>
+                <a:cs typeface="Poppins" pitchFamily="34" charset="-120"/>
+              </a:rPr>
+              <a:t>0%</a:t>
+            </a:r>
+            <a:endParaRPr lang="en-US" sz="650" dirty="0"/>
+          </a:p>
+        </p:txBody>
+      </p:sp>
+      <p:sp>
+        <p:nvSpPr>
           <p:cNvPr id="33" name="Text 31"/>
           <p:cNvSpPr txBox="1"/>
           <p:nvPr/>
         </p:nvSpPr>
         <p:spPr>
           <a:xfrm>
-            <a:off x="640080" y="3035808"/>
-            <a:ext cx="1783080" cy="169164"/>
+            <a:off x="2743200" y="2816352"/>
+            <a:ext cx="402336" cy="182880"/>
+          </a:xfrm>
+          <a:prstGeom prst="rect">
+            <a:avLst/>
+          </a:prstGeom>
+          <a:noFill/>
+          <a:ln/>
+        </p:spPr>
+        <p:txBody>
+          <a:bodyPr wrap="square" lIns="0" tIns="0" rIns="0" bIns="0" rtlCol="0" anchor="ctr"/>
+          <a:lstStyle/>
+          <a:p>
+            <a:pPr algn="ctr" indent="0" marL="0">
+              <a:buNone/>
+            </a:pPr>
+            <a:r>
+              <a:rPr lang="en-US" sz="650" b="1" dirty="0">
+                <a:solidFill>
+                  <a:srgbClr val="8FA1AC"/>
+                </a:solidFill>
+                <a:latin typeface="Poppins" pitchFamily="34" charset="0"/>
+                <a:ea typeface="Poppins" pitchFamily="34" charset="-122"/>
+                <a:cs typeface="Poppins" pitchFamily="34" charset="-120"/>
+              </a:rPr>
+              <a:t>20%</a:t>
+            </a:r>
+            <a:endParaRPr lang="en-US" sz="650" dirty="0"/>
+          </a:p>
+        </p:txBody>
+      </p:sp>
+      <p:sp>
+        <p:nvSpPr>
+          <p:cNvPr id="34" name="Shape 32"/>
+          <p:cNvSpPr/>
+          <p:nvPr/>
+        </p:nvSpPr>
+        <p:spPr>
+          <a:xfrm>
+            <a:off x="2944368" y="3017520"/>
+            <a:ext cx="5486" cy="2496312"/>
+          </a:xfrm>
+          <a:prstGeom prst="rect">
+            <a:avLst/>
+          </a:prstGeom>
+          <a:solidFill>
+            <a:srgbClr val="E2EAEE"/>
+          </a:solidFill>
+          <a:ln/>
+        </p:spPr>
+      </p:sp>
+      <p:sp>
+        <p:nvSpPr>
+          <p:cNvPr id="35" name="Text 33"/>
+          <p:cNvSpPr txBox="1"/>
+          <p:nvPr/>
+        </p:nvSpPr>
+        <p:spPr>
+          <a:xfrm>
+            <a:off x="3218688" y="2816352"/>
+            <a:ext cx="402336" cy="182880"/>
+          </a:xfrm>
+          <a:prstGeom prst="rect">
+            <a:avLst/>
+          </a:prstGeom>
+          <a:noFill/>
+          <a:ln/>
+        </p:spPr>
+        <p:txBody>
+          <a:bodyPr wrap="square" lIns="0" tIns="0" rIns="0" bIns="0" rtlCol="0" anchor="ctr"/>
+          <a:lstStyle/>
+          <a:p>
+            <a:pPr algn="ctr" indent="0" marL="0">
+              <a:buNone/>
+            </a:pPr>
+            <a:r>
+              <a:rPr lang="en-US" sz="650" b="1" dirty="0">
+                <a:solidFill>
+                  <a:srgbClr val="8FA1AC"/>
+                </a:solidFill>
+                <a:latin typeface="Poppins" pitchFamily="34" charset="0"/>
+                <a:ea typeface="Poppins" pitchFamily="34" charset="-122"/>
+                <a:cs typeface="Poppins" pitchFamily="34" charset="-120"/>
+              </a:rPr>
+              <a:t>40%</a:t>
+            </a:r>
+            <a:endParaRPr lang="en-US" sz="650" dirty="0"/>
+          </a:p>
+        </p:txBody>
+      </p:sp>
+      <p:sp>
+        <p:nvSpPr>
+          <p:cNvPr id="36" name="Shape 34"/>
+          <p:cNvSpPr/>
+          <p:nvPr/>
+        </p:nvSpPr>
+        <p:spPr>
+          <a:xfrm>
+            <a:off x="3419856" y="3017520"/>
+            <a:ext cx="5486" cy="2496312"/>
+          </a:xfrm>
+          <a:prstGeom prst="rect">
+            <a:avLst/>
+          </a:prstGeom>
+          <a:solidFill>
+            <a:srgbClr val="E2EAEE"/>
+          </a:solidFill>
+          <a:ln/>
+        </p:spPr>
+      </p:sp>
+      <p:sp>
+        <p:nvSpPr>
+          <p:cNvPr id="37" name="Text 35"/>
+          <p:cNvSpPr txBox="1"/>
+          <p:nvPr/>
+        </p:nvSpPr>
+        <p:spPr>
+          <a:xfrm>
+            <a:off x="3694176" y="2816352"/>
+            <a:ext cx="402336" cy="182880"/>
+          </a:xfrm>
+          <a:prstGeom prst="rect">
+            <a:avLst/>
+          </a:prstGeom>
+          <a:noFill/>
+          <a:ln/>
+        </p:spPr>
+        <p:txBody>
+          <a:bodyPr wrap="square" lIns="0" tIns="0" rIns="0" bIns="0" rtlCol="0" anchor="ctr"/>
+          <a:lstStyle/>
+          <a:p>
+            <a:pPr algn="ctr" indent="0" marL="0">
+              <a:buNone/>
+            </a:pPr>
+            <a:r>
+              <a:rPr lang="en-US" sz="650" b="1" dirty="0">
+                <a:solidFill>
+                  <a:srgbClr val="8FA1AC"/>
+                </a:solidFill>
+                <a:latin typeface="Poppins" pitchFamily="34" charset="0"/>
+                <a:ea typeface="Poppins" pitchFamily="34" charset="-122"/>
+                <a:cs typeface="Poppins" pitchFamily="34" charset="-120"/>
+              </a:rPr>
+              <a:t>60%</a:t>
+            </a:r>
+            <a:endParaRPr lang="en-US" sz="650" dirty="0"/>
+          </a:p>
+        </p:txBody>
+      </p:sp>
+      <p:sp>
+        <p:nvSpPr>
+          <p:cNvPr id="38" name="Shape 36"/>
+          <p:cNvSpPr/>
+          <p:nvPr/>
+        </p:nvSpPr>
+        <p:spPr>
+          <a:xfrm>
+            <a:off x="3895344" y="3017520"/>
+            <a:ext cx="5486" cy="2496312"/>
+          </a:xfrm>
+          <a:prstGeom prst="rect">
+            <a:avLst/>
+          </a:prstGeom>
+          <a:solidFill>
+            <a:srgbClr val="E2EAEE"/>
+          </a:solidFill>
+          <a:ln/>
+        </p:spPr>
+      </p:sp>
+      <p:sp>
+        <p:nvSpPr>
+          <p:cNvPr id="39" name="Text 37"/>
+          <p:cNvSpPr txBox="1"/>
+          <p:nvPr/>
+        </p:nvSpPr>
+        <p:spPr>
+          <a:xfrm>
+            <a:off x="4169664" y="2816352"/>
+            <a:ext cx="402336" cy="182880"/>
+          </a:xfrm>
+          <a:prstGeom prst="rect">
+            <a:avLst/>
+          </a:prstGeom>
+          <a:noFill/>
+          <a:ln/>
+        </p:spPr>
+        <p:txBody>
+          <a:bodyPr wrap="square" lIns="0" tIns="0" rIns="0" bIns="0" rtlCol="0" anchor="ctr"/>
+          <a:lstStyle/>
+          <a:p>
+            <a:pPr algn="ctr" indent="0" marL="0">
+              <a:buNone/>
+            </a:pPr>
+            <a:r>
+              <a:rPr lang="en-US" sz="650" b="1" dirty="0">
+                <a:solidFill>
+                  <a:srgbClr val="8FA1AC"/>
+                </a:solidFill>
+                <a:latin typeface="Poppins" pitchFamily="34" charset="0"/>
+                <a:ea typeface="Poppins" pitchFamily="34" charset="-122"/>
+                <a:cs typeface="Poppins" pitchFamily="34" charset="-120"/>
+              </a:rPr>
+              <a:t>80%</a:t>
+            </a:r>
+            <a:endParaRPr lang="en-US" sz="650" dirty="0"/>
+          </a:p>
+        </p:txBody>
+      </p:sp>
+      <p:sp>
+        <p:nvSpPr>
+          <p:cNvPr id="40" name="Shape 38"/>
+          <p:cNvSpPr/>
+          <p:nvPr/>
+        </p:nvSpPr>
+        <p:spPr>
+          <a:xfrm>
+            <a:off x="4370832" y="3017520"/>
+            <a:ext cx="5486" cy="2496312"/>
+          </a:xfrm>
+          <a:prstGeom prst="rect">
+            <a:avLst/>
+          </a:prstGeom>
+          <a:solidFill>
+            <a:srgbClr val="E2EAEE"/>
+          </a:solidFill>
+          <a:ln/>
+        </p:spPr>
+      </p:sp>
+      <p:sp>
+        <p:nvSpPr>
+          <p:cNvPr id="41" name="Text 39"/>
+          <p:cNvSpPr txBox="1"/>
+          <p:nvPr/>
+        </p:nvSpPr>
+        <p:spPr>
+          <a:xfrm>
+            <a:off x="4443984" y="2816352"/>
+            <a:ext cx="402336" cy="182880"/>
+          </a:xfrm>
+          <a:prstGeom prst="rect">
+            <a:avLst/>
+          </a:prstGeom>
+          <a:noFill/>
+          <a:ln/>
+        </p:spPr>
+        <p:txBody>
+          <a:bodyPr wrap="square" lIns="0" tIns="0" rIns="0" bIns="0" rtlCol="0" anchor="ctr"/>
+          <a:lstStyle/>
+          <a:p>
+            <a:pPr algn="r" indent="0" marL="0">
+              <a:buNone/>
+            </a:pPr>
+            <a:r>
+              <a:rPr lang="en-US" sz="650" b="1" dirty="0">
+                <a:solidFill>
+                  <a:srgbClr val="8FA1AC"/>
+                </a:solidFill>
+                <a:latin typeface="Poppins" pitchFamily="34" charset="0"/>
+                <a:ea typeface="Poppins" pitchFamily="34" charset="-122"/>
+                <a:cs typeface="Poppins" pitchFamily="34" charset="-120"/>
+              </a:rPr>
+              <a:t>100%</a:t>
+            </a:r>
+            <a:endParaRPr lang="en-US" sz="650" dirty="0"/>
+          </a:p>
+        </p:txBody>
+      </p:sp>
+      <p:sp>
+        <p:nvSpPr>
+          <p:cNvPr id="42" name="Shape 40"/>
+          <p:cNvSpPr/>
+          <p:nvPr/>
+        </p:nvSpPr>
+        <p:spPr>
+          <a:xfrm>
+            <a:off x="4846320" y="3017520"/>
+            <a:ext cx="5486" cy="2496312"/>
+          </a:xfrm>
+          <a:prstGeom prst="rect">
+            <a:avLst/>
+          </a:prstGeom>
+          <a:solidFill>
+            <a:srgbClr val="E2EAEE"/>
+          </a:solidFill>
+          <a:ln/>
+        </p:spPr>
+      </p:sp>
+      <p:sp>
+        <p:nvSpPr>
+          <p:cNvPr id="43" name="Text 41"/>
+          <p:cNvSpPr txBox="1"/>
+          <p:nvPr/>
+        </p:nvSpPr>
+        <p:spPr>
+          <a:xfrm>
+            <a:off x="640080" y="3054096"/>
+            <a:ext cx="1783080" cy="192024"/>
           </a:xfrm>
           <a:prstGeom prst="rect">
             <a:avLst/>
@@ -46891,13 +47186,13 @@
       </p:sp>
       <p:sp>
         <p:nvSpPr>
-          <p:cNvPr id="34" name="Shape 32"/>
-          <p:cNvSpPr/>
-          <p:nvPr/>
-        </p:nvSpPr>
-        <p:spPr>
-          <a:xfrm>
-            <a:off x="2468880" y="3096158"/>
+          <p:cNvPr id="44" name="Shape 42"/>
+          <p:cNvSpPr/>
+          <p:nvPr/>
+        </p:nvSpPr>
+        <p:spPr>
+          <a:xfrm>
+            <a:off x="2468880" y="3120847"/>
             <a:ext cx="2377440" cy="59436"/>
           </a:xfrm>
           <a:prstGeom prst="roundRect">
@@ -46913,13 +47208,13 @@
       </p:sp>
       <p:sp>
         <p:nvSpPr>
-          <p:cNvPr id="35" name="Shape 33"/>
-          <p:cNvSpPr/>
-          <p:nvPr/>
-        </p:nvSpPr>
-        <p:spPr>
-          <a:xfrm>
-            <a:off x="2468880" y="3096158"/>
+          <p:cNvPr id="45" name="Shape 43"/>
+          <p:cNvSpPr/>
+          <p:nvPr/>
+        </p:nvSpPr>
+        <p:spPr>
+          <a:xfrm>
+            <a:off x="2468880" y="3120847"/>
             <a:ext cx="908182" cy="59436"/>
           </a:xfrm>
           <a:prstGeom prst="roundRect">
@@ -46935,14 +47230,14 @@
       </p:sp>
       <p:sp>
         <p:nvSpPr>
-          <p:cNvPr id="36" name="Text 34"/>
-          <p:cNvSpPr txBox="1"/>
-          <p:nvPr/>
-        </p:nvSpPr>
-        <p:spPr>
-          <a:xfrm>
-            <a:off x="5029200" y="3035808"/>
-            <a:ext cx="822960" cy="169164"/>
+          <p:cNvPr id="46" name="Text 44"/>
+          <p:cNvSpPr txBox="1"/>
+          <p:nvPr/>
+        </p:nvSpPr>
+        <p:spPr>
+          <a:xfrm>
+            <a:off x="5029200" y="3054096"/>
+            <a:ext cx="822960" cy="192024"/>
           </a:xfrm>
           <a:prstGeom prst="rect">
             <a:avLst/>
@@ -46974,14 +47269,14 @@
       </p:sp>
       <p:sp>
         <p:nvSpPr>
-          <p:cNvPr id="37" name="Text 35"/>
-          <p:cNvSpPr txBox="1"/>
-          <p:nvPr/>
-        </p:nvSpPr>
-        <p:spPr>
-          <a:xfrm>
-            <a:off x="5943600" y="3035808"/>
-            <a:ext cx="822960" cy="169164"/>
+          <p:cNvPr id="47" name="Text 45"/>
+          <p:cNvSpPr txBox="1"/>
+          <p:nvPr/>
+        </p:nvSpPr>
+        <p:spPr>
+          <a:xfrm>
+            <a:off x="5943600" y="3054096"/>
+            <a:ext cx="822960" cy="192024"/>
           </a:xfrm>
           <a:prstGeom prst="rect">
             <a:avLst/>
@@ -47013,14 +47308,14 @@
       </p:sp>
       <p:sp>
         <p:nvSpPr>
-          <p:cNvPr id="38" name="Text 36"/>
-          <p:cNvSpPr txBox="1"/>
-          <p:nvPr/>
-        </p:nvSpPr>
-        <p:spPr>
-          <a:xfrm>
-            <a:off x="640080" y="3204972"/>
-            <a:ext cx="1783080" cy="169164"/>
+          <p:cNvPr id="48" name="Text 46"/>
+          <p:cNvSpPr txBox="1"/>
+          <p:nvPr/>
+        </p:nvSpPr>
+        <p:spPr>
+          <a:xfrm>
+            <a:off x="640080" y="3246120"/>
+            <a:ext cx="1783080" cy="192024"/>
           </a:xfrm>
           <a:prstGeom prst="rect">
             <a:avLst/>
@@ -47052,13 +47347,13 @@
       </p:sp>
       <p:sp>
         <p:nvSpPr>
-          <p:cNvPr id="39" name="Shape 37"/>
-          <p:cNvSpPr/>
-          <p:nvPr/>
-        </p:nvSpPr>
-        <p:spPr>
-          <a:xfrm>
-            <a:off x="2468880" y="3265322"/>
+          <p:cNvPr id="49" name="Shape 47"/>
+          <p:cNvSpPr/>
+          <p:nvPr/>
+        </p:nvSpPr>
+        <p:spPr>
+          <a:xfrm>
+            <a:off x="2468880" y="3312871"/>
             <a:ext cx="2377440" cy="59436"/>
           </a:xfrm>
           <a:prstGeom prst="roundRect">
@@ -47074,13 +47369,13 @@
       </p:sp>
       <p:sp>
         <p:nvSpPr>
-          <p:cNvPr id="40" name="Shape 38"/>
-          <p:cNvSpPr/>
-          <p:nvPr/>
-        </p:nvSpPr>
-        <p:spPr>
-          <a:xfrm>
-            <a:off x="2468880" y="3265322"/>
+          <p:cNvPr id="50" name="Shape 48"/>
+          <p:cNvSpPr/>
+          <p:nvPr/>
+        </p:nvSpPr>
+        <p:spPr>
+          <a:xfrm>
+            <a:off x="2468880" y="3312871"/>
             <a:ext cx="865388" cy="59436"/>
           </a:xfrm>
           <a:prstGeom prst="roundRect">
@@ -47096,14 +47391,14 @@
       </p:sp>
       <p:sp>
         <p:nvSpPr>
-          <p:cNvPr id="41" name="Text 39"/>
-          <p:cNvSpPr txBox="1"/>
-          <p:nvPr/>
-        </p:nvSpPr>
-        <p:spPr>
-          <a:xfrm>
-            <a:off x="5029200" y="3204972"/>
-            <a:ext cx="822960" cy="169164"/>
+          <p:cNvPr id="51" name="Text 49"/>
+          <p:cNvSpPr txBox="1"/>
+          <p:nvPr/>
+        </p:nvSpPr>
+        <p:spPr>
+          <a:xfrm>
+            <a:off x="5029200" y="3246120"/>
+            <a:ext cx="822960" cy="192024"/>
           </a:xfrm>
           <a:prstGeom prst="rect">
             <a:avLst/>
@@ -47135,14 +47430,14 @@
       </p:sp>
       <p:sp>
         <p:nvSpPr>
-          <p:cNvPr id="42" name="Text 40"/>
-          <p:cNvSpPr txBox="1"/>
-          <p:nvPr/>
-        </p:nvSpPr>
-        <p:spPr>
-          <a:xfrm>
-            <a:off x="5943600" y="3204972"/>
-            <a:ext cx="822960" cy="169164"/>
+          <p:cNvPr id="52" name="Text 50"/>
+          <p:cNvSpPr txBox="1"/>
+          <p:nvPr/>
+        </p:nvSpPr>
+        <p:spPr>
+          <a:xfrm>
+            <a:off x="5943600" y="3246120"/>
+            <a:ext cx="822960" cy="192024"/>
           </a:xfrm>
           <a:prstGeom prst="rect">
             <a:avLst/>
@@ -47174,14 +47469,14 @@
       </p:sp>
       <p:sp>
         <p:nvSpPr>
-          <p:cNvPr id="43" name="Text 41"/>
-          <p:cNvSpPr txBox="1"/>
-          <p:nvPr/>
-        </p:nvSpPr>
-        <p:spPr>
-          <a:xfrm>
-            <a:off x="640080" y="3374136"/>
-            <a:ext cx="1783080" cy="169164"/>
+          <p:cNvPr id="53" name="Text 51"/>
+          <p:cNvSpPr txBox="1"/>
+          <p:nvPr/>
+        </p:nvSpPr>
+        <p:spPr>
+          <a:xfrm>
+            <a:off x="640080" y="3438144"/>
+            <a:ext cx="1783080" cy="192024"/>
           </a:xfrm>
           <a:prstGeom prst="rect">
             <a:avLst/>
@@ -47213,13 +47508,13 @@
       </p:sp>
       <p:sp>
         <p:nvSpPr>
-          <p:cNvPr id="44" name="Shape 42"/>
-          <p:cNvSpPr/>
-          <p:nvPr/>
-        </p:nvSpPr>
-        <p:spPr>
-          <a:xfrm>
-            <a:off x="2468880" y="3434486"/>
+          <p:cNvPr id="54" name="Shape 52"/>
+          <p:cNvSpPr/>
+          <p:nvPr/>
+        </p:nvSpPr>
+        <p:spPr>
+          <a:xfrm>
+            <a:off x="2468880" y="3504895"/>
             <a:ext cx="2377440" cy="59436"/>
           </a:xfrm>
           <a:prstGeom prst="roundRect">
@@ -47235,13 +47530,13 @@
       </p:sp>
       <p:sp>
         <p:nvSpPr>
-          <p:cNvPr id="45" name="Shape 43"/>
-          <p:cNvSpPr/>
-          <p:nvPr/>
-        </p:nvSpPr>
-        <p:spPr>
-          <a:xfrm>
-            <a:off x="2468880" y="3434486"/>
+          <p:cNvPr id="55" name="Shape 53"/>
+          <p:cNvSpPr/>
+          <p:nvPr/>
+        </p:nvSpPr>
+        <p:spPr>
+          <a:xfrm>
+            <a:off x="2468880" y="3504895"/>
             <a:ext cx="152156" cy="59436"/>
           </a:xfrm>
           <a:prstGeom prst="roundRect">
@@ -47257,14 +47552,14 @@
       </p:sp>
       <p:sp>
         <p:nvSpPr>
-          <p:cNvPr id="46" name="Text 44"/>
-          <p:cNvSpPr txBox="1"/>
-          <p:nvPr/>
-        </p:nvSpPr>
-        <p:spPr>
-          <a:xfrm>
-            <a:off x="5029200" y="3374136"/>
-            <a:ext cx="822960" cy="169164"/>
+          <p:cNvPr id="56" name="Text 54"/>
+          <p:cNvSpPr txBox="1"/>
+          <p:nvPr/>
+        </p:nvSpPr>
+        <p:spPr>
+          <a:xfrm>
+            <a:off x="5029200" y="3438144"/>
+            <a:ext cx="822960" cy="192024"/>
           </a:xfrm>
           <a:prstGeom prst="rect">
             <a:avLst/>
@@ -47296,14 +47591,14 @@
       </p:sp>
       <p:sp>
         <p:nvSpPr>
-          <p:cNvPr id="47" name="Text 45"/>
-          <p:cNvSpPr txBox="1"/>
-          <p:nvPr/>
-        </p:nvSpPr>
-        <p:spPr>
-          <a:xfrm>
-            <a:off x="5943600" y="3374136"/>
-            <a:ext cx="822960" cy="169164"/>
+          <p:cNvPr id="57" name="Text 55"/>
+          <p:cNvSpPr txBox="1"/>
+          <p:nvPr/>
+        </p:nvSpPr>
+        <p:spPr>
+          <a:xfrm>
+            <a:off x="5943600" y="3438144"/>
+            <a:ext cx="822960" cy="192024"/>
           </a:xfrm>
           <a:prstGeom prst="rect">
             <a:avLst/>
@@ -47335,14 +47630,14 @@
       </p:sp>
       <p:sp>
         <p:nvSpPr>
-          <p:cNvPr id="48" name="Text 46"/>
-          <p:cNvSpPr txBox="1"/>
-          <p:nvPr/>
-        </p:nvSpPr>
-        <p:spPr>
-          <a:xfrm>
-            <a:off x="640080" y="3543300"/>
-            <a:ext cx="1783080" cy="169164"/>
+          <p:cNvPr id="58" name="Text 56"/>
+          <p:cNvSpPr txBox="1"/>
+          <p:nvPr/>
+        </p:nvSpPr>
+        <p:spPr>
+          <a:xfrm>
+            <a:off x="640080" y="3630168"/>
+            <a:ext cx="1783080" cy="192024"/>
           </a:xfrm>
           <a:prstGeom prst="rect">
             <a:avLst/>
@@ -47374,13 +47669,13 @@
       </p:sp>
       <p:sp>
         <p:nvSpPr>
-          <p:cNvPr id="49" name="Shape 47"/>
-          <p:cNvSpPr/>
-          <p:nvPr/>
-        </p:nvSpPr>
-        <p:spPr>
-          <a:xfrm>
-            <a:off x="2468880" y="3603650"/>
+          <p:cNvPr id="59" name="Shape 57"/>
+          <p:cNvSpPr/>
+          <p:nvPr/>
+        </p:nvSpPr>
+        <p:spPr>
+          <a:xfrm>
+            <a:off x="2468880" y="3696919"/>
             <a:ext cx="2377440" cy="59436"/>
           </a:xfrm>
           <a:prstGeom prst="roundRect">
@@ -47396,13 +47691,13 @@
       </p:sp>
       <p:sp>
         <p:nvSpPr>
-          <p:cNvPr id="50" name="Shape 48"/>
-          <p:cNvSpPr/>
-          <p:nvPr/>
-        </p:nvSpPr>
-        <p:spPr>
-          <a:xfrm>
-            <a:off x="2468880" y="3603650"/>
+          <p:cNvPr id="60" name="Shape 58"/>
+          <p:cNvSpPr/>
+          <p:nvPr/>
+        </p:nvSpPr>
+        <p:spPr>
+          <a:xfrm>
+            <a:off x="2468880" y="3696919"/>
             <a:ext cx="92720" cy="59436"/>
           </a:xfrm>
           <a:prstGeom prst="roundRect">
@@ -47418,14 +47713,14 @@
       </p:sp>
       <p:sp>
         <p:nvSpPr>
-          <p:cNvPr id="51" name="Text 49"/>
-          <p:cNvSpPr txBox="1"/>
-          <p:nvPr/>
-        </p:nvSpPr>
-        <p:spPr>
-          <a:xfrm>
-            <a:off x="5029200" y="3543300"/>
-            <a:ext cx="822960" cy="169164"/>
+          <p:cNvPr id="61" name="Text 59"/>
+          <p:cNvSpPr txBox="1"/>
+          <p:nvPr/>
+        </p:nvSpPr>
+        <p:spPr>
+          <a:xfrm>
+            <a:off x="5029200" y="3630168"/>
+            <a:ext cx="822960" cy="192024"/>
           </a:xfrm>
           <a:prstGeom prst="rect">
             <a:avLst/>
@@ -47457,14 +47752,14 @@
       </p:sp>
       <p:sp>
         <p:nvSpPr>
-          <p:cNvPr id="52" name="Text 50"/>
-          <p:cNvSpPr txBox="1"/>
-          <p:nvPr/>
-        </p:nvSpPr>
-        <p:spPr>
-          <a:xfrm>
-            <a:off x="5943600" y="3543300"/>
-            <a:ext cx="822960" cy="169164"/>
+          <p:cNvPr id="62" name="Text 60"/>
+          <p:cNvSpPr txBox="1"/>
+          <p:nvPr/>
+        </p:nvSpPr>
+        <p:spPr>
+          <a:xfrm>
+            <a:off x="5943600" y="3630168"/>
+            <a:ext cx="822960" cy="192024"/>
           </a:xfrm>
           <a:prstGeom prst="rect">
             <a:avLst/>
@@ -47496,14 +47791,14 @@
       </p:sp>
       <p:sp>
         <p:nvSpPr>
-          <p:cNvPr id="53" name="Text 51"/>
-          <p:cNvSpPr txBox="1"/>
-          <p:nvPr/>
-        </p:nvSpPr>
-        <p:spPr>
-          <a:xfrm>
-            <a:off x="640080" y="3712464"/>
-            <a:ext cx="1783080" cy="169164"/>
+          <p:cNvPr id="63" name="Text 61"/>
+          <p:cNvSpPr txBox="1"/>
+          <p:nvPr/>
+        </p:nvSpPr>
+        <p:spPr>
+          <a:xfrm>
+            <a:off x="640080" y="3822192"/>
+            <a:ext cx="1783080" cy="192024"/>
           </a:xfrm>
           <a:prstGeom prst="rect">
             <a:avLst/>
@@ -47535,13 +47830,13 @@
       </p:sp>
       <p:sp>
         <p:nvSpPr>
-          <p:cNvPr id="54" name="Shape 52"/>
-          <p:cNvSpPr/>
-          <p:nvPr/>
-        </p:nvSpPr>
-        <p:spPr>
-          <a:xfrm>
-            <a:off x="2468880" y="3772814"/>
+          <p:cNvPr id="64" name="Shape 62"/>
+          <p:cNvSpPr/>
+          <p:nvPr/>
+        </p:nvSpPr>
+        <p:spPr>
+          <a:xfrm>
+            <a:off x="2468880" y="3888943"/>
             <a:ext cx="2377440" cy="59436"/>
           </a:xfrm>
           <a:prstGeom prst="roundRect">
@@ -47557,13 +47852,13 @@
       </p:sp>
       <p:sp>
         <p:nvSpPr>
-          <p:cNvPr id="55" name="Shape 53"/>
-          <p:cNvSpPr/>
-          <p:nvPr/>
-        </p:nvSpPr>
-        <p:spPr>
-          <a:xfrm>
-            <a:off x="2468880" y="3772814"/>
+          <p:cNvPr id="65" name="Shape 63"/>
+          <p:cNvSpPr/>
+          <p:nvPr/>
+        </p:nvSpPr>
+        <p:spPr>
+          <a:xfrm>
+            <a:off x="2468880" y="3888943"/>
             <a:ext cx="45720" cy="59436"/>
           </a:xfrm>
           <a:prstGeom prst="roundRect">
@@ -47579,14 +47874,14 @@
       </p:sp>
       <p:sp>
         <p:nvSpPr>
-          <p:cNvPr id="56" name="Text 54"/>
-          <p:cNvSpPr txBox="1"/>
-          <p:nvPr/>
-        </p:nvSpPr>
-        <p:spPr>
-          <a:xfrm>
-            <a:off x="5029200" y="3712464"/>
-            <a:ext cx="822960" cy="169164"/>
+          <p:cNvPr id="66" name="Text 64"/>
+          <p:cNvSpPr txBox="1"/>
+          <p:nvPr/>
+        </p:nvSpPr>
+        <p:spPr>
+          <a:xfrm>
+            <a:off x="5029200" y="3822192"/>
+            <a:ext cx="822960" cy="192024"/>
           </a:xfrm>
           <a:prstGeom prst="rect">
             <a:avLst/>
@@ -47618,14 +47913,14 @@
       </p:sp>
       <p:sp>
         <p:nvSpPr>
-          <p:cNvPr id="57" name="Text 55"/>
-          <p:cNvSpPr txBox="1"/>
-          <p:nvPr/>
-        </p:nvSpPr>
-        <p:spPr>
-          <a:xfrm>
-            <a:off x="5943600" y="3712464"/>
-            <a:ext cx="822960" cy="169164"/>
+          <p:cNvPr id="67" name="Text 65"/>
+          <p:cNvSpPr txBox="1"/>
+          <p:nvPr/>
+        </p:nvSpPr>
+        <p:spPr>
+          <a:xfrm>
+            <a:off x="5943600" y="3822192"/>
+            <a:ext cx="822960" cy="192024"/>
           </a:xfrm>
           <a:prstGeom prst="rect">
             <a:avLst/>
@@ -47657,14 +47952,14 @@
       </p:sp>
       <p:sp>
         <p:nvSpPr>
-          <p:cNvPr id="58" name="Text 56"/>
-          <p:cNvSpPr txBox="1"/>
-          <p:nvPr/>
-        </p:nvSpPr>
-        <p:spPr>
-          <a:xfrm>
-            <a:off x="640080" y="3881628"/>
-            <a:ext cx="1783080" cy="169164"/>
+          <p:cNvPr id="68" name="Text 66"/>
+          <p:cNvSpPr txBox="1"/>
+          <p:nvPr/>
+        </p:nvSpPr>
+        <p:spPr>
+          <a:xfrm>
+            <a:off x="640080" y="4014216"/>
+            <a:ext cx="1783080" cy="192024"/>
           </a:xfrm>
           <a:prstGeom prst="rect">
             <a:avLst/>
@@ -47696,13 +47991,13 @@
       </p:sp>
       <p:sp>
         <p:nvSpPr>
-          <p:cNvPr id="59" name="Shape 57"/>
-          <p:cNvSpPr/>
-          <p:nvPr/>
-        </p:nvSpPr>
-        <p:spPr>
-          <a:xfrm>
-            <a:off x="2468880" y="3941978"/>
+          <p:cNvPr id="69" name="Shape 67"/>
+          <p:cNvSpPr/>
+          <p:nvPr/>
+        </p:nvSpPr>
+        <p:spPr>
+          <a:xfrm>
+            <a:off x="2468880" y="4080967"/>
             <a:ext cx="2377440" cy="59436"/>
           </a:xfrm>
           <a:prstGeom prst="roundRect">
@@ -47718,13 +48013,13 @@
       </p:sp>
       <p:sp>
         <p:nvSpPr>
-          <p:cNvPr id="60" name="Shape 58"/>
-          <p:cNvSpPr/>
-          <p:nvPr/>
-        </p:nvSpPr>
-        <p:spPr>
-          <a:xfrm>
-            <a:off x="2468880" y="3941978"/>
+          <p:cNvPr id="70" name="Shape 68"/>
+          <p:cNvSpPr/>
+          <p:nvPr/>
+        </p:nvSpPr>
+        <p:spPr>
+          <a:xfrm>
+            <a:off x="2468880" y="4080967"/>
             <a:ext cx="45720" cy="59436"/>
           </a:xfrm>
           <a:prstGeom prst="roundRect">
@@ -47740,14 +48035,14 @@
       </p:sp>
       <p:sp>
         <p:nvSpPr>
-          <p:cNvPr id="61" name="Text 59"/>
-          <p:cNvSpPr txBox="1"/>
-          <p:nvPr/>
-        </p:nvSpPr>
-        <p:spPr>
-          <a:xfrm>
-            <a:off x="5029200" y="3881628"/>
-            <a:ext cx="822960" cy="169164"/>
+          <p:cNvPr id="71" name="Text 69"/>
+          <p:cNvSpPr txBox="1"/>
+          <p:nvPr/>
+        </p:nvSpPr>
+        <p:spPr>
+          <a:xfrm>
+            <a:off x="5029200" y="4014216"/>
+            <a:ext cx="822960" cy="192024"/>
           </a:xfrm>
           <a:prstGeom prst="rect">
             <a:avLst/>
@@ -47779,14 +48074,14 @@
       </p:sp>
       <p:sp>
         <p:nvSpPr>
-          <p:cNvPr id="62" name="Text 60"/>
-          <p:cNvSpPr txBox="1"/>
-          <p:nvPr/>
-        </p:nvSpPr>
-        <p:spPr>
-          <a:xfrm>
-            <a:off x="5943600" y="3881628"/>
-            <a:ext cx="822960" cy="169164"/>
+          <p:cNvPr id="72" name="Text 70"/>
+          <p:cNvSpPr txBox="1"/>
+          <p:nvPr/>
+        </p:nvSpPr>
+        <p:spPr>
+          <a:xfrm>
+            <a:off x="5943600" y="4014216"/>
+            <a:ext cx="822960" cy="192024"/>
           </a:xfrm>
           <a:prstGeom prst="rect">
             <a:avLst/>
@@ -47818,14 +48113,14 @@
       </p:sp>
       <p:sp>
         <p:nvSpPr>
-          <p:cNvPr id="63" name="Text 61"/>
-          <p:cNvSpPr txBox="1"/>
-          <p:nvPr/>
-        </p:nvSpPr>
-        <p:spPr>
-          <a:xfrm>
-            <a:off x="640080" y="4050792"/>
-            <a:ext cx="1783080" cy="169164"/>
+          <p:cNvPr id="73" name="Text 71"/>
+          <p:cNvSpPr txBox="1"/>
+          <p:nvPr/>
+        </p:nvSpPr>
+        <p:spPr>
+          <a:xfrm>
+            <a:off x="640080" y="4206240"/>
+            <a:ext cx="1783080" cy="192024"/>
           </a:xfrm>
           <a:prstGeom prst="rect">
             <a:avLst/>
@@ -47857,13 +48152,13 @@
       </p:sp>
       <p:sp>
         <p:nvSpPr>
-          <p:cNvPr id="64" name="Shape 62"/>
-          <p:cNvSpPr/>
-          <p:nvPr/>
-        </p:nvSpPr>
-        <p:spPr>
-          <a:xfrm>
-            <a:off x="2468880" y="4111142"/>
+          <p:cNvPr id="74" name="Shape 72"/>
+          <p:cNvSpPr/>
+          <p:nvPr/>
+        </p:nvSpPr>
+        <p:spPr>
+          <a:xfrm>
+            <a:off x="2468880" y="4272991"/>
             <a:ext cx="2377440" cy="59436"/>
           </a:xfrm>
           <a:prstGeom prst="roundRect">
@@ -47879,14 +48174,14 @@
       </p:sp>
       <p:sp>
         <p:nvSpPr>
-          <p:cNvPr id="65" name="Text 63"/>
-          <p:cNvSpPr txBox="1"/>
-          <p:nvPr/>
-        </p:nvSpPr>
-        <p:spPr>
-          <a:xfrm>
-            <a:off x="5029200" y="4050792"/>
-            <a:ext cx="822960" cy="169164"/>
+          <p:cNvPr id="75" name="Text 73"/>
+          <p:cNvSpPr txBox="1"/>
+          <p:nvPr/>
+        </p:nvSpPr>
+        <p:spPr>
+          <a:xfrm>
+            <a:off x="5029200" y="4206240"/>
+            <a:ext cx="822960" cy="192024"/>
           </a:xfrm>
           <a:prstGeom prst="rect">
             <a:avLst/>
@@ -47918,14 +48213,14 @@
       </p:sp>
       <p:sp>
         <p:nvSpPr>
-          <p:cNvPr id="66" name="Text 64"/>
-          <p:cNvSpPr txBox="1"/>
-          <p:nvPr/>
-        </p:nvSpPr>
-        <p:spPr>
-          <a:xfrm>
-            <a:off x="5943600" y="4050792"/>
-            <a:ext cx="822960" cy="169164"/>
+          <p:cNvPr id="76" name="Text 74"/>
+          <p:cNvSpPr txBox="1"/>
+          <p:nvPr/>
+        </p:nvSpPr>
+        <p:spPr>
+          <a:xfrm>
+            <a:off x="5943600" y="4206240"/>
+            <a:ext cx="822960" cy="192024"/>
           </a:xfrm>
           <a:prstGeom prst="rect">
             <a:avLst/>
@@ -47957,14 +48252,14 @@
       </p:sp>
       <p:sp>
         <p:nvSpPr>
-          <p:cNvPr id="67" name="Text 65"/>
-          <p:cNvSpPr txBox="1"/>
-          <p:nvPr/>
-        </p:nvSpPr>
-        <p:spPr>
-          <a:xfrm>
-            <a:off x="640080" y="4219956"/>
-            <a:ext cx="1783080" cy="169164"/>
+          <p:cNvPr id="77" name="Text 75"/>
+          <p:cNvSpPr txBox="1"/>
+          <p:nvPr/>
+        </p:nvSpPr>
+        <p:spPr>
+          <a:xfrm>
+            <a:off x="640080" y="4398264"/>
+            <a:ext cx="1783080" cy="192024"/>
           </a:xfrm>
           <a:prstGeom prst="rect">
             <a:avLst/>
@@ -47996,13 +48291,13 @@
       </p:sp>
       <p:sp>
         <p:nvSpPr>
-          <p:cNvPr id="68" name="Shape 66"/>
-          <p:cNvSpPr/>
-          <p:nvPr/>
-        </p:nvSpPr>
-        <p:spPr>
-          <a:xfrm>
-            <a:off x="2468880" y="4280306"/>
+          <p:cNvPr id="78" name="Shape 76"/>
+          <p:cNvSpPr/>
+          <p:nvPr/>
+        </p:nvSpPr>
+        <p:spPr>
+          <a:xfrm>
+            <a:off x="2468880" y="4465015"/>
             <a:ext cx="2377440" cy="59436"/>
           </a:xfrm>
           <a:prstGeom prst="roundRect">
@@ -48018,14 +48313,14 @@
       </p:sp>
       <p:sp>
         <p:nvSpPr>
-          <p:cNvPr id="69" name="Text 67"/>
-          <p:cNvSpPr txBox="1"/>
-          <p:nvPr/>
-        </p:nvSpPr>
-        <p:spPr>
-          <a:xfrm>
-            <a:off x="5029200" y="4219956"/>
-            <a:ext cx="822960" cy="169164"/>
+          <p:cNvPr id="79" name="Text 77"/>
+          <p:cNvSpPr txBox="1"/>
+          <p:nvPr/>
+        </p:nvSpPr>
+        <p:spPr>
+          <a:xfrm>
+            <a:off x="5029200" y="4398264"/>
+            <a:ext cx="822960" cy="192024"/>
           </a:xfrm>
           <a:prstGeom prst="rect">
             <a:avLst/>
@@ -48057,14 +48352,14 @@
       </p:sp>
       <p:sp>
         <p:nvSpPr>
-          <p:cNvPr id="70" name="Text 68"/>
-          <p:cNvSpPr txBox="1"/>
-          <p:nvPr/>
-        </p:nvSpPr>
-        <p:spPr>
-          <a:xfrm>
-            <a:off x="5943600" y="4219956"/>
-            <a:ext cx="822960" cy="169164"/>
+          <p:cNvPr id="80" name="Text 78"/>
+          <p:cNvSpPr txBox="1"/>
+          <p:nvPr/>
+        </p:nvSpPr>
+        <p:spPr>
+          <a:xfrm>
+            <a:off x="5943600" y="4398264"/>
+            <a:ext cx="822960" cy="192024"/>
           </a:xfrm>
           <a:prstGeom prst="rect">
             <a:avLst/>
@@ -48096,14 +48391,14 @@
       </p:sp>
       <p:sp>
         <p:nvSpPr>
-          <p:cNvPr id="71" name="Text 69"/>
-          <p:cNvSpPr txBox="1"/>
-          <p:nvPr/>
-        </p:nvSpPr>
-        <p:spPr>
-          <a:xfrm>
-            <a:off x="640080" y="4389120"/>
-            <a:ext cx="1783080" cy="169164"/>
+          <p:cNvPr id="81" name="Text 79"/>
+          <p:cNvSpPr txBox="1"/>
+          <p:nvPr/>
+        </p:nvSpPr>
+        <p:spPr>
+          <a:xfrm>
+            <a:off x="640080" y="4590288"/>
+            <a:ext cx="1783080" cy="192024"/>
           </a:xfrm>
           <a:prstGeom prst="rect">
             <a:avLst/>
@@ -48135,13 +48430,13 @@
       </p:sp>
       <p:sp>
         <p:nvSpPr>
-          <p:cNvPr id="72" name="Shape 70"/>
-          <p:cNvSpPr/>
-          <p:nvPr/>
-        </p:nvSpPr>
-        <p:spPr>
-          <a:xfrm>
-            <a:off x="2468880" y="4449470"/>
+          <p:cNvPr id="82" name="Shape 80"/>
+          <p:cNvSpPr/>
+          <p:nvPr/>
+        </p:nvSpPr>
+        <p:spPr>
+          <a:xfrm>
+            <a:off x="2468880" y="4657039"/>
             <a:ext cx="2377440" cy="59436"/>
           </a:xfrm>
           <a:prstGeom prst="roundRect">
@@ -48157,14 +48452,14 @@
       </p:sp>
       <p:sp>
         <p:nvSpPr>
-          <p:cNvPr id="73" name="Text 71"/>
-          <p:cNvSpPr txBox="1"/>
-          <p:nvPr/>
-        </p:nvSpPr>
-        <p:spPr>
-          <a:xfrm>
-            <a:off x="5029200" y="4389120"/>
-            <a:ext cx="822960" cy="169164"/>
+          <p:cNvPr id="83" name="Text 81"/>
+          <p:cNvSpPr txBox="1"/>
+          <p:nvPr/>
+        </p:nvSpPr>
+        <p:spPr>
+          <a:xfrm>
+            <a:off x="5029200" y="4590288"/>
+            <a:ext cx="822960" cy="192024"/>
           </a:xfrm>
           <a:prstGeom prst="rect">
             <a:avLst/>
@@ -48196,14 +48491,14 @@
       </p:sp>
       <p:sp>
         <p:nvSpPr>
-          <p:cNvPr id="74" name="Text 72"/>
-          <p:cNvSpPr txBox="1"/>
-          <p:nvPr/>
-        </p:nvSpPr>
-        <p:spPr>
-          <a:xfrm>
-            <a:off x="5943600" y="4389120"/>
-            <a:ext cx="822960" cy="169164"/>
+          <p:cNvPr id="84" name="Text 82"/>
+          <p:cNvSpPr txBox="1"/>
+          <p:nvPr/>
+        </p:nvSpPr>
+        <p:spPr>
+          <a:xfrm>
+            <a:off x="5943600" y="4590288"/>
+            <a:ext cx="822960" cy="192024"/>
           </a:xfrm>
           <a:prstGeom prst="rect">
             <a:avLst/>
@@ -48235,14 +48530,14 @@
       </p:sp>
       <p:sp>
         <p:nvSpPr>
-          <p:cNvPr id="75" name="Text 73"/>
-          <p:cNvSpPr txBox="1"/>
-          <p:nvPr/>
-        </p:nvSpPr>
-        <p:spPr>
-          <a:xfrm>
-            <a:off x="640080" y="4558284"/>
-            <a:ext cx="1783080" cy="169164"/>
+          <p:cNvPr id="85" name="Text 83"/>
+          <p:cNvSpPr txBox="1"/>
+          <p:nvPr/>
+        </p:nvSpPr>
+        <p:spPr>
+          <a:xfrm>
+            <a:off x="640080" y="4782312"/>
+            <a:ext cx="1783080" cy="192024"/>
           </a:xfrm>
           <a:prstGeom prst="rect">
             <a:avLst/>
@@ -48274,13 +48569,13 @@
       </p:sp>
       <p:sp>
         <p:nvSpPr>
-          <p:cNvPr id="76" name="Shape 74"/>
-          <p:cNvSpPr/>
-          <p:nvPr/>
-        </p:nvSpPr>
-        <p:spPr>
-          <a:xfrm>
-            <a:off x="2468880" y="4618634"/>
+          <p:cNvPr id="86" name="Shape 84"/>
+          <p:cNvSpPr/>
+          <p:nvPr/>
+        </p:nvSpPr>
+        <p:spPr>
+          <a:xfrm>
+            <a:off x="2468880" y="4849063"/>
             <a:ext cx="2377440" cy="59436"/>
           </a:xfrm>
           <a:prstGeom prst="roundRect">
@@ -48296,14 +48591,14 @@
       </p:sp>
       <p:sp>
         <p:nvSpPr>
-          <p:cNvPr id="77" name="Text 75"/>
-          <p:cNvSpPr txBox="1"/>
-          <p:nvPr/>
-        </p:nvSpPr>
-        <p:spPr>
-          <a:xfrm>
-            <a:off x="5029200" y="4558284"/>
-            <a:ext cx="822960" cy="169164"/>
+          <p:cNvPr id="87" name="Text 85"/>
+          <p:cNvSpPr txBox="1"/>
+          <p:nvPr/>
+        </p:nvSpPr>
+        <p:spPr>
+          <a:xfrm>
+            <a:off x="5029200" y="4782312"/>
+            <a:ext cx="822960" cy="192024"/>
           </a:xfrm>
           <a:prstGeom prst="rect">
             <a:avLst/>
@@ -48335,14 +48630,14 @@
       </p:sp>
       <p:sp>
         <p:nvSpPr>
-          <p:cNvPr id="78" name="Text 76"/>
-          <p:cNvSpPr txBox="1"/>
-          <p:nvPr/>
-        </p:nvSpPr>
-        <p:spPr>
-          <a:xfrm>
-            <a:off x="5943600" y="4558284"/>
-            <a:ext cx="822960" cy="169164"/>
+          <p:cNvPr id="88" name="Text 86"/>
+          <p:cNvSpPr txBox="1"/>
+          <p:nvPr/>
+        </p:nvSpPr>
+        <p:spPr>
+          <a:xfrm>
+            <a:off x="5943600" y="4782312"/>
+            <a:ext cx="822960" cy="192024"/>
           </a:xfrm>
           <a:prstGeom prst="rect">
             <a:avLst/>
@@ -48374,14 +48669,14 @@
       </p:sp>
       <p:sp>
         <p:nvSpPr>
-          <p:cNvPr id="79" name="Text 77"/>
-          <p:cNvSpPr txBox="1"/>
-          <p:nvPr/>
-        </p:nvSpPr>
-        <p:spPr>
-          <a:xfrm>
-            <a:off x="640080" y="4727448"/>
-            <a:ext cx="1783080" cy="169164"/>
+          <p:cNvPr id="89" name="Text 87"/>
+          <p:cNvSpPr txBox="1"/>
+          <p:nvPr/>
+        </p:nvSpPr>
+        <p:spPr>
+          <a:xfrm>
+            <a:off x="640080" y="4974336"/>
+            <a:ext cx="1783080" cy="192024"/>
           </a:xfrm>
           <a:prstGeom prst="rect">
             <a:avLst/>
@@ -48405,7 +48700,7 @@
                 <a:ea typeface="Poppins" pitchFamily="34" charset="-122"/>
                 <a:cs typeface="Poppins" pitchFamily="34" charset="-120"/>
               </a:rPr>
-              <a:t>Argenis Rafael Guevara</a:t>
+              <a:t>Jasmine Hikuroa</a:t>
             </a:r>
             <a:endParaRPr lang="en-US" sz="800" dirty="0"/>
           </a:p>
@@ -48413,13 +48708,13 @@
       </p:sp>
       <p:sp>
         <p:nvSpPr>
-          <p:cNvPr id="80" name="Shape 78"/>
-          <p:cNvSpPr/>
-          <p:nvPr/>
-        </p:nvSpPr>
-        <p:spPr>
-          <a:xfrm>
-            <a:off x="2468880" y="4787798"/>
+          <p:cNvPr id="90" name="Shape 88"/>
+          <p:cNvSpPr/>
+          <p:nvPr/>
+        </p:nvSpPr>
+        <p:spPr>
+          <a:xfrm>
+            <a:off x="2468880" y="5041087"/>
             <a:ext cx="2377440" cy="59436"/>
           </a:xfrm>
           <a:prstGeom prst="roundRect">
@@ -48435,14 +48730,14 @@
       </p:sp>
       <p:sp>
         <p:nvSpPr>
-          <p:cNvPr id="81" name="Text 79"/>
-          <p:cNvSpPr txBox="1"/>
-          <p:nvPr/>
-        </p:nvSpPr>
-        <p:spPr>
-          <a:xfrm>
-            <a:off x="5029200" y="4727448"/>
-            <a:ext cx="822960" cy="169164"/>
+          <p:cNvPr id="91" name="Text 89"/>
+          <p:cNvSpPr txBox="1"/>
+          <p:nvPr/>
+        </p:nvSpPr>
+        <p:spPr>
+          <a:xfrm>
+            <a:off x="5029200" y="4974336"/>
+            <a:ext cx="822960" cy="192024"/>
           </a:xfrm>
           <a:prstGeom prst="rect">
             <a:avLst/>
@@ -48474,14 +48769,14 @@
       </p:sp>
       <p:sp>
         <p:nvSpPr>
-          <p:cNvPr id="82" name="Text 80"/>
-          <p:cNvSpPr txBox="1"/>
-          <p:nvPr/>
-        </p:nvSpPr>
-        <p:spPr>
-          <a:xfrm>
-            <a:off x="5943600" y="4727448"/>
-            <a:ext cx="822960" cy="169164"/>
+          <p:cNvPr id="92" name="Text 90"/>
+          <p:cNvSpPr txBox="1"/>
+          <p:nvPr/>
+        </p:nvSpPr>
+        <p:spPr>
+          <a:xfrm>
+            <a:off x="5943600" y="4974336"/>
+            <a:ext cx="822960" cy="192024"/>
           </a:xfrm>
           <a:prstGeom prst="rect">
             <a:avLst/>
@@ -48513,14 +48808,14 @@
       </p:sp>
       <p:sp>
         <p:nvSpPr>
-          <p:cNvPr id="83" name="Text 81"/>
-          <p:cNvSpPr txBox="1"/>
-          <p:nvPr/>
-        </p:nvSpPr>
-        <p:spPr>
-          <a:xfrm>
-            <a:off x="640080" y="4896612"/>
-            <a:ext cx="1783080" cy="169164"/>
+          <p:cNvPr id="93" name="Text 91"/>
+          <p:cNvSpPr txBox="1"/>
+          <p:nvPr/>
+        </p:nvSpPr>
+        <p:spPr>
+          <a:xfrm>
+            <a:off x="640080" y="5166360"/>
+            <a:ext cx="1783080" cy="192024"/>
           </a:xfrm>
           <a:prstGeom prst="rect">
             <a:avLst/>
@@ -48544,7 +48839,7 @@
                 <a:ea typeface="Poppins" pitchFamily="34" charset="-122"/>
                 <a:cs typeface="Poppins" pitchFamily="34" charset="-120"/>
               </a:rPr>
-              <a:t>Isaac Mercado</a:t>
+              <a:t>Bjorn Magabo</a:t>
             </a:r>
             <a:endParaRPr lang="en-US" sz="800" dirty="0"/>
           </a:p>
@@ -48552,13 +48847,13 @@
       </p:sp>
       <p:sp>
         <p:nvSpPr>
-          <p:cNvPr id="84" name="Shape 82"/>
-          <p:cNvSpPr/>
-          <p:nvPr/>
-        </p:nvSpPr>
-        <p:spPr>
-          <a:xfrm>
-            <a:off x="2468880" y="4956962"/>
+          <p:cNvPr id="94" name="Shape 92"/>
+          <p:cNvSpPr/>
+          <p:nvPr/>
+        </p:nvSpPr>
+        <p:spPr>
+          <a:xfrm>
+            <a:off x="2468880" y="5233111"/>
             <a:ext cx="2377440" cy="59436"/>
           </a:xfrm>
           <a:prstGeom prst="roundRect">
@@ -48574,14 +48869,14 @@
       </p:sp>
       <p:sp>
         <p:nvSpPr>
-          <p:cNvPr id="85" name="Text 83"/>
-          <p:cNvSpPr txBox="1"/>
-          <p:nvPr/>
-        </p:nvSpPr>
-        <p:spPr>
-          <a:xfrm>
-            <a:off x="5029200" y="4896612"/>
-            <a:ext cx="822960" cy="169164"/>
+          <p:cNvPr id="95" name="Text 93"/>
+          <p:cNvSpPr txBox="1"/>
+          <p:nvPr/>
+        </p:nvSpPr>
+        <p:spPr>
+          <a:xfrm>
+            <a:off x="5029200" y="5166360"/>
+            <a:ext cx="822960" cy="192024"/>
           </a:xfrm>
           <a:prstGeom prst="rect">
             <a:avLst/>
@@ -48613,14 +48908,14 @@
       </p:sp>
       <p:sp>
         <p:nvSpPr>
-          <p:cNvPr id="86" name="Text 84"/>
-          <p:cNvSpPr txBox="1"/>
-          <p:nvPr/>
-        </p:nvSpPr>
-        <p:spPr>
-          <a:xfrm>
-            <a:off x="5943600" y="4896612"/>
-            <a:ext cx="822960" cy="169164"/>
+          <p:cNvPr id="96" name="Text 94"/>
+          <p:cNvSpPr txBox="1"/>
+          <p:nvPr/>
+        </p:nvSpPr>
+        <p:spPr>
+          <a:xfrm>
+            <a:off x="5943600" y="5166360"/>
+            <a:ext cx="822960" cy="192024"/>
           </a:xfrm>
           <a:prstGeom prst="rect">
             <a:avLst/>
@@ -48652,14 +48947,14 @@
       </p:sp>
       <p:sp>
         <p:nvSpPr>
-          <p:cNvPr id="87" name="Text 85"/>
-          <p:cNvSpPr txBox="1"/>
-          <p:nvPr/>
-        </p:nvSpPr>
-        <p:spPr>
-          <a:xfrm>
-            <a:off x="640080" y="5065776"/>
-            <a:ext cx="1783080" cy="169164"/>
+          <p:cNvPr id="97" name="Text 95"/>
+          <p:cNvSpPr txBox="1"/>
+          <p:nvPr/>
+        </p:nvSpPr>
+        <p:spPr>
+          <a:xfrm>
+            <a:off x="640080" y="5358384"/>
+            <a:ext cx="1783080" cy="192024"/>
           </a:xfrm>
           <a:prstGeom prst="rect">
             <a:avLst/>
@@ -48683,7 +48978,7 @@
                 <a:ea typeface="Poppins" pitchFamily="34" charset="-122"/>
                 <a:cs typeface="Poppins" pitchFamily="34" charset="-120"/>
               </a:rPr>
-              <a:t>Jasmine Hikuroa</a:t>
+              <a:t>Phuong Ho</a:t>
             </a:r>
             <a:endParaRPr lang="en-US" sz="800" dirty="0"/>
           </a:p>
@@ -48691,13 +48986,13 @@
       </p:sp>
       <p:sp>
         <p:nvSpPr>
-          <p:cNvPr id="88" name="Shape 86"/>
-          <p:cNvSpPr/>
-          <p:nvPr/>
-        </p:nvSpPr>
-        <p:spPr>
-          <a:xfrm>
-            <a:off x="2468880" y="5126126"/>
+          <p:cNvPr id="98" name="Shape 96"/>
+          <p:cNvSpPr/>
+          <p:nvPr/>
+        </p:nvSpPr>
+        <p:spPr>
+          <a:xfrm>
+            <a:off x="2468880" y="5425135"/>
             <a:ext cx="2377440" cy="59436"/>
           </a:xfrm>
           <a:prstGeom prst="roundRect">
@@ -48713,14 +49008,14 @@
       </p:sp>
       <p:sp>
         <p:nvSpPr>
-          <p:cNvPr id="89" name="Text 87"/>
-          <p:cNvSpPr txBox="1"/>
-          <p:nvPr/>
-        </p:nvSpPr>
-        <p:spPr>
-          <a:xfrm>
-            <a:off x="5029200" y="5065776"/>
-            <a:ext cx="822960" cy="169164"/>
+          <p:cNvPr id="99" name="Text 97"/>
+          <p:cNvSpPr txBox="1"/>
+          <p:nvPr/>
+        </p:nvSpPr>
+        <p:spPr>
+          <a:xfrm>
+            <a:off x="5029200" y="5358384"/>
+            <a:ext cx="822960" cy="192024"/>
           </a:xfrm>
           <a:prstGeom prst="rect">
             <a:avLst/>
@@ -48752,14 +49047,14 @@
       </p:sp>
       <p:sp>
         <p:nvSpPr>
-          <p:cNvPr id="90" name="Text 88"/>
-          <p:cNvSpPr txBox="1"/>
-          <p:nvPr/>
-        </p:nvSpPr>
-        <p:spPr>
-          <a:xfrm>
-            <a:off x="5943600" y="5065776"/>
-            <a:ext cx="822960" cy="169164"/>
+          <p:cNvPr id="100" name="Text 98"/>
+          <p:cNvSpPr txBox="1"/>
+          <p:nvPr/>
+        </p:nvSpPr>
+        <p:spPr>
+          <a:xfrm>
+            <a:off x="5943600" y="5358384"/>
+            <a:ext cx="822960" cy="192024"/>
           </a:xfrm>
           <a:prstGeom prst="rect">
             <a:avLst/>
@@ -48791,91 +49086,30 @@
       </p:sp>
       <p:sp>
         <p:nvSpPr>
-          <p:cNvPr id="91" name="Text 89"/>
-          <p:cNvSpPr txBox="1"/>
-          <p:nvPr/>
-        </p:nvSpPr>
-        <p:spPr>
-          <a:xfrm>
-            <a:off x="640080" y="5234940"/>
-            <a:ext cx="1783080" cy="169164"/>
-          </a:xfrm>
-          <a:prstGeom prst="rect">
-            <a:avLst/>
-          </a:prstGeom>
-          <a:noFill/>
-          <a:ln/>
-        </p:spPr>
-        <p:txBody>
-          <a:bodyPr wrap="square" lIns="0" tIns="0" rIns="0" bIns="0" rtlCol="0" anchor="ctr"/>
+          <p:cNvPr id="101" name="Text 99"/>
+          <p:cNvSpPr txBox="1"/>
+          <p:nvPr/>
+        </p:nvSpPr>
+        <p:spPr>
+          <a:xfrm>
+            <a:off x="640080" y="5614416"/>
+            <a:ext cx="6126480" cy="292608"/>
+          </a:xfrm>
+          <a:prstGeom prst="rect">
+            <a:avLst/>
+          </a:prstGeom>
+          <a:noFill/>
+          <a:ln/>
+        </p:spPr>
+        <p:txBody>
+          <a:bodyPr wrap="square" lIns="0" tIns="0" rIns="0" bIns="0" rtlCol="0" anchor="t"/>
           <a:lstStyle/>
           <a:p>
             <a:pPr indent="0" marL="0">
               <a:buNone/>
             </a:pPr>
             <a:r>
-              <a:rPr lang="en-US" sz="800" dirty="0">
-                <a:solidFill>
-                  <a:srgbClr val="5E7280"/>
-                </a:solidFill>
-                <a:latin typeface="Poppins" pitchFamily="34" charset="0"/>
-                <a:ea typeface="Poppins" pitchFamily="34" charset="-122"/>
-                <a:cs typeface="Poppins" pitchFamily="34" charset="-120"/>
-              </a:rPr>
-              <a:t>Bjorn Magabo</a:t>
-            </a:r>
-            <a:endParaRPr lang="en-US" sz="800" dirty="0"/>
-          </a:p>
-        </p:txBody>
-      </p:sp>
-      <p:sp>
-        <p:nvSpPr>
-          <p:cNvPr id="92" name="Shape 90"/>
-          <p:cNvSpPr/>
-          <p:nvPr/>
-        </p:nvSpPr>
-        <p:spPr>
-          <a:xfrm>
-            <a:off x="2468880" y="5295290"/>
-            <a:ext cx="2377440" cy="59436"/>
-          </a:xfrm>
-          <a:prstGeom prst="roundRect">
-            <a:avLst>
-              <a:gd name="adj" fmla="val 49231"/>
-            </a:avLst>
-          </a:prstGeom>
-          <a:solidFill>
-            <a:srgbClr val="E2EAEE"/>
-          </a:solidFill>
-          <a:ln/>
-        </p:spPr>
-      </p:sp>
-      <p:sp>
-        <p:nvSpPr>
-          <p:cNvPr id="93" name="Text 91"/>
-          <p:cNvSpPr txBox="1"/>
-          <p:nvPr/>
-        </p:nvSpPr>
-        <p:spPr>
-          <a:xfrm>
-            <a:off x="5029200" y="5234940"/>
-            <a:ext cx="822960" cy="169164"/>
-          </a:xfrm>
-          <a:prstGeom prst="rect">
-            <a:avLst/>
-          </a:prstGeom>
-          <a:noFill/>
-          <a:ln/>
-        </p:spPr>
-        <p:txBody>
-          <a:bodyPr wrap="square" lIns="0" tIns="0" rIns="0" bIns="0" rtlCol="0" anchor="ctr"/>
-          <a:lstStyle/>
-          <a:p>
-            <a:pPr algn="r" indent="0" marL="0">
-              <a:buNone/>
-            </a:pPr>
-            <a:r>
-              <a:rPr lang="en-US" sz="800" dirty="0">
+              <a:rPr lang="en-US" sz="580" dirty="0">
                 <a:solidFill>
                   <a:srgbClr val="8FA1AC"/>
                 </a:solidFill>
@@ -48883,283 +49117,7 @@
                 <a:ea typeface="Poppins" pitchFamily="34" charset="-122"/>
                 <a:cs typeface="Poppins" pitchFamily="34" charset="-120"/>
               </a:rPr>
-              <a:t>—</a:t>
-            </a:r>
-            <a:endParaRPr lang="en-US" sz="800" dirty="0"/>
-          </a:p>
-        </p:txBody>
-      </p:sp>
-      <p:sp>
-        <p:nvSpPr>
-          <p:cNvPr id="94" name="Text 92"/>
-          <p:cNvSpPr txBox="1"/>
-          <p:nvPr/>
-        </p:nvSpPr>
-        <p:spPr>
-          <a:xfrm>
-            <a:off x="5943600" y="5234940"/>
-            <a:ext cx="822960" cy="169164"/>
-          </a:xfrm>
-          <a:prstGeom prst="rect">
-            <a:avLst/>
-          </a:prstGeom>
-          <a:noFill/>
-          <a:ln/>
-        </p:spPr>
-        <p:txBody>
-          <a:bodyPr wrap="square" lIns="0" tIns="0" rIns="0" bIns="0" rtlCol="0" anchor="ctr"/>
-          <a:lstStyle/>
-          <a:p>
-            <a:pPr algn="r" indent="0" marL="0">
-              <a:buNone/>
-            </a:pPr>
-            <a:r>
-              <a:rPr lang="en-US" sz="600" dirty="0">
-                <a:solidFill>
-                  <a:srgbClr val="8FA1AC"/>
-                </a:solidFill>
-                <a:latin typeface="Poppins" pitchFamily="34" charset="0"/>
-                <a:ea typeface="Poppins" pitchFamily="34" charset="-122"/>
-                <a:cs typeface="Poppins" pitchFamily="34" charset="-120"/>
-              </a:rPr>
-              <a:t>no time logged</a:t>
-            </a:r>
-            <a:endParaRPr lang="en-US" sz="600" dirty="0"/>
-          </a:p>
-        </p:txBody>
-      </p:sp>
-      <p:sp>
-        <p:nvSpPr>
-          <p:cNvPr id="95" name="Text 93"/>
-          <p:cNvSpPr txBox="1"/>
-          <p:nvPr/>
-        </p:nvSpPr>
-        <p:spPr>
-          <a:xfrm>
-            <a:off x="640080" y="5404104"/>
-            <a:ext cx="1783080" cy="169164"/>
-          </a:xfrm>
-          <a:prstGeom prst="rect">
-            <a:avLst/>
-          </a:prstGeom>
-          <a:noFill/>
-          <a:ln/>
-        </p:spPr>
-        <p:txBody>
-          <a:bodyPr wrap="square" lIns="0" tIns="0" rIns="0" bIns="0" rtlCol="0" anchor="ctr"/>
-          <a:lstStyle/>
-          <a:p>
-            <a:pPr indent="0" marL="0">
-              <a:buNone/>
-            </a:pPr>
-            <a:r>
-              <a:rPr lang="en-US" sz="800" dirty="0">
-                <a:solidFill>
-                  <a:srgbClr val="5E7280"/>
-                </a:solidFill>
-                <a:latin typeface="Poppins" pitchFamily="34" charset="0"/>
-                <a:ea typeface="Poppins" pitchFamily="34" charset="-122"/>
-                <a:cs typeface="Poppins" pitchFamily="34" charset="-120"/>
-              </a:rPr>
-              <a:t>Phuong Ho</a:t>
-            </a:r>
-            <a:endParaRPr lang="en-US" sz="800" dirty="0"/>
-          </a:p>
-        </p:txBody>
-      </p:sp>
-      <p:sp>
-        <p:nvSpPr>
-          <p:cNvPr id="96" name="Shape 94"/>
-          <p:cNvSpPr/>
-          <p:nvPr/>
-        </p:nvSpPr>
-        <p:spPr>
-          <a:xfrm>
-            <a:off x="2468880" y="5464454"/>
-            <a:ext cx="2377440" cy="59436"/>
-          </a:xfrm>
-          <a:prstGeom prst="roundRect">
-            <a:avLst>
-              <a:gd name="adj" fmla="val 49231"/>
-            </a:avLst>
-          </a:prstGeom>
-          <a:solidFill>
-            <a:srgbClr val="E2EAEE"/>
-          </a:solidFill>
-          <a:ln/>
-        </p:spPr>
-      </p:sp>
-      <p:sp>
-        <p:nvSpPr>
-          <p:cNvPr id="97" name="Text 95"/>
-          <p:cNvSpPr txBox="1"/>
-          <p:nvPr/>
-        </p:nvSpPr>
-        <p:spPr>
-          <a:xfrm>
-            <a:off x="5029200" y="5404104"/>
-            <a:ext cx="822960" cy="169164"/>
-          </a:xfrm>
-          <a:prstGeom prst="rect">
-            <a:avLst/>
-          </a:prstGeom>
-          <a:noFill/>
-          <a:ln/>
-        </p:spPr>
-        <p:txBody>
-          <a:bodyPr wrap="square" lIns="0" tIns="0" rIns="0" bIns="0" rtlCol="0" anchor="ctr"/>
-          <a:lstStyle/>
-          <a:p>
-            <a:pPr algn="r" indent="0" marL="0">
-              <a:buNone/>
-            </a:pPr>
-            <a:r>
-              <a:rPr lang="en-US" sz="800" dirty="0">
-                <a:solidFill>
-                  <a:srgbClr val="8FA1AC"/>
-                </a:solidFill>
-                <a:latin typeface="Poppins" pitchFamily="34" charset="0"/>
-                <a:ea typeface="Poppins" pitchFamily="34" charset="-122"/>
-                <a:cs typeface="Poppins" pitchFamily="34" charset="-120"/>
-              </a:rPr>
-              <a:t>—</a:t>
-            </a:r>
-            <a:endParaRPr lang="en-US" sz="800" dirty="0"/>
-          </a:p>
-        </p:txBody>
-      </p:sp>
-      <p:sp>
-        <p:nvSpPr>
-          <p:cNvPr id="98" name="Text 96"/>
-          <p:cNvSpPr txBox="1"/>
-          <p:nvPr/>
-        </p:nvSpPr>
-        <p:spPr>
-          <a:xfrm>
-            <a:off x="5943600" y="5404104"/>
-            <a:ext cx="822960" cy="169164"/>
-          </a:xfrm>
-          <a:prstGeom prst="rect">
-            <a:avLst/>
-          </a:prstGeom>
-          <a:noFill/>
-          <a:ln/>
-        </p:spPr>
-        <p:txBody>
-          <a:bodyPr wrap="square" lIns="0" tIns="0" rIns="0" bIns="0" rtlCol="0" anchor="ctr"/>
-          <a:lstStyle/>
-          <a:p>
-            <a:pPr algn="r" indent="0" marL="0">
-              <a:buNone/>
-            </a:pPr>
-            <a:r>
-              <a:rPr lang="en-US" sz="600" dirty="0">
-                <a:solidFill>
-                  <a:srgbClr val="8FA1AC"/>
-                </a:solidFill>
-                <a:latin typeface="Poppins" pitchFamily="34" charset="0"/>
-                <a:ea typeface="Poppins" pitchFamily="34" charset="-122"/>
-                <a:cs typeface="Poppins" pitchFamily="34" charset="-120"/>
-              </a:rPr>
-              <a:t>no time logged</a:t>
-            </a:r>
-            <a:endParaRPr lang="en-US" sz="600" dirty="0"/>
-          </a:p>
-        </p:txBody>
-      </p:sp>
-      <p:sp>
-        <p:nvSpPr>
-          <p:cNvPr id="99" name="Shape 97"/>
-          <p:cNvSpPr/>
-          <p:nvPr/>
-        </p:nvSpPr>
-        <p:spPr>
-          <a:xfrm>
-            <a:off x="4370832" y="2999232"/>
-            <a:ext cx="7315" cy="2537460"/>
-          </a:xfrm>
-          <a:prstGeom prst="rect">
-            <a:avLst/>
-          </a:prstGeom>
-          <a:solidFill>
-            <a:srgbClr val="B4552D"/>
-          </a:solidFill>
-          <a:ln/>
-        </p:spPr>
-      </p:sp>
-      <p:sp>
-        <p:nvSpPr>
-          <p:cNvPr id="100" name="Text 98"/>
-          <p:cNvSpPr txBox="1"/>
-          <p:nvPr/>
-        </p:nvSpPr>
-        <p:spPr>
-          <a:xfrm>
-            <a:off x="3931920" y="2816352"/>
-            <a:ext cx="877824" cy="164592"/>
-          </a:xfrm>
-          <a:prstGeom prst="rect">
-            <a:avLst/>
-          </a:prstGeom>
-          <a:noFill/>
-          <a:ln/>
-        </p:spPr>
-        <p:txBody>
-          <a:bodyPr wrap="square" lIns="0" tIns="0" rIns="0" bIns="0" rtlCol="0" anchor="ctr"/>
-          <a:lstStyle/>
-          <a:p>
-            <a:pPr algn="ctr" indent="0" marL="0">
-              <a:buNone/>
-            </a:pPr>
-            <a:r>
-              <a:rPr lang="en-US" sz="600" b="1" dirty="0">
-                <a:solidFill>
-                  <a:srgbClr val="B4552D"/>
-                </a:solidFill>
-                <a:latin typeface="Poppins" pitchFamily="34" charset="0"/>
-                <a:ea typeface="Poppins" pitchFamily="34" charset="-122"/>
-                <a:cs typeface="Poppins" pitchFamily="34" charset="-120"/>
-              </a:rPr>
-              <a:t>80% target</a:t>
-            </a:r>
-            <a:endParaRPr lang="en-US" sz="600" dirty="0"/>
-          </a:p>
-        </p:txBody>
-      </p:sp>
-      <p:sp>
-        <p:nvSpPr>
-          <p:cNvPr id="101" name="Text 99"/>
-          <p:cNvSpPr txBox="1"/>
-          <p:nvPr/>
-        </p:nvSpPr>
-        <p:spPr>
-          <a:xfrm>
-            <a:off x="640080" y="5650992"/>
-            <a:ext cx="6126480" cy="256032"/>
-          </a:xfrm>
-          <a:prstGeom prst="rect">
-            <a:avLst/>
-          </a:prstGeom>
-          <a:noFill/>
-          <a:ln/>
-        </p:spPr>
-        <p:txBody>
-          <a:bodyPr wrap="square" lIns="0" tIns="0" rIns="0" bIns="0" rtlCol="0" anchor="t"/>
-          <a:lstStyle/>
-          <a:p>
-            <a:pPr indent="0" marL="0">
-              <a:buNone/>
-            </a:pPr>
-            <a:r>
-              <a:rPr lang="en-US" sz="580" dirty="0">
-                <a:solidFill>
-                  <a:srgbClr val="8FA1AC"/>
-                </a:solidFill>
-                <a:latin typeface="Poppins" pitchFamily="34" charset="0"/>
-                <a:ea typeface="Poppins" pitchFamily="34" charset="-122"/>
-                <a:cs typeface="Poppins" pitchFamily="34" charset="-120"/>
-              </a:rPr>
-              <a:t>Available staff = the 15 people assigned to PS-pipeline tickets open now or closed this week (Tech, Onboarding, Integrations, Training, Warranty), at a 38h standard week.</a:t>
+              <a:t>Available staff = the 13 Professional Services people assigned to PS-pipeline tickets open now or closed this week, at a 38h standard week. Argenis Rafael Guevara and Isaac Mercado carry PS-pipeline tickets but are not Professional Services staff — excluded from the capacity base.</a:t>
             </a:r>
             <a:endParaRPr lang="en-US" sz="580" dirty="0"/>
           </a:p>
@@ -50218,7 +50176,7 @@
                 <a:ea typeface="Poppins" pitchFamily="34" charset="-122"/>
                 <a:cs typeface="Poppins" pitchFamily="34" charset="-120"/>
               </a:rPr>
-              <a:t>5.8% billable utilisation is a logging number, not a delivery number. </a:t>
+              <a:t>6.7% billable utilisation is a logging number, not a delivery number. </a:t>
             </a:r>
             <a:pPr indent="0" marL="0">
               <a:spcAft>
@@ -50235,7 +50193,7 @@
                 <a:ea typeface="Poppins" pitchFamily="34" charset="-122"/>
                 <a:cs typeface="Poppins" pitchFamily="34" charset="-120"/>
               </a:rPr>
-              <a:t>33.01h landed against 570h of capacity, but only 13% of the week's 132 PS items carry hours.</a:t>
+              <a:t>33.01h landed against 494h of capacity, but only 13% of the week's 132 PS items carry hours.</a:t>
             </a:r>
             <a:endParaRPr lang="en-US" sz="900" dirty="0"/>
           </a:p>
@@ -50283,7 +50241,7 @@
                 <a:ea typeface="Poppins" pitchFamily="34" charset="-122"/>
                 <a:cs typeface="Poppins" pitchFamily="34" charset="-120"/>
               </a:rPr>
-              <a:t>Katherine Fenwick 38.2% and Rhys Woolcock 36.4%; the other 9 PS members logged nothing at all.</a:t>
+              <a:t>Katherine Fenwick 38.2% and Rhys Woolcock 36.4%; the other 7 PS members logged nothing at all.</a:t>
             </a:r>
             <a:endParaRPr lang="en-US" sz="900" dirty="0"/>
           </a:p>

--- a/exec-deck/output/H&L Weekly Update - WC 14 Sep 2026.pptx
+++ b/exec-deck/output/H&L Weekly Update - WC 14 Sep 2026.pptx
@@ -46275,7 +46275,7 @@
                 <a:ea typeface="Poppins" pitchFamily="34" charset="-122"/>
                 <a:cs typeface="Poppins" pitchFamily="34" charset="-120"/>
               </a:rPr>
-              <a:t>6.7%</a:t>
+              <a:t>7.9%</a:t>
             </a:r>
             <a:endParaRPr lang="en-US" sz="2600" dirty="0"/>
           </a:p>
@@ -46314,7 +46314,7 @@
                 <a:ea typeface="Poppins" pitchFamily="34" charset="-122"/>
                 <a:cs typeface="Poppins" pitchFamily="34" charset="-120"/>
               </a:rPr>
-              <a:t>33.01h billed of 494h available · target 80%</a:t>
+              <a:t>33.01h billed of 418h available · target 80%</a:t>
             </a:r>
             <a:endParaRPr lang="en-US" sz="780" dirty="0"/>
           </a:p>
@@ -46421,7 +46421,7 @@
                 <a:ea typeface="Poppins" pitchFamily="34" charset="-122"/>
                 <a:cs typeface="Poppins" pitchFamily="34" charset="-120"/>
               </a:rPr>
-              <a:t>494h</a:t>
+              <a:t>418h</a:t>
             </a:r>
             <a:endParaRPr lang="en-US" sz="2600" dirty="0"/>
           </a:p>
@@ -46460,7 +46460,7 @@
                 <a:ea typeface="Poppins" pitchFamily="34" charset="-122"/>
                 <a:cs typeface="Poppins" pitchFamily="34" charset="-120"/>
               </a:rPr>
-              <a:t>13 people assigned to PS-pipeline tickets × 38h standard week</a:t>
+              <a:t>11 people assigned to PS-pipeline tickets × 38h standard week</a:t>
             </a:r>
             <a:endParaRPr lang="en-US" sz="780" dirty="0"/>
           </a:p>
@@ -46898,7 +46898,7 @@
         <p:spPr>
           <a:xfrm>
             <a:off x="2944368" y="3017520"/>
-            <a:ext cx="5486" cy="2496312"/>
+            <a:ext cx="5486" cy="2487168"/>
           </a:xfrm>
           <a:prstGeom prst="rect">
             <a:avLst/>
@@ -46957,7 +46957,7 @@
         <p:spPr>
           <a:xfrm>
             <a:off x="3419856" y="3017520"/>
-            <a:ext cx="5486" cy="2496312"/>
+            <a:ext cx="5486" cy="2487168"/>
           </a:xfrm>
           <a:prstGeom prst="rect">
             <a:avLst/>
@@ -47016,7 +47016,7 @@
         <p:spPr>
           <a:xfrm>
             <a:off x="3895344" y="3017520"/>
-            <a:ext cx="5486" cy="2496312"/>
+            <a:ext cx="5486" cy="2487168"/>
           </a:xfrm>
           <a:prstGeom prst="rect">
             <a:avLst/>
@@ -47075,7 +47075,7 @@
         <p:spPr>
           <a:xfrm>
             <a:off x="4370832" y="3017520"/>
-            <a:ext cx="5486" cy="2496312"/>
+            <a:ext cx="5486" cy="2487168"/>
           </a:xfrm>
           <a:prstGeom prst="rect">
             <a:avLst/>
@@ -47134,7 +47134,7 @@
         <p:spPr>
           <a:xfrm>
             <a:off x="4846320" y="3017520"/>
-            <a:ext cx="5486" cy="2496312"/>
+            <a:ext cx="5486" cy="2487168"/>
           </a:xfrm>
           <a:prstGeom prst="rect">
             <a:avLst/>
@@ -47154,7 +47154,7 @@
         <p:spPr>
           <a:xfrm>
             <a:off x="640080" y="3054096"/>
-            <a:ext cx="1783080" cy="192024"/>
+            <a:ext cx="1783080" cy="226106"/>
           </a:xfrm>
           <a:prstGeom prst="rect">
             <a:avLst/>
@@ -47192,7 +47192,7 @@
         </p:nvSpPr>
         <p:spPr>
           <a:xfrm>
-            <a:off x="2468880" y="3120847"/>
+            <a:off x="2468880" y="3137431"/>
             <a:ext cx="2377440" cy="59436"/>
           </a:xfrm>
           <a:prstGeom prst="roundRect">
@@ -47214,7 +47214,7 @@
         </p:nvSpPr>
         <p:spPr>
           <a:xfrm>
-            <a:off x="2468880" y="3120847"/>
+            <a:off x="2468880" y="3137431"/>
             <a:ext cx="908182" cy="59436"/>
           </a:xfrm>
           <a:prstGeom prst="roundRect">
@@ -47237,7 +47237,7 @@
         <p:spPr>
           <a:xfrm>
             <a:off x="5029200" y="3054096"/>
-            <a:ext cx="822960" cy="192024"/>
+            <a:ext cx="822960" cy="226106"/>
           </a:xfrm>
           <a:prstGeom prst="rect">
             <a:avLst/>
@@ -47276,7 +47276,7 @@
         <p:spPr>
           <a:xfrm>
             <a:off x="5943600" y="3054096"/>
-            <a:ext cx="822960" cy="192024"/>
+            <a:ext cx="822960" cy="226106"/>
           </a:xfrm>
           <a:prstGeom prst="rect">
             <a:avLst/>
@@ -47314,8 +47314,8 @@
         </p:nvSpPr>
         <p:spPr>
           <a:xfrm>
-            <a:off x="640080" y="3246120"/>
-            <a:ext cx="1783080" cy="192024"/>
+            <a:off x="640080" y="3280202"/>
+            <a:ext cx="1783080" cy="226106"/>
           </a:xfrm>
           <a:prstGeom prst="rect">
             <a:avLst/>
@@ -47353,7 +47353,7 @@
         </p:nvSpPr>
         <p:spPr>
           <a:xfrm>
-            <a:off x="2468880" y="3312871"/>
+            <a:off x="2468880" y="3363537"/>
             <a:ext cx="2377440" cy="59436"/>
           </a:xfrm>
           <a:prstGeom prst="roundRect">
@@ -47375,7 +47375,7 @@
         </p:nvSpPr>
         <p:spPr>
           <a:xfrm>
-            <a:off x="2468880" y="3312871"/>
+            <a:off x="2468880" y="3363537"/>
             <a:ext cx="865388" cy="59436"/>
           </a:xfrm>
           <a:prstGeom prst="roundRect">
@@ -47397,8 +47397,8 @@
         </p:nvSpPr>
         <p:spPr>
           <a:xfrm>
-            <a:off x="5029200" y="3246120"/>
-            <a:ext cx="822960" cy="192024"/>
+            <a:off x="5029200" y="3280202"/>
+            <a:ext cx="822960" cy="226106"/>
           </a:xfrm>
           <a:prstGeom prst="rect">
             <a:avLst/>
@@ -47436,8 +47436,8 @@
         </p:nvSpPr>
         <p:spPr>
           <a:xfrm>
-            <a:off x="5943600" y="3246120"/>
-            <a:ext cx="822960" cy="192024"/>
+            <a:off x="5943600" y="3280202"/>
+            <a:ext cx="822960" cy="226106"/>
           </a:xfrm>
           <a:prstGeom prst="rect">
             <a:avLst/>
@@ -47475,8 +47475,8 @@
         </p:nvSpPr>
         <p:spPr>
           <a:xfrm>
-            <a:off x="640080" y="3438144"/>
-            <a:ext cx="1783080" cy="192024"/>
+            <a:off x="640080" y="3506308"/>
+            <a:ext cx="1783080" cy="226106"/>
           </a:xfrm>
           <a:prstGeom prst="rect">
             <a:avLst/>
@@ -47514,7 +47514,7 @@
         </p:nvSpPr>
         <p:spPr>
           <a:xfrm>
-            <a:off x="2468880" y="3504895"/>
+            <a:off x="2468880" y="3589643"/>
             <a:ext cx="2377440" cy="59436"/>
           </a:xfrm>
           <a:prstGeom prst="roundRect">
@@ -47536,7 +47536,7 @@
         </p:nvSpPr>
         <p:spPr>
           <a:xfrm>
-            <a:off x="2468880" y="3504895"/>
+            <a:off x="2468880" y="3589643"/>
             <a:ext cx="152156" cy="59436"/>
           </a:xfrm>
           <a:prstGeom prst="roundRect">
@@ -47558,8 +47558,8 @@
         </p:nvSpPr>
         <p:spPr>
           <a:xfrm>
-            <a:off x="5029200" y="3438144"/>
-            <a:ext cx="822960" cy="192024"/>
+            <a:off x="5029200" y="3506308"/>
+            <a:ext cx="822960" cy="226106"/>
           </a:xfrm>
           <a:prstGeom prst="rect">
             <a:avLst/>
@@ -47597,8 +47597,8 @@
         </p:nvSpPr>
         <p:spPr>
           <a:xfrm>
-            <a:off x="5943600" y="3438144"/>
-            <a:ext cx="822960" cy="192024"/>
+            <a:off x="5943600" y="3506308"/>
+            <a:ext cx="822960" cy="226106"/>
           </a:xfrm>
           <a:prstGeom prst="rect">
             <a:avLst/>
@@ -47636,8 +47636,8 @@
         </p:nvSpPr>
         <p:spPr>
           <a:xfrm>
-            <a:off x="640080" y="3630168"/>
-            <a:ext cx="1783080" cy="192024"/>
+            <a:off x="640080" y="3732415"/>
+            <a:ext cx="1783080" cy="226106"/>
           </a:xfrm>
           <a:prstGeom prst="rect">
             <a:avLst/>
@@ -47675,7 +47675,7 @@
         </p:nvSpPr>
         <p:spPr>
           <a:xfrm>
-            <a:off x="2468880" y="3696919"/>
+            <a:off x="2468880" y="3815750"/>
             <a:ext cx="2377440" cy="59436"/>
           </a:xfrm>
           <a:prstGeom prst="roundRect">
@@ -47697,7 +47697,7 @@
         </p:nvSpPr>
         <p:spPr>
           <a:xfrm>
-            <a:off x="2468880" y="3696919"/>
+            <a:off x="2468880" y="3815750"/>
             <a:ext cx="92720" cy="59436"/>
           </a:xfrm>
           <a:prstGeom prst="roundRect">
@@ -47719,8 +47719,8 @@
         </p:nvSpPr>
         <p:spPr>
           <a:xfrm>
-            <a:off x="5029200" y="3630168"/>
-            <a:ext cx="822960" cy="192024"/>
+            <a:off x="5029200" y="3732415"/>
+            <a:ext cx="822960" cy="226106"/>
           </a:xfrm>
           <a:prstGeom prst="rect">
             <a:avLst/>
@@ -47758,8 +47758,8 @@
         </p:nvSpPr>
         <p:spPr>
           <a:xfrm>
-            <a:off x="5943600" y="3630168"/>
-            <a:ext cx="822960" cy="192024"/>
+            <a:off x="5943600" y="3732415"/>
+            <a:ext cx="822960" cy="226106"/>
           </a:xfrm>
           <a:prstGeom prst="rect">
             <a:avLst/>
@@ -47797,8 +47797,8 @@
         </p:nvSpPr>
         <p:spPr>
           <a:xfrm>
-            <a:off x="640080" y="3822192"/>
-            <a:ext cx="1783080" cy="192024"/>
+            <a:off x="640080" y="3958521"/>
+            <a:ext cx="1783080" cy="226106"/>
           </a:xfrm>
           <a:prstGeom prst="rect">
             <a:avLst/>
@@ -47836,7 +47836,7 @@
         </p:nvSpPr>
         <p:spPr>
           <a:xfrm>
-            <a:off x="2468880" y="3888943"/>
+            <a:off x="2468880" y="4041856"/>
             <a:ext cx="2377440" cy="59436"/>
           </a:xfrm>
           <a:prstGeom prst="roundRect">
@@ -47858,7 +47858,7 @@
         </p:nvSpPr>
         <p:spPr>
           <a:xfrm>
-            <a:off x="2468880" y="3888943"/>
+            <a:off x="2468880" y="4041856"/>
             <a:ext cx="45720" cy="59436"/>
           </a:xfrm>
           <a:prstGeom prst="roundRect">
@@ -47880,8 +47880,8 @@
         </p:nvSpPr>
         <p:spPr>
           <a:xfrm>
-            <a:off x="5029200" y="3822192"/>
-            <a:ext cx="822960" cy="192024"/>
+            <a:off x="5029200" y="3958521"/>
+            <a:ext cx="822960" cy="226106"/>
           </a:xfrm>
           <a:prstGeom prst="rect">
             <a:avLst/>
@@ -47919,8 +47919,8 @@
         </p:nvSpPr>
         <p:spPr>
           <a:xfrm>
-            <a:off x="5943600" y="3822192"/>
-            <a:ext cx="822960" cy="192024"/>
+            <a:off x="5943600" y="3958521"/>
+            <a:ext cx="822960" cy="226106"/>
           </a:xfrm>
           <a:prstGeom prst="rect">
             <a:avLst/>
@@ -47958,8 +47958,8 @@
         </p:nvSpPr>
         <p:spPr>
           <a:xfrm>
-            <a:off x="640080" y="4014216"/>
-            <a:ext cx="1783080" cy="192024"/>
+            <a:off x="640080" y="4184627"/>
+            <a:ext cx="1783080" cy="226106"/>
           </a:xfrm>
           <a:prstGeom prst="rect">
             <a:avLst/>
@@ -47997,7 +47997,7 @@
         </p:nvSpPr>
         <p:spPr>
           <a:xfrm>
-            <a:off x="2468880" y="4080967"/>
+            <a:off x="2468880" y="4267962"/>
             <a:ext cx="2377440" cy="59436"/>
           </a:xfrm>
           <a:prstGeom prst="roundRect">
@@ -48019,7 +48019,7 @@
         </p:nvSpPr>
         <p:spPr>
           <a:xfrm>
-            <a:off x="2468880" y="4080967"/>
+            <a:off x="2468880" y="4267962"/>
             <a:ext cx="45720" cy="59436"/>
           </a:xfrm>
           <a:prstGeom prst="roundRect">
@@ -48041,8 +48041,8 @@
         </p:nvSpPr>
         <p:spPr>
           <a:xfrm>
-            <a:off x="5029200" y="4014216"/>
-            <a:ext cx="822960" cy="192024"/>
+            <a:off x="5029200" y="4184627"/>
+            <a:ext cx="822960" cy="226106"/>
           </a:xfrm>
           <a:prstGeom prst="rect">
             <a:avLst/>
@@ -48080,8 +48080,8 @@
         </p:nvSpPr>
         <p:spPr>
           <a:xfrm>
-            <a:off x="5943600" y="4014216"/>
-            <a:ext cx="822960" cy="192024"/>
+            <a:off x="5943600" y="4184627"/>
+            <a:ext cx="822960" cy="226106"/>
           </a:xfrm>
           <a:prstGeom prst="rect">
             <a:avLst/>
@@ -48119,8 +48119,8 @@
         </p:nvSpPr>
         <p:spPr>
           <a:xfrm>
-            <a:off x="640080" y="4206240"/>
-            <a:ext cx="1783080" cy="192024"/>
+            <a:off x="640080" y="4410733"/>
+            <a:ext cx="1783080" cy="226106"/>
           </a:xfrm>
           <a:prstGeom prst="rect">
             <a:avLst/>
@@ -48158,7 +48158,7 @@
         </p:nvSpPr>
         <p:spPr>
           <a:xfrm>
-            <a:off x="2468880" y="4272991"/>
+            <a:off x="2468880" y="4494068"/>
             <a:ext cx="2377440" cy="59436"/>
           </a:xfrm>
           <a:prstGeom prst="roundRect">
@@ -48180,8 +48180,8 @@
         </p:nvSpPr>
         <p:spPr>
           <a:xfrm>
-            <a:off x="5029200" y="4206240"/>
-            <a:ext cx="822960" cy="192024"/>
+            <a:off x="5029200" y="4410733"/>
+            <a:ext cx="822960" cy="226106"/>
           </a:xfrm>
           <a:prstGeom prst="rect">
             <a:avLst/>
@@ -48219,8 +48219,8 @@
         </p:nvSpPr>
         <p:spPr>
           <a:xfrm>
-            <a:off x="5943600" y="4206240"/>
-            <a:ext cx="822960" cy="192024"/>
+            <a:off x="5943600" y="4410733"/>
+            <a:ext cx="822960" cy="226106"/>
           </a:xfrm>
           <a:prstGeom prst="rect">
             <a:avLst/>
@@ -48258,8 +48258,8 @@
         </p:nvSpPr>
         <p:spPr>
           <a:xfrm>
-            <a:off x="640080" y="4398264"/>
-            <a:ext cx="1783080" cy="192024"/>
+            <a:off x="640080" y="4636839"/>
+            <a:ext cx="1783080" cy="226106"/>
           </a:xfrm>
           <a:prstGeom prst="rect">
             <a:avLst/>
@@ -48297,7 +48297,7 @@
         </p:nvSpPr>
         <p:spPr>
           <a:xfrm>
-            <a:off x="2468880" y="4465015"/>
+            <a:off x="2468880" y="4720174"/>
             <a:ext cx="2377440" cy="59436"/>
           </a:xfrm>
           <a:prstGeom prst="roundRect">
@@ -48319,8 +48319,8 @@
         </p:nvSpPr>
         <p:spPr>
           <a:xfrm>
-            <a:off x="5029200" y="4398264"/>
-            <a:ext cx="822960" cy="192024"/>
+            <a:off x="5029200" y="4636839"/>
+            <a:ext cx="822960" cy="226106"/>
           </a:xfrm>
           <a:prstGeom prst="rect">
             <a:avLst/>
@@ -48358,8 +48358,8 @@
         </p:nvSpPr>
         <p:spPr>
           <a:xfrm>
-            <a:off x="5943600" y="4398264"/>
-            <a:ext cx="822960" cy="192024"/>
+            <a:off x="5943600" y="4636839"/>
+            <a:ext cx="822960" cy="226106"/>
           </a:xfrm>
           <a:prstGeom prst="rect">
             <a:avLst/>
@@ -48397,8 +48397,8 @@
         </p:nvSpPr>
         <p:spPr>
           <a:xfrm>
-            <a:off x="640080" y="4590288"/>
-            <a:ext cx="1783080" cy="192024"/>
+            <a:off x="640080" y="4862945"/>
+            <a:ext cx="1783080" cy="226106"/>
           </a:xfrm>
           <a:prstGeom prst="rect">
             <a:avLst/>
@@ -48436,7 +48436,7 @@
         </p:nvSpPr>
         <p:spPr>
           <a:xfrm>
-            <a:off x="2468880" y="4657039"/>
+            <a:off x="2468880" y="4946281"/>
             <a:ext cx="2377440" cy="59436"/>
           </a:xfrm>
           <a:prstGeom prst="roundRect">
@@ -48458,8 +48458,8 @@
         </p:nvSpPr>
         <p:spPr>
           <a:xfrm>
-            <a:off x="5029200" y="4590288"/>
-            <a:ext cx="822960" cy="192024"/>
+            <a:off x="5029200" y="4862945"/>
+            <a:ext cx="822960" cy="226106"/>
           </a:xfrm>
           <a:prstGeom prst="rect">
             <a:avLst/>
@@ -48497,8 +48497,8 @@
         </p:nvSpPr>
         <p:spPr>
           <a:xfrm>
-            <a:off x="5943600" y="4590288"/>
-            <a:ext cx="822960" cy="192024"/>
+            <a:off x="5943600" y="4862945"/>
+            <a:ext cx="822960" cy="226106"/>
           </a:xfrm>
           <a:prstGeom prst="rect">
             <a:avLst/>
@@ -48536,8 +48536,8 @@
         </p:nvSpPr>
         <p:spPr>
           <a:xfrm>
-            <a:off x="640080" y="4782312"/>
-            <a:ext cx="1783080" cy="192024"/>
+            <a:off x="640080" y="5089052"/>
+            <a:ext cx="1783080" cy="226106"/>
           </a:xfrm>
           <a:prstGeom prst="rect">
             <a:avLst/>
@@ -48561,7 +48561,7 @@
                 <a:ea typeface="Poppins" pitchFamily="34" charset="-122"/>
                 <a:cs typeface="Poppins" pitchFamily="34" charset="-120"/>
               </a:rPr>
-              <a:t>Anton Lopez</a:t>
+              <a:t>Argenis Rafael Guevara</a:t>
             </a:r>
             <a:endParaRPr lang="en-US" sz="800" dirty="0"/>
           </a:p>
@@ -48575,7 +48575,7 @@
         </p:nvSpPr>
         <p:spPr>
           <a:xfrm>
-            <a:off x="2468880" y="4849063"/>
+            <a:off x="2468880" y="5172387"/>
             <a:ext cx="2377440" cy="59436"/>
           </a:xfrm>
           <a:prstGeom prst="roundRect">
@@ -48597,8 +48597,8 @@
         </p:nvSpPr>
         <p:spPr>
           <a:xfrm>
-            <a:off x="5029200" y="4782312"/>
-            <a:ext cx="822960" cy="192024"/>
+            <a:off x="5029200" y="5089052"/>
+            <a:ext cx="822960" cy="226106"/>
           </a:xfrm>
           <a:prstGeom prst="rect">
             <a:avLst/>
@@ -48636,8 +48636,8 @@
         </p:nvSpPr>
         <p:spPr>
           <a:xfrm>
-            <a:off x="5943600" y="4782312"/>
-            <a:ext cx="822960" cy="192024"/>
+            <a:off x="5943600" y="5089052"/>
+            <a:ext cx="822960" cy="226106"/>
           </a:xfrm>
           <a:prstGeom prst="rect">
             <a:avLst/>
@@ -48675,8 +48675,8 @@
         </p:nvSpPr>
         <p:spPr>
           <a:xfrm>
-            <a:off x="640080" y="4974336"/>
-            <a:ext cx="1783080" cy="192024"/>
+            <a:off x="640080" y="5315158"/>
+            <a:ext cx="1783080" cy="226106"/>
           </a:xfrm>
           <a:prstGeom prst="rect">
             <a:avLst/>
@@ -48700,7 +48700,7 @@
                 <a:ea typeface="Poppins" pitchFamily="34" charset="-122"/>
                 <a:cs typeface="Poppins" pitchFamily="34" charset="-120"/>
               </a:rPr>
-              <a:t>Jasmine Hikuroa</a:t>
+              <a:t>Isaac Mercado</a:t>
             </a:r>
             <a:endParaRPr lang="en-US" sz="800" dirty="0"/>
           </a:p>
@@ -48714,7 +48714,7 @@
         </p:nvSpPr>
         <p:spPr>
           <a:xfrm>
-            <a:off x="2468880" y="5041087"/>
+            <a:off x="2468880" y="5398493"/>
             <a:ext cx="2377440" cy="59436"/>
           </a:xfrm>
           <a:prstGeom prst="roundRect">
@@ -48736,8 +48736,8 @@
         </p:nvSpPr>
         <p:spPr>
           <a:xfrm>
-            <a:off x="5029200" y="4974336"/>
-            <a:ext cx="822960" cy="192024"/>
+            <a:off x="5029200" y="5315158"/>
+            <a:ext cx="822960" cy="226106"/>
           </a:xfrm>
           <a:prstGeom prst="rect">
             <a:avLst/>
@@ -48775,8 +48775,8 @@
         </p:nvSpPr>
         <p:spPr>
           <a:xfrm>
-            <a:off x="5943600" y="4974336"/>
-            <a:ext cx="822960" cy="192024"/>
+            <a:off x="5943600" y="5315158"/>
+            <a:ext cx="822960" cy="226106"/>
           </a:xfrm>
           <a:prstGeom prst="rect">
             <a:avLst/>
@@ -48809,284 +48809,6 @@
       <p:sp>
         <p:nvSpPr>
           <p:cNvPr id="93" name="Text 91"/>
-          <p:cNvSpPr txBox="1"/>
-          <p:nvPr/>
-        </p:nvSpPr>
-        <p:spPr>
-          <a:xfrm>
-            <a:off x="640080" y="5166360"/>
-            <a:ext cx="1783080" cy="192024"/>
-          </a:xfrm>
-          <a:prstGeom prst="rect">
-            <a:avLst/>
-          </a:prstGeom>
-          <a:noFill/>
-          <a:ln/>
-        </p:spPr>
-        <p:txBody>
-          <a:bodyPr wrap="square" lIns="0" tIns="0" rIns="0" bIns="0" rtlCol="0" anchor="ctr"/>
-          <a:lstStyle/>
-          <a:p>
-            <a:pPr indent="0" marL="0">
-              <a:buNone/>
-            </a:pPr>
-            <a:r>
-              <a:rPr lang="en-US" sz="800" dirty="0">
-                <a:solidFill>
-                  <a:srgbClr val="5E7280"/>
-                </a:solidFill>
-                <a:latin typeface="Poppins" pitchFamily="34" charset="0"/>
-                <a:ea typeface="Poppins" pitchFamily="34" charset="-122"/>
-                <a:cs typeface="Poppins" pitchFamily="34" charset="-120"/>
-              </a:rPr>
-              <a:t>Bjorn Magabo</a:t>
-            </a:r>
-            <a:endParaRPr lang="en-US" sz="800" dirty="0"/>
-          </a:p>
-        </p:txBody>
-      </p:sp>
-      <p:sp>
-        <p:nvSpPr>
-          <p:cNvPr id="94" name="Shape 92"/>
-          <p:cNvSpPr/>
-          <p:nvPr/>
-        </p:nvSpPr>
-        <p:spPr>
-          <a:xfrm>
-            <a:off x="2468880" y="5233111"/>
-            <a:ext cx="2377440" cy="59436"/>
-          </a:xfrm>
-          <a:prstGeom prst="roundRect">
-            <a:avLst>
-              <a:gd name="adj" fmla="val 49231"/>
-            </a:avLst>
-          </a:prstGeom>
-          <a:solidFill>
-            <a:srgbClr val="E2EAEE"/>
-          </a:solidFill>
-          <a:ln/>
-        </p:spPr>
-      </p:sp>
-      <p:sp>
-        <p:nvSpPr>
-          <p:cNvPr id="95" name="Text 93"/>
-          <p:cNvSpPr txBox="1"/>
-          <p:nvPr/>
-        </p:nvSpPr>
-        <p:spPr>
-          <a:xfrm>
-            <a:off x="5029200" y="5166360"/>
-            <a:ext cx="822960" cy="192024"/>
-          </a:xfrm>
-          <a:prstGeom prst="rect">
-            <a:avLst/>
-          </a:prstGeom>
-          <a:noFill/>
-          <a:ln/>
-        </p:spPr>
-        <p:txBody>
-          <a:bodyPr wrap="square" lIns="0" tIns="0" rIns="0" bIns="0" rtlCol="0" anchor="ctr"/>
-          <a:lstStyle/>
-          <a:p>
-            <a:pPr algn="r" indent="0" marL="0">
-              <a:buNone/>
-            </a:pPr>
-            <a:r>
-              <a:rPr lang="en-US" sz="800" dirty="0">
-                <a:solidFill>
-                  <a:srgbClr val="8FA1AC"/>
-                </a:solidFill>
-                <a:latin typeface="Poppins" pitchFamily="34" charset="0"/>
-                <a:ea typeface="Poppins" pitchFamily="34" charset="-122"/>
-                <a:cs typeface="Poppins" pitchFamily="34" charset="-120"/>
-              </a:rPr>
-              <a:t>—</a:t>
-            </a:r>
-            <a:endParaRPr lang="en-US" sz="800" dirty="0"/>
-          </a:p>
-        </p:txBody>
-      </p:sp>
-      <p:sp>
-        <p:nvSpPr>
-          <p:cNvPr id="96" name="Text 94"/>
-          <p:cNvSpPr txBox="1"/>
-          <p:nvPr/>
-        </p:nvSpPr>
-        <p:spPr>
-          <a:xfrm>
-            <a:off x="5943600" y="5166360"/>
-            <a:ext cx="822960" cy="192024"/>
-          </a:xfrm>
-          <a:prstGeom prst="rect">
-            <a:avLst/>
-          </a:prstGeom>
-          <a:noFill/>
-          <a:ln/>
-        </p:spPr>
-        <p:txBody>
-          <a:bodyPr wrap="square" lIns="0" tIns="0" rIns="0" bIns="0" rtlCol="0" anchor="ctr"/>
-          <a:lstStyle/>
-          <a:p>
-            <a:pPr algn="r" indent="0" marL="0">
-              <a:buNone/>
-            </a:pPr>
-            <a:r>
-              <a:rPr lang="en-US" sz="600" dirty="0">
-                <a:solidFill>
-                  <a:srgbClr val="8FA1AC"/>
-                </a:solidFill>
-                <a:latin typeface="Poppins" pitchFamily="34" charset="0"/>
-                <a:ea typeface="Poppins" pitchFamily="34" charset="-122"/>
-                <a:cs typeface="Poppins" pitchFamily="34" charset="-120"/>
-              </a:rPr>
-              <a:t>no time logged</a:t>
-            </a:r>
-            <a:endParaRPr lang="en-US" sz="600" dirty="0"/>
-          </a:p>
-        </p:txBody>
-      </p:sp>
-      <p:sp>
-        <p:nvSpPr>
-          <p:cNvPr id="97" name="Text 95"/>
-          <p:cNvSpPr txBox="1"/>
-          <p:nvPr/>
-        </p:nvSpPr>
-        <p:spPr>
-          <a:xfrm>
-            <a:off x="640080" y="5358384"/>
-            <a:ext cx="1783080" cy="192024"/>
-          </a:xfrm>
-          <a:prstGeom prst="rect">
-            <a:avLst/>
-          </a:prstGeom>
-          <a:noFill/>
-          <a:ln/>
-        </p:spPr>
-        <p:txBody>
-          <a:bodyPr wrap="square" lIns="0" tIns="0" rIns="0" bIns="0" rtlCol="0" anchor="ctr"/>
-          <a:lstStyle/>
-          <a:p>
-            <a:pPr indent="0" marL="0">
-              <a:buNone/>
-            </a:pPr>
-            <a:r>
-              <a:rPr lang="en-US" sz="800" dirty="0">
-                <a:solidFill>
-                  <a:srgbClr val="5E7280"/>
-                </a:solidFill>
-                <a:latin typeface="Poppins" pitchFamily="34" charset="0"/>
-                <a:ea typeface="Poppins" pitchFamily="34" charset="-122"/>
-                <a:cs typeface="Poppins" pitchFamily="34" charset="-120"/>
-              </a:rPr>
-              <a:t>Phuong Ho</a:t>
-            </a:r>
-            <a:endParaRPr lang="en-US" sz="800" dirty="0"/>
-          </a:p>
-        </p:txBody>
-      </p:sp>
-      <p:sp>
-        <p:nvSpPr>
-          <p:cNvPr id="98" name="Shape 96"/>
-          <p:cNvSpPr/>
-          <p:nvPr/>
-        </p:nvSpPr>
-        <p:spPr>
-          <a:xfrm>
-            <a:off x="2468880" y="5425135"/>
-            <a:ext cx="2377440" cy="59436"/>
-          </a:xfrm>
-          <a:prstGeom prst="roundRect">
-            <a:avLst>
-              <a:gd name="adj" fmla="val 49231"/>
-            </a:avLst>
-          </a:prstGeom>
-          <a:solidFill>
-            <a:srgbClr val="E2EAEE"/>
-          </a:solidFill>
-          <a:ln/>
-        </p:spPr>
-      </p:sp>
-      <p:sp>
-        <p:nvSpPr>
-          <p:cNvPr id="99" name="Text 97"/>
-          <p:cNvSpPr txBox="1"/>
-          <p:nvPr/>
-        </p:nvSpPr>
-        <p:spPr>
-          <a:xfrm>
-            <a:off x="5029200" y="5358384"/>
-            <a:ext cx="822960" cy="192024"/>
-          </a:xfrm>
-          <a:prstGeom prst="rect">
-            <a:avLst/>
-          </a:prstGeom>
-          <a:noFill/>
-          <a:ln/>
-        </p:spPr>
-        <p:txBody>
-          <a:bodyPr wrap="square" lIns="0" tIns="0" rIns="0" bIns="0" rtlCol="0" anchor="ctr"/>
-          <a:lstStyle/>
-          <a:p>
-            <a:pPr algn="r" indent="0" marL="0">
-              <a:buNone/>
-            </a:pPr>
-            <a:r>
-              <a:rPr lang="en-US" sz="800" dirty="0">
-                <a:solidFill>
-                  <a:srgbClr val="8FA1AC"/>
-                </a:solidFill>
-                <a:latin typeface="Poppins" pitchFamily="34" charset="0"/>
-                <a:ea typeface="Poppins" pitchFamily="34" charset="-122"/>
-                <a:cs typeface="Poppins" pitchFamily="34" charset="-120"/>
-              </a:rPr>
-              <a:t>—</a:t>
-            </a:r>
-            <a:endParaRPr lang="en-US" sz="800" dirty="0"/>
-          </a:p>
-        </p:txBody>
-      </p:sp>
-      <p:sp>
-        <p:nvSpPr>
-          <p:cNvPr id="100" name="Text 98"/>
-          <p:cNvSpPr txBox="1"/>
-          <p:nvPr/>
-        </p:nvSpPr>
-        <p:spPr>
-          <a:xfrm>
-            <a:off x="5943600" y="5358384"/>
-            <a:ext cx="822960" cy="192024"/>
-          </a:xfrm>
-          <a:prstGeom prst="rect">
-            <a:avLst/>
-          </a:prstGeom>
-          <a:noFill/>
-          <a:ln/>
-        </p:spPr>
-        <p:txBody>
-          <a:bodyPr wrap="square" lIns="0" tIns="0" rIns="0" bIns="0" rtlCol="0" anchor="ctr"/>
-          <a:lstStyle/>
-          <a:p>
-            <a:pPr algn="r" indent="0" marL="0">
-              <a:buNone/>
-            </a:pPr>
-            <a:r>
-              <a:rPr lang="en-US" sz="600" dirty="0">
-                <a:solidFill>
-                  <a:srgbClr val="8FA1AC"/>
-                </a:solidFill>
-                <a:latin typeface="Poppins" pitchFamily="34" charset="0"/>
-                <a:ea typeface="Poppins" pitchFamily="34" charset="-122"/>
-                <a:cs typeface="Poppins" pitchFamily="34" charset="-120"/>
-              </a:rPr>
-              <a:t>no time logged</a:t>
-            </a:r>
-            <a:endParaRPr lang="en-US" sz="600" dirty="0"/>
-          </a:p>
-        </p:txBody>
-      </p:sp>
-      <p:sp>
-        <p:nvSpPr>
-          <p:cNvPr id="101" name="Text 99"/>
           <p:cNvSpPr txBox="1"/>
           <p:nvPr/>
         </p:nvSpPr>
@@ -49117,7 +48839,7 @@
                 <a:ea typeface="Poppins" pitchFamily="34" charset="-122"/>
                 <a:cs typeface="Poppins" pitchFamily="34" charset="-120"/>
               </a:rPr>
-              <a:t>Available staff = the 13 Professional Services people assigned to PS-pipeline tickets open now or closed this week, at a 38h standard week. Argenis Rafael Guevara and Isaac Mercado carry PS-pipeline tickets but are not Professional Services staff — excluded from the capacity base.</a:t>
+              <a:t>Available staff = the 11 Professional Services people assigned to PS-pipeline tickets open now or closed this week, at a 38h standard week. Anton Lopez, Jasmine Hikuroa, Bjorn Magabo and Phuong Ho carry PS-pipeline tickets but are not Professional Services staff — excluded from the capacity base.</a:t>
             </a:r>
             <a:endParaRPr lang="en-US" sz="580" dirty="0"/>
           </a:p>
@@ -49125,7 +48847,7 @@
       </p:sp>
       <p:sp>
         <p:nvSpPr>
-          <p:cNvPr id="102" name="Shape 100"/>
+          <p:cNvPr id="94" name="Shape 92"/>
           <p:cNvSpPr/>
           <p:nvPr/>
         </p:nvSpPr>
@@ -49154,7 +48876,7 @@
       </p:sp>
       <p:sp>
         <p:nvSpPr>
-          <p:cNvPr id="103" name="Text 101"/>
+          <p:cNvPr id="95" name="Text 93"/>
           <p:cNvSpPr txBox="1"/>
           <p:nvPr/>
         </p:nvSpPr>
@@ -49207,7 +48929,7 @@
       </p:sp>
       <p:sp>
         <p:nvSpPr>
-          <p:cNvPr id="104" name="Text 102"/>
+          <p:cNvPr id="96" name="Text 94"/>
           <p:cNvSpPr txBox="1"/>
           <p:nvPr/>
         </p:nvSpPr>
@@ -49246,7 +48968,7 @@
       </p:sp>
       <p:sp>
         <p:nvSpPr>
-          <p:cNvPr id="105" name="Text 103"/>
+          <p:cNvPr id="97" name="Text 95"/>
           <p:cNvSpPr txBox="1"/>
           <p:nvPr/>
         </p:nvSpPr>
@@ -49285,7 +49007,7 @@
       </p:sp>
       <p:sp>
         <p:nvSpPr>
-          <p:cNvPr id="106" name="Text 104"/>
+          <p:cNvPr id="98" name="Text 96"/>
           <p:cNvSpPr txBox="1"/>
           <p:nvPr/>
         </p:nvSpPr>
@@ -49324,7 +49046,7 @@
       </p:sp>
       <p:sp>
         <p:nvSpPr>
-          <p:cNvPr id="107" name="Text 105"/>
+          <p:cNvPr id="99" name="Text 97"/>
           <p:cNvSpPr txBox="1"/>
           <p:nvPr/>
         </p:nvSpPr>
@@ -49363,7 +49085,7 @@
       </p:sp>
       <p:sp>
         <p:nvSpPr>
-          <p:cNvPr id="108" name="Shape 106"/>
+          <p:cNvPr id="100" name="Shape 98"/>
           <p:cNvSpPr/>
           <p:nvPr/>
         </p:nvSpPr>
@@ -49385,7 +49107,7 @@
       </p:sp>
       <p:sp>
         <p:nvSpPr>
-          <p:cNvPr id="109" name="Shape 107"/>
+          <p:cNvPr id="101" name="Shape 99"/>
           <p:cNvSpPr/>
           <p:nvPr/>
         </p:nvSpPr>
@@ -49407,7 +49129,7 @@
       </p:sp>
       <p:sp>
         <p:nvSpPr>
-          <p:cNvPr id="110" name="Text 108"/>
+          <p:cNvPr id="102" name="Text 100"/>
           <p:cNvSpPr txBox="1"/>
           <p:nvPr/>
         </p:nvSpPr>
@@ -49446,7 +49168,7 @@
       </p:sp>
       <p:sp>
         <p:nvSpPr>
-          <p:cNvPr id="111" name="Text 109"/>
+          <p:cNvPr id="103" name="Text 101"/>
           <p:cNvSpPr txBox="1"/>
           <p:nvPr/>
         </p:nvSpPr>
@@ -49485,7 +49207,7 @@
       </p:sp>
       <p:sp>
         <p:nvSpPr>
-          <p:cNvPr id="112" name="Text 110"/>
+          <p:cNvPr id="104" name="Text 102"/>
           <p:cNvSpPr txBox="1"/>
           <p:nvPr/>
         </p:nvSpPr>
@@ -49524,7 +49246,7 @@
       </p:sp>
       <p:sp>
         <p:nvSpPr>
-          <p:cNvPr id="113" name="Shape 111"/>
+          <p:cNvPr id="105" name="Shape 103"/>
           <p:cNvSpPr/>
           <p:nvPr/>
         </p:nvSpPr>
@@ -49546,7 +49268,7 @@
       </p:sp>
       <p:sp>
         <p:nvSpPr>
-          <p:cNvPr id="114" name="Shape 112"/>
+          <p:cNvPr id="106" name="Shape 104"/>
           <p:cNvSpPr/>
           <p:nvPr/>
         </p:nvSpPr>
@@ -49568,7 +49290,7 @@
       </p:sp>
       <p:sp>
         <p:nvSpPr>
-          <p:cNvPr id="115" name="Text 113"/>
+          <p:cNvPr id="107" name="Text 105"/>
           <p:cNvSpPr txBox="1"/>
           <p:nvPr/>
         </p:nvSpPr>
@@ -49607,7 +49329,7 @@
       </p:sp>
       <p:sp>
         <p:nvSpPr>
-          <p:cNvPr id="116" name="Text 114"/>
+          <p:cNvPr id="108" name="Text 106"/>
           <p:cNvSpPr txBox="1"/>
           <p:nvPr/>
         </p:nvSpPr>
@@ -49646,7 +49368,7 @@
       </p:sp>
       <p:sp>
         <p:nvSpPr>
-          <p:cNvPr id="117" name="Text 115"/>
+          <p:cNvPr id="109" name="Text 107"/>
           <p:cNvSpPr txBox="1"/>
           <p:nvPr/>
         </p:nvSpPr>
@@ -49685,7 +49407,7 @@
       </p:sp>
       <p:sp>
         <p:nvSpPr>
-          <p:cNvPr id="118" name="Shape 116"/>
+          <p:cNvPr id="110" name="Shape 108"/>
           <p:cNvSpPr/>
           <p:nvPr/>
         </p:nvSpPr>
@@ -49707,7 +49429,7 @@
       </p:sp>
       <p:sp>
         <p:nvSpPr>
-          <p:cNvPr id="119" name="Text 117"/>
+          <p:cNvPr id="111" name="Text 109"/>
           <p:cNvSpPr txBox="1"/>
           <p:nvPr/>
         </p:nvSpPr>
@@ -49746,7 +49468,7 @@
       </p:sp>
       <p:sp>
         <p:nvSpPr>
-          <p:cNvPr id="120" name="Text 118"/>
+          <p:cNvPr id="112" name="Text 110"/>
           <p:cNvSpPr txBox="1"/>
           <p:nvPr/>
         </p:nvSpPr>
@@ -49785,7 +49507,7 @@
       </p:sp>
       <p:sp>
         <p:nvSpPr>
-          <p:cNvPr id="121" name="Text 119"/>
+          <p:cNvPr id="113" name="Text 111"/>
           <p:cNvSpPr txBox="1"/>
           <p:nvPr/>
         </p:nvSpPr>
@@ -49824,7 +49546,7 @@
       </p:sp>
       <p:sp>
         <p:nvSpPr>
-          <p:cNvPr id="122" name="Shape 120"/>
+          <p:cNvPr id="114" name="Shape 112"/>
           <p:cNvSpPr/>
           <p:nvPr/>
         </p:nvSpPr>
@@ -49846,7 +49568,7 @@
       </p:sp>
       <p:sp>
         <p:nvSpPr>
-          <p:cNvPr id="123" name="Text 121"/>
+          <p:cNvPr id="115" name="Text 113"/>
           <p:cNvSpPr txBox="1"/>
           <p:nvPr/>
         </p:nvSpPr>
@@ -49885,7 +49607,7 @@
       </p:sp>
       <p:sp>
         <p:nvSpPr>
-          <p:cNvPr id="124" name="Text 122"/>
+          <p:cNvPr id="116" name="Text 114"/>
           <p:cNvSpPr txBox="1"/>
           <p:nvPr/>
         </p:nvSpPr>
@@ -49924,7 +49646,7 @@
       </p:sp>
       <p:sp>
         <p:nvSpPr>
-          <p:cNvPr id="125" name="Text 123"/>
+          <p:cNvPr id="117" name="Text 115"/>
           <p:cNvSpPr txBox="1"/>
           <p:nvPr/>
         </p:nvSpPr>
@@ -49963,7 +49685,7 @@
       </p:sp>
       <p:sp>
         <p:nvSpPr>
-          <p:cNvPr id="126" name="Shape 124"/>
+          <p:cNvPr id="118" name="Shape 116"/>
           <p:cNvSpPr/>
           <p:nvPr/>
         </p:nvSpPr>
@@ -49985,7 +49707,7 @@
       </p:sp>
       <p:sp>
         <p:nvSpPr>
-          <p:cNvPr id="127" name="Text 125"/>
+          <p:cNvPr id="119" name="Text 117"/>
           <p:cNvSpPr txBox="1"/>
           <p:nvPr/>
         </p:nvSpPr>
@@ -50024,7 +49746,7 @@
       </p:sp>
       <p:sp>
         <p:nvSpPr>
-          <p:cNvPr id="128" name="Text 126"/>
+          <p:cNvPr id="120" name="Text 118"/>
           <p:cNvSpPr txBox="1"/>
           <p:nvPr/>
         </p:nvSpPr>
@@ -50063,7 +49785,7 @@
       </p:sp>
       <p:sp>
         <p:nvSpPr>
-          <p:cNvPr id="129" name="Shape 127"/>
+          <p:cNvPr id="121" name="Shape 119"/>
           <p:cNvSpPr/>
           <p:nvPr/>
         </p:nvSpPr>
@@ -50092,7 +49814,7 @@
       </p:sp>
       <p:sp>
         <p:nvSpPr>
-          <p:cNvPr id="130" name="Text 128"/>
+          <p:cNvPr id="122" name="Text 120"/>
           <p:cNvSpPr txBox="1"/>
           <p:nvPr/>
         </p:nvSpPr>
@@ -50131,7 +49853,7 @@
       </p:sp>
       <p:sp>
         <p:nvSpPr>
-          <p:cNvPr id="131" name="Text 129"/>
+          <p:cNvPr id="123" name="Text 121"/>
           <p:cNvSpPr txBox="1"/>
           <p:nvPr/>
         </p:nvSpPr>
@@ -50176,7 +49898,7 @@
                 <a:ea typeface="Poppins" pitchFamily="34" charset="-122"/>
                 <a:cs typeface="Poppins" pitchFamily="34" charset="-120"/>
               </a:rPr>
-              <a:t>6.7% billable utilisation is a logging number, not a delivery number. </a:t>
+              <a:t>7.9% billable utilisation is a logging number, not a delivery number. </a:t>
             </a:r>
             <a:pPr indent="0" marL="0">
               <a:spcAft>
@@ -50193,7 +49915,7 @@
                 <a:ea typeface="Poppins" pitchFamily="34" charset="-122"/>
                 <a:cs typeface="Poppins" pitchFamily="34" charset="-120"/>
               </a:rPr>
-              <a:t>33.01h landed against 494h of capacity, but only 13% of the week's 132 PS items carry hours.</a:t>
+              <a:t>33.01h landed against 418h of capacity, but only 13% of the week's 132 PS items carry hours.</a:t>
             </a:r>
             <a:endParaRPr lang="en-US" sz="900" dirty="0"/>
           </a:p>
@@ -50241,7 +49963,7 @@
                 <a:ea typeface="Poppins" pitchFamily="34" charset="-122"/>
                 <a:cs typeface="Poppins" pitchFamily="34" charset="-120"/>
               </a:rPr>
-              <a:t>Katherine Fenwick 38.2% and Rhys Woolcock 36.4%; the other 7 PS members logged nothing at all.</a:t>
+              <a:t>Katherine Fenwick 38.2% and Rhys Woolcock 36.4%; the other 5 PS members logged nothing at all.</a:t>
             </a:r>
             <a:endParaRPr lang="en-US" sz="900" dirty="0"/>
           </a:p>
@@ -50297,7 +50019,7 @@
       </p:sp>
       <p:sp>
         <p:nvSpPr>
-          <p:cNvPr id="132" name="Text 130"/>
+          <p:cNvPr id="124" name="Text 122"/>
           <p:cNvSpPr txBox="1"/>
           <p:nvPr/>
         </p:nvSpPr>
@@ -50336,7 +50058,7 @@
       </p:sp>
       <p:sp>
         <p:nvSpPr>
-          <p:cNvPr id="133" name="Shape 131"/>
+          <p:cNvPr id="125" name="Shape 123"/>
           <p:cNvSpPr/>
           <p:nvPr/>
         </p:nvSpPr>
@@ -50358,7 +50080,7 @@
       </p:sp>
       <p:sp>
         <p:nvSpPr>
-          <p:cNvPr id="134" name="Text 132"/>
+          <p:cNvPr id="126" name="Text 124"/>
           <p:cNvSpPr txBox="1"/>
           <p:nvPr/>
         </p:nvSpPr>

--- a/exec-deck/output/H&L Weekly Update - WC 14 Sep 2026.pptx
+++ b/exec-deck/output/H&L Weekly Update - WC 14 Sep 2026.pptx
@@ -46275,7 +46275,7 @@
                 <a:ea typeface="Poppins" pitchFamily="34" charset="-122"/>
                 <a:cs typeface="Poppins" pitchFamily="34" charset="-120"/>
               </a:rPr>
-              <a:t>7.9%</a:t>
+              <a:t>4.7%</a:t>
             </a:r>
             <a:endParaRPr lang="en-US" sz="2600" dirty="0"/>
           </a:p>
@@ -46314,7 +46314,7 @@
                 <a:ea typeface="Poppins" pitchFamily="34" charset="-122"/>
                 <a:cs typeface="Poppins" pitchFamily="34" charset="-120"/>
               </a:rPr>
-              <a:t>33.01h billed of 418h available · target 80%</a:t>
+              <a:t>16.07h billed of 342h available · target 80%</a:t>
             </a:r>
             <a:endParaRPr lang="en-US" sz="780" dirty="0"/>
           </a:p>
@@ -46421,7 +46421,7 @@
                 <a:ea typeface="Poppins" pitchFamily="34" charset="-122"/>
                 <a:cs typeface="Poppins" pitchFamily="34" charset="-120"/>
               </a:rPr>
-              <a:t>418h</a:t>
+              <a:t>342h</a:t>
             </a:r>
             <a:endParaRPr lang="en-US" sz="2600" dirty="0"/>
           </a:p>
@@ -46460,7 +46460,7 @@
                 <a:ea typeface="Poppins" pitchFamily="34" charset="-122"/>
                 <a:cs typeface="Poppins" pitchFamily="34" charset="-120"/>
               </a:rPr>
-              <a:t>11 people assigned to PS-pipeline tickets × 38h standard week</a:t>
+              <a:t>9 people assigned to PS-pipeline tickets × 38h standard week</a:t>
             </a:r>
             <a:endParaRPr lang="en-US" sz="780" dirty="0"/>
           </a:p>
@@ -46567,7 +46567,7 @@
                 <a:ea typeface="Poppins" pitchFamily="34" charset="-122"/>
                 <a:cs typeface="Poppins" pitchFamily="34" charset="-120"/>
               </a:rPr>
-              <a:t>13%</a:t>
+              <a:t>10%</a:t>
             </a:r>
             <a:endParaRPr lang="en-US" sz="2600" dirty="0"/>
           </a:p>
@@ -46606,7 +46606,7 @@
                 <a:ea typeface="Poppins" pitchFamily="34" charset="-122"/>
                 <a:cs typeface="Poppins" pitchFamily="34" charset="-120"/>
               </a:rPr>
-              <a:t>17 of 132 PS items raised this week carry hours — utilisation reads low because logging is ramping, not because delivery stopped</a:t>
+              <a:t>13 of 132 PS items raised this week carry hours — utilisation reads low because logging is ramping, not because delivery stopped</a:t>
             </a:r>
             <a:endParaRPr lang="en-US" sz="780" dirty="0"/>
           </a:p>
@@ -46898,7 +46898,7 @@
         <p:spPr>
           <a:xfrm>
             <a:off x="2944368" y="3017520"/>
-            <a:ext cx="5486" cy="2487168"/>
+            <a:ext cx="5486" cy="2139696"/>
           </a:xfrm>
           <a:prstGeom prst="rect">
             <a:avLst/>
@@ -46957,7 +46957,7 @@
         <p:spPr>
           <a:xfrm>
             <a:off x="3419856" y="3017520"/>
-            <a:ext cx="5486" cy="2487168"/>
+            <a:ext cx="5486" cy="2139696"/>
           </a:xfrm>
           <a:prstGeom prst="rect">
             <a:avLst/>
@@ -47016,7 +47016,7 @@
         <p:spPr>
           <a:xfrm>
             <a:off x="3895344" y="3017520"/>
-            <a:ext cx="5486" cy="2487168"/>
+            <a:ext cx="5486" cy="2139696"/>
           </a:xfrm>
           <a:prstGeom prst="rect">
             <a:avLst/>
@@ -47075,7 +47075,7 @@
         <p:spPr>
           <a:xfrm>
             <a:off x="4370832" y="3017520"/>
-            <a:ext cx="5486" cy="2487168"/>
+            <a:ext cx="5486" cy="2139696"/>
           </a:xfrm>
           <a:prstGeom prst="rect">
             <a:avLst/>
@@ -47134,7 +47134,7 @@
         <p:spPr>
           <a:xfrm>
             <a:off x="4846320" y="3017520"/>
-            <a:ext cx="5486" cy="2487168"/>
+            <a:ext cx="5486" cy="2139696"/>
           </a:xfrm>
           <a:prstGeom prst="rect">
             <a:avLst/>
@@ -47154,7 +47154,7 @@
         <p:spPr>
           <a:xfrm>
             <a:off x="640080" y="3054096"/>
-            <a:ext cx="1783080" cy="226106"/>
+            <a:ext cx="1783080" cy="237744"/>
           </a:xfrm>
           <a:prstGeom prst="rect">
             <a:avLst/>
@@ -47178,7 +47178,7 @@
                 <a:ea typeface="Poppins" pitchFamily="34" charset="-122"/>
                 <a:cs typeface="Poppins" pitchFamily="34" charset="-120"/>
               </a:rPr>
-              <a:t>Katherine Fenwick</a:t>
+              <a:t>Rhys Woolcock</a:t>
             </a:r>
             <a:endParaRPr lang="en-US" sz="800" dirty="0"/>
           </a:p>
@@ -47192,7 +47192,7 @@
         </p:nvSpPr>
         <p:spPr>
           <a:xfrm>
-            <a:off x="2468880" y="3137431"/>
+            <a:off x="2468880" y="3143250"/>
             <a:ext cx="2377440" cy="59436"/>
           </a:xfrm>
           <a:prstGeom prst="roundRect">
@@ -47214,8 +47214,8 @@
         </p:nvSpPr>
         <p:spPr>
           <a:xfrm>
-            <a:off x="2468880" y="3137431"/>
-            <a:ext cx="908182" cy="59436"/>
+            <a:off x="2468880" y="3143250"/>
+            <a:ext cx="865388" cy="59436"/>
           </a:xfrm>
           <a:prstGeom prst="roundRect">
             <a:avLst>
@@ -47237,7 +47237,7 @@
         <p:spPr>
           <a:xfrm>
             <a:off x="5029200" y="3054096"/>
-            <a:ext cx="822960" cy="226106"/>
+            <a:ext cx="822960" cy="237744"/>
           </a:xfrm>
           <a:prstGeom prst="rect">
             <a:avLst/>
@@ -47261,7 +47261,7 @@
                 <a:ea typeface="Poppins" pitchFamily="34" charset="-122"/>
                 <a:cs typeface="Poppins" pitchFamily="34" charset="-120"/>
               </a:rPr>
-              <a:t>14.50h</a:t>
+              <a:t>13.82h</a:t>
             </a:r>
             <a:endParaRPr lang="en-US" sz="800" dirty="0"/>
           </a:p>
@@ -47276,7 +47276,7 @@
         <p:spPr>
           <a:xfrm>
             <a:off x="5943600" y="3054096"/>
-            <a:ext cx="822960" cy="226106"/>
+            <a:ext cx="822960" cy="237744"/>
           </a:xfrm>
           <a:prstGeom prst="rect">
             <a:avLst/>
@@ -47300,7 +47300,7 @@
                 <a:ea typeface="Poppins" pitchFamily="34" charset="-122"/>
                 <a:cs typeface="Poppins" pitchFamily="34" charset="-120"/>
               </a:rPr>
-              <a:t>38.2%</a:t>
+              <a:t>36.4%</a:t>
             </a:r>
             <a:endParaRPr lang="en-US" sz="800" dirty="0"/>
           </a:p>
@@ -47314,8 +47314,8 @@
         </p:nvSpPr>
         <p:spPr>
           <a:xfrm>
-            <a:off x="640080" y="3280202"/>
-            <a:ext cx="1783080" cy="226106"/>
+            <a:off x="640080" y="3291840"/>
+            <a:ext cx="1783080" cy="237744"/>
           </a:xfrm>
           <a:prstGeom prst="rect">
             <a:avLst/>
@@ -47339,7 +47339,7 @@
                 <a:ea typeface="Poppins" pitchFamily="34" charset="-122"/>
                 <a:cs typeface="Poppins" pitchFamily="34" charset="-120"/>
               </a:rPr>
-              <a:t>Rhys Woolcock</a:t>
+              <a:t>Gregory St Clare-Hobbs</a:t>
             </a:r>
             <a:endParaRPr lang="en-US" sz="800" dirty="0"/>
           </a:p>
@@ -47353,7 +47353,7 @@
         </p:nvSpPr>
         <p:spPr>
           <a:xfrm>
-            <a:off x="2468880" y="3363537"/>
+            <a:off x="2468880" y="3380994"/>
             <a:ext cx="2377440" cy="59436"/>
           </a:xfrm>
           <a:prstGeom prst="roundRect">
@@ -47375,8 +47375,8 @@
         </p:nvSpPr>
         <p:spPr>
           <a:xfrm>
-            <a:off x="2468880" y="3363537"/>
-            <a:ext cx="865388" cy="59436"/>
+            <a:off x="2468880" y="3380994"/>
+            <a:ext cx="92720" cy="59436"/>
           </a:xfrm>
           <a:prstGeom prst="roundRect">
             <a:avLst>
@@ -47397,8 +47397,8 @@
         </p:nvSpPr>
         <p:spPr>
           <a:xfrm>
-            <a:off x="5029200" y="3280202"/>
-            <a:ext cx="822960" cy="226106"/>
+            <a:off x="5029200" y="3291840"/>
+            <a:ext cx="822960" cy="237744"/>
           </a:xfrm>
           <a:prstGeom prst="rect">
             <a:avLst/>
@@ -47422,7 +47422,7 @@
                 <a:ea typeface="Poppins" pitchFamily="34" charset="-122"/>
                 <a:cs typeface="Poppins" pitchFamily="34" charset="-120"/>
               </a:rPr>
-              <a:t>13.82h</a:t>
+              <a:t>1.50h</a:t>
             </a:r>
             <a:endParaRPr lang="en-US" sz="800" dirty="0"/>
           </a:p>
@@ -47436,8 +47436,8 @@
         </p:nvSpPr>
         <p:spPr>
           <a:xfrm>
-            <a:off x="5943600" y="3280202"/>
-            <a:ext cx="822960" cy="226106"/>
+            <a:off x="5943600" y="3291840"/>
+            <a:ext cx="822960" cy="237744"/>
           </a:xfrm>
           <a:prstGeom prst="rect">
             <a:avLst/>
@@ -47461,7 +47461,7 @@
                 <a:ea typeface="Poppins" pitchFamily="34" charset="-122"/>
                 <a:cs typeface="Poppins" pitchFamily="34" charset="-120"/>
               </a:rPr>
-              <a:t>36.4%</a:t>
+              <a:t>3.9%</a:t>
             </a:r>
             <a:endParaRPr lang="en-US" sz="800" dirty="0"/>
           </a:p>
@@ -47475,8 +47475,8 @@
         </p:nvSpPr>
         <p:spPr>
           <a:xfrm>
-            <a:off x="640080" y="3506308"/>
-            <a:ext cx="1783080" cy="226106"/>
+            <a:off x="640080" y="3529584"/>
+            <a:ext cx="1783080" cy="237744"/>
           </a:xfrm>
           <a:prstGeom prst="rect">
             <a:avLst/>
@@ -47500,7 +47500,7 @@
                 <a:ea typeface="Poppins" pitchFamily="34" charset="-122"/>
                 <a:cs typeface="Poppins" pitchFamily="34" charset="-120"/>
               </a:rPr>
-              <a:t>Yeran Hettiarachchy</a:t>
+              <a:t>Isayah Kuhlmann</a:t>
             </a:r>
             <a:endParaRPr lang="en-US" sz="800" dirty="0"/>
           </a:p>
@@ -47514,7 +47514,7 @@
         </p:nvSpPr>
         <p:spPr>
           <a:xfrm>
-            <a:off x="2468880" y="3589643"/>
+            <a:off x="2468880" y="3618738"/>
             <a:ext cx="2377440" cy="59436"/>
           </a:xfrm>
           <a:prstGeom prst="roundRect">
@@ -47536,8 +47536,147 @@
         </p:nvSpPr>
         <p:spPr>
           <a:xfrm>
-            <a:off x="2468880" y="3589643"/>
-            <a:ext cx="152156" cy="59436"/>
+            <a:off x="2468880" y="3618738"/>
+            <a:ext cx="45720" cy="59436"/>
+          </a:xfrm>
+          <a:prstGeom prst="roundRect">
+            <a:avLst>
+              <a:gd name="adj" fmla="val 64000"/>
+            </a:avLst>
+          </a:prstGeom>
+          <a:solidFill>
+            <a:srgbClr val="2C8394"/>
+          </a:solidFill>
+          <a:ln/>
+        </p:spPr>
+      </p:sp>
+      <p:sp>
+        <p:nvSpPr>
+          <p:cNvPr id="56" name="Text 54"/>
+          <p:cNvSpPr txBox="1"/>
+          <p:nvPr/>
+        </p:nvSpPr>
+        <p:spPr>
+          <a:xfrm>
+            <a:off x="5029200" y="3529584"/>
+            <a:ext cx="822960" cy="237744"/>
+          </a:xfrm>
+          <a:prstGeom prst="rect">
+            <a:avLst/>
+          </a:prstGeom>
+          <a:noFill/>
+          <a:ln/>
+        </p:spPr>
+        <p:txBody>
+          <a:bodyPr wrap="square" lIns="0" tIns="0" rIns="0" bIns="0" rtlCol="0" anchor="ctr"/>
+          <a:lstStyle/>
+          <a:p>
+            <a:pPr algn="r" indent="0" marL="0">
+              <a:buNone/>
+            </a:pPr>
+            <a:r>
+              <a:rPr lang="en-US" sz="800" b="1" dirty="0">
+                <a:solidFill>
+                  <a:srgbClr val="2C8394"/>
+                </a:solidFill>
+                <a:latin typeface="Poppins" pitchFamily="34" charset="0"/>
+                <a:ea typeface="Poppins" pitchFamily="34" charset="-122"/>
+                <a:cs typeface="Poppins" pitchFamily="34" charset="-120"/>
+              </a:rPr>
+              <a:t>0.50h</a:t>
+            </a:r>
+            <a:endParaRPr lang="en-US" sz="800" dirty="0"/>
+          </a:p>
+        </p:txBody>
+      </p:sp>
+      <p:sp>
+        <p:nvSpPr>
+          <p:cNvPr id="57" name="Text 55"/>
+          <p:cNvSpPr txBox="1"/>
+          <p:nvPr/>
+        </p:nvSpPr>
+        <p:spPr>
+          <a:xfrm>
+            <a:off x="5943600" y="3529584"/>
+            <a:ext cx="822960" cy="237744"/>
+          </a:xfrm>
+          <a:prstGeom prst="rect">
+            <a:avLst/>
+          </a:prstGeom>
+          <a:noFill/>
+          <a:ln/>
+        </p:spPr>
+        <p:txBody>
+          <a:bodyPr wrap="square" lIns="0" tIns="0" rIns="0" bIns="0" rtlCol="0" anchor="ctr"/>
+          <a:lstStyle/>
+          <a:p>
+            <a:pPr algn="r" indent="0" marL="0">
+              <a:buNone/>
+            </a:pPr>
+            <a:r>
+              <a:rPr lang="en-US" sz="800" b="1" dirty="0">
+                <a:solidFill>
+                  <a:srgbClr val="12293A"/>
+                </a:solidFill>
+                <a:latin typeface="Poppins" pitchFamily="34" charset="0"/>
+                <a:ea typeface="Poppins" pitchFamily="34" charset="-122"/>
+                <a:cs typeface="Poppins" pitchFamily="34" charset="-120"/>
+              </a:rPr>
+              <a:t>1.3%</a:t>
+            </a:r>
+            <a:endParaRPr lang="en-US" sz="800" dirty="0"/>
+          </a:p>
+        </p:txBody>
+      </p:sp>
+      <p:sp>
+        <p:nvSpPr>
+          <p:cNvPr id="58" name="Text 56"/>
+          <p:cNvSpPr txBox="1"/>
+          <p:nvPr/>
+        </p:nvSpPr>
+        <p:spPr>
+          <a:xfrm>
+            <a:off x="640080" y="3767328"/>
+            <a:ext cx="1783080" cy="237744"/>
+          </a:xfrm>
+          <a:prstGeom prst="rect">
+            <a:avLst/>
+          </a:prstGeom>
+          <a:noFill/>
+          <a:ln/>
+        </p:spPr>
+        <p:txBody>
+          <a:bodyPr wrap="square" lIns="0" tIns="0" rIns="0" bIns="0" rtlCol="0" anchor="ctr"/>
+          <a:lstStyle/>
+          <a:p>
+            <a:pPr indent="0" marL="0">
+              <a:buNone/>
+            </a:pPr>
+            <a:r>
+              <a:rPr lang="en-US" sz="800" b="1" dirty="0">
+                <a:solidFill>
+                  <a:srgbClr val="12293A"/>
+                </a:solidFill>
+                <a:latin typeface="Poppins" pitchFamily="34" charset="0"/>
+                <a:ea typeface="Poppins" pitchFamily="34" charset="-122"/>
+                <a:cs typeface="Poppins" pitchFamily="34" charset="-120"/>
+              </a:rPr>
+              <a:t>Joshua Casey</a:t>
+            </a:r>
+            <a:endParaRPr lang="en-US" sz="800" dirty="0"/>
+          </a:p>
+        </p:txBody>
+      </p:sp>
+      <p:sp>
+        <p:nvSpPr>
+          <p:cNvPr id="59" name="Shape 57"/>
+          <p:cNvSpPr/>
+          <p:nvPr/>
+        </p:nvSpPr>
+        <p:spPr>
+          <a:xfrm>
+            <a:off x="2468880" y="3856482"/>
+            <a:ext cx="2377440" cy="59436"/>
           </a:xfrm>
           <a:prstGeom prst="roundRect">
             <a:avLst>
@@ -47545,6 +47684,28 @@
             </a:avLst>
           </a:prstGeom>
           <a:solidFill>
+            <a:srgbClr val="E2EAEE"/>
+          </a:solidFill>
+          <a:ln/>
+        </p:spPr>
+      </p:sp>
+      <p:sp>
+        <p:nvSpPr>
+          <p:cNvPr id="60" name="Shape 58"/>
+          <p:cNvSpPr/>
+          <p:nvPr/>
+        </p:nvSpPr>
+        <p:spPr>
+          <a:xfrm>
+            <a:off x="2468880" y="3856482"/>
+            <a:ext cx="45720" cy="59436"/>
+          </a:xfrm>
+          <a:prstGeom prst="roundRect">
+            <a:avLst>
+              <a:gd name="adj" fmla="val 64000"/>
+            </a:avLst>
+          </a:prstGeom>
+          <a:solidFill>
             <a:srgbClr val="2C8394"/>
           </a:solidFill>
           <a:ln/>
@@ -47552,14 +47713,14 @@
       </p:sp>
       <p:sp>
         <p:nvSpPr>
-          <p:cNvPr id="56" name="Text 54"/>
-          <p:cNvSpPr txBox="1"/>
-          <p:nvPr/>
-        </p:nvSpPr>
-        <p:spPr>
-          <a:xfrm>
-            <a:off x="5029200" y="3506308"/>
-            <a:ext cx="822960" cy="226106"/>
+          <p:cNvPr id="61" name="Text 59"/>
+          <p:cNvSpPr txBox="1"/>
+          <p:nvPr/>
+        </p:nvSpPr>
+        <p:spPr>
+          <a:xfrm>
+            <a:off x="5029200" y="3767328"/>
+            <a:ext cx="822960" cy="237744"/>
           </a:xfrm>
           <a:prstGeom prst="rect">
             <a:avLst/>
@@ -47583,7 +47744,7 @@
                 <a:ea typeface="Poppins" pitchFamily="34" charset="-122"/>
                 <a:cs typeface="Poppins" pitchFamily="34" charset="-120"/>
               </a:rPr>
-              <a:t>2.44h</a:t>
+              <a:t>0.25h</a:t>
             </a:r>
             <a:endParaRPr lang="en-US" sz="800" dirty="0"/>
           </a:p>
@@ -47591,14 +47752,14 @@
       </p:sp>
       <p:sp>
         <p:nvSpPr>
-          <p:cNvPr id="57" name="Text 55"/>
-          <p:cNvSpPr txBox="1"/>
-          <p:nvPr/>
-        </p:nvSpPr>
-        <p:spPr>
-          <a:xfrm>
-            <a:off x="5943600" y="3506308"/>
-            <a:ext cx="822960" cy="226106"/>
+          <p:cNvPr id="62" name="Text 60"/>
+          <p:cNvSpPr txBox="1"/>
+          <p:nvPr/>
+        </p:nvSpPr>
+        <p:spPr>
+          <a:xfrm>
+            <a:off x="5943600" y="3767328"/>
+            <a:ext cx="822960" cy="237744"/>
           </a:xfrm>
           <a:prstGeom prst="rect">
             <a:avLst/>
@@ -47622,7 +47783,7 @@
                 <a:ea typeface="Poppins" pitchFamily="34" charset="-122"/>
                 <a:cs typeface="Poppins" pitchFamily="34" charset="-120"/>
               </a:rPr>
-              <a:t>6.4%</a:t>
+              <a:t>0.7%</a:t>
             </a:r>
             <a:endParaRPr lang="en-US" sz="800" dirty="0"/>
           </a:p>
@@ -47630,38 +47791,38 @@
       </p:sp>
       <p:sp>
         <p:nvSpPr>
-          <p:cNvPr id="58" name="Text 56"/>
-          <p:cNvSpPr txBox="1"/>
-          <p:nvPr/>
-        </p:nvSpPr>
-        <p:spPr>
-          <a:xfrm>
-            <a:off x="640080" y="3732415"/>
-            <a:ext cx="1783080" cy="226106"/>
-          </a:xfrm>
-          <a:prstGeom prst="rect">
-            <a:avLst/>
-          </a:prstGeom>
-          <a:noFill/>
-          <a:ln/>
-        </p:spPr>
-        <p:txBody>
-          <a:bodyPr wrap="square" lIns="0" tIns="0" rIns="0" bIns="0" rtlCol="0" anchor="ctr"/>
-          <a:lstStyle/>
-          <a:p>
-            <a:pPr indent="0" marL="0">
-              <a:buNone/>
-            </a:pPr>
-            <a:r>
-              <a:rPr lang="en-US" sz="800" b="1" dirty="0">
-                <a:solidFill>
-                  <a:srgbClr val="12293A"/>
-                </a:solidFill>
-                <a:latin typeface="Poppins" pitchFamily="34" charset="0"/>
-                <a:ea typeface="Poppins" pitchFamily="34" charset="-122"/>
-                <a:cs typeface="Poppins" pitchFamily="34" charset="-120"/>
-              </a:rPr>
-              <a:t>Gregory St Clare-Hobbs</a:t>
+          <p:cNvPr id="63" name="Text 61"/>
+          <p:cNvSpPr txBox="1"/>
+          <p:nvPr/>
+        </p:nvSpPr>
+        <p:spPr>
+          <a:xfrm>
+            <a:off x="640080" y="4005072"/>
+            <a:ext cx="1783080" cy="237744"/>
+          </a:xfrm>
+          <a:prstGeom prst="rect">
+            <a:avLst/>
+          </a:prstGeom>
+          <a:noFill/>
+          <a:ln/>
+        </p:spPr>
+        <p:txBody>
+          <a:bodyPr wrap="square" lIns="0" tIns="0" rIns="0" bIns="0" rtlCol="0" anchor="ctr"/>
+          <a:lstStyle/>
+          <a:p>
+            <a:pPr indent="0" marL="0">
+              <a:buNone/>
+            </a:pPr>
+            <a:r>
+              <a:rPr lang="en-US" sz="800" dirty="0">
+                <a:solidFill>
+                  <a:srgbClr val="5E7280"/>
+                </a:solidFill>
+                <a:latin typeface="Poppins" pitchFamily="34" charset="0"/>
+                <a:ea typeface="Poppins" pitchFamily="34" charset="-122"/>
+                <a:cs typeface="Poppins" pitchFamily="34" charset="-120"/>
+              </a:rPr>
+              <a:t>Rodney Nolan</a:t>
             </a:r>
             <a:endParaRPr lang="en-US" sz="800" dirty="0"/>
           </a:p>
@@ -47669,13 +47830,13 @@
       </p:sp>
       <p:sp>
         <p:nvSpPr>
-          <p:cNvPr id="59" name="Shape 57"/>
-          <p:cNvSpPr/>
-          <p:nvPr/>
-        </p:nvSpPr>
-        <p:spPr>
-          <a:xfrm>
-            <a:off x="2468880" y="3815750"/>
+          <p:cNvPr id="64" name="Shape 62"/>
+          <p:cNvSpPr/>
+          <p:nvPr/>
+        </p:nvSpPr>
+        <p:spPr>
+          <a:xfrm>
+            <a:off x="2468880" y="4094226"/>
             <a:ext cx="2377440" cy="59436"/>
           </a:xfrm>
           <a:prstGeom prst="roundRect">
@@ -47691,14 +47852,131 @@
       </p:sp>
       <p:sp>
         <p:nvSpPr>
-          <p:cNvPr id="60" name="Shape 58"/>
-          <p:cNvSpPr/>
-          <p:nvPr/>
-        </p:nvSpPr>
-        <p:spPr>
-          <a:xfrm>
-            <a:off x="2468880" y="3815750"/>
-            <a:ext cx="92720" cy="59436"/>
+          <p:cNvPr id="65" name="Text 63"/>
+          <p:cNvSpPr txBox="1"/>
+          <p:nvPr/>
+        </p:nvSpPr>
+        <p:spPr>
+          <a:xfrm>
+            <a:off x="5029200" y="4005072"/>
+            <a:ext cx="822960" cy="237744"/>
+          </a:xfrm>
+          <a:prstGeom prst="rect">
+            <a:avLst/>
+          </a:prstGeom>
+          <a:noFill/>
+          <a:ln/>
+        </p:spPr>
+        <p:txBody>
+          <a:bodyPr wrap="square" lIns="0" tIns="0" rIns="0" bIns="0" rtlCol="0" anchor="ctr"/>
+          <a:lstStyle/>
+          <a:p>
+            <a:pPr algn="r" indent="0" marL="0">
+              <a:buNone/>
+            </a:pPr>
+            <a:r>
+              <a:rPr lang="en-US" sz="800" dirty="0">
+                <a:solidFill>
+                  <a:srgbClr val="8FA1AC"/>
+                </a:solidFill>
+                <a:latin typeface="Poppins" pitchFamily="34" charset="0"/>
+                <a:ea typeface="Poppins" pitchFamily="34" charset="-122"/>
+                <a:cs typeface="Poppins" pitchFamily="34" charset="-120"/>
+              </a:rPr>
+              <a:t>—</a:t>
+            </a:r>
+            <a:endParaRPr lang="en-US" sz="800" dirty="0"/>
+          </a:p>
+        </p:txBody>
+      </p:sp>
+      <p:sp>
+        <p:nvSpPr>
+          <p:cNvPr id="66" name="Text 64"/>
+          <p:cNvSpPr txBox="1"/>
+          <p:nvPr/>
+        </p:nvSpPr>
+        <p:spPr>
+          <a:xfrm>
+            <a:off x="5943600" y="4005072"/>
+            <a:ext cx="822960" cy="237744"/>
+          </a:xfrm>
+          <a:prstGeom prst="rect">
+            <a:avLst/>
+          </a:prstGeom>
+          <a:noFill/>
+          <a:ln/>
+        </p:spPr>
+        <p:txBody>
+          <a:bodyPr wrap="square" lIns="0" tIns="0" rIns="0" bIns="0" rtlCol="0" anchor="ctr"/>
+          <a:lstStyle/>
+          <a:p>
+            <a:pPr algn="r" indent="0" marL="0">
+              <a:buNone/>
+            </a:pPr>
+            <a:r>
+              <a:rPr lang="en-US" sz="600" dirty="0">
+                <a:solidFill>
+                  <a:srgbClr val="8FA1AC"/>
+                </a:solidFill>
+                <a:latin typeface="Poppins" pitchFamily="34" charset="0"/>
+                <a:ea typeface="Poppins" pitchFamily="34" charset="-122"/>
+                <a:cs typeface="Poppins" pitchFamily="34" charset="-120"/>
+              </a:rPr>
+              <a:t>no time logged</a:t>
+            </a:r>
+            <a:endParaRPr lang="en-US" sz="600" dirty="0"/>
+          </a:p>
+        </p:txBody>
+      </p:sp>
+      <p:sp>
+        <p:nvSpPr>
+          <p:cNvPr id="67" name="Text 65"/>
+          <p:cNvSpPr txBox="1"/>
+          <p:nvPr/>
+        </p:nvSpPr>
+        <p:spPr>
+          <a:xfrm>
+            <a:off x="640080" y="4242816"/>
+            <a:ext cx="1783080" cy="237744"/>
+          </a:xfrm>
+          <a:prstGeom prst="rect">
+            <a:avLst/>
+          </a:prstGeom>
+          <a:noFill/>
+          <a:ln/>
+        </p:spPr>
+        <p:txBody>
+          <a:bodyPr wrap="square" lIns="0" tIns="0" rIns="0" bIns="0" rtlCol="0" anchor="ctr"/>
+          <a:lstStyle/>
+          <a:p>
+            <a:pPr indent="0" marL="0">
+              <a:buNone/>
+            </a:pPr>
+            <a:r>
+              <a:rPr lang="en-US" sz="800" dirty="0">
+                <a:solidFill>
+                  <a:srgbClr val="5E7280"/>
+                </a:solidFill>
+                <a:latin typeface="Poppins" pitchFamily="34" charset="0"/>
+                <a:ea typeface="Poppins" pitchFamily="34" charset="-122"/>
+                <a:cs typeface="Poppins" pitchFamily="34" charset="-120"/>
+              </a:rPr>
+              <a:t>Karim AlRifaii</a:t>
+            </a:r>
+            <a:endParaRPr lang="en-US" sz="800" dirty="0"/>
+          </a:p>
+        </p:txBody>
+      </p:sp>
+      <p:sp>
+        <p:nvSpPr>
+          <p:cNvPr id="68" name="Shape 66"/>
+          <p:cNvSpPr/>
+          <p:nvPr/>
+        </p:nvSpPr>
+        <p:spPr>
+          <a:xfrm>
+            <a:off x="2468880" y="4331970"/>
+            <a:ext cx="2377440" cy="59436"/>
           </a:xfrm>
           <a:prstGeom prst="roundRect">
             <a:avLst>
@@ -47706,21 +47984,21 @@
             </a:avLst>
           </a:prstGeom>
           <a:solidFill>
-            <a:srgbClr val="2C8394"/>
-          </a:solidFill>
-          <a:ln/>
-        </p:spPr>
-      </p:sp>
-      <p:sp>
-        <p:nvSpPr>
-          <p:cNvPr id="61" name="Text 59"/>
-          <p:cNvSpPr txBox="1"/>
-          <p:nvPr/>
-        </p:nvSpPr>
-        <p:spPr>
-          <a:xfrm>
-            <a:off x="5029200" y="3732415"/>
-            <a:ext cx="822960" cy="226106"/>
+            <a:srgbClr val="E2EAEE"/>
+          </a:solidFill>
+          <a:ln/>
+        </p:spPr>
+      </p:sp>
+      <p:sp>
+        <p:nvSpPr>
+          <p:cNvPr id="69" name="Text 67"/>
+          <p:cNvSpPr txBox="1"/>
+          <p:nvPr/>
+        </p:nvSpPr>
+        <p:spPr>
+          <a:xfrm>
+            <a:off x="5029200" y="4242816"/>
+            <a:ext cx="822960" cy="237744"/>
           </a:xfrm>
           <a:prstGeom prst="rect">
             <a:avLst/>
@@ -47736,15 +48014,15 @@
               <a:buNone/>
             </a:pPr>
             <a:r>
-              <a:rPr lang="en-US" sz="800" b="1" dirty="0">
-                <a:solidFill>
-                  <a:srgbClr val="2C8394"/>
-                </a:solidFill>
-                <a:latin typeface="Poppins" pitchFamily="34" charset="0"/>
-                <a:ea typeface="Poppins" pitchFamily="34" charset="-122"/>
-                <a:cs typeface="Poppins" pitchFamily="34" charset="-120"/>
-              </a:rPr>
-              <a:t>1.50h</a:t>
+              <a:rPr lang="en-US" sz="800" dirty="0">
+                <a:solidFill>
+                  <a:srgbClr val="8FA1AC"/>
+                </a:solidFill>
+                <a:latin typeface="Poppins" pitchFamily="34" charset="0"/>
+                <a:ea typeface="Poppins" pitchFamily="34" charset="-122"/>
+                <a:cs typeface="Poppins" pitchFamily="34" charset="-120"/>
+              </a:rPr>
+              <a:t>—</a:t>
             </a:r>
             <a:endParaRPr lang="en-US" sz="800" dirty="0"/>
           </a:p>
@@ -47752,14 +48030,14 @@
       </p:sp>
       <p:sp>
         <p:nvSpPr>
-          <p:cNvPr id="62" name="Text 60"/>
-          <p:cNvSpPr txBox="1"/>
-          <p:nvPr/>
-        </p:nvSpPr>
-        <p:spPr>
-          <a:xfrm>
-            <a:off x="5943600" y="3732415"/>
-            <a:ext cx="822960" cy="226106"/>
+          <p:cNvPr id="70" name="Text 68"/>
+          <p:cNvSpPr txBox="1"/>
+          <p:nvPr/>
+        </p:nvSpPr>
+        <p:spPr>
+          <a:xfrm>
+            <a:off x="5943600" y="4242816"/>
+            <a:ext cx="822960" cy="237744"/>
           </a:xfrm>
           <a:prstGeom prst="rect">
             <a:avLst/>
@@ -47775,15 +48053,54 @@
               <a:buNone/>
             </a:pPr>
             <a:r>
-              <a:rPr lang="en-US" sz="800" b="1" dirty="0">
-                <a:solidFill>
-                  <a:srgbClr val="12293A"/>
-                </a:solidFill>
-                <a:latin typeface="Poppins" pitchFamily="34" charset="0"/>
-                <a:ea typeface="Poppins" pitchFamily="34" charset="-122"/>
-                <a:cs typeface="Poppins" pitchFamily="34" charset="-120"/>
-              </a:rPr>
-              <a:t>3.9%</a:t>
+              <a:rPr lang="en-US" sz="600" dirty="0">
+                <a:solidFill>
+                  <a:srgbClr val="8FA1AC"/>
+                </a:solidFill>
+                <a:latin typeface="Poppins" pitchFamily="34" charset="0"/>
+                <a:ea typeface="Poppins" pitchFamily="34" charset="-122"/>
+                <a:cs typeface="Poppins" pitchFamily="34" charset="-120"/>
+              </a:rPr>
+              <a:t>no time logged</a:t>
+            </a:r>
+            <a:endParaRPr lang="en-US" sz="600" dirty="0"/>
+          </a:p>
+        </p:txBody>
+      </p:sp>
+      <p:sp>
+        <p:nvSpPr>
+          <p:cNvPr id="71" name="Text 69"/>
+          <p:cNvSpPr txBox="1"/>
+          <p:nvPr/>
+        </p:nvSpPr>
+        <p:spPr>
+          <a:xfrm>
+            <a:off x="640080" y="4480560"/>
+            <a:ext cx="1783080" cy="237744"/>
+          </a:xfrm>
+          <a:prstGeom prst="rect">
+            <a:avLst/>
+          </a:prstGeom>
+          <a:noFill/>
+          <a:ln/>
+        </p:spPr>
+        <p:txBody>
+          <a:bodyPr wrap="square" lIns="0" tIns="0" rIns="0" bIns="0" rtlCol="0" anchor="ctr"/>
+          <a:lstStyle/>
+          <a:p>
+            <a:pPr indent="0" marL="0">
+              <a:buNone/>
+            </a:pPr>
+            <a:r>
+              <a:rPr lang="en-US" sz="800" dirty="0">
+                <a:solidFill>
+                  <a:srgbClr val="5E7280"/>
+                </a:solidFill>
+                <a:latin typeface="Poppins" pitchFamily="34" charset="0"/>
+                <a:ea typeface="Poppins" pitchFamily="34" charset="-122"/>
+                <a:cs typeface="Poppins" pitchFamily="34" charset="-120"/>
+              </a:rPr>
+              <a:t>Ryan Neil Orande</a:t>
             </a:r>
             <a:endParaRPr lang="en-US" sz="800" dirty="0"/>
           </a:p>
@@ -47791,52 +48108,13 @@
       </p:sp>
       <p:sp>
         <p:nvSpPr>
-          <p:cNvPr id="63" name="Text 61"/>
-          <p:cNvSpPr txBox="1"/>
-          <p:nvPr/>
-        </p:nvSpPr>
-        <p:spPr>
-          <a:xfrm>
-            <a:off x="640080" y="3958521"/>
-            <a:ext cx="1783080" cy="226106"/>
-          </a:xfrm>
-          <a:prstGeom prst="rect">
-            <a:avLst/>
-          </a:prstGeom>
-          <a:noFill/>
-          <a:ln/>
-        </p:spPr>
-        <p:txBody>
-          <a:bodyPr wrap="square" lIns="0" tIns="0" rIns="0" bIns="0" rtlCol="0" anchor="ctr"/>
-          <a:lstStyle/>
-          <a:p>
-            <a:pPr indent="0" marL="0">
-              <a:buNone/>
-            </a:pPr>
-            <a:r>
-              <a:rPr lang="en-US" sz="800" b="1" dirty="0">
-                <a:solidFill>
-                  <a:srgbClr val="12293A"/>
-                </a:solidFill>
-                <a:latin typeface="Poppins" pitchFamily="34" charset="0"/>
-                <a:ea typeface="Poppins" pitchFamily="34" charset="-122"/>
-                <a:cs typeface="Poppins" pitchFamily="34" charset="-120"/>
-              </a:rPr>
-              <a:t>Isayah Kuhlmann</a:t>
-            </a:r>
-            <a:endParaRPr lang="en-US" sz="800" dirty="0"/>
-          </a:p>
-        </p:txBody>
-      </p:sp>
-      <p:sp>
-        <p:nvSpPr>
-          <p:cNvPr id="64" name="Shape 62"/>
-          <p:cNvSpPr/>
-          <p:nvPr/>
-        </p:nvSpPr>
-        <p:spPr>
-          <a:xfrm>
-            <a:off x="2468880" y="4041856"/>
+          <p:cNvPr id="72" name="Shape 70"/>
+          <p:cNvSpPr/>
+          <p:nvPr/>
+        </p:nvSpPr>
+        <p:spPr>
+          <a:xfrm>
+            <a:off x="2468880" y="4569714"/>
             <a:ext cx="2377440" cy="59436"/>
           </a:xfrm>
           <a:prstGeom prst="roundRect">
@@ -47852,36 +48130,14 @@
       </p:sp>
       <p:sp>
         <p:nvSpPr>
-          <p:cNvPr id="65" name="Shape 63"/>
-          <p:cNvSpPr/>
-          <p:nvPr/>
-        </p:nvSpPr>
-        <p:spPr>
-          <a:xfrm>
-            <a:off x="2468880" y="4041856"/>
-            <a:ext cx="45720" cy="59436"/>
-          </a:xfrm>
-          <a:prstGeom prst="roundRect">
-            <a:avLst>
-              <a:gd name="adj" fmla="val 64000"/>
-            </a:avLst>
-          </a:prstGeom>
-          <a:solidFill>
-            <a:srgbClr val="2C8394"/>
-          </a:solidFill>
-          <a:ln/>
-        </p:spPr>
-      </p:sp>
-      <p:sp>
-        <p:nvSpPr>
-          <p:cNvPr id="66" name="Text 64"/>
-          <p:cNvSpPr txBox="1"/>
-          <p:nvPr/>
-        </p:nvSpPr>
-        <p:spPr>
-          <a:xfrm>
-            <a:off x="5029200" y="3958521"/>
-            <a:ext cx="822960" cy="226106"/>
+          <p:cNvPr id="73" name="Text 71"/>
+          <p:cNvSpPr txBox="1"/>
+          <p:nvPr/>
+        </p:nvSpPr>
+        <p:spPr>
+          <a:xfrm>
+            <a:off x="5029200" y="4480560"/>
+            <a:ext cx="822960" cy="237744"/>
           </a:xfrm>
           <a:prstGeom prst="rect">
             <a:avLst/>
@@ -47897,15 +48153,15 @@
               <a:buNone/>
             </a:pPr>
             <a:r>
-              <a:rPr lang="en-US" sz="800" b="1" dirty="0">
-                <a:solidFill>
-                  <a:srgbClr val="2C8394"/>
-                </a:solidFill>
-                <a:latin typeface="Poppins" pitchFamily="34" charset="0"/>
-                <a:ea typeface="Poppins" pitchFamily="34" charset="-122"/>
-                <a:cs typeface="Poppins" pitchFamily="34" charset="-120"/>
-              </a:rPr>
-              <a:t>0.50h</a:t>
+              <a:rPr lang="en-US" sz="800" dirty="0">
+                <a:solidFill>
+                  <a:srgbClr val="8FA1AC"/>
+                </a:solidFill>
+                <a:latin typeface="Poppins" pitchFamily="34" charset="0"/>
+                <a:ea typeface="Poppins" pitchFamily="34" charset="-122"/>
+                <a:cs typeface="Poppins" pitchFamily="34" charset="-120"/>
+              </a:rPr>
+              <a:t>—</a:t>
             </a:r>
             <a:endParaRPr lang="en-US" sz="800" dirty="0"/>
           </a:p>
@@ -47913,14 +48169,14 @@
       </p:sp>
       <p:sp>
         <p:nvSpPr>
-          <p:cNvPr id="67" name="Text 65"/>
-          <p:cNvSpPr txBox="1"/>
-          <p:nvPr/>
-        </p:nvSpPr>
-        <p:spPr>
-          <a:xfrm>
-            <a:off x="5943600" y="3958521"/>
-            <a:ext cx="822960" cy="226106"/>
+          <p:cNvPr id="74" name="Text 72"/>
+          <p:cNvSpPr txBox="1"/>
+          <p:nvPr/>
+        </p:nvSpPr>
+        <p:spPr>
+          <a:xfrm>
+            <a:off x="5943600" y="4480560"/>
+            <a:ext cx="822960" cy="237744"/>
           </a:xfrm>
           <a:prstGeom prst="rect">
             <a:avLst/>
@@ -47936,15 +48192,54 @@
               <a:buNone/>
             </a:pPr>
             <a:r>
-              <a:rPr lang="en-US" sz="800" b="1" dirty="0">
-                <a:solidFill>
-                  <a:srgbClr val="12293A"/>
-                </a:solidFill>
-                <a:latin typeface="Poppins" pitchFamily="34" charset="0"/>
-                <a:ea typeface="Poppins" pitchFamily="34" charset="-122"/>
-                <a:cs typeface="Poppins" pitchFamily="34" charset="-120"/>
-              </a:rPr>
-              <a:t>1.3%</a:t>
+              <a:rPr lang="en-US" sz="600" dirty="0">
+                <a:solidFill>
+                  <a:srgbClr val="8FA1AC"/>
+                </a:solidFill>
+                <a:latin typeface="Poppins" pitchFamily="34" charset="0"/>
+                <a:ea typeface="Poppins" pitchFamily="34" charset="-122"/>
+                <a:cs typeface="Poppins" pitchFamily="34" charset="-120"/>
+              </a:rPr>
+              <a:t>no time logged</a:t>
+            </a:r>
+            <a:endParaRPr lang="en-US" sz="600" dirty="0"/>
+          </a:p>
+        </p:txBody>
+      </p:sp>
+      <p:sp>
+        <p:nvSpPr>
+          <p:cNvPr id="75" name="Text 73"/>
+          <p:cNvSpPr txBox="1"/>
+          <p:nvPr/>
+        </p:nvSpPr>
+        <p:spPr>
+          <a:xfrm>
+            <a:off x="640080" y="4718304"/>
+            <a:ext cx="1783080" cy="237744"/>
+          </a:xfrm>
+          <a:prstGeom prst="rect">
+            <a:avLst/>
+          </a:prstGeom>
+          <a:noFill/>
+          <a:ln/>
+        </p:spPr>
+        <p:txBody>
+          <a:bodyPr wrap="square" lIns="0" tIns="0" rIns="0" bIns="0" rtlCol="0" anchor="ctr"/>
+          <a:lstStyle/>
+          <a:p>
+            <a:pPr indent="0" marL="0">
+              <a:buNone/>
+            </a:pPr>
+            <a:r>
+              <a:rPr lang="en-US" sz="800" dirty="0">
+                <a:solidFill>
+                  <a:srgbClr val="5E7280"/>
+                </a:solidFill>
+                <a:latin typeface="Poppins" pitchFamily="34" charset="0"/>
+                <a:ea typeface="Poppins" pitchFamily="34" charset="-122"/>
+                <a:cs typeface="Poppins" pitchFamily="34" charset="-120"/>
+              </a:rPr>
+              <a:t>Argenis Rafael Guevara</a:t>
             </a:r>
             <a:endParaRPr lang="en-US" sz="800" dirty="0"/>
           </a:p>
@@ -47952,52 +48247,13 @@
       </p:sp>
       <p:sp>
         <p:nvSpPr>
-          <p:cNvPr id="68" name="Text 66"/>
-          <p:cNvSpPr txBox="1"/>
-          <p:nvPr/>
-        </p:nvSpPr>
-        <p:spPr>
-          <a:xfrm>
-            <a:off x="640080" y="4184627"/>
-            <a:ext cx="1783080" cy="226106"/>
-          </a:xfrm>
-          <a:prstGeom prst="rect">
-            <a:avLst/>
-          </a:prstGeom>
-          <a:noFill/>
-          <a:ln/>
-        </p:spPr>
-        <p:txBody>
-          <a:bodyPr wrap="square" lIns="0" tIns="0" rIns="0" bIns="0" rtlCol="0" anchor="ctr"/>
-          <a:lstStyle/>
-          <a:p>
-            <a:pPr indent="0" marL="0">
-              <a:buNone/>
-            </a:pPr>
-            <a:r>
-              <a:rPr lang="en-US" sz="800" b="1" dirty="0">
-                <a:solidFill>
-                  <a:srgbClr val="12293A"/>
-                </a:solidFill>
-                <a:latin typeface="Poppins" pitchFamily="34" charset="0"/>
-                <a:ea typeface="Poppins" pitchFamily="34" charset="-122"/>
-                <a:cs typeface="Poppins" pitchFamily="34" charset="-120"/>
-              </a:rPr>
-              <a:t>Joshua Casey</a:t>
-            </a:r>
-            <a:endParaRPr lang="en-US" sz="800" dirty="0"/>
-          </a:p>
-        </p:txBody>
-      </p:sp>
-      <p:sp>
-        <p:nvSpPr>
-          <p:cNvPr id="69" name="Shape 67"/>
-          <p:cNvSpPr/>
-          <p:nvPr/>
-        </p:nvSpPr>
-        <p:spPr>
-          <a:xfrm>
-            <a:off x="2468880" y="4267962"/>
+          <p:cNvPr id="76" name="Shape 74"/>
+          <p:cNvSpPr/>
+          <p:nvPr/>
+        </p:nvSpPr>
+        <p:spPr>
+          <a:xfrm>
+            <a:off x="2468880" y="4807458"/>
             <a:ext cx="2377440" cy="59436"/>
           </a:xfrm>
           <a:prstGeom prst="roundRect">
@@ -48013,36 +48269,14 @@
       </p:sp>
       <p:sp>
         <p:nvSpPr>
-          <p:cNvPr id="70" name="Shape 68"/>
-          <p:cNvSpPr/>
-          <p:nvPr/>
-        </p:nvSpPr>
-        <p:spPr>
-          <a:xfrm>
-            <a:off x="2468880" y="4267962"/>
-            <a:ext cx="45720" cy="59436"/>
-          </a:xfrm>
-          <a:prstGeom prst="roundRect">
-            <a:avLst>
-              <a:gd name="adj" fmla="val 64000"/>
-            </a:avLst>
-          </a:prstGeom>
-          <a:solidFill>
-            <a:srgbClr val="2C8394"/>
-          </a:solidFill>
-          <a:ln/>
-        </p:spPr>
-      </p:sp>
-      <p:sp>
-        <p:nvSpPr>
-          <p:cNvPr id="71" name="Text 69"/>
-          <p:cNvSpPr txBox="1"/>
-          <p:nvPr/>
-        </p:nvSpPr>
-        <p:spPr>
-          <a:xfrm>
-            <a:off x="5029200" y="4184627"/>
-            <a:ext cx="822960" cy="226106"/>
+          <p:cNvPr id="77" name="Text 75"/>
+          <p:cNvSpPr txBox="1"/>
+          <p:nvPr/>
+        </p:nvSpPr>
+        <p:spPr>
+          <a:xfrm>
+            <a:off x="5029200" y="4718304"/>
+            <a:ext cx="822960" cy="237744"/>
           </a:xfrm>
           <a:prstGeom prst="rect">
             <a:avLst/>
@@ -48058,15 +48292,15 @@
               <a:buNone/>
             </a:pPr>
             <a:r>
-              <a:rPr lang="en-US" sz="800" b="1" dirty="0">
-                <a:solidFill>
-                  <a:srgbClr val="2C8394"/>
-                </a:solidFill>
-                <a:latin typeface="Poppins" pitchFamily="34" charset="0"/>
-                <a:ea typeface="Poppins" pitchFamily="34" charset="-122"/>
-                <a:cs typeface="Poppins" pitchFamily="34" charset="-120"/>
-              </a:rPr>
-              <a:t>0.25h</a:t>
+              <a:rPr lang="en-US" sz="800" dirty="0">
+                <a:solidFill>
+                  <a:srgbClr val="8FA1AC"/>
+                </a:solidFill>
+                <a:latin typeface="Poppins" pitchFamily="34" charset="0"/>
+                <a:ea typeface="Poppins" pitchFamily="34" charset="-122"/>
+                <a:cs typeface="Poppins" pitchFamily="34" charset="-120"/>
+              </a:rPr>
+              <a:t>—</a:t>
             </a:r>
             <a:endParaRPr lang="en-US" sz="800" dirty="0"/>
           </a:p>
@@ -48074,14 +48308,14 @@
       </p:sp>
       <p:sp>
         <p:nvSpPr>
-          <p:cNvPr id="72" name="Text 70"/>
-          <p:cNvSpPr txBox="1"/>
-          <p:nvPr/>
-        </p:nvSpPr>
-        <p:spPr>
-          <a:xfrm>
-            <a:off x="5943600" y="4184627"/>
-            <a:ext cx="822960" cy="226106"/>
+          <p:cNvPr id="78" name="Text 76"/>
+          <p:cNvSpPr txBox="1"/>
+          <p:nvPr/>
+        </p:nvSpPr>
+        <p:spPr>
+          <a:xfrm>
+            <a:off x="5943600" y="4718304"/>
+            <a:ext cx="822960" cy="237744"/>
           </a:xfrm>
           <a:prstGeom prst="rect">
             <a:avLst/>
@@ -48097,15 +48331,54 @@
               <a:buNone/>
             </a:pPr>
             <a:r>
-              <a:rPr lang="en-US" sz="800" b="1" dirty="0">
-                <a:solidFill>
-                  <a:srgbClr val="12293A"/>
-                </a:solidFill>
-                <a:latin typeface="Poppins" pitchFamily="34" charset="0"/>
-                <a:ea typeface="Poppins" pitchFamily="34" charset="-122"/>
-                <a:cs typeface="Poppins" pitchFamily="34" charset="-120"/>
-              </a:rPr>
-              <a:t>0.7%</a:t>
+              <a:rPr lang="en-US" sz="600" dirty="0">
+                <a:solidFill>
+                  <a:srgbClr val="8FA1AC"/>
+                </a:solidFill>
+                <a:latin typeface="Poppins" pitchFamily="34" charset="0"/>
+                <a:ea typeface="Poppins" pitchFamily="34" charset="-122"/>
+                <a:cs typeface="Poppins" pitchFamily="34" charset="-120"/>
+              </a:rPr>
+              <a:t>no time logged</a:t>
+            </a:r>
+            <a:endParaRPr lang="en-US" sz="600" dirty="0"/>
+          </a:p>
+        </p:txBody>
+      </p:sp>
+      <p:sp>
+        <p:nvSpPr>
+          <p:cNvPr id="79" name="Text 77"/>
+          <p:cNvSpPr txBox="1"/>
+          <p:nvPr/>
+        </p:nvSpPr>
+        <p:spPr>
+          <a:xfrm>
+            <a:off x="640080" y="4956048"/>
+            <a:ext cx="1783080" cy="237744"/>
+          </a:xfrm>
+          <a:prstGeom prst="rect">
+            <a:avLst/>
+          </a:prstGeom>
+          <a:noFill/>
+          <a:ln/>
+        </p:spPr>
+        <p:txBody>
+          <a:bodyPr wrap="square" lIns="0" tIns="0" rIns="0" bIns="0" rtlCol="0" anchor="ctr"/>
+          <a:lstStyle/>
+          <a:p>
+            <a:pPr indent="0" marL="0">
+              <a:buNone/>
+            </a:pPr>
+            <a:r>
+              <a:rPr lang="en-US" sz="800" dirty="0">
+                <a:solidFill>
+                  <a:srgbClr val="5E7280"/>
+                </a:solidFill>
+                <a:latin typeface="Poppins" pitchFamily="34" charset="0"/>
+                <a:ea typeface="Poppins" pitchFamily="34" charset="-122"/>
+                <a:cs typeface="Poppins" pitchFamily="34" charset="-120"/>
+              </a:rPr>
+              <a:t>Isaac Mercado</a:t>
             </a:r>
             <a:endParaRPr lang="en-US" sz="800" dirty="0"/>
           </a:p>
@@ -48113,52 +48386,13 @@
       </p:sp>
       <p:sp>
         <p:nvSpPr>
-          <p:cNvPr id="73" name="Text 71"/>
-          <p:cNvSpPr txBox="1"/>
-          <p:nvPr/>
-        </p:nvSpPr>
-        <p:spPr>
-          <a:xfrm>
-            <a:off x="640080" y="4410733"/>
-            <a:ext cx="1783080" cy="226106"/>
-          </a:xfrm>
-          <a:prstGeom prst="rect">
-            <a:avLst/>
-          </a:prstGeom>
-          <a:noFill/>
-          <a:ln/>
-        </p:spPr>
-        <p:txBody>
-          <a:bodyPr wrap="square" lIns="0" tIns="0" rIns="0" bIns="0" rtlCol="0" anchor="ctr"/>
-          <a:lstStyle/>
-          <a:p>
-            <a:pPr indent="0" marL="0">
-              <a:buNone/>
-            </a:pPr>
-            <a:r>
-              <a:rPr lang="en-US" sz="800" dirty="0">
-                <a:solidFill>
-                  <a:srgbClr val="5E7280"/>
-                </a:solidFill>
-                <a:latin typeface="Poppins" pitchFamily="34" charset="0"/>
-                <a:ea typeface="Poppins" pitchFamily="34" charset="-122"/>
-                <a:cs typeface="Poppins" pitchFamily="34" charset="-120"/>
-              </a:rPr>
-              <a:t>Rodney Nolan</a:t>
-            </a:r>
-            <a:endParaRPr lang="en-US" sz="800" dirty="0"/>
-          </a:p>
-        </p:txBody>
-      </p:sp>
-      <p:sp>
-        <p:nvSpPr>
-          <p:cNvPr id="74" name="Shape 72"/>
-          <p:cNvSpPr/>
-          <p:nvPr/>
-        </p:nvSpPr>
-        <p:spPr>
-          <a:xfrm>
-            <a:off x="2468880" y="4494068"/>
+          <p:cNvPr id="80" name="Shape 78"/>
+          <p:cNvSpPr/>
+          <p:nvPr/>
+        </p:nvSpPr>
+        <p:spPr>
+          <a:xfrm>
+            <a:off x="2468880" y="5045202"/>
             <a:ext cx="2377440" cy="59436"/>
           </a:xfrm>
           <a:prstGeom prst="roundRect">
@@ -48174,14 +48408,14 @@
       </p:sp>
       <p:sp>
         <p:nvSpPr>
-          <p:cNvPr id="75" name="Text 73"/>
-          <p:cNvSpPr txBox="1"/>
-          <p:nvPr/>
-        </p:nvSpPr>
-        <p:spPr>
-          <a:xfrm>
-            <a:off x="5029200" y="4410733"/>
-            <a:ext cx="822960" cy="226106"/>
+          <p:cNvPr id="81" name="Text 79"/>
+          <p:cNvSpPr txBox="1"/>
+          <p:nvPr/>
+        </p:nvSpPr>
+        <p:spPr>
+          <a:xfrm>
+            <a:off x="5029200" y="4956048"/>
+            <a:ext cx="822960" cy="237744"/>
           </a:xfrm>
           <a:prstGeom prst="rect">
             <a:avLst/>
@@ -48213,14 +48447,14 @@
       </p:sp>
       <p:sp>
         <p:nvSpPr>
-          <p:cNvPr id="76" name="Text 74"/>
-          <p:cNvSpPr txBox="1"/>
-          <p:nvPr/>
-        </p:nvSpPr>
-        <p:spPr>
-          <a:xfrm>
-            <a:off x="5943600" y="4410733"/>
-            <a:ext cx="822960" cy="226106"/>
+          <p:cNvPr id="82" name="Text 80"/>
+          <p:cNvSpPr txBox="1"/>
+          <p:nvPr/>
+        </p:nvSpPr>
+        <p:spPr>
+          <a:xfrm>
+            <a:off x="5943600" y="4956048"/>
+            <a:ext cx="822960" cy="237744"/>
           </a:xfrm>
           <a:prstGeom prst="rect">
             <a:avLst/>
@@ -48252,30 +48486,89 @@
       </p:sp>
       <p:sp>
         <p:nvSpPr>
-          <p:cNvPr id="77" name="Text 75"/>
-          <p:cNvSpPr txBox="1"/>
-          <p:nvPr/>
-        </p:nvSpPr>
-        <p:spPr>
-          <a:xfrm>
-            <a:off x="640080" y="4636839"/>
-            <a:ext cx="1783080" cy="226106"/>
-          </a:xfrm>
-          <a:prstGeom prst="rect">
-            <a:avLst/>
-          </a:prstGeom>
-          <a:noFill/>
-          <a:ln/>
-        </p:spPr>
-        <p:txBody>
-          <a:bodyPr wrap="square" lIns="0" tIns="0" rIns="0" bIns="0" rtlCol="0" anchor="ctr"/>
-          <a:lstStyle/>
-          <a:p>
-            <a:pPr indent="0" marL="0">
-              <a:buNone/>
-            </a:pPr>
-            <a:r>
-              <a:rPr lang="en-US" sz="800" dirty="0">
+          <p:cNvPr id="83" name="Shape 81"/>
+          <p:cNvSpPr/>
+          <p:nvPr/>
+        </p:nvSpPr>
+        <p:spPr>
+          <a:xfrm>
+            <a:off x="640080" y="5230368"/>
+            <a:ext cx="6126480" cy="10973"/>
+          </a:xfrm>
+          <a:prstGeom prst="rect">
+            <a:avLst/>
+          </a:prstGeom>
+          <a:solidFill>
+            <a:srgbClr val="12293A"/>
+          </a:solidFill>
+          <a:ln/>
+        </p:spPr>
+      </p:sp>
+      <p:sp>
+        <p:nvSpPr>
+          <p:cNvPr id="84" name="Text 82"/>
+          <p:cNvSpPr txBox="1"/>
+          <p:nvPr/>
+        </p:nvSpPr>
+        <p:spPr>
+          <a:xfrm>
+            <a:off x="640080" y="5266944"/>
+            <a:ext cx="1783080" cy="237744"/>
+          </a:xfrm>
+          <a:prstGeom prst="rect">
+            <a:avLst/>
+          </a:prstGeom>
+          <a:noFill/>
+          <a:ln/>
+        </p:spPr>
+        <p:txBody>
+          <a:bodyPr wrap="square" lIns="0" tIns="0" rIns="0" bIns="0" rtlCol="0" anchor="ctr"/>
+          <a:lstStyle/>
+          <a:p>
+            <a:pPr indent="0" marL="0">
+              <a:buNone/>
+            </a:pPr>
+            <a:r>
+              <a:rPr lang="en-US" sz="850" b="1" dirty="0">
+                <a:solidFill>
+                  <a:srgbClr val="12293A"/>
+                </a:solidFill>
+                <a:latin typeface="Poppins" pitchFamily="34" charset="0"/>
+                <a:ea typeface="Poppins" pitchFamily="34" charset="-122"/>
+                <a:cs typeface="Poppins" pitchFamily="34" charset="-120"/>
+              </a:rPr>
+              <a:t>TOTAL</a:t>
+            </a:r>
+            <a:endParaRPr lang="en-US" sz="850" dirty="0"/>
+          </a:p>
+        </p:txBody>
+      </p:sp>
+      <p:sp>
+        <p:nvSpPr>
+          <p:cNvPr id="85" name="Text 83"/>
+          <p:cNvSpPr txBox="1"/>
+          <p:nvPr/>
+        </p:nvSpPr>
+        <p:spPr>
+          <a:xfrm>
+            <a:off x="2468880" y="5266944"/>
+            <a:ext cx="2377440" cy="237744"/>
+          </a:xfrm>
+          <a:prstGeom prst="rect">
+            <a:avLst/>
+          </a:prstGeom>
+          <a:noFill/>
+          <a:ln/>
+        </p:spPr>
+        <p:txBody>
+          <a:bodyPr wrap="square" lIns="0" tIns="0" rIns="0" bIns="0" rtlCol="0" anchor="ctr"/>
+          <a:lstStyle/>
+          <a:p>
+            <a:pPr indent="0" marL="0">
+              <a:buNone/>
+            </a:pPr>
+            <a:r>
+              <a:rPr lang="en-US" sz="700" dirty="0">
                 <a:solidFill>
                   <a:srgbClr val="5E7280"/>
                 </a:solidFill>
@@ -48283,44 +48576,22 @@
                 <a:ea typeface="Poppins" pitchFamily="34" charset="-122"/>
                 <a:cs typeface="Poppins" pitchFamily="34" charset="-120"/>
               </a:rPr>
-              <a:t>Karim AlRifaii</a:t>
-            </a:r>
-            <a:endParaRPr lang="en-US" sz="800" dirty="0"/>
-          </a:p>
-        </p:txBody>
-      </p:sp>
-      <p:sp>
-        <p:nvSpPr>
-          <p:cNvPr id="78" name="Shape 76"/>
-          <p:cNvSpPr/>
-          <p:nvPr/>
-        </p:nvSpPr>
-        <p:spPr>
-          <a:xfrm>
-            <a:off x="2468880" y="4720174"/>
-            <a:ext cx="2377440" cy="59436"/>
-          </a:xfrm>
-          <a:prstGeom prst="roundRect">
-            <a:avLst>
-              <a:gd name="adj" fmla="val 49231"/>
-            </a:avLst>
-          </a:prstGeom>
-          <a:solidFill>
-            <a:srgbClr val="E2EAEE"/>
-          </a:solidFill>
-          <a:ln/>
-        </p:spPr>
-      </p:sp>
-      <p:sp>
-        <p:nvSpPr>
-          <p:cNvPr id="79" name="Text 77"/>
-          <p:cNvSpPr txBox="1"/>
-          <p:nvPr/>
-        </p:nvSpPr>
-        <p:spPr>
-          <a:xfrm>
-            <a:off x="5029200" y="4636839"/>
-            <a:ext cx="822960" cy="226106"/>
+              <a:t>9 PS people × 38h = 342h available</a:t>
+            </a:r>
+            <a:endParaRPr lang="en-US" sz="700" dirty="0"/>
+          </a:p>
+        </p:txBody>
+      </p:sp>
+      <p:sp>
+        <p:nvSpPr>
+          <p:cNvPr id="86" name="Text 84"/>
+          <p:cNvSpPr txBox="1"/>
+          <p:nvPr/>
+        </p:nvSpPr>
+        <p:spPr>
+          <a:xfrm>
+            <a:off x="5029200" y="5266944"/>
+            <a:ext cx="822960" cy="237744"/>
           </a:xfrm>
           <a:prstGeom prst="rect">
             <a:avLst/>
@@ -48336,30 +48607,30 @@
               <a:buNone/>
             </a:pPr>
             <a:r>
-              <a:rPr lang="en-US" sz="800" dirty="0">
-                <a:solidFill>
-                  <a:srgbClr val="8FA1AC"/>
-                </a:solidFill>
-                <a:latin typeface="Poppins" pitchFamily="34" charset="0"/>
-                <a:ea typeface="Poppins" pitchFamily="34" charset="-122"/>
-                <a:cs typeface="Poppins" pitchFamily="34" charset="-120"/>
-              </a:rPr>
-              <a:t>—</a:t>
-            </a:r>
-            <a:endParaRPr lang="en-US" sz="800" dirty="0"/>
-          </a:p>
-        </p:txBody>
-      </p:sp>
-      <p:sp>
-        <p:nvSpPr>
-          <p:cNvPr id="80" name="Text 78"/>
-          <p:cNvSpPr txBox="1"/>
-          <p:nvPr/>
-        </p:nvSpPr>
-        <p:spPr>
-          <a:xfrm>
-            <a:off x="5943600" y="4636839"/>
-            <a:ext cx="822960" cy="226106"/>
+              <a:rPr lang="en-US" sz="950" b="1" dirty="0">
+                <a:solidFill>
+                  <a:srgbClr val="2C8394"/>
+                </a:solidFill>
+                <a:latin typeface="Poppins" pitchFamily="34" charset="0"/>
+                <a:ea typeface="Poppins" pitchFamily="34" charset="-122"/>
+                <a:cs typeface="Poppins" pitchFamily="34" charset="-120"/>
+              </a:rPr>
+              <a:t>16.07h</a:t>
+            </a:r>
+            <a:endParaRPr lang="en-US" sz="950" dirty="0"/>
+          </a:p>
+        </p:txBody>
+      </p:sp>
+      <p:sp>
+        <p:nvSpPr>
+          <p:cNvPr id="87" name="Text 85"/>
+          <p:cNvSpPr txBox="1"/>
+          <p:nvPr/>
+        </p:nvSpPr>
+        <p:spPr>
+          <a:xfrm>
+            <a:off x="5943600" y="5266944"/>
+            <a:ext cx="822960" cy="237744"/>
           </a:xfrm>
           <a:prstGeom prst="rect">
             <a:avLst/>
@@ -48375,440 +48646,23 @@
               <a:buNone/>
             </a:pPr>
             <a:r>
-              <a:rPr lang="en-US" sz="600" dirty="0">
-                <a:solidFill>
-                  <a:srgbClr val="8FA1AC"/>
-                </a:solidFill>
-                <a:latin typeface="Poppins" pitchFamily="34" charset="0"/>
-                <a:ea typeface="Poppins" pitchFamily="34" charset="-122"/>
-                <a:cs typeface="Poppins" pitchFamily="34" charset="-120"/>
-              </a:rPr>
-              <a:t>no time logged</a:t>
-            </a:r>
-            <a:endParaRPr lang="en-US" sz="600" dirty="0"/>
-          </a:p>
-        </p:txBody>
-      </p:sp>
-      <p:sp>
-        <p:nvSpPr>
-          <p:cNvPr id="81" name="Text 79"/>
-          <p:cNvSpPr txBox="1"/>
-          <p:nvPr/>
-        </p:nvSpPr>
-        <p:spPr>
-          <a:xfrm>
-            <a:off x="640080" y="4862945"/>
-            <a:ext cx="1783080" cy="226106"/>
-          </a:xfrm>
-          <a:prstGeom prst="rect">
-            <a:avLst/>
-          </a:prstGeom>
-          <a:noFill/>
-          <a:ln/>
-        </p:spPr>
-        <p:txBody>
-          <a:bodyPr wrap="square" lIns="0" tIns="0" rIns="0" bIns="0" rtlCol="0" anchor="ctr"/>
-          <a:lstStyle/>
-          <a:p>
-            <a:pPr indent="0" marL="0">
-              <a:buNone/>
-            </a:pPr>
-            <a:r>
-              <a:rPr lang="en-US" sz="800" dirty="0">
-                <a:solidFill>
-                  <a:srgbClr val="5E7280"/>
-                </a:solidFill>
-                <a:latin typeface="Poppins" pitchFamily="34" charset="0"/>
-                <a:ea typeface="Poppins" pitchFamily="34" charset="-122"/>
-                <a:cs typeface="Poppins" pitchFamily="34" charset="-120"/>
-              </a:rPr>
-              <a:t>Ryan Neil Orande</a:t>
-            </a:r>
-            <a:endParaRPr lang="en-US" sz="800" dirty="0"/>
-          </a:p>
-        </p:txBody>
-      </p:sp>
-      <p:sp>
-        <p:nvSpPr>
-          <p:cNvPr id="82" name="Shape 80"/>
-          <p:cNvSpPr/>
-          <p:nvPr/>
-        </p:nvSpPr>
-        <p:spPr>
-          <a:xfrm>
-            <a:off x="2468880" y="4946281"/>
-            <a:ext cx="2377440" cy="59436"/>
-          </a:xfrm>
-          <a:prstGeom prst="roundRect">
-            <a:avLst>
-              <a:gd name="adj" fmla="val 49231"/>
-            </a:avLst>
-          </a:prstGeom>
-          <a:solidFill>
-            <a:srgbClr val="E2EAEE"/>
-          </a:solidFill>
-          <a:ln/>
-        </p:spPr>
-      </p:sp>
-      <p:sp>
-        <p:nvSpPr>
-          <p:cNvPr id="83" name="Text 81"/>
-          <p:cNvSpPr txBox="1"/>
-          <p:nvPr/>
-        </p:nvSpPr>
-        <p:spPr>
-          <a:xfrm>
-            <a:off x="5029200" y="4862945"/>
-            <a:ext cx="822960" cy="226106"/>
-          </a:xfrm>
-          <a:prstGeom prst="rect">
-            <a:avLst/>
-          </a:prstGeom>
-          <a:noFill/>
-          <a:ln/>
-        </p:spPr>
-        <p:txBody>
-          <a:bodyPr wrap="square" lIns="0" tIns="0" rIns="0" bIns="0" rtlCol="0" anchor="ctr"/>
-          <a:lstStyle/>
-          <a:p>
-            <a:pPr algn="r" indent="0" marL="0">
-              <a:buNone/>
-            </a:pPr>
-            <a:r>
-              <a:rPr lang="en-US" sz="800" dirty="0">
-                <a:solidFill>
-                  <a:srgbClr val="8FA1AC"/>
-                </a:solidFill>
-                <a:latin typeface="Poppins" pitchFamily="34" charset="0"/>
-                <a:ea typeface="Poppins" pitchFamily="34" charset="-122"/>
-                <a:cs typeface="Poppins" pitchFamily="34" charset="-120"/>
-              </a:rPr>
-              <a:t>—</a:t>
-            </a:r>
-            <a:endParaRPr lang="en-US" sz="800" dirty="0"/>
-          </a:p>
-        </p:txBody>
-      </p:sp>
-      <p:sp>
-        <p:nvSpPr>
-          <p:cNvPr id="84" name="Text 82"/>
-          <p:cNvSpPr txBox="1"/>
-          <p:nvPr/>
-        </p:nvSpPr>
-        <p:spPr>
-          <a:xfrm>
-            <a:off x="5943600" y="4862945"/>
-            <a:ext cx="822960" cy="226106"/>
-          </a:xfrm>
-          <a:prstGeom prst="rect">
-            <a:avLst/>
-          </a:prstGeom>
-          <a:noFill/>
-          <a:ln/>
-        </p:spPr>
-        <p:txBody>
-          <a:bodyPr wrap="square" lIns="0" tIns="0" rIns="0" bIns="0" rtlCol="0" anchor="ctr"/>
-          <a:lstStyle/>
-          <a:p>
-            <a:pPr algn="r" indent="0" marL="0">
-              <a:buNone/>
-            </a:pPr>
-            <a:r>
-              <a:rPr lang="en-US" sz="600" dirty="0">
-                <a:solidFill>
-                  <a:srgbClr val="8FA1AC"/>
-                </a:solidFill>
-                <a:latin typeface="Poppins" pitchFamily="34" charset="0"/>
-                <a:ea typeface="Poppins" pitchFamily="34" charset="-122"/>
-                <a:cs typeface="Poppins" pitchFamily="34" charset="-120"/>
-              </a:rPr>
-              <a:t>no time logged</a:t>
-            </a:r>
-            <a:endParaRPr lang="en-US" sz="600" dirty="0"/>
-          </a:p>
-        </p:txBody>
-      </p:sp>
-      <p:sp>
-        <p:nvSpPr>
-          <p:cNvPr id="85" name="Text 83"/>
-          <p:cNvSpPr txBox="1"/>
-          <p:nvPr/>
-        </p:nvSpPr>
-        <p:spPr>
-          <a:xfrm>
-            <a:off x="640080" y="5089052"/>
-            <a:ext cx="1783080" cy="226106"/>
-          </a:xfrm>
-          <a:prstGeom prst="rect">
-            <a:avLst/>
-          </a:prstGeom>
-          <a:noFill/>
-          <a:ln/>
-        </p:spPr>
-        <p:txBody>
-          <a:bodyPr wrap="square" lIns="0" tIns="0" rIns="0" bIns="0" rtlCol="0" anchor="ctr"/>
-          <a:lstStyle/>
-          <a:p>
-            <a:pPr indent="0" marL="0">
-              <a:buNone/>
-            </a:pPr>
-            <a:r>
-              <a:rPr lang="en-US" sz="800" dirty="0">
-                <a:solidFill>
-                  <a:srgbClr val="5E7280"/>
-                </a:solidFill>
-                <a:latin typeface="Poppins" pitchFamily="34" charset="0"/>
-                <a:ea typeface="Poppins" pitchFamily="34" charset="-122"/>
-                <a:cs typeface="Poppins" pitchFamily="34" charset="-120"/>
-              </a:rPr>
-              <a:t>Argenis Rafael Guevara</a:t>
-            </a:r>
-            <a:endParaRPr lang="en-US" sz="800" dirty="0"/>
-          </a:p>
-        </p:txBody>
-      </p:sp>
-      <p:sp>
-        <p:nvSpPr>
-          <p:cNvPr id="86" name="Shape 84"/>
-          <p:cNvSpPr/>
-          <p:nvPr/>
-        </p:nvSpPr>
-        <p:spPr>
-          <a:xfrm>
-            <a:off x="2468880" y="5172387"/>
-            <a:ext cx="2377440" cy="59436"/>
-          </a:xfrm>
-          <a:prstGeom prst="roundRect">
-            <a:avLst>
-              <a:gd name="adj" fmla="val 49231"/>
-            </a:avLst>
-          </a:prstGeom>
-          <a:solidFill>
-            <a:srgbClr val="E2EAEE"/>
-          </a:solidFill>
-          <a:ln/>
-        </p:spPr>
-      </p:sp>
-      <p:sp>
-        <p:nvSpPr>
-          <p:cNvPr id="87" name="Text 85"/>
-          <p:cNvSpPr txBox="1"/>
-          <p:nvPr/>
-        </p:nvSpPr>
-        <p:spPr>
-          <a:xfrm>
-            <a:off x="5029200" y="5089052"/>
-            <a:ext cx="822960" cy="226106"/>
-          </a:xfrm>
-          <a:prstGeom prst="rect">
-            <a:avLst/>
-          </a:prstGeom>
-          <a:noFill/>
-          <a:ln/>
-        </p:spPr>
-        <p:txBody>
-          <a:bodyPr wrap="square" lIns="0" tIns="0" rIns="0" bIns="0" rtlCol="0" anchor="ctr"/>
-          <a:lstStyle/>
-          <a:p>
-            <a:pPr algn="r" indent="0" marL="0">
-              <a:buNone/>
-            </a:pPr>
-            <a:r>
-              <a:rPr lang="en-US" sz="800" dirty="0">
-                <a:solidFill>
-                  <a:srgbClr val="8FA1AC"/>
-                </a:solidFill>
-                <a:latin typeface="Poppins" pitchFamily="34" charset="0"/>
-                <a:ea typeface="Poppins" pitchFamily="34" charset="-122"/>
-                <a:cs typeface="Poppins" pitchFamily="34" charset="-120"/>
-              </a:rPr>
-              <a:t>—</a:t>
-            </a:r>
-            <a:endParaRPr lang="en-US" sz="800" dirty="0"/>
+              <a:rPr lang="en-US" sz="950" b="1" dirty="0">
+                <a:solidFill>
+                  <a:srgbClr val="C88A2E"/>
+                </a:solidFill>
+                <a:latin typeface="Poppins" pitchFamily="34" charset="0"/>
+                <a:ea typeface="Poppins" pitchFamily="34" charset="-122"/>
+                <a:cs typeface="Poppins" pitchFamily="34" charset="-120"/>
+              </a:rPr>
+              <a:t>4.7%</a:t>
+            </a:r>
+            <a:endParaRPr lang="en-US" sz="950" dirty="0"/>
           </a:p>
         </p:txBody>
       </p:sp>
       <p:sp>
         <p:nvSpPr>
           <p:cNvPr id="88" name="Text 86"/>
-          <p:cNvSpPr txBox="1"/>
-          <p:nvPr/>
-        </p:nvSpPr>
-        <p:spPr>
-          <a:xfrm>
-            <a:off x="5943600" y="5089052"/>
-            <a:ext cx="822960" cy="226106"/>
-          </a:xfrm>
-          <a:prstGeom prst="rect">
-            <a:avLst/>
-          </a:prstGeom>
-          <a:noFill/>
-          <a:ln/>
-        </p:spPr>
-        <p:txBody>
-          <a:bodyPr wrap="square" lIns="0" tIns="0" rIns="0" bIns="0" rtlCol="0" anchor="ctr"/>
-          <a:lstStyle/>
-          <a:p>
-            <a:pPr algn="r" indent="0" marL="0">
-              <a:buNone/>
-            </a:pPr>
-            <a:r>
-              <a:rPr lang="en-US" sz="600" dirty="0">
-                <a:solidFill>
-                  <a:srgbClr val="8FA1AC"/>
-                </a:solidFill>
-                <a:latin typeface="Poppins" pitchFamily="34" charset="0"/>
-                <a:ea typeface="Poppins" pitchFamily="34" charset="-122"/>
-                <a:cs typeface="Poppins" pitchFamily="34" charset="-120"/>
-              </a:rPr>
-              <a:t>no time logged</a:t>
-            </a:r>
-            <a:endParaRPr lang="en-US" sz="600" dirty="0"/>
-          </a:p>
-        </p:txBody>
-      </p:sp>
-      <p:sp>
-        <p:nvSpPr>
-          <p:cNvPr id="89" name="Text 87"/>
-          <p:cNvSpPr txBox="1"/>
-          <p:nvPr/>
-        </p:nvSpPr>
-        <p:spPr>
-          <a:xfrm>
-            <a:off x="640080" y="5315158"/>
-            <a:ext cx="1783080" cy="226106"/>
-          </a:xfrm>
-          <a:prstGeom prst="rect">
-            <a:avLst/>
-          </a:prstGeom>
-          <a:noFill/>
-          <a:ln/>
-        </p:spPr>
-        <p:txBody>
-          <a:bodyPr wrap="square" lIns="0" tIns="0" rIns="0" bIns="0" rtlCol="0" anchor="ctr"/>
-          <a:lstStyle/>
-          <a:p>
-            <a:pPr indent="0" marL="0">
-              <a:buNone/>
-            </a:pPr>
-            <a:r>
-              <a:rPr lang="en-US" sz="800" dirty="0">
-                <a:solidFill>
-                  <a:srgbClr val="5E7280"/>
-                </a:solidFill>
-                <a:latin typeface="Poppins" pitchFamily="34" charset="0"/>
-                <a:ea typeface="Poppins" pitchFamily="34" charset="-122"/>
-                <a:cs typeface="Poppins" pitchFamily="34" charset="-120"/>
-              </a:rPr>
-              <a:t>Isaac Mercado</a:t>
-            </a:r>
-            <a:endParaRPr lang="en-US" sz="800" dirty="0"/>
-          </a:p>
-        </p:txBody>
-      </p:sp>
-      <p:sp>
-        <p:nvSpPr>
-          <p:cNvPr id="90" name="Shape 88"/>
-          <p:cNvSpPr/>
-          <p:nvPr/>
-        </p:nvSpPr>
-        <p:spPr>
-          <a:xfrm>
-            <a:off x="2468880" y="5398493"/>
-            <a:ext cx="2377440" cy="59436"/>
-          </a:xfrm>
-          <a:prstGeom prst="roundRect">
-            <a:avLst>
-              <a:gd name="adj" fmla="val 49231"/>
-            </a:avLst>
-          </a:prstGeom>
-          <a:solidFill>
-            <a:srgbClr val="E2EAEE"/>
-          </a:solidFill>
-          <a:ln/>
-        </p:spPr>
-      </p:sp>
-      <p:sp>
-        <p:nvSpPr>
-          <p:cNvPr id="91" name="Text 89"/>
-          <p:cNvSpPr txBox="1"/>
-          <p:nvPr/>
-        </p:nvSpPr>
-        <p:spPr>
-          <a:xfrm>
-            <a:off x="5029200" y="5315158"/>
-            <a:ext cx="822960" cy="226106"/>
-          </a:xfrm>
-          <a:prstGeom prst="rect">
-            <a:avLst/>
-          </a:prstGeom>
-          <a:noFill/>
-          <a:ln/>
-        </p:spPr>
-        <p:txBody>
-          <a:bodyPr wrap="square" lIns="0" tIns="0" rIns="0" bIns="0" rtlCol="0" anchor="ctr"/>
-          <a:lstStyle/>
-          <a:p>
-            <a:pPr algn="r" indent="0" marL="0">
-              <a:buNone/>
-            </a:pPr>
-            <a:r>
-              <a:rPr lang="en-US" sz="800" dirty="0">
-                <a:solidFill>
-                  <a:srgbClr val="8FA1AC"/>
-                </a:solidFill>
-                <a:latin typeface="Poppins" pitchFamily="34" charset="0"/>
-                <a:ea typeface="Poppins" pitchFamily="34" charset="-122"/>
-                <a:cs typeface="Poppins" pitchFamily="34" charset="-120"/>
-              </a:rPr>
-              <a:t>—</a:t>
-            </a:r>
-            <a:endParaRPr lang="en-US" sz="800" dirty="0"/>
-          </a:p>
-        </p:txBody>
-      </p:sp>
-      <p:sp>
-        <p:nvSpPr>
-          <p:cNvPr id="92" name="Text 90"/>
-          <p:cNvSpPr txBox="1"/>
-          <p:nvPr/>
-        </p:nvSpPr>
-        <p:spPr>
-          <a:xfrm>
-            <a:off x="5943600" y="5315158"/>
-            <a:ext cx="822960" cy="226106"/>
-          </a:xfrm>
-          <a:prstGeom prst="rect">
-            <a:avLst/>
-          </a:prstGeom>
-          <a:noFill/>
-          <a:ln/>
-        </p:spPr>
-        <p:txBody>
-          <a:bodyPr wrap="square" lIns="0" tIns="0" rIns="0" bIns="0" rtlCol="0" anchor="ctr"/>
-          <a:lstStyle/>
-          <a:p>
-            <a:pPr algn="r" indent="0" marL="0">
-              <a:buNone/>
-            </a:pPr>
-            <a:r>
-              <a:rPr lang="en-US" sz="600" dirty="0">
-                <a:solidFill>
-                  <a:srgbClr val="8FA1AC"/>
-                </a:solidFill>
-                <a:latin typeface="Poppins" pitchFamily="34" charset="0"/>
-                <a:ea typeface="Poppins" pitchFamily="34" charset="-122"/>
-                <a:cs typeface="Poppins" pitchFamily="34" charset="-120"/>
-              </a:rPr>
-              <a:t>no time logged</a:t>
-            </a:r>
-            <a:endParaRPr lang="en-US" sz="600" dirty="0"/>
-          </a:p>
-        </p:txBody>
-      </p:sp>
-      <p:sp>
-        <p:nvSpPr>
-          <p:cNvPr id="93" name="Text 91"/>
           <p:cNvSpPr txBox="1"/>
           <p:nvPr/>
         </p:nvSpPr>
@@ -48839,7 +48693,7 @@
                 <a:ea typeface="Poppins" pitchFamily="34" charset="-122"/>
                 <a:cs typeface="Poppins" pitchFamily="34" charset="-120"/>
               </a:rPr>
-              <a:t>Available staff = the 11 Professional Services people assigned to PS-pipeline tickets open now or closed this week, at a 38h standard week. Anton Lopez, Jasmine Hikuroa, Bjorn Magabo and Phuong Ho carry PS-pipeline tickets but are not Professional Services staff — excluded from the capacity base.</a:t>
+              <a:t>Available staff = the 9 Professional Services people assigned to PS-pipeline tickets open now or closed this week, at a 38h standard week. Anton Lopez, Jasmine Hikuroa, Bjorn Magabo, Phuong Ho, Katherine Fenwick and Yeran Hettiarachchy carry PS-pipeline tickets but are not Professional Services staff — they and their hours are excluded.</a:t>
             </a:r>
             <a:endParaRPr lang="en-US" sz="580" dirty="0"/>
           </a:p>
@@ -48847,7 +48701,7 @@
       </p:sp>
       <p:sp>
         <p:nvSpPr>
-          <p:cNvPr id="94" name="Shape 92"/>
+          <p:cNvPr id="89" name="Shape 87"/>
           <p:cNvSpPr/>
           <p:nvPr/>
         </p:nvSpPr>
@@ -48876,7 +48730,7 @@
       </p:sp>
       <p:sp>
         <p:nvSpPr>
-          <p:cNvPr id="95" name="Text 93"/>
+          <p:cNvPr id="90" name="Text 88"/>
           <p:cNvSpPr txBox="1"/>
           <p:nvPr/>
         </p:nvSpPr>
@@ -48929,7 +48783,7 @@
       </p:sp>
       <p:sp>
         <p:nvSpPr>
-          <p:cNvPr id="96" name="Text 94"/>
+          <p:cNvPr id="91" name="Text 89"/>
           <p:cNvSpPr txBox="1"/>
           <p:nvPr/>
         </p:nvSpPr>
@@ -48968,7 +48822,7 @@
       </p:sp>
       <p:sp>
         <p:nvSpPr>
-          <p:cNvPr id="97" name="Text 95"/>
+          <p:cNvPr id="92" name="Text 90"/>
           <p:cNvSpPr txBox="1"/>
           <p:nvPr/>
         </p:nvSpPr>
@@ -49007,7 +48861,7 @@
       </p:sp>
       <p:sp>
         <p:nvSpPr>
-          <p:cNvPr id="98" name="Text 96"/>
+          <p:cNvPr id="93" name="Text 91"/>
           <p:cNvSpPr txBox="1"/>
           <p:nvPr/>
         </p:nvSpPr>
@@ -49046,14 +48900,14 @@
       </p:sp>
       <p:sp>
         <p:nvSpPr>
-          <p:cNvPr id="99" name="Text 97"/>
-          <p:cNvSpPr txBox="1"/>
-          <p:nvPr/>
-        </p:nvSpPr>
-        <p:spPr>
-          <a:xfrm>
-            <a:off x="7379208" y="2944368"/>
-            <a:ext cx="1371600" cy="196596"/>
+          <p:cNvPr id="94" name="Text 92"/>
+          <p:cNvSpPr txBox="1"/>
+          <p:nvPr/>
+        </p:nvSpPr>
+        <p:spPr>
+          <a:xfrm>
+            <a:off x="7379208" y="2926080"/>
+            <a:ext cx="1371600" cy="173736"/>
           </a:xfrm>
           <a:prstGeom prst="rect">
             <a:avLst/>
@@ -49085,13 +48939,13 @@
       </p:sp>
       <p:sp>
         <p:nvSpPr>
-          <p:cNvPr id="100" name="Shape 98"/>
-          <p:cNvSpPr/>
-          <p:nvPr/>
-        </p:nvSpPr>
-        <p:spPr>
-          <a:xfrm>
-            <a:off x="8823960" y="3012948"/>
+          <p:cNvPr id="95" name="Shape 93"/>
+          <p:cNvSpPr/>
+          <p:nvPr/>
+        </p:nvSpPr>
+        <p:spPr>
+          <a:xfrm>
+            <a:off x="8823960" y="2983687"/>
             <a:ext cx="1371600" cy="59436"/>
           </a:xfrm>
           <a:prstGeom prst="roundRect">
@@ -49107,13 +48961,13 @@
       </p:sp>
       <p:sp>
         <p:nvSpPr>
-          <p:cNvPr id="101" name="Shape 99"/>
-          <p:cNvSpPr/>
-          <p:nvPr/>
-        </p:nvSpPr>
-        <p:spPr>
-          <a:xfrm>
-            <a:off x="8823960" y="3012948"/>
+          <p:cNvPr id="96" name="Shape 94"/>
+          <p:cNvSpPr/>
+          <p:nvPr/>
+        </p:nvSpPr>
+        <p:spPr>
+          <a:xfrm>
+            <a:off x="8823960" y="2983687"/>
             <a:ext cx="1371600" cy="59436"/>
           </a:xfrm>
           <a:prstGeom prst="roundRect">
@@ -49129,14 +48983,14 @@
       </p:sp>
       <p:sp>
         <p:nvSpPr>
-          <p:cNvPr id="102" name="Text 100"/>
-          <p:cNvSpPr txBox="1"/>
-          <p:nvPr/>
-        </p:nvSpPr>
-        <p:spPr>
-          <a:xfrm>
-            <a:off x="10287000" y="2944368"/>
-            <a:ext cx="640080" cy="196596"/>
+          <p:cNvPr id="97" name="Text 95"/>
+          <p:cNvSpPr txBox="1"/>
+          <p:nvPr/>
+        </p:nvSpPr>
+        <p:spPr>
+          <a:xfrm>
+            <a:off x="10287000" y="2926080"/>
+            <a:ext cx="640080" cy="173736"/>
           </a:xfrm>
           <a:prstGeom prst="rect">
             <a:avLst/>
@@ -49160,7 +49014,7 @@
                 <a:ea typeface="Poppins" pitchFamily="34" charset="-122"/>
                 <a:cs typeface="Poppins" pitchFamily="34" charset="-120"/>
               </a:rPr>
-              <a:t>31.44h</a:t>
+              <a:t>16.00h</a:t>
             </a:r>
             <a:endParaRPr lang="en-US" sz="800" dirty="0"/>
           </a:p>
@@ -49168,14 +49022,14 @@
       </p:sp>
       <p:sp>
         <p:nvSpPr>
-          <p:cNvPr id="103" name="Text 101"/>
-          <p:cNvSpPr txBox="1"/>
-          <p:nvPr/>
-        </p:nvSpPr>
-        <p:spPr>
-          <a:xfrm>
-            <a:off x="10972800" y="2944368"/>
-            <a:ext cx="603504" cy="196596"/>
+          <p:cNvPr id="98" name="Text 96"/>
+          <p:cNvSpPr txBox="1"/>
+          <p:nvPr/>
+        </p:nvSpPr>
+        <p:spPr>
+          <a:xfrm>
+            <a:off x="10972800" y="2926080"/>
+            <a:ext cx="603504" cy="173736"/>
           </a:xfrm>
           <a:prstGeom prst="rect">
             <a:avLst/>
@@ -49199,7 +49053,7 @@
                 <a:ea typeface="Poppins" pitchFamily="34" charset="-122"/>
                 <a:cs typeface="Poppins" pitchFamily="34" charset="-120"/>
               </a:rPr>
-              <a:t>95.2%</a:t>
+              <a:t>99.6%</a:t>
             </a:r>
             <a:endParaRPr lang="en-US" sz="800" dirty="0"/>
           </a:p>
@@ -49207,14 +49061,14 @@
       </p:sp>
       <p:sp>
         <p:nvSpPr>
-          <p:cNvPr id="104" name="Text 102"/>
-          <p:cNvSpPr txBox="1"/>
-          <p:nvPr/>
-        </p:nvSpPr>
-        <p:spPr>
-          <a:xfrm>
-            <a:off x="7379208" y="3140964"/>
-            <a:ext cx="1371600" cy="196596"/>
+          <p:cNvPr id="99" name="Text 97"/>
+          <p:cNvSpPr txBox="1"/>
+          <p:nvPr/>
+        </p:nvSpPr>
+        <p:spPr>
+          <a:xfrm>
+            <a:off x="7379208" y="3099816"/>
+            <a:ext cx="1371600" cy="173736"/>
           </a:xfrm>
           <a:prstGeom prst="rect">
             <a:avLst/>
@@ -49246,13 +49100,13 @@
       </p:sp>
       <p:sp>
         <p:nvSpPr>
-          <p:cNvPr id="105" name="Shape 103"/>
-          <p:cNvSpPr/>
-          <p:nvPr/>
-        </p:nvSpPr>
-        <p:spPr>
-          <a:xfrm>
-            <a:off x="8823960" y="3209544"/>
+          <p:cNvPr id="100" name="Shape 98"/>
+          <p:cNvSpPr/>
+          <p:nvPr/>
+        </p:nvSpPr>
+        <p:spPr>
+          <a:xfrm>
+            <a:off x="8823960" y="3157423"/>
             <a:ext cx="1371600" cy="59436"/>
           </a:xfrm>
           <a:prstGeom prst="roundRect">
@@ -49268,14 +49122,153 @@
       </p:sp>
       <p:sp>
         <p:nvSpPr>
-          <p:cNvPr id="106" name="Shape 104"/>
-          <p:cNvSpPr/>
-          <p:nvPr/>
-        </p:nvSpPr>
-        <p:spPr>
-          <a:xfrm>
-            <a:off x="8823960" y="3209544"/>
-            <a:ext cx="68493" cy="59436"/>
+          <p:cNvPr id="101" name="Shape 99"/>
+          <p:cNvSpPr/>
+          <p:nvPr/>
+        </p:nvSpPr>
+        <p:spPr>
+          <a:xfrm>
+            <a:off x="8823960" y="3157423"/>
+            <a:ext cx="45720" cy="59436"/>
+          </a:xfrm>
+          <a:prstGeom prst="roundRect">
+            <a:avLst>
+              <a:gd name="adj" fmla="val 64000"/>
+            </a:avLst>
+          </a:prstGeom>
+          <a:solidFill>
+            <a:srgbClr val="2C8394"/>
+          </a:solidFill>
+          <a:ln/>
+        </p:spPr>
+      </p:sp>
+      <p:sp>
+        <p:nvSpPr>
+          <p:cNvPr id="102" name="Text 100"/>
+          <p:cNvSpPr txBox="1"/>
+          <p:nvPr/>
+        </p:nvSpPr>
+        <p:spPr>
+          <a:xfrm>
+            <a:off x="10287000" y="3099816"/>
+            <a:ext cx="640080" cy="173736"/>
+          </a:xfrm>
+          <a:prstGeom prst="rect">
+            <a:avLst/>
+          </a:prstGeom>
+          <a:noFill/>
+          <a:ln/>
+        </p:spPr>
+        <p:txBody>
+          <a:bodyPr wrap="square" lIns="0" tIns="0" rIns="0" bIns="0" rtlCol="0" anchor="ctr"/>
+          <a:lstStyle/>
+          <a:p>
+            <a:pPr algn="r" indent="0" marL="0">
+              <a:buNone/>
+            </a:pPr>
+            <a:r>
+              <a:rPr lang="en-US" sz="800" b="1" dirty="0">
+                <a:solidFill>
+                  <a:srgbClr val="2C8394"/>
+                </a:solidFill>
+                <a:latin typeface="Poppins" pitchFamily="34" charset="0"/>
+                <a:ea typeface="Poppins" pitchFamily="34" charset="-122"/>
+                <a:cs typeface="Poppins" pitchFamily="34" charset="-120"/>
+              </a:rPr>
+              <a:t>0.07h</a:t>
+            </a:r>
+            <a:endParaRPr lang="en-US" sz="800" dirty="0"/>
+          </a:p>
+        </p:txBody>
+      </p:sp>
+      <p:sp>
+        <p:nvSpPr>
+          <p:cNvPr id="103" name="Text 101"/>
+          <p:cNvSpPr txBox="1"/>
+          <p:nvPr/>
+        </p:nvSpPr>
+        <p:spPr>
+          <a:xfrm>
+            <a:off x="10972800" y="3099816"/>
+            <a:ext cx="603504" cy="173736"/>
+          </a:xfrm>
+          <a:prstGeom prst="rect">
+            <a:avLst/>
+          </a:prstGeom>
+          <a:noFill/>
+          <a:ln/>
+        </p:spPr>
+        <p:txBody>
+          <a:bodyPr wrap="square" lIns="0" tIns="0" rIns="0" bIns="0" rtlCol="0" anchor="ctr"/>
+          <a:lstStyle/>
+          <a:p>
+            <a:pPr algn="r" indent="0" marL="0">
+              <a:buNone/>
+            </a:pPr>
+            <a:r>
+              <a:rPr lang="en-US" sz="800" dirty="0">
+                <a:solidFill>
+                  <a:srgbClr val="5E7280"/>
+                </a:solidFill>
+                <a:latin typeface="Poppins" pitchFamily="34" charset="0"/>
+                <a:ea typeface="Poppins" pitchFamily="34" charset="-122"/>
+                <a:cs typeface="Poppins" pitchFamily="34" charset="-120"/>
+              </a:rPr>
+              <a:t>0.4%</a:t>
+            </a:r>
+            <a:endParaRPr lang="en-US" sz="800" dirty="0"/>
+          </a:p>
+        </p:txBody>
+      </p:sp>
+      <p:sp>
+        <p:nvSpPr>
+          <p:cNvPr id="104" name="Text 102"/>
+          <p:cNvSpPr txBox="1"/>
+          <p:nvPr/>
+        </p:nvSpPr>
+        <p:spPr>
+          <a:xfrm>
+            <a:off x="7379208" y="3273552"/>
+            <a:ext cx="1371600" cy="173736"/>
+          </a:xfrm>
+          <a:prstGeom prst="rect">
+            <a:avLst/>
+          </a:prstGeom>
+          <a:noFill/>
+          <a:ln/>
+        </p:spPr>
+        <p:txBody>
+          <a:bodyPr wrap="square" lIns="0" tIns="0" rIns="0" bIns="0" rtlCol="0" anchor="ctr"/>
+          <a:lstStyle/>
+          <a:p>
+            <a:pPr indent="0" marL="0">
+              <a:buNone/>
+            </a:pPr>
+            <a:r>
+              <a:rPr lang="en-US" sz="800" dirty="0">
+                <a:solidFill>
+                  <a:srgbClr val="5E7280"/>
+                </a:solidFill>
+                <a:latin typeface="Poppins" pitchFamily="34" charset="0"/>
+                <a:ea typeface="Poppins" pitchFamily="34" charset="-122"/>
+                <a:cs typeface="Poppins" pitchFamily="34" charset="-120"/>
+              </a:rPr>
+              <a:t>Onboarding</a:t>
+            </a:r>
+            <a:endParaRPr lang="en-US" sz="800" dirty="0"/>
+          </a:p>
+        </p:txBody>
+      </p:sp>
+      <p:sp>
+        <p:nvSpPr>
+          <p:cNvPr id="105" name="Shape 103"/>
+          <p:cNvSpPr/>
+          <p:nvPr/>
+        </p:nvSpPr>
+        <p:spPr>
+          <a:xfrm>
+            <a:off x="8823960" y="3331159"/>
+            <a:ext cx="1371600" cy="59436"/>
           </a:xfrm>
           <a:prstGeom prst="roundRect">
             <a:avLst>
@@ -49283,10 +49276,49 @@
             </a:avLst>
           </a:prstGeom>
           <a:solidFill>
-            <a:srgbClr val="2C8394"/>
-          </a:solidFill>
-          <a:ln/>
-        </p:spPr>
+            <a:srgbClr val="E2EAEE"/>
+          </a:solidFill>
+          <a:ln/>
+        </p:spPr>
+      </p:sp>
+      <p:sp>
+        <p:nvSpPr>
+          <p:cNvPr id="106" name="Text 104"/>
+          <p:cNvSpPr txBox="1"/>
+          <p:nvPr/>
+        </p:nvSpPr>
+        <p:spPr>
+          <a:xfrm>
+            <a:off x="10287000" y="3273552"/>
+            <a:ext cx="640080" cy="173736"/>
+          </a:xfrm>
+          <a:prstGeom prst="rect">
+            <a:avLst/>
+          </a:prstGeom>
+          <a:noFill/>
+          <a:ln/>
+        </p:spPr>
+        <p:txBody>
+          <a:bodyPr wrap="square" lIns="0" tIns="0" rIns="0" bIns="0" rtlCol="0" anchor="ctr"/>
+          <a:lstStyle/>
+          <a:p>
+            <a:pPr algn="r" indent="0" marL="0">
+              <a:buNone/>
+            </a:pPr>
+            <a:r>
+              <a:rPr lang="en-US" sz="800" dirty="0">
+                <a:solidFill>
+                  <a:srgbClr val="8FA1AC"/>
+                </a:solidFill>
+                <a:latin typeface="Poppins" pitchFamily="34" charset="0"/>
+                <a:ea typeface="Poppins" pitchFamily="34" charset="-122"/>
+                <a:cs typeface="Poppins" pitchFamily="34" charset="-120"/>
+              </a:rPr>
+              <a:t>—</a:t>
+            </a:r>
+            <a:endParaRPr lang="en-US" sz="800" dirty="0"/>
+          </a:p>
+        </p:txBody>
       </p:sp>
       <p:sp>
         <p:nvSpPr>
@@ -49296,8 +49328,8 @@
         </p:nvSpPr>
         <p:spPr>
           <a:xfrm>
-            <a:off x="10287000" y="3140964"/>
-            <a:ext cx="640080" cy="196596"/>
+            <a:off x="10972800" y="3273552"/>
+            <a:ext cx="603504" cy="173736"/>
           </a:xfrm>
           <a:prstGeom prst="rect">
             <a:avLst/>
@@ -49313,15 +49345,54 @@
               <a:buNone/>
             </a:pPr>
             <a:r>
-              <a:rPr lang="en-US" sz="800" b="1" dirty="0">
-                <a:solidFill>
-                  <a:srgbClr val="2C8394"/>
-                </a:solidFill>
-                <a:latin typeface="Poppins" pitchFamily="34" charset="0"/>
-                <a:ea typeface="Poppins" pitchFamily="34" charset="-122"/>
-                <a:cs typeface="Poppins" pitchFamily="34" charset="-120"/>
-              </a:rPr>
-              <a:t>1.57h</a:t>
+              <a:rPr lang="en-US" sz="650" dirty="0">
+                <a:solidFill>
+                  <a:srgbClr val="8FA1AC"/>
+                </a:solidFill>
+                <a:latin typeface="Poppins" pitchFamily="34" charset="0"/>
+                <a:ea typeface="Poppins" pitchFamily="34" charset="-122"/>
+                <a:cs typeface="Poppins" pitchFamily="34" charset="-120"/>
+              </a:rPr>
+              <a:t>none</a:t>
+            </a:r>
+            <a:endParaRPr lang="en-US" sz="650" dirty="0"/>
+          </a:p>
+        </p:txBody>
+      </p:sp>
+      <p:sp>
+        <p:nvSpPr>
+          <p:cNvPr id="108" name="Text 106"/>
+          <p:cNvSpPr txBox="1"/>
+          <p:nvPr/>
+        </p:nvSpPr>
+        <p:spPr>
+          <a:xfrm>
+            <a:off x="7379208" y="3447288"/>
+            <a:ext cx="1371600" cy="173736"/>
+          </a:xfrm>
+          <a:prstGeom prst="rect">
+            <a:avLst/>
+          </a:prstGeom>
+          <a:noFill/>
+          <a:ln/>
+        </p:spPr>
+        <p:txBody>
+          <a:bodyPr wrap="square" lIns="0" tIns="0" rIns="0" bIns="0" rtlCol="0" anchor="ctr"/>
+          <a:lstStyle/>
+          <a:p>
+            <a:pPr indent="0" marL="0">
+              <a:buNone/>
+            </a:pPr>
+            <a:r>
+              <a:rPr lang="en-US" sz="800" dirty="0">
+                <a:solidFill>
+                  <a:srgbClr val="5E7280"/>
+                </a:solidFill>
+                <a:latin typeface="Poppins" pitchFamily="34" charset="0"/>
+                <a:ea typeface="Poppins" pitchFamily="34" charset="-122"/>
+                <a:cs typeface="Poppins" pitchFamily="34" charset="-120"/>
+              </a:rPr>
+              <a:t>Training</a:t>
             </a:r>
             <a:endParaRPr lang="en-US" sz="800" dirty="0"/>
           </a:p>
@@ -49329,91 +49400,13 @@
       </p:sp>
       <p:sp>
         <p:nvSpPr>
-          <p:cNvPr id="108" name="Text 106"/>
-          <p:cNvSpPr txBox="1"/>
-          <p:nvPr/>
-        </p:nvSpPr>
-        <p:spPr>
-          <a:xfrm>
-            <a:off x="10972800" y="3140964"/>
-            <a:ext cx="603504" cy="196596"/>
-          </a:xfrm>
-          <a:prstGeom prst="rect">
-            <a:avLst/>
-          </a:prstGeom>
-          <a:noFill/>
-          <a:ln/>
-        </p:spPr>
-        <p:txBody>
-          <a:bodyPr wrap="square" lIns="0" tIns="0" rIns="0" bIns="0" rtlCol="0" anchor="ctr"/>
-          <a:lstStyle/>
-          <a:p>
-            <a:pPr algn="r" indent="0" marL="0">
-              <a:buNone/>
-            </a:pPr>
-            <a:r>
-              <a:rPr lang="en-US" sz="800" dirty="0">
-                <a:solidFill>
-                  <a:srgbClr val="5E7280"/>
-                </a:solidFill>
-                <a:latin typeface="Poppins" pitchFamily="34" charset="0"/>
-                <a:ea typeface="Poppins" pitchFamily="34" charset="-122"/>
-                <a:cs typeface="Poppins" pitchFamily="34" charset="-120"/>
-              </a:rPr>
-              <a:t>4.8%</a:t>
-            </a:r>
-            <a:endParaRPr lang="en-US" sz="800" dirty="0"/>
-          </a:p>
-        </p:txBody>
-      </p:sp>
-      <p:sp>
-        <p:nvSpPr>
-          <p:cNvPr id="109" name="Text 107"/>
-          <p:cNvSpPr txBox="1"/>
-          <p:nvPr/>
-        </p:nvSpPr>
-        <p:spPr>
-          <a:xfrm>
-            <a:off x="7379208" y="3337560"/>
-            <a:ext cx="1371600" cy="196596"/>
-          </a:xfrm>
-          <a:prstGeom prst="rect">
-            <a:avLst/>
-          </a:prstGeom>
-          <a:noFill/>
-          <a:ln/>
-        </p:spPr>
-        <p:txBody>
-          <a:bodyPr wrap="square" lIns="0" tIns="0" rIns="0" bIns="0" rtlCol="0" anchor="ctr"/>
-          <a:lstStyle/>
-          <a:p>
-            <a:pPr indent="0" marL="0">
-              <a:buNone/>
-            </a:pPr>
-            <a:r>
-              <a:rPr lang="en-US" sz="800" dirty="0">
-                <a:solidFill>
-                  <a:srgbClr val="5E7280"/>
-                </a:solidFill>
-                <a:latin typeface="Poppins" pitchFamily="34" charset="0"/>
-                <a:ea typeface="Poppins" pitchFamily="34" charset="-122"/>
-                <a:cs typeface="Poppins" pitchFamily="34" charset="-120"/>
-              </a:rPr>
-              <a:t>Onboarding</a:t>
-            </a:r>
-            <a:endParaRPr lang="en-US" sz="800" dirty="0"/>
-          </a:p>
-        </p:txBody>
-      </p:sp>
-      <p:sp>
-        <p:nvSpPr>
-          <p:cNvPr id="110" name="Shape 108"/>
-          <p:cNvSpPr/>
-          <p:nvPr/>
-        </p:nvSpPr>
-        <p:spPr>
-          <a:xfrm>
-            <a:off x="8823960" y="3406140"/>
+          <p:cNvPr id="109" name="Shape 107"/>
+          <p:cNvSpPr/>
+          <p:nvPr/>
+        </p:nvSpPr>
+        <p:spPr>
+          <a:xfrm>
+            <a:off x="8823960" y="3504895"/>
             <a:ext cx="1371600" cy="59436"/>
           </a:xfrm>
           <a:prstGeom prst="roundRect">
@@ -49429,14 +49422,53 @@
       </p:sp>
       <p:sp>
         <p:nvSpPr>
+          <p:cNvPr id="110" name="Text 108"/>
+          <p:cNvSpPr txBox="1"/>
+          <p:nvPr/>
+        </p:nvSpPr>
+        <p:spPr>
+          <a:xfrm>
+            <a:off x="10287000" y="3447288"/>
+            <a:ext cx="640080" cy="173736"/>
+          </a:xfrm>
+          <a:prstGeom prst="rect">
+            <a:avLst/>
+          </a:prstGeom>
+          <a:noFill/>
+          <a:ln/>
+        </p:spPr>
+        <p:txBody>
+          <a:bodyPr wrap="square" lIns="0" tIns="0" rIns="0" bIns="0" rtlCol="0" anchor="ctr"/>
+          <a:lstStyle/>
+          <a:p>
+            <a:pPr algn="r" indent="0" marL="0">
+              <a:buNone/>
+            </a:pPr>
+            <a:r>
+              <a:rPr lang="en-US" sz="800" dirty="0">
+                <a:solidFill>
+                  <a:srgbClr val="8FA1AC"/>
+                </a:solidFill>
+                <a:latin typeface="Poppins" pitchFamily="34" charset="0"/>
+                <a:ea typeface="Poppins" pitchFamily="34" charset="-122"/>
+                <a:cs typeface="Poppins" pitchFamily="34" charset="-120"/>
+              </a:rPr>
+              <a:t>—</a:t>
+            </a:r>
+            <a:endParaRPr lang="en-US" sz="800" dirty="0"/>
+          </a:p>
+        </p:txBody>
+      </p:sp>
+      <p:sp>
+        <p:nvSpPr>
           <p:cNvPr id="111" name="Text 109"/>
           <p:cNvSpPr txBox="1"/>
           <p:nvPr/>
         </p:nvSpPr>
         <p:spPr>
           <a:xfrm>
-            <a:off x="10287000" y="3337560"/>
-            <a:ext cx="640080" cy="196596"/>
+            <a:off x="10972800" y="3447288"/>
+            <a:ext cx="603504" cy="173736"/>
           </a:xfrm>
           <a:prstGeom prst="rect">
             <a:avLst/>
@@ -49452,15 +49484,54 @@
               <a:buNone/>
             </a:pPr>
             <a:r>
+              <a:rPr lang="en-US" sz="650" dirty="0">
+                <a:solidFill>
+                  <a:srgbClr val="8FA1AC"/>
+                </a:solidFill>
+                <a:latin typeface="Poppins" pitchFamily="34" charset="0"/>
+                <a:ea typeface="Poppins" pitchFamily="34" charset="-122"/>
+                <a:cs typeface="Poppins" pitchFamily="34" charset="-120"/>
+              </a:rPr>
+              <a:t>none</a:t>
+            </a:r>
+            <a:endParaRPr lang="en-US" sz="650" dirty="0"/>
+          </a:p>
+        </p:txBody>
+      </p:sp>
+      <p:sp>
+        <p:nvSpPr>
+          <p:cNvPr id="112" name="Text 110"/>
+          <p:cNvSpPr txBox="1"/>
+          <p:nvPr/>
+        </p:nvSpPr>
+        <p:spPr>
+          <a:xfrm>
+            <a:off x="7379208" y="3621024"/>
+            <a:ext cx="1371600" cy="173736"/>
+          </a:xfrm>
+          <a:prstGeom prst="rect">
+            <a:avLst/>
+          </a:prstGeom>
+          <a:noFill/>
+          <a:ln/>
+        </p:spPr>
+        <p:txBody>
+          <a:bodyPr wrap="square" lIns="0" tIns="0" rIns="0" bIns="0" rtlCol="0" anchor="ctr"/>
+          <a:lstStyle/>
+          <a:p>
+            <a:pPr indent="0" marL="0">
+              <a:buNone/>
+            </a:pPr>
+            <a:r>
               <a:rPr lang="en-US" sz="800" dirty="0">
                 <a:solidFill>
-                  <a:srgbClr val="8FA1AC"/>
-                </a:solidFill>
-                <a:latin typeface="Poppins" pitchFamily="34" charset="0"/>
-                <a:ea typeface="Poppins" pitchFamily="34" charset="-122"/>
-                <a:cs typeface="Poppins" pitchFamily="34" charset="-120"/>
-              </a:rPr>
-              <a:t>—</a:t>
+                  <a:srgbClr val="5E7280"/>
+                </a:solidFill>
+                <a:latin typeface="Poppins" pitchFamily="34" charset="0"/>
+                <a:ea typeface="Poppins" pitchFamily="34" charset="-122"/>
+                <a:cs typeface="Poppins" pitchFamily="34" charset="-120"/>
+              </a:rPr>
+              <a:t>Warranty</a:t>
             </a:r>
             <a:endParaRPr lang="en-US" sz="800" dirty="0"/>
           </a:p>
@@ -49468,91 +49539,13 @@
       </p:sp>
       <p:sp>
         <p:nvSpPr>
-          <p:cNvPr id="112" name="Text 110"/>
-          <p:cNvSpPr txBox="1"/>
-          <p:nvPr/>
-        </p:nvSpPr>
-        <p:spPr>
-          <a:xfrm>
-            <a:off x="10972800" y="3337560"/>
-            <a:ext cx="603504" cy="196596"/>
-          </a:xfrm>
-          <a:prstGeom prst="rect">
-            <a:avLst/>
-          </a:prstGeom>
-          <a:noFill/>
-          <a:ln/>
-        </p:spPr>
-        <p:txBody>
-          <a:bodyPr wrap="square" lIns="0" tIns="0" rIns="0" bIns="0" rtlCol="0" anchor="ctr"/>
-          <a:lstStyle/>
-          <a:p>
-            <a:pPr algn="r" indent="0" marL="0">
-              <a:buNone/>
-            </a:pPr>
-            <a:r>
-              <a:rPr lang="en-US" sz="650" dirty="0">
-                <a:solidFill>
-                  <a:srgbClr val="8FA1AC"/>
-                </a:solidFill>
-                <a:latin typeface="Poppins" pitchFamily="34" charset="0"/>
-                <a:ea typeface="Poppins" pitchFamily="34" charset="-122"/>
-                <a:cs typeface="Poppins" pitchFamily="34" charset="-120"/>
-              </a:rPr>
-              <a:t>none</a:t>
-            </a:r>
-            <a:endParaRPr lang="en-US" sz="650" dirty="0"/>
-          </a:p>
-        </p:txBody>
-      </p:sp>
-      <p:sp>
-        <p:nvSpPr>
-          <p:cNvPr id="113" name="Text 111"/>
-          <p:cNvSpPr txBox="1"/>
-          <p:nvPr/>
-        </p:nvSpPr>
-        <p:spPr>
-          <a:xfrm>
-            <a:off x="7379208" y="3534156"/>
-            <a:ext cx="1371600" cy="196596"/>
-          </a:xfrm>
-          <a:prstGeom prst="rect">
-            <a:avLst/>
-          </a:prstGeom>
-          <a:noFill/>
-          <a:ln/>
-        </p:spPr>
-        <p:txBody>
-          <a:bodyPr wrap="square" lIns="0" tIns="0" rIns="0" bIns="0" rtlCol="0" anchor="ctr"/>
-          <a:lstStyle/>
-          <a:p>
-            <a:pPr indent="0" marL="0">
-              <a:buNone/>
-            </a:pPr>
-            <a:r>
-              <a:rPr lang="en-US" sz="800" dirty="0">
-                <a:solidFill>
-                  <a:srgbClr val="5E7280"/>
-                </a:solidFill>
-                <a:latin typeface="Poppins" pitchFamily="34" charset="0"/>
-                <a:ea typeface="Poppins" pitchFamily="34" charset="-122"/>
-                <a:cs typeface="Poppins" pitchFamily="34" charset="-120"/>
-              </a:rPr>
-              <a:t>Training</a:t>
-            </a:r>
-            <a:endParaRPr lang="en-US" sz="800" dirty="0"/>
-          </a:p>
-        </p:txBody>
-      </p:sp>
-      <p:sp>
-        <p:nvSpPr>
-          <p:cNvPr id="114" name="Shape 112"/>
-          <p:cNvSpPr/>
-          <p:nvPr/>
-        </p:nvSpPr>
-        <p:spPr>
-          <a:xfrm>
-            <a:off x="8823960" y="3602736"/>
+          <p:cNvPr id="113" name="Shape 111"/>
+          <p:cNvSpPr/>
+          <p:nvPr/>
+        </p:nvSpPr>
+        <p:spPr>
+          <a:xfrm>
+            <a:off x="8823960" y="3678631"/>
             <a:ext cx="1371600" cy="59436"/>
           </a:xfrm>
           <a:prstGeom prst="roundRect">
@@ -49568,14 +49561,53 @@
       </p:sp>
       <p:sp>
         <p:nvSpPr>
+          <p:cNvPr id="114" name="Text 112"/>
+          <p:cNvSpPr txBox="1"/>
+          <p:nvPr/>
+        </p:nvSpPr>
+        <p:spPr>
+          <a:xfrm>
+            <a:off x="10287000" y="3621024"/>
+            <a:ext cx="640080" cy="173736"/>
+          </a:xfrm>
+          <a:prstGeom prst="rect">
+            <a:avLst/>
+          </a:prstGeom>
+          <a:noFill/>
+          <a:ln/>
+        </p:spPr>
+        <p:txBody>
+          <a:bodyPr wrap="square" lIns="0" tIns="0" rIns="0" bIns="0" rtlCol="0" anchor="ctr"/>
+          <a:lstStyle/>
+          <a:p>
+            <a:pPr algn="r" indent="0" marL="0">
+              <a:buNone/>
+            </a:pPr>
+            <a:r>
+              <a:rPr lang="en-US" sz="800" dirty="0">
+                <a:solidFill>
+                  <a:srgbClr val="8FA1AC"/>
+                </a:solidFill>
+                <a:latin typeface="Poppins" pitchFamily="34" charset="0"/>
+                <a:ea typeface="Poppins" pitchFamily="34" charset="-122"/>
+                <a:cs typeface="Poppins" pitchFamily="34" charset="-120"/>
+              </a:rPr>
+              <a:t>—</a:t>
+            </a:r>
+            <a:endParaRPr lang="en-US" sz="800" dirty="0"/>
+          </a:p>
+        </p:txBody>
+      </p:sp>
+      <p:sp>
+        <p:nvSpPr>
           <p:cNvPr id="115" name="Text 113"/>
           <p:cNvSpPr txBox="1"/>
           <p:nvPr/>
         </p:nvSpPr>
         <p:spPr>
           <a:xfrm>
-            <a:off x="10287000" y="3534156"/>
-            <a:ext cx="640080" cy="196596"/>
+            <a:off x="10972800" y="3621024"/>
+            <a:ext cx="603504" cy="173736"/>
           </a:xfrm>
           <a:prstGeom prst="rect">
             <a:avLst/>
@@ -49591,7 +49623,7 @@
               <a:buNone/>
             </a:pPr>
             <a:r>
-              <a:rPr lang="en-US" sz="800" dirty="0">
+              <a:rPr lang="en-US" sz="650" dirty="0">
                 <a:solidFill>
                   <a:srgbClr val="8FA1AC"/>
                 </a:solidFill>
@@ -49599,187 +49631,185 @@
                 <a:ea typeface="Poppins" pitchFamily="34" charset="-122"/>
                 <a:cs typeface="Poppins" pitchFamily="34" charset="-120"/>
               </a:rPr>
-              <a:t>—</a:t>
+              <a:t>none</a:t>
+            </a:r>
+            <a:endParaRPr lang="en-US" sz="650" dirty="0"/>
+          </a:p>
+        </p:txBody>
+      </p:sp>
+      <p:sp>
+        <p:nvSpPr>
+          <p:cNvPr id="116" name="Shape 114"/>
+          <p:cNvSpPr/>
+          <p:nvPr/>
+        </p:nvSpPr>
+        <p:spPr>
+          <a:xfrm>
+            <a:off x="7379208" y="3822192"/>
+            <a:ext cx="4197096" cy="10973"/>
+          </a:xfrm>
+          <a:prstGeom prst="rect">
+            <a:avLst/>
+          </a:prstGeom>
+          <a:solidFill>
+            <a:srgbClr val="12293A"/>
+          </a:solidFill>
+          <a:ln/>
+        </p:spPr>
+      </p:sp>
+      <p:sp>
+        <p:nvSpPr>
+          <p:cNvPr id="117" name="Text 115"/>
+          <p:cNvSpPr txBox="1"/>
+          <p:nvPr/>
+        </p:nvSpPr>
+        <p:spPr>
+          <a:xfrm>
+            <a:off x="7379208" y="3849624"/>
+            <a:ext cx="1371600" cy="182880"/>
+          </a:xfrm>
+          <a:prstGeom prst="rect">
+            <a:avLst/>
+          </a:prstGeom>
+          <a:noFill/>
+          <a:ln/>
+        </p:spPr>
+        <p:txBody>
+          <a:bodyPr wrap="square" lIns="0" tIns="0" rIns="0" bIns="0" rtlCol="0" anchor="ctr"/>
+          <a:lstStyle/>
+          <a:p>
+            <a:pPr indent="0" marL="0">
+              <a:buNone/>
+            </a:pPr>
+            <a:r>
+              <a:rPr lang="en-US" sz="850" b="1" dirty="0">
+                <a:solidFill>
+                  <a:srgbClr val="12293A"/>
+                </a:solidFill>
+                <a:latin typeface="Poppins" pitchFamily="34" charset="0"/>
+                <a:ea typeface="Poppins" pitchFamily="34" charset="-122"/>
+                <a:cs typeface="Poppins" pitchFamily="34" charset="-120"/>
+              </a:rPr>
+              <a:t>TOTAL</a:t>
+            </a:r>
+            <a:endParaRPr lang="en-US" sz="850" dirty="0"/>
+          </a:p>
+        </p:txBody>
+      </p:sp>
+      <p:sp>
+        <p:nvSpPr>
+          <p:cNvPr id="118" name="Text 116"/>
+          <p:cNvSpPr txBox="1"/>
+          <p:nvPr/>
+        </p:nvSpPr>
+        <p:spPr>
+          <a:xfrm>
+            <a:off x="8823960" y="3849624"/>
+            <a:ext cx="1371600" cy="182880"/>
+          </a:xfrm>
+          <a:prstGeom prst="rect">
+            <a:avLst/>
+          </a:prstGeom>
+          <a:noFill/>
+          <a:ln/>
+        </p:spPr>
+        <p:txBody>
+          <a:bodyPr wrap="square" lIns="0" tIns="0" rIns="0" bIns="0" rtlCol="0" anchor="ctr"/>
+          <a:lstStyle/>
+          <a:p>
+            <a:pPr indent="0" marL="0">
+              <a:buNone/>
+            </a:pPr>
+            <a:r>
+              <a:rPr lang="en-US" sz="650" dirty="0">
+                <a:solidFill>
+                  <a:srgbClr val="5E7280"/>
+                </a:solidFill>
+                <a:latin typeface="Poppins" pitchFamily="34" charset="0"/>
+                <a:ea typeface="Poppins" pitchFamily="34" charset="-122"/>
+                <a:cs typeface="Poppins" pitchFamily="34" charset="-120"/>
+              </a:rPr>
+              <a:t>13 PS items carry time</a:t>
+            </a:r>
+            <a:endParaRPr lang="en-US" sz="650" dirty="0"/>
+          </a:p>
+        </p:txBody>
+      </p:sp>
+      <p:sp>
+        <p:nvSpPr>
+          <p:cNvPr id="119" name="Text 117"/>
+          <p:cNvSpPr txBox="1"/>
+          <p:nvPr/>
+        </p:nvSpPr>
+        <p:spPr>
+          <a:xfrm>
+            <a:off x="10287000" y="3849624"/>
+            <a:ext cx="640080" cy="182880"/>
+          </a:xfrm>
+          <a:prstGeom prst="rect">
+            <a:avLst/>
+          </a:prstGeom>
+          <a:noFill/>
+          <a:ln/>
+        </p:spPr>
+        <p:txBody>
+          <a:bodyPr wrap="square" lIns="0" tIns="0" rIns="0" bIns="0" rtlCol="0" anchor="ctr"/>
+          <a:lstStyle/>
+          <a:p>
+            <a:pPr algn="r" indent="0" marL="0">
+              <a:buNone/>
+            </a:pPr>
+            <a:r>
+              <a:rPr lang="en-US" sz="900" b="1" dirty="0">
+                <a:solidFill>
+                  <a:srgbClr val="2C8394"/>
+                </a:solidFill>
+                <a:latin typeface="Poppins" pitchFamily="34" charset="0"/>
+                <a:ea typeface="Poppins" pitchFamily="34" charset="-122"/>
+                <a:cs typeface="Poppins" pitchFamily="34" charset="-120"/>
+              </a:rPr>
+              <a:t>16.07h</a:t>
+            </a:r>
+            <a:endParaRPr lang="en-US" sz="900" dirty="0"/>
+          </a:p>
+        </p:txBody>
+      </p:sp>
+      <p:sp>
+        <p:nvSpPr>
+          <p:cNvPr id="120" name="Text 118"/>
+          <p:cNvSpPr txBox="1"/>
+          <p:nvPr/>
+        </p:nvSpPr>
+        <p:spPr>
+          <a:xfrm>
+            <a:off x="10972800" y="3849624"/>
+            <a:ext cx="603504" cy="182880"/>
+          </a:xfrm>
+          <a:prstGeom prst="rect">
+            <a:avLst/>
+          </a:prstGeom>
+          <a:noFill/>
+          <a:ln/>
+        </p:spPr>
+        <p:txBody>
+          <a:bodyPr wrap="square" lIns="0" tIns="0" rIns="0" bIns="0" rtlCol="0" anchor="ctr"/>
+          <a:lstStyle/>
+          <a:p>
+            <a:pPr algn="r" indent="0" marL="0">
+              <a:buNone/>
+            </a:pPr>
+            <a:r>
+              <a:rPr lang="en-US" sz="800" b="1" dirty="0">
+                <a:solidFill>
+                  <a:srgbClr val="5E7280"/>
+                </a:solidFill>
+                <a:latin typeface="Poppins" pitchFamily="34" charset="0"/>
+                <a:ea typeface="Poppins" pitchFamily="34" charset="-122"/>
+                <a:cs typeface="Poppins" pitchFamily="34" charset="-120"/>
+              </a:rPr>
+              <a:t>100%</a:t>
             </a:r>
             <a:endParaRPr lang="en-US" sz="800" dirty="0"/>
-          </a:p>
-        </p:txBody>
-      </p:sp>
-      <p:sp>
-        <p:nvSpPr>
-          <p:cNvPr id="116" name="Text 114"/>
-          <p:cNvSpPr txBox="1"/>
-          <p:nvPr/>
-        </p:nvSpPr>
-        <p:spPr>
-          <a:xfrm>
-            <a:off x="10972800" y="3534156"/>
-            <a:ext cx="603504" cy="196596"/>
-          </a:xfrm>
-          <a:prstGeom prst="rect">
-            <a:avLst/>
-          </a:prstGeom>
-          <a:noFill/>
-          <a:ln/>
-        </p:spPr>
-        <p:txBody>
-          <a:bodyPr wrap="square" lIns="0" tIns="0" rIns="0" bIns="0" rtlCol="0" anchor="ctr"/>
-          <a:lstStyle/>
-          <a:p>
-            <a:pPr algn="r" indent="0" marL="0">
-              <a:buNone/>
-            </a:pPr>
-            <a:r>
-              <a:rPr lang="en-US" sz="650" dirty="0">
-                <a:solidFill>
-                  <a:srgbClr val="8FA1AC"/>
-                </a:solidFill>
-                <a:latin typeface="Poppins" pitchFamily="34" charset="0"/>
-                <a:ea typeface="Poppins" pitchFamily="34" charset="-122"/>
-                <a:cs typeface="Poppins" pitchFamily="34" charset="-120"/>
-              </a:rPr>
-              <a:t>none</a:t>
-            </a:r>
-            <a:endParaRPr lang="en-US" sz="650" dirty="0"/>
-          </a:p>
-        </p:txBody>
-      </p:sp>
-      <p:sp>
-        <p:nvSpPr>
-          <p:cNvPr id="117" name="Text 115"/>
-          <p:cNvSpPr txBox="1"/>
-          <p:nvPr/>
-        </p:nvSpPr>
-        <p:spPr>
-          <a:xfrm>
-            <a:off x="7379208" y="3730752"/>
-            <a:ext cx="1371600" cy="196596"/>
-          </a:xfrm>
-          <a:prstGeom prst="rect">
-            <a:avLst/>
-          </a:prstGeom>
-          <a:noFill/>
-          <a:ln/>
-        </p:spPr>
-        <p:txBody>
-          <a:bodyPr wrap="square" lIns="0" tIns="0" rIns="0" bIns="0" rtlCol="0" anchor="ctr"/>
-          <a:lstStyle/>
-          <a:p>
-            <a:pPr indent="0" marL="0">
-              <a:buNone/>
-            </a:pPr>
-            <a:r>
-              <a:rPr lang="en-US" sz="800" dirty="0">
-                <a:solidFill>
-                  <a:srgbClr val="5E7280"/>
-                </a:solidFill>
-                <a:latin typeface="Poppins" pitchFamily="34" charset="0"/>
-                <a:ea typeface="Poppins" pitchFamily="34" charset="-122"/>
-                <a:cs typeface="Poppins" pitchFamily="34" charset="-120"/>
-              </a:rPr>
-              <a:t>Warranty</a:t>
-            </a:r>
-            <a:endParaRPr lang="en-US" sz="800" dirty="0"/>
-          </a:p>
-        </p:txBody>
-      </p:sp>
-      <p:sp>
-        <p:nvSpPr>
-          <p:cNvPr id="118" name="Shape 116"/>
-          <p:cNvSpPr/>
-          <p:nvPr/>
-        </p:nvSpPr>
-        <p:spPr>
-          <a:xfrm>
-            <a:off x="8823960" y="3799332"/>
-            <a:ext cx="1371600" cy="59436"/>
-          </a:xfrm>
-          <a:prstGeom prst="roundRect">
-            <a:avLst>
-              <a:gd name="adj" fmla="val 49231"/>
-            </a:avLst>
-          </a:prstGeom>
-          <a:solidFill>
-            <a:srgbClr val="E2EAEE"/>
-          </a:solidFill>
-          <a:ln/>
-        </p:spPr>
-      </p:sp>
-      <p:sp>
-        <p:nvSpPr>
-          <p:cNvPr id="119" name="Text 117"/>
-          <p:cNvSpPr txBox="1"/>
-          <p:nvPr/>
-        </p:nvSpPr>
-        <p:spPr>
-          <a:xfrm>
-            <a:off x="10287000" y="3730752"/>
-            <a:ext cx="640080" cy="196596"/>
-          </a:xfrm>
-          <a:prstGeom prst="rect">
-            <a:avLst/>
-          </a:prstGeom>
-          <a:noFill/>
-          <a:ln/>
-        </p:spPr>
-        <p:txBody>
-          <a:bodyPr wrap="square" lIns="0" tIns="0" rIns="0" bIns="0" rtlCol="0" anchor="ctr"/>
-          <a:lstStyle/>
-          <a:p>
-            <a:pPr algn="r" indent="0" marL="0">
-              <a:buNone/>
-            </a:pPr>
-            <a:r>
-              <a:rPr lang="en-US" sz="800" dirty="0">
-                <a:solidFill>
-                  <a:srgbClr val="8FA1AC"/>
-                </a:solidFill>
-                <a:latin typeface="Poppins" pitchFamily="34" charset="0"/>
-                <a:ea typeface="Poppins" pitchFamily="34" charset="-122"/>
-                <a:cs typeface="Poppins" pitchFamily="34" charset="-120"/>
-              </a:rPr>
-              <a:t>—</a:t>
-            </a:r>
-            <a:endParaRPr lang="en-US" sz="800" dirty="0"/>
-          </a:p>
-        </p:txBody>
-      </p:sp>
-      <p:sp>
-        <p:nvSpPr>
-          <p:cNvPr id="120" name="Text 118"/>
-          <p:cNvSpPr txBox="1"/>
-          <p:nvPr/>
-        </p:nvSpPr>
-        <p:spPr>
-          <a:xfrm>
-            <a:off x="10972800" y="3730752"/>
-            <a:ext cx="603504" cy="196596"/>
-          </a:xfrm>
-          <a:prstGeom prst="rect">
-            <a:avLst/>
-          </a:prstGeom>
-          <a:noFill/>
-          <a:ln/>
-        </p:spPr>
-        <p:txBody>
-          <a:bodyPr wrap="square" lIns="0" tIns="0" rIns="0" bIns="0" rtlCol="0" anchor="ctr"/>
-          <a:lstStyle/>
-          <a:p>
-            <a:pPr algn="r" indent="0" marL="0">
-              <a:buNone/>
-            </a:pPr>
-            <a:r>
-              <a:rPr lang="en-US" sz="650" dirty="0">
-                <a:solidFill>
-                  <a:srgbClr val="8FA1AC"/>
-                </a:solidFill>
-                <a:latin typeface="Poppins" pitchFamily="34" charset="0"/>
-                <a:ea typeface="Poppins" pitchFamily="34" charset="-122"/>
-                <a:cs typeface="Poppins" pitchFamily="34" charset="-120"/>
-              </a:rPr>
-              <a:t>none</a:t>
-            </a:r>
-            <a:endParaRPr lang="en-US" sz="650" dirty="0"/>
           </a:p>
         </p:txBody>
       </p:sp>
@@ -49898,7 +49928,7 @@
                 <a:ea typeface="Poppins" pitchFamily="34" charset="-122"/>
                 <a:cs typeface="Poppins" pitchFamily="34" charset="-120"/>
               </a:rPr>
-              <a:t>7.9% billable utilisation is a logging number, not a delivery number. </a:t>
+              <a:t>4.7% billable utilisation is a logging number, not a delivery number. </a:t>
             </a:r>
             <a:pPr indent="0" marL="0">
               <a:spcAft>
@@ -49915,7 +49945,7 @@
                 <a:ea typeface="Poppins" pitchFamily="34" charset="-122"/>
                 <a:cs typeface="Poppins" pitchFamily="34" charset="-120"/>
               </a:rPr>
-              <a:t>33.01h landed against 418h of capacity, but only 13% of the week's 132 PS items carry hours.</a:t>
+              <a:t>16.07h landed against 342h of capacity, but only 10% of the week's 132 PS items carry hours.</a:t>
             </a:r>
             <a:endParaRPr lang="en-US" sz="900" dirty="0"/>
           </a:p>
@@ -49946,7 +49976,7 @@
                 <a:ea typeface="Poppins" pitchFamily="34" charset="-122"/>
                 <a:cs typeface="Poppins" pitchFamily="34" charset="-120"/>
               </a:rPr>
-              <a:t>Two people carry the entire logged total. </a:t>
+              <a:t>One person carries almost the entire logged total. </a:t>
             </a:r>
             <a:pPr indent="0" marL="0">
               <a:spcAft>
@@ -49963,7 +49993,7 @@
                 <a:ea typeface="Poppins" pitchFamily="34" charset="-122"/>
                 <a:cs typeface="Poppins" pitchFamily="34" charset="-120"/>
               </a:rPr>
-              <a:t>Katherine Fenwick 38.2% and Rhys Woolcock 36.4%; the other 5 PS members logged nothing at all.</a:t>
+              <a:t>Rhys Woolcock 13.82h (36.4%) is 86% of the hours; Gregory, Isayah and Joshua logged under 2h each and 5 PS members logged nothing at all.</a:t>
             </a:r>
             <a:endParaRPr lang="en-US" sz="900" dirty="0"/>
           </a:p>
@@ -50011,7 +50041,7 @@
                 <a:ea typeface="Poppins" pitchFamily="34" charset="-122"/>
                 <a:cs typeface="Poppins" pitchFamily="34" charset="-120"/>
               </a:rPr>
-              <a:t>64 PS cases opened this week; Tech carries 95% of logged time. Median time to close since 8 Sep: Tech 0.6 d.</a:t>
+              <a:t>64 PS cases opened this week; Tech carries 99.6% of logged time. Median time to close since 8 Sep: Tech 0.6 d.</a:t>
             </a:r>
             <a:endParaRPr lang="en-US" sz="900" dirty="0"/>
           </a:p>
@@ -50050,7 +50080,7 @@
                 <a:ea typeface="Poppins" pitchFamily="34" charset="-122"/>
                 <a:cs typeface="Poppins" pitchFamily="34" charset="-120"/>
               </a:rPr>
-              <a:t>All logged hours are treated as billable — creatio_non_billable is populated on only 3 of 30 records, so billable/non-billable is not yet separable. 2.44h of the Tech total sits on a record named 'Warranty Test' — worth clearing out.</a:t>
+              <a:t>All logged hours are treated as billable — creatio_non_billable is populated on only 3 of the 30 PS records carrying time, so billable/non-billable is not yet separable.</a:t>
             </a:r>
             <a:endParaRPr lang="en-US" sz="750" dirty="0"/>
           </a:p>

--- a/exec-deck/output/H&L Weekly Update - WC 14 Sep 2026.pptx
+++ b/exec-deck/output/H&L Weekly Update - WC 14 Sep 2026.pptx
@@ -6057,7 +6057,7 @@
             <a:r>
               <a:rPr lang="en-US" sz="900" b="1" dirty="0">
                 <a:solidFill>
-                  <a:srgbClr val="3D8F5F"/>
+                  <a:srgbClr val="B4552D"/>
                 </a:solidFill>
                 <a:latin typeface="Poppins" pitchFamily="34" charset="0"/>
                 <a:ea typeface="Poppins" pitchFamily="34" charset="-122"/>
@@ -6077,7 +6077,7 @@
                 <a:ea typeface="Poppins" pitchFamily="34" charset="-122"/>
                 <a:cs typeface="Poppins" pitchFamily="34" charset="-120"/>
               </a:rPr>
-              <a:t>The tail is finally coming down. </a:t>
+              <a:t>The backlog turned this week. </a:t>
             </a:r>
             <a:pPr indent="0" marL="0">
               <a:spcAft>
@@ -6094,7 +6094,7 @@
                 <a:ea typeface="Poppins" pitchFamily="34" charset="-122"/>
                 <a:cs typeface="Poppins" pitchFamily="34" charset="-120"/>
               </a:rPr>
-              <a:t>90+ day cases fell 35 → 10 and the 31–90 band 151 → 132 across the first two HubSpot weeks; backlog 681 → 575. Outflow beat inflow this week (591 resolved vs 490 in).</a:t>
+              <a:t>Inflow 490 beat resolved 591 — the first week since cutover where it did. Open rose 575 → 575, and the 8–30 day band carried it (249 → 242). The 90+ tail is still the win: 10 → 10.</a:t>
             </a:r>
             <a:endParaRPr lang="en-US" sz="900" dirty="0"/>
           </a:p>
@@ -6125,7 +6125,7 @@
                 <a:ea typeface="Poppins" pitchFamily="34" charset="-122"/>
                 <a:cs typeface="Poppins" pitchFamily="34" charset="-120"/>
               </a:rPr>
-              <a:t>History is frozen, not restated. </a:t>
+              <a:t>31–90 days is where it is building. </a:t>
             </a:r>
             <a:pPr indent="0" marL="0">
               <a:spcAft>
@@ -6142,7 +6142,7 @@
                 <a:ea typeface="Poppins" pitchFamily="34" charset="-122"/>
                 <a:cs typeface="Poppins" pitchFamily="34" charset="-120"/>
               </a:rPr>
-              <a:t>Weeks to 30 Aug are the Creatio series as it stood at the final extract. The migration re-dated old closes, so those weeks cannot be recomputed in HubSpot — and the 7 Sep week sits inside the cutover, so it is not reported.</a:t>
+              <a:t>That band went 132 → 118 in the week, so 142 cases are now past 30 days against 142 a fortnight ago. Work aged 8–30 days is ageing through rather than closing.</a:t>
             </a:r>
             <a:endParaRPr lang="en-US" sz="900" dirty="0"/>
           </a:p>
@@ -6738,7 +6738,7 @@
                 <a:ea typeface="Poppins" pitchFamily="34" charset="-122"/>
                 <a:cs typeface="Poppins" pitchFamily="34" charset="-120"/>
               </a:rPr>
-              <a:t>tickets closed this week (14–20 Sep) with an AI draft in scope · voicemail/junk excluded · </a:t>
+              <a:t>tickets closed this week (14 Sep–20 Sep) with an AI draft in scope · voicemail/junk excluded · </a:t>
             </a:r>
             <a:pPr indent="0" marL="0">
               <a:buNone/>
@@ -34522,7 +34522,7 @@
                 <a:ea typeface="Poppins" pitchFamily="34" charset="-122"/>
                 <a:cs typeface="Poppins" pitchFamily="34" charset="-120"/>
               </a:rPr>
-              <a:t>HARDWARE ($/qtr) · extracts to 20 Sep · Δ wk = 14–20 Sep</a:t>
+              <a:t>HARDWARE ($/qtr) · Sysnet Δ wk = 14–20 Sep</a:t>
             </a:r>
             <a:endParaRPr lang="en-US" sz="800" dirty="0"/>
           </a:p>
@@ -37134,7 +37134,7 @@
                 <a:ea typeface="Poppins" pitchFamily="34" charset="-122"/>
                 <a:cs typeface="Poppins" pitchFamily="34" charset="-120"/>
               </a:rPr>
-              <a:t>+0k</a:t>
+              <a:t>+0</a:t>
             </a:r>
             <a:endParaRPr lang="en-US" sz="850" dirty="0"/>
           </a:p>
@@ -38258,7 +38258,7 @@
                 <a:ea typeface="Poppins" pitchFamily="34" charset="-122"/>
                 <a:cs typeface="Poppins" pitchFamily="34" charset="-120"/>
               </a:rPr>
-              <a:t>MRR = net new + expansion invoiced in Q3 (movement register, live to 20 Sep) · H&amp;L Pay net new $1,770/mo is tracked separately and never sits inside core MRR</a:t>
+              <a:t>MRR = net new + expansion invoiced in Q3 (movement register, live 20 Sep) · H&amp;L Pay net new $1,770/mo is tracked separately and never sits inside core MRR</a:t>
             </a:r>
             <a:endParaRPr lang="en-US" sz="700" dirty="0"/>
           </a:p>
@@ -38396,7 +38396,7 @@
                 <a:ea typeface="Poppins" pitchFamily="34" charset="-122"/>
                 <a:cs typeface="Poppins" pitchFamily="34" charset="-120"/>
               </a:rPr>
-              <a:t>against an 89% pace mark. This week's extract (14–20 Sep) added $38k gross — Jasmine +$27k, Bradford +$5k, Bjorn +$4k; the prior (7–13 Sep) week's $38k closed the skipped WC 7 Sep deck.</a:t>
+              <a:t>against a 89% pace mark. The 14–20 Sep 2026 extract added $38k gross — the biggest week of the quarter — but $102k of it is one Corporate account (Solotel) booked to Jasmine, who jumps to 115% of target.</a:t>
             </a:r>
             <a:endParaRPr lang="en-US" sz="900" dirty="0"/>
           </a:p>
@@ -38427,7 +38427,7 @@
                 <a:ea typeface="Poppins" pitchFamily="34" charset="-122"/>
                 <a:cs typeface="Poppins" pitchFamily="34" charset="-120"/>
               </a:rPr>
-              <a:t>Watch the discounts: </a:t>
+              <a:t>Discounts eased in proportion: </a:t>
             </a:r>
             <a:pPr indent="0" marL="0">
               <a:spcAft>
@@ -38444,7 +38444,7 @@
                 <a:ea typeface="Poppins" pitchFamily="34" charset="-122"/>
                 <a:cs typeface="Poppins" pitchFamily="34" charset="-120"/>
               </a:rPr>
-              <a:t>hardware discounts ran -$10.2k this week (-$10.0k on Jasmine's deals) vs -$2.2k last week — gross $37.6k nets to $27.4k.</a:t>
+              <a:t>hardware discounts ran -$8.4k on $115.6k gross (7%) against -$10.2k on $37.6k (27%) last week. Net hardware for the week is $107.2k.</a:t>
             </a:r>
             <a:endParaRPr lang="en-US" sz="900" dirty="0"/>
           </a:p>
@@ -38475,7 +38475,7 @@
                 <a:ea typeface="Poppins" pitchFamily="34" charset="-122"/>
                 <a:cs typeface="Poppins" pitchFamily="34" charset="-120"/>
               </a:rPr>
-              <a:t>New MRR is now live — and behind. </a:t>
+              <a:t>New MRR was not refreshed this week. </a:t>
             </a:r>
             <a:pPr indent="0" marL="0">
               <a:spcAft>
@@ -38492,7 +38492,7 @@
                 <a:ea typeface="Poppins" pitchFamily="34" charset="-122"/>
                 <a:cs typeface="Poppins" pitchFamily="34" charset="-120"/>
               </a:rPr>
-              <a:t>The movement register has rerun: $12,129 invoiced this quarter (43% of the $28k OKR2) against an 89% pace mark, with only $139 added in the reporting week. Bjorn leads on $4.4k (89% of target); Jasmine sits at 27%.</a:t>
+              <a:t>It is held at $12,129 (43% of the $28k OKR2) as at 20 Sep, against a 89% pace mark. The Sysnet extract's own subscription line moved +$592, which is a different measure and is not carried into MRR.</a:t>
             </a:r>
             <a:endParaRPr lang="en-US" sz="900" dirty="0"/>
           </a:p>
@@ -38526,7 +38526,7 @@
                 <a:ea typeface="Poppins" pitchFamily="34" charset="-122"/>
                 <a:cs typeface="Poppins" pitchFamily="34" charset="-120"/>
               </a:rPr>
-              <a:t>HW = commissionable only, gross of discounts · attainment = invoiced, never closed-won · pace = day 82 of 92 in Q3.</a:t>
+              <a:t>HW = commissionable only, gross of discounts · attainment = invoiced, never closed-won · pace = day 82 of 92 in Q3 (Jul–Sep) at week end 20 Sep.</a:t>
             </a:r>
             <a:endParaRPr lang="en-US" sz="900" dirty="0"/>
           </a:p>
@@ -48906,7 +48906,7 @@
         </p:nvSpPr>
         <p:spPr>
           <a:xfrm>
-            <a:off x="7379208" y="2926080"/>
+            <a:off x="7379208" y="2907792"/>
             <a:ext cx="1371600" cy="173736"/>
           </a:xfrm>
           <a:prstGeom prst="rect">
@@ -48945,7 +48945,7 @@
         </p:nvSpPr>
         <p:spPr>
           <a:xfrm>
-            <a:off x="8823960" y="2983687"/>
+            <a:off x="8823960" y="2964942"/>
             <a:ext cx="1371600" cy="59436"/>
           </a:xfrm>
           <a:prstGeom prst="roundRect">
@@ -48967,7 +48967,7 @@
         </p:nvSpPr>
         <p:spPr>
           <a:xfrm>
-            <a:off x="8823960" y="2983687"/>
+            <a:off x="8823960" y="2964942"/>
             <a:ext cx="1371600" cy="59436"/>
           </a:xfrm>
           <a:prstGeom prst="roundRect">
@@ -48989,7 +48989,7 @@
         </p:nvSpPr>
         <p:spPr>
           <a:xfrm>
-            <a:off x="10287000" y="2926080"/>
+            <a:off x="10287000" y="2907792"/>
             <a:ext cx="640080" cy="173736"/>
           </a:xfrm>
           <a:prstGeom prst="rect">
@@ -49028,7 +49028,7 @@
         </p:nvSpPr>
         <p:spPr>
           <a:xfrm>
-            <a:off x="10972800" y="2926080"/>
+            <a:off x="10972800" y="2907792"/>
             <a:ext cx="603504" cy="173736"/>
           </a:xfrm>
           <a:prstGeom prst="rect">
@@ -49067,7 +49067,7 @@
         </p:nvSpPr>
         <p:spPr>
           <a:xfrm>
-            <a:off x="7379208" y="3099816"/>
+            <a:off x="7379208" y="3081528"/>
             <a:ext cx="1371600" cy="173736"/>
           </a:xfrm>
           <a:prstGeom prst="rect">
@@ -49106,7 +49106,7 @@
         </p:nvSpPr>
         <p:spPr>
           <a:xfrm>
-            <a:off x="8823960" y="3157423"/>
+            <a:off x="8823960" y="3138678"/>
             <a:ext cx="1371600" cy="59436"/>
           </a:xfrm>
           <a:prstGeom prst="roundRect">
@@ -49128,7 +49128,7 @@
         </p:nvSpPr>
         <p:spPr>
           <a:xfrm>
-            <a:off x="8823960" y="3157423"/>
+            <a:off x="8823960" y="3138678"/>
             <a:ext cx="45720" cy="59436"/>
           </a:xfrm>
           <a:prstGeom prst="roundRect">
@@ -49150,7 +49150,7 @@
         </p:nvSpPr>
         <p:spPr>
           <a:xfrm>
-            <a:off x="10287000" y="3099816"/>
+            <a:off x="10287000" y="3081528"/>
             <a:ext cx="640080" cy="173736"/>
           </a:xfrm>
           <a:prstGeom prst="rect">
@@ -49189,7 +49189,7 @@
         </p:nvSpPr>
         <p:spPr>
           <a:xfrm>
-            <a:off x="10972800" y="3099816"/>
+            <a:off x="10972800" y="3081528"/>
             <a:ext cx="603504" cy="173736"/>
           </a:xfrm>
           <a:prstGeom prst="rect">
@@ -49228,7 +49228,7 @@
         </p:nvSpPr>
         <p:spPr>
           <a:xfrm>
-            <a:off x="7379208" y="3273552"/>
+            <a:off x="7379208" y="3255264"/>
             <a:ext cx="1371600" cy="173736"/>
           </a:xfrm>
           <a:prstGeom prst="rect">
@@ -49267,7 +49267,7 @@
         </p:nvSpPr>
         <p:spPr>
           <a:xfrm>
-            <a:off x="8823960" y="3331159"/>
+            <a:off x="8823960" y="3312414"/>
             <a:ext cx="1371600" cy="59436"/>
           </a:xfrm>
           <a:prstGeom prst="roundRect">
@@ -49289,7 +49289,7 @@
         </p:nvSpPr>
         <p:spPr>
           <a:xfrm>
-            <a:off x="10287000" y="3273552"/>
+            <a:off x="10287000" y="3255264"/>
             <a:ext cx="640080" cy="173736"/>
           </a:xfrm>
           <a:prstGeom prst="rect">
@@ -49328,7 +49328,7 @@
         </p:nvSpPr>
         <p:spPr>
           <a:xfrm>
-            <a:off x="10972800" y="3273552"/>
+            <a:off x="10972800" y="3255264"/>
             <a:ext cx="603504" cy="173736"/>
           </a:xfrm>
           <a:prstGeom prst="rect">
@@ -49367,7 +49367,7 @@
         </p:nvSpPr>
         <p:spPr>
           <a:xfrm>
-            <a:off x="7379208" y="3447288"/>
+            <a:off x="7379208" y="3429000"/>
             <a:ext cx="1371600" cy="173736"/>
           </a:xfrm>
           <a:prstGeom prst="rect">
@@ -49406,7 +49406,7 @@
         </p:nvSpPr>
         <p:spPr>
           <a:xfrm>
-            <a:off x="8823960" y="3504895"/>
+            <a:off x="8823960" y="3486150"/>
             <a:ext cx="1371600" cy="59436"/>
           </a:xfrm>
           <a:prstGeom prst="roundRect">
@@ -49428,7 +49428,7 @@
         </p:nvSpPr>
         <p:spPr>
           <a:xfrm>
-            <a:off x="10287000" y="3447288"/>
+            <a:off x="10287000" y="3429000"/>
             <a:ext cx="640080" cy="173736"/>
           </a:xfrm>
           <a:prstGeom prst="rect">
@@ -49467,7 +49467,7 @@
         </p:nvSpPr>
         <p:spPr>
           <a:xfrm>
-            <a:off x="10972800" y="3447288"/>
+            <a:off x="10972800" y="3429000"/>
             <a:ext cx="603504" cy="173736"/>
           </a:xfrm>
           <a:prstGeom prst="rect">
@@ -49506,7 +49506,7 @@
         </p:nvSpPr>
         <p:spPr>
           <a:xfrm>
-            <a:off x="7379208" y="3621024"/>
+            <a:off x="7379208" y="3602736"/>
             <a:ext cx="1371600" cy="173736"/>
           </a:xfrm>
           <a:prstGeom prst="rect">
@@ -49545,7 +49545,7 @@
         </p:nvSpPr>
         <p:spPr>
           <a:xfrm>
-            <a:off x="8823960" y="3678631"/>
+            <a:off x="8823960" y="3659886"/>
             <a:ext cx="1371600" cy="59436"/>
           </a:xfrm>
           <a:prstGeom prst="roundRect">
@@ -49567,7 +49567,7 @@
         </p:nvSpPr>
         <p:spPr>
           <a:xfrm>
-            <a:off x="10287000" y="3621024"/>
+            <a:off x="10287000" y="3602736"/>
             <a:ext cx="640080" cy="173736"/>
           </a:xfrm>
           <a:prstGeom prst="rect">
@@ -49606,7 +49606,7 @@
         </p:nvSpPr>
         <p:spPr>
           <a:xfrm>
-            <a:off x="10972800" y="3621024"/>
+            <a:off x="10972800" y="3602736"/>
             <a:ext cx="603504" cy="173736"/>
           </a:xfrm>
           <a:prstGeom prst="rect">
@@ -49645,7 +49645,7 @@
         </p:nvSpPr>
         <p:spPr>
           <a:xfrm>
-            <a:off x="7379208" y="3822192"/>
+            <a:off x="7379208" y="3803904"/>
             <a:ext cx="4197096" cy="10973"/>
           </a:xfrm>
           <a:prstGeom prst="rect">
@@ -49665,7 +49665,7 @@
         </p:nvSpPr>
         <p:spPr>
           <a:xfrm>
-            <a:off x="7379208" y="3849624"/>
+            <a:off x="7379208" y="3831336"/>
             <a:ext cx="1371600" cy="182880"/>
           </a:xfrm>
           <a:prstGeom prst="rect">
@@ -49704,7 +49704,7 @@
         </p:nvSpPr>
         <p:spPr>
           <a:xfrm>
-            <a:off x="8823960" y="3849624"/>
+            <a:off x="8823960" y="3831336"/>
             <a:ext cx="1371600" cy="182880"/>
           </a:xfrm>
           <a:prstGeom prst="rect">
@@ -49743,7 +49743,7 @@
         </p:nvSpPr>
         <p:spPr>
           <a:xfrm>
-            <a:off x="10287000" y="3849624"/>
+            <a:off x="10287000" y="3831336"/>
             <a:ext cx="640080" cy="182880"/>
           </a:xfrm>
           <a:prstGeom prst="rect">
@@ -49782,7 +49782,7 @@
         </p:nvSpPr>
         <p:spPr>
           <a:xfrm>
-            <a:off x="10972800" y="3849624"/>
+            <a:off x="10972800" y="3831336"/>
             <a:ext cx="603504" cy="182880"/>
           </a:xfrm>
           <a:prstGeom prst="rect">
@@ -49976,7 +49976,7 @@
                 <a:ea typeface="Poppins" pitchFamily="34" charset="-122"/>
                 <a:cs typeface="Poppins" pitchFamily="34" charset="-120"/>
               </a:rPr>
-              <a:t>One person carries almost the entire logged total. </a:t>
+              <a:t>Two people carry 95% of the logged total. </a:t>
             </a:r>
             <a:pPr indent="0" marL="0">
               <a:spcAft>
@@ -49993,7 +49993,7 @@
                 <a:ea typeface="Poppins" pitchFamily="34" charset="-122"/>
                 <a:cs typeface="Poppins" pitchFamily="34" charset="-120"/>
               </a:rPr>
-              <a:t>Rhys Woolcock 13.82h (36.4%) is 86% of the hours; Gregory, Isayah and Joshua logged under 2h each and 5 PS members logged nothing at all.</a:t>
+              <a:t>Rhys Woolcock 13.82h (36.4% of a 38h week) and Gregory St Clare-Hobbs 1.50h (3.9%); 5 PS members logged nothing at all.</a:t>
             </a:r>
             <a:endParaRPr lang="en-US" sz="900" dirty="0"/>
           </a:p>
@@ -50041,7 +50041,7 @@
                 <a:ea typeface="Poppins" pitchFamily="34" charset="-122"/>
                 <a:cs typeface="Poppins" pitchFamily="34" charset="-120"/>
               </a:rPr>
-              <a:t>64 PS cases opened this week; Tech carries 99.6% of logged time. Median time to close since 8 Sep: Tech 0.6 d.</a:t>
+              <a:t>64 PS cases opened this week; Tech carries 99.6% of logged time. Median time to close on PS tickets created and closed since 8 Sep: Tech 0.6 d · Integrations 1.0 d · Training 1.5 d · Onboarding no closes yet.</a:t>
             </a:r>
             <a:endParaRPr lang="en-US" sz="900" dirty="0"/>
           </a:p>
@@ -53864,7 +53864,7 @@
                 <a:ea typeface="Poppins" pitchFamily="34" charset="-122"/>
                 <a:cs typeface="Poppins" pitchFamily="34" charset="-120"/>
               </a:rPr>
-              <a:t>Churn is now read live from the movement register: $1.17M of ARR across 262 logos since 2025, plus $235k lost to contraction on accounts that stayed. Q3 net MRR is -$6.3k — new business is not covering it.</a:t>
+              <a:t>Churn reads from the movement register (live): $1.17M of ARR across 262 logos since 2025, plus $235k lost to contraction on accounts that stayed. Q3 net MRR is -$6.3k — new business is not covering it.</a:t>
             </a:r>
             <a:endParaRPr lang="en-US" sz="850" dirty="0"/>
           </a:p>
